--- a/downloads/presentations/modules/gov-330.pptx
+++ b/downloads/presentations/modules/gov-330.pptx
@@ -3427,13 +3427,11 @@
             </a:avLst>
           </a:prstGeom>
           <a:solidFill>
-            <a:srgbClr val="FFFFFF">
-              <a:alpha val="88000"/>
-            </a:srgbClr>
+            <a:srgbClr val="FFFFFF"/>
           </a:solidFill>
           <a:ln w="12700">
             <a:solidFill>
-              <a:srgbClr val="D6E8F2"/>
+              <a:srgbClr val="B9D7E6"/>
             </a:solidFill>
             <a:prstDash val="solid"/>
           </a:ln>
@@ -3441,190 +3439,112 @@
       </p:sp>
       <p:sp>
         <p:nvSpPr>
-          <p:cNvPr id="14" name="Shape 12"/>
-          <p:cNvSpPr/>
-          <p:nvPr/>
-        </p:nvSpPr>
-        <p:spPr>
-          <a:xfrm>
-            <a:off x="7891272" y="3108960"/>
-            <a:ext cx="566928" cy="566928"/>
-          </a:xfrm>
-          <a:prstGeom prst="ellipse">
-            <a:avLst/>
-          </a:prstGeom>
-          <a:solidFill>
-            <a:srgbClr val="0068B7"/>
-          </a:solidFill>
-          <a:ln w="12700">
-            <a:solidFill>
-              <a:srgbClr val="0068B7"/>
-            </a:solidFill>
-            <a:prstDash val="solid"/>
-          </a:ln>
-        </p:spPr>
-      </p:sp>
-      <p:sp>
-        <p:nvSpPr>
-          <p:cNvPr id="15" name="Shape 13"/>
-          <p:cNvSpPr/>
-          <p:nvPr/>
-        </p:nvSpPr>
-        <p:spPr>
-          <a:xfrm>
-            <a:off x="10287000" y="3108960"/>
-            <a:ext cx="566928" cy="566928"/>
-          </a:xfrm>
-          <a:prstGeom prst="ellipse">
-            <a:avLst/>
-          </a:prstGeom>
-          <a:solidFill>
-            <a:srgbClr val="2F8A28"/>
-          </a:solidFill>
-          <a:ln w="12700">
-            <a:solidFill>
-              <a:srgbClr val="2F8A28"/>
-            </a:solidFill>
-            <a:prstDash val="solid"/>
-          </a:ln>
-        </p:spPr>
+          <p:cNvPr id="14" name="Text 12"/>
+          <p:cNvSpPr/>
+          <p:nvPr/>
+        </p:nvSpPr>
+        <p:spPr>
+          <a:xfrm>
+            <a:off x="7799832" y="2935224"/>
+            <a:ext cx="3145536" cy="256032"/>
+          </a:xfrm>
+          <a:prstGeom prst="rect">
+            <a:avLst/>
+          </a:prstGeom>
+          <a:noFill/>
+          <a:ln/>
+        </p:spPr>
+        <p:txBody>
+          <a:bodyPr wrap="square" lIns="0" tIns="0" rIns="0" bIns="0" rtlCol="0" anchor="ctr"/>
+          <a:lstStyle/>
+          <a:p>
+            <a:pPr indent="0" marL="0">
+              <a:buNone/>
+            </a:pPr>
+            <a:r>
+              <a:rPr lang="en-US" sz="1300" b="1" dirty="0">
+                <a:solidFill>
+                  <a:srgbClr val="0068B7"/>
+                </a:solidFill>
+                <a:latin typeface="Aptos" pitchFamily="34" charset="0"/>
+                <a:ea typeface="Aptos" pitchFamily="34" charset="-122"/>
+                <a:cs typeface="Aptos" pitchFamily="34" charset="-120"/>
+              </a:rPr>
+              <a:t>Concept checkpoints</a:t>
+            </a:r>
+            <a:endParaRPr lang="en-US" sz="1300" dirty="0"/>
+          </a:p>
+        </p:txBody>
+      </p:sp>
+      <p:sp>
+        <p:nvSpPr>
+          <p:cNvPr id="15" name="Text 13"/>
+          <p:cNvSpPr/>
+          <p:nvPr/>
+        </p:nvSpPr>
+        <p:spPr>
+          <a:xfrm>
+            <a:off x="7818120" y="3300984"/>
+            <a:ext cx="3090672" cy="877824"/>
+          </a:xfrm>
+          <a:prstGeom prst="rect">
+            <a:avLst/>
+          </a:prstGeom>
+          <a:noFill/>
+          <a:ln/>
+        </p:spPr>
+        <p:txBody>
+          <a:bodyPr wrap="square" lIns="254" tIns="254" rIns="254" bIns="254" rtlCol="0" anchor="t">
+            <a:normAutofit/>
+          </a:bodyPr>
+          <a:lstStyle/>
+          <a:p>
+            <a:r>
+              <a:rPr lang="en-US" sz="1380" dirty="0">
+                <a:solidFill>
+                  <a:srgbClr val="17364A"/>
+                </a:solidFill>
+                <a:latin typeface="Aptos" pitchFamily="34" charset="0"/>
+                <a:ea typeface="Aptos" pitchFamily="34" charset="-122"/>
+                <a:cs typeface="Aptos" pitchFamily="34" charset="-120"/>
+              </a:rPr>
+              <a:t>Data governance is the set of decision rights, roles, policies, standards, and practices.</a:t>
+            </a:r>
+            <a:endParaRPr lang="en-US" sz="1380" dirty="0"/>
+          </a:p>
+          <a:p>
+            <a:r>
+              <a:rPr lang="en-US" sz="1380" dirty="0">
+                <a:solidFill>
+                  <a:srgbClr val="17364A"/>
+                </a:solidFill>
+                <a:latin typeface="Aptos" pitchFamily="34" charset="0"/>
+                <a:ea typeface="Aptos" pitchFamily="34" charset="-122"/>
+                <a:cs typeface="Aptos" pitchFamily="34" charset="-120"/>
+              </a:rPr>
+              <a:t>AI-ready data depend on governance because data must be understandable, authorized, high.</a:t>
+            </a:r>
+            <a:endParaRPr lang="en-US" sz="1380" dirty="0"/>
+          </a:p>
+          <a:p>
+            <a:r>
+              <a:rPr lang="en-US" sz="1380" dirty="0">
+                <a:solidFill>
+                  <a:srgbClr val="17364A"/>
+                </a:solidFill>
+                <a:latin typeface="Aptos" pitchFamily="34" charset="0"/>
+                <a:ea typeface="Aptos" pitchFamily="34" charset="-122"/>
+                <a:cs typeface="Aptos" pitchFamily="34" charset="-120"/>
+              </a:rPr>
+              <a:t>Data stewardship assigns responsibility for data quality, definitions, metadata, access,.</a:t>
+            </a:r>
+            <a:endParaRPr lang="en-US" sz="1380" dirty="0"/>
+          </a:p>
+        </p:txBody>
       </p:sp>
       <p:sp>
         <p:nvSpPr>
           <p:cNvPr id="16" name="Shape 14"/>
-          <p:cNvSpPr/>
-          <p:nvPr/>
-        </p:nvSpPr>
-        <p:spPr>
-          <a:xfrm>
-            <a:off x="9089136" y="3456432"/>
-            <a:ext cx="566928" cy="566928"/>
-          </a:xfrm>
-          <a:prstGeom prst="ellipse">
-            <a:avLst/>
-          </a:prstGeom>
-          <a:solidFill>
-            <a:srgbClr val="6A4CA3"/>
-          </a:solidFill>
-          <a:ln w="12700">
-            <a:solidFill>
-              <a:srgbClr val="6A4CA3"/>
-            </a:solidFill>
-            <a:prstDash val="solid"/>
-          </a:ln>
-        </p:spPr>
-      </p:sp>
-      <p:sp>
-        <p:nvSpPr>
-          <p:cNvPr id="17" name="Shape 15"/>
-          <p:cNvSpPr/>
-          <p:nvPr/>
-        </p:nvSpPr>
-        <p:spPr>
-          <a:xfrm>
-            <a:off x="8385048" y="3419856"/>
-            <a:ext cx="1975104" cy="0"/>
-          </a:xfrm>
-          <a:prstGeom prst="line">
-            <a:avLst/>
-          </a:prstGeom>
-          <a:noFill/>
-          <a:ln w="25400">
-            <a:solidFill>
-              <a:srgbClr val="8ABBD8"/>
-            </a:solidFill>
-            <a:prstDash val="solid"/>
-          </a:ln>
-        </p:spPr>
-      </p:sp>
-      <p:sp>
-        <p:nvSpPr>
-          <p:cNvPr id="18" name="Shape 16"/>
-          <p:cNvSpPr/>
-          <p:nvPr/>
-        </p:nvSpPr>
-        <p:spPr>
-          <a:xfrm>
-            <a:off x="8202168" y="3630168"/>
-            <a:ext cx="1170432" cy="118872"/>
-          </a:xfrm>
-          <a:prstGeom prst="line">
-            <a:avLst/>
-          </a:prstGeom>
-          <a:noFill/>
-          <a:ln w="25400">
-            <a:solidFill>
-              <a:srgbClr val="8ABBD8"/>
-            </a:solidFill>
-            <a:prstDash val="solid"/>
-          </a:ln>
-        </p:spPr>
-      </p:sp>
-      <p:sp>
-        <p:nvSpPr>
-          <p:cNvPr id="19" name="Shape 17"/>
-          <p:cNvSpPr/>
-          <p:nvPr/>
-        </p:nvSpPr>
-        <p:spPr>
-          <a:xfrm>
-            <a:off x="10543032" y="3630168"/>
-            <a:ext cx="-1170432" cy="118872"/>
-          </a:xfrm>
-          <a:prstGeom prst="line">
-            <a:avLst/>
-          </a:prstGeom>
-          <a:noFill/>
-          <a:ln w="25400">
-            <a:solidFill>
-              <a:srgbClr val="8ABBD8"/>
-            </a:solidFill>
-            <a:prstDash val="solid"/>
-          </a:ln>
-        </p:spPr>
-      </p:sp>
-      <p:sp>
-        <p:nvSpPr>
-          <p:cNvPr id="20" name="Text 18"/>
-          <p:cNvSpPr/>
-          <p:nvPr/>
-        </p:nvSpPr>
-        <p:spPr>
-          <a:xfrm>
-            <a:off x="7863840" y="4069080"/>
-            <a:ext cx="3017520" cy="164592"/>
-          </a:xfrm>
-          <a:prstGeom prst="rect">
-            <a:avLst/>
-          </a:prstGeom>
-          <a:noFill/>
-          <a:ln/>
-        </p:spPr>
-        <p:txBody>
-          <a:bodyPr wrap="square" lIns="0" tIns="0" rIns="0" bIns="0" rtlCol="0" anchor="ctr"/>
-          <a:lstStyle/>
-          <a:p>
-            <a:pPr algn="ctr" indent="0" marL="0">
-              <a:buNone/>
-            </a:pPr>
-            <a:r>
-              <a:rPr lang="en-US" sz="900" b="1" dirty="0">
-                <a:solidFill>
-                  <a:srgbClr val="003A63"/>
-                </a:solidFill>
-                <a:latin typeface="Aptos" pitchFamily="34" charset="0"/>
-                <a:ea typeface="Aptos" pitchFamily="34" charset="-122"/>
-                <a:cs typeface="Aptos" pitchFamily="34" charset="-120"/>
-              </a:rPr>
-              <a:t>Decision rights</a:t>
-            </a:r>
-            <a:endParaRPr lang="en-US" sz="900" dirty="0"/>
-          </a:p>
-        </p:txBody>
-      </p:sp>
-      <p:sp>
-        <p:nvSpPr>
-          <p:cNvPr id="21" name="Shape 19"/>
           <p:cNvSpPr/>
           <p:nvPr/>
         </p:nvSpPr>
@@ -3651,7 +3571,7 @@
       </p:sp>
       <p:sp>
         <p:nvSpPr>
-          <p:cNvPr id="22" name="Text 20"/>
+          <p:cNvPr id="17" name="Text 15"/>
           <p:cNvSpPr/>
           <p:nvPr/>
         </p:nvSpPr>
@@ -3690,7 +3610,7 @@
       </p:sp>
       <p:sp>
         <p:nvSpPr>
-          <p:cNvPr id="23" name="Text 21"/>
+          <p:cNvPr id="18" name="Text 16"/>
           <p:cNvSpPr/>
           <p:nvPr/>
         </p:nvSpPr>
@@ -4198,13 +4118,11 @@
             </a:avLst>
           </a:prstGeom>
           <a:solidFill>
-            <a:srgbClr val="FFFFFF">
-              <a:alpha val="88000"/>
-            </a:srgbClr>
+            <a:srgbClr val="FFFFFF"/>
           </a:solidFill>
           <a:ln w="12700">
             <a:solidFill>
-              <a:srgbClr val="D6E8F2"/>
+              <a:srgbClr val="B9D7E6"/>
             </a:solidFill>
             <a:prstDash val="solid"/>
           </a:ln>
@@ -4212,190 +4130,98 @@
       </p:sp>
       <p:sp>
         <p:nvSpPr>
-          <p:cNvPr id="14" name="Shape 12"/>
-          <p:cNvSpPr/>
-          <p:nvPr/>
-        </p:nvSpPr>
-        <p:spPr>
-          <a:xfrm>
-            <a:off x="7891272" y="3108960"/>
-            <a:ext cx="566928" cy="566928"/>
-          </a:xfrm>
-          <a:prstGeom prst="ellipse">
-            <a:avLst/>
-          </a:prstGeom>
-          <a:solidFill>
-            <a:srgbClr val="0068B7"/>
-          </a:solidFill>
-          <a:ln w="12700">
-            <a:solidFill>
-              <a:srgbClr val="0068B7"/>
-            </a:solidFill>
-            <a:prstDash val="solid"/>
-          </a:ln>
-        </p:spPr>
-      </p:sp>
-      <p:sp>
-        <p:nvSpPr>
-          <p:cNvPr id="15" name="Shape 13"/>
-          <p:cNvSpPr/>
-          <p:nvPr/>
-        </p:nvSpPr>
-        <p:spPr>
-          <a:xfrm>
-            <a:off x="10287000" y="3108960"/>
-            <a:ext cx="566928" cy="566928"/>
-          </a:xfrm>
-          <a:prstGeom prst="ellipse">
-            <a:avLst/>
-          </a:prstGeom>
-          <a:solidFill>
-            <a:srgbClr val="2F8A28"/>
-          </a:solidFill>
-          <a:ln w="12700">
-            <a:solidFill>
-              <a:srgbClr val="2F8A28"/>
-            </a:solidFill>
-            <a:prstDash val="solid"/>
-          </a:ln>
-        </p:spPr>
+          <p:cNvPr id="14" name="Text 12"/>
+          <p:cNvSpPr/>
+          <p:nvPr/>
+        </p:nvSpPr>
+        <p:spPr>
+          <a:xfrm>
+            <a:off x="7799832" y="2935224"/>
+            <a:ext cx="3145536" cy="256032"/>
+          </a:xfrm>
+          <a:prstGeom prst="rect">
+            <a:avLst/>
+          </a:prstGeom>
+          <a:noFill/>
+          <a:ln/>
+        </p:spPr>
+        <p:txBody>
+          <a:bodyPr wrap="square" lIns="0" tIns="0" rIns="0" bIns="0" rtlCol="0" anchor="ctr"/>
+          <a:lstStyle/>
+          <a:p>
+            <a:pPr indent="0" marL="0">
+              <a:buNone/>
+            </a:pPr>
+            <a:r>
+              <a:rPr lang="en-US" sz="1300" b="1" dirty="0">
+                <a:solidFill>
+                  <a:srgbClr val="0068B7"/>
+                </a:solidFill>
+                <a:latin typeface="Aptos" pitchFamily="34" charset="0"/>
+                <a:ea typeface="Aptos" pitchFamily="34" charset="-122"/>
+                <a:cs typeface="Aptos" pitchFamily="34" charset="-120"/>
+              </a:rPr>
+              <a:t>Concept checkpoints</a:t>
+            </a:r>
+            <a:endParaRPr lang="en-US" sz="1300" dirty="0"/>
+          </a:p>
+        </p:txBody>
+      </p:sp>
+      <p:sp>
+        <p:nvSpPr>
+          <p:cNvPr id="15" name="Text 13"/>
+          <p:cNvSpPr/>
+          <p:nvPr/>
+        </p:nvSpPr>
+        <p:spPr>
+          <a:xfrm>
+            <a:off x="7818120" y="3300984"/>
+            <a:ext cx="3090672" cy="877824"/>
+          </a:xfrm>
+          <a:prstGeom prst="rect">
+            <a:avLst/>
+          </a:prstGeom>
+          <a:noFill/>
+          <a:ln/>
+        </p:spPr>
+        <p:txBody>
+          <a:bodyPr wrap="square" lIns="254" tIns="254" rIns="254" bIns="254" rtlCol="0" anchor="t">
+            <a:normAutofit/>
+          </a:bodyPr>
+          <a:lstStyle/>
+          <a:p>
+            <a:r>
+              <a:rPr lang="en-US" sz="1380" dirty="0">
+                <a:solidFill>
+                  <a:srgbClr val="17364A"/>
+                </a:solidFill>
+                <a:latin typeface="Aptos" pitchFamily="34" charset="0"/>
+                <a:ea typeface="Aptos" pitchFamily="34" charset="-122"/>
+                <a:cs typeface="Aptos" pitchFamily="34" charset="-120"/>
+              </a:rPr>
+              <a:t>Data governance would clarify which datasets can be linked, which fields are.</a:t>
+            </a:r>
+            <a:endParaRPr lang="en-US" sz="1380" dirty="0"/>
+          </a:p>
+          <a:p>
+            <a:r>
+              <a:rPr lang="en-US" sz="1380" dirty="0">
+                <a:solidFill>
+                  <a:srgbClr val="17364A"/>
+                </a:solidFill>
+                <a:latin typeface="Aptos" pitchFamily="34" charset="0"/>
+                <a:ea typeface="Aptos" pitchFamily="34" charset="-122"/>
+                <a:cs typeface="Aptos" pitchFamily="34" charset="-120"/>
+              </a:rPr>
+              <a:t>Without governance, the model may appear technical while resting on unclear authority and.</a:t>
+            </a:r>
+            <a:endParaRPr lang="en-US" sz="1380" dirty="0"/>
+          </a:p>
+        </p:txBody>
       </p:sp>
       <p:sp>
         <p:nvSpPr>
           <p:cNvPr id="16" name="Shape 14"/>
-          <p:cNvSpPr/>
-          <p:nvPr/>
-        </p:nvSpPr>
-        <p:spPr>
-          <a:xfrm>
-            <a:off x="9089136" y="3456432"/>
-            <a:ext cx="566928" cy="566928"/>
-          </a:xfrm>
-          <a:prstGeom prst="ellipse">
-            <a:avLst/>
-          </a:prstGeom>
-          <a:solidFill>
-            <a:srgbClr val="6A4CA3"/>
-          </a:solidFill>
-          <a:ln w="12700">
-            <a:solidFill>
-              <a:srgbClr val="6A4CA3"/>
-            </a:solidFill>
-            <a:prstDash val="solid"/>
-          </a:ln>
-        </p:spPr>
-      </p:sp>
-      <p:sp>
-        <p:nvSpPr>
-          <p:cNvPr id="17" name="Shape 15"/>
-          <p:cNvSpPr/>
-          <p:nvPr/>
-        </p:nvSpPr>
-        <p:spPr>
-          <a:xfrm>
-            <a:off x="8385048" y="3419856"/>
-            <a:ext cx="1975104" cy="0"/>
-          </a:xfrm>
-          <a:prstGeom prst="line">
-            <a:avLst/>
-          </a:prstGeom>
-          <a:noFill/>
-          <a:ln w="25400">
-            <a:solidFill>
-              <a:srgbClr val="8ABBD8"/>
-            </a:solidFill>
-            <a:prstDash val="solid"/>
-          </a:ln>
-        </p:spPr>
-      </p:sp>
-      <p:sp>
-        <p:nvSpPr>
-          <p:cNvPr id="18" name="Shape 16"/>
-          <p:cNvSpPr/>
-          <p:nvPr/>
-        </p:nvSpPr>
-        <p:spPr>
-          <a:xfrm>
-            <a:off x="8202168" y="3630168"/>
-            <a:ext cx="1170432" cy="118872"/>
-          </a:xfrm>
-          <a:prstGeom prst="line">
-            <a:avLst/>
-          </a:prstGeom>
-          <a:noFill/>
-          <a:ln w="25400">
-            <a:solidFill>
-              <a:srgbClr val="8ABBD8"/>
-            </a:solidFill>
-            <a:prstDash val="solid"/>
-          </a:ln>
-        </p:spPr>
-      </p:sp>
-      <p:sp>
-        <p:nvSpPr>
-          <p:cNvPr id="19" name="Shape 17"/>
-          <p:cNvSpPr/>
-          <p:nvPr/>
-        </p:nvSpPr>
-        <p:spPr>
-          <a:xfrm>
-            <a:off x="10543032" y="3630168"/>
-            <a:ext cx="-1170432" cy="118872"/>
-          </a:xfrm>
-          <a:prstGeom prst="line">
-            <a:avLst/>
-          </a:prstGeom>
-          <a:noFill/>
-          <a:ln w="25400">
-            <a:solidFill>
-              <a:srgbClr val="8ABBD8"/>
-            </a:solidFill>
-            <a:prstDash val="solid"/>
-          </a:ln>
-        </p:spPr>
-      </p:sp>
-      <p:sp>
-        <p:nvSpPr>
-          <p:cNvPr id="20" name="Text 18"/>
-          <p:cNvSpPr/>
-          <p:nvPr/>
-        </p:nvSpPr>
-        <p:spPr>
-          <a:xfrm>
-            <a:off x="7863840" y="4069080"/>
-            <a:ext cx="3017520" cy="164592"/>
-          </a:xfrm>
-          <a:prstGeom prst="rect">
-            <a:avLst/>
-          </a:prstGeom>
-          <a:noFill/>
-          <a:ln/>
-        </p:spPr>
-        <p:txBody>
-          <a:bodyPr wrap="square" lIns="0" tIns="0" rIns="0" bIns="0" rtlCol="0" anchor="ctr"/>
-          <a:lstStyle/>
-          <a:p>
-            <a:pPr algn="ctr" indent="0" marL="0">
-              <a:buNone/>
-            </a:pPr>
-            <a:r>
-              <a:rPr lang="en-US" sz="900" b="1" dirty="0">
-                <a:solidFill>
-                  <a:srgbClr val="003A63"/>
-                </a:solidFill>
-                <a:latin typeface="Aptos" pitchFamily="34" charset="0"/>
-                <a:ea typeface="Aptos" pitchFamily="34" charset="-122"/>
-                <a:cs typeface="Aptos" pitchFamily="34" charset="-120"/>
-              </a:rPr>
-              <a:t>Decision rights</a:t>
-            </a:r>
-            <a:endParaRPr lang="en-US" sz="900" dirty="0"/>
-          </a:p>
-        </p:txBody>
-      </p:sp>
-      <p:sp>
-        <p:nvSpPr>
-          <p:cNvPr id="21" name="Shape 19"/>
           <p:cNvSpPr/>
           <p:nvPr/>
         </p:nvSpPr>
@@ -4422,7 +4248,7 @@
       </p:sp>
       <p:sp>
         <p:nvSpPr>
-          <p:cNvPr id="22" name="Text 20"/>
+          <p:cNvPr id="17" name="Text 15"/>
           <p:cNvSpPr/>
           <p:nvPr/>
         </p:nvSpPr>
@@ -4461,7 +4287,7 @@
       </p:sp>
       <p:sp>
         <p:nvSpPr>
-          <p:cNvPr id="23" name="Text 21"/>
+          <p:cNvPr id="18" name="Text 16"/>
           <p:cNvSpPr/>
           <p:nvPr/>
         </p:nvSpPr>
@@ -4969,13 +4795,11 @@
             </a:avLst>
           </a:prstGeom>
           <a:solidFill>
-            <a:srgbClr val="FFFFFF">
-              <a:alpha val="88000"/>
-            </a:srgbClr>
+            <a:srgbClr val="FFFFFF"/>
           </a:solidFill>
           <a:ln w="12700">
             <a:solidFill>
-              <a:srgbClr val="D6E8F2"/>
+              <a:srgbClr val="B9D7E6"/>
             </a:solidFill>
             <a:prstDash val="solid"/>
           </a:ln>
@@ -4983,190 +4807,112 @@
       </p:sp>
       <p:sp>
         <p:nvSpPr>
-          <p:cNvPr id="14" name="Shape 12"/>
-          <p:cNvSpPr/>
-          <p:nvPr/>
-        </p:nvSpPr>
-        <p:spPr>
-          <a:xfrm>
-            <a:off x="7891272" y="3108960"/>
-            <a:ext cx="566928" cy="566928"/>
-          </a:xfrm>
-          <a:prstGeom prst="ellipse">
-            <a:avLst/>
-          </a:prstGeom>
-          <a:solidFill>
-            <a:srgbClr val="0068B7"/>
-          </a:solidFill>
-          <a:ln w="12700">
-            <a:solidFill>
-              <a:srgbClr val="0068B7"/>
-            </a:solidFill>
-            <a:prstDash val="solid"/>
-          </a:ln>
-        </p:spPr>
-      </p:sp>
-      <p:sp>
-        <p:nvSpPr>
-          <p:cNvPr id="15" name="Shape 13"/>
-          <p:cNvSpPr/>
-          <p:nvPr/>
-        </p:nvSpPr>
-        <p:spPr>
-          <a:xfrm>
-            <a:off x="10287000" y="3108960"/>
-            <a:ext cx="566928" cy="566928"/>
-          </a:xfrm>
-          <a:prstGeom prst="ellipse">
-            <a:avLst/>
-          </a:prstGeom>
-          <a:solidFill>
-            <a:srgbClr val="2F8A28"/>
-          </a:solidFill>
-          <a:ln w="12700">
-            <a:solidFill>
-              <a:srgbClr val="2F8A28"/>
-            </a:solidFill>
-            <a:prstDash val="solid"/>
-          </a:ln>
-        </p:spPr>
+          <p:cNvPr id="14" name="Text 12"/>
+          <p:cNvSpPr/>
+          <p:nvPr/>
+        </p:nvSpPr>
+        <p:spPr>
+          <a:xfrm>
+            <a:off x="7799832" y="2935224"/>
+            <a:ext cx="3145536" cy="256032"/>
+          </a:xfrm>
+          <a:prstGeom prst="rect">
+            <a:avLst/>
+          </a:prstGeom>
+          <a:noFill/>
+          <a:ln/>
+        </p:spPr>
+        <p:txBody>
+          <a:bodyPr wrap="square" lIns="0" tIns="0" rIns="0" bIns="0" rtlCol="0" anchor="ctr"/>
+          <a:lstStyle/>
+          <a:p>
+            <a:pPr indent="0" marL="0">
+              <a:buNone/>
+            </a:pPr>
+            <a:r>
+              <a:rPr lang="en-US" sz="1300" b="1" dirty="0">
+                <a:solidFill>
+                  <a:srgbClr val="0068B7"/>
+                </a:solidFill>
+                <a:latin typeface="Aptos" pitchFamily="34" charset="0"/>
+                <a:ea typeface="Aptos" pitchFamily="34" charset="-122"/>
+                <a:cs typeface="Aptos" pitchFamily="34" charset="-120"/>
+              </a:rPr>
+              <a:t>Concept checkpoints</a:t>
+            </a:r>
+            <a:endParaRPr lang="en-US" sz="1300" dirty="0"/>
+          </a:p>
+        </p:txBody>
+      </p:sp>
+      <p:sp>
+        <p:nvSpPr>
+          <p:cNvPr id="15" name="Text 13"/>
+          <p:cNvSpPr/>
+          <p:nvPr/>
+        </p:nvSpPr>
+        <p:spPr>
+          <a:xfrm>
+            <a:off x="7818120" y="3300984"/>
+            <a:ext cx="3090672" cy="877824"/>
+          </a:xfrm>
+          <a:prstGeom prst="rect">
+            <a:avLst/>
+          </a:prstGeom>
+          <a:noFill/>
+          <a:ln/>
+        </p:spPr>
+        <p:txBody>
+          <a:bodyPr wrap="square" lIns="254" tIns="254" rIns="254" bIns="254" rtlCol="0" anchor="t">
+            <a:normAutofit/>
+          </a:bodyPr>
+          <a:lstStyle/>
+          <a:p>
+            <a:r>
+              <a:rPr lang="en-US" sz="1380" dirty="0">
+                <a:solidFill>
+                  <a:srgbClr val="17364A"/>
+                </a:solidFill>
+                <a:latin typeface="Aptos" pitchFamily="34" charset="0"/>
+                <a:ea typeface="Aptos" pitchFamily="34" charset="-122"/>
+                <a:cs typeface="Aptos" pitchFamily="34" charset="-120"/>
+              </a:rPr>
+              <a:t>Agencies should know what datasets exist, who stewards them, what they contain, how often.</a:t>
+            </a:r>
+            <a:endParaRPr lang="en-US" sz="1380" dirty="0"/>
+          </a:p>
+          <a:p>
+            <a:r>
+              <a:rPr lang="en-US" sz="1380" dirty="0">
+                <a:solidFill>
+                  <a:srgbClr val="17364A"/>
+                </a:solidFill>
+                <a:latin typeface="Aptos" pitchFamily="34" charset="0"/>
+                <a:ea typeface="Aptos" pitchFamily="34" charset="-122"/>
+                <a:cs typeface="Aptos" pitchFamily="34" charset="-120"/>
+              </a:rPr>
+              <a:t>A data catalog can make this information visible to program, analytics, informatics, and.</a:t>
+            </a:r>
+            <a:endParaRPr lang="en-US" sz="1380" dirty="0"/>
+          </a:p>
+          <a:p>
+            <a:r>
+              <a:rPr lang="en-US" sz="1380" dirty="0">
+                <a:solidFill>
+                  <a:srgbClr val="17364A"/>
+                </a:solidFill>
+                <a:latin typeface="Aptos" pitchFamily="34" charset="0"/>
+                <a:ea typeface="Aptos" pitchFamily="34" charset="-122"/>
+                <a:cs typeface="Aptos" pitchFamily="34" charset="-120"/>
+              </a:rPr>
+              <a:t>Governance must also address data lineage and transformation.</a:t>
+            </a:r>
+            <a:endParaRPr lang="en-US" sz="1380" dirty="0"/>
+          </a:p>
+        </p:txBody>
       </p:sp>
       <p:sp>
         <p:nvSpPr>
           <p:cNvPr id="16" name="Shape 14"/>
-          <p:cNvSpPr/>
-          <p:nvPr/>
-        </p:nvSpPr>
-        <p:spPr>
-          <a:xfrm>
-            <a:off x="9089136" y="3456432"/>
-            <a:ext cx="566928" cy="566928"/>
-          </a:xfrm>
-          <a:prstGeom prst="ellipse">
-            <a:avLst/>
-          </a:prstGeom>
-          <a:solidFill>
-            <a:srgbClr val="6A4CA3"/>
-          </a:solidFill>
-          <a:ln w="12700">
-            <a:solidFill>
-              <a:srgbClr val="6A4CA3"/>
-            </a:solidFill>
-            <a:prstDash val="solid"/>
-          </a:ln>
-        </p:spPr>
-      </p:sp>
-      <p:sp>
-        <p:nvSpPr>
-          <p:cNvPr id="17" name="Shape 15"/>
-          <p:cNvSpPr/>
-          <p:nvPr/>
-        </p:nvSpPr>
-        <p:spPr>
-          <a:xfrm>
-            <a:off x="8385048" y="3419856"/>
-            <a:ext cx="1975104" cy="0"/>
-          </a:xfrm>
-          <a:prstGeom prst="line">
-            <a:avLst/>
-          </a:prstGeom>
-          <a:noFill/>
-          <a:ln w="25400">
-            <a:solidFill>
-              <a:srgbClr val="8ABBD8"/>
-            </a:solidFill>
-            <a:prstDash val="solid"/>
-          </a:ln>
-        </p:spPr>
-      </p:sp>
-      <p:sp>
-        <p:nvSpPr>
-          <p:cNvPr id="18" name="Shape 16"/>
-          <p:cNvSpPr/>
-          <p:nvPr/>
-        </p:nvSpPr>
-        <p:spPr>
-          <a:xfrm>
-            <a:off x="8202168" y="3630168"/>
-            <a:ext cx="1170432" cy="118872"/>
-          </a:xfrm>
-          <a:prstGeom prst="line">
-            <a:avLst/>
-          </a:prstGeom>
-          <a:noFill/>
-          <a:ln w="25400">
-            <a:solidFill>
-              <a:srgbClr val="8ABBD8"/>
-            </a:solidFill>
-            <a:prstDash val="solid"/>
-          </a:ln>
-        </p:spPr>
-      </p:sp>
-      <p:sp>
-        <p:nvSpPr>
-          <p:cNvPr id="19" name="Shape 17"/>
-          <p:cNvSpPr/>
-          <p:nvPr/>
-        </p:nvSpPr>
-        <p:spPr>
-          <a:xfrm>
-            <a:off x="10543032" y="3630168"/>
-            <a:ext cx="-1170432" cy="118872"/>
-          </a:xfrm>
-          <a:prstGeom prst="line">
-            <a:avLst/>
-          </a:prstGeom>
-          <a:noFill/>
-          <a:ln w="25400">
-            <a:solidFill>
-              <a:srgbClr val="8ABBD8"/>
-            </a:solidFill>
-            <a:prstDash val="solid"/>
-          </a:ln>
-        </p:spPr>
-      </p:sp>
-      <p:sp>
-        <p:nvSpPr>
-          <p:cNvPr id="20" name="Text 18"/>
-          <p:cNvSpPr/>
-          <p:nvPr/>
-        </p:nvSpPr>
-        <p:spPr>
-          <a:xfrm>
-            <a:off x="7863840" y="4069080"/>
-            <a:ext cx="3017520" cy="164592"/>
-          </a:xfrm>
-          <a:prstGeom prst="rect">
-            <a:avLst/>
-          </a:prstGeom>
-          <a:noFill/>
-          <a:ln/>
-        </p:spPr>
-        <p:txBody>
-          <a:bodyPr wrap="square" lIns="0" tIns="0" rIns="0" bIns="0" rtlCol="0" anchor="ctr"/>
-          <a:lstStyle/>
-          <a:p>
-            <a:pPr algn="ctr" indent="0" marL="0">
-              <a:buNone/>
-            </a:pPr>
-            <a:r>
-              <a:rPr lang="en-US" sz="900" b="1" dirty="0">
-                <a:solidFill>
-                  <a:srgbClr val="003A63"/>
-                </a:solidFill>
-                <a:latin typeface="Aptos" pitchFamily="34" charset="0"/>
-                <a:ea typeface="Aptos" pitchFamily="34" charset="-122"/>
-                <a:cs typeface="Aptos" pitchFamily="34" charset="-120"/>
-              </a:rPr>
-              <a:t>Decision rights</a:t>
-            </a:r>
-            <a:endParaRPr lang="en-US" sz="900" dirty="0"/>
-          </a:p>
-        </p:txBody>
-      </p:sp>
-      <p:sp>
-        <p:nvSpPr>
-          <p:cNvPr id="21" name="Shape 19"/>
           <p:cNvSpPr/>
           <p:nvPr/>
         </p:nvSpPr>
@@ -5193,7 +4939,7 @@
       </p:sp>
       <p:sp>
         <p:nvSpPr>
-          <p:cNvPr id="22" name="Text 20"/>
+          <p:cNvPr id="17" name="Text 15"/>
           <p:cNvSpPr/>
           <p:nvPr/>
         </p:nvSpPr>
@@ -5232,7 +4978,7 @@
       </p:sp>
       <p:sp>
         <p:nvSpPr>
-          <p:cNvPr id="23" name="Text 21"/>
+          <p:cNvPr id="18" name="Text 16"/>
           <p:cNvSpPr/>
           <p:nvPr/>
         </p:nvSpPr>
@@ -5740,13 +5486,11 @@
             </a:avLst>
           </a:prstGeom>
           <a:solidFill>
-            <a:srgbClr val="FFFFFF">
-              <a:alpha val="88000"/>
-            </a:srgbClr>
+            <a:srgbClr val="FFFFFF"/>
           </a:solidFill>
           <a:ln w="12700">
             <a:solidFill>
-              <a:srgbClr val="D6E8F2"/>
+              <a:srgbClr val="B9D7E6"/>
             </a:solidFill>
             <a:prstDash val="solid"/>
           </a:ln>
@@ -5754,190 +5498,112 @@
       </p:sp>
       <p:sp>
         <p:nvSpPr>
-          <p:cNvPr id="14" name="Shape 12"/>
-          <p:cNvSpPr/>
-          <p:nvPr/>
-        </p:nvSpPr>
-        <p:spPr>
-          <a:xfrm>
-            <a:off x="7891272" y="3108960"/>
-            <a:ext cx="566928" cy="566928"/>
-          </a:xfrm>
-          <a:prstGeom prst="ellipse">
-            <a:avLst/>
-          </a:prstGeom>
-          <a:solidFill>
-            <a:srgbClr val="0068B7"/>
-          </a:solidFill>
-          <a:ln w="12700">
-            <a:solidFill>
-              <a:srgbClr val="0068B7"/>
-            </a:solidFill>
-            <a:prstDash val="solid"/>
-          </a:ln>
-        </p:spPr>
-      </p:sp>
-      <p:sp>
-        <p:nvSpPr>
-          <p:cNvPr id="15" name="Shape 13"/>
-          <p:cNvSpPr/>
-          <p:nvPr/>
-        </p:nvSpPr>
-        <p:spPr>
-          <a:xfrm>
-            <a:off x="10287000" y="3108960"/>
-            <a:ext cx="566928" cy="566928"/>
-          </a:xfrm>
-          <a:prstGeom prst="ellipse">
-            <a:avLst/>
-          </a:prstGeom>
-          <a:solidFill>
-            <a:srgbClr val="2F8A28"/>
-          </a:solidFill>
-          <a:ln w="12700">
-            <a:solidFill>
-              <a:srgbClr val="2F8A28"/>
-            </a:solidFill>
-            <a:prstDash val="solid"/>
-          </a:ln>
-        </p:spPr>
+          <p:cNvPr id="14" name="Text 12"/>
+          <p:cNvSpPr/>
+          <p:nvPr/>
+        </p:nvSpPr>
+        <p:spPr>
+          <a:xfrm>
+            <a:off x="7799832" y="2935224"/>
+            <a:ext cx="3145536" cy="256032"/>
+          </a:xfrm>
+          <a:prstGeom prst="rect">
+            <a:avLst/>
+          </a:prstGeom>
+          <a:noFill/>
+          <a:ln/>
+        </p:spPr>
+        <p:txBody>
+          <a:bodyPr wrap="square" lIns="0" tIns="0" rIns="0" bIns="0" rtlCol="0" anchor="ctr"/>
+          <a:lstStyle/>
+          <a:p>
+            <a:pPr indent="0" marL="0">
+              <a:buNone/>
+            </a:pPr>
+            <a:r>
+              <a:rPr lang="en-US" sz="1300" b="1" dirty="0">
+                <a:solidFill>
+                  <a:srgbClr val="0068B7"/>
+                </a:solidFill>
+                <a:latin typeface="Aptos" pitchFamily="34" charset="0"/>
+                <a:ea typeface="Aptos" pitchFamily="34" charset="-122"/>
+                <a:cs typeface="Aptos" pitchFamily="34" charset="-120"/>
+              </a:rPr>
+              <a:t>Concept checkpoints</a:t>
+            </a:r>
+            <a:endParaRPr lang="en-US" sz="1300" dirty="0"/>
+          </a:p>
+        </p:txBody>
+      </p:sp>
+      <p:sp>
+        <p:nvSpPr>
+          <p:cNvPr id="15" name="Text 13"/>
+          <p:cNvSpPr/>
+          <p:nvPr/>
+        </p:nvSpPr>
+        <p:spPr>
+          <a:xfrm>
+            <a:off x="7818120" y="3300984"/>
+            <a:ext cx="3090672" cy="877824"/>
+          </a:xfrm>
+          <a:prstGeom prst="rect">
+            <a:avLst/>
+          </a:prstGeom>
+          <a:noFill/>
+          <a:ln/>
+        </p:spPr>
+        <p:txBody>
+          <a:bodyPr wrap="square" lIns="254" tIns="254" rIns="254" bIns="254" rtlCol="0" anchor="t">
+            <a:normAutofit/>
+          </a:bodyPr>
+          <a:lstStyle/>
+          <a:p>
+            <a:r>
+              <a:rPr lang="en-US" sz="1380" dirty="0">
+                <a:solidFill>
+                  <a:srgbClr val="17364A"/>
+                </a:solidFill>
+                <a:latin typeface="Aptos" pitchFamily="34" charset="0"/>
+                <a:ea typeface="Aptos" pitchFamily="34" charset="-122"/>
+                <a:cs typeface="Aptos" pitchFamily="34" charset="-120"/>
+              </a:rPr>
+              <a:t>When staff do not connect technical decisions to authority, workflow, equity, privacy,.</a:t>
+            </a:r>
+            <a:endParaRPr lang="en-US" sz="1380" dirty="0"/>
+          </a:p>
+          <a:p>
+            <a:r>
+              <a:rPr lang="en-US" sz="1380" dirty="0">
+                <a:solidFill>
+                  <a:srgbClr val="17364A"/>
+                </a:solidFill>
+                <a:latin typeface="Aptos" pitchFamily="34" charset="0"/>
+                <a:ea typeface="Aptos" pitchFamily="34" charset="-122"/>
+                <a:cs typeface="Aptos" pitchFamily="34" charset="-120"/>
+              </a:rPr>
+              <a:t>Vendors may provide demonstrations, dashboards, or summary metrics that do not match the.</a:t>
+            </a:r>
+            <a:endParaRPr lang="en-US" sz="1380" dirty="0"/>
+          </a:p>
+          <a:p>
+            <a:r>
+              <a:rPr lang="en-US" sz="1380" dirty="0">
+                <a:solidFill>
+                  <a:srgbClr val="17364A"/>
+                </a:solidFill>
+                <a:latin typeface="Aptos" pitchFamily="34" charset="0"/>
+                <a:ea typeface="Aptos" pitchFamily="34" charset="-122"/>
+                <a:cs typeface="Aptos" pitchFamily="34" charset="-120"/>
+              </a:rPr>
+              <a:t>A guardrail is to require documentation, test results, acceptance criteria, and.</a:t>
+            </a:r>
+            <a:endParaRPr lang="en-US" sz="1380" dirty="0"/>
+          </a:p>
+        </p:txBody>
       </p:sp>
       <p:sp>
         <p:nvSpPr>
           <p:cNvPr id="16" name="Shape 14"/>
-          <p:cNvSpPr/>
-          <p:nvPr/>
-        </p:nvSpPr>
-        <p:spPr>
-          <a:xfrm>
-            <a:off x="9089136" y="3456432"/>
-            <a:ext cx="566928" cy="566928"/>
-          </a:xfrm>
-          <a:prstGeom prst="ellipse">
-            <a:avLst/>
-          </a:prstGeom>
-          <a:solidFill>
-            <a:srgbClr val="6A4CA3"/>
-          </a:solidFill>
-          <a:ln w="12700">
-            <a:solidFill>
-              <a:srgbClr val="6A4CA3"/>
-            </a:solidFill>
-            <a:prstDash val="solid"/>
-          </a:ln>
-        </p:spPr>
-      </p:sp>
-      <p:sp>
-        <p:nvSpPr>
-          <p:cNvPr id="17" name="Shape 15"/>
-          <p:cNvSpPr/>
-          <p:nvPr/>
-        </p:nvSpPr>
-        <p:spPr>
-          <a:xfrm>
-            <a:off x="8385048" y="3419856"/>
-            <a:ext cx="1975104" cy="0"/>
-          </a:xfrm>
-          <a:prstGeom prst="line">
-            <a:avLst/>
-          </a:prstGeom>
-          <a:noFill/>
-          <a:ln w="25400">
-            <a:solidFill>
-              <a:srgbClr val="8ABBD8"/>
-            </a:solidFill>
-            <a:prstDash val="solid"/>
-          </a:ln>
-        </p:spPr>
-      </p:sp>
-      <p:sp>
-        <p:nvSpPr>
-          <p:cNvPr id="18" name="Shape 16"/>
-          <p:cNvSpPr/>
-          <p:nvPr/>
-        </p:nvSpPr>
-        <p:spPr>
-          <a:xfrm>
-            <a:off x="8202168" y="3630168"/>
-            <a:ext cx="1170432" cy="118872"/>
-          </a:xfrm>
-          <a:prstGeom prst="line">
-            <a:avLst/>
-          </a:prstGeom>
-          <a:noFill/>
-          <a:ln w="25400">
-            <a:solidFill>
-              <a:srgbClr val="8ABBD8"/>
-            </a:solidFill>
-            <a:prstDash val="solid"/>
-          </a:ln>
-        </p:spPr>
-      </p:sp>
-      <p:sp>
-        <p:nvSpPr>
-          <p:cNvPr id="19" name="Shape 17"/>
-          <p:cNvSpPr/>
-          <p:nvPr/>
-        </p:nvSpPr>
-        <p:spPr>
-          <a:xfrm>
-            <a:off x="10543032" y="3630168"/>
-            <a:ext cx="-1170432" cy="118872"/>
-          </a:xfrm>
-          <a:prstGeom prst="line">
-            <a:avLst/>
-          </a:prstGeom>
-          <a:noFill/>
-          <a:ln w="25400">
-            <a:solidFill>
-              <a:srgbClr val="8ABBD8"/>
-            </a:solidFill>
-            <a:prstDash val="solid"/>
-          </a:ln>
-        </p:spPr>
-      </p:sp>
-      <p:sp>
-        <p:nvSpPr>
-          <p:cNvPr id="20" name="Text 18"/>
-          <p:cNvSpPr/>
-          <p:nvPr/>
-        </p:nvSpPr>
-        <p:spPr>
-          <a:xfrm>
-            <a:off x="7863840" y="4069080"/>
-            <a:ext cx="3017520" cy="164592"/>
-          </a:xfrm>
-          <a:prstGeom prst="rect">
-            <a:avLst/>
-          </a:prstGeom>
-          <a:noFill/>
-          <a:ln/>
-        </p:spPr>
-        <p:txBody>
-          <a:bodyPr wrap="square" lIns="0" tIns="0" rIns="0" bIns="0" rtlCol="0" anchor="ctr"/>
-          <a:lstStyle/>
-          <a:p>
-            <a:pPr algn="ctr" indent="0" marL="0">
-              <a:buNone/>
-            </a:pPr>
-            <a:r>
-              <a:rPr lang="en-US" sz="900" b="1" dirty="0">
-                <a:solidFill>
-                  <a:srgbClr val="003A63"/>
-                </a:solidFill>
-                <a:latin typeface="Aptos" pitchFamily="34" charset="0"/>
-                <a:ea typeface="Aptos" pitchFamily="34" charset="-122"/>
-                <a:cs typeface="Aptos" pitchFamily="34" charset="-120"/>
-              </a:rPr>
-              <a:t>Decision rights</a:t>
-            </a:r>
-            <a:endParaRPr lang="en-US" sz="900" dirty="0"/>
-          </a:p>
-        </p:txBody>
-      </p:sp>
-      <p:sp>
-        <p:nvSpPr>
-          <p:cNvPr id="21" name="Shape 19"/>
           <p:cNvSpPr/>
           <p:nvPr/>
         </p:nvSpPr>
@@ -5964,7 +5630,7 @@
       </p:sp>
       <p:sp>
         <p:nvSpPr>
-          <p:cNvPr id="22" name="Text 20"/>
+          <p:cNvPr id="17" name="Text 15"/>
           <p:cNvSpPr/>
           <p:nvPr/>
         </p:nvSpPr>
@@ -6003,7 +5669,7 @@
       </p:sp>
       <p:sp>
         <p:nvSpPr>
-          <p:cNvPr id="23" name="Text 21"/>
+          <p:cNvPr id="18" name="Text 16"/>
           <p:cNvSpPr/>
           <p:nvPr/>
         </p:nvSpPr>
@@ -6511,13 +6177,11 @@
             </a:avLst>
           </a:prstGeom>
           <a:solidFill>
-            <a:srgbClr val="FFFFFF">
-              <a:alpha val="88000"/>
-            </a:srgbClr>
+            <a:srgbClr val="FFFFFF"/>
           </a:solidFill>
           <a:ln w="12700">
             <a:solidFill>
-              <a:srgbClr val="D6E8F2"/>
+              <a:srgbClr val="B9D7E6"/>
             </a:solidFill>
             <a:prstDash val="solid"/>
           </a:ln>
@@ -6525,190 +6189,112 @@
       </p:sp>
       <p:sp>
         <p:nvSpPr>
-          <p:cNvPr id="14" name="Shape 12"/>
-          <p:cNvSpPr/>
-          <p:nvPr/>
-        </p:nvSpPr>
-        <p:spPr>
-          <a:xfrm>
-            <a:off x="7891272" y="3108960"/>
-            <a:ext cx="566928" cy="566928"/>
-          </a:xfrm>
-          <a:prstGeom prst="ellipse">
-            <a:avLst/>
-          </a:prstGeom>
-          <a:solidFill>
-            <a:srgbClr val="0068B7"/>
-          </a:solidFill>
-          <a:ln w="12700">
-            <a:solidFill>
-              <a:srgbClr val="0068B7"/>
-            </a:solidFill>
-            <a:prstDash val="solid"/>
-          </a:ln>
-        </p:spPr>
-      </p:sp>
-      <p:sp>
-        <p:nvSpPr>
-          <p:cNvPr id="15" name="Shape 13"/>
-          <p:cNvSpPr/>
-          <p:nvPr/>
-        </p:nvSpPr>
-        <p:spPr>
-          <a:xfrm>
-            <a:off x="10287000" y="3108960"/>
-            <a:ext cx="566928" cy="566928"/>
-          </a:xfrm>
-          <a:prstGeom prst="ellipse">
-            <a:avLst/>
-          </a:prstGeom>
-          <a:solidFill>
-            <a:srgbClr val="2F8A28"/>
-          </a:solidFill>
-          <a:ln w="12700">
-            <a:solidFill>
-              <a:srgbClr val="2F8A28"/>
-            </a:solidFill>
-            <a:prstDash val="solid"/>
-          </a:ln>
-        </p:spPr>
+          <p:cNvPr id="14" name="Text 12"/>
+          <p:cNvSpPr/>
+          <p:nvPr/>
+        </p:nvSpPr>
+        <p:spPr>
+          <a:xfrm>
+            <a:off x="7799832" y="2935224"/>
+            <a:ext cx="3145536" cy="256032"/>
+          </a:xfrm>
+          <a:prstGeom prst="rect">
+            <a:avLst/>
+          </a:prstGeom>
+          <a:noFill/>
+          <a:ln/>
+        </p:spPr>
+        <p:txBody>
+          <a:bodyPr wrap="square" lIns="0" tIns="0" rIns="0" bIns="0" rtlCol="0" anchor="ctr"/>
+          <a:lstStyle/>
+          <a:p>
+            <a:pPr indent="0" marL="0">
+              <a:buNone/>
+            </a:pPr>
+            <a:r>
+              <a:rPr lang="en-US" sz="1300" b="1" dirty="0">
+                <a:solidFill>
+                  <a:srgbClr val="0068B7"/>
+                </a:solidFill>
+                <a:latin typeface="Aptos" pitchFamily="34" charset="0"/>
+                <a:ea typeface="Aptos" pitchFamily="34" charset="-122"/>
+                <a:cs typeface="Aptos" pitchFamily="34" charset="-120"/>
+              </a:rPr>
+              <a:t>Concept checkpoints</a:t>
+            </a:r>
+            <a:endParaRPr lang="en-US" sz="1300" dirty="0"/>
+          </a:p>
+        </p:txBody>
+      </p:sp>
+      <p:sp>
+        <p:nvSpPr>
+          <p:cNvPr id="15" name="Text 13"/>
+          <p:cNvSpPr/>
+          <p:nvPr/>
+        </p:nvSpPr>
+        <p:spPr>
+          <a:xfrm>
+            <a:off x="7818120" y="3300984"/>
+            <a:ext cx="3090672" cy="877824"/>
+          </a:xfrm>
+          <a:prstGeom prst="rect">
+            <a:avLst/>
+          </a:prstGeom>
+          <a:noFill/>
+          <a:ln/>
+        </p:spPr>
+        <p:txBody>
+          <a:bodyPr wrap="square" lIns="254" tIns="254" rIns="254" bIns="254" rtlCol="0" anchor="t">
+            <a:normAutofit/>
+          </a:bodyPr>
+          <a:lstStyle/>
+          <a:p>
+            <a:r>
+              <a:rPr lang="en-US" sz="1380" dirty="0">
+                <a:solidFill>
+                  <a:srgbClr val="17364A"/>
+                </a:solidFill>
+                <a:latin typeface="Aptos" pitchFamily="34" charset="0"/>
+                <a:ea typeface="Aptos" pitchFamily="34" charset="-122"/>
+                <a:cs typeface="Aptos" pitchFamily="34" charset="-120"/>
+              </a:rPr>
+              <a:t>Generative AI, predictive analytics, RAG, automation, and agentic workflows all depend on.</a:t>
+            </a:r>
+            <a:endParaRPr lang="en-US" sz="1380" dirty="0"/>
+          </a:p>
+          <a:p>
+            <a:r>
+              <a:rPr lang="en-US" sz="1380" dirty="0">
+                <a:solidFill>
+                  <a:srgbClr val="17364A"/>
+                </a:solidFill>
+                <a:latin typeface="Aptos" pitchFamily="34" charset="0"/>
+                <a:ea typeface="Aptos" pitchFamily="34" charset="-122"/>
+                <a:cs typeface="Aptos" pitchFamily="34" charset="-120"/>
+              </a:rPr>
+              <a:t>A tool that drafts internal training text may require lighter review than a tool that.</a:t>
+            </a:r>
+            <a:endParaRPr lang="en-US" sz="1380" dirty="0"/>
+          </a:p>
+          <a:p>
+            <a:r>
+              <a:rPr lang="en-US" sz="1380" dirty="0">
+                <a:solidFill>
+                  <a:srgbClr val="17364A"/>
+                </a:solidFill>
+                <a:latin typeface="Aptos" pitchFamily="34" charset="0"/>
+                <a:ea typeface="Aptos" pitchFamily="34" charset="-122"/>
+                <a:cs typeface="Aptos" pitchFamily="34" charset="-120"/>
+              </a:rPr>
+              <a:t>The module should be applied during readiness assessment, procurement, implementation.</a:t>
+            </a:r>
+            <a:endParaRPr lang="en-US" sz="1380" dirty="0"/>
+          </a:p>
+        </p:txBody>
       </p:sp>
       <p:sp>
         <p:nvSpPr>
           <p:cNvPr id="16" name="Shape 14"/>
-          <p:cNvSpPr/>
-          <p:nvPr/>
-        </p:nvSpPr>
-        <p:spPr>
-          <a:xfrm>
-            <a:off x="9089136" y="3456432"/>
-            <a:ext cx="566928" cy="566928"/>
-          </a:xfrm>
-          <a:prstGeom prst="ellipse">
-            <a:avLst/>
-          </a:prstGeom>
-          <a:solidFill>
-            <a:srgbClr val="6A4CA3"/>
-          </a:solidFill>
-          <a:ln w="12700">
-            <a:solidFill>
-              <a:srgbClr val="6A4CA3"/>
-            </a:solidFill>
-            <a:prstDash val="solid"/>
-          </a:ln>
-        </p:spPr>
-      </p:sp>
-      <p:sp>
-        <p:nvSpPr>
-          <p:cNvPr id="17" name="Shape 15"/>
-          <p:cNvSpPr/>
-          <p:nvPr/>
-        </p:nvSpPr>
-        <p:spPr>
-          <a:xfrm>
-            <a:off x="8385048" y="3419856"/>
-            <a:ext cx="1975104" cy="0"/>
-          </a:xfrm>
-          <a:prstGeom prst="line">
-            <a:avLst/>
-          </a:prstGeom>
-          <a:noFill/>
-          <a:ln w="25400">
-            <a:solidFill>
-              <a:srgbClr val="8ABBD8"/>
-            </a:solidFill>
-            <a:prstDash val="solid"/>
-          </a:ln>
-        </p:spPr>
-      </p:sp>
-      <p:sp>
-        <p:nvSpPr>
-          <p:cNvPr id="18" name="Shape 16"/>
-          <p:cNvSpPr/>
-          <p:nvPr/>
-        </p:nvSpPr>
-        <p:spPr>
-          <a:xfrm>
-            <a:off x="8202168" y="3630168"/>
-            <a:ext cx="1170432" cy="118872"/>
-          </a:xfrm>
-          <a:prstGeom prst="line">
-            <a:avLst/>
-          </a:prstGeom>
-          <a:noFill/>
-          <a:ln w="25400">
-            <a:solidFill>
-              <a:srgbClr val="8ABBD8"/>
-            </a:solidFill>
-            <a:prstDash val="solid"/>
-          </a:ln>
-        </p:spPr>
-      </p:sp>
-      <p:sp>
-        <p:nvSpPr>
-          <p:cNvPr id="19" name="Shape 17"/>
-          <p:cNvSpPr/>
-          <p:nvPr/>
-        </p:nvSpPr>
-        <p:spPr>
-          <a:xfrm>
-            <a:off x="10543032" y="3630168"/>
-            <a:ext cx="-1170432" cy="118872"/>
-          </a:xfrm>
-          <a:prstGeom prst="line">
-            <a:avLst/>
-          </a:prstGeom>
-          <a:noFill/>
-          <a:ln w="25400">
-            <a:solidFill>
-              <a:srgbClr val="8ABBD8"/>
-            </a:solidFill>
-            <a:prstDash val="solid"/>
-          </a:ln>
-        </p:spPr>
-      </p:sp>
-      <p:sp>
-        <p:nvSpPr>
-          <p:cNvPr id="20" name="Text 18"/>
-          <p:cNvSpPr/>
-          <p:nvPr/>
-        </p:nvSpPr>
-        <p:spPr>
-          <a:xfrm>
-            <a:off x="7863840" y="4069080"/>
-            <a:ext cx="3017520" cy="164592"/>
-          </a:xfrm>
-          <a:prstGeom prst="rect">
-            <a:avLst/>
-          </a:prstGeom>
-          <a:noFill/>
-          <a:ln/>
-        </p:spPr>
-        <p:txBody>
-          <a:bodyPr wrap="square" lIns="0" tIns="0" rIns="0" bIns="0" rtlCol="0" anchor="ctr"/>
-          <a:lstStyle/>
-          <a:p>
-            <a:pPr algn="ctr" indent="0" marL="0">
-              <a:buNone/>
-            </a:pPr>
-            <a:r>
-              <a:rPr lang="en-US" sz="900" b="1" dirty="0">
-                <a:solidFill>
-                  <a:srgbClr val="003A63"/>
-                </a:solidFill>
-                <a:latin typeface="Aptos" pitchFamily="34" charset="0"/>
-                <a:ea typeface="Aptos" pitchFamily="34" charset="-122"/>
-                <a:cs typeface="Aptos" pitchFamily="34" charset="-120"/>
-              </a:rPr>
-              <a:t>Decision rights</a:t>
-            </a:r>
-            <a:endParaRPr lang="en-US" sz="900" dirty="0"/>
-          </a:p>
-        </p:txBody>
-      </p:sp>
-      <p:sp>
-        <p:nvSpPr>
-          <p:cNvPr id="21" name="Shape 19"/>
           <p:cNvSpPr/>
           <p:nvPr/>
         </p:nvSpPr>
@@ -6735,7 +6321,7 @@
       </p:sp>
       <p:sp>
         <p:nvSpPr>
-          <p:cNvPr id="22" name="Text 20"/>
+          <p:cNvPr id="17" name="Text 15"/>
           <p:cNvSpPr/>
           <p:nvPr/>
         </p:nvSpPr>
@@ -6774,7 +6360,7 @@
       </p:sp>
       <p:sp>
         <p:nvSpPr>
-          <p:cNvPr id="23" name="Text 21"/>
+          <p:cNvPr id="18" name="Text 16"/>
           <p:cNvSpPr/>
           <p:nvPr/>
         </p:nvSpPr>
@@ -7282,13 +6868,11 @@
             </a:avLst>
           </a:prstGeom>
           <a:solidFill>
-            <a:srgbClr val="FFFFFF">
-              <a:alpha val="88000"/>
-            </a:srgbClr>
+            <a:srgbClr val="FFFFFF"/>
           </a:solidFill>
           <a:ln w="12700">
             <a:solidFill>
-              <a:srgbClr val="D6E8F2"/>
+              <a:srgbClr val="B9D7E6"/>
             </a:solidFill>
             <a:prstDash val="solid"/>
           </a:ln>
@@ -7296,190 +6880,112 @@
       </p:sp>
       <p:sp>
         <p:nvSpPr>
-          <p:cNvPr id="14" name="Shape 12"/>
-          <p:cNvSpPr/>
-          <p:nvPr/>
-        </p:nvSpPr>
-        <p:spPr>
-          <a:xfrm>
-            <a:off x="7891272" y="3108960"/>
-            <a:ext cx="566928" cy="566928"/>
-          </a:xfrm>
-          <a:prstGeom prst="ellipse">
-            <a:avLst/>
-          </a:prstGeom>
-          <a:solidFill>
-            <a:srgbClr val="0068B7"/>
-          </a:solidFill>
-          <a:ln w="12700">
-            <a:solidFill>
-              <a:srgbClr val="0068B7"/>
-            </a:solidFill>
-            <a:prstDash val="solid"/>
-          </a:ln>
-        </p:spPr>
-      </p:sp>
-      <p:sp>
-        <p:nvSpPr>
-          <p:cNvPr id="15" name="Shape 13"/>
-          <p:cNvSpPr/>
-          <p:nvPr/>
-        </p:nvSpPr>
-        <p:spPr>
-          <a:xfrm>
-            <a:off x="10287000" y="3108960"/>
-            <a:ext cx="566928" cy="566928"/>
-          </a:xfrm>
-          <a:prstGeom prst="ellipse">
-            <a:avLst/>
-          </a:prstGeom>
-          <a:solidFill>
-            <a:srgbClr val="2F8A28"/>
-          </a:solidFill>
-          <a:ln w="12700">
-            <a:solidFill>
-              <a:srgbClr val="2F8A28"/>
-            </a:solidFill>
-            <a:prstDash val="solid"/>
-          </a:ln>
-        </p:spPr>
+          <p:cNvPr id="14" name="Text 12"/>
+          <p:cNvSpPr/>
+          <p:nvPr/>
+        </p:nvSpPr>
+        <p:spPr>
+          <a:xfrm>
+            <a:off x="7799832" y="2935224"/>
+            <a:ext cx="3145536" cy="256032"/>
+          </a:xfrm>
+          <a:prstGeom prst="rect">
+            <a:avLst/>
+          </a:prstGeom>
+          <a:noFill/>
+          <a:ln/>
+        </p:spPr>
+        <p:txBody>
+          <a:bodyPr wrap="square" lIns="0" tIns="0" rIns="0" bIns="0" rtlCol="0" anchor="ctr"/>
+          <a:lstStyle/>
+          <a:p>
+            <a:pPr indent="0" marL="0">
+              <a:buNone/>
+            </a:pPr>
+            <a:r>
+              <a:rPr lang="en-US" sz="1300" b="1" dirty="0">
+                <a:solidFill>
+                  <a:srgbClr val="0068B7"/>
+                </a:solidFill>
+                <a:latin typeface="Aptos" pitchFamily="34" charset="0"/>
+                <a:ea typeface="Aptos" pitchFamily="34" charset="-122"/>
+                <a:cs typeface="Aptos" pitchFamily="34" charset="-120"/>
+              </a:rPr>
+              <a:t>Concept checkpoints</a:t>
+            </a:r>
+            <a:endParaRPr lang="en-US" sz="1300" dirty="0"/>
+          </a:p>
+        </p:txBody>
+      </p:sp>
+      <p:sp>
+        <p:nvSpPr>
+          <p:cNvPr id="15" name="Text 13"/>
+          <p:cNvSpPr/>
+          <p:nvPr/>
+        </p:nvSpPr>
+        <p:spPr>
+          <a:xfrm>
+            <a:off x="7818120" y="3300984"/>
+            <a:ext cx="3090672" cy="877824"/>
+          </a:xfrm>
+          <a:prstGeom prst="rect">
+            <a:avLst/>
+          </a:prstGeom>
+          <a:noFill/>
+          <a:ln/>
+        </p:spPr>
+        <p:txBody>
+          <a:bodyPr wrap="square" lIns="254" tIns="254" rIns="254" bIns="254" rtlCol="0" anchor="t">
+            <a:normAutofit/>
+          </a:bodyPr>
+          <a:lstStyle/>
+          <a:p>
+            <a:r>
+              <a:rPr lang="en-US" sz="1380" dirty="0">
+                <a:solidFill>
+                  <a:srgbClr val="17364A"/>
+                </a:solidFill>
+                <a:latin typeface="Aptos" pitchFamily="34" charset="0"/>
+                <a:ea typeface="Aptos" pitchFamily="34" charset="-122"/>
+                <a:cs typeface="Aptos" pitchFamily="34" charset="-120"/>
+              </a:rPr>
+              <a:t>Where does this topic appear in one current or proposed AI workflow in your agency?</a:t>
+            </a:r>
+            <a:endParaRPr lang="en-US" sz="1380" dirty="0"/>
+          </a:p>
+          <a:p>
+            <a:r>
+              <a:rPr lang="en-US" sz="1380" dirty="0">
+                <a:solidFill>
+                  <a:srgbClr val="17364A"/>
+                </a:solidFill>
+                <a:latin typeface="Aptos" pitchFamily="34" charset="0"/>
+                <a:ea typeface="Aptos" pitchFamily="34" charset="-122"/>
+                <a:cs typeface="Aptos" pitchFamily="34" charset="-120"/>
+              </a:rPr>
+              <a:t>What decisions, data sources, users, or partners would be affected if this area is poorly.</a:t>
+            </a:r>
+            <a:endParaRPr lang="en-US" sz="1380" dirty="0"/>
+          </a:p>
+          <a:p>
+            <a:r>
+              <a:rPr lang="en-US" sz="1380" dirty="0">
+                <a:solidFill>
+                  <a:srgbClr val="17364A"/>
+                </a:solidFill>
+                <a:latin typeface="Aptos" pitchFamily="34" charset="0"/>
+                <a:ea typeface="Aptos" pitchFamily="34" charset="-122"/>
+                <a:cs typeface="Aptos" pitchFamily="34" charset="-120"/>
+              </a:rPr>
+              <a:t>What evidence would governance reviewers need before approving the workflow?</a:t>
+            </a:r>
+            <a:endParaRPr lang="en-US" sz="1380" dirty="0"/>
+          </a:p>
+        </p:txBody>
       </p:sp>
       <p:sp>
         <p:nvSpPr>
           <p:cNvPr id="16" name="Shape 14"/>
-          <p:cNvSpPr/>
-          <p:nvPr/>
-        </p:nvSpPr>
-        <p:spPr>
-          <a:xfrm>
-            <a:off x="9089136" y="3456432"/>
-            <a:ext cx="566928" cy="566928"/>
-          </a:xfrm>
-          <a:prstGeom prst="ellipse">
-            <a:avLst/>
-          </a:prstGeom>
-          <a:solidFill>
-            <a:srgbClr val="6A4CA3"/>
-          </a:solidFill>
-          <a:ln w="12700">
-            <a:solidFill>
-              <a:srgbClr val="6A4CA3"/>
-            </a:solidFill>
-            <a:prstDash val="solid"/>
-          </a:ln>
-        </p:spPr>
-      </p:sp>
-      <p:sp>
-        <p:nvSpPr>
-          <p:cNvPr id="17" name="Shape 15"/>
-          <p:cNvSpPr/>
-          <p:nvPr/>
-        </p:nvSpPr>
-        <p:spPr>
-          <a:xfrm>
-            <a:off x="8385048" y="3419856"/>
-            <a:ext cx="1975104" cy="0"/>
-          </a:xfrm>
-          <a:prstGeom prst="line">
-            <a:avLst/>
-          </a:prstGeom>
-          <a:noFill/>
-          <a:ln w="25400">
-            <a:solidFill>
-              <a:srgbClr val="8ABBD8"/>
-            </a:solidFill>
-            <a:prstDash val="solid"/>
-          </a:ln>
-        </p:spPr>
-      </p:sp>
-      <p:sp>
-        <p:nvSpPr>
-          <p:cNvPr id="18" name="Shape 16"/>
-          <p:cNvSpPr/>
-          <p:nvPr/>
-        </p:nvSpPr>
-        <p:spPr>
-          <a:xfrm>
-            <a:off x="8202168" y="3630168"/>
-            <a:ext cx="1170432" cy="118872"/>
-          </a:xfrm>
-          <a:prstGeom prst="line">
-            <a:avLst/>
-          </a:prstGeom>
-          <a:noFill/>
-          <a:ln w="25400">
-            <a:solidFill>
-              <a:srgbClr val="8ABBD8"/>
-            </a:solidFill>
-            <a:prstDash val="solid"/>
-          </a:ln>
-        </p:spPr>
-      </p:sp>
-      <p:sp>
-        <p:nvSpPr>
-          <p:cNvPr id="19" name="Shape 17"/>
-          <p:cNvSpPr/>
-          <p:nvPr/>
-        </p:nvSpPr>
-        <p:spPr>
-          <a:xfrm>
-            <a:off x="10543032" y="3630168"/>
-            <a:ext cx="-1170432" cy="118872"/>
-          </a:xfrm>
-          <a:prstGeom prst="line">
-            <a:avLst/>
-          </a:prstGeom>
-          <a:noFill/>
-          <a:ln w="25400">
-            <a:solidFill>
-              <a:srgbClr val="8ABBD8"/>
-            </a:solidFill>
-            <a:prstDash val="solid"/>
-          </a:ln>
-        </p:spPr>
-      </p:sp>
-      <p:sp>
-        <p:nvSpPr>
-          <p:cNvPr id="20" name="Text 18"/>
-          <p:cNvSpPr/>
-          <p:nvPr/>
-        </p:nvSpPr>
-        <p:spPr>
-          <a:xfrm>
-            <a:off x="7863840" y="4069080"/>
-            <a:ext cx="3017520" cy="164592"/>
-          </a:xfrm>
-          <a:prstGeom prst="rect">
-            <a:avLst/>
-          </a:prstGeom>
-          <a:noFill/>
-          <a:ln/>
-        </p:spPr>
-        <p:txBody>
-          <a:bodyPr wrap="square" lIns="0" tIns="0" rIns="0" bIns="0" rtlCol="0" anchor="ctr"/>
-          <a:lstStyle/>
-          <a:p>
-            <a:pPr algn="ctr" indent="0" marL="0">
-              <a:buNone/>
-            </a:pPr>
-            <a:r>
-              <a:rPr lang="en-US" sz="900" b="1" dirty="0">
-                <a:solidFill>
-                  <a:srgbClr val="003A63"/>
-                </a:solidFill>
-                <a:latin typeface="Aptos" pitchFamily="34" charset="0"/>
-                <a:ea typeface="Aptos" pitchFamily="34" charset="-122"/>
-                <a:cs typeface="Aptos" pitchFamily="34" charset="-120"/>
-              </a:rPr>
-              <a:t>Decision rights</a:t>
-            </a:r>
-            <a:endParaRPr lang="en-US" sz="900" dirty="0"/>
-          </a:p>
-        </p:txBody>
-      </p:sp>
-      <p:sp>
-        <p:nvSpPr>
-          <p:cNvPr id="21" name="Shape 19"/>
           <p:cNvSpPr/>
           <p:nvPr/>
         </p:nvSpPr>
@@ -7506,7 +7012,7 @@
       </p:sp>
       <p:sp>
         <p:nvSpPr>
-          <p:cNvPr id="22" name="Text 20"/>
+          <p:cNvPr id="17" name="Text 15"/>
           <p:cNvSpPr/>
           <p:nvPr/>
         </p:nvSpPr>
@@ -7545,7 +7051,7 @@
       </p:sp>
       <p:sp>
         <p:nvSpPr>
-          <p:cNvPr id="23" name="Text 21"/>
+          <p:cNvPr id="18" name="Text 16"/>
           <p:cNvSpPr/>
           <p:nvPr/>
         </p:nvSpPr>
@@ -8039,13 +7545,11 @@
             </a:avLst>
           </a:prstGeom>
           <a:solidFill>
-            <a:srgbClr val="FFFFFF">
-              <a:alpha val="88000"/>
-            </a:srgbClr>
+            <a:srgbClr val="FFFFFF"/>
           </a:solidFill>
           <a:ln w="12700">
             <a:solidFill>
-              <a:srgbClr val="D6E8F2"/>
+              <a:srgbClr val="B9D7E6"/>
             </a:solidFill>
             <a:prstDash val="solid"/>
           </a:ln>
@@ -8053,190 +7557,98 @@
       </p:sp>
       <p:sp>
         <p:nvSpPr>
-          <p:cNvPr id="14" name="Shape 12"/>
-          <p:cNvSpPr/>
-          <p:nvPr/>
-        </p:nvSpPr>
-        <p:spPr>
-          <a:xfrm>
-            <a:off x="7891272" y="3108960"/>
-            <a:ext cx="566928" cy="566928"/>
-          </a:xfrm>
-          <a:prstGeom prst="ellipse">
-            <a:avLst/>
-          </a:prstGeom>
-          <a:solidFill>
-            <a:srgbClr val="0068B7"/>
-          </a:solidFill>
-          <a:ln w="12700">
-            <a:solidFill>
-              <a:srgbClr val="0068B7"/>
-            </a:solidFill>
-            <a:prstDash val="solid"/>
-          </a:ln>
-        </p:spPr>
-      </p:sp>
-      <p:sp>
-        <p:nvSpPr>
-          <p:cNvPr id="15" name="Shape 13"/>
-          <p:cNvSpPr/>
-          <p:nvPr/>
-        </p:nvSpPr>
-        <p:spPr>
-          <a:xfrm>
-            <a:off x="10287000" y="3108960"/>
-            <a:ext cx="566928" cy="566928"/>
-          </a:xfrm>
-          <a:prstGeom prst="ellipse">
-            <a:avLst/>
-          </a:prstGeom>
-          <a:solidFill>
-            <a:srgbClr val="2F8A28"/>
-          </a:solidFill>
-          <a:ln w="12700">
-            <a:solidFill>
-              <a:srgbClr val="2F8A28"/>
-            </a:solidFill>
-            <a:prstDash val="solid"/>
-          </a:ln>
-        </p:spPr>
+          <p:cNvPr id="14" name="Text 12"/>
+          <p:cNvSpPr/>
+          <p:nvPr/>
+        </p:nvSpPr>
+        <p:spPr>
+          <a:xfrm>
+            <a:off x="7799832" y="2935224"/>
+            <a:ext cx="3145536" cy="256032"/>
+          </a:xfrm>
+          <a:prstGeom prst="rect">
+            <a:avLst/>
+          </a:prstGeom>
+          <a:noFill/>
+          <a:ln/>
+        </p:spPr>
+        <p:txBody>
+          <a:bodyPr wrap="square" lIns="0" tIns="0" rIns="0" bIns="0" rtlCol="0" anchor="ctr"/>
+          <a:lstStyle/>
+          <a:p>
+            <a:pPr indent="0" marL="0">
+              <a:buNone/>
+            </a:pPr>
+            <a:r>
+              <a:rPr lang="en-US" sz="1300" b="1" dirty="0">
+                <a:solidFill>
+                  <a:srgbClr val="0068B7"/>
+                </a:solidFill>
+                <a:latin typeface="Aptos" pitchFamily="34" charset="0"/>
+                <a:ea typeface="Aptos" pitchFamily="34" charset="-122"/>
+                <a:cs typeface="Aptos" pitchFamily="34" charset="-120"/>
+              </a:rPr>
+              <a:t>Concept checkpoints</a:t>
+            </a:r>
+            <a:endParaRPr lang="en-US" sz="1300" dirty="0"/>
+          </a:p>
+        </p:txBody>
+      </p:sp>
+      <p:sp>
+        <p:nvSpPr>
+          <p:cNvPr id="15" name="Text 13"/>
+          <p:cNvSpPr/>
+          <p:nvPr/>
+        </p:nvSpPr>
+        <p:spPr>
+          <a:xfrm>
+            <a:off x="7818120" y="3300984"/>
+            <a:ext cx="3090672" cy="877824"/>
+          </a:xfrm>
+          <a:prstGeom prst="rect">
+            <a:avLst/>
+          </a:prstGeom>
+          <a:noFill/>
+          <a:ln/>
+        </p:spPr>
+        <p:txBody>
+          <a:bodyPr wrap="square" lIns="254" tIns="254" rIns="254" bIns="254" rtlCol="0" anchor="t">
+            <a:normAutofit/>
+          </a:bodyPr>
+          <a:lstStyle/>
+          <a:p>
+            <a:r>
+              <a:rPr lang="en-US" sz="1380" dirty="0">
+                <a:solidFill>
+                  <a:srgbClr val="17364A"/>
+                </a:solidFill>
+                <a:latin typeface="Aptos" pitchFamily="34" charset="0"/>
+                <a:ea typeface="Aptos" pitchFamily="34" charset="-122"/>
+                <a:cs typeface="Aptos" pitchFamily="34" charset="-120"/>
+              </a:rPr>
+              <a:t>Which safeguards should be required before pilot testing?</a:t>
+            </a:r>
+            <a:endParaRPr lang="en-US" sz="1380" dirty="0"/>
+          </a:p>
+          <a:p>
+            <a:r>
+              <a:rPr lang="en-US" sz="1380" dirty="0">
+                <a:solidFill>
+                  <a:srgbClr val="17364A"/>
+                </a:solidFill>
+                <a:latin typeface="Aptos" pitchFamily="34" charset="0"/>
+                <a:ea typeface="Aptos" pitchFamily="34" charset="-122"/>
+                <a:cs typeface="Aptos" pitchFamily="34" charset="-120"/>
+              </a:rPr>
+              <a:t>Who owns ongoing monitoring and review?</a:t>
+            </a:r>
+            <a:endParaRPr lang="en-US" sz="1380" dirty="0"/>
+          </a:p>
+        </p:txBody>
       </p:sp>
       <p:sp>
         <p:nvSpPr>
           <p:cNvPr id="16" name="Shape 14"/>
-          <p:cNvSpPr/>
-          <p:nvPr/>
-        </p:nvSpPr>
-        <p:spPr>
-          <a:xfrm>
-            <a:off x="9089136" y="3456432"/>
-            <a:ext cx="566928" cy="566928"/>
-          </a:xfrm>
-          <a:prstGeom prst="ellipse">
-            <a:avLst/>
-          </a:prstGeom>
-          <a:solidFill>
-            <a:srgbClr val="6A4CA3"/>
-          </a:solidFill>
-          <a:ln w="12700">
-            <a:solidFill>
-              <a:srgbClr val="6A4CA3"/>
-            </a:solidFill>
-            <a:prstDash val="solid"/>
-          </a:ln>
-        </p:spPr>
-      </p:sp>
-      <p:sp>
-        <p:nvSpPr>
-          <p:cNvPr id="17" name="Shape 15"/>
-          <p:cNvSpPr/>
-          <p:nvPr/>
-        </p:nvSpPr>
-        <p:spPr>
-          <a:xfrm>
-            <a:off x="8385048" y="3419856"/>
-            <a:ext cx="1975104" cy="0"/>
-          </a:xfrm>
-          <a:prstGeom prst="line">
-            <a:avLst/>
-          </a:prstGeom>
-          <a:noFill/>
-          <a:ln w="25400">
-            <a:solidFill>
-              <a:srgbClr val="8ABBD8"/>
-            </a:solidFill>
-            <a:prstDash val="solid"/>
-          </a:ln>
-        </p:spPr>
-      </p:sp>
-      <p:sp>
-        <p:nvSpPr>
-          <p:cNvPr id="18" name="Shape 16"/>
-          <p:cNvSpPr/>
-          <p:nvPr/>
-        </p:nvSpPr>
-        <p:spPr>
-          <a:xfrm>
-            <a:off x="8202168" y="3630168"/>
-            <a:ext cx="1170432" cy="118872"/>
-          </a:xfrm>
-          <a:prstGeom prst="line">
-            <a:avLst/>
-          </a:prstGeom>
-          <a:noFill/>
-          <a:ln w="25400">
-            <a:solidFill>
-              <a:srgbClr val="8ABBD8"/>
-            </a:solidFill>
-            <a:prstDash val="solid"/>
-          </a:ln>
-        </p:spPr>
-      </p:sp>
-      <p:sp>
-        <p:nvSpPr>
-          <p:cNvPr id="19" name="Shape 17"/>
-          <p:cNvSpPr/>
-          <p:nvPr/>
-        </p:nvSpPr>
-        <p:spPr>
-          <a:xfrm>
-            <a:off x="10543032" y="3630168"/>
-            <a:ext cx="-1170432" cy="118872"/>
-          </a:xfrm>
-          <a:prstGeom prst="line">
-            <a:avLst/>
-          </a:prstGeom>
-          <a:noFill/>
-          <a:ln w="25400">
-            <a:solidFill>
-              <a:srgbClr val="8ABBD8"/>
-            </a:solidFill>
-            <a:prstDash val="solid"/>
-          </a:ln>
-        </p:spPr>
-      </p:sp>
-      <p:sp>
-        <p:nvSpPr>
-          <p:cNvPr id="20" name="Text 18"/>
-          <p:cNvSpPr/>
-          <p:nvPr/>
-        </p:nvSpPr>
-        <p:spPr>
-          <a:xfrm>
-            <a:off x="7863840" y="4069080"/>
-            <a:ext cx="3017520" cy="164592"/>
-          </a:xfrm>
-          <a:prstGeom prst="rect">
-            <a:avLst/>
-          </a:prstGeom>
-          <a:noFill/>
-          <a:ln/>
-        </p:spPr>
-        <p:txBody>
-          <a:bodyPr wrap="square" lIns="0" tIns="0" rIns="0" bIns="0" rtlCol="0" anchor="ctr"/>
-          <a:lstStyle/>
-          <a:p>
-            <a:pPr algn="ctr" indent="0" marL="0">
-              <a:buNone/>
-            </a:pPr>
-            <a:r>
-              <a:rPr lang="en-US" sz="900" b="1" dirty="0">
-                <a:solidFill>
-                  <a:srgbClr val="003A63"/>
-                </a:solidFill>
-                <a:latin typeface="Aptos" pitchFamily="34" charset="0"/>
-                <a:ea typeface="Aptos" pitchFamily="34" charset="-122"/>
-                <a:cs typeface="Aptos" pitchFamily="34" charset="-120"/>
-              </a:rPr>
-              <a:t>Decision rights</a:t>
-            </a:r>
-            <a:endParaRPr lang="en-US" sz="900" dirty="0"/>
-          </a:p>
-        </p:txBody>
-      </p:sp>
-      <p:sp>
-        <p:nvSpPr>
-          <p:cNvPr id="21" name="Shape 19"/>
           <p:cNvSpPr/>
           <p:nvPr/>
         </p:nvSpPr>
@@ -8263,7 +7675,7 @@
       </p:sp>
       <p:sp>
         <p:nvSpPr>
-          <p:cNvPr id="22" name="Text 20"/>
+          <p:cNvPr id="17" name="Text 15"/>
           <p:cNvSpPr/>
           <p:nvPr/>
         </p:nvSpPr>
@@ -8302,7 +7714,7 @@
       </p:sp>
       <p:sp>
         <p:nvSpPr>
-          <p:cNvPr id="23" name="Text 21"/>
+          <p:cNvPr id="18" name="Text 16"/>
           <p:cNvSpPr/>
           <p:nvPr/>
         </p:nvSpPr>
@@ -8810,13 +8222,11 @@
             </a:avLst>
           </a:prstGeom>
           <a:solidFill>
-            <a:srgbClr val="FFFFFF">
-              <a:alpha val="88000"/>
-            </a:srgbClr>
+            <a:srgbClr val="FFFFFF"/>
           </a:solidFill>
           <a:ln w="12700">
             <a:solidFill>
-              <a:srgbClr val="D6E8F2"/>
+              <a:srgbClr val="B9D7E6"/>
             </a:solidFill>
             <a:prstDash val="solid"/>
           </a:ln>
@@ -8824,190 +8234,112 @@
       </p:sp>
       <p:sp>
         <p:nvSpPr>
-          <p:cNvPr id="14" name="Shape 12"/>
-          <p:cNvSpPr/>
-          <p:nvPr/>
-        </p:nvSpPr>
-        <p:spPr>
-          <a:xfrm>
-            <a:off x="7891272" y="3108960"/>
-            <a:ext cx="566928" cy="566928"/>
-          </a:xfrm>
-          <a:prstGeom prst="ellipse">
-            <a:avLst/>
-          </a:prstGeom>
-          <a:solidFill>
-            <a:srgbClr val="0068B7"/>
-          </a:solidFill>
-          <a:ln w="12700">
-            <a:solidFill>
-              <a:srgbClr val="0068B7"/>
-            </a:solidFill>
-            <a:prstDash val="solid"/>
-          </a:ln>
-        </p:spPr>
-      </p:sp>
-      <p:sp>
-        <p:nvSpPr>
-          <p:cNvPr id="15" name="Shape 13"/>
-          <p:cNvSpPr/>
-          <p:nvPr/>
-        </p:nvSpPr>
-        <p:spPr>
-          <a:xfrm>
-            <a:off x="10287000" y="3108960"/>
-            <a:ext cx="566928" cy="566928"/>
-          </a:xfrm>
-          <a:prstGeom prst="ellipse">
-            <a:avLst/>
-          </a:prstGeom>
-          <a:solidFill>
-            <a:srgbClr val="2F8A28"/>
-          </a:solidFill>
-          <a:ln w="12700">
-            <a:solidFill>
-              <a:srgbClr val="2F8A28"/>
-            </a:solidFill>
-            <a:prstDash val="solid"/>
-          </a:ln>
-        </p:spPr>
+          <p:cNvPr id="14" name="Text 12"/>
+          <p:cNvSpPr/>
+          <p:nvPr/>
+        </p:nvSpPr>
+        <p:spPr>
+          <a:xfrm>
+            <a:off x="7799832" y="2935224"/>
+            <a:ext cx="3145536" cy="256032"/>
+          </a:xfrm>
+          <a:prstGeom prst="rect">
+            <a:avLst/>
+          </a:prstGeom>
+          <a:noFill/>
+          <a:ln/>
+        </p:spPr>
+        <p:txBody>
+          <a:bodyPr wrap="square" lIns="0" tIns="0" rIns="0" bIns="0" rtlCol="0" anchor="ctr"/>
+          <a:lstStyle/>
+          <a:p>
+            <a:pPr indent="0" marL="0">
+              <a:buNone/>
+            </a:pPr>
+            <a:r>
+              <a:rPr lang="en-US" sz="1300" b="1" dirty="0">
+                <a:solidFill>
+                  <a:srgbClr val="0068B7"/>
+                </a:solidFill>
+                <a:latin typeface="Aptos" pitchFamily="34" charset="0"/>
+                <a:ea typeface="Aptos" pitchFamily="34" charset="-122"/>
+                <a:cs typeface="Aptos" pitchFamily="34" charset="-120"/>
+              </a:rPr>
+              <a:t>Concept checkpoints</a:t>
+            </a:r>
+            <a:endParaRPr lang="en-US" sz="1300" dirty="0"/>
+          </a:p>
+        </p:txBody>
+      </p:sp>
+      <p:sp>
+        <p:nvSpPr>
+          <p:cNvPr id="15" name="Text 13"/>
+          <p:cNvSpPr/>
+          <p:nvPr/>
+        </p:nvSpPr>
+        <p:spPr>
+          <a:xfrm>
+            <a:off x="7818120" y="3300984"/>
+            <a:ext cx="3090672" cy="877824"/>
+          </a:xfrm>
+          <a:prstGeom prst="rect">
+            <a:avLst/>
+          </a:prstGeom>
+          <a:noFill/>
+          <a:ln/>
+        </p:spPr>
+        <p:txBody>
+          <a:bodyPr wrap="square" lIns="254" tIns="254" rIns="254" bIns="254" rtlCol="0" anchor="t">
+            <a:normAutofit/>
+          </a:bodyPr>
+          <a:lstStyle/>
+          <a:p>
+            <a:r>
+              <a:rPr lang="en-US" sz="1380" dirty="0">
+                <a:solidFill>
+                  <a:srgbClr val="17364A"/>
+                </a:solidFill>
+                <a:latin typeface="Aptos" pitchFamily="34" charset="0"/>
+                <a:ea typeface="Aptos" pitchFamily="34" charset="-122"/>
+                <a:cs typeface="Aptos" pitchFamily="34" charset="-120"/>
+              </a:rPr>
+              <a:t>The artifact should describe the use case, affected users, data sources, system.</a:t>
+            </a:r>
+            <a:endParaRPr lang="en-US" sz="1380" dirty="0"/>
+          </a:p>
+          <a:p>
+            <a:r>
+              <a:rPr lang="en-US" sz="1380" dirty="0">
+                <a:solidFill>
+                  <a:srgbClr val="17364A"/>
+                </a:solidFill>
+                <a:latin typeface="Aptos" pitchFamily="34" charset="0"/>
+                <a:ea typeface="Aptos" pitchFamily="34" charset="-122"/>
+                <a:cs typeface="Aptos" pitchFamily="34" charset="-120"/>
+              </a:rPr>
+              <a:t>The exercise should produce a work product that could be used in a governance meeting,.</a:t>
+            </a:r>
+            <a:endParaRPr lang="en-US" sz="1380" dirty="0"/>
+          </a:p>
+          <a:p>
+            <a:r>
+              <a:rPr lang="en-US" sz="1380" dirty="0">
+                <a:solidFill>
+                  <a:srgbClr val="17364A"/>
+                </a:solidFill>
+                <a:latin typeface="Aptos" pitchFamily="34" charset="0"/>
+                <a:ea typeface="Aptos" pitchFamily="34" charset="-122"/>
+                <a:cs typeface="Aptos" pitchFamily="34" charset="-120"/>
+              </a:rPr>
+              <a:t>Learners should document assumptions and identify which staff or partners need to be.</a:t>
+            </a:r>
+            <a:endParaRPr lang="en-US" sz="1380" dirty="0"/>
+          </a:p>
+        </p:txBody>
       </p:sp>
       <p:sp>
         <p:nvSpPr>
           <p:cNvPr id="16" name="Shape 14"/>
-          <p:cNvSpPr/>
-          <p:nvPr/>
-        </p:nvSpPr>
-        <p:spPr>
-          <a:xfrm>
-            <a:off x="9089136" y="3456432"/>
-            <a:ext cx="566928" cy="566928"/>
-          </a:xfrm>
-          <a:prstGeom prst="ellipse">
-            <a:avLst/>
-          </a:prstGeom>
-          <a:solidFill>
-            <a:srgbClr val="6A4CA3"/>
-          </a:solidFill>
-          <a:ln w="12700">
-            <a:solidFill>
-              <a:srgbClr val="6A4CA3"/>
-            </a:solidFill>
-            <a:prstDash val="solid"/>
-          </a:ln>
-        </p:spPr>
-      </p:sp>
-      <p:sp>
-        <p:nvSpPr>
-          <p:cNvPr id="17" name="Shape 15"/>
-          <p:cNvSpPr/>
-          <p:nvPr/>
-        </p:nvSpPr>
-        <p:spPr>
-          <a:xfrm>
-            <a:off x="8385048" y="3419856"/>
-            <a:ext cx="1975104" cy="0"/>
-          </a:xfrm>
-          <a:prstGeom prst="line">
-            <a:avLst/>
-          </a:prstGeom>
-          <a:noFill/>
-          <a:ln w="25400">
-            <a:solidFill>
-              <a:srgbClr val="8ABBD8"/>
-            </a:solidFill>
-            <a:prstDash val="solid"/>
-          </a:ln>
-        </p:spPr>
-      </p:sp>
-      <p:sp>
-        <p:nvSpPr>
-          <p:cNvPr id="18" name="Shape 16"/>
-          <p:cNvSpPr/>
-          <p:nvPr/>
-        </p:nvSpPr>
-        <p:spPr>
-          <a:xfrm>
-            <a:off x="8202168" y="3630168"/>
-            <a:ext cx="1170432" cy="118872"/>
-          </a:xfrm>
-          <a:prstGeom prst="line">
-            <a:avLst/>
-          </a:prstGeom>
-          <a:noFill/>
-          <a:ln w="25400">
-            <a:solidFill>
-              <a:srgbClr val="8ABBD8"/>
-            </a:solidFill>
-            <a:prstDash val="solid"/>
-          </a:ln>
-        </p:spPr>
-      </p:sp>
-      <p:sp>
-        <p:nvSpPr>
-          <p:cNvPr id="19" name="Shape 17"/>
-          <p:cNvSpPr/>
-          <p:nvPr/>
-        </p:nvSpPr>
-        <p:spPr>
-          <a:xfrm>
-            <a:off x="10543032" y="3630168"/>
-            <a:ext cx="-1170432" cy="118872"/>
-          </a:xfrm>
-          <a:prstGeom prst="line">
-            <a:avLst/>
-          </a:prstGeom>
-          <a:noFill/>
-          <a:ln w="25400">
-            <a:solidFill>
-              <a:srgbClr val="8ABBD8"/>
-            </a:solidFill>
-            <a:prstDash val="solid"/>
-          </a:ln>
-        </p:spPr>
-      </p:sp>
-      <p:sp>
-        <p:nvSpPr>
-          <p:cNvPr id="20" name="Text 18"/>
-          <p:cNvSpPr/>
-          <p:nvPr/>
-        </p:nvSpPr>
-        <p:spPr>
-          <a:xfrm>
-            <a:off x="7863840" y="4069080"/>
-            <a:ext cx="3017520" cy="164592"/>
-          </a:xfrm>
-          <a:prstGeom prst="rect">
-            <a:avLst/>
-          </a:prstGeom>
-          <a:noFill/>
-          <a:ln/>
-        </p:spPr>
-        <p:txBody>
-          <a:bodyPr wrap="square" lIns="0" tIns="0" rIns="0" bIns="0" rtlCol="0" anchor="ctr"/>
-          <a:lstStyle/>
-          <a:p>
-            <a:pPr algn="ctr" indent="0" marL="0">
-              <a:buNone/>
-            </a:pPr>
-            <a:r>
-              <a:rPr lang="en-US" sz="900" b="1" dirty="0">
-                <a:solidFill>
-                  <a:srgbClr val="003A63"/>
-                </a:solidFill>
-                <a:latin typeface="Aptos" pitchFamily="34" charset="0"/>
-                <a:ea typeface="Aptos" pitchFamily="34" charset="-122"/>
-                <a:cs typeface="Aptos" pitchFamily="34" charset="-120"/>
-              </a:rPr>
-              <a:t>Decision rights</a:t>
-            </a:r>
-            <a:endParaRPr lang="en-US" sz="900" dirty="0"/>
-          </a:p>
-        </p:txBody>
-      </p:sp>
-      <p:sp>
-        <p:nvSpPr>
-          <p:cNvPr id="21" name="Shape 19"/>
           <p:cNvSpPr/>
           <p:nvPr/>
         </p:nvSpPr>
@@ -9034,7 +8366,7 @@
       </p:sp>
       <p:sp>
         <p:nvSpPr>
-          <p:cNvPr id="22" name="Text 20"/>
+          <p:cNvPr id="17" name="Text 15"/>
           <p:cNvSpPr/>
           <p:nvPr/>
         </p:nvSpPr>
@@ -9073,7 +8405,7 @@
       </p:sp>
       <p:sp>
         <p:nvSpPr>
-          <p:cNvPr id="23" name="Text 21"/>
+          <p:cNvPr id="18" name="Text 16"/>
           <p:cNvSpPr/>
           <p:nvPr/>
         </p:nvSpPr>
@@ -9567,13 +8899,11 @@
             </a:avLst>
           </a:prstGeom>
           <a:solidFill>
-            <a:srgbClr val="FFFFFF">
-              <a:alpha val="88000"/>
-            </a:srgbClr>
+            <a:srgbClr val="FFFFFF"/>
           </a:solidFill>
           <a:ln w="12700">
             <a:solidFill>
-              <a:srgbClr val="D6E8F2"/>
+              <a:srgbClr val="B9D7E6"/>
             </a:solidFill>
             <a:prstDash val="solid"/>
           </a:ln>
@@ -9581,190 +8911,98 @@
       </p:sp>
       <p:sp>
         <p:nvSpPr>
-          <p:cNvPr id="14" name="Shape 12"/>
-          <p:cNvSpPr/>
-          <p:nvPr/>
-        </p:nvSpPr>
-        <p:spPr>
-          <a:xfrm>
-            <a:off x="7891272" y="3108960"/>
-            <a:ext cx="566928" cy="566928"/>
-          </a:xfrm>
-          <a:prstGeom prst="ellipse">
-            <a:avLst/>
-          </a:prstGeom>
-          <a:solidFill>
-            <a:srgbClr val="0068B7"/>
-          </a:solidFill>
-          <a:ln w="12700">
-            <a:solidFill>
-              <a:srgbClr val="0068B7"/>
-            </a:solidFill>
-            <a:prstDash val="solid"/>
-          </a:ln>
-        </p:spPr>
-      </p:sp>
-      <p:sp>
-        <p:nvSpPr>
-          <p:cNvPr id="15" name="Shape 13"/>
-          <p:cNvSpPr/>
-          <p:nvPr/>
-        </p:nvSpPr>
-        <p:spPr>
-          <a:xfrm>
-            <a:off x="10287000" y="3108960"/>
-            <a:ext cx="566928" cy="566928"/>
-          </a:xfrm>
-          <a:prstGeom prst="ellipse">
-            <a:avLst/>
-          </a:prstGeom>
-          <a:solidFill>
-            <a:srgbClr val="2F8A28"/>
-          </a:solidFill>
-          <a:ln w="12700">
-            <a:solidFill>
-              <a:srgbClr val="2F8A28"/>
-            </a:solidFill>
-            <a:prstDash val="solid"/>
-          </a:ln>
-        </p:spPr>
+          <p:cNvPr id="14" name="Text 12"/>
+          <p:cNvSpPr/>
+          <p:nvPr/>
+        </p:nvSpPr>
+        <p:spPr>
+          <a:xfrm>
+            <a:off x="7799832" y="2935224"/>
+            <a:ext cx="3145536" cy="256032"/>
+          </a:xfrm>
+          <a:prstGeom prst="rect">
+            <a:avLst/>
+          </a:prstGeom>
+          <a:noFill/>
+          <a:ln/>
+        </p:spPr>
+        <p:txBody>
+          <a:bodyPr wrap="square" lIns="0" tIns="0" rIns="0" bIns="0" rtlCol="0" anchor="ctr"/>
+          <a:lstStyle/>
+          <a:p>
+            <a:pPr indent="0" marL="0">
+              <a:buNone/>
+            </a:pPr>
+            <a:r>
+              <a:rPr lang="en-US" sz="1300" b="1" dirty="0">
+                <a:solidFill>
+                  <a:srgbClr val="0068B7"/>
+                </a:solidFill>
+                <a:latin typeface="Aptos" pitchFamily="34" charset="0"/>
+                <a:ea typeface="Aptos" pitchFamily="34" charset="-122"/>
+                <a:cs typeface="Aptos" pitchFamily="34" charset="-120"/>
+              </a:rPr>
+              <a:t>Concept checkpoints</a:t>
+            </a:r>
+            <a:endParaRPr lang="en-US" sz="1300" dirty="0"/>
+          </a:p>
+        </p:txBody>
+      </p:sp>
+      <p:sp>
+        <p:nvSpPr>
+          <p:cNvPr id="15" name="Text 13"/>
+          <p:cNvSpPr/>
+          <p:nvPr/>
+        </p:nvSpPr>
+        <p:spPr>
+          <a:xfrm>
+            <a:off x="7818120" y="3300984"/>
+            <a:ext cx="3090672" cy="877824"/>
+          </a:xfrm>
+          <a:prstGeom prst="rect">
+            <a:avLst/>
+          </a:prstGeom>
+          <a:noFill/>
+          <a:ln/>
+        </p:spPr>
+        <p:txBody>
+          <a:bodyPr wrap="square" lIns="254" tIns="254" rIns="254" bIns="254" rtlCol="0" anchor="t">
+            <a:normAutofit/>
+          </a:bodyPr>
+          <a:lstStyle/>
+          <a:p>
+            <a:r>
+              <a:rPr lang="en-US" sz="1380" dirty="0">
+                <a:solidFill>
+                  <a:srgbClr val="17364A"/>
+                </a:solidFill>
+                <a:latin typeface="Aptos" pitchFamily="34" charset="0"/>
+                <a:ea typeface="Aptos" pitchFamily="34" charset="-122"/>
+                <a:cs typeface="Aptos" pitchFamily="34" charset="-120"/>
+              </a:rPr>
+              <a:t>The expected artifact is a completed AI-ready data governance checklist.</a:t>
+            </a:r>
+            <a:endParaRPr lang="en-US" sz="1380" dirty="0"/>
+          </a:p>
+          <a:p>
+            <a:r>
+              <a:rPr lang="en-US" sz="1380" dirty="0">
+                <a:solidFill>
+                  <a:srgbClr val="17364A"/>
+                </a:solidFill>
+                <a:latin typeface="Aptos" pitchFamily="34" charset="0"/>
+                <a:ea typeface="Aptos" pitchFamily="34" charset="-122"/>
+                <a:cs typeface="Aptos" pitchFamily="34" charset="-120"/>
+              </a:rPr>
+              <a:t>It should be specific to a public health workflow and should include technical.</a:t>
+            </a:r>
+            <a:endParaRPr lang="en-US" sz="1380" dirty="0"/>
+          </a:p>
+        </p:txBody>
       </p:sp>
       <p:sp>
         <p:nvSpPr>
           <p:cNvPr id="16" name="Shape 14"/>
-          <p:cNvSpPr/>
-          <p:nvPr/>
-        </p:nvSpPr>
-        <p:spPr>
-          <a:xfrm>
-            <a:off x="9089136" y="3456432"/>
-            <a:ext cx="566928" cy="566928"/>
-          </a:xfrm>
-          <a:prstGeom prst="ellipse">
-            <a:avLst/>
-          </a:prstGeom>
-          <a:solidFill>
-            <a:srgbClr val="6A4CA3"/>
-          </a:solidFill>
-          <a:ln w="12700">
-            <a:solidFill>
-              <a:srgbClr val="6A4CA3"/>
-            </a:solidFill>
-            <a:prstDash val="solid"/>
-          </a:ln>
-        </p:spPr>
-      </p:sp>
-      <p:sp>
-        <p:nvSpPr>
-          <p:cNvPr id="17" name="Shape 15"/>
-          <p:cNvSpPr/>
-          <p:nvPr/>
-        </p:nvSpPr>
-        <p:spPr>
-          <a:xfrm>
-            <a:off x="8385048" y="3419856"/>
-            <a:ext cx="1975104" cy="0"/>
-          </a:xfrm>
-          <a:prstGeom prst="line">
-            <a:avLst/>
-          </a:prstGeom>
-          <a:noFill/>
-          <a:ln w="25400">
-            <a:solidFill>
-              <a:srgbClr val="8ABBD8"/>
-            </a:solidFill>
-            <a:prstDash val="solid"/>
-          </a:ln>
-        </p:spPr>
-      </p:sp>
-      <p:sp>
-        <p:nvSpPr>
-          <p:cNvPr id="18" name="Shape 16"/>
-          <p:cNvSpPr/>
-          <p:nvPr/>
-        </p:nvSpPr>
-        <p:spPr>
-          <a:xfrm>
-            <a:off x="8202168" y="3630168"/>
-            <a:ext cx="1170432" cy="118872"/>
-          </a:xfrm>
-          <a:prstGeom prst="line">
-            <a:avLst/>
-          </a:prstGeom>
-          <a:noFill/>
-          <a:ln w="25400">
-            <a:solidFill>
-              <a:srgbClr val="8ABBD8"/>
-            </a:solidFill>
-            <a:prstDash val="solid"/>
-          </a:ln>
-        </p:spPr>
-      </p:sp>
-      <p:sp>
-        <p:nvSpPr>
-          <p:cNvPr id="19" name="Shape 17"/>
-          <p:cNvSpPr/>
-          <p:nvPr/>
-        </p:nvSpPr>
-        <p:spPr>
-          <a:xfrm>
-            <a:off x="10543032" y="3630168"/>
-            <a:ext cx="-1170432" cy="118872"/>
-          </a:xfrm>
-          <a:prstGeom prst="line">
-            <a:avLst/>
-          </a:prstGeom>
-          <a:noFill/>
-          <a:ln w="25400">
-            <a:solidFill>
-              <a:srgbClr val="8ABBD8"/>
-            </a:solidFill>
-            <a:prstDash val="solid"/>
-          </a:ln>
-        </p:spPr>
-      </p:sp>
-      <p:sp>
-        <p:nvSpPr>
-          <p:cNvPr id="20" name="Text 18"/>
-          <p:cNvSpPr/>
-          <p:nvPr/>
-        </p:nvSpPr>
-        <p:spPr>
-          <a:xfrm>
-            <a:off x="7863840" y="4069080"/>
-            <a:ext cx="3017520" cy="164592"/>
-          </a:xfrm>
-          <a:prstGeom prst="rect">
-            <a:avLst/>
-          </a:prstGeom>
-          <a:noFill/>
-          <a:ln/>
-        </p:spPr>
-        <p:txBody>
-          <a:bodyPr wrap="square" lIns="0" tIns="0" rIns="0" bIns="0" rtlCol="0" anchor="ctr"/>
-          <a:lstStyle/>
-          <a:p>
-            <a:pPr algn="ctr" indent="0" marL="0">
-              <a:buNone/>
-            </a:pPr>
-            <a:r>
-              <a:rPr lang="en-US" sz="900" b="1" dirty="0">
-                <a:solidFill>
-                  <a:srgbClr val="003A63"/>
-                </a:solidFill>
-                <a:latin typeface="Aptos" pitchFamily="34" charset="0"/>
-                <a:ea typeface="Aptos" pitchFamily="34" charset="-122"/>
-                <a:cs typeface="Aptos" pitchFamily="34" charset="-120"/>
-              </a:rPr>
-              <a:t>Decision rights</a:t>
-            </a:r>
-            <a:endParaRPr lang="en-US" sz="900" dirty="0"/>
-          </a:p>
-        </p:txBody>
-      </p:sp>
-      <p:sp>
-        <p:nvSpPr>
-          <p:cNvPr id="21" name="Shape 19"/>
           <p:cNvSpPr/>
           <p:nvPr/>
         </p:nvSpPr>
@@ -9791,7 +9029,7 @@
       </p:sp>
       <p:sp>
         <p:nvSpPr>
-          <p:cNvPr id="22" name="Text 20"/>
+          <p:cNvPr id="17" name="Text 15"/>
           <p:cNvSpPr/>
           <p:nvPr/>
         </p:nvSpPr>
@@ -9830,7 +9068,7 @@
       </p:sp>
       <p:sp>
         <p:nvSpPr>
-          <p:cNvPr id="23" name="Text 21"/>
+          <p:cNvPr id="18" name="Text 16"/>
           <p:cNvSpPr/>
           <p:nvPr/>
         </p:nvSpPr>
@@ -10310,13 +9548,11 @@
             </a:avLst>
           </a:prstGeom>
           <a:solidFill>
-            <a:srgbClr val="FFFFFF">
-              <a:alpha val="88000"/>
-            </a:srgbClr>
+            <a:srgbClr val="FFFFFF"/>
           </a:solidFill>
           <a:ln w="12700">
             <a:solidFill>
-              <a:srgbClr val="D6E8F2"/>
+              <a:srgbClr val="B9D7E6"/>
             </a:solidFill>
             <a:prstDash val="solid"/>
           </a:ln>
@@ -10324,190 +9560,98 @@
       </p:sp>
       <p:sp>
         <p:nvSpPr>
-          <p:cNvPr id="14" name="Shape 12"/>
-          <p:cNvSpPr/>
-          <p:nvPr/>
-        </p:nvSpPr>
-        <p:spPr>
-          <a:xfrm>
-            <a:off x="7891272" y="3108960"/>
-            <a:ext cx="566928" cy="566928"/>
-          </a:xfrm>
-          <a:prstGeom prst="ellipse">
-            <a:avLst/>
-          </a:prstGeom>
-          <a:solidFill>
-            <a:srgbClr val="0068B7"/>
-          </a:solidFill>
-          <a:ln w="12700">
-            <a:solidFill>
-              <a:srgbClr val="0068B7"/>
-            </a:solidFill>
-            <a:prstDash val="solid"/>
-          </a:ln>
-        </p:spPr>
-      </p:sp>
-      <p:sp>
-        <p:nvSpPr>
-          <p:cNvPr id="15" name="Shape 13"/>
-          <p:cNvSpPr/>
-          <p:nvPr/>
-        </p:nvSpPr>
-        <p:spPr>
-          <a:xfrm>
-            <a:off x="10287000" y="3108960"/>
-            <a:ext cx="566928" cy="566928"/>
-          </a:xfrm>
-          <a:prstGeom prst="ellipse">
-            <a:avLst/>
-          </a:prstGeom>
-          <a:solidFill>
-            <a:srgbClr val="2F8A28"/>
-          </a:solidFill>
-          <a:ln w="12700">
-            <a:solidFill>
-              <a:srgbClr val="2F8A28"/>
-            </a:solidFill>
-            <a:prstDash val="solid"/>
-          </a:ln>
-        </p:spPr>
+          <p:cNvPr id="14" name="Text 12"/>
+          <p:cNvSpPr/>
+          <p:nvPr/>
+        </p:nvSpPr>
+        <p:spPr>
+          <a:xfrm>
+            <a:off x="7799832" y="2935224"/>
+            <a:ext cx="3145536" cy="256032"/>
+          </a:xfrm>
+          <a:prstGeom prst="rect">
+            <a:avLst/>
+          </a:prstGeom>
+          <a:noFill/>
+          <a:ln/>
+        </p:spPr>
+        <p:txBody>
+          <a:bodyPr wrap="square" lIns="0" tIns="0" rIns="0" bIns="0" rtlCol="0" anchor="ctr"/>
+          <a:lstStyle/>
+          <a:p>
+            <a:pPr indent="0" marL="0">
+              <a:buNone/>
+            </a:pPr>
+            <a:r>
+              <a:rPr lang="en-US" sz="1300" b="1" dirty="0">
+                <a:solidFill>
+                  <a:srgbClr val="0068B7"/>
+                </a:solidFill>
+                <a:latin typeface="Aptos" pitchFamily="34" charset="0"/>
+                <a:ea typeface="Aptos" pitchFamily="34" charset="-122"/>
+                <a:cs typeface="Aptos" pitchFamily="34" charset="-120"/>
+              </a:rPr>
+              <a:t>Concept checkpoints</a:t>
+            </a:r>
+            <a:endParaRPr lang="en-US" sz="1300" dirty="0"/>
+          </a:p>
+        </p:txBody>
+      </p:sp>
+      <p:sp>
+        <p:nvSpPr>
+          <p:cNvPr id="15" name="Text 13"/>
+          <p:cNvSpPr/>
+          <p:nvPr/>
+        </p:nvSpPr>
+        <p:spPr>
+          <a:xfrm>
+            <a:off x="7818120" y="3300984"/>
+            <a:ext cx="3090672" cy="877824"/>
+          </a:xfrm>
+          <a:prstGeom prst="rect">
+            <a:avLst/>
+          </a:prstGeom>
+          <a:noFill/>
+          <a:ln/>
+        </p:spPr>
+        <p:txBody>
+          <a:bodyPr wrap="square" lIns="254" tIns="254" rIns="254" bIns="254" rtlCol="0" anchor="t">
+            <a:normAutofit/>
+          </a:bodyPr>
+          <a:lstStyle/>
+          <a:p>
+            <a:r>
+              <a:rPr lang="en-US" sz="1380" dirty="0">
+                <a:solidFill>
+                  <a:srgbClr val="17364A"/>
+                </a:solidFill>
+                <a:latin typeface="Aptos" pitchFamily="34" charset="0"/>
+                <a:ea typeface="Aptos" pitchFamily="34" charset="-122"/>
+                <a:cs typeface="Aptos" pitchFamily="34" charset="-120"/>
+              </a:rPr>
+              <a:t>The expected artifact is a completed AI-ready data governance checklist.</a:t>
+            </a:r>
+            <a:endParaRPr lang="en-US" sz="1380" dirty="0"/>
+          </a:p>
+          <a:p>
+            <a:r>
+              <a:rPr lang="en-US" sz="1380" dirty="0">
+                <a:solidFill>
+                  <a:srgbClr val="17364A"/>
+                </a:solidFill>
+                <a:latin typeface="Aptos" pitchFamily="34" charset="0"/>
+                <a:ea typeface="Aptos" pitchFamily="34" charset="-122"/>
+                <a:cs typeface="Aptos" pitchFamily="34" charset="-120"/>
+              </a:rPr>
+              <a:t>It should be specific to a public health workflow and should include technical.</a:t>
+            </a:r>
+            <a:endParaRPr lang="en-US" sz="1380" dirty="0"/>
+          </a:p>
+        </p:txBody>
       </p:sp>
       <p:sp>
         <p:nvSpPr>
           <p:cNvPr id="16" name="Shape 14"/>
-          <p:cNvSpPr/>
-          <p:nvPr/>
-        </p:nvSpPr>
-        <p:spPr>
-          <a:xfrm>
-            <a:off x="9089136" y="3456432"/>
-            <a:ext cx="566928" cy="566928"/>
-          </a:xfrm>
-          <a:prstGeom prst="ellipse">
-            <a:avLst/>
-          </a:prstGeom>
-          <a:solidFill>
-            <a:srgbClr val="6A4CA3"/>
-          </a:solidFill>
-          <a:ln w="12700">
-            <a:solidFill>
-              <a:srgbClr val="6A4CA3"/>
-            </a:solidFill>
-            <a:prstDash val="solid"/>
-          </a:ln>
-        </p:spPr>
-      </p:sp>
-      <p:sp>
-        <p:nvSpPr>
-          <p:cNvPr id="17" name="Shape 15"/>
-          <p:cNvSpPr/>
-          <p:nvPr/>
-        </p:nvSpPr>
-        <p:spPr>
-          <a:xfrm>
-            <a:off x="8385048" y="3419856"/>
-            <a:ext cx="1975104" cy="0"/>
-          </a:xfrm>
-          <a:prstGeom prst="line">
-            <a:avLst/>
-          </a:prstGeom>
-          <a:noFill/>
-          <a:ln w="25400">
-            <a:solidFill>
-              <a:srgbClr val="8ABBD8"/>
-            </a:solidFill>
-            <a:prstDash val="solid"/>
-          </a:ln>
-        </p:spPr>
-      </p:sp>
-      <p:sp>
-        <p:nvSpPr>
-          <p:cNvPr id="18" name="Shape 16"/>
-          <p:cNvSpPr/>
-          <p:nvPr/>
-        </p:nvSpPr>
-        <p:spPr>
-          <a:xfrm>
-            <a:off x="8202168" y="3630168"/>
-            <a:ext cx="1170432" cy="118872"/>
-          </a:xfrm>
-          <a:prstGeom prst="line">
-            <a:avLst/>
-          </a:prstGeom>
-          <a:noFill/>
-          <a:ln w="25400">
-            <a:solidFill>
-              <a:srgbClr val="8ABBD8"/>
-            </a:solidFill>
-            <a:prstDash val="solid"/>
-          </a:ln>
-        </p:spPr>
-      </p:sp>
-      <p:sp>
-        <p:nvSpPr>
-          <p:cNvPr id="19" name="Shape 17"/>
-          <p:cNvSpPr/>
-          <p:nvPr/>
-        </p:nvSpPr>
-        <p:spPr>
-          <a:xfrm>
-            <a:off x="10543032" y="3630168"/>
-            <a:ext cx="-1170432" cy="118872"/>
-          </a:xfrm>
-          <a:prstGeom prst="line">
-            <a:avLst/>
-          </a:prstGeom>
-          <a:noFill/>
-          <a:ln w="25400">
-            <a:solidFill>
-              <a:srgbClr val="8ABBD8"/>
-            </a:solidFill>
-            <a:prstDash val="solid"/>
-          </a:ln>
-        </p:spPr>
-      </p:sp>
-      <p:sp>
-        <p:nvSpPr>
-          <p:cNvPr id="20" name="Text 18"/>
-          <p:cNvSpPr/>
-          <p:nvPr/>
-        </p:nvSpPr>
-        <p:spPr>
-          <a:xfrm>
-            <a:off x="7863840" y="4069080"/>
-            <a:ext cx="3017520" cy="164592"/>
-          </a:xfrm>
-          <a:prstGeom prst="rect">
-            <a:avLst/>
-          </a:prstGeom>
-          <a:noFill/>
-          <a:ln/>
-        </p:spPr>
-        <p:txBody>
-          <a:bodyPr wrap="square" lIns="0" tIns="0" rIns="0" bIns="0" rtlCol="0" anchor="ctr"/>
-          <a:lstStyle/>
-          <a:p>
-            <a:pPr algn="ctr" indent="0" marL="0">
-              <a:buNone/>
-            </a:pPr>
-            <a:r>
-              <a:rPr lang="en-US" sz="900" b="1" dirty="0">
-                <a:solidFill>
-                  <a:srgbClr val="003A63"/>
-                </a:solidFill>
-                <a:latin typeface="Aptos" pitchFamily="34" charset="0"/>
-                <a:ea typeface="Aptos" pitchFamily="34" charset="-122"/>
-                <a:cs typeface="Aptos" pitchFamily="34" charset="-120"/>
-              </a:rPr>
-              <a:t>Decision rights</a:t>
-            </a:r>
-            <a:endParaRPr lang="en-US" sz="900" dirty="0"/>
-          </a:p>
-        </p:txBody>
-      </p:sp>
-      <p:sp>
-        <p:nvSpPr>
-          <p:cNvPr id="21" name="Shape 19"/>
           <p:cNvSpPr/>
           <p:nvPr/>
         </p:nvSpPr>
@@ -10534,7 +9678,7 @@
       </p:sp>
       <p:sp>
         <p:nvSpPr>
-          <p:cNvPr id="22" name="Text 20"/>
+          <p:cNvPr id="17" name="Text 15"/>
           <p:cNvSpPr/>
           <p:nvPr/>
         </p:nvSpPr>
@@ -10573,7 +9717,7 @@
       </p:sp>
       <p:sp>
         <p:nvSpPr>
-          <p:cNvPr id="23" name="Text 21"/>
+          <p:cNvPr id="18" name="Text 16"/>
           <p:cNvSpPr/>
           <p:nvPr/>
         </p:nvSpPr>
@@ -11106,20 +10250,20 @@
         </p:nvSpPr>
         <p:spPr>
           <a:xfrm>
-            <a:off x="7635240" y="3730752"/>
-            <a:ext cx="1033272" cy="749808"/>
+            <a:off x="7909560" y="3675888"/>
+            <a:ext cx="3154680" cy="1691640"/>
           </a:xfrm>
           <a:prstGeom prst="roundRect">
             <a:avLst>
-              <a:gd name="adj" fmla="val 14634"/>
+              <a:gd name="adj" fmla="val 6486"/>
             </a:avLst>
           </a:prstGeom>
           <a:solidFill>
-            <a:srgbClr val="0068B7"/>
+            <a:srgbClr val="FFFFFF"/>
           </a:solidFill>
           <a:ln w="12700">
             <a:solidFill>
-              <a:srgbClr val="0068B7"/>
+              <a:srgbClr val="B9D7E6"/>
             </a:solidFill>
             <a:prstDash val="solid"/>
           </a:ln>
@@ -11133,172 +10277,100 @@
         </p:nvSpPr>
         <p:spPr>
           <a:xfrm>
-            <a:off x="7708392" y="3922776"/>
-            <a:ext cx="886968" cy="310896"/>
-          </a:xfrm>
-          <a:prstGeom prst="rect">
-            <a:avLst/>
-          </a:prstGeom>
-          <a:noFill/>
-          <a:ln/>
-        </p:spPr>
-        <p:txBody>
-          <a:bodyPr wrap="square" lIns="0" tIns="0" rIns="0" bIns="0" rtlCol="0" anchor="ctr">
+            <a:off x="8074152" y="3822192"/>
+            <a:ext cx="2825496" cy="256032"/>
+          </a:xfrm>
+          <a:prstGeom prst="rect">
+            <a:avLst/>
+          </a:prstGeom>
+          <a:noFill/>
+          <a:ln/>
+        </p:spPr>
+        <p:txBody>
+          <a:bodyPr wrap="square" lIns="0" tIns="0" rIns="0" bIns="0" rtlCol="0" anchor="ctr"/>
+          <a:lstStyle/>
+          <a:p>
+            <a:pPr indent="0" marL="0">
+              <a:buNone/>
+            </a:pPr>
+            <a:r>
+              <a:rPr lang="en-US" sz="1300" b="1" dirty="0">
+                <a:solidFill>
+                  <a:srgbClr val="0068B7"/>
+                </a:solidFill>
+                <a:latin typeface="Aptos" pitchFamily="34" charset="0"/>
+                <a:ea typeface="Aptos" pitchFamily="34" charset="-122"/>
+                <a:cs typeface="Aptos" pitchFamily="34" charset="-120"/>
+              </a:rPr>
+              <a:t>Learning sequence</a:t>
+            </a:r>
+            <a:endParaRPr lang="en-US" sz="1300" dirty="0"/>
+          </a:p>
+        </p:txBody>
+      </p:sp>
+      <p:sp>
+        <p:nvSpPr>
+          <p:cNvPr id="15" name="Text 13"/>
+          <p:cNvSpPr/>
+          <p:nvPr/>
+        </p:nvSpPr>
+        <p:spPr>
+          <a:xfrm>
+            <a:off x="8092440" y="4187952"/>
+            <a:ext cx="2770632" cy="1033272"/>
+          </a:xfrm>
+          <a:prstGeom prst="rect">
+            <a:avLst/>
+          </a:prstGeom>
+          <a:noFill/>
+          <a:ln/>
+        </p:spPr>
+        <p:txBody>
+          <a:bodyPr wrap="square" lIns="254" tIns="254" rIns="254" bIns="254" rtlCol="0" anchor="t">
             <a:normAutofit/>
           </a:bodyPr>
           <a:lstStyle/>
           <a:p>
-            <a:pPr algn="ctr" indent="0" marL="0">
-              <a:buNone/>
-            </a:pPr>
-            <a:r>
-              <a:rPr lang="en-US" sz="1500" b="1" dirty="0">
-                <a:solidFill>
-                  <a:srgbClr val="FFFFFF"/>
-                </a:solidFill>
-                <a:latin typeface="Aptos" pitchFamily="34" charset="0"/>
-                <a:ea typeface="Aptos" pitchFamily="34" charset="-122"/>
-                <a:cs typeface="Aptos" pitchFamily="34" charset="-120"/>
-              </a:rPr>
-              <a:t>Learn</a:t>
-            </a:r>
-            <a:endParaRPr lang="en-US" sz="1500" dirty="0"/>
-          </a:p>
-        </p:txBody>
-      </p:sp>
-      <p:sp>
-        <p:nvSpPr>
-          <p:cNvPr id="15" name="Shape 13"/>
-          <p:cNvSpPr/>
-          <p:nvPr/>
-        </p:nvSpPr>
-        <p:spPr>
-          <a:xfrm>
-            <a:off x="8924544" y="3730752"/>
-            <a:ext cx="1033272" cy="749808"/>
-          </a:xfrm>
-          <a:prstGeom prst="roundRect">
-            <a:avLst>
-              <a:gd name="adj" fmla="val 14634"/>
-            </a:avLst>
-          </a:prstGeom>
-          <a:solidFill>
-            <a:srgbClr val="2F8A28"/>
-          </a:solidFill>
-          <a:ln w="12700">
-            <a:solidFill>
-              <a:srgbClr val="2F8A28"/>
-            </a:solidFill>
-            <a:prstDash val="solid"/>
-          </a:ln>
-        </p:spPr>
-      </p:sp>
-      <p:sp>
-        <p:nvSpPr>
-          <p:cNvPr id="16" name="Text 14"/>
-          <p:cNvSpPr/>
-          <p:nvPr/>
-        </p:nvSpPr>
-        <p:spPr>
-          <a:xfrm>
-            <a:off x="8997696" y="3922776"/>
-            <a:ext cx="886968" cy="310896"/>
-          </a:xfrm>
-          <a:prstGeom prst="rect">
-            <a:avLst/>
-          </a:prstGeom>
-          <a:noFill/>
-          <a:ln/>
-        </p:spPr>
-        <p:txBody>
-          <a:bodyPr wrap="square" lIns="0" tIns="0" rIns="0" bIns="0" rtlCol="0" anchor="ctr">
-            <a:normAutofit/>
-          </a:bodyPr>
-          <a:lstStyle/>
-          <a:p>
-            <a:pPr algn="ctr" indent="0" marL="0">
-              <a:buNone/>
-            </a:pPr>
-            <a:r>
-              <a:rPr lang="en-US" sz="1500" b="1" dirty="0">
-                <a:solidFill>
-                  <a:srgbClr val="FFFFFF"/>
-                </a:solidFill>
-                <a:latin typeface="Aptos" pitchFamily="34" charset="0"/>
-                <a:ea typeface="Aptos" pitchFamily="34" charset="-122"/>
-                <a:cs typeface="Aptos" pitchFamily="34" charset="-120"/>
-              </a:rPr>
-              <a:t>Apply</a:t>
-            </a:r>
-            <a:endParaRPr lang="en-US" sz="1500" dirty="0"/>
-          </a:p>
-        </p:txBody>
-      </p:sp>
-      <p:sp>
-        <p:nvSpPr>
-          <p:cNvPr id="17" name="Shape 15"/>
-          <p:cNvSpPr/>
-          <p:nvPr/>
-        </p:nvSpPr>
-        <p:spPr>
-          <a:xfrm>
-            <a:off x="10213848" y="3730752"/>
-            <a:ext cx="1033272" cy="749808"/>
-          </a:xfrm>
-          <a:prstGeom prst="roundRect">
-            <a:avLst>
-              <a:gd name="adj" fmla="val 14634"/>
-            </a:avLst>
-          </a:prstGeom>
-          <a:solidFill>
-            <a:srgbClr val="6A4CA3"/>
-          </a:solidFill>
-          <a:ln w="12700">
-            <a:solidFill>
-              <a:srgbClr val="6A4CA3"/>
-            </a:solidFill>
-            <a:prstDash val="solid"/>
-          </a:ln>
-        </p:spPr>
-      </p:sp>
-      <p:sp>
-        <p:nvSpPr>
-          <p:cNvPr id="18" name="Text 16"/>
-          <p:cNvSpPr/>
-          <p:nvPr/>
-        </p:nvSpPr>
-        <p:spPr>
-          <a:xfrm>
-            <a:off x="10287000" y="3922776"/>
-            <a:ext cx="886968" cy="310896"/>
-          </a:xfrm>
-          <a:prstGeom prst="rect">
-            <a:avLst/>
-          </a:prstGeom>
-          <a:noFill/>
-          <a:ln/>
-        </p:spPr>
-        <p:txBody>
-          <a:bodyPr wrap="square" lIns="0" tIns="0" rIns="0" bIns="0" rtlCol="0" anchor="ctr">
-            <a:normAutofit/>
-          </a:bodyPr>
-          <a:lstStyle/>
-          <a:p>
-            <a:pPr algn="ctr" indent="0" marL="0">
-              <a:buNone/>
-            </a:pPr>
-            <a:r>
-              <a:rPr lang="en-US" sz="1500" b="1" dirty="0">
-                <a:solidFill>
-                  <a:srgbClr val="FFFFFF"/>
-                </a:solidFill>
-                <a:latin typeface="Aptos" pitchFamily="34" charset="0"/>
-                <a:ea typeface="Aptos" pitchFamily="34" charset="-122"/>
-                <a:cs typeface="Aptos" pitchFamily="34" charset="-120"/>
-              </a:rPr>
-              <a:t>Document</a:t>
-            </a:r>
-            <a:endParaRPr lang="en-US" sz="1500" dirty="0"/>
+            <a:r>
+              <a:rPr lang="en-US" sz="1380" dirty="0">
+                <a:solidFill>
+                  <a:srgbClr val="17364A"/>
+                </a:solidFill>
+                <a:latin typeface="Aptos" pitchFamily="34" charset="0"/>
+                <a:ea typeface="Aptos" pitchFamily="34" charset="-122"/>
+                <a:cs typeface="Aptos" pitchFamily="34" charset="-120"/>
+              </a:rPr>
+              <a:t>Read the module for shared vocabulary and context.</a:t>
+            </a:r>
+            <a:endParaRPr lang="en-US" sz="1380" dirty="0"/>
+          </a:p>
+          <a:p>
+            <a:r>
+              <a:rPr lang="en-US" sz="1380" dirty="0">
+                <a:solidFill>
+                  <a:srgbClr val="17364A"/>
+                </a:solidFill>
+                <a:latin typeface="Aptos" pitchFamily="34" charset="0"/>
+                <a:ea typeface="Aptos" pitchFamily="34" charset="-122"/>
+                <a:cs typeface="Aptos" pitchFamily="34" charset="-120"/>
+              </a:rPr>
+              <a:t>Complete the practical exercise to apply the concept.</a:t>
+            </a:r>
+            <a:endParaRPr lang="en-US" sz="1380" dirty="0"/>
+          </a:p>
+          <a:p>
+            <a:r>
+              <a:rPr lang="en-US" sz="1380" dirty="0">
+                <a:solidFill>
+                  <a:srgbClr val="17364A"/>
+                </a:solidFill>
+                <a:latin typeface="Aptos" pitchFamily="34" charset="0"/>
+                <a:ea typeface="Aptos" pitchFamily="34" charset="-122"/>
+                <a:cs typeface="Aptos" pitchFamily="34" charset="-120"/>
+              </a:rPr>
+              <a:t>Use the notes and references for deeper review.</a:t>
+            </a:r>
+            <a:endParaRPr lang="en-US" sz="1380" dirty="0"/>
           </a:p>
         </p:txBody>
       </p:sp>
@@ -11771,13 +10843,11 @@
             </a:avLst>
           </a:prstGeom>
           <a:solidFill>
-            <a:srgbClr val="FFFFFF">
-              <a:alpha val="88000"/>
-            </a:srgbClr>
+            <a:srgbClr val="FFFFFF"/>
           </a:solidFill>
           <a:ln w="12700">
             <a:solidFill>
-              <a:srgbClr val="D6E8F2"/>
+              <a:srgbClr val="B9D7E6"/>
             </a:solidFill>
             <a:prstDash val="solid"/>
           </a:ln>
@@ -11785,190 +10855,112 @@
       </p:sp>
       <p:sp>
         <p:nvSpPr>
-          <p:cNvPr id="14" name="Shape 12"/>
-          <p:cNvSpPr/>
-          <p:nvPr/>
-        </p:nvSpPr>
-        <p:spPr>
-          <a:xfrm>
-            <a:off x="7891272" y="3108960"/>
-            <a:ext cx="566928" cy="566928"/>
-          </a:xfrm>
-          <a:prstGeom prst="ellipse">
-            <a:avLst/>
-          </a:prstGeom>
-          <a:solidFill>
-            <a:srgbClr val="0068B7"/>
-          </a:solidFill>
-          <a:ln w="12700">
-            <a:solidFill>
-              <a:srgbClr val="0068B7"/>
-            </a:solidFill>
-            <a:prstDash val="solid"/>
-          </a:ln>
-        </p:spPr>
-      </p:sp>
-      <p:sp>
-        <p:nvSpPr>
-          <p:cNvPr id="15" name="Shape 13"/>
-          <p:cNvSpPr/>
-          <p:nvPr/>
-        </p:nvSpPr>
-        <p:spPr>
-          <a:xfrm>
-            <a:off x="10287000" y="3108960"/>
-            <a:ext cx="566928" cy="566928"/>
-          </a:xfrm>
-          <a:prstGeom prst="ellipse">
-            <a:avLst/>
-          </a:prstGeom>
-          <a:solidFill>
-            <a:srgbClr val="2F8A28"/>
-          </a:solidFill>
-          <a:ln w="12700">
-            <a:solidFill>
-              <a:srgbClr val="2F8A28"/>
-            </a:solidFill>
-            <a:prstDash val="solid"/>
-          </a:ln>
-        </p:spPr>
+          <p:cNvPr id="14" name="Text 12"/>
+          <p:cNvSpPr/>
+          <p:nvPr/>
+        </p:nvSpPr>
+        <p:spPr>
+          <a:xfrm>
+            <a:off x="7799832" y="2935224"/>
+            <a:ext cx="3145536" cy="256032"/>
+          </a:xfrm>
+          <a:prstGeom prst="rect">
+            <a:avLst/>
+          </a:prstGeom>
+          <a:noFill/>
+          <a:ln/>
+        </p:spPr>
+        <p:txBody>
+          <a:bodyPr wrap="square" lIns="0" tIns="0" rIns="0" bIns="0" rtlCol="0" anchor="ctr"/>
+          <a:lstStyle/>
+          <a:p>
+            <a:pPr indent="0" marL="0">
+              <a:buNone/>
+            </a:pPr>
+            <a:r>
+              <a:rPr lang="en-US" sz="1300" b="1" dirty="0">
+                <a:solidFill>
+                  <a:srgbClr val="0068B7"/>
+                </a:solidFill>
+                <a:latin typeface="Aptos" pitchFamily="34" charset="0"/>
+                <a:ea typeface="Aptos" pitchFamily="34" charset="-122"/>
+                <a:cs typeface="Aptos" pitchFamily="34" charset="-120"/>
+              </a:rPr>
+              <a:t>Concept checkpoints</a:t>
+            </a:r>
+            <a:endParaRPr lang="en-US" sz="1300" dirty="0"/>
+          </a:p>
+        </p:txBody>
+      </p:sp>
+      <p:sp>
+        <p:nvSpPr>
+          <p:cNvPr id="15" name="Text 13"/>
+          <p:cNvSpPr/>
+          <p:nvPr/>
+        </p:nvSpPr>
+        <p:spPr>
+          <a:xfrm>
+            <a:off x="7818120" y="3300984"/>
+            <a:ext cx="3090672" cy="877824"/>
+          </a:xfrm>
+          <a:prstGeom prst="rect">
+            <a:avLst/>
+          </a:prstGeom>
+          <a:noFill/>
+          <a:ln/>
+        </p:spPr>
+        <p:txBody>
+          <a:bodyPr wrap="square" lIns="254" tIns="254" rIns="254" bIns="254" rtlCol="0" anchor="t">
+            <a:normAutofit/>
+          </a:bodyPr>
+          <a:lstStyle/>
+          <a:p>
+            <a:r>
+              <a:rPr lang="en-US" sz="1380" dirty="0">
+                <a:solidFill>
+                  <a:srgbClr val="17364A"/>
+                </a:solidFill>
+                <a:latin typeface="Aptos" pitchFamily="34" charset="0"/>
+                <a:ea typeface="Aptos" pitchFamily="34" charset="-122"/>
+                <a:cs typeface="Aptos" pitchFamily="34" charset="-120"/>
+              </a:rPr>
+              <a:t>1.</a:t>
+            </a:r>
+            <a:endParaRPr lang="en-US" sz="1380" dirty="0"/>
+          </a:p>
+          <a:p>
+            <a:r>
+              <a:rPr lang="en-US" sz="1380" dirty="0">
+                <a:solidFill>
+                  <a:srgbClr val="17364A"/>
+                </a:solidFill>
+                <a:latin typeface="Aptos" pitchFamily="34" charset="0"/>
+                <a:ea typeface="Aptos" pitchFamily="34" charset="-122"/>
+                <a:cs typeface="Aptos" pitchFamily="34" charset="-120"/>
+              </a:rPr>
+              <a:t>What is the best reason to address data governance for ai-ready public health data before.</a:t>
+            </a:r>
+            <a:endParaRPr lang="en-US" sz="1380" dirty="0"/>
+          </a:p>
+          <a:p>
+            <a:r>
+              <a:rPr lang="en-US" sz="1380" dirty="0">
+                <a:solidFill>
+                  <a:srgbClr val="17364A"/>
+                </a:solidFill>
+                <a:latin typeface="Aptos" pitchFamily="34" charset="0"/>
+                <a:ea typeface="Aptos" pitchFamily="34" charset="-122"/>
+                <a:cs typeface="Aptos" pitchFamily="34" charset="-120"/>
+              </a:rPr>
+              <a:t>2.</a:t>
+            </a:r>
+            <a:endParaRPr lang="en-US" sz="1380" dirty="0"/>
+          </a:p>
+        </p:txBody>
       </p:sp>
       <p:sp>
         <p:nvSpPr>
           <p:cNvPr id="16" name="Shape 14"/>
-          <p:cNvSpPr/>
-          <p:nvPr/>
-        </p:nvSpPr>
-        <p:spPr>
-          <a:xfrm>
-            <a:off x="9089136" y="3456432"/>
-            <a:ext cx="566928" cy="566928"/>
-          </a:xfrm>
-          <a:prstGeom prst="ellipse">
-            <a:avLst/>
-          </a:prstGeom>
-          <a:solidFill>
-            <a:srgbClr val="6A4CA3"/>
-          </a:solidFill>
-          <a:ln w="12700">
-            <a:solidFill>
-              <a:srgbClr val="6A4CA3"/>
-            </a:solidFill>
-            <a:prstDash val="solid"/>
-          </a:ln>
-        </p:spPr>
-      </p:sp>
-      <p:sp>
-        <p:nvSpPr>
-          <p:cNvPr id="17" name="Shape 15"/>
-          <p:cNvSpPr/>
-          <p:nvPr/>
-        </p:nvSpPr>
-        <p:spPr>
-          <a:xfrm>
-            <a:off x="8385048" y="3419856"/>
-            <a:ext cx="1975104" cy="0"/>
-          </a:xfrm>
-          <a:prstGeom prst="line">
-            <a:avLst/>
-          </a:prstGeom>
-          <a:noFill/>
-          <a:ln w="25400">
-            <a:solidFill>
-              <a:srgbClr val="8ABBD8"/>
-            </a:solidFill>
-            <a:prstDash val="solid"/>
-          </a:ln>
-        </p:spPr>
-      </p:sp>
-      <p:sp>
-        <p:nvSpPr>
-          <p:cNvPr id="18" name="Shape 16"/>
-          <p:cNvSpPr/>
-          <p:nvPr/>
-        </p:nvSpPr>
-        <p:spPr>
-          <a:xfrm>
-            <a:off x="8202168" y="3630168"/>
-            <a:ext cx="1170432" cy="118872"/>
-          </a:xfrm>
-          <a:prstGeom prst="line">
-            <a:avLst/>
-          </a:prstGeom>
-          <a:noFill/>
-          <a:ln w="25400">
-            <a:solidFill>
-              <a:srgbClr val="8ABBD8"/>
-            </a:solidFill>
-            <a:prstDash val="solid"/>
-          </a:ln>
-        </p:spPr>
-      </p:sp>
-      <p:sp>
-        <p:nvSpPr>
-          <p:cNvPr id="19" name="Shape 17"/>
-          <p:cNvSpPr/>
-          <p:nvPr/>
-        </p:nvSpPr>
-        <p:spPr>
-          <a:xfrm>
-            <a:off x="10543032" y="3630168"/>
-            <a:ext cx="-1170432" cy="118872"/>
-          </a:xfrm>
-          <a:prstGeom prst="line">
-            <a:avLst/>
-          </a:prstGeom>
-          <a:noFill/>
-          <a:ln w="25400">
-            <a:solidFill>
-              <a:srgbClr val="8ABBD8"/>
-            </a:solidFill>
-            <a:prstDash val="solid"/>
-          </a:ln>
-        </p:spPr>
-      </p:sp>
-      <p:sp>
-        <p:nvSpPr>
-          <p:cNvPr id="20" name="Text 18"/>
-          <p:cNvSpPr/>
-          <p:nvPr/>
-        </p:nvSpPr>
-        <p:spPr>
-          <a:xfrm>
-            <a:off x="7863840" y="4069080"/>
-            <a:ext cx="3017520" cy="164592"/>
-          </a:xfrm>
-          <a:prstGeom prst="rect">
-            <a:avLst/>
-          </a:prstGeom>
-          <a:noFill/>
-          <a:ln/>
-        </p:spPr>
-        <p:txBody>
-          <a:bodyPr wrap="square" lIns="0" tIns="0" rIns="0" bIns="0" rtlCol="0" anchor="ctr"/>
-          <a:lstStyle/>
-          <a:p>
-            <a:pPr algn="ctr" indent="0" marL="0">
-              <a:buNone/>
-            </a:pPr>
-            <a:r>
-              <a:rPr lang="en-US" sz="900" b="1" dirty="0">
-                <a:solidFill>
-                  <a:srgbClr val="003A63"/>
-                </a:solidFill>
-                <a:latin typeface="Aptos" pitchFamily="34" charset="0"/>
-                <a:ea typeface="Aptos" pitchFamily="34" charset="-122"/>
-                <a:cs typeface="Aptos" pitchFamily="34" charset="-120"/>
-              </a:rPr>
-              <a:t>Decision rights</a:t>
-            </a:r>
-            <a:endParaRPr lang="en-US" sz="900" dirty="0"/>
-          </a:p>
-        </p:txBody>
-      </p:sp>
-      <p:sp>
-        <p:nvSpPr>
-          <p:cNvPr id="21" name="Shape 19"/>
           <p:cNvSpPr/>
           <p:nvPr/>
         </p:nvSpPr>
@@ -11995,7 +10987,7 @@
       </p:sp>
       <p:sp>
         <p:nvSpPr>
-          <p:cNvPr id="22" name="Text 20"/>
+          <p:cNvPr id="17" name="Text 15"/>
           <p:cNvSpPr/>
           <p:nvPr/>
         </p:nvSpPr>
@@ -12034,7 +11026,7 @@
       </p:sp>
       <p:sp>
         <p:nvSpPr>
-          <p:cNvPr id="23" name="Text 21"/>
+          <p:cNvPr id="18" name="Text 16"/>
           <p:cNvSpPr/>
           <p:nvPr/>
         </p:nvSpPr>
@@ -12542,13 +11534,11 @@
             </a:avLst>
           </a:prstGeom>
           <a:solidFill>
-            <a:srgbClr val="FFFFFF">
-              <a:alpha val="88000"/>
-            </a:srgbClr>
+            <a:srgbClr val="FFFFFF"/>
           </a:solidFill>
           <a:ln w="12700">
             <a:solidFill>
-              <a:srgbClr val="D6E8F2"/>
+              <a:srgbClr val="B9D7E6"/>
             </a:solidFill>
             <a:prstDash val="solid"/>
           </a:ln>
@@ -12556,190 +11546,98 @@
       </p:sp>
       <p:sp>
         <p:nvSpPr>
-          <p:cNvPr id="14" name="Shape 12"/>
-          <p:cNvSpPr/>
-          <p:nvPr/>
-        </p:nvSpPr>
-        <p:spPr>
-          <a:xfrm>
-            <a:off x="7891272" y="3108960"/>
-            <a:ext cx="566928" cy="566928"/>
-          </a:xfrm>
-          <a:prstGeom prst="ellipse">
-            <a:avLst/>
-          </a:prstGeom>
-          <a:solidFill>
-            <a:srgbClr val="0068B7"/>
-          </a:solidFill>
-          <a:ln w="12700">
-            <a:solidFill>
-              <a:srgbClr val="0068B7"/>
-            </a:solidFill>
-            <a:prstDash val="solid"/>
-          </a:ln>
-        </p:spPr>
-      </p:sp>
-      <p:sp>
-        <p:nvSpPr>
-          <p:cNvPr id="15" name="Shape 13"/>
-          <p:cNvSpPr/>
-          <p:nvPr/>
-        </p:nvSpPr>
-        <p:spPr>
-          <a:xfrm>
-            <a:off x="10287000" y="3108960"/>
-            <a:ext cx="566928" cy="566928"/>
-          </a:xfrm>
-          <a:prstGeom prst="ellipse">
-            <a:avLst/>
-          </a:prstGeom>
-          <a:solidFill>
-            <a:srgbClr val="2F8A28"/>
-          </a:solidFill>
-          <a:ln w="12700">
-            <a:solidFill>
-              <a:srgbClr val="2F8A28"/>
-            </a:solidFill>
-            <a:prstDash val="solid"/>
-          </a:ln>
-        </p:spPr>
+          <p:cNvPr id="14" name="Text 12"/>
+          <p:cNvSpPr/>
+          <p:nvPr/>
+        </p:nvSpPr>
+        <p:spPr>
+          <a:xfrm>
+            <a:off x="7799832" y="2935224"/>
+            <a:ext cx="3145536" cy="256032"/>
+          </a:xfrm>
+          <a:prstGeom prst="rect">
+            <a:avLst/>
+          </a:prstGeom>
+          <a:noFill/>
+          <a:ln/>
+        </p:spPr>
+        <p:txBody>
+          <a:bodyPr wrap="square" lIns="0" tIns="0" rIns="0" bIns="0" rtlCol="0" anchor="ctr"/>
+          <a:lstStyle/>
+          <a:p>
+            <a:pPr indent="0" marL="0">
+              <a:buNone/>
+            </a:pPr>
+            <a:r>
+              <a:rPr lang="en-US" sz="1300" b="1" dirty="0">
+                <a:solidFill>
+                  <a:srgbClr val="0068B7"/>
+                </a:solidFill>
+                <a:latin typeface="Aptos" pitchFamily="34" charset="0"/>
+                <a:ea typeface="Aptos" pitchFamily="34" charset="-122"/>
+                <a:cs typeface="Aptos" pitchFamily="34" charset="-120"/>
+              </a:rPr>
+              <a:t>Concept checkpoints</a:t>
+            </a:r>
+            <a:endParaRPr lang="en-US" sz="1300" dirty="0"/>
+          </a:p>
+        </p:txBody>
+      </p:sp>
+      <p:sp>
+        <p:nvSpPr>
+          <p:cNvPr id="15" name="Text 13"/>
+          <p:cNvSpPr/>
+          <p:nvPr/>
+        </p:nvSpPr>
+        <p:spPr>
+          <a:xfrm>
+            <a:off x="7818120" y="3300984"/>
+            <a:ext cx="3090672" cy="877824"/>
+          </a:xfrm>
+          <a:prstGeom prst="rect">
+            <a:avLst/>
+          </a:prstGeom>
+          <a:noFill/>
+          <a:ln/>
+        </p:spPr>
+        <p:txBody>
+          <a:bodyPr wrap="square" lIns="254" tIns="254" rIns="254" bIns="254" rtlCol="0" anchor="t">
+            <a:normAutofit/>
+          </a:bodyPr>
+          <a:lstStyle/>
+          <a:p>
+            <a:r>
+              <a:rPr lang="en-US" sz="1380" dirty="0">
+                <a:solidFill>
+                  <a:srgbClr val="17364A"/>
+                </a:solidFill>
+                <a:latin typeface="Aptos" pitchFamily="34" charset="0"/>
+                <a:ea typeface="Aptos" pitchFamily="34" charset="-122"/>
+                <a:cs typeface="Aptos" pitchFamily="34" charset="-120"/>
+              </a:rPr>
+              <a:t>OWASP Top 10 for LLM Applications, when security or AI integrations are relevant</a:t>
+            </a:r>
+            <a:endParaRPr lang="en-US" sz="1380" dirty="0"/>
+          </a:p>
+          <a:p>
+            <a:r>
+              <a:rPr lang="en-US" sz="1380" dirty="0">
+                <a:solidFill>
+                  <a:srgbClr val="17364A"/>
+                </a:solidFill>
+                <a:latin typeface="Aptos" pitchFamily="34" charset="0"/>
+                <a:ea typeface="Aptos" pitchFamily="34" charset="-122"/>
+                <a:cs typeface="Aptos" pitchFamily="34" charset="-120"/>
+              </a:rPr>
+              <a:t>Agency privacy, cybersecurity, data governance, procurement, and records management policies</a:t>
+            </a:r>
+            <a:endParaRPr lang="en-US" sz="1380" dirty="0"/>
+          </a:p>
+        </p:txBody>
       </p:sp>
       <p:sp>
         <p:nvSpPr>
           <p:cNvPr id="16" name="Shape 14"/>
-          <p:cNvSpPr/>
-          <p:nvPr/>
-        </p:nvSpPr>
-        <p:spPr>
-          <a:xfrm>
-            <a:off x="9089136" y="3456432"/>
-            <a:ext cx="566928" cy="566928"/>
-          </a:xfrm>
-          <a:prstGeom prst="ellipse">
-            <a:avLst/>
-          </a:prstGeom>
-          <a:solidFill>
-            <a:srgbClr val="6A4CA3"/>
-          </a:solidFill>
-          <a:ln w="12700">
-            <a:solidFill>
-              <a:srgbClr val="6A4CA3"/>
-            </a:solidFill>
-            <a:prstDash val="solid"/>
-          </a:ln>
-        </p:spPr>
-      </p:sp>
-      <p:sp>
-        <p:nvSpPr>
-          <p:cNvPr id="17" name="Shape 15"/>
-          <p:cNvSpPr/>
-          <p:nvPr/>
-        </p:nvSpPr>
-        <p:spPr>
-          <a:xfrm>
-            <a:off x="8385048" y="3419856"/>
-            <a:ext cx="1975104" cy="0"/>
-          </a:xfrm>
-          <a:prstGeom prst="line">
-            <a:avLst/>
-          </a:prstGeom>
-          <a:noFill/>
-          <a:ln w="25400">
-            <a:solidFill>
-              <a:srgbClr val="8ABBD8"/>
-            </a:solidFill>
-            <a:prstDash val="solid"/>
-          </a:ln>
-        </p:spPr>
-      </p:sp>
-      <p:sp>
-        <p:nvSpPr>
-          <p:cNvPr id="18" name="Shape 16"/>
-          <p:cNvSpPr/>
-          <p:nvPr/>
-        </p:nvSpPr>
-        <p:spPr>
-          <a:xfrm>
-            <a:off x="8202168" y="3630168"/>
-            <a:ext cx="1170432" cy="118872"/>
-          </a:xfrm>
-          <a:prstGeom prst="line">
-            <a:avLst/>
-          </a:prstGeom>
-          <a:noFill/>
-          <a:ln w="25400">
-            <a:solidFill>
-              <a:srgbClr val="8ABBD8"/>
-            </a:solidFill>
-            <a:prstDash val="solid"/>
-          </a:ln>
-        </p:spPr>
-      </p:sp>
-      <p:sp>
-        <p:nvSpPr>
-          <p:cNvPr id="19" name="Shape 17"/>
-          <p:cNvSpPr/>
-          <p:nvPr/>
-        </p:nvSpPr>
-        <p:spPr>
-          <a:xfrm>
-            <a:off x="10543032" y="3630168"/>
-            <a:ext cx="-1170432" cy="118872"/>
-          </a:xfrm>
-          <a:prstGeom prst="line">
-            <a:avLst/>
-          </a:prstGeom>
-          <a:noFill/>
-          <a:ln w="25400">
-            <a:solidFill>
-              <a:srgbClr val="8ABBD8"/>
-            </a:solidFill>
-            <a:prstDash val="solid"/>
-          </a:ln>
-        </p:spPr>
-      </p:sp>
-      <p:sp>
-        <p:nvSpPr>
-          <p:cNvPr id="20" name="Text 18"/>
-          <p:cNvSpPr/>
-          <p:nvPr/>
-        </p:nvSpPr>
-        <p:spPr>
-          <a:xfrm>
-            <a:off x="7863840" y="4069080"/>
-            <a:ext cx="3017520" cy="164592"/>
-          </a:xfrm>
-          <a:prstGeom prst="rect">
-            <a:avLst/>
-          </a:prstGeom>
-          <a:noFill/>
-          <a:ln/>
-        </p:spPr>
-        <p:txBody>
-          <a:bodyPr wrap="square" lIns="0" tIns="0" rIns="0" bIns="0" rtlCol="0" anchor="ctr"/>
-          <a:lstStyle/>
-          <a:p>
-            <a:pPr algn="ctr" indent="0" marL="0">
-              <a:buNone/>
-            </a:pPr>
-            <a:r>
-              <a:rPr lang="en-US" sz="900" b="1" dirty="0">
-                <a:solidFill>
-                  <a:srgbClr val="003A63"/>
-                </a:solidFill>
-                <a:latin typeface="Aptos" pitchFamily="34" charset="0"/>
-                <a:ea typeface="Aptos" pitchFamily="34" charset="-122"/>
-                <a:cs typeface="Aptos" pitchFamily="34" charset="-120"/>
-              </a:rPr>
-              <a:t>Decision rights</a:t>
-            </a:r>
-            <a:endParaRPr lang="en-US" sz="900" dirty="0"/>
-          </a:p>
-        </p:txBody>
-      </p:sp>
-      <p:sp>
-        <p:nvSpPr>
-          <p:cNvPr id="21" name="Shape 19"/>
           <p:cNvSpPr/>
           <p:nvPr/>
         </p:nvSpPr>
@@ -12766,7 +11664,7 @@
       </p:sp>
       <p:sp>
         <p:nvSpPr>
-          <p:cNvPr id="22" name="Text 20"/>
+          <p:cNvPr id="17" name="Text 15"/>
           <p:cNvSpPr/>
           <p:nvPr/>
         </p:nvSpPr>
@@ -12805,7 +11703,7 @@
       </p:sp>
       <p:sp>
         <p:nvSpPr>
-          <p:cNvPr id="23" name="Text 21"/>
+          <p:cNvPr id="18" name="Text 16"/>
           <p:cNvSpPr/>
           <p:nvPr/>
         </p:nvSpPr>
@@ -13318,20 +12216,20 @@
         </p:nvSpPr>
         <p:spPr>
           <a:xfrm>
-            <a:off x="7818120" y="3977640"/>
-            <a:ext cx="972312" cy="749808"/>
+            <a:off x="8046720" y="3794760"/>
+            <a:ext cx="3063240" cy="1600200"/>
           </a:xfrm>
           <a:prstGeom prst="roundRect">
             <a:avLst>
-              <a:gd name="adj" fmla="val 14634"/>
+              <a:gd name="adj" fmla="val 6857"/>
             </a:avLst>
           </a:prstGeom>
           <a:solidFill>
-            <a:srgbClr val="0068B7"/>
+            <a:srgbClr val="FFFFFF"/>
           </a:solidFill>
           <a:ln w="12700">
             <a:solidFill>
-              <a:srgbClr val="0068B7"/>
+              <a:srgbClr val="B9D7E6"/>
             </a:solidFill>
             <a:prstDash val="solid"/>
           </a:ln>
@@ -13345,172 +12243,100 @@
         </p:nvSpPr>
         <p:spPr>
           <a:xfrm>
-            <a:off x="7891272" y="4169664"/>
-            <a:ext cx="826008" cy="310896"/>
-          </a:xfrm>
-          <a:prstGeom prst="rect">
-            <a:avLst/>
-          </a:prstGeom>
-          <a:noFill/>
-          <a:ln/>
-        </p:spPr>
-        <p:txBody>
-          <a:bodyPr wrap="square" lIns="0" tIns="0" rIns="0" bIns="0" rtlCol="0" anchor="ctr">
+            <a:off x="8211312" y="3941064"/>
+            <a:ext cx="2734056" cy="256032"/>
+          </a:xfrm>
+          <a:prstGeom prst="rect">
+            <a:avLst/>
+          </a:prstGeom>
+          <a:noFill/>
+          <a:ln/>
+        </p:spPr>
+        <p:txBody>
+          <a:bodyPr wrap="square" lIns="0" tIns="0" rIns="0" bIns="0" rtlCol="0" anchor="ctr"/>
+          <a:lstStyle/>
+          <a:p>
+            <a:pPr indent="0" marL="0">
+              <a:buNone/>
+            </a:pPr>
+            <a:r>
+              <a:rPr lang="en-US" sz="1300" b="1" dirty="0">
+                <a:solidFill>
+                  <a:srgbClr val="0068B7"/>
+                </a:solidFill>
+                <a:latin typeface="Aptos" pitchFamily="34" charset="0"/>
+                <a:ea typeface="Aptos" pitchFamily="34" charset="-122"/>
+                <a:cs typeface="Aptos" pitchFamily="34" charset="-120"/>
+              </a:rPr>
+              <a:t>Use the play links to</a:t>
+            </a:r>
+            <a:endParaRPr lang="en-US" sz="1300" dirty="0"/>
+          </a:p>
+        </p:txBody>
+      </p:sp>
+      <p:sp>
+        <p:nvSpPr>
+          <p:cNvPr id="15" name="Text 13"/>
+          <p:cNvSpPr/>
+          <p:nvPr/>
+        </p:nvSpPr>
+        <p:spPr>
+          <a:xfrm>
+            <a:off x="8229600" y="4306824"/>
+            <a:ext cx="2679192" cy="941832"/>
+          </a:xfrm>
+          <a:prstGeom prst="rect">
+            <a:avLst/>
+          </a:prstGeom>
+          <a:noFill/>
+          <a:ln/>
+        </p:spPr>
+        <p:txBody>
+          <a:bodyPr wrap="square" lIns="254" tIns="254" rIns="254" bIns="254" rtlCol="0" anchor="t">
             <a:normAutofit/>
           </a:bodyPr>
           <a:lstStyle/>
           <a:p>
-            <a:pPr algn="ctr" indent="0" marL="0">
-              <a:buNone/>
-            </a:pPr>
-            <a:r>
-              <a:rPr lang="en-US" sz="1500" b="1" dirty="0">
-                <a:solidFill>
-                  <a:srgbClr val="FFFFFF"/>
-                </a:solidFill>
-                <a:latin typeface="Aptos" pitchFamily="34" charset="0"/>
-                <a:ea typeface="Aptos" pitchFamily="34" charset="-122"/>
-                <a:cs typeface="Aptos" pitchFamily="34" charset="-120"/>
-              </a:rPr>
-              <a:t>Lesson</a:t>
-            </a:r>
-            <a:endParaRPr lang="en-US" sz="1500" dirty="0"/>
-          </a:p>
-        </p:txBody>
-      </p:sp>
-      <p:sp>
-        <p:nvSpPr>
-          <p:cNvPr id="15" name="Shape 13"/>
-          <p:cNvSpPr/>
-          <p:nvPr/>
-        </p:nvSpPr>
-        <p:spPr>
-          <a:xfrm>
-            <a:off x="9046464" y="3977640"/>
-            <a:ext cx="972312" cy="749808"/>
-          </a:xfrm>
-          <a:prstGeom prst="roundRect">
-            <a:avLst>
-              <a:gd name="adj" fmla="val 14634"/>
-            </a:avLst>
-          </a:prstGeom>
-          <a:solidFill>
-            <a:srgbClr val="2F8A28"/>
-          </a:solidFill>
-          <a:ln w="12700">
-            <a:solidFill>
-              <a:srgbClr val="2F8A28"/>
-            </a:solidFill>
-            <a:prstDash val="solid"/>
-          </a:ln>
-        </p:spPr>
-      </p:sp>
-      <p:sp>
-        <p:nvSpPr>
-          <p:cNvPr id="16" name="Text 14"/>
-          <p:cNvSpPr/>
-          <p:nvPr/>
-        </p:nvSpPr>
-        <p:spPr>
-          <a:xfrm>
-            <a:off x="9119616" y="4169664"/>
-            <a:ext cx="826008" cy="310896"/>
-          </a:xfrm>
-          <a:prstGeom prst="rect">
-            <a:avLst/>
-          </a:prstGeom>
-          <a:noFill/>
-          <a:ln/>
-        </p:spPr>
-        <p:txBody>
-          <a:bodyPr wrap="square" lIns="0" tIns="0" rIns="0" bIns="0" rtlCol="0" anchor="ctr">
-            <a:normAutofit/>
-          </a:bodyPr>
-          <a:lstStyle/>
-          <a:p>
-            <a:pPr algn="ctr" indent="0" marL="0">
-              <a:buNone/>
-            </a:pPr>
-            <a:r>
-              <a:rPr lang="en-US" sz="1500" b="1" dirty="0">
-                <a:solidFill>
-                  <a:srgbClr val="FFFFFF"/>
-                </a:solidFill>
-                <a:latin typeface="Aptos" pitchFamily="34" charset="0"/>
-                <a:ea typeface="Aptos" pitchFamily="34" charset="-122"/>
-                <a:cs typeface="Aptos" pitchFamily="34" charset="-120"/>
-              </a:rPr>
-              <a:t>Plays</a:t>
-            </a:r>
-            <a:endParaRPr lang="en-US" sz="1500" dirty="0"/>
-          </a:p>
-        </p:txBody>
-      </p:sp>
-      <p:sp>
-        <p:nvSpPr>
-          <p:cNvPr id="17" name="Shape 15"/>
-          <p:cNvSpPr/>
-          <p:nvPr/>
-        </p:nvSpPr>
-        <p:spPr>
-          <a:xfrm>
-            <a:off x="10274808" y="3977640"/>
-            <a:ext cx="972312" cy="749808"/>
-          </a:xfrm>
-          <a:prstGeom prst="roundRect">
-            <a:avLst>
-              <a:gd name="adj" fmla="val 14634"/>
-            </a:avLst>
-          </a:prstGeom>
-          <a:solidFill>
-            <a:srgbClr val="6A4CA3"/>
-          </a:solidFill>
-          <a:ln w="12700">
-            <a:solidFill>
-              <a:srgbClr val="6A4CA3"/>
-            </a:solidFill>
-            <a:prstDash val="solid"/>
-          </a:ln>
-        </p:spPr>
-      </p:sp>
-      <p:sp>
-        <p:nvSpPr>
-          <p:cNvPr id="18" name="Text 16"/>
-          <p:cNvSpPr/>
-          <p:nvPr/>
-        </p:nvSpPr>
-        <p:spPr>
-          <a:xfrm>
-            <a:off x="10347960" y="4169664"/>
-            <a:ext cx="826008" cy="310896"/>
-          </a:xfrm>
-          <a:prstGeom prst="rect">
-            <a:avLst/>
-          </a:prstGeom>
-          <a:noFill/>
-          <a:ln/>
-        </p:spPr>
-        <p:txBody>
-          <a:bodyPr wrap="square" lIns="0" tIns="0" rIns="0" bIns="0" rtlCol="0" anchor="ctr">
-            <a:normAutofit/>
-          </a:bodyPr>
-          <a:lstStyle/>
-          <a:p>
-            <a:pPr algn="ctr" indent="0" marL="0">
-              <a:buNone/>
-            </a:pPr>
-            <a:r>
-              <a:rPr lang="en-US" sz="1500" b="1" dirty="0">
-                <a:solidFill>
-                  <a:srgbClr val="FFFFFF"/>
-                </a:solidFill>
-                <a:latin typeface="Aptos" pitchFamily="34" charset="0"/>
-                <a:ea typeface="Aptos" pitchFamily="34" charset="-122"/>
-                <a:cs typeface="Aptos" pitchFamily="34" charset="-120"/>
-              </a:rPr>
-              <a:t>Action</a:t>
-            </a:r>
-            <a:endParaRPr lang="en-US" sz="1500" dirty="0"/>
+            <a:r>
+              <a:rPr lang="en-US" sz="1380" dirty="0">
+                <a:solidFill>
+                  <a:srgbClr val="17364A"/>
+                </a:solidFill>
+                <a:latin typeface="Aptos" pitchFamily="34" charset="0"/>
+                <a:ea typeface="Aptos" pitchFamily="34" charset="-122"/>
+                <a:cs typeface="Aptos" pitchFamily="34" charset="-120"/>
+              </a:rPr>
+              <a:t>Locate the decision point in the playbook sequence.</a:t>
+            </a:r>
+            <a:endParaRPr lang="en-US" sz="1380" dirty="0"/>
+          </a:p>
+          <a:p>
+            <a:r>
+              <a:rPr lang="en-US" sz="1380" dirty="0">
+                <a:solidFill>
+                  <a:srgbClr val="17364A"/>
+                </a:solidFill>
+                <a:latin typeface="Aptos" pitchFamily="34" charset="0"/>
+                <a:ea typeface="Aptos" pitchFamily="34" charset="-122"/>
+                <a:cs typeface="Aptos" pitchFamily="34" charset="-120"/>
+              </a:rPr>
+              <a:t>Identify who should participate in the work.</a:t>
+            </a:r>
+            <a:endParaRPr lang="en-US" sz="1380" dirty="0"/>
+          </a:p>
+          <a:p>
+            <a:r>
+              <a:rPr lang="en-US" sz="1380" dirty="0">
+                <a:solidFill>
+                  <a:srgbClr val="17364A"/>
+                </a:solidFill>
+                <a:latin typeface="Aptos" pitchFamily="34" charset="0"/>
+                <a:ea typeface="Aptos" pitchFamily="34" charset="-122"/>
+                <a:cs typeface="Aptos" pitchFamily="34" charset="-120"/>
+              </a:rPr>
+              <a:t>Document the review, approval, or implementation step.</a:t>
+            </a:r>
+            <a:endParaRPr lang="en-US" sz="1380" dirty="0"/>
           </a:p>
         </p:txBody>
       </p:sp>
@@ -13988,20 +12814,20 @@
         </p:nvSpPr>
         <p:spPr>
           <a:xfrm>
-            <a:off x="7818120" y="3977640"/>
-            <a:ext cx="972312" cy="749808"/>
+            <a:off x="8046720" y="3794760"/>
+            <a:ext cx="3063240" cy="1600200"/>
           </a:xfrm>
           <a:prstGeom prst="roundRect">
             <a:avLst>
-              <a:gd name="adj" fmla="val 14634"/>
+              <a:gd name="adj" fmla="val 6857"/>
             </a:avLst>
           </a:prstGeom>
           <a:solidFill>
-            <a:srgbClr val="0068B7"/>
+            <a:srgbClr val="FFFFFF"/>
           </a:solidFill>
           <a:ln w="12700">
             <a:solidFill>
-              <a:srgbClr val="0068B7"/>
+              <a:srgbClr val="B9D7E6"/>
             </a:solidFill>
             <a:prstDash val="solid"/>
           </a:ln>
@@ -14015,172 +12841,100 @@
         </p:nvSpPr>
         <p:spPr>
           <a:xfrm>
-            <a:off x="7891272" y="4169664"/>
-            <a:ext cx="826008" cy="310896"/>
-          </a:xfrm>
-          <a:prstGeom prst="rect">
-            <a:avLst/>
-          </a:prstGeom>
-          <a:noFill/>
-          <a:ln/>
-        </p:spPr>
-        <p:txBody>
-          <a:bodyPr wrap="square" lIns="0" tIns="0" rIns="0" bIns="0" rtlCol="0" anchor="ctr">
+            <a:off x="8211312" y="3941064"/>
+            <a:ext cx="2734056" cy="256032"/>
+          </a:xfrm>
+          <a:prstGeom prst="rect">
+            <a:avLst/>
+          </a:prstGeom>
+          <a:noFill/>
+          <a:ln/>
+        </p:spPr>
+        <p:txBody>
+          <a:bodyPr wrap="square" lIns="0" tIns="0" rIns="0" bIns="0" rtlCol="0" anchor="ctr"/>
+          <a:lstStyle/>
+          <a:p>
+            <a:pPr indent="0" marL="0">
+              <a:buNone/>
+            </a:pPr>
+            <a:r>
+              <a:rPr lang="en-US" sz="1300" b="1" dirty="0">
+                <a:solidFill>
+                  <a:srgbClr val="0068B7"/>
+                </a:solidFill>
+                <a:latin typeface="Aptos" pitchFamily="34" charset="0"/>
+                <a:ea typeface="Aptos" pitchFamily="34" charset="-122"/>
+                <a:cs typeface="Aptos" pitchFamily="34" charset="-120"/>
+              </a:rPr>
+              <a:t>Tool selection cues</a:t>
+            </a:r>
+            <a:endParaRPr lang="en-US" sz="1300" dirty="0"/>
+          </a:p>
+        </p:txBody>
+      </p:sp>
+      <p:sp>
+        <p:nvSpPr>
+          <p:cNvPr id="15" name="Text 13"/>
+          <p:cNvSpPr/>
+          <p:nvPr/>
+        </p:nvSpPr>
+        <p:spPr>
+          <a:xfrm>
+            <a:off x="8229600" y="4306824"/>
+            <a:ext cx="2679192" cy="941832"/>
+          </a:xfrm>
+          <a:prstGeom prst="rect">
+            <a:avLst/>
+          </a:prstGeom>
+          <a:noFill/>
+          <a:ln/>
+        </p:spPr>
+        <p:txBody>
+          <a:bodyPr wrap="square" lIns="254" tIns="254" rIns="254" bIns="254" rtlCol="0" anchor="t">
             <a:normAutofit/>
           </a:bodyPr>
           <a:lstStyle/>
           <a:p>
-            <a:pPr algn="ctr" indent="0" marL="0">
-              <a:buNone/>
-            </a:pPr>
-            <a:r>
-              <a:rPr lang="en-US" sz="1500" b="1" dirty="0">
-                <a:solidFill>
-                  <a:srgbClr val="FFFFFF"/>
-                </a:solidFill>
-                <a:latin typeface="Aptos" pitchFamily="34" charset="0"/>
-                <a:ea typeface="Aptos" pitchFamily="34" charset="-122"/>
-                <a:cs typeface="Aptos" pitchFamily="34" charset="-120"/>
-              </a:rPr>
-              <a:t>Concept</a:t>
-            </a:r>
-            <a:endParaRPr lang="en-US" sz="1500" dirty="0"/>
-          </a:p>
-        </p:txBody>
-      </p:sp>
-      <p:sp>
-        <p:nvSpPr>
-          <p:cNvPr id="15" name="Shape 13"/>
-          <p:cNvSpPr/>
-          <p:nvPr/>
-        </p:nvSpPr>
-        <p:spPr>
-          <a:xfrm>
-            <a:off x="9046464" y="3977640"/>
-            <a:ext cx="972312" cy="749808"/>
-          </a:xfrm>
-          <a:prstGeom prst="roundRect">
-            <a:avLst>
-              <a:gd name="adj" fmla="val 14634"/>
-            </a:avLst>
-          </a:prstGeom>
-          <a:solidFill>
-            <a:srgbClr val="2F8A28"/>
-          </a:solidFill>
-          <a:ln w="12700">
-            <a:solidFill>
-              <a:srgbClr val="2F8A28"/>
-            </a:solidFill>
-            <a:prstDash val="solid"/>
-          </a:ln>
-        </p:spPr>
-      </p:sp>
-      <p:sp>
-        <p:nvSpPr>
-          <p:cNvPr id="16" name="Text 14"/>
-          <p:cNvSpPr/>
-          <p:nvPr/>
-        </p:nvSpPr>
-        <p:spPr>
-          <a:xfrm>
-            <a:off x="9119616" y="4169664"/>
-            <a:ext cx="826008" cy="310896"/>
-          </a:xfrm>
-          <a:prstGeom prst="rect">
-            <a:avLst/>
-          </a:prstGeom>
-          <a:noFill/>
-          <a:ln/>
-        </p:spPr>
-        <p:txBody>
-          <a:bodyPr wrap="square" lIns="0" tIns="0" rIns="0" bIns="0" rtlCol="0" anchor="ctr">
-            <a:normAutofit/>
-          </a:bodyPr>
-          <a:lstStyle/>
-          <a:p>
-            <a:pPr algn="ctr" indent="0" marL="0">
-              <a:buNone/>
-            </a:pPr>
-            <a:r>
-              <a:rPr lang="en-US" sz="1500" b="1" dirty="0">
-                <a:solidFill>
-                  <a:srgbClr val="FFFFFF"/>
-                </a:solidFill>
-                <a:latin typeface="Aptos" pitchFamily="34" charset="0"/>
-                <a:ea typeface="Aptos" pitchFamily="34" charset="-122"/>
-                <a:cs typeface="Aptos" pitchFamily="34" charset="-120"/>
-              </a:rPr>
-              <a:t>Tool</a:t>
-            </a:r>
-            <a:endParaRPr lang="en-US" sz="1500" dirty="0"/>
-          </a:p>
-        </p:txBody>
-      </p:sp>
-      <p:sp>
-        <p:nvSpPr>
-          <p:cNvPr id="17" name="Shape 15"/>
-          <p:cNvSpPr/>
-          <p:nvPr/>
-        </p:nvSpPr>
-        <p:spPr>
-          <a:xfrm>
-            <a:off x="10274808" y="3977640"/>
-            <a:ext cx="972312" cy="749808"/>
-          </a:xfrm>
-          <a:prstGeom prst="roundRect">
-            <a:avLst>
-              <a:gd name="adj" fmla="val 14634"/>
-            </a:avLst>
-          </a:prstGeom>
-          <a:solidFill>
-            <a:srgbClr val="D69A2D"/>
-          </a:solidFill>
-          <a:ln w="12700">
-            <a:solidFill>
-              <a:srgbClr val="D69A2D"/>
-            </a:solidFill>
-            <a:prstDash val="solid"/>
-          </a:ln>
-        </p:spPr>
-      </p:sp>
-      <p:sp>
-        <p:nvSpPr>
-          <p:cNvPr id="18" name="Text 16"/>
-          <p:cNvSpPr/>
-          <p:nvPr/>
-        </p:nvSpPr>
-        <p:spPr>
-          <a:xfrm>
-            <a:off x="10347960" y="4169664"/>
-            <a:ext cx="826008" cy="310896"/>
-          </a:xfrm>
-          <a:prstGeom prst="rect">
-            <a:avLst/>
-          </a:prstGeom>
-          <a:noFill/>
-          <a:ln/>
-        </p:spPr>
-        <p:txBody>
-          <a:bodyPr wrap="square" lIns="0" tIns="0" rIns="0" bIns="0" rtlCol="0" anchor="ctr">
-            <a:normAutofit/>
-          </a:bodyPr>
-          <a:lstStyle/>
-          <a:p>
-            <a:pPr algn="ctr" indent="0" marL="0">
-              <a:buNone/>
-            </a:pPr>
-            <a:r>
-              <a:rPr lang="en-US" sz="1500" b="1" dirty="0">
-                <a:solidFill>
-                  <a:srgbClr val="FFFFFF"/>
-                </a:solidFill>
-                <a:latin typeface="Aptos" pitchFamily="34" charset="0"/>
-                <a:ea typeface="Aptos" pitchFamily="34" charset="-122"/>
-                <a:cs typeface="Aptos" pitchFamily="34" charset="-120"/>
-              </a:rPr>
-              <a:t>Artifact</a:t>
-            </a:r>
-            <a:endParaRPr lang="en-US" sz="1500" dirty="0"/>
+            <a:r>
+              <a:rPr lang="en-US" sz="1380" dirty="0">
+                <a:solidFill>
+                  <a:srgbClr val="17364A"/>
+                </a:solidFill>
+                <a:latin typeface="Aptos" pitchFamily="34" charset="0"/>
+                <a:ea typeface="Aptos" pitchFamily="34" charset="-122"/>
+                <a:cs typeface="Aptos" pitchFamily="34" charset="-120"/>
+              </a:rPr>
+              <a:t>Use a tool when no comparable local process exists.</a:t>
+            </a:r>
+            <a:endParaRPr lang="en-US" sz="1380" dirty="0"/>
+          </a:p>
+          <a:p>
+            <a:r>
+              <a:rPr lang="en-US" sz="1380" dirty="0">
+                <a:solidFill>
+                  <a:srgbClr val="17364A"/>
+                </a:solidFill>
+                <a:latin typeface="Aptos" pitchFamily="34" charset="0"/>
+                <a:ea typeface="Aptos" pitchFamily="34" charset="-122"/>
+                <a:cs typeface="Aptos" pitchFamily="34" charset="-120"/>
+              </a:rPr>
+              <a:t>Adapt existing department templates when they already fit the purpose.</a:t>
+            </a:r>
+            <a:endParaRPr lang="en-US" sz="1380" dirty="0"/>
+          </a:p>
+          <a:p>
+            <a:r>
+              <a:rPr lang="en-US" sz="1380" dirty="0">
+                <a:solidFill>
+                  <a:srgbClr val="17364A"/>
+                </a:solidFill>
+                <a:latin typeface="Aptos" pitchFamily="34" charset="0"/>
+                <a:ea typeface="Aptos" pitchFamily="34" charset="-122"/>
+                <a:cs typeface="Aptos" pitchFamily="34" charset="-120"/>
+              </a:rPr>
+              <a:t>Save the completed artifact as evidence of the decision.</a:t>
+            </a:r>
+            <a:endParaRPr lang="en-US" sz="1380" dirty="0"/>
           </a:p>
         </p:txBody>
       </p:sp>
@@ -14653,13 +13407,11 @@
             </a:avLst>
           </a:prstGeom>
           <a:solidFill>
-            <a:srgbClr val="FFFFFF">
-              <a:alpha val="88000"/>
-            </a:srgbClr>
+            <a:srgbClr val="FFFFFF"/>
           </a:solidFill>
           <a:ln w="12700">
             <a:solidFill>
-              <a:srgbClr val="D6E8F2"/>
+              <a:srgbClr val="B9D7E6"/>
             </a:solidFill>
             <a:prstDash val="solid"/>
           </a:ln>
@@ -14667,190 +13419,112 @@
       </p:sp>
       <p:sp>
         <p:nvSpPr>
-          <p:cNvPr id="14" name="Shape 12"/>
-          <p:cNvSpPr/>
-          <p:nvPr/>
-        </p:nvSpPr>
-        <p:spPr>
-          <a:xfrm>
-            <a:off x="7891272" y="3108960"/>
-            <a:ext cx="566928" cy="566928"/>
-          </a:xfrm>
-          <a:prstGeom prst="ellipse">
-            <a:avLst/>
-          </a:prstGeom>
-          <a:solidFill>
-            <a:srgbClr val="0068B7"/>
-          </a:solidFill>
-          <a:ln w="12700">
-            <a:solidFill>
-              <a:srgbClr val="0068B7"/>
-            </a:solidFill>
-            <a:prstDash val="solid"/>
-          </a:ln>
-        </p:spPr>
-      </p:sp>
-      <p:sp>
-        <p:nvSpPr>
-          <p:cNvPr id="15" name="Shape 13"/>
-          <p:cNvSpPr/>
-          <p:nvPr/>
-        </p:nvSpPr>
-        <p:spPr>
-          <a:xfrm>
-            <a:off x="10287000" y="3108960"/>
-            <a:ext cx="566928" cy="566928"/>
-          </a:xfrm>
-          <a:prstGeom prst="ellipse">
-            <a:avLst/>
-          </a:prstGeom>
-          <a:solidFill>
-            <a:srgbClr val="2F8A28"/>
-          </a:solidFill>
-          <a:ln w="12700">
-            <a:solidFill>
-              <a:srgbClr val="2F8A28"/>
-            </a:solidFill>
-            <a:prstDash val="solid"/>
-          </a:ln>
-        </p:spPr>
+          <p:cNvPr id="14" name="Text 12"/>
+          <p:cNvSpPr/>
+          <p:nvPr/>
+        </p:nvSpPr>
+        <p:spPr>
+          <a:xfrm>
+            <a:off x="7799832" y="2935224"/>
+            <a:ext cx="3145536" cy="256032"/>
+          </a:xfrm>
+          <a:prstGeom prst="rect">
+            <a:avLst/>
+          </a:prstGeom>
+          <a:noFill/>
+          <a:ln/>
+        </p:spPr>
+        <p:txBody>
+          <a:bodyPr wrap="square" lIns="0" tIns="0" rIns="0" bIns="0" rtlCol="0" anchor="ctr"/>
+          <a:lstStyle/>
+          <a:p>
+            <a:pPr indent="0" marL="0">
+              <a:buNone/>
+            </a:pPr>
+            <a:r>
+              <a:rPr lang="en-US" sz="1300" b="1" dirty="0">
+                <a:solidFill>
+                  <a:srgbClr val="0068B7"/>
+                </a:solidFill>
+                <a:latin typeface="Aptos" pitchFamily="34" charset="0"/>
+                <a:ea typeface="Aptos" pitchFamily="34" charset="-122"/>
+                <a:cs typeface="Aptos" pitchFamily="34" charset="-120"/>
+              </a:rPr>
+              <a:t>Concept checkpoints</a:t>
+            </a:r>
+            <a:endParaRPr lang="en-US" sz="1300" dirty="0"/>
+          </a:p>
+        </p:txBody>
+      </p:sp>
+      <p:sp>
+        <p:nvSpPr>
+          <p:cNvPr id="15" name="Text 13"/>
+          <p:cNvSpPr/>
+          <p:nvPr/>
+        </p:nvSpPr>
+        <p:spPr>
+          <a:xfrm>
+            <a:off x="7818120" y="3300984"/>
+            <a:ext cx="3090672" cy="877824"/>
+          </a:xfrm>
+          <a:prstGeom prst="rect">
+            <a:avLst/>
+          </a:prstGeom>
+          <a:noFill/>
+          <a:ln/>
+        </p:spPr>
+        <p:txBody>
+          <a:bodyPr wrap="square" lIns="254" tIns="254" rIns="254" bIns="254" rtlCol="0" anchor="t">
+            <a:normAutofit/>
+          </a:bodyPr>
+          <a:lstStyle/>
+          <a:p>
+            <a:r>
+              <a:rPr lang="en-US" sz="1380" dirty="0">
+                <a:solidFill>
+                  <a:srgbClr val="17364A"/>
+                </a:solidFill>
+                <a:latin typeface="Aptos" pitchFamily="34" charset="0"/>
+                <a:ea typeface="Aptos" pitchFamily="34" charset="-122"/>
+                <a:cs typeface="Aptos" pitchFamily="34" charset="-120"/>
+              </a:rPr>
+              <a:t>Identify the technical, operational, privacy, security, equity, and governance issues.</a:t>
+            </a:r>
+            <a:endParaRPr lang="en-US" sz="1380" dirty="0"/>
+          </a:p>
+          <a:p>
+            <a:r>
+              <a:rPr lang="en-US" sz="1380" dirty="0">
+                <a:solidFill>
+                  <a:srgbClr val="17364A"/>
+                </a:solidFill>
+                <a:latin typeface="Aptos" pitchFamily="34" charset="0"/>
+                <a:ea typeface="Aptos" pitchFamily="34" charset="-122"/>
+                <a:cs typeface="Aptos" pitchFamily="34" charset="-120"/>
+              </a:rPr>
+              <a:t>Recognize common failure modes that can affect safety, accuracy, trust, workflow fit, or.</a:t>
+            </a:r>
+            <a:endParaRPr lang="en-US" sz="1380" dirty="0"/>
+          </a:p>
+          <a:p>
+            <a:r>
+              <a:rPr lang="en-US" sz="1380" dirty="0">
+                <a:solidFill>
+                  <a:srgbClr val="17364A"/>
+                </a:solidFill>
+                <a:latin typeface="Aptos" pitchFamily="34" charset="0"/>
+                <a:ea typeface="Aptos" pitchFamily="34" charset="-122"/>
+                <a:cs typeface="Aptos" pitchFamily="34" charset="-120"/>
+              </a:rPr>
+              <a:t>Identify practical guardrails that should be documented before implementation.</a:t>
+            </a:r>
+            <a:endParaRPr lang="en-US" sz="1380" dirty="0"/>
+          </a:p>
+        </p:txBody>
       </p:sp>
       <p:sp>
         <p:nvSpPr>
           <p:cNvPr id="16" name="Shape 14"/>
-          <p:cNvSpPr/>
-          <p:nvPr/>
-        </p:nvSpPr>
-        <p:spPr>
-          <a:xfrm>
-            <a:off x="9089136" y="3456432"/>
-            <a:ext cx="566928" cy="566928"/>
-          </a:xfrm>
-          <a:prstGeom prst="ellipse">
-            <a:avLst/>
-          </a:prstGeom>
-          <a:solidFill>
-            <a:srgbClr val="6A4CA3"/>
-          </a:solidFill>
-          <a:ln w="12700">
-            <a:solidFill>
-              <a:srgbClr val="6A4CA3"/>
-            </a:solidFill>
-            <a:prstDash val="solid"/>
-          </a:ln>
-        </p:spPr>
-      </p:sp>
-      <p:sp>
-        <p:nvSpPr>
-          <p:cNvPr id="17" name="Shape 15"/>
-          <p:cNvSpPr/>
-          <p:nvPr/>
-        </p:nvSpPr>
-        <p:spPr>
-          <a:xfrm>
-            <a:off x="8385048" y="3419856"/>
-            <a:ext cx="1975104" cy="0"/>
-          </a:xfrm>
-          <a:prstGeom prst="line">
-            <a:avLst/>
-          </a:prstGeom>
-          <a:noFill/>
-          <a:ln w="25400">
-            <a:solidFill>
-              <a:srgbClr val="8ABBD8"/>
-            </a:solidFill>
-            <a:prstDash val="solid"/>
-          </a:ln>
-        </p:spPr>
-      </p:sp>
-      <p:sp>
-        <p:nvSpPr>
-          <p:cNvPr id="18" name="Shape 16"/>
-          <p:cNvSpPr/>
-          <p:nvPr/>
-        </p:nvSpPr>
-        <p:spPr>
-          <a:xfrm>
-            <a:off x="8202168" y="3630168"/>
-            <a:ext cx="1170432" cy="118872"/>
-          </a:xfrm>
-          <a:prstGeom prst="line">
-            <a:avLst/>
-          </a:prstGeom>
-          <a:noFill/>
-          <a:ln w="25400">
-            <a:solidFill>
-              <a:srgbClr val="8ABBD8"/>
-            </a:solidFill>
-            <a:prstDash val="solid"/>
-          </a:ln>
-        </p:spPr>
-      </p:sp>
-      <p:sp>
-        <p:nvSpPr>
-          <p:cNvPr id="19" name="Shape 17"/>
-          <p:cNvSpPr/>
-          <p:nvPr/>
-        </p:nvSpPr>
-        <p:spPr>
-          <a:xfrm>
-            <a:off x="10543032" y="3630168"/>
-            <a:ext cx="-1170432" cy="118872"/>
-          </a:xfrm>
-          <a:prstGeom prst="line">
-            <a:avLst/>
-          </a:prstGeom>
-          <a:noFill/>
-          <a:ln w="25400">
-            <a:solidFill>
-              <a:srgbClr val="8ABBD8"/>
-            </a:solidFill>
-            <a:prstDash val="solid"/>
-          </a:ln>
-        </p:spPr>
-      </p:sp>
-      <p:sp>
-        <p:nvSpPr>
-          <p:cNvPr id="20" name="Text 18"/>
-          <p:cNvSpPr/>
-          <p:nvPr/>
-        </p:nvSpPr>
-        <p:spPr>
-          <a:xfrm>
-            <a:off x="7863840" y="4069080"/>
-            <a:ext cx="3017520" cy="164592"/>
-          </a:xfrm>
-          <a:prstGeom prst="rect">
-            <a:avLst/>
-          </a:prstGeom>
-          <a:noFill/>
-          <a:ln/>
-        </p:spPr>
-        <p:txBody>
-          <a:bodyPr wrap="square" lIns="0" tIns="0" rIns="0" bIns="0" rtlCol="0" anchor="ctr"/>
-          <a:lstStyle/>
-          <a:p>
-            <a:pPr algn="ctr" indent="0" marL="0">
-              <a:buNone/>
-            </a:pPr>
-            <a:r>
-              <a:rPr lang="en-US" sz="900" b="1" dirty="0">
-                <a:solidFill>
-                  <a:srgbClr val="003A63"/>
-                </a:solidFill>
-                <a:latin typeface="Aptos" pitchFamily="34" charset="0"/>
-                <a:ea typeface="Aptos" pitchFamily="34" charset="-122"/>
-                <a:cs typeface="Aptos" pitchFamily="34" charset="-120"/>
-              </a:rPr>
-              <a:t>Decision rights</a:t>
-            </a:r>
-            <a:endParaRPr lang="en-US" sz="900" dirty="0"/>
-          </a:p>
-        </p:txBody>
-      </p:sp>
-      <p:sp>
-        <p:nvSpPr>
-          <p:cNvPr id="21" name="Shape 19"/>
           <p:cNvSpPr/>
           <p:nvPr/>
         </p:nvSpPr>
@@ -14877,7 +13551,7 @@
       </p:sp>
       <p:sp>
         <p:nvSpPr>
-          <p:cNvPr id="22" name="Text 20"/>
+          <p:cNvPr id="17" name="Text 15"/>
           <p:cNvSpPr/>
           <p:nvPr/>
         </p:nvSpPr>
@@ -14916,7 +13590,7 @@
       </p:sp>
       <p:sp>
         <p:nvSpPr>
-          <p:cNvPr id="23" name="Text 21"/>
+          <p:cNvPr id="18" name="Text 16"/>
           <p:cNvSpPr/>
           <p:nvPr/>
         </p:nvSpPr>
@@ -15396,13 +14070,11 @@
             </a:avLst>
           </a:prstGeom>
           <a:solidFill>
-            <a:srgbClr val="FFFFFF">
-              <a:alpha val="88000"/>
-            </a:srgbClr>
+            <a:srgbClr val="FFFFFF"/>
           </a:solidFill>
           <a:ln w="12700">
             <a:solidFill>
-              <a:srgbClr val="D6E8F2"/>
+              <a:srgbClr val="B9D7E6"/>
             </a:solidFill>
             <a:prstDash val="solid"/>
           </a:ln>
@@ -15410,190 +14082,84 @@
       </p:sp>
       <p:sp>
         <p:nvSpPr>
-          <p:cNvPr id="14" name="Shape 12"/>
-          <p:cNvSpPr/>
-          <p:nvPr/>
-        </p:nvSpPr>
-        <p:spPr>
-          <a:xfrm>
-            <a:off x="7891272" y="3108960"/>
-            <a:ext cx="566928" cy="566928"/>
-          </a:xfrm>
-          <a:prstGeom prst="ellipse">
-            <a:avLst/>
-          </a:prstGeom>
-          <a:solidFill>
-            <a:srgbClr val="0068B7"/>
-          </a:solidFill>
-          <a:ln w="12700">
-            <a:solidFill>
-              <a:srgbClr val="0068B7"/>
-            </a:solidFill>
-            <a:prstDash val="solid"/>
-          </a:ln>
-        </p:spPr>
-      </p:sp>
-      <p:sp>
-        <p:nvSpPr>
-          <p:cNvPr id="15" name="Shape 13"/>
-          <p:cNvSpPr/>
-          <p:nvPr/>
-        </p:nvSpPr>
-        <p:spPr>
-          <a:xfrm>
-            <a:off x="10287000" y="3108960"/>
-            <a:ext cx="566928" cy="566928"/>
-          </a:xfrm>
-          <a:prstGeom prst="ellipse">
-            <a:avLst/>
-          </a:prstGeom>
-          <a:solidFill>
-            <a:srgbClr val="2F8A28"/>
-          </a:solidFill>
-          <a:ln w="12700">
-            <a:solidFill>
-              <a:srgbClr val="2F8A28"/>
-            </a:solidFill>
-            <a:prstDash val="solid"/>
-          </a:ln>
-        </p:spPr>
+          <p:cNvPr id="14" name="Text 12"/>
+          <p:cNvSpPr/>
+          <p:nvPr/>
+        </p:nvSpPr>
+        <p:spPr>
+          <a:xfrm>
+            <a:off x="7799832" y="2935224"/>
+            <a:ext cx="3145536" cy="256032"/>
+          </a:xfrm>
+          <a:prstGeom prst="rect">
+            <a:avLst/>
+          </a:prstGeom>
+          <a:noFill/>
+          <a:ln/>
+        </p:spPr>
+        <p:txBody>
+          <a:bodyPr wrap="square" lIns="0" tIns="0" rIns="0" bIns="0" rtlCol="0" anchor="ctr"/>
+          <a:lstStyle/>
+          <a:p>
+            <a:pPr indent="0" marL="0">
+              <a:buNone/>
+            </a:pPr>
+            <a:r>
+              <a:rPr lang="en-US" sz="1300" b="1" dirty="0">
+                <a:solidFill>
+                  <a:srgbClr val="0068B7"/>
+                </a:solidFill>
+                <a:latin typeface="Aptos" pitchFamily="34" charset="0"/>
+                <a:ea typeface="Aptos" pitchFamily="34" charset="-122"/>
+                <a:cs typeface="Aptos" pitchFamily="34" charset="-120"/>
+              </a:rPr>
+              <a:t>Concept checkpoints</a:t>
+            </a:r>
+            <a:endParaRPr lang="en-US" sz="1300" dirty="0"/>
+          </a:p>
+        </p:txBody>
+      </p:sp>
+      <p:sp>
+        <p:nvSpPr>
+          <p:cNvPr id="15" name="Text 13"/>
+          <p:cNvSpPr/>
+          <p:nvPr/>
+        </p:nvSpPr>
+        <p:spPr>
+          <a:xfrm>
+            <a:off x="7818120" y="3300984"/>
+            <a:ext cx="3090672" cy="877824"/>
+          </a:xfrm>
+          <a:prstGeom prst="rect">
+            <a:avLst/>
+          </a:prstGeom>
+          <a:noFill/>
+          <a:ln/>
+        </p:spPr>
+        <p:txBody>
+          <a:bodyPr wrap="square" lIns="254" tIns="254" rIns="254" bIns="254" rtlCol="0" anchor="t">
+            <a:normAutofit/>
+          </a:bodyPr>
+          <a:lstStyle/>
+          <a:p>
+            <a:r>
+              <a:rPr lang="en-US" sz="1380" dirty="0">
+                <a:solidFill>
+                  <a:srgbClr val="17364A"/>
+                </a:solidFill>
+                <a:latin typeface="Aptos" pitchFamily="34" charset="0"/>
+                <a:ea typeface="Aptos" pitchFamily="34" charset="-122"/>
+                <a:cs typeface="Aptos" pitchFamily="34" charset="-120"/>
+              </a:rPr>
+              <a:t>Produce a AI-ready data governance checklist that can support readiness assessment,.</a:t>
+            </a:r>
+            <a:endParaRPr lang="en-US" sz="1380" dirty="0"/>
+          </a:p>
+        </p:txBody>
       </p:sp>
       <p:sp>
         <p:nvSpPr>
           <p:cNvPr id="16" name="Shape 14"/>
-          <p:cNvSpPr/>
-          <p:nvPr/>
-        </p:nvSpPr>
-        <p:spPr>
-          <a:xfrm>
-            <a:off x="9089136" y="3456432"/>
-            <a:ext cx="566928" cy="566928"/>
-          </a:xfrm>
-          <a:prstGeom prst="ellipse">
-            <a:avLst/>
-          </a:prstGeom>
-          <a:solidFill>
-            <a:srgbClr val="6A4CA3"/>
-          </a:solidFill>
-          <a:ln w="12700">
-            <a:solidFill>
-              <a:srgbClr val="6A4CA3"/>
-            </a:solidFill>
-            <a:prstDash val="solid"/>
-          </a:ln>
-        </p:spPr>
-      </p:sp>
-      <p:sp>
-        <p:nvSpPr>
-          <p:cNvPr id="17" name="Shape 15"/>
-          <p:cNvSpPr/>
-          <p:nvPr/>
-        </p:nvSpPr>
-        <p:spPr>
-          <a:xfrm>
-            <a:off x="8385048" y="3419856"/>
-            <a:ext cx="1975104" cy="0"/>
-          </a:xfrm>
-          <a:prstGeom prst="line">
-            <a:avLst/>
-          </a:prstGeom>
-          <a:noFill/>
-          <a:ln w="25400">
-            <a:solidFill>
-              <a:srgbClr val="8ABBD8"/>
-            </a:solidFill>
-            <a:prstDash val="solid"/>
-          </a:ln>
-        </p:spPr>
-      </p:sp>
-      <p:sp>
-        <p:nvSpPr>
-          <p:cNvPr id="18" name="Shape 16"/>
-          <p:cNvSpPr/>
-          <p:nvPr/>
-        </p:nvSpPr>
-        <p:spPr>
-          <a:xfrm>
-            <a:off x="8202168" y="3630168"/>
-            <a:ext cx="1170432" cy="118872"/>
-          </a:xfrm>
-          <a:prstGeom prst="line">
-            <a:avLst/>
-          </a:prstGeom>
-          <a:noFill/>
-          <a:ln w="25400">
-            <a:solidFill>
-              <a:srgbClr val="8ABBD8"/>
-            </a:solidFill>
-            <a:prstDash val="solid"/>
-          </a:ln>
-        </p:spPr>
-      </p:sp>
-      <p:sp>
-        <p:nvSpPr>
-          <p:cNvPr id="19" name="Shape 17"/>
-          <p:cNvSpPr/>
-          <p:nvPr/>
-        </p:nvSpPr>
-        <p:spPr>
-          <a:xfrm>
-            <a:off x="10543032" y="3630168"/>
-            <a:ext cx="-1170432" cy="118872"/>
-          </a:xfrm>
-          <a:prstGeom prst="line">
-            <a:avLst/>
-          </a:prstGeom>
-          <a:noFill/>
-          <a:ln w="25400">
-            <a:solidFill>
-              <a:srgbClr val="8ABBD8"/>
-            </a:solidFill>
-            <a:prstDash val="solid"/>
-          </a:ln>
-        </p:spPr>
-      </p:sp>
-      <p:sp>
-        <p:nvSpPr>
-          <p:cNvPr id="20" name="Text 18"/>
-          <p:cNvSpPr/>
-          <p:nvPr/>
-        </p:nvSpPr>
-        <p:spPr>
-          <a:xfrm>
-            <a:off x="7863840" y="4069080"/>
-            <a:ext cx="3017520" cy="164592"/>
-          </a:xfrm>
-          <a:prstGeom prst="rect">
-            <a:avLst/>
-          </a:prstGeom>
-          <a:noFill/>
-          <a:ln/>
-        </p:spPr>
-        <p:txBody>
-          <a:bodyPr wrap="square" lIns="0" tIns="0" rIns="0" bIns="0" rtlCol="0" anchor="ctr"/>
-          <a:lstStyle/>
-          <a:p>
-            <a:pPr algn="ctr" indent="0" marL="0">
-              <a:buNone/>
-            </a:pPr>
-            <a:r>
-              <a:rPr lang="en-US" sz="900" b="1" dirty="0">
-                <a:solidFill>
-                  <a:srgbClr val="003A63"/>
-                </a:solidFill>
-                <a:latin typeface="Aptos" pitchFamily="34" charset="0"/>
-                <a:ea typeface="Aptos" pitchFamily="34" charset="-122"/>
-                <a:cs typeface="Aptos" pitchFamily="34" charset="-120"/>
-              </a:rPr>
-              <a:t>Decision rights</a:t>
-            </a:r>
-            <a:endParaRPr lang="en-US" sz="900" dirty="0"/>
-          </a:p>
-        </p:txBody>
-      </p:sp>
-      <p:sp>
-        <p:nvSpPr>
-          <p:cNvPr id="21" name="Shape 19"/>
           <p:cNvSpPr/>
           <p:nvPr/>
         </p:nvSpPr>
@@ -15620,7 +14186,7 @@
       </p:sp>
       <p:sp>
         <p:nvSpPr>
-          <p:cNvPr id="22" name="Text 20"/>
+          <p:cNvPr id="17" name="Text 15"/>
           <p:cNvSpPr/>
           <p:nvPr/>
         </p:nvSpPr>
@@ -15659,7 +14225,7 @@
       </p:sp>
       <p:sp>
         <p:nvSpPr>
-          <p:cNvPr id="23" name="Text 21"/>
+          <p:cNvPr id="18" name="Text 16"/>
           <p:cNvSpPr/>
           <p:nvPr/>
         </p:nvSpPr>
@@ -16167,13 +14733,11 @@
             </a:avLst>
           </a:prstGeom>
           <a:solidFill>
-            <a:srgbClr val="FFFFFF">
-              <a:alpha val="88000"/>
-            </a:srgbClr>
+            <a:srgbClr val="FFFFFF"/>
           </a:solidFill>
           <a:ln w="12700">
             <a:solidFill>
-              <a:srgbClr val="D6E8F2"/>
+              <a:srgbClr val="B9D7E6"/>
             </a:solidFill>
             <a:prstDash val="solid"/>
           </a:ln>
@@ -16181,190 +14745,98 @@
       </p:sp>
       <p:sp>
         <p:nvSpPr>
-          <p:cNvPr id="14" name="Shape 12"/>
-          <p:cNvSpPr/>
-          <p:nvPr/>
-        </p:nvSpPr>
-        <p:spPr>
-          <a:xfrm>
-            <a:off x="7891272" y="3108960"/>
-            <a:ext cx="566928" cy="566928"/>
-          </a:xfrm>
-          <a:prstGeom prst="ellipse">
-            <a:avLst/>
-          </a:prstGeom>
-          <a:solidFill>
-            <a:srgbClr val="0068B7"/>
-          </a:solidFill>
-          <a:ln w="12700">
-            <a:solidFill>
-              <a:srgbClr val="0068B7"/>
-            </a:solidFill>
-            <a:prstDash val="solid"/>
-          </a:ln>
-        </p:spPr>
-      </p:sp>
-      <p:sp>
-        <p:nvSpPr>
-          <p:cNvPr id="15" name="Shape 13"/>
-          <p:cNvSpPr/>
-          <p:nvPr/>
-        </p:nvSpPr>
-        <p:spPr>
-          <a:xfrm>
-            <a:off x="10287000" y="3108960"/>
-            <a:ext cx="566928" cy="566928"/>
-          </a:xfrm>
-          <a:prstGeom prst="ellipse">
-            <a:avLst/>
-          </a:prstGeom>
-          <a:solidFill>
-            <a:srgbClr val="2F8A28"/>
-          </a:solidFill>
-          <a:ln w="12700">
-            <a:solidFill>
-              <a:srgbClr val="2F8A28"/>
-            </a:solidFill>
-            <a:prstDash val="solid"/>
-          </a:ln>
-        </p:spPr>
+          <p:cNvPr id="14" name="Text 12"/>
+          <p:cNvSpPr/>
+          <p:nvPr/>
+        </p:nvSpPr>
+        <p:spPr>
+          <a:xfrm>
+            <a:off x="7799832" y="2935224"/>
+            <a:ext cx="3145536" cy="256032"/>
+          </a:xfrm>
+          <a:prstGeom prst="rect">
+            <a:avLst/>
+          </a:prstGeom>
+          <a:noFill/>
+          <a:ln/>
+        </p:spPr>
+        <p:txBody>
+          <a:bodyPr wrap="square" lIns="0" tIns="0" rIns="0" bIns="0" rtlCol="0" anchor="ctr"/>
+          <a:lstStyle/>
+          <a:p>
+            <a:pPr indent="0" marL="0">
+              <a:buNone/>
+            </a:pPr>
+            <a:r>
+              <a:rPr lang="en-US" sz="1300" b="1" dirty="0">
+                <a:solidFill>
+                  <a:srgbClr val="0068B7"/>
+                </a:solidFill>
+                <a:latin typeface="Aptos" pitchFamily="34" charset="0"/>
+                <a:ea typeface="Aptos" pitchFamily="34" charset="-122"/>
+                <a:cs typeface="Aptos" pitchFamily="34" charset="-120"/>
+              </a:rPr>
+              <a:t>Concept checkpoints</a:t>
+            </a:r>
+            <a:endParaRPr lang="en-US" sz="1300" dirty="0"/>
+          </a:p>
+        </p:txBody>
+      </p:sp>
+      <p:sp>
+        <p:nvSpPr>
+          <p:cNvPr id="15" name="Text 13"/>
+          <p:cNvSpPr/>
+          <p:nvPr/>
+        </p:nvSpPr>
+        <p:spPr>
+          <a:xfrm>
+            <a:off x="7818120" y="3300984"/>
+            <a:ext cx="3090672" cy="877824"/>
+          </a:xfrm>
+          <a:prstGeom prst="rect">
+            <a:avLst/>
+          </a:prstGeom>
+          <a:noFill/>
+          <a:ln/>
+        </p:spPr>
+        <p:txBody>
+          <a:bodyPr wrap="square" lIns="254" tIns="254" rIns="254" bIns="254" rtlCol="0" anchor="t">
+            <a:normAutofit/>
+          </a:bodyPr>
+          <a:lstStyle/>
+          <a:p>
+            <a:r>
+              <a:rPr lang="en-US" sz="1380" dirty="0">
+                <a:solidFill>
+                  <a:srgbClr val="17364A"/>
+                </a:solidFill>
+                <a:latin typeface="Aptos" pitchFamily="34" charset="0"/>
+                <a:ea typeface="Aptos" pitchFamily="34" charset="-122"/>
+                <a:cs typeface="Aptos" pitchFamily="34" charset="-120"/>
+              </a:rPr>
+              <a:t>Data governance defines ownership, stewardship, metadata, permissible use, data quality.</a:t>
+            </a:r>
+            <a:endParaRPr lang="en-US" sz="1380" dirty="0"/>
+          </a:p>
+          <a:p>
+            <a:r>
+              <a:rPr lang="en-US" sz="1380" dirty="0">
+                <a:solidFill>
+                  <a:srgbClr val="17364A"/>
+                </a:solidFill>
+                <a:latin typeface="Aptos" pitchFamily="34" charset="0"/>
+                <a:ea typeface="Aptos" pitchFamily="34" charset="-122"/>
+                <a:cs typeface="Aptos" pitchFamily="34" charset="-120"/>
+              </a:rPr>
+              <a:t>This module helps learners connect governance practices to safe AI use across.</a:t>
+            </a:r>
+            <a:endParaRPr lang="en-US" sz="1380" dirty="0"/>
+          </a:p>
+        </p:txBody>
       </p:sp>
       <p:sp>
         <p:nvSpPr>
           <p:cNvPr id="16" name="Shape 14"/>
-          <p:cNvSpPr/>
-          <p:nvPr/>
-        </p:nvSpPr>
-        <p:spPr>
-          <a:xfrm>
-            <a:off x="9089136" y="3456432"/>
-            <a:ext cx="566928" cy="566928"/>
-          </a:xfrm>
-          <a:prstGeom prst="ellipse">
-            <a:avLst/>
-          </a:prstGeom>
-          <a:solidFill>
-            <a:srgbClr val="6A4CA3"/>
-          </a:solidFill>
-          <a:ln w="12700">
-            <a:solidFill>
-              <a:srgbClr val="6A4CA3"/>
-            </a:solidFill>
-            <a:prstDash val="solid"/>
-          </a:ln>
-        </p:spPr>
-      </p:sp>
-      <p:sp>
-        <p:nvSpPr>
-          <p:cNvPr id="17" name="Shape 15"/>
-          <p:cNvSpPr/>
-          <p:nvPr/>
-        </p:nvSpPr>
-        <p:spPr>
-          <a:xfrm>
-            <a:off x="8385048" y="3419856"/>
-            <a:ext cx="1975104" cy="0"/>
-          </a:xfrm>
-          <a:prstGeom prst="line">
-            <a:avLst/>
-          </a:prstGeom>
-          <a:noFill/>
-          <a:ln w="25400">
-            <a:solidFill>
-              <a:srgbClr val="8ABBD8"/>
-            </a:solidFill>
-            <a:prstDash val="solid"/>
-          </a:ln>
-        </p:spPr>
-      </p:sp>
-      <p:sp>
-        <p:nvSpPr>
-          <p:cNvPr id="18" name="Shape 16"/>
-          <p:cNvSpPr/>
-          <p:nvPr/>
-        </p:nvSpPr>
-        <p:spPr>
-          <a:xfrm>
-            <a:off x="8202168" y="3630168"/>
-            <a:ext cx="1170432" cy="118872"/>
-          </a:xfrm>
-          <a:prstGeom prst="line">
-            <a:avLst/>
-          </a:prstGeom>
-          <a:noFill/>
-          <a:ln w="25400">
-            <a:solidFill>
-              <a:srgbClr val="8ABBD8"/>
-            </a:solidFill>
-            <a:prstDash val="solid"/>
-          </a:ln>
-        </p:spPr>
-      </p:sp>
-      <p:sp>
-        <p:nvSpPr>
-          <p:cNvPr id="19" name="Shape 17"/>
-          <p:cNvSpPr/>
-          <p:nvPr/>
-        </p:nvSpPr>
-        <p:spPr>
-          <a:xfrm>
-            <a:off x="10543032" y="3630168"/>
-            <a:ext cx="-1170432" cy="118872"/>
-          </a:xfrm>
-          <a:prstGeom prst="line">
-            <a:avLst/>
-          </a:prstGeom>
-          <a:noFill/>
-          <a:ln w="25400">
-            <a:solidFill>
-              <a:srgbClr val="8ABBD8"/>
-            </a:solidFill>
-            <a:prstDash val="solid"/>
-          </a:ln>
-        </p:spPr>
-      </p:sp>
-      <p:sp>
-        <p:nvSpPr>
-          <p:cNvPr id="20" name="Text 18"/>
-          <p:cNvSpPr/>
-          <p:nvPr/>
-        </p:nvSpPr>
-        <p:spPr>
-          <a:xfrm>
-            <a:off x="7863840" y="4069080"/>
-            <a:ext cx="3017520" cy="164592"/>
-          </a:xfrm>
-          <a:prstGeom prst="rect">
-            <a:avLst/>
-          </a:prstGeom>
-          <a:noFill/>
-          <a:ln/>
-        </p:spPr>
-        <p:txBody>
-          <a:bodyPr wrap="square" lIns="0" tIns="0" rIns="0" bIns="0" rtlCol="0" anchor="ctr"/>
-          <a:lstStyle/>
-          <a:p>
-            <a:pPr algn="ctr" indent="0" marL="0">
-              <a:buNone/>
-            </a:pPr>
-            <a:r>
-              <a:rPr lang="en-US" sz="900" b="1" dirty="0">
-                <a:solidFill>
-                  <a:srgbClr val="003A63"/>
-                </a:solidFill>
-                <a:latin typeface="Aptos" pitchFamily="34" charset="0"/>
-                <a:ea typeface="Aptos" pitchFamily="34" charset="-122"/>
-                <a:cs typeface="Aptos" pitchFamily="34" charset="-120"/>
-              </a:rPr>
-              <a:t>Decision rights</a:t>
-            </a:r>
-            <a:endParaRPr lang="en-US" sz="900" dirty="0"/>
-          </a:p>
-        </p:txBody>
-      </p:sp>
-      <p:sp>
-        <p:nvSpPr>
-          <p:cNvPr id="21" name="Shape 19"/>
           <p:cNvSpPr/>
           <p:nvPr/>
         </p:nvSpPr>
@@ -16391,7 +14863,7 @@
       </p:sp>
       <p:sp>
         <p:nvSpPr>
-          <p:cNvPr id="22" name="Text 20"/>
+          <p:cNvPr id="17" name="Text 15"/>
           <p:cNvSpPr/>
           <p:nvPr/>
         </p:nvSpPr>
@@ -16430,7 +14902,7 @@
       </p:sp>
       <p:sp>
         <p:nvSpPr>
-          <p:cNvPr id="23" name="Text 21"/>
+          <p:cNvPr id="18" name="Text 16"/>
           <p:cNvSpPr/>
           <p:nvPr/>
         </p:nvSpPr>
@@ -16938,13 +15410,11 @@
             </a:avLst>
           </a:prstGeom>
           <a:solidFill>
-            <a:srgbClr val="FFFFFF">
-              <a:alpha val="88000"/>
-            </a:srgbClr>
+            <a:srgbClr val="FFFFFF"/>
           </a:solidFill>
           <a:ln w="12700">
             <a:solidFill>
-              <a:srgbClr val="D6E8F2"/>
+              <a:srgbClr val="B9D7E6"/>
             </a:solidFill>
             <a:prstDash val="solid"/>
           </a:ln>
@@ -16952,190 +15422,112 @@
       </p:sp>
       <p:sp>
         <p:nvSpPr>
-          <p:cNvPr id="14" name="Shape 12"/>
-          <p:cNvSpPr/>
-          <p:nvPr/>
-        </p:nvSpPr>
-        <p:spPr>
-          <a:xfrm>
-            <a:off x="7891272" y="3108960"/>
-            <a:ext cx="566928" cy="566928"/>
-          </a:xfrm>
-          <a:prstGeom prst="ellipse">
-            <a:avLst/>
-          </a:prstGeom>
-          <a:solidFill>
-            <a:srgbClr val="0068B7"/>
-          </a:solidFill>
-          <a:ln w="12700">
-            <a:solidFill>
-              <a:srgbClr val="0068B7"/>
-            </a:solidFill>
-            <a:prstDash val="solid"/>
-          </a:ln>
-        </p:spPr>
-      </p:sp>
-      <p:sp>
-        <p:nvSpPr>
-          <p:cNvPr id="15" name="Shape 13"/>
-          <p:cNvSpPr/>
-          <p:nvPr/>
-        </p:nvSpPr>
-        <p:spPr>
-          <a:xfrm>
-            <a:off x="10287000" y="3108960"/>
-            <a:ext cx="566928" cy="566928"/>
-          </a:xfrm>
-          <a:prstGeom prst="ellipse">
-            <a:avLst/>
-          </a:prstGeom>
-          <a:solidFill>
-            <a:srgbClr val="2F8A28"/>
-          </a:solidFill>
-          <a:ln w="12700">
-            <a:solidFill>
-              <a:srgbClr val="2F8A28"/>
-            </a:solidFill>
-            <a:prstDash val="solid"/>
-          </a:ln>
-        </p:spPr>
+          <p:cNvPr id="14" name="Text 12"/>
+          <p:cNvSpPr/>
+          <p:nvPr/>
+        </p:nvSpPr>
+        <p:spPr>
+          <a:xfrm>
+            <a:off x="7799832" y="2935224"/>
+            <a:ext cx="3145536" cy="256032"/>
+          </a:xfrm>
+          <a:prstGeom prst="rect">
+            <a:avLst/>
+          </a:prstGeom>
+          <a:noFill/>
+          <a:ln/>
+        </p:spPr>
+        <p:txBody>
+          <a:bodyPr wrap="square" lIns="0" tIns="0" rIns="0" bIns="0" rtlCol="0" anchor="ctr"/>
+          <a:lstStyle/>
+          <a:p>
+            <a:pPr indent="0" marL="0">
+              <a:buNone/>
+            </a:pPr>
+            <a:r>
+              <a:rPr lang="en-US" sz="1300" b="1" dirty="0">
+                <a:solidFill>
+                  <a:srgbClr val="0068B7"/>
+                </a:solidFill>
+                <a:latin typeface="Aptos" pitchFamily="34" charset="0"/>
+                <a:ea typeface="Aptos" pitchFamily="34" charset="-122"/>
+                <a:cs typeface="Aptos" pitchFamily="34" charset="-120"/>
+              </a:rPr>
+              <a:t>Concept checkpoints</a:t>
+            </a:r>
+            <a:endParaRPr lang="en-US" sz="1300" dirty="0"/>
+          </a:p>
+        </p:txBody>
+      </p:sp>
+      <p:sp>
+        <p:nvSpPr>
+          <p:cNvPr id="15" name="Text 13"/>
+          <p:cNvSpPr/>
+          <p:nvPr/>
+        </p:nvSpPr>
+        <p:spPr>
+          <a:xfrm>
+            <a:off x="7818120" y="3300984"/>
+            <a:ext cx="3090672" cy="877824"/>
+          </a:xfrm>
+          <a:prstGeom prst="rect">
+            <a:avLst/>
+          </a:prstGeom>
+          <a:noFill/>
+          <a:ln/>
+        </p:spPr>
+        <p:txBody>
+          <a:bodyPr wrap="square" lIns="254" tIns="254" rIns="254" bIns="254" rtlCol="0" anchor="t">
+            <a:normAutofit/>
+          </a:bodyPr>
+          <a:lstStyle/>
+          <a:p>
+            <a:r>
+              <a:rPr lang="en-US" sz="1380" dirty="0">
+                <a:solidFill>
+                  <a:srgbClr val="17364A"/>
+                </a:solidFill>
+                <a:latin typeface="Aptos" pitchFamily="34" charset="0"/>
+                <a:ea typeface="Aptos" pitchFamily="34" charset="-122"/>
+                <a:cs typeface="Aptos" pitchFamily="34" charset="-120"/>
+              </a:rPr>
+              <a:t>It is not legal advice and does not replace review by agency legal counsel, privacy.</a:t>
+            </a:r>
+            <a:endParaRPr lang="en-US" sz="1380" dirty="0"/>
+          </a:p>
+          <a:p>
+            <a:r>
+              <a:rPr lang="en-US" sz="1380" dirty="0">
+                <a:solidFill>
+                  <a:srgbClr val="17364A"/>
+                </a:solidFill>
+                <a:latin typeface="Aptos" pitchFamily="34" charset="0"/>
+                <a:ea typeface="Aptos" pitchFamily="34" charset="-122"/>
+                <a:cs typeface="Aptos" pitchFamily="34" charset="-120"/>
+              </a:rPr>
+              <a:t>Requirements may vary by state, locality, territory, Tribe, agency, funding source,.</a:t>
+            </a:r>
+            <a:endParaRPr lang="en-US" sz="1380" dirty="0"/>
+          </a:p>
+          <a:p>
+            <a:r>
+              <a:rPr lang="en-US" sz="1380" dirty="0">
+                <a:solidFill>
+                  <a:srgbClr val="17364A"/>
+                </a:solidFill>
+                <a:latin typeface="Aptos" pitchFamily="34" charset="0"/>
+                <a:ea typeface="Aptos" pitchFamily="34" charset="-122"/>
+                <a:cs typeface="Aptos" pitchFamily="34" charset="-120"/>
+              </a:rPr>
+              <a:t>Learners should use this module to identify the issues that require review and should.</a:t>
+            </a:r>
+            <a:endParaRPr lang="en-US" sz="1380" dirty="0"/>
+          </a:p>
+        </p:txBody>
       </p:sp>
       <p:sp>
         <p:nvSpPr>
           <p:cNvPr id="16" name="Shape 14"/>
-          <p:cNvSpPr/>
-          <p:nvPr/>
-        </p:nvSpPr>
-        <p:spPr>
-          <a:xfrm>
-            <a:off x="9089136" y="3456432"/>
-            <a:ext cx="566928" cy="566928"/>
-          </a:xfrm>
-          <a:prstGeom prst="ellipse">
-            <a:avLst/>
-          </a:prstGeom>
-          <a:solidFill>
-            <a:srgbClr val="6A4CA3"/>
-          </a:solidFill>
-          <a:ln w="12700">
-            <a:solidFill>
-              <a:srgbClr val="6A4CA3"/>
-            </a:solidFill>
-            <a:prstDash val="solid"/>
-          </a:ln>
-        </p:spPr>
-      </p:sp>
-      <p:sp>
-        <p:nvSpPr>
-          <p:cNvPr id="17" name="Shape 15"/>
-          <p:cNvSpPr/>
-          <p:nvPr/>
-        </p:nvSpPr>
-        <p:spPr>
-          <a:xfrm>
-            <a:off x="8385048" y="3419856"/>
-            <a:ext cx="1975104" cy="0"/>
-          </a:xfrm>
-          <a:prstGeom prst="line">
-            <a:avLst/>
-          </a:prstGeom>
-          <a:noFill/>
-          <a:ln w="25400">
-            <a:solidFill>
-              <a:srgbClr val="8ABBD8"/>
-            </a:solidFill>
-            <a:prstDash val="solid"/>
-          </a:ln>
-        </p:spPr>
-      </p:sp>
-      <p:sp>
-        <p:nvSpPr>
-          <p:cNvPr id="18" name="Shape 16"/>
-          <p:cNvSpPr/>
-          <p:nvPr/>
-        </p:nvSpPr>
-        <p:spPr>
-          <a:xfrm>
-            <a:off x="8202168" y="3630168"/>
-            <a:ext cx="1170432" cy="118872"/>
-          </a:xfrm>
-          <a:prstGeom prst="line">
-            <a:avLst/>
-          </a:prstGeom>
-          <a:noFill/>
-          <a:ln w="25400">
-            <a:solidFill>
-              <a:srgbClr val="8ABBD8"/>
-            </a:solidFill>
-            <a:prstDash val="solid"/>
-          </a:ln>
-        </p:spPr>
-      </p:sp>
-      <p:sp>
-        <p:nvSpPr>
-          <p:cNvPr id="19" name="Shape 17"/>
-          <p:cNvSpPr/>
-          <p:nvPr/>
-        </p:nvSpPr>
-        <p:spPr>
-          <a:xfrm>
-            <a:off x="10543032" y="3630168"/>
-            <a:ext cx="-1170432" cy="118872"/>
-          </a:xfrm>
-          <a:prstGeom prst="line">
-            <a:avLst/>
-          </a:prstGeom>
-          <a:noFill/>
-          <a:ln w="25400">
-            <a:solidFill>
-              <a:srgbClr val="8ABBD8"/>
-            </a:solidFill>
-            <a:prstDash val="solid"/>
-          </a:ln>
-        </p:spPr>
-      </p:sp>
-      <p:sp>
-        <p:nvSpPr>
-          <p:cNvPr id="20" name="Text 18"/>
-          <p:cNvSpPr/>
-          <p:nvPr/>
-        </p:nvSpPr>
-        <p:spPr>
-          <a:xfrm>
-            <a:off x="7863840" y="4069080"/>
-            <a:ext cx="3017520" cy="164592"/>
-          </a:xfrm>
-          <a:prstGeom prst="rect">
-            <a:avLst/>
-          </a:prstGeom>
-          <a:noFill/>
-          <a:ln/>
-        </p:spPr>
-        <p:txBody>
-          <a:bodyPr wrap="square" lIns="0" tIns="0" rIns="0" bIns="0" rtlCol="0" anchor="ctr"/>
-          <a:lstStyle/>
-          <a:p>
-            <a:pPr algn="ctr" indent="0" marL="0">
-              <a:buNone/>
-            </a:pPr>
-            <a:r>
-              <a:rPr lang="en-US" sz="900" b="1" dirty="0">
-                <a:solidFill>
-                  <a:srgbClr val="003A63"/>
-                </a:solidFill>
-                <a:latin typeface="Aptos" pitchFamily="34" charset="0"/>
-                <a:ea typeface="Aptos" pitchFamily="34" charset="-122"/>
-                <a:cs typeface="Aptos" pitchFamily="34" charset="-120"/>
-              </a:rPr>
-              <a:t>Decision rights</a:t>
-            </a:r>
-            <a:endParaRPr lang="en-US" sz="900" dirty="0"/>
-          </a:p>
-        </p:txBody>
-      </p:sp>
-      <p:sp>
-        <p:nvSpPr>
-          <p:cNvPr id="21" name="Shape 19"/>
           <p:cNvSpPr/>
           <p:nvPr/>
         </p:nvSpPr>
@@ -17162,7 +15554,7 @@
       </p:sp>
       <p:sp>
         <p:nvSpPr>
-          <p:cNvPr id="22" name="Text 20"/>
+          <p:cNvPr id="17" name="Text 15"/>
           <p:cNvSpPr/>
           <p:nvPr/>
         </p:nvSpPr>
@@ -17201,7 +15593,7 @@
       </p:sp>
       <p:sp>
         <p:nvSpPr>
-          <p:cNvPr id="23" name="Text 21"/>
+          <p:cNvPr id="18" name="Text 16"/>
           <p:cNvSpPr/>
           <p:nvPr/>
         </p:nvSpPr>
@@ -17709,13 +16101,11 @@
             </a:avLst>
           </a:prstGeom>
           <a:solidFill>
-            <a:srgbClr val="FFFFFF">
-              <a:alpha val="88000"/>
-            </a:srgbClr>
+            <a:srgbClr val="FFFFFF"/>
           </a:solidFill>
           <a:ln w="12700">
             <a:solidFill>
-              <a:srgbClr val="D6E8F2"/>
+              <a:srgbClr val="B9D7E6"/>
             </a:solidFill>
             <a:prstDash val="solid"/>
           </a:ln>
@@ -17723,190 +16113,112 @@
       </p:sp>
       <p:sp>
         <p:nvSpPr>
-          <p:cNvPr id="14" name="Shape 12"/>
-          <p:cNvSpPr/>
-          <p:nvPr/>
-        </p:nvSpPr>
-        <p:spPr>
-          <a:xfrm>
-            <a:off x="7891272" y="3108960"/>
-            <a:ext cx="566928" cy="566928"/>
-          </a:xfrm>
-          <a:prstGeom prst="ellipse">
-            <a:avLst/>
-          </a:prstGeom>
-          <a:solidFill>
-            <a:srgbClr val="0068B7"/>
-          </a:solidFill>
-          <a:ln w="12700">
-            <a:solidFill>
-              <a:srgbClr val="0068B7"/>
-            </a:solidFill>
-            <a:prstDash val="solid"/>
-          </a:ln>
-        </p:spPr>
-      </p:sp>
-      <p:sp>
-        <p:nvSpPr>
-          <p:cNvPr id="15" name="Shape 13"/>
-          <p:cNvSpPr/>
-          <p:nvPr/>
-        </p:nvSpPr>
-        <p:spPr>
-          <a:xfrm>
-            <a:off x="10287000" y="3108960"/>
-            <a:ext cx="566928" cy="566928"/>
-          </a:xfrm>
-          <a:prstGeom prst="ellipse">
-            <a:avLst/>
-          </a:prstGeom>
-          <a:solidFill>
-            <a:srgbClr val="2F8A28"/>
-          </a:solidFill>
-          <a:ln w="12700">
-            <a:solidFill>
-              <a:srgbClr val="2F8A28"/>
-            </a:solidFill>
-            <a:prstDash val="solid"/>
-          </a:ln>
-        </p:spPr>
+          <p:cNvPr id="14" name="Text 12"/>
+          <p:cNvSpPr/>
+          <p:nvPr/>
+        </p:nvSpPr>
+        <p:spPr>
+          <a:xfrm>
+            <a:off x="7799832" y="2935224"/>
+            <a:ext cx="3145536" cy="256032"/>
+          </a:xfrm>
+          <a:prstGeom prst="rect">
+            <a:avLst/>
+          </a:prstGeom>
+          <a:noFill/>
+          <a:ln/>
+        </p:spPr>
+        <p:txBody>
+          <a:bodyPr wrap="square" lIns="0" tIns="0" rIns="0" bIns="0" rtlCol="0" anchor="ctr"/>
+          <a:lstStyle/>
+          <a:p>
+            <a:pPr indent="0" marL="0">
+              <a:buNone/>
+            </a:pPr>
+            <a:r>
+              <a:rPr lang="en-US" sz="1300" b="1" dirty="0">
+                <a:solidFill>
+                  <a:srgbClr val="0068B7"/>
+                </a:solidFill>
+                <a:latin typeface="Aptos" pitchFamily="34" charset="0"/>
+                <a:ea typeface="Aptos" pitchFamily="34" charset="-122"/>
+                <a:cs typeface="Aptos" pitchFamily="34" charset="-120"/>
+              </a:rPr>
+              <a:t>Concept checkpoints</a:t>
+            </a:r>
+            <a:endParaRPr lang="en-US" sz="1300" dirty="0"/>
+          </a:p>
+        </p:txBody>
+      </p:sp>
+      <p:sp>
+        <p:nvSpPr>
+          <p:cNvPr id="15" name="Text 13"/>
+          <p:cNvSpPr/>
+          <p:nvPr/>
+        </p:nvSpPr>
+        <p:spPr>
+          <a:xfrm>
+            <a:off x="7818120" y="3300984"/>
+            <a:ext cx="3090672" cy="877824"/>
+          </a:xfrm>
+          <a:prstGeom prst="rect">
+            <a:avLst/>
+          </a:prstGeom>
+          <a:noFill/>
+          <a:ln/>
+        </p:spPr>
+        <p:txBody>
+          <a:bodyPr wrap="square" lIns="254" tIns="254" rIns="254" bIns="254" rtlCol="0" anchor="t">
+            <a:normAutofit/>
+          </a:bodyPr>
+          <a:lstStyle/>
+          <a:p>
+            <a:r>
+              <a:rPr lang="en-US" sz="1380" dirty="0">
+                <a:solidFill>
+                  <a:srgbClr val="17364A"/>
+                </a:solidFill>
+                <a:latin typeface="Aptos" pitchFamily="34" charset="0"/>
+                <a:ea typeface="Aptos" pitchFamily="34" charset="-122"/>
+                <a:cs typeface="Aptos" pitchFamily="34" charset="-120"/>
+              </a:rPr>
+              <a:t>Data Governance for AI-Ready Public Health Data matters because AI systems are embedded in.</a:t>
+            </a:r>
+            <a:endParaRPr lang="en-US" sz="1380" dirty="0"/>
+          </a:p>
+          <a:p>
+            <a:r>
+              <a:rPr lang="en-US" sz="1380" dirty="0">
+                <a:solidFill>
+                  <a:srgbClr val="17364A"/>
+                </a:solidFill>
+                <a:latin typeface="Aptos" pitchFamily="34" charset="0"/>
+                <a:ea typeface="Aptos" pitchFamily="34" charset="-122"/>
+                <a:cs typeface="Aptos" pitchFamily="34" charset="-120"/>
+              </a:rPr>
+              <a:t>The topic also affects accountability.</a:t>
+            </a:r>
+            <a:endParaRPr lang="en-US" sz="1380" dirty="0"/>
+          </a:p>
+          <a:p>
+            <a:r>
+              <a:rPr lang="en-US" sz="1380" dirty="0">
+                <a:solidFill>
+                  <a:srgbClr val="17364A"/>
+                </a:solidFill>
+                <a:latin typeface="Aptos" pitchFamily="34" charset="0"/>
+                <a:ea typeface="Aptos" pitchFamily="34" charset="-122"/>
+                <a:cs typeface="Aptos" pitchFamily="34" charset="-120"/>
+              </a:rPr>
+              <a:t>Public health agencies must be able to explain how data are used, why a tool was approved,.</a:t>
+            </a:r>
+            <a:endParaRPr lang="en-US" sz="1380" dirty="0"/>
+          </a:p>
+        </p:txBody>
       </p:sp>
       <p:sp>
         <p:nvSpPr>
           <p:cNvPr id="16" name="Shape 14"/>
-          <p:cNvSpPr/>
-          <p:nvPr/>
-        </p:nvSpPr>
-        <p:spPr>
-          <a:xfrm>
-            <a:off x="9089136" y="3456432"/>
-            <a:ext cx="566928" cy="566928"/>
-          </a:xfrm>
-          <a:prstGeom prst="ellipse">
-            <a:avLst/>
-          </a:prstGeom>
-          <a:solidFill>
-            <a:srgbClr val="6A4CA3"/>
-          </a:solidFill>
-          <a:ln w="12700">
-            <a:solidFill>
-              <a:srgbClr val="6A4CA3"/>
-            </a:solidFill>
-            <a:prstDash val="solid"/>
-          </a:ln>
-        </p:spPr>
-      </p:sp>
-      <p:sp>
-        <p:nvSpPr>
-          <p:cNvPr id="17" name="Shape 15"/>
-          <p:cNvSpPr/>
-          <p:nvPr/>
-        </p:nvSpPr>
-        <p:spPr>
-          <a:xfrm>
-            <a:off x="8385048" y="3419856"/>
-            <a:ext cx="1975104" cy="0"/>
-          </a:xfrm>
-          <a:prstGeom prst="line">
-            <a:avLst/>
-          </a:prstGeom>
-          <a:noFill/>
-          <a:ln w="25400">
-            <a:solidFill>
-              <a:srgbClr val="8ABBD8"/>
-            </a:solidFill>
-            <a:prstDash val="solid"/>
-          </a:ln>
-        </p:spPr>
-      </p:sp>
-      <p:sp>
-        <p:nvSpPr>
-          <p:cNvPr id="18" name="Shape 16"/>
-          <p:cNvSpPr/>
-          <p:nvPr/>
-        </p:nvSpPr>
-        <p:spPr>
-          <a:xfrm>
-            <a:off x="8202168" y="3630168"/>
-            <a:ext cx="1170432" cy="118872"/>
-          </a:xfrm>
-          <a:prstGeom prst="line">
-            <a:avLst/>
-          </a:prstGeom>
-          <a:noFill/>
-          <a:ln w="25400">
-            <a:solidFill>
-              <a:srgbClr val="8ABBD8"/>
-            </a:solidFill>
-            <a:prstDash val="solid"/>
-          </a:ln>
-        </p:spPr>
-      </p:sp>
-      <p:sp>
-        <p:nvSpPr>
-          <p:cNvPr id="19" name="Shape 17"/>
-          <p:cNvSpPr/>
-          <p:nvPr/>
-        </p:nvSpPr>
-        <p:spPr>
-          <a:xfrm>
-            <a:off x="10543032" y="3630168"/>
-            <a:ext cx="-1170432" cy="118872"/>
-          </a:xfrm>
-          <a:prstGeom prst="line">
-            <a:avLst/>
-          </a:prstGeom>
-          <a:noFill/>
-          <a:ln w="25400">
-            <a:solidFill>
-              <a:srgbClr val="8ABBD8"/>
-            </a:solidFill>
-            <a:prstDash val="solid"/>
-          </a:ln>
-        </p:spPr>
-      </p:sp>
-      <p:sp>
-        <p:nvSpPr>
-          <p:cNvPr id="20" name="Text 18"/>
-          <p:cNvSpPr/>
-          <p:nvPr/>
-        </p:nvSpPr>
-        <p:spPr>
-          <a:xfrm>
-            <a:off x="7863840" y="4069080"/>
-            <a:ext cx="3017520" cy="164592"/>
-          </a:xfrm>
-          <a:prstGeom prst="rect">
-            <a:avLst/>
-          </a:prstGeom>
-          <a:noFill/>
-          <a:ln/>
-        </p:spPr>
-        <p:txBody>
-          <a:bodyPr wrap="square" lIns="0" tIns="0" rIns="0" bIns="0" rtlCol="0" anchor="ctr"/>
-          <a:lstStyle/>
-          <a:p>
-            <a:pPr algn="ctr" indent="0" marL="0">
-              <a:buNone/>
-            </a:pPr>
-            <a:r>
-              <a:rPr lang="en-US" sz="900" b="1" dirty="0">
-                <a:solidFill>
-                  <a:srgbClr val="003A63"/>
-                </a:solidFill>
-                <a:latin typeface="Aptos" pitchFamily="34" charset="0"/>
-                <a:ea typeface="Aptos" pitchFamily="34" charset="-122"/>
-                <a:cs typeface="Aptos" pitchFamily="34" charset="-120"/>
-              </a:rPr>
-              <a:t>Decision rights</a:t>
-            </a:r>
-            <a:endParaRPr lang="en-US" sz="900" dirty="0"/>
-          </a:p>
-        </p:txBody>
-      </p:sp>
-      <p:sp>
-        <p:nvSpPr>
-          <p:cNvPr id="21" name="Shape 19"/>
           <p:cNvSpPr/>
           <p:nvPr/>
         </p:nvSpPr>
@@ -17933,7 +16245,7 @@
       </p:sp>
       <p:sp>
         <p:nvSpPr>
-          <p:cNvPr id="22" name="Text 20"/>
+          <p:cNvPr id="17" name="Text 15"/>
           <p:cNvSpPr/>
           <p:nvPr/>
         </p:nvSpPr>
@@ -17972,7 +16284,7 @@
       </p:sp>
       <p:sp>
         <p:nvSpPr>
-          <p:cNvPr id="23" name="Text 21"/>
+          <p:cNvPr id="18" name="Text 16"/>
           <p:cNvSpPr/>
           <p:nvPr/>
         </p:nvSpPr>

--- a/downloads/presentations/modules/gov-330.pptx
+++ b/downloads/presentations/modules/gov-330.pptx
@@ -3255,49 +3255,58 @@
           <a:ln/>
         </p:spPr>
         <p:txBody>
-          <a:bodyPr wrap="square" lIns="635" tIns="635" rIns="635" bIns="635" rtlCol="0" anchor="t">
+          <a:bodyPr wrap="square" lIns="1016" tIns="1016" rIns="1016" bIns="1016" rtlCol="0" anchor="t">
             <a:normAutofit/>
           </a:bodyPr>
           <a:lstStyle/>
           <a:p>
+            <a:pPr indent="0" marL="0">
+              <a:buNone/>
+            </a:pPr>
             <a:r>
               <a:rPr lang="en-US" sz="2100" dirty="0">
                 <a:solidFill>
-                  <a:srgbClr val="17364A"/>
-                </a:solidFill>
-                <a:latin typeface="Aptos" pitchFamily="34" charset="0"/>
-                <a:ea typeface="Aptos" pitchFamily="34" charset="-122"/>
-                <a:cs typeface="Aptos" pitchFamily="34" charset="-120"/>
-              </a:rPr>
-              <a:t>Data governance is the set of decision rights, roles, policies, standards, and practices that guide how.</a:t>
+                  <a:srgbClr val="003A63"/>
+                </a:solidFill>
+                <a:latin typeface="Aptos" pitchFamily="34" charset="0"/>
+                <a:ea typeface="Aptos" pitchFamily="34" charset="-122"/>
+                <a:cs typeface="Aptos" pitchFamily="34" charset="-120"/>
+              </a:rPr>
+              <a:t>• Data governance is the set of decision rights, roles, policies, standards, and practices that.</a:t>
             </a:r>
             <a:endParaRPr lang="en-US" sz="2100" dirty="0"/>
           </a:p>
           <a:p>
+            <a:pPr indent="0" marL="0">
+              <a:buNone/>
+            </a:pPr>
             <a:r>
               <a:rPr lang="en-US" sz="2100" dirty="0">
                 <a:solidFill>
-                  <a:srgbClr val="17364A"/>
-                </a:solidFill>
-                <a:latin typeface="Aptos" pitchFamily="34" charset="0"/>
-                <a:ea typeface="Aptos" pitchFamily="34" charset="-122"/>
-                <a:cs typeface="Aptos" pitchFamily="34" charset="-120"/>
-              </a:rPr>
-              <a:t>AI-ready data depend on governance because data must be understandable, authorized, high quality, and.</a:t>
+                  <a:srgbClr val="003A63"/>
+                </a:solidFill>
+                <a:latin typeface="Aptos" pitchFamily="34" charset="0"/>
+                <a:ea typeface="Aptos" pitchFamily="34" charset="-122"/>
+                <a:cs typeface="Aptos" pitchFamily="34" charset="-120"/>
+              </a:rPr>
+              <a:t>• AI-ready data depend on governance because data must be understandable, authorized, high.</a:t>
             </a:r>
             <a:endParaRPr lang="en-US" sz="2100" dirty="0"/>
           </a:p>
           <a:p>
+            <a:pPr indent="0" marL="0">
+              <a:buNone/>
+            </a:pPr>
             <a:r>
               <a:rPr lang="en-US" sz="2100" dirty="0">
                 <a:solidFill>
-                  <a:srgbClr val="17364A"/>
-                </a:solidFill>
-                <a:latin typeface="Aptos" pitchFamily="34" charset="0"/>
-                <a:ea typeface="Aptos" pitchFamily="34" charset="-122"/>
-                <a:cs typeface="Aptos" pitchFamily="34" charset="-120"/>
-              </a:rPr>
-              <a:t>Data stewardship assigns responsibility for data quality, definitions, metadata, access, and.</a:t>
+                  <a:srgbClr val="003A63"/>
+                </a:solidFill>
+                <a:latin typeface="Aptos" pitchFamily="34" charset="0"/>
+                <a:ea typeface="Aptos" pitchFamily="34" charset="-122"/>
+                <a:cs typeface="Aptos" pitchFamily="34" charset="-120"/>
+              </a:rPr>
+              <a:t>• Data stewardship assigns responsibility for data quality, definitions, metadata, access, and.</a:t>
             </a:r>
             <a:endParaRPr lang="en-US" sz="2100" dirty="0"/>
           </a:p>
@@ -3377,17 +3386,17 @@
         </p:nvSpPr>
         <p:spPr>
           <a:xfrm>
-            <a:off x="7799832" y="1828800"/>
-            <a:ext cx="3145536" cy="685800"/>
-          </a:xfrm>
-          <a:prstGeom prst="rect">
-            <a:avLst/>
-          </a:prstGeom>
-          <a:noFill/>
-          <a:ln/>
-        </p:spPr>
-        <p:txBody>
-          <a:bodyPr wrap="square" lIns="0" tIns="0" rIns="0" bIns="0" rtlCol="0" anchor="t">
+            <a:off x="7799832" y="1801368"/>
+            <a:ext cx="3145536" cy="758952"/>
+          </a:xfrm>
+          <a:prstGeom prst="rect">
+            <a:avLst/>
+          </a:prstGeom>
+          <a:noFill/>
+          <a:ln/>
+        </p:spPr>
+        <p:txBody>
+          <a:bodyPr wrap="square" lIns="254" tIns="254" rIns="254" bIns="254" rtlCol="0" anchor="t">
             <a:normAutofit/>
           </a:bodyPr>
           <a:lstStyle/>
@@ -3396,7 +3405,7 @@
               <a:buNone/>
             </a:pPr>
             <a:r>
-              <a:rPr lang="en-US" sz="1550" dirty="0">
+              <a:rPr lang="en-US" sz="1320" dirty="0">
                 <a:solidFill>
                   <a:srgbClr val="17364A"/>
                 </a:solidFill>
@@ -3406,7 +3415,7 @@
               </a:rPr>
               <a:t>Data governance is the set of decision rights, roles, policies, standards, and practices that guide how.</a:t>
             </a:r>
-            <a:endParaRPr lang="en-US" sz="1550" dirty="0"/>
+            <a:endParaRPr lang="en-US" sz="1320" dirty="0"/>
           </a:p>
         </p:txBody>
       </p:sp>
@@ -3494,13 +3503,16 @@
           <a:ln/>
         </p:spPr>
         <p:txBody>
-          <a:bodyPr wrap="square" lIns="254" tIns="254" rIns="254" bIns="254" rtlCol="0" anchor="t">
+          <a:bodyPr wrap="square" lIns="508" tIns="508" rIns="508" bIns="508" rtlCol="0" anchor="t">
             <a:normAutofit/>
           </a:bodyPr>
           <a:lstStyle/>
           <a:p>
-            <a:r>
-              <a:rPr lang="en-US" sz="1380" dirty="0">
+            <a:pPr indent="0" marL="0">
+              <a:buNone/>
+            </a:pPr>
+            <a:r>
+              <a:rPr lang="en-US" sz="1220" dirty="0">
                 <a:solidFill>
                   <a:srgbClr val="17364A"/>
                 </a:solidFill>
@@ -3508,13 +3520,16 @@
                 <a:ea typeface="Aptos" pitchFamily="34" charset="-122"/>
                 <a:cs typeface="Aptos" pitchFamily="34" charset="-120"/>
               </a:rPr>
-              <a:t>Data governance is the set of decision rights, roles, policies, standards, and practices.</a:t>
-            </a:r>
-            <a:endParaRPr lang="en-US" sz="1380" dirty="0"/>
-          </a:p>
-          <a:p>
-            <a:r>
-              <a:rPr lang="en-US" sz="1380" dirty="0">
+              <a:t>Data governance is the set of decision rights, roles, policies,.</a:t>
+            </a:r>
+            <a:endParaRPr lang="en-US" sz="1220" dirty="0"/>
+          </a:p>
+          <a:p>
+            <a:pPr indent="0" marL="0">
+              <a:buNone/>
+            </a:pPr>
+            <a:r>
+              <a:rPr lang="en-US" sz="1220" dirty="0">
                 <a:solidFill>
                   <a:srgbClr val="17364A"/>
                 </a:solidFill>
@@ -3522,13 +3537,16 @@
                 <a:ea typeface="Aptos" pitchFamily="34" charset="-122"/>
                 <a:cs typeface="Aptos" pitchFamily="34" charset="-120"/>
               </a:rPr>
-              <a:t>AI-ready data depend on governance because data must be understandable, authorized, high.</a:t>
-            </a:r>
-            <a:endParaRPr lang="en-US" sz="1380" dirty="0"/>
-          </a:p>
-          <a:p>
-            <a:r>
-              <a:rPr lang="en-US" sz="1380" dirty="0">
+              <a:t>AI-ready data depend on governance because data must be.</a:t>
+            </a:r>
+            <a:endParaRPr lang="en-US" sz="1220" dirty="0"/>
+          </a:p>
+          <a:p>
+            <a:pPr indent="0" marL="0">
+              <a:buNone/>
+            </a:pPr>
+            <a:r>
+              <a:rPr lang="en-US" sz="1220" dirty="0">
                 <a:solidFill>
                   <a:srgbClr val="17364A"/>
                 </a:solidFill>
@@ -3536,9 +3554,9 @@
                 <a:ea typeface="Aptos" pitchFamily="34" charset="-122"/>
                 <a:cs typeface="Aptos" pitchFamily="34" charset="-120"/>
               </a:rPr>
-              <a:t>Data stewardship assigns responsibility for data quality, definitions, metadata, access,.</a:t>
-            </a:r>
-            <a:endParaRPr lang="en-US" sz="1380" dirty="0"/>
+              <a:t>Data stewardship assigns responsibility for data quality,.</a:t>
+            </a:r>
+            <a:endParaRPr lang="en-US" sz="1220" dirty="0"/>
           </a:p>
         </p:txBody>
       </p:sp>
@@ -3616,17 +3634,17 @@
         </p:nvSpPr>
         <p:spPr>
           <a:xfrm>
-            <a:off x="7799832" y="5001768"/>
-            <a:ext cx="3145536" cy="502920"/>
-          </a:xfrm>
-          <a:prstGeom prst="rect">
-            <a:avLst/>
-          </a:prstGeom>
-          <a:noFill/>
-          <a:ln/>
-        </p:spPr>
-        <p:txBody>
-          <a:bodyPr wrap="square" lIns="0" tIns="0" rIns="0" bIns="0" rtlCol="0" anchor="t">
+            <a:off x="7799832" y="4974336"/>
+            <a:ext cx="3145536" cy="576072"/>
+          </a:xfrm>
+          <a:prstGeom prst="rect">
+            <a:avLst/>
+          </a:prstGeom>
+          <a:noFill/>
+          <a:ln/>
+        </p:spPr>
+        <p:txBody>
+          <a:bodyPr wrap="square" lIns="254" tIns="254" rIns="254" bIns="254" rtlCol="0" anchor="t">
             <a:normAutofit/>
           </a:bodyPr>
           <a:lstStyle/>
@@ -3635,7 +3653,7 @@
               <a:buNone/>
             </a:pPr>
             <a:r>
-              <a:rPr lang="en-US" sz="1550" dirty="0">
+              <a:rPr lang="en-US" sz="1320" dirty="0">
                 <a:solidFill>
                   <a:srgbClr val="17364A"/>
                 </a:solidFill>
@@ -3643,9 +3661,9 @@
                 <a:ea typeface="Aptos" pitchFamily="34" charset="-122"/>
                 <a:cs typeface="Aptos" pitchFamily="34" charset="-120"/>
               </a:rPr>
-              <a:t>Translate this concept into clear decision rights, review steps, documentation expectations, and escalation paths before an AI-supported workflow is approved.</a:t>
-            </a:r>
-            <a:endParaRPr lang="en-US" sz="1550" dirty="0"/>
+              <a:t>Translate this concept into clear decision rights, review steps, documentation expectations, and escalation paths before.</a:t>
+            </a:r>
+            <a:endParaRPr lang="en-US" sz="1320" dirty="0"/>
           </a:p>
         </p:txBody>
       </p:sp>
@@ -3946,49 +3964,58 @@
           <a:ln/>
         </p:spPr>
         <p:txBody>
-          <a:bodyPr wrap="square" lIns="635" tIns="635" rIns="635" bIns="635" rtlCol="0" anchor="t">
+          <a:bodyPr wrap="square" lIns="1016" tIns="1016" rIns="1016" bIns="1016" rtlCol="0" anchor="t">
             <a:normAutofit/>
           </a:bodyPr>
           <a:lstStyle/>
           <a:p>
+            <a:pPr indent="0" marL="0">
+              <a:buNone/>
+            </a:pPr>
             <a:r>
               <a:rPr lang="en-US" sz="2100" dirty="0">
                 <a:solidFill>
-                  <a:srgbClr val="17364A"/>
-                </a:solidFill>
-                <a:latin typeface="Aptos" pitchFamily="34" charset="0"/>
-                <a:ea typeface="Aptos" pitchFamily="34" charset="-122"/>
-                <a:cs typeface="Aptos" pitchFamily="34" charset="-120"/>
-              </a:rPr>
-              <a:t>A public health agency may want to use multiple datasets to prioritize outreach for vaccination.</a:t>
+                  <a:srgbClr val="003A63"/>
+                </a:solidFill>
+                <a:latin typeface="Aptos" pitchFamily="34" charset="0"/>
+                <a:ea typeface="Aptos" pitchFamily="34" charset="-122"/>
+                <a:cs typeface="Aptos" pitchFamily="34" charset="-120"/>
+              </a:rPr>
+              <a:t>• A public health agency may want to use multiple datasets to prioritize outreach for vaccination.</a:t>
             </a:r>
             <a:endParaRPr lang="en-US" sz="2100" dirty="0"/>
           </a:p>
           <a:p>
+            <a:pPr indent="0" marL="0">
+              <a:buNone/>
+            </a:pPr>
             <a:r>
               <a:rPr lang="en-US" sz="2100" dirty="0">
                 <a:solidFill>
-                  <a:srgbClr val="17364A"/>
-                </a:solidFill>
-                <a:latin typeface="Aptos" pitchFamily="34" charset="0"/>
-                <a:ea typeface="Aptos" pitchFamily="34" charset="-122"/>
-                <a:cs typeface="Aptos" pitchFamily="34" charset="-120"/>
-              </a:rPr>
-              <a:t>Data governance would clarify which datasets can be linked, which fields are authoritative, which.</a:t>
+                  <a:srgbClr val="003A63"/>
+                </a:solidFill>
+                <a:latin typeface="Aptos" pitchFamily="34" charset="0"/>
+                <a:ea typeface="Aptos" pitchFamily="34" charset="-122"/>
+                <a:cs typeface="Aptos" pitchFamily="34" charset="-120"/>
+              </a:rPr>
+              <a:t>• Data governance would clarify which datasets can be linked, which fields are authoritative,.</a:t>
             </a:r>
             <a:endParaRPr lang="en-US" sz="2100" dirty="0"/>
           </a:p>
           <a:p>
+            <a:pPr indent="0" marL="0">
+              <a:buNone/>
+            </a:pPr>
             <a:r>
               <a:rPr lang="en-US" sz="2100" dirty="0">
                 <a:solidFill>
-                  <a:srgbClr val="17364A"/>
-                </a:solidFill>
-                <a:latin typeface="Aptos" pitchFamily="34" charset="0"/>
-                <a:ea typeface="Aptos" pitchFamily="34" charset="-122"/>
-                <a:cs typeface="Aptos" pitchFamily="34" charset="-120"/>
-              </a:rPr>
-              <a:t>Without governance, the model may appear technical while resting on unclear authority and inconsistent.</a:t>
+                  <a:srgbClr val="003A63"/>
+                </a:solidFill>
+                <a:latin typeface="Aptos" pitchFamily="34" charset="0"/>
+                <a:ea typeface="Aptos" pitchFamily="34" charset="-122"/>
+                <a:cs typeface="Aptos" pitchFamily="34" charset="-120"/>
+              </a:rPr>
+              <a:t>• Without governance, the model may appear technical while resting on unclear authority and.</a:t>
             </a:r>
             <a:endParaRPr lang="en-US" sz="2100" dirty="0"/>
           </a:p>
@@ -4068,17 +4095,17 @@
         </p:nvSpPr>
         <p:spPr>
           <a:xfrm>
-            <a:off x="7799832" y="1828800"/>
-            <a:ext cx="3145536" cy="685800"/>
-          </a:xfrm>
-          <a:prstGeom prst="rect">
-            <a:avLst/>
-          </a:prstGeom>
-          <a:noFill/>
-          <a:ln/>
-        </p:spPr>
-        <p:txBody>
-          <a:bodyPr wrap="square" lIns="0" tIns="0" rIns="0" bIns="0" rtlCol="0" anchor="t">
+            <a:off x="7799832" y="1801368"/>
+            <a:ext cx="3145536" cy="758952"/>
+          </a:xfrm>
+          <a:prstGeom prst="rect">
+            <a:avLst/>
+          </a:prstGeom>
+          <a:noFill/>
+          <a:ln/>
+        </p:spPr>
+        <p:txBody>
+          <a:bodyPr wrap="square" lIns="254" tIns="254" rIns="254" bIns="254" rtlCol="0" anchor="t">
             <a:normAutofit/>
           </a:bodyPr>
           <a:lstStyle/>
@@ -4087,7 +4114,7 @@
               <a:buNone/>
             </a:pPr>
             <a:r>
-              <a:rPr lang="en-US" sz="1550" dirty="0">
+              <a:rPr lang="en-US" sz="1320" dirty="0">
                 <a:solidFill>
                   <a:srgbClr val="17364A"/>
                 </a:solidFill>
@@ -4097,7 +4124,7 @@
               </a:rPr>
               <a:t>A public health agency may want to use multiple datasets to prioritize outreach for vaccination.</a:t>
             </a:r>
-            <a:endParaRPr lang="en-US" sz="1550" dirty="0"/>
+            <a:endParaRPr lang="en-US" sz="1320" dirty="0"/>
           </a:p>
         </p:txBody>
       </p:sp>
@@ -4185,13 +4212,16 @@
           <a:ln/>
         </p:spPr>
         <p:txBody>
-          <a:bodyPr wrap="square" lIns="254" tIns="254" rIns="254" bIns="254" rtlCol="0" anchor="t">
+          <a:bodyPr wrap="square" lIns="508" tIns="508" rIns="508" bIns="508" rtlCol="0" anchor="t">
             <a:normAutofit/>
           </a:bodyPr>
           <a:lstStyle/>
           <a:p>
-            <a:r>
-              <a:rPr lang="en-US" sz="1380" dirty="0">
+            <a:pPr indent="0" marL="0">
+              <a:buNone/>
+            </a:pPr>
+            <a:r>
+              <a:rPr lang="en-US" sz="1220" dirty="0">
                 <a:solidFill>
                   <a:srgbClr val="17364A"/>
                 </a:solidFill>
@@ -4199,13 +4229,16 @@
                 <a:ea typeface="Aptos" pitchFamily="34" charset="-122"/>
                 <a:cs typeface="Aptos" pitchFamily="34" charset="-120"/>
               </a:rPr>
-              <a:t>Data governance would clarify which datasets can be linked, which fields are.</a:t>
-            </a:r>
-            <a:endParaRPr lang="en-US" sz="1380" dirty="0"/>
-          </a:p>
-          <a:p>
-            <a:r>
-              <a:rPr lang="en-US" sz="1380" dirty="0">
+              <a:t>Data governance would clarify which datasets can be linked, which.</a:t>
+            </a:r>
+            <a:endParaRPr lang="en-US" sz="1220" dirty="0"/>
+          </a:p>
+          <a:p>
+            <a:pPr indent="0" marL="0">
+              <a:buNone/>
+            </a:pPr>
+            <a:r>
+              <a:rPr lang="en-US" sz="1220" dirty="0">
                 <a:solidFill>
                   <a:srgbClr val="17364A"/>
                 </a:solidFill>
@@ -4213,9 +4246,9 @@
                 <a:ea typeface="Aptos" pitchFamily="34" charset="-122"/>
                 <a:cs typeface="Aptos" pitchFamily="34" charset="-120"/>
               </a:rPr>
-              <a:t>Without governance, the model may appear technical while resting on unclear authority and.</a:t>
-            </a:r>
-            <a:endParaRPr lang="en-US" sz="1380" dirty="0"/>
+              <a:t>Without governance, the model may appear technical while resting.</a:t>
+            </a:r>
+            <a:endParaRPr lang="en-US" sz="1220" dirty="0"/>
           </a:p>
         </p:txBody>
       </p:sp>
@@ -4293,17 +4326,17 @@
         </p:nvSpPr>
         <p:spPr>
           <a:xfrm>
-            <a:off x="7799832" y="5001768"/>
-            <a:ext cx="3145536" cy="502920"/>
-          </a:xfrm>
-          <a:prstGeom prst="rect">
-            <a:avLst/>
-          </a:prstGeom>
-          <a:noFill/>
-          <a:ln/>
-        </p:spPr>
-        <p:txBody>
-          <a:bodyPr wrap="square" lIns="0" tIns="0" rIns="0" bIns="0" rtlCol="0" anchor="t">
+            <a:off x="7799832" y="4974336"/>
+            <a:ext cx="3145536" cy="576072"/>
+          </a:xfrm>
+          <a:prstGeom prst="rect">
+            <a:avLst/>
+          </a:prstGeom>
+          <a:noFill/>
+          <a:ln/>
+        </p:spPr>
+        <p:txBody>
+          <a:bodyPr wrap="square" lIns="254" tIns="254" rIns="254" bIns="254" rtlCol="0" anchor="t">
             <a:normAutofit/>
           </a:bodyPr>
           <a:lstStyle/>
@@ -4312,7 +4345,7 @@
               <a:buNone/>
             </a:pPr>
             <a:r>
-              <a:rPr lang="en-US" sz="1550" dirty="0">
+              <a:rPr lang="en-US" sz="1320" dirty="0">
                 <a:solidFill>
                   <a:srgbClr val="17364A"/>
                 </a:solidFill>
@@ -4320,9 +4353,9 @@
                 <a:ea typeface="Aptos" pitchFamily="34" charset="-122"/>
                 <a:cs typeface="Aptos" pitchFamily="34" charset="-120"/>
               </a:rPr>
-              <a:t>Translate this concept into clear decision rights, review steps, documentation expectations, and escalation paths before an AI-supported workflow is approved.</a:t>
-            </a:r>
-            <a:endParaRPr lang="en-US" sz="1550" dirty="0"/>
+              <a:t>Translate this concept into clear decision rights, review steps, documentation expectations, and escalation paths before.</a:t>
+            </a:r>
+            <a:endParaRPr lang="en-US" sz="1320" dirty="0"/>
           </a:p>
         </p:txBody>
       </p:sp>
@@ -4623,49 +4656,58 @@
           <a:ln/>
         </p:spPr>
         <p:txBody>
-          <a:bodyPr wrap="square" lIns="635" tIns="635" rIns="635" bIns="635" rtlCol="0" anchor="t">
+          <a:bodyPr wrap="square" lIns="1016" tIns="1016" rIns="1016" bIns="1016" rtlCol="0" anchor="t">
             <a:normAutofit/>
           </a:bodyPr>
           <a:lstStyle/>
           <a:p>
+            <a:pPr indent="0" marL="0">
+              <a:buNone/>
+            </a:pPr>
             <a:r>
               <a:rPr lang="en-US" sz="2100" dirty="0">
                 <a:solidFill>
-                  <a:srgbClr val="17364A"/>
-                </a:solidFill>
-                <a:latin typeface="Aptos" pitchFamily="34" charset="0"/>
-                <a:ea typeface="Aptos" pitchFamily="34" charset="-122"/>
-                <a:cs typeface="Aptos" pitchFamily="34" charset="-120"/>
-              </a:rPr>
-              <a:t>AI-ready data begin with inventory.</a:t>
+                  <a:srgbClr val="003A63"/>
+                </a:solidFill>
+                <a:latin typeface="Aptos" pitchFamily="34" charset="0"/>
+                <a:ea typeface="Aptos" pitchFamily="34" charset="-122"/>
+                <a:cs typeface="Aptos" pitchFamily="34" charset="-120"/>
+              </a:rPr>
+              <a:t>• AI-ready data begin with inventory.</a:t>
             </a:r>
             <a:endParaRPr lang="en-US" sz="2100" dirty="0"/>
           </a:p>
           <a:p>
+            <a:pPr indent="0" marL="0">
+              <a:buNone/>
+            </a:pPr>
             <a:r>
               <a:rPr lang="en-US" sz="2100" dirty="0">
                 <a:solidFill>
-                  <a:srgbClr val="17364A"/>
-                </a:solidFill>
-                <a:latin typeface="Aptos" pitchFamily="34" charset="0"/>
-                <a:ea typeface="Aptos" pitchFamily="34" charset="-122"/>
-                <a:cs typeface="Aptos" pitchFamily="34" charset="-120"/>
-              </a:rPr>
-              <a:t>Agencies should know what datasets exist, who stewards them, what they contain, how often they are.</a:t>
+                  <a:srgbClr val="003A63"/>
+                </a:solidFill>
+                <a:latin typeface="Aptos" pitchFamily="34" charset="0"/>
+                <a:ea typeface="Aptos" pitchFamily="34" charset="-122"/>
+                <a:cs typeface="Aptos" pitchFamily="34" charset="-120"/>
+              </a:rPr>
+              <a:t>• Agencies should know what datasets exist, who stewards them, what they contain, how often they.</a:t>
             </a:r>
             <a:endParaRPr lang="en-US" sz="2100" dirty="0"/>
           </a:p>
           <a:p>
+            <a:pPr indent="0" marL="0">
+              <a:buNone/>
+            </a:pPr>
             <a:r>
               <a:rPr lang="en-US" sz="2100" dirty="0">
                 <a:solidFill>
-                  <a:srgbClr val="17364A"/>
-                </a:solidFill>
-                <a:latin typeface="Aptos" pitchFamily="34" charset="0"/>
-                <a:ea typeface="Aptos" pitchFamily="34" charset="-122"/>
-                <a:cs typeface="Aptos" pitchFamily="34" charset="-120"/>
-              </a:rPr>
-              <a:t>A data catalog can make this information visible to program, analytics, informatics, and governance.</a:t>
+                  <a:srgbClr val="003A63"/>
+                </a:solidFill>
+                <a:latin typeface="Aptos" pitchFamily="34" charset="0"/>
+                <a:ea typeface="Aptos" pitchFamily="34" charset="-122"/>
+                <a:cs typeface="Aptos" pitchFamily="34" charset="-120"/>
+              </a:rPr>
+              <a:t>• A data catalog can make this information visible to program, analytics, informatics, and.</a:t>
             </a:r>
             <a:endParaRPr lang="en-US" sz="2100" dirty="0"/>
           </a:p>
@@ -4745,17 +4787,17 @@
         </p:nvSpPr>
         <p:spPr>
           <a:xfrm>
-            <a:off x="7799832" y="1828800"/>
-            <a:ext cx="3145536" cy="685800"/>
-          </a:xfrm>
-          <a:prstGeom prst="rect">
-            <a:avLst/>
-          </a:prstGeom>
-          <a:noFill/>
-          <a:ln/>
-        </p:spPr>
-        <p:txBody>
-          <a:bodyPr wrap="square" lIns="0" tIns="0" rIns="0" bIns="0" rtlCol="0" anchor="t">
+            <a:off x="7799832" y="1801368"/>
+            <a:ext cx="3145536" cy="758952"/>
+          </a:xfrm>
+          <a:prstGeom prst="rect">
+            <a:avLst/>
+          </a:prstGeom>
+          <a:noFill/>
+          <a:ln/>
+        </p:spPr>
+        <p:txBody>
+          <a:bodyPr wrap="square" lIns="254" tIns="254" rIns="254" bIns="254" rtlCol="0" anchor="t">
             <a:normAutofit/>
           </a:bodyPr>
           <a:lstStyle/>
@@ -4764,7 +4806,7 @@
               <a:buNone/>
             </a:pPr>
             <a:r>
-              <a:rPr lang="en-US" sz="1550" dirty="0">
+              <a:rPr lang="en-US" sz="1320" dirty="0">
                 <a:solidFill>
                   <a:srgbClr val="17364A"/>
                 </a:solidFill>
@@ -4774,7 +4816,7 @@
               </a:rPr>
               <a:t>AI-ready data begin with inventory.</a:t>
             </a:r>
-            <a:endParaRPr lang="en-US" sz="1550" dirty="0"/>
+            <a:endParaRPr lang="en-US" sz="1320" dirty="0"/>
           </a:p>
         </p:txBody>
       </p:sp>
@@ -4862,13 +4904,16 @@
           <a:ln/>
         </p:spPr>
         <p:txBody>
-          <a:bodyPr wrap="square" lIns="254" tIns="254" rIns="254" bIns="254" rtlCol="0" anchor="t">
+          <a:bodyPr wrap="square" lIns="508" tIns="508" rIns="508" bIns="508" rtlCol="0" anchor="t">
             <a:normAutofit/>
           </a:bodyPr>
           <a:lstStyle/>
           <a:p>
-            <a:r>
-              <a:rPr lang="en-US" sz="1380" dirty="0">
+            <a:pPr indent="0" marL="0">
+              <a:buNone/>
+            </a:pPr>
+            <a:r>
+              <a:rPr lang="en-US" sz="1220" dirty="0">
                 <a:solidFill>
                   <a:srgbClr val="17364A"/>
                 </a:solidFill>
@@ -4876,13 +4921,16 @@
                 <a:ea typeface="Aptos" pitchFamily="34" charset="-122"/>
                 <a:cs typeface="Aptos" pitchFamily="34" charset="-120"/>
               </a:rPr>
-              <a:t>Agencies should know what datasets exist, who stewards them, what they contain, how often.</a:t>
-            </a:r>
-            <a:endParaRPr lang="en-US" sz="1380" dirty="0"/>
-          </a:p>
-          <a:p>
-            <a:r>
-              <a:rPr lang="en-US" sz="1380" dirty="0">
+              <a:t>Agencies should know what datasets exist, who stewards them, what.</a:t>
+            </a:r>
+            <a:endParaRPr lang="en-US" sz="1220" dirty="0"/>
+          </a:p>
+          <a:p>
+            <a:pPr indent="0" marL="0">
+              <a:buNone/>
+            </a:pPr>
+            <a:r>
+              <a:rPr lang="en-US" sz="1220" dirty="0">
                 <a:solidFill>
                   <a:srgbClr val="17364A"/>
                 </a:solidFill>
@@ -4890,13 +4938,16 @@
                 <a:ea typeface="Aptos" pitchFamily="34" charset="-122"/>
                 <a:cs typeface="Aptos" pitchFamily="34" charset="-120"/>
               </a:rPr>
-              <a:t>A data catalog can make this information visible to program, analytics, informatics, and.</a:t>
-            </a:r>
-            <a:endParaRPr lang="en-US" sz="1380" dirty="0"/>
-          </a:p>
-          <a:p>
-            <a:r>
-              <a:rPr lang="en-US" sz="1380" dirty="0">
+              <a:t>A data catalog can make this information visible to program,.</a:t>
+            </a:r>
+            <a:endParaRPr lang="en-US" sz="1220" dirty="0"/>
+          </a:p>
+          <a:p>
+            <a:pPr indent="0" marL="0">
+              <a:buNone/>
+            </a:pPr>
+            <a:r>
+              <a:rPr lang="en-US" sz="1220" dirty="0">
                 <a:solidFill>
                   <a:srgbClr val="17364A"/>
                 </a:solidFill>
@@ -4906,7 +4957,7 @@
               </a:rPr>
               <a:t>Governance must also address data lineage and transformation.</a:t>
             </a:r>
-            <a:endParaRPr lang="en-US" sz="1380" dirty="0"/>
+            <a:endParaRPr lang="en-US" sz="1220" dirty="0"/>
           </a:p>
         </p:txBody>
       </p:sp>
@@ -4984,17 +5035,17 @@
         </p:nvSpPr>
         <p:spPr>
           <a:xfrm>
-            <a:off x="7799832" y="5001768"/>
-            <a:ext cx="3145536" cy="502920"/>
-          </a:xfrm>
-          <a:prstGeom prst="rect">
-            <a:avLst/>
-          </a:prstGeom>
-          <a:noFill/>
-          <a:ln/>
-        </p:spPr>
-        <p:txBody>
-          <a:bodyPr wrap="square" lIns="0" tIns="0" rIns="0" bIns="0" rtlCol="0" anchor="t">
+            <a:off x="7799832" y="4974336"/>
+            <a:ext cx="3145536" cy="576072"/>
+          </a:xfrm>
+          <a:prstGeom prst="rect">
+            <a:avLst/>
+          </a:prstGeom>
+          <a:noFill/>
+          <a:ln/>
+        </p:spPr>
+        <p:txBody>
+          <a:bodyPr wrap="square" lIns="254" tIns="254" rIns="254" bIns="254" rtlCol="0" anchor="t">
             <a:normAutofit/>
           </a:bodyPr>
           <a:lstStyle/>
@@ -5003,7 +5054,7 @@
               <a:buNone/>
             </a:pPr>
             <a:r>
-              <a:rPr lang="en-US" sz="1550" dirty="0">
+              <a:rPr lang="en-US" sz="1320" dirty="0">
                 <a:solidFill>
                   <a:srgbClr val="17364A"/>
                 </a:solidFill>
@@ -5011,9 +5062,9 @@
                 <a:ea typeface="Aptos" pitchFamily="34" charset="-122"/>
                 <a:cs typeface="Aptos" pitchFamily="34" charset="-120"/>
               </a:rPr>
-              <a:t>Translate this concept into clear decision rights, review steps, documentation expectations, and escalation paths before an AI-supported workflow is approved.</a:t>
-            </a:r>
-            <a:endParaRPr lang="en-US" sz="1550" dirty="0"/>
+              <a:t>Translate this concept into clear decision rights, review steps, documentation expectations, and escalation paths before.</a:t>
+            </a:r>
+            <a:endParaRPr lang="en-US" sz="1320" dirty="0"/>
           </a:p>
         </p:txBody>
       </p:sp>
@@ -5314,49 +5365,58 @@
           <a:ln/>
         </p:spPr>
         <p:txBody>
-          <a:bodyPr wrap="square" lIns="635" tIns="635" rIns="635" bIns="635" rtlCol="0" anchor="t">
+          <a:bodyPr wrap="square" lIns="1016" tIns="1016" rIns="1016" bIns="1016" rtlCol="0" anchor="t">
             <a:normAutofit/>
           </a:bodyPr>
           <a:lstStyle/>
           <a:p>
+            <a:pPr indent="0" marL="0">
+              <a:buNone/>
+            </a:pPr>
             <a:r>
               <a:rPr lang="en-US" sz="2100" dirty="0">
                 <a:solidFill>
-                  <a:srgbClr val="17364A"/>
-                </a:solidFill>
-                <a:latin typeface="Aptos" pitchFamily="34" charset="0"/>
-                <a:ea typeface="Aptos" pitchFamily="34" charset="-122"/>
-                <a:cs typeface="Aptos" pitchFamily="34" charset="-120"/>
-              </a:rPr>
-              <a:t>A common failure mode is treating the topic as a technical detail rather than a public health control.</a:t>
+                  <a:srgbClr val="003A63"/>
+                </a:solidFill>
+                <a:latin typeface="Aptos" pitchFamily="34" charset="0"/>
+                <a:ea typeface="Aptos" pitchFamily="34" charset="-122"/>
+                <a:cs typeface="Aptos" pitchFamily="34" charset="-120"/>
+              </a:rPr>
+              <a:t>• A common failure mode is treating the topic as a technical detail rather than a public health.</a:t>
             </a:r>
             <a:endParaRPr lang="en-US" sz="2100" dirty="0"/>
           </a:p>
           <a:p>
+            <a:pPr indent="0" marL="0">
+              <a:buNone/>
+            </a:pPr>
             <a:r>
               <a:rPr lang="en-US" sz="2100" dirty="0">
                 <a:solidFill>
-                  <a:srgbClr val="17364A"/>
-                </a:solidFill>
-                <a:latin typeface="Aptos" pitchFamily="34" charset="0"/>
-                <a:ea typeface="Aptos" pitchFamily="34" charset="-122"/>
-                <a:cs typeface="Aptos" pitchFamily="34" charset="-120"/>
-              </a:rPr>
-              <a:t>When staff do not connect technical decisions to authority, workflow, equity, privacy, security, and.</a:t>
+                  <a:srgbClr val="003A63"/>
+                </a:solidFill>
+                <a:latin typeface="Aptos" pitchFamily="34" charset="0"/>
+                <a:ea typeface="Aptos" pitchFamily="34" charset="-122"/>
+                <a:cs typeface="Aptos" pitchFamily="34" charset="-120"/>
+              </a:rPr>
+              <a:t>• When staff do not connect technical decisions to authority, workflow, equity, privacy,.</a:t>
             </a:r>
             <a:endParaRPr lang="en-US" sz="2100" dirty="0"/>
           </a:p>
           <a:p>
+            <a:pPr indent="0" marL="0">
+              <a:buNone/>
+            </a:pPr>
             <a:r>
               <a:rPr lang="en-US" sz="2100" dirty="0">
                 <a:solidFill>
-                  <a:srgbClr val="17364A"/>
-                </a:solidFill>
-                <a:latin typeface="Aptos" pitchFamily="34" charset="0"/>
-                <a:ea typeface="Aptos" pitchFamily="34" charset="-122"/>
-                <a:cs typeface="Aptos" pitchFamily="34" charset="-120"/>
-              </a:rPr>
-              <a:t>Another risk is relying on vendor claims without agency-defined evidence.</a:t>
+                  <a:srgbClr val="003A63"/>
+                </a:solidFill>
+                <a:latin typeface="Aptos" pitchFamily="34" charset="0"/>
+                <a:ea typeface="Aptos" pitchFamily="34" charset="-122"/>
+                <a:cs typeface="Aptos" pitchFamily="34" charset="-120"/>
+              </a:rPr>
+              <a:t>• Another risk is relying on vendor claims without agency-defined evidence.</a:t>
             </a:r>
             <a:endParaRPr lang="en-US" sz="2100" dirty="0"/>
           </a:p>
@@ -5436,17 +5496,17 @@
         </p:nvSpPr>
         <p:spPr>
           <a:xfrm>
-            <a:off x="7799832" y="1828800"/>
-            <a:ext cx="3145536" cy="685800"/>
-          </a:xfrm>
-          <a:prstGeom prst="rect">
-            <a:avLst/>
-          </a:prstGeom>
-          <a:noFill/>
-          <a:ln/>
-        </p:spPr>
-        <p:txBody>
-          <a:bodyPr wrap="square" lIns="0" tIns="0" rIns="0" bIns="0" rtlCol="0" anchor="t">
+            <a:off x="7799832" y="1801368"/>
+            <a:ext cx="3145536" cy="758952"/>
+          </a:xfrm>
+          <a:prstGeom prst="rect">
+            <a:avLst/>
+          </a:prstGeom>
+          <a:noFill/>
+          <a:ln/>
+        </p:spPr>
+        <p:txBody>
+          <a:bodyPr wrap="square" lIns="254" tIns="254" rIns="254" bIns="254" rtlCol="0" anchor="t">
             <a:normAutofit/>
           </a:bodyPr>
           <a:lstStyle/>
@@ -5455,7 +5515,7 @@
               <a:buNone/>
             </a:pPr>
             <a:r>
-              <a:rPr lang="en-US" sz="1550" dirty="0">
+              <a:rPr lang="en-US" sz="1320" dirty="0">
                 <a:solidFill>
                   <a:srgbClr val="17364A"/>
                 </a:solidFill>
@@ -5465,7 +5525,7 @@
               </a:rPr>
               <a:t>A common failure mode is treating the topic as a technical detail rather than a public health control.</a:t>
             </a:r>
-            <a:endParaRPr lang="en-US" sz="1550" dirty="0"/>
+            <a:endParaRPr lang="en-US" sz="1320" dirty="0"/>
           </a:p>
         </p:txBody>
       </p:sp>
@@ -5553,13 +5613,16 @@
           <a:ln/>
         </p:spPr>
         <p:txBody>
-          <a:bodyPr wrap="square" lIns="254" tIns="254" rIns="254" bIns="254" rtlCol="0" anchor="t">
+          <a:bodyPr wrap="square" lIns="508" tIns="508" rIns="508" bIns="508" rtlCol="0" anchor="t">
             <a:normAutofit/>
           </a:bodyPr>
           <a:lstStyle/>
           <a:p>
-            <a:r>
-              <a:rPr lang="en-US" sz="1380" dirty="0">
+            <a:pPr indent="0" marL="0">
+              <a:buNone/>
+            </a:pPr>
+            <a:r>
+              <a:rPr lang="en-US" sz="1220" dirty="0">
                 <a:solidFill>
                   <a:srgbClr val="17364A"/>
                 </a:solidFill>
@@ -5567,13 +5630,16 @@
                 <a:ea typeface="Aptos" pitchFamily="34" charset="-122"/>
                 <a:cs typeface="Aptos" pitchFamily="34" charset="-120"/>
               </a:rPr>
-              <a:t>When staff do not connect technical decisions to authority, workflow, equity, privacy,.</a:t>
-            </a:r>
-            <a:endParaRPr lang="en-US" sz="1380" dirty="0"/>
-          </a:p>
-          <a:p>
-            <a:r>
-              <a:rPr lang="en-US" sz="1380" dirty="0">
+              <a:t>When staff do not connect technical decisions to authority,.</a:t>
+            </a:r>
+            <a:endParaRPr lang="en-US" sz="1220" dirty="0"/>
+          </a:p>
+          <a:p>
+            <a:pPr indent="0" marL="0">
+              <a:buNone/>
+            </a:pPr>
+            <a:r>
+              <a:rPr lang="en-US" sz="1220" dirty="0">
                 <a:solidFill>
                   <a:srgbClr val="17364A"/>
                 </a:solidFill>
@@ -5581,13 +5647,16 @@
                 <a:ea typeface="Aptos" pitchFamily="34" charset="-122"/>
                 <a:cs typeface="Aptos" pitchFamily="34" charset="-120"/>
               </a:rPr>
-              <a:t>Vendors may provide demonstrations, dashboards, or summary metrics that do not match the.</a:t>
-            </a:r>
-            <a:endParaRPr lang="en-US" sz="1380" dirty="0"/>
-          </a:p>
-          <a:p>
-            <a:r>
-              <a:rPr lang="en-US" sz="1380" dirty="0">
+              <a:t>Vendors may provide demonstrations, dashboards, or summary metrics.</a:t>
+            </a:r>
+            <a:endParaRPr lang="en-US" sz="1220" dirty="0"/>
+          </a:p>
+          <a:p>
+            <a:pPr indent="0" marL="0">
+              <a:buNone/>
+            </a:pPr>
+            <a:r>
+              <a:rPr lang="en-US" sz="1220" dirty="0">
                 <a:solidFill>
                   <a:srgbClr val="17364A"/>
                 </a:solidFill>
@@ -5595,9 +5664,9 @@
                 <a:ea typeface="Aptos" pitchFamily="34" charset="-122"/>
                 <a:cs typeface="Aptos" pitchFamily="34" charset="-120"/>
               </a:rPr>
-              <a:t>A guardrail is to require documentation, test results, acceptance criteria, and.</a:t>
-            </a:r>
-            <a:endParaRPr lang="en-US" sz="1380" dirty="0"/>
+              <a:t>A guardrail is to require documentation, test results, acceptance.</a:t>
+            </a:r>
+            <a:endParaRPr lang="en-US" sz="1220" dirty="0"/>
           </a:p>
         </p:txBody>
       </p:sp>
@@ -5675,17 +5744,17 @@
         </p:nvSpPr>
         <p:spPr>
           <a:xfrm>
-            <a:off x="7799832" y="5001768"/>
-            <a:ext cx="3145536" cy="502920"/>
-          </a:xfrm>
-          <a:prstGeom prst="rect">
-            <a:avLst/>
-          </a:prstGeom>
-          <a:noFill/>
-          <a:ln/>
-        </p:spPr>
-        <p:txBody>
-          <a:bodyPr wrap="square" lIns="0" tIns="0" rIns="0" bIns="0" rtlCol="0" anchor="t">
+            <a:off x="7799832" y="4974336"/>
+            <a:ext cx="3145536" cy="576072"/>
+          </a:xfrm>
+          <a:prstGeom prst="rect">
+            <a:avLst/>
+          </a:prstGeom>
+          <a:noFill/>
+          <a:ln/>
+        </p:spPr>
+        <p:txBody>
+          <a:bodyPr wrap="square" lIns="254" tIns="254" rIns="254" bIns="254" rtlCol="0" anchor="t">
             <a:normAutofit/>
           </a:bodyPr>
           <a:lstStyle/>
@@ -5694,7 +5763,7 @@
               <a:buNone/>
             </a:pPr>
             <a:r>
-              <a:rPr lang="en-US" sz="1550" dirty="0">
+              <a:rPr lang="en-US" sz="1320" dirty="0">
                 <a:solidFill>
                   <a:srgbClr val="17364A"/>
                 </a:solidFill>
@@ -5702,9 +5771,9 @@
                 <a:ea typeface="Aptos" pitchFamily="34" charset="-122"/>
                 <a:cs typeface="Aptos" pitchFamily="34" charset="-120"/>
               </a:rPr>
-              <a:t>Translate this concept into clear decision rights, review steps, documentation expectations, and escalation paths before an AI-supported workflow is approved.</a:t>
-            </a:r>
-            <a:endParaRPr lang="en-US" sz="1550" dirty="0"/>
+              <a:t>Translate this concept into clear decision rights, review steps, documentation expectations, and escalation paths before.</a:t>
+            </a:r>
+            <a:endParaRPr lang="en-US" sz="1320" dirty="0"/>
           </a:p>
         </p:txBody>
       </p:sp>
@@ -6005,49 +6074,58 @@
           <a:ln/>
         </p:spPr>
         <p:txBody>
-          <a:bodyPr wrap="square" lIns="635" tIns="635" rIns="635" bIns="635" rtlCol="0" anchor="t">
+          <a:bodyPr wrap="square" lIns="1016" tIns="1016" rIns="1016" bIns="1016" rtlCol="0" anchor="t">
             <a:normAutofit/>
           </a:bodyPr>
           <a:lstStyle/>
           <a:p>
+            <a:pPr indent="0" marL="0">
+              <a:buNone/>
+            </a:pPr>
             <a:r>
               <a:rPr lang="en-US" sz="2100" dirty="0">
                 <a:solidFill>
-                  <a:srgbClr val="17364A"/>
-                </a:solidFill>
-                <a:latin typeface="Aptos" pitchFamily="34" charset="0"/>
-                <a:ea typeface="Aptos" pitchFamily="34" charset="-122"/>
-                <a:cs typeface="Aptos" pitchFamily="34" charset="-120"/>
-              </a:rPr>
-              <a:t>Generative AI, predictive analytics, RAG, automation, and agentic workflows all depend on the controls.</a:t>
+                  <a:srgbClr val="003A63"/>
+                </a:solidFill>
+                <a:latin typeface="Aptos" pitchFamily="34" charset="0"/>
+                <a:ea typeface="Aptos" pitchFamily="34" charset="-122"/>
+                <a:cs typeface="Aptos" pitchFamily="34" charset="-120"/>
+              </a:rPr>
+              <a:t>• Generative AI, predictive analytics, RAG, automation, and agentic workflows all depend on the.</a:t>
             </a:r>
             <a:endParaRPr lang="en-US" sz="2100" dirty="0"/>
           </a:p>
           <a:p>
+            <a:pPr indent="0" marL="0">
+              <a:buNone/>
+            </a:pPr>
             <a:r>
               <a:rPr lang="en-US" sz="2100" dirty="0">
                 <a:solidFill>
-                  <a:srgbClr val="17364A"/>
-                </a:solidFill>
-                <a:latin typeface="Aptos" pitchFamily="34" charset="0"/>
-                <a:ea typeface="Aptos" pitchFamily="34" charset="-122"/>
-                <a:cs typeface="Aptos" pitchFamily="34" charset="-120"/>
-              </a:rPr>
-              <a:t>The controls should be scaled to the risk of the use case.</a:t>
+                  <a:srgbClr val="003A63"/>
+                </a:solidFill>
+                <a:latin typeface="Aptos" pitchFamily="34" charset="0"/>
+                <a:ea typeface="Aptos" pitchFamily="34" charset="-122"/>
+                <a:cs typeface="Aptos" pitchFamily="34" charset="-120"/>
+              </a:rPr>
+              <a:t>• The controls should be scaled to the risk of the use case.</a:t>
             </a:r>
             <a:endParaRPr lang="en-US" sz="2100" dirty="0"/>
           </a:p>
           <a:p>
+            <a:pPr indent="0" marL="0">
+              <a:buNone/>
+            </a:pPr>
             <a:r>
               <a:rPr lang="en-US" sz="2100" dirty="0">
                 <a:solidFill>
-                  <a:srgbClr val="17364A"/>
-                </a:solidFill>
-                <a:latin typeface="Aptos" pitchFamily="34" charset="0"/>
-                <a:ea typeface="Aptos" pitchFamily="34" charset="-122"/>
-                <a:cs typeface="Aptos" pitchFamily="34" charset="-120"/>
-              </a:rPr>
-              <a:t>A tool that drafts internal training text may require lighter review than a tool that updates case.</a:t>
+                  <a:srgbClr val="003A63"/>
+                </a:solidFill>
+                <a:latin typeface="Aptos" pitchFamily="34" charset="0"/>
+                <a:ea typeface="Aptos" pitchFamily="34" charset="-122"/>
+                <a:cs typeface="Aptos" pitchFamily="34" charset="-120"/>
+              </a:rPr>
+              <a:t>• A tool that drafts internal training text may require lighter review than a tool that updates.</a:t>
             </a:r>
             <a:endParaRPr lang="en-US" sz="2100" dirty="0"/>
           </a:p>
@@ -6127,17 +6205,17 @@
         </p:nvSpPr>
         <p:spPr>
           <a:xfrm>
-            <a:off x="7799832" y="1828800"/>
-            <a:ext cx="3145536" cy="685800"/>
-          </a:xfrm>
-          <a:prstGeom prst="rect">
-            <a:avLst/>
-          </a:prstGeom>
-          <a:noFill/>
-          <a:ln/>
-        </p:spPr>
-        <p:txBody>
-          <a:bodyPr wrap="square" lIns="0" tIns="0" rIns="0" bIns="0" rtlCol="0" anchor="t">
+            <a:off x="7799832" y="1801368"/>
+            <a:ext cx="3145536" cy="758952"/>
+          </a:xfrm>
+          <a:prstGeom prst="rect">
+            <a:avLst/>
+          </a:prstGeom>
+          <a:noFill/>
+          <a:ln/>
+        </p:spPr>
+        <p:txBody>
+          <a:bodyPr wrap="square" lIns="254" tIns="254" rIns="254" bIns="254" rtlCol="0" anchor="t">
             <a:normAutofit/>
           </a:bodyPr>
           <a:lstStyle/>
@@ -6146,7 +6224,7 @@
               <a:buNone/>
             </a:pPr>
             <a:r>
-              <a:rPr lang="en-US" sz="1550" dirty="0">
+              <a:rPr lang="en-US" sz="1320" dirty="0">
                 <a:solidFill>
                   <a:srgbClr val="17364A"/>
                 </a:solidFill>
@@ -6156,7 +6234,7 @@
               </a:rPr>
               <a:t>Generative AI, predictive analytics, RAG, automation, and agentic workflows all depend on the controls.</a:t>
             </a:r>
-            <a:endParaRPr lang="en-US" sz="1550" dirty="0"/>
+            <a:endParaRPr lang="en-US" sz="1320" dirty="0"/>
           </a:p>
         </p:txBody>
       </p:sp>
@@ -6244,13 +6322,16 @@
           <a:ln/>
         </p:spPr>
         <p:txBody>
-          <a:bodyPr wrap="square" lIns="254" tIns="254" rIns="254" bIns="254" rtlCol="0" anchor="t">
+          <a:bodyPr wrap="square" lIns="508" tIns="508" rIns="508" bIns="508" rtlCol="0" anchor="t">
             <a:normAutofit/>
           </a:bodyPr>
           <a:lstStyle/>
           <a:p>
-            <a:r>
-              <a:rPr lang="en-US" sz="1380" dirty="0">
+            <a:pPr indent="0" marL="0">
+              <a:buNone/>
+            </a:pPr>
+            <a:r>
+              <a:rPr lang="en-US" sz="1220" dirty="0">
                 <a:solidFill>
                   <a:srgbClr val="17364A"/>
                 </a:solidFill>
@@ -6258,13 +6339,16 @@
                 <a:ea typeface="Aptos" pitchFamily="34" charset="-122"/>
                 <a:cs typeface="Aptos" pitchFamily="34" charset="-120"/>
               </a:rPr>
-              <a:t>Generative AI, predictive analytics, RAG, automation, and agentic workflows all depend on.</a:t>
-            </a:r>
-            <a:endParaRPr lang="en-US" sz="1380" dirty="0"/>
-          </a:p>
-          <a:p>
-            <a:r>
-              <a:rPr lang="en-US" sz="1380" dirty="0">
+              <a:t>Generative AI, predictive analytics, RAG, automation, and agentic.</a:t>
+            </a:r>
+            <a:endParaRPr lang="en-US" sz="1220" dirty="0"/>
+          </a:p>
+          <a:p>
+            <a:pPr indent="0" marL="0">
+              <a:buNone/>
+            </a:pPr>
+            <a:r>
+              <a:rPr lang="en-US" sz="1220" dirty="0">
                 <a:solidFill>
                   <a:srgbClr val="17364A"/>
                 </a:solidFill>
@@ -6272,13 +6356,16 @@
                 <a:ea typeface="Aptos" pitchFamily="34" charset="-122"/>
                 <a:cs typeface="Aptos" pitchFamily="34" charset="-120"/>
               </a:rPr>
-              <a:t>A tool that drafts internal training text may require lighter review than a tool that.</a:t>
-            </a:r>
-            <a:endParaRPr lang="en-US" sz="1380" dirty="0"/>
-          </a:p>
-          <a:p>
-            <a:r>
-              <a:rPr lang="en-US" sz="1380" dirty="0">
+              <a:t>A tool that drafts internal training text may require lighter.</a:t>
+            </a:r>
+            <a:endParaRPr lang="en-US" sz="1220" dirty="0"/>
+          </a:p>
+          <a:p>
+            <a:pPr indent="0" marL="0">
+              <a:buNone/>
+            </a:pPr>
+            <a:r>
+              <a:rPr lang="en-US" sz="1220" dirty="0">
                 <a:solidFill>
                   <a:srgbClr val="17364A"/>
                 </a:solidFill>
@@ -6286,9 +6373,9 @@
                 <a:ea typeface="Aptos" pitchFamily="34" charset="-122"/>
                 <a:cs typeface="Aptos" pitchFamily="34" charset="-120"/>
               </a:rPr>
-              <a:t>The module should be applied during readiness assessment, procurement, implementation.</a:t>
-            </a:r>
-            <a:endParaRPr lang="en-US" sz="1380" dirty="0"/>
+              <a:t>The module should be applied during readiness assessment,.</a:t>
+            </a:r>
+            <a:endParaRPr lang="en-US" sz="1220" dirty="0"/>
           </a:p>
         </p:txBody>
       </p:sp>
@@ -6366,17 +6453,17 @@
         </p:nvSpPr>
         <p:spPr>
           <a:xfrm>
-            <a:off x="7799832" y="5001768"/>
-            <a:ext cx="3145536" cy="502920"/>
-          </a:xfrm>
-          <a:prstGeom prst="rect">
-            <a:avLst/>
-          </a:prstGeom>
-          <a:noFill/>
-          <a:ln/>
-        </p:spPr>
-        <p:txBody>
-          <a:bodyPr wrap="square" lIns="0" tIns="0" rIns="0" bIns="0" rtlCol="0" anchor="t">
+            <a:off x="7799832" y="4974336"/>
+            <a:ext cx="3145536" cy="576072"/>
+          </a:xfrm>
+          <a:prstGeom prst="rect">
+            <a:avLst/>
+          </a:prstGeom>
+          <a:noFill/>
+          <a:ln/>
+        </p:spPr>
+        <p:txBody>
+          <a:bodyPr wrap="square" lIns="254" tIns="254" rIns="254" bIns="254" rtlCol="0" anchor="t">
             <a:normAutofit/>
           </a:bodyPr>
           <a:lstStyle/>
@@ -6385,7 +6472,7 @@
               <a:buNone/>
             </a:pPr>
             <a:r>
-              <a:rPr lang="en-US" sz="1550" dirty="0">
+              <a:rPr lang="en-US" sz="1320" dirty="0">
                 <a:solidFill>
                   <a:srgbClr val="17364A"/>
                 </a:solidFill>
@@ -6393,9 +6480,9 @@
                 <a:ea typeface="Aptos" pitchFamily="34" charset="-122"/>
                 <a:cs typeface="Aptos" pitchFamily="34" charset="-120"/>
               </a:rPr>
-              <a:t>Translate this concept into clear decision rights, review steps, documentation expectations, and escalation paths before an AI-supported workflow is approved.</a:t>
-            </a:r>
-            <a:endParaRPr lang="en-US" sz="1550" dirty="0"/>
+              <a:t>Translate this concept into clear decision rights, review steps, documentation expectations, and escalation paths before.</a:t>
+            </a:r>
+            <a:endParaRPr lang="en-US" sz="1320" dirty="0"/>
           </a:p>
         </p:txBody>
       </p:sp>
@@ -6696,49 +6783,58 @@
           <a:ln/>
         </p:spPr>
         <p:txBody>
-          <a:bodyPr wrap="square" lIns="635" tIns="635" rIns="635" bIns="635" rtlCol="0" anchor="t">
+          <a:bodyPr wrap="square" lIns="1016" tIns="1016" rIns="1016" bIns="1016" rtlCol="0" anchor="t">
             <a:normAutofit/>
           </a:bodyPr>
           <a:lstStyle/>
           <a:p>
+            <a:pPr indent="0" marL="0">
+              <a:buNone/>
+            </a:pPr>
             <a:r>
               <a:rPr lang="en-US" sz="2100" dirty="0">
                 <a:solidFill>
-                  <a:srgbClr val="17364A"/>
-                </a:solidFill>
-                <a:latin typeface="Aptos" pitchFamily="34" charset="0"/>
-                <a:ea typeface="Aptos" pitchFamily="34" charset="-122"/>
-                <a:cs typeface="Aptos" pitchFamily="34" charset="-120"/>
-              </a:rPr>
-              <a:t>Where does this topic appear in one current or proposed AI workflow in your agency?</a:t>
+                  <a:srgbClr val="003A63"/>
+                </a:solidFill>
+                <a:latin typeface="Aptos" pitchFamily="34" charset="0"/>
+                <a:ea typeface="Aptos" pitchFamily="34" charset="-122"/>
+                <a:cs typeface="Aptos" pitchFamily="34" charset="-120"/>
+              </a:rPr>
+              <a:t>• Where does this topic appear in one current or proposed AI workflow in your agency?</a:t>
             </a:r>
             <a:endParaRPr lang="en-US" sz="2100" dirty="0"/>
           </a:p>
           <a:p>
+            <a:pPr indent="0" marL="0">
+              <a:buNone/>
+            </a:pPr>
             <a:r>
               <a:rPr lang="en-US" sz="2100" dirty="0">
                 <a:solidFill>
-                  <a:srgbClr val="17364A"/>
-                </a:solidFill>
-                <a:latin typeface="Aptos" pitchFamily="34" charset="0"/>
-                <a:ea typeface="Aptos" pitchFamily="34" charset="-122"/>
-                <a:cs typeface="Aptos" pitchFamily="34" charset="-120"/>
-              </a:rPr>
-              <a:t>What decisions, data sources, users, or partners would be affected if this area is poorly designed?</a:t>
+                  <a:srgbClr val="003A63"/>
+                </a:solidFill>
+                <a:latin typeface="Aptos" pitchFamily="34" charset="0"/>
+                <a:ea typeface="Aptos" pitchFamily="34" charset="-122"/>
+                <a:cs typeface="Aptos" pitchFamily="34" charset="-120"/>
+              </a:rPr>
+              <a:t>• What decisions, data sources, users, or partners would be affected if this area is poorly.</a:t>
             </a:r>
             <a:endParaRPr lang="en-US" sz="2100" dirty="0"/>
           </a:p>
           <a:p>
+            <a:pPr indent="0" marL="0">
+              <a:buNone/>
+            </a:pPr>
             <a:r>
               <a:rPr lang="en-US" sz="2100" dirty="0">
                 <a:solidFill>
-                  <a:srgbClr val="17364A"/>
-                </a:solidFill>
-                <a:latin typeface="Aptos" pitchFamily="34" charset="0"/>
-                <a:ea typeface="Aptos" pitchFamily="34" charset="-122"/>
-                <a:cs typeface="Aptos" pitchFamily="34" charset="-120"/>
-              </a:rPr>
-              <a:t>What evidence would governance reviewers need before approving the workflow?</a:t>
+                  <a:srgbClr val="003A63"/>
+                </a:solidFill>
+                <a:latin typeface="Aptos" pitchFamily="34" charset="0"/>
+                <a:ea typeface="Aptos" pitchFamily="34" charset="-122"/>
+                <a:cs typeface="Aptos" pitchFamily="34" charset="-120"/>
+              </a:rPr>
+              <a:t>• What evidence would governance reviewers need before approving the workflow?</a:t>
             </a:r>
             <a:endParaRPr lang="en-US" sz="2100" dirty="0"/>
           </a:p>
@@ -6818,17 +6914,17 @@
         </p:nvSpPr>
         <p:spPr>
           <a:xfrm>
-            <a:off x="7799832" y="1828800"/>
-            <a:ext cx="3145536" cy="685800"/>
-          </a:xfrm>
-          <a:prstGeom prst="rect">
-            <a:avLst/>
-          </a:prstGeom>
-          <a:noFill/>
-          <a:ln/>
-        </p:spPr>
-        <p:txBody>
-          <a:bodyPr wrap="square" lIns="0" tIns="0" rIns="0" bIns="0" rtlCol="0" anchor="t">
+            <a:off x="7799832" y="1801368"/>
+            <a:ext cx="3145536" cy="758952"/>
+          </a:xfrm>
+          <a:prstGeom prst="rect">
+            <a:avLst/>
+          </a:prstGeom>
+          <a:noFill/>
+          <a:ln/>
+        </p:spPr>
+        <p:txBody>
+          <a:bodyPr wrap="square" lIns="254" tIns="254" rIns="254" bIns="254" rtlCol="0" anchor="t">
             <a:normAutofit/>
           </a:bodyPr>
           <a:lstStyle/>
@@ -6837,7 +6933,7 @@
               <a:buNone/>
             </a:pPr>
             <a:r>
-              <a:rPr lang="en-US" sz="1550" dirty="0">
+              <a:rPr lang="en-US" sz="1320" dirty="0">
                 <a:solidFill>
                   <a:srgbClr val="17364A"/>
                 </a:solidFill>
@@ -6847,7 +6943,7 @@
               </a:rPr>
               <a:t>Where does this topic appear in one current or proposed AI workflow in your agency?</a:t>
             </a:r>
-            <a:endParaRPr lang="en-US" sz="1550" dirty="0"/>
+            <a:endParaRPr lang="en-US" sz="1320" dirty="0"/>
           </a:p>
         </p:txBody>
       </p:sp>
@@ -6935,13 +7031,16 @@
           <a:ln/>
         </p:spPr>
         <p:txBody>
-          <a:bodyPr wrap="square" lIns="254" tIns="254" rIns="254" bIns="254" rtlCol="0" anchor="t">
+          <a:bodyPr wrap="square" lIns="508" tIns="508" rIns="508" bIns="508" rtlCol="0" anchor="t">
             <a:normAutofit/>
           </a:bodyPr>
           <a:lstStyle/>
           <a:p>
-            <a:r>
-              <a:rPr lang="en-US" sz="1380" dirty="0">
+            <a:pPr indent="0" marL="0">
+              <a:buNone/>
+            </a:pPr>
+            <a:r>
+              <a:rPr lang="en-US" sz="1220" dirty="0">
                 <a:solidFill>
                   <a:srgbClr val="17364A"/>
                 </a:solidFill>
@@ -6949,13 +7048,16 @@
                 <a:ea typeface="Aptos" pitchFamily="34" charset="-122"/>
                 <a:cs typeface="Aptos" pitchFamily="34" charset="-120"/>
               </a:rPr>
-              <a:t>Where does this topic appear in one current or proposed AI workflow in your agency?</a:t>
-            </a:r>
-            <a:endParaRPr lang="en-US" sz="1380" dirty="0"/>
-          </a:p>
-          <a:p>
-            <a:r>
-              <a:rPr lang="en-US" sz="1380" dirty="0">
+              <a:t>Where does this topic appear in one current or proposed AI.</a:t>
+            </a:r>
+            <a:endParaRPr lang="en-US" sz="1220" dirty="0"/>
+          </a:p>
+          <a:p>
+            <a:pPr indent="0" marL="0">
+              <a:buNone/>
+            </a:pPr>
+            <a:r>
+              <a:rPr lang="en-US" sz="1220" dirty="0">
                 <a:solidFill>
                   <a:srgbClr val="17364A"/>
                 </a:solidFill>
@@ -6963,13 +7065,16 @@
                 <a:ea typeface="Aptos" pitchFamily="34" charset="-122"/>
                 <a:cs typeface="Aptos" pitchFamily="34" charset="-120"/>
               </a:rPr>
-              <a:t>What decisions, data sources, users, or partners would be affected if this area is poorly.</a:t>
-            </a:r>
-            <a:endParaRPr lang="en-US" sz="1380" dirty="0"/>
-          </a:p>
-          <a:p>
-            <a:r>
-              <a:rPr lang="en-US" sz="1380" dirty="0">
+              <a:t>What decisions, data sources, users, or partners would be affected.</a:t>
+            </a:r>
+            <a:endParaRPr lang="en-US" sz="1220" dirty="0"/>
+          </a:p>
+          <a:p>
+            <a:pPr indent="0" marL="0">
+              <a:buNone/>
+            </a:pPr>
+            <a:r>
+              <a:rPr lang="en-US" sz="1220" dirty="0">
                 <a:solidFill>
                   <a:srgbClr val="17364A"/>
                 </a:solidFill>
@@ -6977,9 +7082,9 @@
                 <a:ea typeface="Aptos" pitchFamily="34" charset="-122"/>
                 <a:cs typeface="Aptos" pitchFamily="34" charset="-120"/>
               </a:rPr>
-              <a:t>What evidence would governance reviewers need before approving the workflow?</a:t>
-            </a:r>
-            <a:endParaRPr lang="en-US" sz="1380" dirty="0"/>
+              <a:t>What evidence would governance reviewers need before approving the.</a:t>
+            </a:r>
+            <a:endParaRPr lang="en-US" sz="1220" dirty="0"/>
           </a:p>
         </p:txBody>
       </p:sp>
@@ -7057,17 +7162,17 @@
         </p:nvSpPr>
         <p:spPr>
           <a:xfrm>
-            <a:off x="7799832" y="5001768"/>
-            <a:ext cx="3145536" cy="502920"/>
-          </a:xfrm>
-          <a:prstGeom prst="rect">
-            <a:avLst/>
-          </a:prstGeom>
-          <a:noFill/>
-          <a:ln/>
-        </p:spPr>
-        <p:txBody>
-          <a:bodyPr wrap="square" lIns="0" tIns="0" rIns="0" bIns="0" rtlCol="0" anchor="t">
+            <a:off x="7799832" y="4974336"/>
+            <a:ext cx="3145536" cy="576072"/>
+          </a:xfrm>
+          <a:prstGeom prst="rect">
+            <a:avLst/>
+          </a:prstGeom>
+          <a:noFill/>
+          <a:ln/>
+        </p:spPr>
+        <p:txBody>
+          <a:bodyPr wrap="square" lIns="254" tIns="254" rIns="254" bIns="254" rtlCol="0" anchor="t">
             <a:normAutofit/>
           </a:bodyPr>
           <a:lstStyle/>
@@ -7076,7 +7181,7 @@
               <a:buNone/>
             </a:pPr>
             <a:r>
-              <a:rPr lang="en-US" sz="1550" dirty="0">
+              <a:rPr lang="en-US" sz="1320" dirty="0">
                 <a:solidFill>
                   <a:srgbClr val="17364A"/>
                 </a:solidFill>
@@ -7084,9 +7189,9 @@
                 <a:ea typeface="Aptos" pitchFamily="34" charset="-122"/>
                 <a:cs typeface="Aptos" pitchFamily="34" charset="-120"/>
               </a:rPr>
-              <a:t>Translate this concept into clear decision rights, review steps, documentation expectations, and escalation paths before an AI-supported workflow is approved.</a:t>
-            </a:r>
-            <a:endParaRPr lang="en-US" sz="1550" dirty="0"/>
+              <a:t>Translate this concept into clear decision rights, review steps, documentation expectations, and escalation paths before.</a:t>
+            </a:r>
+            <a:endParaRPr lang="en-US" sz="1320" dirty="0"/>
           </a:p>
         </p:txBody>
       </p:sp>
@@ -7387,35 +7492,41 @@
           <a:ln/>
         </p:spPr>
         <p:txBody>
-          <a:bodyPr wrap="square" lIns="635" tIns="635" rIns="635" bIns="635" rtlCol="0" anchor="t">
+          <a:bodyPr wrap="square" lIns="1016" tIns="1016" rIns="1016" bIns="1016" rtlCol="0" anchor="t">
             <a:normAutofit/>
           </a:bodyPr>
           <a:lstStyle/>
           <a:p>
+            <a:pPr indent="0" marL="0">
+              <a:buNone/>
+            </a:pPr>
             <a:r>
               <a:rPr lang="en-US" sz="2100" dirty="0">
                 <a:solidFill>
-                  <a:srgbClr val="17364A"/>
-                </a:solidFill>
-                <a:latin typeface="Aptos" pitchFamily="34" charset="0"/>
-                <a:ea typeface="Aptos" pitchFamily="34" charset="-122"/>
-                <a:cs typeface="Aptos" pitchFamily="34" charset="-120"/>
-              </a:rPr>
-              <a:t>Which safeguards should be required before pilot testing?</a:t>
+                  <a:srgbClr val="003A63"/>
+                </a:solidFill>
+                <a:latin typeface="Aptos" pitchFamily="34" charset="0"/>
+                <a:ea typeface="Aptos" pitchFamily="34" charset="-122"/>
+                <a:cs typeface="Aptos" pitchFamily="34" charset="-120"/>
+              </a:rPr>
+              <a:t>• Which safeguards should be required before pilot testing?</a:t>
             </a:r>
             <a:endParaRPr lang="en-US" sz="2100" dirty="0"/>
           </a:p>
           <a:p>
+            <a:pPr indent="0" marL="0">
+              <a:buNone/>
+            </a:pPr>
             <a:r>
               <a:rPr lang="en-US" sz="2100" dirty="0">
                 <a:solidFill>
-                  <a:srgbClr val="17364A"/>
-                </a:solidFill>
-                <a:latin typeface="Aptos" pitchFamily="34" charset="0"/>
-                <a:ea typeface="Aptos" pitchFamily="34" charset="-122"/>
-                <a:cs typeface="Aptos" pitchFamily="34" charset="-120"/>
-              </a:rPr>
-              <a:t>Who owns ongoing monitoring and review?</a:t>
+                  <a:srgbClr val="003A63"/>
+                </a:solidFill>
+                <a:latin typeface="Aptos" pitchFamily="34" charset="0"/>
+                <a:ea typeface="Aptos" pitchFamily="34" charset="-122"/>
+                <a:cs typeface="Aptos" pitchFamily="34" charset="-120"/>
+              </a:rPr>
+              <a:t>• Who owns ongoing monitoring and review?</a:t>
             </a:r>
             <a:endParaRPr lang="en-US" sz="2100" dirty="0"/>
           </a:p>
@@ -7495,17 +7606,17 @@
         </p:nvSpPr>
         <p:spPr>
           <a:xfrm>
-            <a:off x="7799832" y="1828800"/>
-            <a:ext cx="3145536" cy="685800"/>
-          </a:xfrm>
-          <a:prstGeom prst="rect">
-            <a:avLst/>
-          </a:prstGeom>
-          <a:noFill/>
-          <a:ln/>
-        </p:spPr>
-        <p:txBody>
-          <a:bodyPr wrap="square" lIns="0" tIns="0" rIns="0" bIns="0" rtlCol="0" anchor="t">
+            <a:off x="7799832" y="1801368"/>
+            <a:ext cx="3145536" cy="758952"/>
+          </a:xfrm>
+          <a:prstGeom prst="rect">
+            <a:avLst/>
+          </a:prstGeom>
+          <a:noFill/>
+          <a:ln/>
+        </p:spPr>
+        <p:txBody>
+          <a:bodyPr wrap="square" lIns="254" tIns="254" rIns="254" bIns="254" rtlCol="0" anchor="t">
             <a:normAutofit/>
           </a:bodyPr>
           <a:lstStyle/>
@@ -7514,7 +7625,7 @@
               <a:buNone/>
             </a:pPr>
             <a:r>
-              <a:rPr lang="en-US" sz="1550" dirty="0">
+              <a:rPr lang="en-US" sz="1320" dirty="0">
                 <a:solidFill>
                   <a:srgbClr val="17364A"/>
                 </a:solidFill>
@@ -7524,7 +7635,7 @@
               </a:rPr>
               <a:t>Which safeguards should be required before pilot testing?</a:t>
             </a:r>
-            <a:endParaRPr lang="en-US" sz="1550" dirty="0"/>
+            <a:endParaRPr lang="en-US" sz="1320" dirty="0"/>
           </a:p>
         </p:txBody>
       </p:sp>
@@ -7612,13 +7723,16 @@
           <a:ln/>
         </p:spPr>
         <p:txBody>
-          <a:bodyPr wrap="square" lIns="254" tIns="254" rIns="254" bIns="254" rtlCol="0" anchor="t">
+          <a:bodyPr wrap="square" lIns="508" tIns="508" rIns="508" bIns="508" rtlCol="0" anchor="t">
             <a:normAutofit/>
           </a:bodyPr>
           <a:lstStyle/>
           <a:p>
-            <a:r>
-              <a:rPr lang="en-US" sz="1380" dirty="0">
+            <a:pPr indent="0" marL="0">
+              <a:buNone/>
+            </a:pPr>
+            <a:r>
+              <a:rPr lang="en-US" sz="1220" dirty="0">
                 <a:solidFill>
                   <a:srgbClr val="17364A"/>
                 </a:solidFill>
@@ -7628,11 +7742,14 @@
               </a:rPr>
               <a:t>Which safeguards should be required before pilot testing?</a:t>
             </a:r>
-            <a:endParaRPr lang="en-US" sz="1380" dirty="0"/>
-          </a:p>
-          <a:p>
-            <a:r>
-              <a:rPr lang="en-US" sz="1380" dirty="0">
+            <a:endParaRPr lang="en-US" sz="1220" dirty="0"/>
+          </a:p>
+          <a:p>
+            <a:pPr indent="0" marL="0">
+              <a:buNone/>
+            </a:pPr>
+            <a:r>
+              <a:rPr lang="en-US" sz="1220" dirty="0">
                 <a:solidFill>
                   <a:srgbClr val="17364A"/>
                 </a:solidFill>
@@ -7642,7 +7759,7 @@
               </a:rPr>
               <a:t>Who owns ongoing monitoring and review?</a:t>
             </a:r>
-            <a:endParaRPr lang="en-US" sz="1380" dirty="0"/>
+            <a:endParaRPr lang="en-US" sz="1220" dirty="0"/>
           </a:p>
         </p:txBody>
       </p:sp>
@@ -7720,17 +7837,17 @@
         </p:nvSpPr>
         <p:spPr>
           <a:xfrm>
-            <a:off x="7799832" y="5001768"/>
-            <a:ext cx="3145536" cy="502920"/>
-          </a:xfrm>
-          <a:prstGeom prst="rect">
-            <a:avLst/>
-          </a:prstGeom>
-          <a:noFill/>
-          <a:ln/>
-        </p:spPr>
-        <p:txBody>
-          <a:bodyPr wrap="square" lIns="0" tIns="0" rIns="0" bIns="0" rtlCol="0" anchor="t">
+            <a:off x="7799832" y="4974336"/>
+            <a:ext cx="3145536" cy="576072"/>
+          </a:xfrm>
+          <a:prstGeom prst="rect">
+            <a:avLst/>
+          </a:prstGeom>
+          <a:noFill/>
+          <a:ln/>
+        </p:spPr>
+        <p:txBody>
+          <a:bodyPr wrap="square" lIns="254" tIns="254" rIns="254" bIns="254" rtlCol="0" anchor="t">
             <a:normAutofit/>
           </a:bodyPr>
           <a:lstStyle/>
@@ -7739,7 +7856,7 @@
               <a:buNone/>
             </a:pPr>
             <a:r>
-              <a:rPr lang="en-US" sz="1550" dirty="0">
+              <a:rPr lang="en-US" sz="1320" dirty="0">
                 <a:solidFill>
                   <a:srgbClr val="17364A"/>
                 </a:solidFill>
@@ -7747,9 +7864,9 @@
                 <a:ea typeface="Aptos" pitchFamily="34" charset="-122"/>
                 <a:cs typeface="Aptos" pitchFamily="34" charset="-120"/>
               </a:rPr>
-              <a:t>Translate this concept into clear decision rights, review steps, documentation expectations, and escalation paths before an AI-supported workflow is approved.</a:t>
-            </a:r>
-            <a:endParaRPr lang="en-US" sz="1550" dirty="0"/>
+              <a:t>Translate this concept into clear decision rights, review steps, documentation expectations, and escalation paths before.</a:t>
+            </a:r>
+            <a:endParaRPr lang="en-US" sz="1320" dirty="0"/>
           </a:p>
         </p:txBody>
       </p:sp>
@@ -8050,49 +8167,58 @@
           <a:ln/>
         </p:spPr>
         <p:txBody>
-          <a:bodyPr wrap="square" lIns="635" tIns="635" rIns="635" bIns="635" rtlCol="0" anchor="t">
+          <a:bodyPr wrap="square" lIns="1016" tIns="1016" rIns="1016" bIns="1016" rtlCol="0" anchor="t">
             <a:normAutofit/>
           </a:bodyPr>
           <a:lstStyle/>
           <a:p>
+            <a:pPr indent="0" marL="0">
+              <a:buNone/>
+            </a:pPr>
             <a:r>
               <a:rPr lang="en-US" sz="2100" dirty="0">
                 <a:solidFill>
-                  <a:srgbClr val="17364A"/>
-                </a:solidFill>
-                <a:latin typeface="Aptos" pitchFamily="34" charset="0"/>
-                <a:ea typeface="Aptos" pitchFamily="34" charset="-122"/>
-                <a:cs typeface="Aptos" pitchFamily="34" charset="-120"/>
-              </a:rPr>
-              <a:t>Create a AI-ready data governance checklist for one real or realistic public health AI workflow.</a:t>
+                  <a:srgbClr val="003A63"/>
+                </a:solidFill>
+                <a:latin typeface="Aptos" pitchFamily="34" charset="0"/>
+                <a:ea typeface="Aptos" pitchFamily="34" charset="-122"/>
+                <a:cs typeface="Aptos" pitchFamily="34" charset="-120"/>
+              </a:rPr>
+              <a:t>• Create a AI-ready data governance checklist for one real or realistic public health AI workflow.</a:t>
             </a:r>
             <a:endParaRPr lang="en-US" sz="2100" dirty="0"/>
           </a:p>
           <a:p>
+            <a:pPr indent="0" marL="0">
+              <a:buNone/>
+            </a:pPr>
             <a:r>
               <a:rPr lang="en-US" sz="2100" dirty="0">
                 <a:solidFill>
-                  <a:srgbClr val="17364A"/>
-                </a:solidFill>
-                <a:latin typeface="Aptos" pitchFamily="34" charset="0"/>
-                <a:ea typeface="Aptos" pitchFamily="34" charset="-122"/>
-                <a:cs typeface="Aptos" pitchFamily="34" charset="-120"/>
-              </a:rPr>
-              <a:t>The artifact should describe the use case, affected users, data sources, system dependencies, risks,.</a:t>
+                  <a:srgbClr val="003A63"/>
+                </a:solidFill>
+                <a:latin typeface="Aptos" pitchFamily="34" charset="0"/>
+                <a:ea typeface="Aptos" pitchFamily="34" charset="-122"/>
+                <a:cs typeface="Aptos" pitchFamily="34" charset="-120"/>
+              </a:rPr>
+              <a:t>• The artifact should describe the use case, affected users, data sources, system dependencies,.</a:t>
             </a:r>
             <a:endParaRPr lang="en-US" sz="2100" dirty="0"/>
           </a:p>
           <a:p>
+            <a:pPr indent="0" marL="0">
+              <a:buNone/>
+            </a:pPr>
             <a:r>
               <a:rPr lang="en-US" sz="2100" dirty="0">
                 <a:solidFill>
-                  <a:srgbClr val="17364A"/>
-                </a:solidFill>
-                <a:latin typeface="Aptos" pitchFamily="34" charset="0"/>
-                <a:ea typeface="Aptos" pitchFamily="34" charset="-122"/>
-                <a:cs typeface="Aptos" pitchFamily="34" charset="-120"/>
-              </a:rPr>
-              <a:t>The exercise should produce a work product that could be used in a governance meeting, procurement.</a:t>
+                  <a:srgbClr val="003A63"/>
+                </a:solidFill>
+                <a:latin typeface="Aptos" pitchFamily="34" charset="0"/>
+                <a:ea typeface="Aptos" pitchFamily="34" charset="-122"/>
+                <a:cs typeface="Aptos" pitchFamily="34" charset="-120"/>
+              </a:rPr>
+              <a:t>• The exercise should produce a work product that could be used in a governance meeting,.</a:t>
             </a:r>
             <a:endParaRPr lang="en-US" sz="2100" dirty="0"/>
           </a:p>
@@ -8172,17 +8298,17 @@
         </p:nvSpPr>
         <p:spPr>
           <a:xfrm>
-            <a:off x="7799832" y="1828800"/>
-            <a:ext cx="3145536" cy="685800"/>
-          </a:xfrm>
-          <a:prstGeom prst="rect">
-            <a:avLst/>
-          </a:prstGeom>
-          <a:noFill/>
-          <a:ln/>
-        </p:spPr>
-        <p:txBody>
-          <a:bodyPr wrap="square" lIns="0" tIns="0" rIns="0" bIns="0" rtlCol="0" anchor="t">
+            <a:off x="7799832" y="1801368"/>
+            <a:ext cx="3145536" cy="758952"/>
+          </a:xfrm>
+          <a:prstGeom prst="rect">
+            <a:avLst/>
+          </a:prstGeom>
+          <a:noFill/>
+          <a:ln/>
+        </p:spPr>
+        <p:txBody>
+          <a:bodyPr wrap="square" lIns="254" tIns="254" rIns="254" bIns="254" rtlCol="0" anchor="t">
             <a:normAutofit/>
           </a:bodyPr>
           <a:lstStyle/>
@@ -8191,7 +8317,7 @@
               <a:buNone/>
             </a:pPr>
             <a:r>
-              <a:rPr lang="en-US" sz="1550" dirty="0">
+              <a:rPr lang="en-US" sz="1320" dirty="0">
                 <a:solidFill>
                   <a:srgbClr val="17364A"/>
                 </a:solidFill>
@@ -8201,7 +8327,7 @@
               </a:rPr>
               <a:t>Create a AI-ready data governance checklist for one real or realistic public health AI workflow.</a:t>
             </a:r>
-            <a:endParaRPr lang="en-US" sz="1550" dirty="0"/>
+            <a:endParaRPr lang="en-US" sz="1320" dirty="0"/>
           </a:p>
         </p:txBody>
       </p:sp>
@@ -8289,13 +8415,16 @@
           <a:ln/>
         </p:spPr>
         <p:txBody>
-          <a:bodyPr wrap="square" lIns="254" tIns="254" rIns="254" bIns="254" rtlCol="0" anchor="t">
+          <a:bodyPr wrap="square" lIns="508" tIns="508" rIns="508" bIns="508" rtlCol="0" anchor="t">
             <a:normAutofit/>
           </a:bodyPr>
           <a:lstStyle/>
           <a:p>
-            <a:r>
-              <a:rPr lang="en-US" sz="1380" dirty="0">
+            <a:pPr indent="0" marL="0">
+              <a:buNone/>
+            </a:pPr>
+            <a:r>
+              <a:rPr lang="en-US" sz="1220" dirty="0">
                 <a:solidFill>
                   <a:srgbClr val="17364A"/>
                 </a:solidFill>
@@ -8303,13 +8432,16 @@
                 <a:ea typeface="Aptos" pitchFamily="34" charset="-122"/>
                 <a:cs typeface="Aptos" pitchFamily="34" charset="-120"/>
               </a:rPr>
-              <a:t>The artifact should describe the use case, affected users, data sources, system.</a:t>
-            </a:r>
-            <a:endParaRPr lang="en-US" sz="1380" dirty="0"/>
-          </a:p>
-          <a:p>
-            <a:r>
-              <a:rPr lang="en-US" sz="1380" dirty="0">
+              <a:t>The artifact should describe the use case, affected users, data.</a:t>
+            </a:r>
+            <a:endParaRPr lang="en-US" sz="1220" dirty="0"/>
+          </a:p>
+          <a:p>
+            <a:pPr indent="0" marL="0">
+              <a:buNone/>
+            </a:pPr>
+            <a:r>
+              <a:rPr lang="en-US" sz="1220" dirty="0">
                 <a:solidFill>
                   <a:srgbClr val="17364A"/>
                 </a:solidFill>
@@ -8317,13 +8449,16 @@
                 <a:ea typeface="Aptos" pitchFamily="34" charset="-122"/>
                 <a:cs typeface="Aptos" pitchFamily="34" charset="-120"/>
               </a:rPr>
-              <a:t>The exercise should produce a work product that could be used in a governance meeting,.</a:t>
-            </a:r>
-            <a:endParaRPr lang="en-US" sz="1380" dirty="0"/>
-          </a:p>
-          <a:p>
-            <a:r>
-              <a:rPr lang="en-US" sz="1380" dirty="0">
+              <a:t>The exercise should produce a work product that could be used in a.</a:t>
+            </a:r>
+            <a:endParaRPr lang="en-US" sz="1220" dirty="0"/>
+          </a:p>
+          <a:p>
+            <a:pPr indent="0" marL="0">
+              <a:buNone/>
+            </a:pPr>
+            <a:r>
+              <a:rPr lang="en-US" sz="1220" dirty="0">
                 <a:solidFill>
                   <a:srgbClr val="17364A"/>
                 </a:solidFill>
@@ -8331,9 +8466,9 @@
                 <a:ea typeface="Aptos" pitchFamily="34" charset="-122"/>
                 <a:cs typeface="Aptos" pitchFamily="34" charset="-120"/>
               </a:rPr>
-              <a:t>Learners should document assumptions and identify which staff or partners need to be.</a:t>
-            </a:r>
-            <a:endParaRPr lang="en-US" sz="1380" dirty="0"/>
+              <a:t>Learners should document assumptions and identify which staff or.</a:t>
+            </a:r>
+            <a:endParaRPr lang="en-US" sz="1220" dirty="0"/>
           </a:p>
         </p:txBody>
       </p:sp>
@@ -8411,17 +8546,17 @@
         </p:nvSpPr>
         <p:spPr>
           <a:xfrm>
-            <a:off x="7799832" y="5001768"/>
-            <a:ext cx="3145536" cy="502920"/>
-          </a:xfrm>
-          <a:prstGeom prst="rect">
-            <a:avLst/>
-          </a:prstGeom>
-          <a:noFill/>
-          <a:ln/>
-        </p:spPr>
-        <p:txBody>
-          <a:bodyPr wrap="square" lIns="0" tIns="0" rIns="0" bIns="0" rtlCol="0" anchor="t">
+            <a:off x="7799832" y="4974336"/>
+            <a:ext cx="3145536" cy="576072"/>
+          </a:xfrm>
+          <a:prstGeom prst="rect">
+            <a:avLst/>
+          </a:prstGeom>
+          <a:noFill/>
+          <a:ln/>
+        </p:spPr>
+        <p:txBody>
+          <a:bodyPr wrap="square" lIns="254" tIns="254" rIns="254" bIns="254" rtlCol="0" anchor="t">
             <a:normAutofit/>
           </a:bodyPr>
           <a:lstStyle/>
@@ -8430,7 +8565,7 @@
               <a:buNone/>
             </a:pPr>
             <a:r>
-              <a:rPr lang="en-US" sz="1550" dirty="0">
+              <a:rPr lang="en-US" sz="1320" dirty="0">
                 <a:solidFill>
                   <a:srgbClr val="17364A"/>
                 </a:solidFill>
@@ -8438,9 +8573,9 @@
                 <a:ea typeface="Aptos" pitchFamily="34" charset="-122"/>
                 <a:cs typeface="Aptos" pitchFamily="34" charset="-120"/>
               </a:rPr>
-              <a:t>Use the assignment to test whether you can explain the concept, apply it to a realistic public health situation, and identify what would need review before the work moves forward.</a:t>
-            </a:r>
-            <a:endParaRPr lang="en-US" sz="1550" dirty="0"/>
+              <a:t>Use the assignment to test whether you can explain the concept, apply it to a realistic public health situation, and.</a:t>
+            </a:r>
+            <a:endParaRPr lang="en-US" sz="1320" dirty="0"/>
           </a:p>
         </p:txBody>
       </p:sp>
@@ -8741,35 +8876,41 @@
           <a:ln/>
         </p:spPr>
         <p:txBody>
-          <a:bodyPr wrap="square" lIns="635" tIns="635" rIns="635" bIns="635" rtlCol="0" anchor="t">
+          <a:bodyPr wrap="square" lIns="1016" tIns="1016" rIns="1016" bIns="1016" rtlCol="0" anchor="t">
             <a:normAutofit/>
           </a:bodyPr>
           <a:lstStyle/>
           <a:p>
+            <a:pPr indent="0" marL="0">
+              <a:buNone/>
+            </a:pPr>
             <a:r>
               <a:rPr lang="en-US" sz="2100" dirty="0">
                 <a:solidFill>
-                  <a:srgbClr val="17364A"/>
-                </a:solidFill>
-                <a:latin typeface="Aptos" pitchFamily="34" charset="0"/>
-                <a:ea typeface="Aptos" pitchFamily="34" charset="-122"/>
-                <a:cs typeface="Aptos" pitchFamily="34" charset="-120"/>
-              </a:rPr>
-              <a:t>The expected artifact is a completed AI-ready data governance checklist.</a:t>
+                  <a:srgbClr val="003A63"/>
+                </a:solidFill>
+                <a:latin typeface="Aptos" pitchFamily="34" charset="0"/>
+                <a:ea typeface="Aptos" pitchFamily="34" charset="-122"/>
+                <a:cs typeface="Aptos" pitchFamily="34" charset="-120"/>
+              </a:rPr>
+              <a:t>• The expected artifact is a completed AI-ready data governance checklist.</a:t>
             </a:r>
             <a:endParaRPr lang="en-US" sz="2100" dirty="0"/>
           </a:p>
           <a:p>
+            <a:pPr indent="0" marL="0">
+              <a:buNone/>
+            </a:pPr>
             <a:r>
               <a:rPr lang="en-US" sz="2100" dirty="0">
                 <a:solidFill>
-                  <a:srgbClr val="17364A"/>
-                </a:solidFill>
-                <a:latin typeface="Aptos" pitchFamily="34" charset="0"/>
-                <a:ea typeface="Aptos" pitchFamily="34" charset="-122"/>
-                <a:cs typeface="Aptos" pitchFamily="34" charset="-120"/>
-              </a:rPr>
-              <a:t>It should be specific to a public health workflow and should include technical dependencies, governance.</a:t>
+                  <a:srgbClr val="003A63"/>
+                </a:solidFill>
+                <a:latin typeface="Aptos" pitchFamily="34" charset="0"/>
+                <a:ea typeface="Aptos" pitchFamily="34" charset="-122"/>
+                <a:cs typeface="Aptos" pitchFamily="34" charset="-120"/>
+              </a:rPr>
+              <a:t>• It should be specific to a public health workflow and should include technical dependencies,.</a:t>
             </a:r>
             <a:endParaRPr lang="en-US" sz="2100" dirty="0"/>
           </a:p>
@@ -8849,17 +8990,17 @@
         </p:nvSpPr>
         <p:spPr>
           <a:xfrm>
-            <a:off x="7799832" y="1828800"/>
-            <a:ext cx="3145536" cy="685800"/>
-          </a:xfrm>
-          <a:prstGeom prst="rect">
-            <a:avLst/>
-          </a:prstGeom>
-          <a:noFill/>
-          <a:ln/>
-        </p:spPr>
-        <p:txBody>
-          <a:bodyPr wrap="square" lIns="0" tIns="0" rIns="0" bIns="0" rtlCol="0" anchor="t">
+            <a:off x="7799832" y="1801368"/>
+            <a:ext cx="3145536" cy="758952"/>
+          </a:xfrm>
+          <a:prstGeom prst="rect">
+            <a:avLst/>
+          </a:prstGeom>
+          <a:noFill/>
+          <a:ln/>
+        </p:spPr>
+        <p:txBody>
+          <a:bodyPr wrap="square" lIns="254" tIns="254" rIns="254" bIns="254" rtlCol="0" anchor="t">
             <a:normAutofit/>
           </a:bodyPr>
           <a:lstStyle/>
@@ -8868,7 +9009,7 @@
               <a:buNone/>
             </a:pPr>
             <a:r>
-              <a:rPr lang="en-US" sz="1550" dirty="0">
+              <a:rPr lang="en-US" sz="1320" dirty="0">
                 <a:solidFill>
                   <a:srgbClr val="17364A"/>
                 </a:solidFill>
@@ -8878,7 +9019,7 @@
               </a:rPr>
               <a:t>The expected artifact is a completed AI-ready data governance checklist.</a:t>
             </a:r>
-            <a:endParaRPr lang="en-US" sz="1550" dirty="0"/>
+            <a:endParaRPr lang="en-US" sz="1320" dirty="0"/>
           </a:p>
         </p:txBody>
       </p:sp>
@@ -8966,13 +9107,16 @@
           <a:ln/>
         </p:spPr>
         <p:txBody>
-          <a:bodyPr wrap="square" lIns="254" tIns="254" rIns="254" bIns="254" rtlCol="0" anchor="t">
+          <a:bodyPr wrap="square" lIns="508" tIns="508" rIns="508" bIns="508" rtlCol="0" anchor="t">
             <a:normAutofit/>
           </a:bodyPr>
           <a:lstStyle/>
           <a:p>
-            <a:r>
-              <a:rPr lang="en-US" sz="1380" dirty="0">
+            <a:pPr indent="0" marL="0">
+              <a:buNone/>
+            </a:pPr>
+            <a:r>
+              <a:rPr lang="en-US" sz="1220" dirty="0">
                 <a:solidFill>
                   <a:srgbClr val="17364A"/>
                 </a:solidFill>
@@ -8980,13 +9124,16 @@
                 <a:ea typeface="Aptos" pitchFamily="34" charset="-122"/>
                 <a:cs typeface="Aptos" pitchFamily="34" charset="-120"/>
               </a:rPr>
-              <a:t>The expected artifact is a completed AI-ready data governance checklist.</a:t>
-            </a:r>
-            <a:endParaRPr lang="en-US" sz="1380" dirty="0"/>
-          </a:p>
-          <a:p>
-            <a:r>
-              <a:rPr lang="en-US" sz="1380" dirty="0">
+              <a:t>The expected artifact is a completed AI-ready data governance.</a:t>
+            </a:r>
+            <a:endParaRPr lang="en-US" sz="1220" dirty="0"/>
+          </a:p>
+          <a:p>
+            <a:pPr indent="0" marL="0">
+              <a:buNone/>
+            </a:pPr>
+            <a:r>
+              <a:rPr lang="en-US" sz="1220" dirty="0">
                 <a:solidFill>
                   <a:srgbClr val="17364A"/>
                 </a:solidFill>
@@ -8994,9 +9141,9 @@
                 <a:ea typeface="Aptos" pitchFamily="34" charset="-122"/>
                 <a:cs typeface="Aptos" pitchFamily="34" charset="-120"/>
               </a:rPr>
-              <a:t>It should be specific to a public health workflow and should include technical.</a:t>
-            </a:r>
-            <a:endParaRPr lang="en-US" sz="1380" dirty="0"/>
+              <a:t>It should be specific to a public health workflow and should.</a:t>
+            </a:r>
+            <a:endParaRPr lang="en-US" sz="1220" dirty="0"/>
           </a:p>
         </p:txBody>
       </p:sp>
@@ -9074,17 +9221,17 @@
         </p:nvSpPr>
         <p:spPr>
           <a:xfrm>
-            <a:off x="7799832" y="5001768"/>
-            <a:ext cx="3145536" cy="502920"/>
-          </a:xfrm>
-          <a:prstGeom prst="rect">
-            <a:avLst/>
-          </a:prstGeom>
-          <a:noFill/>
-          <a:ln/>
-        </p:spPr>
-        <p:txBody>
-          <a:bodyPr wrap="square" lIns="0" tIns="0" rIns="0" bIns="0" rtlCol="0" anchor="t">
+            <a:off x="7799832" y="4974336"/>
+            <a:ext cx="3145536" cy="576072"/>
+          </a:xfrm>
+          <a:prstGeom prst="rect">
+            <a:avLst/>
+          </a:prstGeom>
+          <a:noFill/>
+          <a:ln/>
+        </p:spPr>
+        <p:txBody>
+          <a:bodyPr wrap="square" lIns="254" tIns="254" rIns="254" bIns="254" rtlCol="0" anchor="t">
             <a:normAutofit/>
           </a:bodyPr>
           <a:lstStyle/>
@@ -9093,7 +9240,7 @@
               <a:buNone/>
             </a:pPr>
             <a:r>
-              <a:rPr lang="en-US" sz="1550" dirty="0">
+              <a:rPr lang="en-US" sz="1320" dirty="0">
                 <a:solidFill>
                   <a:srgbClr val="17364A"/>
                 </a:solidFill>
@@ -9101,9 +9248,9 @@
                 <a:ea typeface="Aptos" pitchFamily="34" charset="-122"/>
                 <a:cs typeface="Aptos" pitchFamily="34" charset="-120"/>
               </a:rPr>
-              <a:t>Translate this concept into clear decision rights, review steps, documentation expectations, and escalation paths before an AI-supported workflow is approved.</a:t>
-            </a:r>
-            <a:endParaRPr lang="en-US" sz="1550" dirty="0"/>
+              <a:t>Translate this concept into clear decision rights, review steps, documentation expectations, and escalation paths before.</a:t>
+            </a:r>
+            <a:endParaRPr lang="en-US" sz="1320" dirty="0"/>
           </a:p>
         </p:txBody>
       </p:sp>
@@ -9404,21 +9551,24 @@
           <a:ln/>
         </p:spPr>
         <p:txBody>
-          <a:bodyPr wrap="square" lIns="635" tIns="635" rIns="635" bIns="635" rtlCol="0" anchor="t">
+          <a:bodyPr wrap="square" lIns="1016" tIns="1016" rIns="1016" bIns="1016" rtlCol="0" anchor="t">
             <a:normAutofit/>
           </a:bodyPr>
           <a:lstStyle/>
           <a:p>
+            <a:pPr indent="0" marL="0">
+              <a:buNone/>
+            </a:pPr>
             <a:r>
               <a:rPr lang="en-US" sz="2100" dirty="0">
                 <a:solidFill>
-                  <a:srgbClr val="17364A"/>
-                </a:solidFill>
-                <a:latin typeface="Aptos" pitchFamily="34" charset="0"/>
-                <a:ea typeface="Aptos" pitchFamily="34" charset="-122"/>
-                <a:cs typeface="Aptos" pitchFamily="34" charset="-120"/>
-              </a:rPr>
-              <a:t>The expected artifact is a completed AI-ready data governance checklist. It should be specific to a.</a:t>
+                  <a:srgbClr val="003A63"/>
+                </a:solidFill>
+                <a:latin typeface="Aptos" pitchFamily="34" charset="0"/>
+                <a:ea typeface="Aptos" pitchFamily="34" charset="-122"/>
+                <a:cs typeface="Aptos" pitchFamily="34" charset="-120"/>
+              </a:rPr>
+              <a:t>• The expected artifact is a completed AI-ready data governance checklist. It should be specific.</a:t>
             </a:r>
             <a:endParaRPr lang="en-US" sz="2100" dirty="0"/>
           </a:p>
@@ -9498,17 +9648,17 @@
         </p:nvSpPr>
         <p:spPr>
           <a:xfrm>
-            <a:off x="7799832" y="1828800"/>
-            <a:ext cx="3145536" cy="685800"/>
-          </a:xfrm>
-          <a:prstGeom prst="rect">
-            <a:avLst/>
-          </a:prstGeom>
-          <a:noFill/>
-          <a:ln/>
-        </p:spPr>
-        <p:txBody>
-          <a:bodyPr wrap="square" lIns="0" tIns="0" rIns="0" bIns="0" rtlCol="0" anchor="t">
+            <a:off x="7799832" y="1801368"/>
+            <a:ext cx="3145536" cy="758952"/>
+          </a:xfrm>
+          <a:prstGeom prst="rect">
+            <a:avLst/>
+          </a:prstGeom>
+          <a:noFill/>
+          <a:ln/>
+        </p:spPr>
+        <p:txBody>
+          <a:bodyPr wrap="square" lIns="254" tIns="254" rIns="254" bIns="254" rtlCol="0" anchor="t">
             <a:normAutofit/>
           </a:bodyPr>
           <a:lstStyle/>
@@ -9517,7 +9667,7 @@
               <a:buNone/>
             </a:pPr>
             <a:r>
-              <a:rPr lang="en-US" sz="1550" dirty="0">
+              <a:rPr lang="en-US" sz="1320" dirty="0">
                 <a:solidFill>
                   <a:srgbClr val="17364A"/>
                 </a:solidFill>
@@ -9527,7 +9677,7 @@
               </a:rPr>
               <a:t>The expected artifact is a completed AI-ready data governance checklist. It should be specific to a.</a:t>
             </a:r>
-            <a:endParaRPr lang="en-US" sz="1550" dirty="0"/>
+            <a:endParaRPr lang="en-US" sz="1320" dirty="0"/>
           </a:p>
         </p:txBody>
       </p:sp>
@@ -9615,13 +9765,16 @@
           <a:ln/>
         </p:spPr>
         <p:txBody>
-          <a:bodyPr wrap="square" lIns="254" tIns="254" rIns="254" bIns="254" rtlCol="0" anchor="t">
+          <a:bodyPr wrap="square" lIns="508" tIns="508" rIns="508" bIns="508" rtlCol="0" anchor="t">
             <a:normAutofit/>
           </a:bodyPr>
           <a:lstStyle/>
           <a:p>
-            <a:r>
-              <a:rPr lang="en-US" sz="1380" dirty="0">
+            <a:pPr indent="0" marL="0">
+              <a:buNone/>
+            </a:pPr>
+            <a:r>
+              <a:rPr lang="en-US" sz="1220" dirty="0">
                 <a:solidFill>
                   <a:srgbClr val="17364A"/>
                 </a:solidFill>
@@ -9629,13 +9782,16 @@
                 <a:ea typeface="Aptos" pitchFamily="34" charset="-122"/>
                 <a:cs typeface="Aptos" pitchFamily="34" charset="-120"/>
               </a:rPr>
-              <a:t>The expected artifact is a completed AI-ready data governance checklist.</a:t>
-            </a:r>
-            <a:endParaRPr lang="en-US" sz="1380" dirty="0"/>
-          </a:p>
-          <a:p>
-            <a:r>
-              <a:rPr lang="en-US" sz="1380" dirty="0">
+              <a:t>The expected artifact is a completed AI-ready data governance.</a:t>
+            </a:r>
+            <a:endParaRPr lang="en-US" sz="1220" dirty="0"/>
+          </a:p>
+          <a:p>
+            <a:pPr indent="0" marL="0">
+              <a:buNone/>
+            </a:pPr>
+            <a:r>
+              <a:rPr lang="en-US" sz="1220" dirty="0">
                 <a:solidFill>
                   <a:srgbClr val="17364A"/>
                 </a:solidFill>
@@ -9643,9 +9799,9 @@
                 <a:ea typeface="Aptos" pitchFamily="34" charset="-122"/>
                 <a:cs typeface="Aptos" pitchFamily="34" charset="-120"/>
               </a:rPr>
-              <a:t>It should be specific to a public health workflow and should include technical.</a:t>
-            </a:r>
-            <a:endParaRPr lang="en-US" sz="1380" dirty="0"/>
+              <a:t>It should be specific to a public health workflow and should.</a:t>
+            </a:r>
+            <a:endParaRPr lang="en-US" sz="1220" dirty="0"/>
           </a:p>
         </p:txBody>
       </p:sp>
@@ -9723,17 +9879,17 @@
         </p:nvSpPr>
         <p:spPr>
           <a:xfrm>
-            <a:off x="7799832" y="5001768"/>
-            <a:ext cx="3145536" cy="502920"/>
-          </a:xfrm>
-          <a:prstGeom prst="rect">
-            <a:avLst/>
-          </a:prstGeom>
-          <a:noFill/>
-          <a:ln/>
-        </p:spPr>
-        <p:txBody>
-          <a:bodyPr wrap="square" lIns="0" tIns="0" rIns="0" bIns="0" rtlCol="0" anchor="t">
+            <a:off x="7799832" y="4974336"/>
+            <a:ext cx="3145536" cy="576072"/>
+          </a:xfrm>
+          <a:prstGeom prst="rect">
+            <a:avLst/>
+          </a:prstGeom>
+          <a:noFill/>
+          <a:ln/>
+        </p:spPr>
+        <p:txBody>
+          <a:bodyPr wrap="square" lIns="254" tIns="254" rIns="254" bIns="254" rtlCol="0" anchor="t">
             <a:normAutofit/>
           </a:bodyPr>
           <a:lstStyle/>
@@ -9742,7 +9898,7 @@
               <a:buNone/>
             </a:pPr>
             <a:r>
-              <a:rPr lang="en-US" sz="1550" dirty="0">
+              <a:rPr lang="en-US" sz="1320" dirty="0">
                 <a:solidFill>
                   <a:srgbClr val="17364A"/>
                 </a:solidFill>
@@ -9750,9 +9906,9 @@
                 <a:ea typeface="Aptos" pitchFamily="34" charset="-122"/>
                 <a:cs typeface="Aptos" pitchFamily="34" charset="-120"/>
               </a:rPr>
-              <a:t>Use the assignment to test whether you can explain the concept, apply it to a realistic public health situation, and identify what would need review before the work moves forward.</a:t>
-            </a:r>
-            <a:endParaRPr lang="en-US" sz="1550" dirty="0"/>
+              <a:t>Use the assignment to test whether you can explain the concept, apply it to a realistic public health situation, and.</a:t>
+            </a:r>
+            <a:endParaRPr lang="en-US" sz="1320" dirty="0"/>
           </a:p>
         </p:txBody>
       </p:sp>
@@ -10053,49 +10209,58 @@
           <a:ln/>
         </p:spPr>
         <p:txBody>
-          <a:bodyPr wrap="square" lIns="635" tIns="635" rIns="635" bIns="635" rtlCol="0" anchor="t">
+          <a:bodyPr wrap="square" lIns="1016" tIns="1016" rIns="1016" bIns="1016" rtlCol="0" anchor="t">
             <a:normAutofit/>
           </a:bodyPr>
           <a:lstStyle/>
           <a:p>
+            <a:pPr indent="0" marL="0">
+              <a:buNone/>
+            </a:pPr>
             <a:r>
               <a:rPr lang="en-US" sz="2100" dirty="0">
                 <a:solidFill>
-                  <a:srgbClr val="17364A"/>
-                </a:solidFill>
-                <a:latin typeface="Aptos" pitchFamily="34" charset="0"/>
-                <a:ea typeface="Aptos" pitchFamily="34" charset="-122"/>
-                <a:cs typeface="Aptos" pitchFamily="34" charset="-120"/>
-              </a:rPr>
-              <a:t>AI-ready data require governance before they require a model.</a:t>
+                  <a:srgbClr val="003A63"/>
+                </a:solidFill>
+                <a:latin typeface="Aptos" pitchFamily="34" charset="0"/>
+                <a:ea typeface="Aptos" pitchFamily="34" charset="-122"/>
+                <a:cs typeface="Aptos" pitchFamily="34" charset="-120"/>
+              </a:rPr>
+              <a:t>• AI-ready data require governance before they require a model.</a:t>
             </a:r>
             <a:endParaRPr lang="en-US" sz="2100" dirty="0"/>
           </a:p>
           <a:p>
+            <a:pPr indent="0" marL="0">
+              <a:buNone/>
+            </a:pPr>
             <a:r>
               <a:rPr lang="en-US" sz="2100" dirty="0">
                 <a:solidFill>
-                  <a:srgbClr val="17364A"/>
-                </a:solidFill>
-                <a:latin typeface="Aptos" pitchFamily="34" charset="0"/>
-                <a:ea typeface="Aptos" pitchFamily="34" charset="-122"/>
-                <a:cs typeface="Aptos" pitchFamily="34" charset="-120"/>
-              </a:rPr>
-              <a:t>Data governance defines ownership, stewardship, metadata, permissible use, data quality expectations, access.</a:t>
+                  <a:srgbClr val="003A63"/>
+                </a:solidFill>
+                <a:latin typeface="Aptos" pitchFamily="34" charset="0"/>
+                <a:ea typeface="Aptos" pitchFamily="34" charset="-122"/>
+                <a:cs typeface="Aptos" pitchFamily="34" charset="-120"/>
+              </a:rPr>
+              <a:t>• Data governance defines ownership, stewardship, metadata, permissible use, data quality.</a:t>
             </a:r>
             <a:endParaRPr lang="en-US" sz="2100" dirty="0"/>
           </a:p>
           <a:p>
+            <a:pPr indent="0" marL="0">
+              <a:buNone/>
+            </a:pPr>
             <a:r>
               <a:rPr lang="en-US" sz="2100" dirty="0">
                 <a:solidFill>
-                  <a:srgbClr val="17364A"/>
-                </a:solidFill>
-                <a:latin typeface="Aptos" pitchFamily="34" charset="0"/>
-                <a:ea typeface="Aptos" pitchFamily="34" charset="-122"/>
-                <a:cs typeface="Aptos" pitchFamily="34" charset="-120"/>
-              </a:rPr>
-              <a:t>This module helps learners connect governance practices to safe AI use across surveillance, analytics,.</a:t>
+                  <a:srgbClr val="003A63"/>
+                </a:solidFill>
+                <a:latin typeface="Aptos" pitchFamily="34" charset="0"/>
+                <a:ea typeface="Aptos" pitchFamily="34" charset="-122"/>
+                <a:cs typeface="Aptos" pitchFamily="34" charset="-120"/>
+              </a:rPr>
+              <a:t>• This module helps learners connect governance practices to safe AI use across surveillance,.</a:t>
             </a:r>
             <a:endParaRPr lang="en-US" sz="2100" dirty="0"/>
           </a:p>
@@ -10175,17 +10340,17 @@
         </p:nvSpPr>
         <p:spPr>
           <a:xfrm>
-            <a:off x="8074152" y="1920240"/>
-            <a:ext cx="2825496" cy="1280160"/>
-          </a:xfrm>
-          <a:prstGeom prst="rect">
-            <a:avLst/>
-          </a:prstGeom>
-          <a:noFill/>
-          <a:ln/>
-        </p:spPr>
-        <p:txBody>
-          <a:bodyPr wrap="square" lIns="0" tIns="0" rIns="0" bIns="0" rtlCol="0" anchor="t">
+            <a:off x="8074152" y="1892808"/>
+            <a:ext cx="2825496" cy="1353312"/>
+          </a:xfrm>
+          <a:prstGeom prst="rect">
+            <a:avLst/>
+          </a:prstGeom>
+          <a:noFill/>
+          <a:ln/>
+        </p:spPr>
+        <p:txBody>
+          <a:bodyPr wrap="square" lIns="254" tIns="254" rIns="254" bIns="254" rtlCol="0" anchor="t">
             <a:normAutofit/>
           </a:bodyPr>
           <a:lstStyle/>
@@ -10194,7 +10359,7 @@
               <a:buNone/>
             </a:pPr>
             <a:r>
-              <a:rPr lang="en-US" sz="1550" dirty="0">
+              <a:rPr lang="en-US" sz="1320" dirty="0">
                 <a:solidFill>
                   <a:srgbClr val="17364A"/>
                 </a:solidFill>
@@ -10202,43 +10367,9 @@
                 <a:ea typeface="Aptos" pitchFamily="34" charset="-122"/>
                 <a:cs typeface="Aptos" pitchFamily="34" charset="-120"/>
               </a:rPr>
-              <a:t>Level: intermediate/practitioner</a:t>
-            </a:r>
-            <a:endParaRPr lang="en-US" sz="1550" dirty="0"/>
-          </a:p>
-          <a:p>
-            <a:pPr indent="0" marL="0">
-              <a:buNone/>
-            </a:pPr>
-            <a:r>
-              <a:rPr lang="en-US" sz="1550" dirty="0">
-                <a:solidFill>
-                  <a:srgbClr val="17364A"/>
-                </a:solidFill>
-                <a:latin typeface="Aptos" pitchFamily="34" charset="0"/>
-                <a:ea typeface="Aptos" pitchFamily="34" charset="-122"/>
-                <a:cs typeface="Aptos" pitchFamily="34" charset="-120"/>
-              </a:rPr>
-              <a:t>Primary track: Governance and Security Track</a:t>
-            </a:r>
-            <a:endParaRPr lang="en-US" sz="1550" dirty="0"/>
-          </a:p>
-          <a:p>
-            <a:pPr indent="0" marL="0">
-              <a:buNone/>
-            </a:pPr>
-            <a:r>
-              <a:rPr lang="en-US" sz="1550" dirty="0">
-                <a:solidFill>
-                  <a:srgbClr val="17364A"/>
-                </a:solidFill>
-                <a:latin typeface="Aptos" pitchFamily="34" charset="0"/>
-                <a:ea typeface="Aptos" pitchFamily="34" charset="-122"/>
-                <a:cs typeface="Aptos" pitchFamily="34" charset="-120"/>
-              </a:rPr>
-              <a:t>Appears in tracks: operations-data-quality</a:t>
-            </a:r>
-            <a:endParaRPr lang="en-US" sz="1550" dirty="0"/>
+              <a:t>Level: intermediate/practitioner Primary track: Governance and Security Track Appears in tracks: operations-data-quality</a:t>
+            </a:r>
+            <a:endParaRPr lang="en-US" sz="1320" dirty="0"/>
           </a:p>
         </p:txBody>
       </p:sp>
@@ -10326,13 +10457,16 @@
           <a:ln/>
         </p:spPr>
         <p:txBody>
-          <a:bodyPr wrap="square" lIns="254" tIns="254" rIns="254" bIns="254" rtlCol="0" anchor="t">
+          <a:bodyPr wrap="square" lIns="508" tIns="508" rIns="508" bIns="508" rtlCol="0" anchor="t">
             <a:normAutofit/>
           </a:bodyPr>
           <a:lstStyle/>
           <a:p>
-            <a:r>
-              <a:rPr lang="en-US" sz="1380" dirty="0">
+            <a:pPr indent="0" marL="0">
+              <a:buNone/>
+            </a:pPr>
+            <a:r>
+              <a:rPr lang="en-US" sz="1220" dirty="0">
                 <a:solidFill>
                   <a:srgbClr val="17364A"/>
                 </a:solidFill>
@@ -10342,11 +10476,14 @@
               </a:rPr>
               <a:t>Read the module for shared vocabulary and context.</a:t>
             </a:r>
-            <a:endParaRPr lang="en-US" sz="1380" dirty="0"/>
-          </a:p>
-          <a:p>
-            <a:r>
-              <a:rPr lang="en-US" sz="1380" dirty="0">
+            <a:endParaRPr lang="en-US" sz="1220" dirty="0"/>
+          </a:p>
+          <a:p>
+            <a:pPr indent="0" marL="0">
+              <a:buNone/>
+            </a:pPr>
+            <a:r>
+              <a:rPr lang="en-US" sz="1220" dirty="0">
                 <a:solidFill>
                   <a:srgbClr val="17364A"/>
                 </a:solidFill>
@@ -10356,11 +10493,14 @@
               </a:rPr>
               <a:t>Complete the practical exercise to apply the concept.</a:t>
             </a:r>
-            <a:endParaRPr lang="en-US" sz="1380" dirty="0"/>
-          </a:p>
-          <a:p>
-            <a:r>
-              <a:rPr lang="en-US" sz="1380" dirty="0">
+            <a:endParaRPr lang="en-US" sz="1220" dirty="0"/>
+          </a:p>
+          <a:p>
+            <a:pPr indent="0" marL="0">
+              <a:buNone/>
+            </a:pPr>
+            <a:r>
+              <a:rPr lang="en-US" sz="1220" dirty="0">
                 <a:solidFill>
                   <a:srgbClr val="17364A"/>
                 </a:solidFill>
@@ -10370,7 +10510,7 @@
               </a:rPr>
               <a:t>Use the notes and references for deeper review.</a:t>
             </a:r>
-            <a:endParaRPr lang="en-US" sz="1380" dirty="0"/>
+            <a:endParaRPr lang="en-US" sz="1220" dirty="0"/>
           </a:p>
         </p:txBody>
       </p:sp>
@@ -10671,49 +10811,58 @@
           <a:ln/>
         </p:spPr>
         <p:txBody>
-          <a:bodyPr wrap="square" lIns="635" tIns="635" rIns="635" bIns="635" rtlCol="0" anchor="t">
+          <a:bodyPr wrap="square" lIns="1016" tIns="1016" rIns="1016" bIns="1016" rtlCol="0" anchor="t">
             <a:normAutofit/>
           </a:bodyPr>
           <a:lstStyle/>
           <a:p>
+            <a:pPr indent="0" marL="0">
+              <a:buNone/>
+            </a:pPr>
             <a:r>
               <a:rPr lang="en-US" sz="2100" dirty="0">
                 <a:solidFill>
-                  <a:srgbClr val="17364A"/>
-                </a:solidFill>
-                <a:latin typeface="Aptos" pitchFamily="34" charset="0"/>
-                <a:ea typeface="Aptos" pitchFamily="34" charset="-122"/>
-                <a:cs typeface="Aptos" pitchFamily="34" charset="-120"/>
-              </a:rPr>
-              <a:t>1. What is the best reason to address data governance for ai-ready public health data before deployment?</a:t>
+                  <a:srgbClr val="003A63"/>
+                </a:solidFill>
+                <a:latin typeface="Aptos" pitchFamily="34" charset="0"/>
+                <a:ea typeface="Aptos" pitchFamily="34" charset="-122"/>
+                <a:cs typeface="Aptos" pitchFamily="34" charset="-120"/>
+              </a:rPr>
+              <a:t>• 1. What is the best reason to address data governance for ai-ready public health data before.</a:t>
             </a:r>
             <a:endParaRPr lang="en-US" sz="2100" dirty="0"/>
           </a:p>
           <a:p>
+            <a:pPr indent="0" marL="0">
+              <a:buNone/>
+            </a:pPr>
             <a:r>
               <a:rPr lang="en-US" sz="2100" dirty="0">
                 <a:solidFill>
-                  <a:srgbClr val="17364A"/>
-                </a:solidFill>
-                <a:latin typeface="Aptos" pitchFamily="34" charset="0"/>
-                <a:ea typeface="Aptos" pitchFamily="34" charset="-122"/>
-                <a:cs typeface="Aptos" pitchFamily="34" charset="-120"/>
-              </a:rPr>
-              <a:t>2. Which practice best supports responsible implementation?</a:t>
+                  <a:srgbClr val="003A63"/>
+                </a:solidFill>
+                <a:latin typeface="Aptos" pitchFamily="34" charset="0"/>
+                <a:ea typeface="Aptos" pitchFamily="34" charset="-122"/>
+                <a:cs typeface="Aptos" pitchFamily="34" charset="-120"/>
+              </a:rPr>
+              <a:t>• 2. Which practice best supports responsible implementation?</a:t>
             </a:r>
             <a:endParaRPr lang="en-US" sz="2100" dirty="0"/>
           </a:p>
           <a:p>
+            <a:pPr indent="0" marL="0">
+              <a:buNone/>
+            </a:pPr>
             <a:r>
               <a:rPr lang="en-US" sz="2100" dirty="0">
                 <a:solidFill>
-                  <a:srgbClr val="17364A"/>
-                </a:solidFill>
-                <a:latin typeface="Aptos" pitchFamily="34" charset="0"/>
-                <a:ea typeface="Aptos" pitchFamily="34" charset="-122"/>
-                <a:cs typeface="Aptos" pitchFamily="34" charset="-120"/>
-              </a:rPr>
-              <a:t>3. Which statement best describes a common failure mode?</a:t>
+                  <a:srgbClr val="003A63"/>
+                </a:solidFill>
+                <a:latin typeface="Aptos" pitchFamily="34" charset="0"/>
+                <a:ea typeface="Aptos" pitchFamily="34" charset="-122"/>
+                <a:cs typeface="Aptos" pitchFamily="34" charset="-120"/>
+              </a:rPr>
+              <a:t>• 3. Which statement best describes a common failure mode?</a:t>
             </a:r>
             <a:endParaRPr lang="en-US" sz="2100" dirty="0"/>
           </a:p>
@@ -10793,17 +10942,17 @@
         </p:nvSpPr>
         <p:spPr>
           <a:xfrm>
-            <a:off x="7799832" y="1828800"/>
-            <a:ext cx="3145536" cy="685800"/>
-          </a:xfrm>
-          <a:prstGeom prst="rect">
-            <a:avLst/>
-          </a:prstGeom>
-          <a:noFill/>
-          <a:ln/>
-        </p:spPr>
-        <p:txBody>
-          <a:bodyPr wrap="square" lIns="0" tIns="0" rIns="0" bIns="0" rtlCol="0" anchor="t">
+            <a:off x="7799832" y="1801368"/>
+            <a:ext cx="3145536" cy="758952"/>
+          </a:xfrm>
+          <a:prstGeom prst="rect">
+            <a:avLst/>
+          </a:prstGeom>
+          <a:noFill/>
+          <a:ln/>
+        </p:spPr>
+        <p:txBody>
+          <a:bodyPr wrap="square" lIns="254" tIns="254" rIns="254" bIns="254" rtlCol="0" anchor="t">
             <a:normAutofit/>
           </a:bodyPr>
           <a:lstStyle/>
@@ -10812,7 +10961,7 @@
               <a:buNone/>
             </a:pPr>
             <a:r>
-              <a:rPr lang="en-US" sz="1550" dirty="0">
+              <a:rPr lang="en-US" sz="1320" dirty="0">
                 <a:solidFill>
                   <a:srgbClr val="17364A"/>
                 </a:solidFill>
@@ -10822,7 +10971,7 @@
               </a:rPr>
               <a:t>1. What is the best reason to address data governance for ai-ready public health data before deployment?</a:t>
             </a:r>
-            <a:endParaRPr lang="en-US" sz="1550" dirty="0"/>
+            <a:endParaRPr lang="en-US" sz="1320" dirty="0"/>
           </a:p>
         </p:txBody>
       </p:sp>
@@ -10910,13 +11059,16 @@
           <a:ln/>
         </p:spPr>
         <p:txBody>
-          <a:bodyPr wrap="square" lIns="254" tIns="254" rIns="254" bIns="254" rtlCol="0" anchor="t">
+          <a:bodyPr wrap="square" lIns="508" tIns="508" rIns="508" bIns="508" rtlCol="0" anchor="t">
             <a:normAutofit/>
           </a:bodyPr>
           <a:lstStyle/>
           <a:p>
-            <a:r>
-              <a:rPr lang="en-US" sz="1380" dirty="0">
+            <a:pPr indent="0" marL="0">
+              <a:buNone/>
+            </a:pPr>
+            <a:r>
+              <a:rPr lang="en-US" sz="1220" dirty="0">
                 <a:solidFill>
                   <a:srgbClr val="17364A"/>
                 </a:solidFill>
@@ -10926,11 +11078,14 @@
               </a:rPr>
               <a:t>1.</a:t>
             </a:r>
-            <a:endParaRPr lang="en-US" sz="1380" dirty="0"/>
-          </a:p>
-          <a:p>
-            <a:r>
-              <a:rPr lang="en-US" sz="1380" dirty="0">
+            <a:endParaRPr lang="en-US" sz="1220" dirty="0"/>
+          </a:p>
+          <a:p>
+            <a:pPr indent="0" marL="0">
+              <a:buNone/>
+            </a:pPr>
+            <a:r>
+              <a:rPr lang="en-US" sz="1220" dirty="0">
                 <a:solidFill>
                   <a:srgbClr val="17364A"/>
                 </a:solidFill>
@@ -10938,13 +11093,16 @@
                 <a:ea typeface="Aptos" pitchFamily="34" charset="-122"/>
                 <a:cs typeface="Aptos" pitchFamily="34" charset="-120"/>
               </a:rPr>
-              <a:t>What is the best reason to address data governance for ai-ready public health data before.</a:t>
-            </a:r>
-            <a:endParaRPr lang="en-US" sz="1380" dirty="0"/>
-          </a:p>
-          <a:p>
-            <a:r>
-              <a:rPr lang="en-US" sz="1380" dirty="0">
+              <a:t>What is the best reason to address data governance for ai-ready.</a:t>
+            </a:r>
+            <a:endParaRPr lang="en-US" sz="1220" dirty="0"/>
+          </a:p>
+          <a:p>
+            <a:pPr indent="0" marL="0">
+              <a:buNone/>
+            </a:pPr>
+            <a:r>
+              <a:rPr lang="en-US" sz="1220" dirty="0">
                 <a:solidFill>
                   <a:srgbClr val="17364A"/>
                 </a:solidFill>
@@ -10954,7 +11112,7 @@
               </a:rPr>
               <a:t>2.</a:t>
             </a:r>
-            <a:endParaRPr lang="en-US" sz="1380" dirty="0"/>
+            <a:endParaRPr lang="en-US" sz="1220" dirty="0"/>
           </a:p>
         </p:txBody>
       </p:sp>
@@ -11032,17 +11190,17 @@
         </p:nvSpPr>
         <p:spPr>
           <a:xfrm>
-            <a:off x="7799832" y="5001768"/>
-            <a:ext cx="3145536" cy="502920"/>
-          </a:xfrm>
-          <a:prstGeom prst="rect">
-            <a:avLst/>
-          </a:prstGeom>
-          <a:noFill/>
-          <a:ln/>
-        </p:spPr>
-        <p:txBody>
-          <a:bodyPr wrap="square" lIns="0" tIns="0" rIns="0" bIns="0" rtlCol="0" anchor="t">
+            <a:off x="7799832" y="4974336"/>
+            <a:ext cx="3145536" cy="576072"/>
+          </a:xfrm>
+          <a:prstGeom prst="rect">
+            <a:avLst/>
+          </a:prstGeom>
+          <a:noFill/>
+          <a:ln/>
+        </p:spPr>
+        <p:txBody>
+          <a:bodyPr wrap="square" lIns="254" tIns="254" rIns="254" bIns="254" rtlCol="0" anchor="t">
             <a:normAutofit/>
           </a:bodyPr>
           <a:lstStyle/>
@@ -11051,7 +11209,7 @@
               <a:buNone/>
             </a:pPr>
             <a:r>
-              <a:rPr lang="en-US" sz="1550" dirty="0">
+              <a:rPr lang="en-US" sz="1320" dirty="0">
                 <a:solidFill>
                   <a:srgbClr val="17364A"/>
                 </a:solidFill>
@@ -11059,9 +11217,9 @@
                 <a:ea typeface="Aptos" pitchFamily="34" charset="-122"/>
                 <a:cs typeface="Aptos" pitchFamily="34" charset="-120"/>
               </a:rPr>
-              <a:t>Use the assignment to test whether you can explain the concept, apply it to a realistic public health situation, and identify what would need review before the work moves forward.</a:t>
-            </a:r>
-            <a:endParaRPr lang="en-US" sz="1550" dirty="0"/>
+              <a:t>Use the assignment to test whether you can explain the concept, apply it to a realistic public health situation, and.</a:t>
+            </a:r>
+            <a:endParaRPr lang="en-US" sz="1320" dirty="0"/>
           </a:p>
         </p:txBody>
       </p:sp>
@@ -11362,49 +11520,58 @@
           <a:ln/>
         </p:spPr>
         <p:txBody>
-          <a:bodyPr wrap="square" lIns="635" tIns="635" rIns="635" bIns="635" rtlCol="0" anchor="t">
+          <a:bodyPr wrap="square" lIns="1016" tIns="1016" rIns="1016" bIns="1016" rtlCol="0" anchor="t">
             <a:normAutofit/>
           </a:bodyPr>
           <a:lstStyle/>
           <a:p>
+            <a:pPr indent="0" marL="0">
+              <a:buNone/>
+            </a:pPr>
             <a:r>
               <a:rPr lang="en-US" sz="2100" dirty="0">
                 <a:solidFill>
-                  <a:srgbClr val="17364A"/>
-                </a:solidFill>
-                <a:latin typeface="Aptos" pitchFamily="34" charset="0"/>
-                <a:ea typeface="Aptos" pitchFamily="34" charset="-122"/>
-                <a:cs typeface="Aptos" pitchFamily="34" charset="-120"/>
-              </a:rPr>
-              <a:t>NIST AI Risk Management Framework: https://www.nist.gov/itl/ai-risk-management-framework</a:t>
+                  <a:srgbClr val="003A63"/>
+                </a:solidFill>
+                <a:latin typeface="Aptos" pitchFamily="34" charset="0"/>
+                <a:ea typeface="Aptos" pitchFamily="34" charset="-122"/>
+                <a:cs typeface="Aptos" pitchFamily="34" charset="-120"/>
+              </a:rPr>
+              <a:t>• NIST AI Risk Management Framework: https://www.nist.gov/itl/ai-risk-management-framework</a:t>
             </a:r>
             <a:endParaRPr lang="en-US" sz="2100" dirty="0"/>
           </a:p>
           <a:p>
+            <a:pPr indent="0" marL="0">
+              <a:buNone/>
+            </a:pPr>
             <a:r>
               <a:rPr lang="en-US" sz="2100" dirty="0">
                 <a:solidFill>
-                  <a:srgbClr val="17364A"/>
-                </a:solidFill>
-                <a:latin typeface="Aptos" pitchFamily="34" charset="0"/>
-                <a:ea typeface="Aptos" pitchFamily="34" charset="-122"/>
-                <a:cs typeface="Aptos" pitchFamily="34" charset="-120"/>
-              </a:rPr>
-              <a:t>NIST Generative AI Profile:.</a:t>
+                  <a:srgbClr val="003A63"/>
+                </a:solidFill>
+                <a:latin typeface="Aptos" pitchFamily="34" charset="0"/>
+                <a:ea typeface="Aptos" pitchFamily="34" charset="-122"/>
+                <a:cs typeface="Aptos" pitchFamily="34" charset="-120"/>
+              </a:rPr>
+              <a:t>• NIST Generative AI Profile:.</a:t>
             </a:r>
             <a:endParaRPr lang="en-US" sz="2100" dirty="0"/>
           </a:p>
           <a:p>
+            <a:pPr indent="0" marL="0">
+              <a:buNone/>
+            </a:pPr>
             <a:r>
               <a:rPr lang="en-US" sz="2100" dirty="0">
                 <a:solidFill>
-                  <a:srgbClr val="17364A"/>
-                </a:solidFill>
-                <a:latin typeface="Aptos" pitchFamily="34" charset="0"/>
-                <a:ea typeface="Aptos" pitchFamily="34" charset="-122"/>
-                <a:cs typeface="Aptos" pitchFamily="34" charset="-120"/>
-              </a:rPr>
-              <a:t>CDC Public Health Data Strategy and Data Modernization resources:.</a:t>
+                  <a:srgbClr val="003A63"/>
+                </a:solidFill>
+                <a:latin typeface="Aptos" pitchFamily="34" charset="0"/>
+                <a:ea typeface="Aptos" pitchFamily="34" charset="-122"/>
+                <a:cs typeface="Aptos" pitchFamily="34" charset="-120"/>
+              </a:rPr>
+              <a:t>• CDC Public Health Data Strategy and Data Modernization resources:.</a:t>
             </a:r>
             <a:endParaRPr lang="en-US" sz="2100" dirty="0"/>
           </a:p>
@@ -11484,17 +11651,17 @@
         </p:nvSpPr>
         <p:spPr>
           <a:xfrm>
-            <a:off x="7799832" y="1828800"/>
-            <a:ext cx="3145536" cy="685800"/>
-          </a:xfrm>
-          <a:prstGeom prst="rect">
-            <a:avLst/>
-          </a:prstGeom>
-          <a:noFill/>
-          <a:ln/>
-        </p:spPr>
-        <p:txBody>
-          <a:bodyPr wrap="square" lIns="0" tIns="0" rIns="0" bIns="0" rtlCol="0" anchor="t">
+            <a:off x="7799832" y="1801368"/>
+            <a:ext cx="3145536" cy="758952"/>
+          </a:xfrm>
+          <a:prstGeom prst="rect">
+            <a:avLst/>
+          </a:prstGeom>
+          <a:noFill/>
+          <a:ln/>
+        </p:spPr>
+        <p:txBody>
+          <a:bodyPr wrap="square" lIns="254" tIns="254" rIns="254" bIns="254" rtlCol="0" anchor="t">
             <a:normAutofit/>
           </a:bodyPr>
           <a:lstStyle/>
@@ -11503,7 +11670,7 @@
               <a:buNone/>
             </a:pPr>
             <a:r>
-              <a:rPr lang="en-US" sz="1550" dirty="0">
+              <a:rPr lang="en-US" sz="1320" dirty="0">
                 <a:solidFill>
                   <a:srgbClr val="17364A"/>
                 </a:solidFill>
@@ -11513,7 +11680,7 @@
               </a:rPr>
               <a:t>NIST AI Risk Management Framework: https://www.nist.gov/itl/ai-risk-management-framework</a:t>
             </a:r>
-            <a:endParaRPr lang="en-US" sz="1550" dirty="0"/>
+            <a:endParaRPr lang="en-US" sz="1320" dirty="0"/>
           </a:p>
         </p:txBody>
       </p:sp>
@@ -11601,13 +11768,16 @@
           <a:ln/>
         </p:spPr>
         <p:txBody>
-          <a:bodyPr wrap="square" lIns="254" tIns="254" rIns="254" bIns="254" rtlCol="0" anchor="t">
+          <a:bodyPr wrap="square" lIns="508" tIns="508" rIns="508" bIns="508" rtlCol="0" anchor="t">
             <a:normAutofit/>
           </a:bodyPr>
           <a:lstStyle/>
           <a:p>
-            <a:r>
-              <a:rPr lang="en-US" sz="1380" dirty="0">
+            <a:pPr indent="0" marL="0">
+              <a:buNone/>
+            </a:pPr>
+            <a:r>
+              <a:rPr lang="en-US" sz="1220" dirty="0">
                 <a:solidFill>
                   <a:srgbClr val="17364A"/>
                 </a:solidFill>
@@ -11615,13 +11785,16 @@
                 <a:ea typeface="Aptos" pitchFamily="34" charset="-122"/>
                 <a:cs typeface="Aptos" pitchFamily="34" charset="-120"/>
               </a:rPr>
-              <a:t>OWASP Top 10 for LLM Applications, when security or AI integrations are relevant</a:t>
-            </a:r>
-            <a:endParaRPr lang="en-US" sz="1380" dirty="0"/>
-          </a:p>
-          <a:p>
-            <a:r>
-              <a:rPr lang="en-US" sz="1380" dirty="0">
+              <a:t>OWASP Top 10 for LLM Applications, when security or AI.</a:t>
+            </a:r>
+            <a:endParaRPr lang="en-US" sz="1220" dirty="0"/>
+          </a:p>
+          <a:p>
+            <a:pPr indent="0" marL="0">
+              <a:buNone/>
+            </a:pPr>
+            <a:r>
+              <a:rPr lang="en-US" sz="1220" dirty="0">
                 <a:solidFill>
                   <a:srgbClr val="17364A"/>
                 </a:solidFill>
@@ -11629,9 +11802,9 @@
                 <a:ea typeface="Aptos" pitchFamily="34" charset="-122"/>
                 <a:cs typeface="Aptos" pitchFamily="34" charset="-120"/>
               </a:rPr>
-              <a:t>Agency privacy, cybersecurity, data governance, procurement, and records management policies</a:t>
-            </a:r>
-            <a:endParaRPr lang="en-US" sz="1380" dirty="0"/>
+              <a:t>Agency privacy, cybersecurity, data governance, procurement, and.</a:t>
+            </a:r>
+            <a:endParaRPr lang="en-US" sz="1220" dirty="0"/>
           </a:p>
         </p:txBody>
       </p:sp>
@@ -11709,17 +11882,17 @@
         </p:nvSpPr>
         <p:spPr>
           <a:xfrm>
-            <a:off x="7799832" y="5001768"/>
-            <a:ext cx="3145536" cy="502920"/>
-          </a:xfrm>
-          <a:prstGeom prst="rect">
-            <a:avLst/>
-          </a:prstGeom>
-          <a:noFill/>
-          <a:ln/>
-        </p:spPr>
-        <p:txBody>
-          <a:bodyPr wrap="square" lIns="0" tIns="0" rIns="0" bIns="0" rtlCol="0" anchor="t">
+            <a:off x="7799832" y="4974336"/>
+            <a:ext cx="3145536" cy="576072"/>
+          </a:xfrm>
+          <a:prstGeom prst="rect">
+            <a:avLst/>
+          </a:prstGeom>
+          <a:noFill/>
+          <a:ln/>
+        </p:spPr>
+        <p:txBody>
+          <a:bodyPr wrap="square" lIns="254" tIns="254" rIns="254" bIns="254" rtlCol="0" anchor="t">
             <a:normAutofit/>
           </a:bodyPr>
           <a:lstStyle/>
@@ -11728,7 +11901,7 @@
               <a:buNone/>
             </a:pPr>
             <a:r>
-              <a:rPr lang="en-US" sz="1550" dirty="0">
+              <a:rPr lang="en-US" sz="1320" dirty="0">
                 <a:solidFill>
                   <a:srgbClr val="17364A"/>
                 </a:solidFill>
@@ -11736,9 +11909,9 @@
                 <a:ea typeface="Aptos" pitchFamily="34" charset="-122"/>
                 <a:cs typeface="Aptos" pitchFamily="34" charset="-120"/>
               </a:rPr>
-              <a:t>Translate this concept into clear decision rights, review steps, documentation expectations, and escalation paths before an AI-supported workflow is approved.</a:t>
-            </a:r>
-            <a:endParaRPr lang="en-US" sz="1550" dirty="0"/>
+              <a:t>Translate this concept into clear decision rights, review steps, documentation expectations, and escalation paths before.</a:t>
+            </a:r>
+            <a:endParaRPr lang="en-US" sz="1320" dirty="0"/>
           </a:p>
         </p:txBody>
       </p:sp>
@@ -12039,63 +12212,75 @@
           <a:ln/>
         </p:spPr>
         <p:txBody>
-          <a:bodyPr wrap="square" lIns="635" tIns="635" rIns="635" bIns="635" rtlCol="0" anchor="t">
+          <a:bodyPr wrap="square" lIns="1016" tIns="1016" rIns="1016" bIns="1016" rtlCol="0" anchor="t">
             <a:normAutofit/>
           </a:bodyPr>
           <a:lstStyle/>
           <a:p>
+            <a:pPr indent="0" marL="0">
+              <a:buNone/>
+            </a:pPr>
             <a:r>
               <a:rPr lang="en-US" sz="1900" dirty="0">
                 <a:solidFill>
-                  <a:srgbClr val="17364A"/>
-                </a:solidFill>
-                <a:latin typeface="Aptos" pitchFamily="34" charset="0"/>
-                <a:ea typeface="Aptos" pitchFamily="34" charset="-122"/>
-                <a:cs typeface="Aptos" pitchFamily="34" charset="-120"/>
-              </a:rPr>
-              <a:t>Play 11: Build and Deploy AI Solutions - This lesson informs Play 11 by helping learners connect the lesson.</a:t>
+                  <a:srgbClr val="003A63"/>
+                </a:solidFill>
+                <a:latin typeface="Aptos" pitchFamily="34" charset="0"/>
+                <a:ea typeface="Aptos" pitchFamily="34" charset="-122"/>
+                <a:cs typeface="Aptos" pitchFamily="34" charset="-120"/>
+              </a:rPr>
+              <a:t>• Play 11: Build and Deploy AI Solutions - This lesson informs Play 11 by helping learners.</a:t>
             </a:r>
             <a:endParaRPr lang="en-US" sz="1900" dirty="0"/>
           </a:p>
           <a:p>
+            <a:pPr indent="0" marL="0">
+              <a:buNone/>
+            </a:pPr>
             <a:r>
               <a:rPr lang="en-US" sz="1900" dirty="0">
                 <a:solidFill>
-                  <a:srgbClr val="17364A"/>
-                </a:solidFill>
-                <a:latin typeface="Aptos" pitchFamily="34" charset="0"/>
-                <a:ea typeface="Aptos" pitchFamily="34" charset="-122"/>
-                <a:cs typeface="Aptos" pitchFamily="34" charset="-120"/>
-              </a:rPr>
-              <a:t>Play 2: Readiness Assessment - This lesson informs Play 2 by helping learners connect the lesson topic to.</a:t>
+                  <a:srgbClr val="003A63"/>
+                </a:solidFill>
+                <a:latin typeface="Aptos" pitchFamily="34" charset="0"/>
+                <a:ea typeface="Aptos" pitchFamily="34" charset="-122"/>
+                <a:cs typeface="Aptos" pitchFamily="34" charset="-120"/>
+              </a:rPr>
+              <a:t>• Play 2: Readiness Assessment - This lesson informs Play 2 by helping learners connect the.</a:t>
             </a:r>
             <a:endParaRPr lang="en-US" sz="1900" dirty="0"/>
           </a:p>
           <a:p>
+            <a:pPr indent="0" marL="0">
+              <a:buNone/>
+            </a:pPr>
             <a:r>
               <a:rPr lang="en-US" sz="1900" dirty="0">
                 <a:solidFill>
-                  <a:srgbClr val="17364A"/>
-                </a:solidFill>
-                <a:latin typeface="Aptos" pitchFamily="34" charset="0"/>
-                <a:ea typeface="Aptos" pitchFamily="34" charset="-122"/>
-                <a:cs typeface="Aptos" pitchFamily="34" charset="-120"/>
-              </a:rPr>
-              <a:t>Play 3: Establish AI Governance - This lesson informs Play 3 by helping learners connect the lesson topic to.</a:t>
+                  <a:srgbClr val="003A63"/>
+                </a:solidFill>
+                <a:latin typeface="Aptos" pitchFamily="34" charset="0"/>
+                <a:ea typeface="Aptos" pitchFamily="34" charset="-122"/>
+                <a:cs typeface="Aptos" pitchFamily="34" charset="-120"/>
+              </a:rPr>
+              <a:t>• Play 3: Establish AI Governance - This lesson informs Play 3 by helping learners connect the.</a:t>
             </a:r>
             <a:endParaRPr lang="en-US" sz="1900" dirty="0"/>
           </a:p>
           <a:p>
+            <a:pPr indent="0" marL="0">
+              <a:buNone/>
+            </a:pPr>
             <a:r>
               <a:rPr lang="en-US" sz="1900" dirty="0">
                 <a:solidFill>
-                  <a:srgbClr val="17364A"/>
-                </a:solidFill>
-                <a:latin typeface="Aptos" pitchFamily="34" charset="0"/>
-                <a:ea typeface="Aptos" pitchFamily="34" charset="-122"/>
-                <a:cs typeface="Aptos" pitchFamily="34" charset="-120"/>
-              </a:rPr>
-              <a:t>Play 1: Vision &amp; Guardrails - This lesson informs Play 1 by helping learners connect the lesson topic to.</a:t>
+                  <a:srgbClr val="003A63"/>
+                </a:solidFill>
+                <a:latin typeface="Aptos" pitchFamily="34" charset="0"/>
+                <a:ea typeface="Aptos" pitchFamily="34" charset="-122"/>
+                <a:cs typeface="Aptos" pitchFamily="34" charset="-120"/>
+              </a:rPr>
+              <a:t>• Play 1: Vision &amp; Guardrails - This lesson informs Play 1 by helping learners connect the.</a:t>
             </a:r>
             <a:endParaRPr lang="en-US" sz="1900" dirty="0"/>
           </a:p>
@@ -12175,17 +12360,17 @@
         </p:nvSpPr>
         <p:spPr>
           <a:xfrm>
-            <a:off x="8211312" y="1920240"/>
-            <a:ext cx="2734056" cy="1463040"/>
-          </a:xfrm>
-          <a:prstGeom prst="rect">
-            <a:avLst/>
-          </a:prstGeom>
-          <a:noFill/>
-          <a:ln/>
-        </p:spPr>
-        <p:txBody>
-          <a:bodyPr wrap="square" lIns="0" tIns="0" rIns="0" bIns="0" rtlCol="0" anchor="t">
+            <a:off x="8211312" y="1892808"/>
+            <a:ext cx="2734056" cy="1536192"/>
+          </a:xfrm>
+          <a:prstGeom prst="rect">
+            <a:avLst/>
+          </a:prstGeom>
+          <a:noFill/>
+          <a:ln/>
+        </p:spPr>
+        <p:txBody>
+          <a:bodyPr wrap="square" lIns="254" tIns="254" rIns="254" bIns="254" rtlCol="0" anchor="t">
             <a:normAutofit/>
           </a:bodyPr>
           <a:lstStyle/>
@@ -12194,7 +12379,7 @@
               <a:buNone/>
             </a:pPr>
             <a:r>
-              <a:rPr lang="en-US" sz="1550" dirty="0">
+              <a:rPr lang="en-US" sz="1320" dirty="0">
                 <a:solidFill>
                   <a:srgbClr val="17364A"/>
                 </a:solidFill>
@@ -12202,9 +12387,9 @@
                 <a:ea typeface="Aptos" pitchFamily="34" charset="-122"/>
                 <a:cs typeface="Aptos" pitchFamily="34" charset="-120"/>
               </a:rPr>
-              <a:t>Use the related plays to identify decisions, participants, timing, approvals, and documentation needed for responsible implementation.</a:t>
-            </a:r>
-            <a:endParaRPr lang="en-US" sz="1550" dirty="0"/>
+              <a:t>Use the related plays to identify decisions, participants, timing, approvals, and documentation needed for responsible.</a:t>
+            </a:r>
+            <a:endParaRPr lang="en-US" sz="1320" dirty="0"/>
           </a:p>
         </p:txBody>
       </p:sp>
@@ -12292,13 +12477,16 @@
           <a:ln/>
         </p:spPr>
         <p:txBody>
-          <a:bodyPr wrap="square" lIns="254" tIns="254" rIns="254" bIns="254" rtlCol="0" anchor="t">
+          <a:bodyPr wrap="square" lIns="508" tIns="508" rIns="508" bIns="508" rtlCol="0" anchor="t">
             <a:normAutofit/>
           </a:bodyPr>
           <a:lstStyle/>
           <a:p>
-            <a:r>
-              <a:rPr lang="en-US" sz="1380" dirty="0">
+            <a:pPr indent="0" marL="0">
+              <a:buNone/>
+            </a:pPr>
+            <a:r>
+              <a:rPr lang="en-US" sz="1220" dirty="0">
                 <a:solidFill>
                   <a:srgbClr val="17364A"/>
                 </a:solidFill>
@@ -12308,11 +12496,14 @@
               </a:rPr>
               <a:t>Locate the decision point in the playbook sequence.</a:t>
             </a:r>
-            <a:endParaRPr lang="en-US" sz="1380" dirty="0"/>
-          </a:p>
-          <a:p>
-            <a:r>
-              <a:rPr lang="en-US" sz="1380" dirty="0">
+            <a:endParaRPr lang="en-US" sz="1220" dirty="0"/>
+          </a:p>
+          <a:p>
+            <a:pPr indent="0" marL="0">
+              <a:buNone/>
+            </a:pPr>
+            <a:r>
+              <a:rPr lang="en-US" sz="1220" dirty="0">
                 <a:solidFill>
                   <a:srgbClr val="17364A"/>
                 </a:solidFill>
@@ -12322,11 +12513,14 @@
               </a:rPr>
               <a:t>Identify who should participate in the work.</a:t>
             </a:r>
-            <a:endParaRPr lang="en-US" sz="1380" dirty="0"/>
-          </a:p>
-          <a:p>
-            <a:r>
-              <a:rPr lang="en-US" sz="1380" dirty="0">
+            <a:endParaRPr lang="en-US" sz="1220" dirty="0"/>
+          </a:p>
+          <a:p>
+            <a:pPr indent="0" marL="0">
+              <a:buNone/>
+            </a:pPr>
+            <a:r>
+              <a:rPr lang="en-US" sz="1220" dirty="0">
                 <a:solidFill>
                   <a:srgbClr val="17364A"/>
                 </a:solidFill>
@@ -12336,7 +12530,7 @@
               </a:rPr>
               <a:t>Document the review, approval, or implementation step.</a:t>
             </a:r>
-            <a:endParaRPr lang="en-US" sz="1380" dirty="0"/>
+            <a:endParaRPr lang="en-US" sz="1220" dirty="0"/>
           </a:p>
         </p:txBody>
       </p:sp>
@@ -12637,63 +12831,75 @@
           <a:ln/>
         </p:spPr>
         <p:txBody>
-          <a:bodyPr wrap="square" lIns="635" tIns="635" rIns="635" bIns="635" rtlCol="0" anchor="t">
+          <a:bodyPr wrap="square" lIns="1016" tIns="1016" rIns="1016" bIns="1016" rtlCol="0" anchor="t">
             <a:normAutofit/>
           </a:bodyPr>
           <a:lstStyle/>
           <a:p>
+            <a:pPr indent="0" marL="0">
+              <a:buNone/>
+            </a:pPr>
             <a:r>
               <a:rPr lang="en-US" sz="1850" dirty="0">
                 <a:solidFill>
-                  <a:srgbClr val="17364A"/>
-                </a:solidFill>
-                <a:latin typeface="Aptos" pitchFamily="34" charset="0"/>
-                <a:ea typeface="Aptos" pitchFamily="34" charset="-122"/>
-                <a:cs typeface="Aptos" pitchFamily="34" charset="-120"/>
-              </a:rPr>
-              <a:t>Tool 4: AI Policy Landscape Scan (Worksheet) - Use AI Policy Landscape Scan to translate this lesson into a.</a:t>
+                  <a:srgbClr val="003A63"/>
+                </a:solidFill>
+                <a:latin typeface="Aptos" pitchFamily="34" charset="0"/>
+                <a:ea typeface="Aptos" pitchFamily="34" charset="-122"/>
+                <a:cs typeface="Aptos" pitchFamily="34" charset="-120"/>
+              </a:rPr>
+              <a:t>• Tool 4: AI Policy Landscape Scan (Worksheet) - Use AI Policy Landscape Scan to translate this.</a:t>
             </a:r>
             <a:endParaRPr lang="en-US" sz="1850" dirty="0"/>
           </a:p>
           <a:p>
+            <a:pPr indent="0" marL="0">
+              <a:buNone/>
+            </a:pPr>
             <a:r>
               <a:rPr lang="en-US" sz="1850" dirty="0">
                 <a:solidFill>
-                  <a:srgbClr val="17364A"/>
-                </a:solidFill>
-                <a:latin typeface="Aptos" pitchFamily="34" charset="0"/>
-                <a:ea typeface="Aptos" pitchFamily="34" charset="-122"/>
-                <a:cs typeface="Aptos" pitchFamily="34" charset="-120"/>
-              </a:rPr>
-              <a:t>Tool 5: AI Environmental and Resource Impact Review (Checklist) - Use this tool to complete or strengthen.</a:t>
+                  <a:srgbClr val="003A63"/>
+                </a:solidFill>
+                <a:latin typeface="Aptos" pitchFamily="34" charset="0"/>
+                <a:ea typeface="Aptos" pitchFamily="34" charset="-122"/>
+                <a:cs typeface="Aptos" pitchFamily="34" charset="-120"/>
+              </a:rPr>
+              <a:t>• Tool 5: AI Environmental and Resource Impact Review (Checklist) - Use this tool to complete or.</a:t>
             </a:r>
             <a:endParaRPr lang="en-US" sz="1850" dirty="0"/>
           </a:p>
           <a:p>
+            <a:pPr indent="0" marL="0">
+              <a:buNone/>
+            </a:pPr>
             <a:r>
               <a:rPr lang="en-US" sz="1850" dirty="0">
                 <a:solidFill>
-                  <a:srgbClr val="17364A"/>
-                </a:solidFill>
-                <a:latin typeface="Aptos" pitchFamily="34" charset="0"/>
-                <a:ea typeface="Aptos" pitchFamily="34" charset="-122"/>
-                <a:cs typeface="Aptos" pitchFamily="34" charset="-120"/>
-              </a:rPr>
-              <a:t>Tool 6: Human-Centered AI Decision Rule Checklist (Checklist) - Use Human-Centered AI Decision Rule.</a:t>
+                  <a:srgbClr val="003A63"/>
+                </a:solidFill>
+                <a:latin typeface="Aptos" pitchFamily="34" charset="0"/>
+                <a:ea typeface="Aptos" pitchFamily="34" charset="-122"/>
+                <a:cs typeface="Aptos" pitchFamily="34" charset="-120"/>
+              </a:rPr>
+              <a:t>• Tool 6: Human-Centered AI Decision Rule Checklist (Checklist) - Use Human-Centered AI Decision.</a:t>
             </a:r>
             <a:endParaRPr lang="en-US" sz="1850" dirty="0"/>
           </a:p>
           <a:p>
+            <a:pPr indent="0" marL="0">
+              <a:buNone/>
+            </a:pPr>
             <a:r>
               <a:rPr lang="en-US" sz="1850" dirty="0">
                 <a:solidFill>
-                  <a:srgbClr val="17364A"/>
-                </a:solidFill>
-                <a:latin typeface="Aptos" pitchFamily="34" charset="0"/>
-                <a:ea typeface="Aptos" pitchFamily="34" charset="-122"/>
-                <a:cs typeface="Aptos" pitchFamily="34" charset="-120"/>
-              </a:rPr>
-              <a:t>Tool 8: AI Project Charter (Planning) - Use AI Project Charter to translate this lesson into a documented.</a:t>
+                  <a:srgbClr val="003A63"/>
+                </a:solidFill>
+                <a:latin typeface="Aptos" pitchFamily="34" charset="0"/>
+                <a:ea typeface="Aptos" pitchFamily="34" charset="-122"/>
+                <a:cs typeface="Aptos" pitchFamily="34" charset="-120"/>
+              </a:rPr>
+              <a:t>• Tool 8: AI Project Charter (Planning) - Use AI Project Charter to translate this lesson into a.</a:t>
             </a:r>
             <a:endParaRPr lang="en-US" sz="1850" dirty="0"/>
           </a:p>
@@ -12773,17 +12979,17 @@
         </p:nvSpPr>
         <p:spPr>
           <a:xfrm>
-            <a:off x="8211312" y="1920240"/>
-            <a:ext cx="2734056" cy="1463040"/>
-          </a:xfrm>
-          <a:prstGeom prst="rect">
-            <a:avLst/>
-          </a:prstGeom>
-          <a:noFill/>
-          <a:ln/>
-        </p:spPr>
-        <p:txBody>
-          <a:bodyPr wrap="square" lIns="0" tIns="0" rIns="0" bIns="0" rtlCol="0" anchor="t">
+            <a:off x="8211312" y="1892808"/>
+            <a:ext cx="2734056" cy="1536192"/>
+          </a:xfrm>
+          <a:prstGeom prst="rect">
+            <a:avLst/>
+          </a:prstGeom>
+          <a:noFill/>
+          <a:ln/>
+        </p:spPr>
+        <p:txBody>
+          <a:bodyPr wrap="square" lIns="254" tIns="254" rIns="254" bIns="254" rtlCol="0" anchor="t">
             <a:normAutofit/>
           </a:bodyPr>
           <a:lstStyle/>
@@ -12792,7 +12998,7 @@
               <a:buNone/>
             </a:pPr>
             <a:r>
-              <a:rPr lang="en-US" sz="1550" dirty="0">
+              <a:rPr lang="en-US" sz="1320" dirty="0">
                 <a:solidFill>
                   <a:srgbClr val="17364A"/>
                 </a:solidFill>
@@ -12800,9 +13006,9 @@
                 <a:ea typeface="Aptos" pitchFamily="34" charset="-122"/>
                 <a:cs typeface="Aptos" pitchFamily="34" charset="-120"/>
               </a:rPr>
-              <a:t>Use linked tools when your department needs a structured worksheet, template, checklist, review process, or documentation artifact.</a:t>
-            </a:r>
-            <a:endParaRPr lang="en-US" sz="1550" dirty="0"/>
+              <a:t>Use linked tools when your department needs a structured worksheet, template, checklist, review process, or.</a:t>
+            </a:r>
+            <a:endParaRPr lang="en-US" sz="1320" dirty="0"/>
           </a:p>
         </p:txBody>
       </p:sp>
@@ -12890,13 +13096,16 @@
           <a:ln/>
         </p:spPr>
         <p:txBody>
-          <a:bodyPr wrap="square" lIns="254" tIns="254" rIns="254" bIns="254" rtlCol="0" anchor="t">
+          <a:bodyPr wrap="square" lIns="508" tIns="508" rIns="508" bIns="508" rtlCol="0" anchor="t">
             <a:normAutofit/>
           </a:bodyPr>
           <a:lstStyle/>
           <a:p>
-            <a:r>
-              <a:rPr lang="en-US" sz="1380" dirty="0">
+            <a:pPr indent="0" marL="0">
+              <a:buNone/>
+            </a:pPr>
+            <a:r>
+              <a:rPr lang="en-US" sz="1220" dirty="0">
                 <a:solidFill>
                   <a:srgbClr val="17364A"/>
                 </a:solidFill>
@@ -12906,11 +13115,14 @@
               </a:rPr>
               <a:t>Use a tool when no comparable local process exists.</a:t>
             </a:r>
-            <a:endParaRPr lang="en-US" sz="1380" dirty="0"/>
-          </a:p>
-          <a:p>
-            <a:r>
-              <a:rPr lang="en-US" sz="1380" dirty="0">
+            <a:endParaRPr lang="en-US" sz="1220" dirty="0"/>
+          </a:p>
+          <a:p>
+            <a:pPr indent="0" marL="0">
+              <a:buNone/>
+            </a:pPr>
+            <a:r>
+              <a:rPr lang="en-US" sz="1220" dirty="0">
                 <a:solidFill>
                   <a:srgbClr val="17364A"/>
                 </a:solidFill>
@@ -12918,13 +13130,16 @@
                 <a:ea typeface="Aptos" pitchFamily="34" charset="-122"/>
                 <a:cs typeface="Aptos" pitchFamily="34" charset="-120"/>
               </a:rPr>
-              <a:t>Adapt existing department templates when they already fit the purpose.</a:t>
-            </a:r>
-            <a:endParaRPr lang="en-US" sz="1380" dirty="0"/>
-          </a:p>
-          <a:p>
-            <a:r>
-              <a:rPr lang="en-US" sz="1380" dirty="0">
+              <a:t>Adapt existing department templates when they already fit the.</a:t>
+            </a:r>
+            <a:endParaRPr lang="en-US" sz="1220" dirty="0"/>
+          </a:p>
+          <a:p>
+            <a:pPr indent="0" marL="0">
+              <a:buNone/>
+            </a:pPr>
+            <a:r>
+              <a:rPr lang="en-US" sz="1220" dirty="0">
                 <a:solidFill>
                   <a:srgbClr val="17364A"/>
                 </a:solidFill>
@@ -12934,7 +13149,7 @@
               </a:rPr>
               <a:t>Save the completed artifact as evidence of the decision.</a:t>
             </a:r>
-            <a:endParaRPr lang="en-US" sz="1380" dirty="0"/>
+            <a:endParaRPr lang="en-US" sz="1220" dirty="0"/>
           </a:p>
         </p:txBody>
       </p:sp>
@@ -13235,49 +13450,58 @@
           <a:ln/>
         </p:spPr>
         <p:txBody>
-          <a:bodyPr wrap="square" lIns="635" tIns="635" rIns="635" bIns="635" rtlCol="0" anchor="t">
+          <a:bodyPr wrap="square" lIns="1016" tIns="1016" rIns="1016" bIns="1016" rtlCol="0" anchor="t">
             <a:normAutofit/>
           </a:bodyPr>
           <a:lstStyle/>
           <a:p>
+            <a:pPr indent="0" marL="0">
+              <a:buNone/>
+            </a:pPr>
             <a:r>
               <a:rPr lang="en-US" sz="2100" dirty="0">
                 <a:solidFill>
-                  <a:srgbClr val="17364A"/>
-                </a:solidFill>
-                <a:latin typeface="Aptos" pitchFamily="34" charset="0"/>
-                <a:ea typeface="Aptos" pitchFamily="34" charset="-122"/>
-                <a:cs typeface="Aptos" pitchFamily="34" charset="-120"/>
-              </a:rPr>
-              <a:t>Explain the purpose of data governance for ai-ready public health data in public health AI work.</a:t>
+                  <a:srgbClr val="003A63"/>
+                </a:solidFill>
+                <a:latin typeface="Aptos" pitchFamily="34" charset="0"/>
+                <a:ea typeface="Aptos" pitchFamily="34" charset="-122"/>
+                <a:cs typeface="Aptos" pitchFamily="34" charset="-120"/>
+              </a:rPr>
+              <a:t>• Explain the purpose of data governance for ai-ready public health data in public health AI work.</a:t>
             </a:r>
             <a:endParaRPr lang="en-US" sz="2100" dirty="0"/>
           </a:p>
           <a:p>
+            <a:pPr indent="0" marL="0">
+              <a:buNone/>
+            </a:pPr>
             <a:r>
               <a:rPr lang="en-US" sz="2100" dirty="0">
                 <a:solidFill>
-                  <a:srgbClr val="17364A"/>
-                </a:solidFill>
-                <a:latin typeface="Aptos" pitchFamily="34" charset="0"/>
-                <a:ea typeface="Aptos" pitchFamily="34" charset="-122"/>
-                <a:cs typeface="Aptos" pitchFamily="34" charset="-120"/>
-              </a:rPr>
-              <a:t>Identify the technical, operational, privacy, security, equity, and governance issues associated with.</a:t>
+                  <a:srgbClr val="003A63"/>
+                </a:solidFill>
+                <a:latin typeface="Aptos" pitchFamily="34" charset="0"/>
+                <a:ea typeface="Aptos" pitchFamily="34" charset="-122"/>
+                <a:cs typeface="Aptos" pitchFamily="34" charset="-120"/>
+              </a:rPr>
+              <a:t>• Identify the technical, operational, privacy, security, equity, and governance issues.</a:t>
             </a:r>
             <a:endParaRPr lang="en-US" sz="2100" dirty="0"/>
           </a:p>
           <a:p>
+            <a:pPr indent="0" marL="0">
+              <a:buNone/>
+            </a:pPr>
             <a:r>
               <a:rPr lang="en-US" sz="2100" dirty="0">
                 <a:solidFill>
-                  <a:srgbClr val="17364A"/>
-                </a:solidFill>
-                <a:latin typeface="Aptos" pitchFamily="34" charset="0"/>
-                <a:ea typeface="Aptos" pitchFamily="34" charset="-122"/>
-                <a:cs typeface="Aptos" pitchFamily="34" charset="-120"/>
-              </a:rPr>
-              <a:t>Apply the topic to a real or realistic public health workflow, system, or implementation scenario.</a:t>
+                  <a:srgbClr val="003A63"/>
+                </a:solidFill>
+                <a:latin typeface="Aptos" pitchFamily="34" charset="0"/>
+                <a:ea typeface="Aptos" pitchFamily="34" charset="-122"/>
+                <a:cs typeface="Aptos" pitchFamily="34" charset="-120"/>
+              </a:rPr>
+              <a:t>• Apply the topic to a real or realistic public health workflow, system, or implementation.</a:t>
             </a:r>
             <a:endParaRPr lang="en-US" sz="2100" dirty="0"/>
           </a:p>
@@ -13357,17 +13581,17 @@
         </p:nvSpPr>
         <p:spPr>
           <a:xfrm>
-            <a:off x="7799832" y="1828800"/>
-            <a:ext cx="3145536" cy="685800"/>
-          </a:xfrm>
-          <a:prstGeom prst="rect">
-            <a:avLst/>
-          </a:prstGeom>
-          <a:noFill/>
-          <a:ln/>
-        </p:spPr>
-        <p:txBody>
-          <a:bodyPr wrap="square" lIns="0" tIns="0" rIns="0" bIns="0" rtlCol="0" anchor="t">
+            <a:off x="7799832" y="1801368"/>
+            <a:ext cx="3145536" cy="758952"/>
+          </a:xfrm>
+          <a:prstGeom prst="rect">
+            <a:avLst/>
+          </a:prstGeom>
+          <a:noFill/>
+          <a:ln/>
+        </p:spPr>
+        <p:txBody>
+          <a:bodyPr wrap="square" lIns="254" tIns="254" rIns="254" bIns="254" rtlCol="0" anchor="t">
             <a:normAutofit/>
           </a:bodyPr>
           <a:lstStyle/>
@@ -13376,7 +13600,7 @@
               <a:buNone/>
             </a:pPr>
             <a:r>
-              <a:rPr lang="en-US" sz="1550" dirty="0">
+              <a:rPr lang="en-US" sz="1320" dirty="0">
                 <a:solidFill>
                   <a:srgbClr val="17364A"/>
                 </a:solidFill>
@@ -13386,7 +13610,7 @@
               </a:rPr>
               <a:t>Explain the purpose of data governance for ai-ready public health data in public health AI work.</a:t>
             </a:r>
-            <a:endParaRPr lang="en-US" sz="1550" dirty="0"/>
+            <a:endParaRPr lang="en-US" sz="1320" dirty="0"/>
           </a:p>
         </p:txBody>
       </p:sp>
@@ -13474,13 +13698,16 @@
           <a:ln/>
         </p:spPr>
         <p:txBody>
-          <a:bodyPr wrap="square" lIns="254" tIns="254" rIns="254" bIns="254" rtlCol="0" anchor="t">
+          <a:bodyPr wrap="square" lIns="508" tIns="508" rIns="508" bIns="508" rtlCol="0" anchor="t">
             <a:normAutofit/>
           </a:bodyPr>
           <a:lstStyle/>
           <a:p>
-            <a:r>
-              <a:rPr lang="en-US" sz="1380" dirty="0">
+            <a:pPr indent="0" marL="0">
+              <a:buNone/>
+            </a:pPr>
+            <a:r>
+              <a:rPr lang="en-US" sz="1220" dirty="0">
                 <a:solidFill>
                   <a:srgbClr val="17364A"/>
                 </a:solidFill>
@@ -13488,13 +13715,16 @@
                 <a:ea typeface="Aptos" pitchFamily="34" charset="-122"/>
                 <a:cs typeface="Aptos" pitchFamily="34" charset="-120"/>
               </a:rPr>
-              <a:t>Identify the technical, operational, privacy, security, equity, and governance issues.</a:t>
-            </a:r>
-            <a:endParaRPr lang="en-US" sz="1380" dirty="0"/>
-          </a:p>
-          <a:p>
-            <a:r>
-              <a:rPr lang="en-US" sz="1380" dirty="0">
+              <a:t>Identify the technical, operational, privacy, security, equity,.</a:t>
+            </a:r>
+            <a:endParaRPr lang="en-US" sz="1220" dirty="0"/>
+          </a:p>
+          <a:p>
+            <a:pPr indent="0" marL="0">
+              <a:buNone/>
+            </a:pPr>
+            <a:r>
+              <a:rPr lang="en-US" sz="1220" dirty="0">
                 <a:solidFill>
                   <a:srgbClr val="17364A"/>
                 </a:solidFill>
@@ -13502,13 +13732,16 @@
                 <a:ea typeface="Aptos" pitchFamily="34" charset="-122"/>
                 <a:cs typeface="Aptos" pitchFamily="34" charset="-120"/>
               </a:rPr>
-              <a:t>Recognize common failure modes that can affect safety, accuracy, trust, workflow fit, or.</a:t>
-            </a:r>
-            <a:endParaRPr lang="en-US" sz="1380" dirty="0"/>
-          </a:p>
-          <a:p>
-            <a:r>
-              <a:rPr lang="en-US" sz="1380" dirty="0">
+              <a:t>Recognize common failure modes that can affect safety, accuracy,.</a:t>
+            </a:r>
+            <a:endParaRPr lang="en-US" sz="1220" dirty="0"/>
+          </a:p>
+          <a:p>
+            <a:pPr indent="0" marL="0">
+              <a:buNone/>
+            </a:pPr>
+            <a:r>
+              <a:rPr lang="en-US" sz="1220" dirty="0">
                 <a:solidFill>
                   <a:srgbClr val="17364A"/>
                 </a:solidFill>
@@ -13516,9 +13749,9 @@
                 <a:ea typeface="Aptos" pitchFamily="34" charset="-122"/>
                 <a:cs typeface="Aptos" pitchFamily="34" charset="-120"/>
               </a:rPr>
-              <a:t>Identify practical guardrails that should be documented before implementation.</a:t>
-            </a:r>
-            <a:endParaRPr lang="en-US" sz="1380" dirty="0"/>
+              <a:t>Identify practical guardrails that should be documented before.</a:t>
+            </a:r>
+            <a:endParaRPr lang="en-US" sz="1220" dirty="0"/>
           </a:p>
         </p:txBody>
       </p:sp>
@@ -13596,17 +13829,17 @@
         </p:nvSpPr>
         <p:spPr>
           <a:xfrm>
-            <a:off x="7799832" y="5001768"/>
-            <a:ext cx="3145536" cy="502920"/>
-          </a:xfrm>
-          <a:prstGeom prst="rect">
-            <a:avLst/>
-          </a:prstGeom>
-          <a:noFill/>
-          <a:ln/>
-        </p:spPr>
-        <p:txBody>
-          <a:bodyPr wrap="square" lIns="0" tIns="0" rIns="0" bIns="0" rtlCol="0" anchor="t">
+            <a:off x="7799832" y="4974336"/>
+            <a:ext cx="3145536" cy="576072"/>
+          </a:xfrm>
+          <a:prstGeom prst="rect">
+            <a:avLst/>
+          </a:prstGeom>
+          <a:noFill/>
+          <a:ln/>
+        </p:spPr>
+        <p:txBody>
+          <a:bodyPr wrap="square" lIns="254" tIns="254" rIns="254" bIns="254" rtlCol="0" anchor="t">
             <a:normAutofit/>
           </a:bodyPr>
           <a:lstStyle/>
@@ -13615,7 +13848,7 @@
               <a:buNone/>
             </a:pPr>
             <a:r>
-              <a:rPr lang="en-US" sz="1550" dirty="0">
+              <a:rPr lang="en-US" sz="1320" dirty="0">
                 <a:solidFill>
                   <a:srgbClr val="17364A"/>
                 </a:solidFill>
@@ -13623,9 +13856,9 @@
                 <a:ea typeface="Aptos" pitchFamily="34" charset="-122"/>
                 <a:cs typeface="Aptos" pitchFamily="34" charset="-120"/>
               </a:rPr>
-              <a:t>Use the assignment to test whether you can explain the concept, apply it to a realistic public health situation, and identify what would need review before the work moves forward.</a:t>
-            </a:r>
-            <a:endParaRPr lang="en-US" sz="1550" dirty="0"/>
+              <a:t>Use the assignment to test whether you can explain the concept, apply it to a realistic public health situation, and.</a:t>
+            </a:r>
+            <a:endParaRPr lang="en-US" sz="1320" dirty="0"/>
           </a:p>
         </p:txBody>
       </p:sp>
@@ -13926,21 +14159,24 @@
           <a:ln/>
         </p:spPr>
         <p:txBody>
-          <a:bodyPr wrap="square" lIns="635" tIns="635" rIns="635" bIns="635" rtlCol="0" anchor="t">
+          <a:bodyPr wrap="square" lIns="1016" tIns="1016" rIns="1016" bIns="1016" rtlCol="0" anchor="t">
             <a:normAutofit/>
           </a:bodyPr>
           <a:lstStyle/>
           <a:p>
+            <a:pPr indent="0" marL="0">
+              <a:buNone/>
+            </a:pPr>
             <a:r>
               <a:rPr lang="en-US" sz="2100" dirty="0">
                 <a:solidFill>
-                  <a:srgbClr val="17364A"/>
-                </a:solidFill>
-                <a:latin typeface="Aptos" pitchFamily="34" charset="0"/>
-                <a:ea typeface="Aptos" pitchFamily="34" charset="-122"/>
-                <a:cs typeface="Aptos" pitchFamily="34" charset="-120"/>
-              </a:rPr>
-              <a:t>Produce a AI-ready data governance checklist that can support readiness assessment, governance review,.</a:t>
+                  <a:srgbClr val="003A63"/>
+                </a:solidFill>
+                <a:latin typeface="Aptos" pitchFamily="34" charset="0"/>
+                <a:ea typeface="Aptos" pitchFamily="34" charset="-122"/>
+                <a:cs typeface="Aptos" pitchFamily="34" charset="-120"/>
+              </a:rPr>
+              <a:t>• Produce a AI-ready data governance checklist that can support readiness assessment, governance.</a:t>
             </a:r>
             <a:endParaRPr lang="en-US" sz="2100" dirty="0"/>
           </a:p>
@@ -14020,17 +14256,17 @@
         </p:nvSpPr>
         <p:spPr>
           <a:xfrm>
-            <a:off x="7799832" y="1828800"/>
-            <a:ext cx="3145536" cy="685800"/>
-          </a:xfrm>
-          <a:prstGeom prst="rect">
-            <a:avLst/>
-          </a:prstGeom>
-          <a:noFill/>
-          <a:ln/>
-        </p:spPr>
-        <p:txBody>
-          <a:bodyPr wrap="square" lIns="0" tIns="0" rIns="0" bIns="0" rtlCol="0" anchor="t">
+            <a:off x="7799832" y="1801368"/>
+            <a:ext cx="3145536" cy="758952"/>
+          </a:xfrm>
+          <a:prstGeom prst="rect">
+            <a:avLst/>
+          </a:prstGeom>
+          <a:noFill/>
+          <a:ln/>
+        </p:spPr>
+        <p:txBody>
+          <a:bodyPr wrap="square" lIns="254" tIns="254" rIns="254" bIns="254" rtlCol="0" anchor="t">
             <a:normAutofit/>
           </a:bodyPr>
           <a:lstStyle/>
@@ -14039,7 +14275,7 @@
               <a:buNone/>
             </a:pPr>
             <a:r>
-              <a:rPr lang="en-US" sz="1550" dirty="0">
+              <a:rPr lang="en-US" sz="1320" dirty="0">
                 <a:solidFill>
                   <a:srgbClr val="17364A"/>
                 </a:solidFill>
@@ -14049,7 +14285,7 @@
               </a:rPr>
               <a:t>Produce a AI-ready data governance checklist that can support readiness assessment, governance review,.</a:t>
             </a:r>
-            <a:endParaRPr lang="en-US" sz="1550" dirty="0"/>
+            <a:endParaRPr lang="en-US" sz="1320" dirty="0"/>
           </a:p>
         </p:txBody>
       </p:sp>
@@ -14137,13 +14373,16 @@
           <a:ln/>
         </p:spPr>
         <p:txBody>
-          <a:bodyPr wrap="square" lIns="254" tIns="254" rIns="254" bIns="254" rtlCol="0" anchor="t">
+          <a:bodyPr wrap="square" lIns="508" tIns="508" rIns="508" bIns="508" rtlCol="0" anchor="t">
             <a:normAutofit/>
           </a:bodyPr>
           <a:lstStyle/>
           <a:p>
-            <a:r>
-              <a:rPr lang="en-US" sz="1380" dirty="0">
+            <a:pPr indent="0" marL="0">
+              <a:buNone/>
+            </a:pPr>
+            <a:r>
+              <a:rPr lang="en-US" sz="1220" dirty="0">
                 <a:solidFill>
                   <a:srgbClr val="17364A"/>
                 </a:solidFill>
@@ -14151,9 +14390,9 @@
                 <a:ea typeface="Aptos" pitchFamily="34" charset="-122"/>
                 <a:cs typeface="Aptos" pitchFamily="34" charset="-120"/>
               </a:rPr>
-              <a:t>Produce a AI-ready data governance checklist that can support readiness assessment,.</a:t>
-            </a:r>
-            <a:endParaRPr lang="en-US" sz="1380" dirty="0"/>
+              <a:t>Produce a AI-ready data governance checklist that can support.</a:t>
+            </a:r>
+            <a:endParaRPr lang="en-US" sz="1220" dirty="0"/>
           </a:p>
         </p:txBody>
       </p:sp>
@@ -14231,17 +14470,17 @@
         </p:nvSpPr>
         <p:spPr>
           <a:xfrm>
-            <a:off x="7799832" y="5001768"/>
-            <a:ext cx="3145536" cy="502920"/>
-          </a:xfrm>
-          <a:prstGeom prst="rect">
-            <a:avLst/>
-          </a:prstGeom>
-          <a:noFill/>
-          <a:ln/>
-        </p:spPr>
-        <p:txBody>
-          <a:bodyPr wrap="square" lIns="0" tIns="0" rIns="0" bIns="0" rtlCol="0" anchor="t">
+            <a:off x="7799832" y="4974336"/>
+            <a:ext cx="3145536" cy="576072"/>
+          </a:xfrm>
+          <a:prstGeom prst="rect">
+            <a:avLst/>
+          </a:prstGeom>
+          <a:noFill/>
+          <a:ln/>
+        </p:spPr>
+        <p:txBody>
+          <a:bodyPr wrap="square" lIns="254" tIns="254" rIns="254" bIns="254" rtlCol="0" anchor="t">
             <a:normAutofit/>
           </a:bodyPr>
           <a:lstStyle/>
@@ -14250,7 +14489,7 @@
               <a:buNone/>
             </a:pPr>
             <a:r>
-              <a:rPr lang="en-US" sz="1550" dirty="0">
+              <a:rPr lang="en-US" sz="1320" dirty="0">
                 <a:solidFill>
                   <a:srgbClr val="17364A"/>
                 </a:solidFill>
@@ -14258,9 +14497,9 @@
                 <a:ea typeface="Aptos" pitchFamily="34" charset="-122"/>
                 <a:cs typeface="Aptos" pitchFamily="34" charset="-120"/>
               </a:rPr>
-              <a:t>Use the assignment to test whether you can explain the concept, apply it to a realistic public health situation, and identify what would need review before the work moves forward.</a:t>
-            </a:r>
-            <a:endParaRPr lang="en-US" sz="1550" dirty="0"/>
+              <a:t>Use the assignment to test whether you can explain the concept, apply it to a realistic public health situation, and.</a:t>
+            </a:r>
+            <a:endParaRPr lang="en-US" sz="1320" dirty="0"/>
           </a:p>
         </p:txBody>
       </p:sp>
@@ -14561,49 +14800,58 @@
           <a:ln/>
         </p:spPr>
         <p:txBody>
-          <a:bodyPr wrap="square" lIns="635" tIns="635" rIns="635" bIns="635" rtlCol="0" anchor="t">
+          <a:bodyPr wrap="square" lIns="1016" tIns="1016" rIns="1016" bIns="1016" rtlCol="0" anchor="t">
             <a:normAutofit/>
           </a:bodyPr>
           <a:lstStyle/>
           <a:p>
+            <a:pPr indent="0" marL="0">
+              <a:buNone/>
+            </a:pPr>
             <a:r>
               <a:rPr lang="en-US" sz="2100" dirty="0">
                 <a:solidFill>
-                  <a:srgbClr val="17364A"/>
-                </a:solidFill>
-                <a:latin typeface="Aptos" pitchFamily="34" charset="0"/>
-                <a:ea typeface="Aptos" pitchFamily="34" charset="-122"/>
-                <a:cs typeface="Aptos" pitchFamily="34" charset="-120"/>
-              </a:rPr>
-              <a:t>AI-ready data require governance before they require a model.</a:t>
+                  <a:srgbClr val="003A63"/>
+                </a:solidFill>
+                <a:latin typeface="Aptos" pitchFamily="34" charset="0"/>
+                <a:ea typeface="Aptos" pitchFamily="34" charset="-122"/>
+                <a:cs typeface="Aptos" pitchFamily="34" charset="-120"/>
+              </a:rPr>
+              <a:t>• AI-ready data require governance before they require a model.</a:t>
             </a:r>
             <a:endParaRPr lang="en-US" sz="2100" dirty="0"/>
           </a:p>
           <a:p>
+            <a:pPr indent="0" marL="0">
+              <a:buNone/>
+            </a:pPr>
             <a:r>
               <a:rPr lang="en-US" sz="2100" dirty="0">
                 <a:solidFill>
-                  <a:srgbClr val="17364A"/>
-                </a:solidFill>
-                <a:latin typeface="Aptos" pitchFamily="34" charset="0"/>
-                <a:ea typeface="Aptos" pitchFamily="34" charset="-122"/>
-                <a:cs typeface="Aptos" pitchFamily="34" charset="-120"/>
-              </a:rPr>
-              <a:t>Data governance defines ownership, stewardship, metadata, permissible use, data quality expectations,.</a:t>
+                  <a:srgbClr val="003A63"/>
+                </a:solidFill>
+                <a:latin typeface="Aptos" pitchFamily="34" charset="0"/>
+                <a:ea typeface="Aptos" pitchFamily="34" charset="-122"/>
+                <a:cs typeface="Aptos" pitchFamily="34" charset="-120"/>
+              </a:rPr>
+              <a:t>• Data governance defines ownership, stewardship, metadata, permissible use, data quality.</a:t>
             </a:r>
             <a:endParaRPr lang="en-US" sz="2100" dirty="0"/>
           </a:p>
           <a:p>
+            <a:pPr indent="0" marL="0">
+              <a:buNone/>
+            </a:pPr>
             <a:r>
               <a:rPr lang="en-US" sz="2100" dirty="0">
                 <a:solidFill>
-                  <a:srgbClr val="17364A"/>
-                </a:solidFill>
-                <a:latin typeface="Aptos" pitchFamily="34" charset="0"/>
-                <a:ea typeface="Aptos" pitchFamily="34" charset="-122"/>
-                <a:cs typeface="Aptos" pitchFamily="34" charset="-120"/>
-              </a:rPr>
-              <a:t>This module helps learners connect governance practices to safe AI use across surveillance, analytics,.</a:t>
+                  <a:srgbClr val="003A63"/>
+                </a:solidFill>
+                <a:latin typeface="Aptos" pitchFamily="34" charset="0"/>
+                <a:ea typeface="Aptos" pitchFamily="34" charset="-122"/>
+                <a:cs typeface="Aptos" pitchFamily="34" charset="-120"/>
+              </a:rPr>
+              <a:t>• This module helps learners connect governance practices to safe AI use across surveillance,.</a:t>
             </a:r>
             <a:endParaRPr lang="en-US" sz="2100" dirty="0"/>
           </a:p>
@@ -14683,17 +14931,17 @@
         </p:nvSpPr>
         <p:spPr>
           <a:xfrm>
-            <a:off x="7799832" y="1828800"/>
-            <a:ext cx="3145536" cy="685800"/>
-          </a:xfrm>
-          <a:prstGeom prst="rect">
-            <a:avLst/>
-          </a:prstGeom>
-          <a:noFill/>
-          <a:ln/>
-        </p:spPr>
-        <p:txBody>
-          <a:bodyPr wrap="square" lIns="0" tIns="0" rIns="0" bIns="0" rtlCol="0" anchor="t">
+            <a:off x="7799832" y="1801368"/>
+            <a:ext cx="3145536" cy="758952"/>
+          </a:xfrm>
+          <a:prstGeom prst="rect">
+            <a:avLst/>
+          </a:prstGeom>
+          <a:noFill/>
+          <a:ln/>
+        </p:spPr>
+        <p:txBody>
+          <a:bodyPr wrap="square" lIns="254" tIns="254" rIns="254" bIns="254" rtlCol="0" anchor="t">
             <a:normAutofit/>
           </a:bodyPr>
           <a:lstStyle/>
@@ -14702,7 +14950,7 @@
               <a:buNone/>
             </a:pPr>
             <a:r>
-              <a:rPr lang="en-US" sz="1550" dirty="0">
+              <a:rPr lang="en-US" sz="1320" dirty="0">
                 <a:solidFill>
                   <a:srgbClr val="17364A"/>
                 </a:solidFill>
@@ -14712,7 +14960,7 @@
               </a:rPr>
               <a:t>AI-ready data require governance before they require a model.</a:t>
             </a:r>
-            <a:endParaRPr lang="en-US" sz="1550" dirty="0"/>
+            <a:endParaRPr lang="en-US" sz="1320" dirty="0"/>
           </a:p>
         </p:txBody>
       </p:sp>
@@ -14800,13 +15048,16 @@
           <a:ln/>
         </p:spPr>
         <p:txBody>
-          <a:bodyPr wrap="square" lIns="254" tIns="254" rIns="254" bIns="254" rtlCol="0" anchor="t">
+          <a:bodyPr wrap="square" lIns="508" tIns="508" rIns="508" bIns="508" rtlCol="0" anchor="t">
             <a:normAutofit/>
           </a:bodyPr>
           <a:lstStyle/>
           <a:p>
-            <a:r>
-              <a:rPr lang="en-US" sz="1380" dirty="0">
+            <a:pPr indent="0" marL="0">
+              <a:buNone/>
+            </a:pPr>
+            <a:r>
+              <a:rPr lang="en-US" sz="1220" dirty="0">
                 <a:solidFill>
                   <a:srgbClr val="17364A"/>
                 </a:solidFill>
@@ -14814,13 +15065,16 @@
                 <a:ea typeface="Aptos" pitchFamily="34" charset="-122"/>
                 <a:cs typeface="Aptos" pitchFamily="34" charset="-120"/>
               </a:rPr>
-              <a:t>Data governance defines ownership, stewardship, metadata, permissible use, data quality.</a:t>
-            </a:r>
-            <a:endParaRPr lang="en-US" sz="1380" dirty="0"/>
-          </a:p>
-          <a:p>
-            <a:r>
-              <a:rPr lang="en-US" sz="1380" dirty="0">
+              <a:t>Data governance defines ownership, stewardship, metadata,.</a:t>
+            </a:r>
+            <a:endParaRPr lang="en-US" sz="1220" dirty="0"/>
+          </a:p>
+          <a:p>
+            <a:pPr indent="0" marL="0">
+              <a:buNone/>
+            </a:pPr>
+            <a:r>
+              <a:rPr lang="en-US" sz="1220" dirty="0">
                 <a:solidFill>
                   <a:srgbClr val="17364A"/>
                 </a:solidFill>
@@ -14828,9 +15082,9 @@
                 <a:ea typeface="Aptos" pitchFamily="34" charset="-122"/>
                 <a:cs typeface="Aptos" pitchFamily="34" charset="-120"/>
               </a:rPr>
-              <a:t>This module helps learners connect governance practices to safe AI use across.</a:t>
-            </a:r>
-            <a:endParaRPr lang="en-US" sz="1380" dirty="0"/>
+              <a:t>This module helps learners connect governance practices to safe AI.</a:t>
+            </a:r>
+            <a:endParaRPr lang="en-US" sz="1220" dirty="0"/>
           </a:p>
         </p:txBody>
       </p:sp>
@@ -14908,17 +15162,17 @@
         </p:nvSpPr>
         <p:spPr>
           <a:xfrm>
-            <a:off x="7799832" y="5001768"/>
-            <a:ext cx="3145536" cy="502920"/>
-          </a:xfrm>
-          <a:prstGeom prst="rect">
-            <a:avLst/>
-          </a:prstGeom>
-          <a:noFill/>
-          <a:ln/>
-        </p:spPr>
-        <p:txBody>
-          <a:bodyPr wrap="square" lIns="0" tIns="0" rIns="0" bIns="0" rtlCol="0" anchor="t">
+            <a:off x="7799832" y="4974336"/>
+            <a:ext cx="3145536" cy="576072"/>
+          </a:xfrm>
+          <a:prstGeom prst="rect">
+            <a:avLst/>
+          </a:prstGeom>
+          <a:noFill/>
+          <a:ln/>
+        </p:spPr>
+        <p:txBody>
+          <a:bodyPr wrap="square" lIns="254" tIns="254" rIns="254" bIns="254" rtlCol="0" anchor="t">
             <a:normAutofit/>
           </a:bodyPr>
           <a:lstStyle/>
@@ -14927,7 +15181,7 @@
               <a:buNone/>
             </a:pPr>
             <a:r>
-              <a:rPr lang="en-US" sz="1550" dirty="0">
+              <a:rPr lang="en-US" sz="1320" dirty="0">
                 <a:solidFill>
                   <a:srgbClr val="17364A"/>
                 </a:solidFill>
@@ -14935,9 +15189,9 @@
                 <a:ea typeface="Aptos" pitchFamily="34" charset="-122"/>
                 <a:cs typeface="Aptos" pitchFamily="34" charset="-120"/>
               </a:rPr>
-              <a:t>Translate this concept into clear decision rights, review steps, documentation expectations, and escalation paths before an AI-supported workflow is approved.</a:t>
-            </a:r>
-            <a:endParaRPr lang="en-US" sz="1550" dirty="0"/>
+              <a:t>Translate this concept into clear decision rights, review steps, documentation expectations, and escalation paths before.</a:t>
+            </a:r>
+            <a:endParaRPr lang="en-US" sz="1320" dirty="0"/>
           </a:p>
         </p:txBody>
       </p:sp>
@@ -15238,49 +15492,58 @@
           <a:ln/>
         </p:spPr>
         <p:txBody>
-          <a:bodyPr wrap="square" lIns="635" tIns="635" rIns="635" bIns="635" rtlCol="0" anchor="t">
+          <a:bodyPr wrap="square" lIns="1016" tIns="1016" rIns="1016" bIns="1016" rtlCol="0" anchor="t">
             <a:normAutofit/>
           </a:bodyPr>
           <a:lstStyle/>
           <a:p>
+            <a:pPr indent="0" marL="0">
+              <a:buNone/>
+            </a:pPr>
             <a:r>
               <a:rPr lang="en-US" sz="2100" dirty="0">
                 <a:solidFill>
-                  <a:srgbClr val="17364A"/>
-                </a:solidFill>
-                <a:latin typeface="Aptos" pitchFamily="34" charset="0"/>
-                <a:ea typeface="Aptos" pitchFamily="34" charset="-122"/>
-                <a:cs typeface="Aptos" pitchFamily="34" charset="-120"/>
-              </a:rPr>
-              <a:t>This module provides national-level training guidance for public health agencies and partners.</a:t>
+                  <a:srgbClr val="003A63"/>
+                </a:solidFill>
+                <a:latin typeface="Aptos" pitchFamily="34" charset="0"/>
+                <a:ea typeface="Aptos" pitchFamily="34" charset="-122"/>
+                <a:cs typeface="Aptos" pitchFamily="34" charset="-120"/>
+              </a:rPr>
+              <a:t>• This module provides national-level training guidance for public health agencies and partners.</a:t>
             </a:r>
             <a:endParaRPr lang="en-US" sz="2100" dirty="0"/>
           </a:p>
           <a:p>
+            <a:pPr indent="0" marL="0">
+              <a:buNone/>
+            </a:pPr>
             <a:r>
               <a:rPr lang="en-US" sz="2100" dirty="0">
                 <a:solidFill>
-                  <a:srgbClr val="17364A"/>
-                </a:solidFill>
-                <a:latin typeface="Aptos" pitchFamily="34" charset="0"/>
-                <a:ea typeface="Aptos" pitchFamily="34" charset="-122"/>
-                <a:cs typeface="Aptos" pitchFamily="34" charset="-120"/>
-              </a:rPr>
-              <a:t>It is not legal advice and does not replace review by agency legal counsel, privacy officers,.</a:t>
+                  <a:srgbClr val="003A63"/>
+                </a:solidFill>
+                <a:latin typeface="Aptos" pitchFamily="34" charset="0"/>
+                <a:ea typeface="Aptos" pitchFamily="34" charset="-122"/>
+                <a:cs typeface="Aptos" pitchFamily="34" charset="-120"/>
+              </a:rPr>
+              <a:t>• It is not legal advice and does not replace review by agency legal counsel, privacy officers,.</a:t>
             </a:r>
             <a:endParaRPr lang="en-US" sz="2100" dirty="0"/>
           </a:p>
           <a:p>
+            <a:pPr indent="0" marL="0">
+              <a:buNone/>
+            </a:pPr>
             <a:r>
               <a:rPr lang="en-US" sz="2100" dirty="0">
                 <a:solidFill>
-                  <a:srgbClr val="17364A"/>
-                </a:solidFill>
-                <a:latin typeface="Aptos" pitchFamily="34" charset="0"/>
-                <a:ea typeface="Aptos" pitchFamily="34" charset="-122"/>
-                <a:cs typeface="Aptos" pitchFamily="34" charset="-120"/>
-              </a:rPr>
-              <a:t>Requirements may vary by state, locality, territory, Tribe, agency, funding source, data-sharing.</a:t>
+                  <a:srgbClr val="003A63"/>
+                </a:solidFill>
+                <a:latin typeface="Aptos" pitchFamily="34" charset="0"/>
+                <a:ea typeface="Aptos" pitchFamily="34" charset="-122"/>
+                <a:cs typeface="Aptos" pitchFamily="34" charset="-120"/>
+              </a:rPr>
+              <a:t>• Requirements may vary by state, locality, territory, Tribe, agency, funding source,.</a:t>
             </a:r>
             <a:endParaRPr lang="en-US" sz="2100" dirty="0"/>
           </a:p>
@@ -15360,17 +15623,17 @@
         </p:nvSpPr>
         <p:spPr>
           <a:xfrm>
-            <a:off x="7799832" y="1828800"/>
-            <a:ext cx="3145536" cy="685800"/>
-          </a:xfrm>
-          <a:prstGeom prst="rect">
-            <a:avLst/>
-          </a:prstGeom>
-          <a:noFill/>
-          <a:ln/>
-        </p:spPr>
-        <p:txBody>
-          <a:bodyPr wrap="square" lIns="0" tIns="0" rIns="0" bIns="0" rtlCol="0" anchor="t">
+            <a:off x="7799832" y="1801368"/>
+            <a:ext cx="3145536" cy="758952"/>
+          </a:xfrm>
+          <a:prstGeom prst="rect">
+            <a:avLst/>
+          </a:prstGeom>
+          <a:noFill/>
+          <a:ln/>
+        </p:spPr>
+        <p:txBody>
+          <a:bodyPr wrap="square" lIns="254" tIns="254" rIns="254" bIns="254" rtlCol="0" anchor="t">
             <a:normAutofit/>
           </a:bodyPr>
           <a:lstStyle/>
@@ -15379,7 +15642,7 @@
               <a:buNone/>
             </a:pPr>
             <a:r>
-              <a:rPr lang="en-US" sz="1550" dirty="0">
+              <a:rPr lang="en-US" sz="1320" dirty="0">
                 <a:solidFill>
                   <a:srgbClr val="17364A"/>
                 </a:solidFill>
@@ -15389,7 +15652,7 @@
               </a:rPr>
               <a:t>This module provides national-level training guidance for public health agencies and partners.</a:t>
             </a:r>
-            <a:endParaRPr lang="en-US" sz="1550" dirty="0"/>
+            <a:endParaRPr lang="en-US" sz="1320" dirty="0"/>
           </a:p>
         </p:txBody>
       </p:sp>
@@ -15477,13 +15740,16 @@
           <a:ln/>
         </p:spPr>
         <p:txBody>
-          <a:bodyPr wrap="square" lIns="254" tIns="254" rIns="254" bIns="254" rtlCol="0" anchor="t">
+          <a:bodyPr wrap="square" lIns="508" tIns="508" rIns="508" bIns="508" rtlCol="0" anchor="t">
             <a:normAutofit/>
           </a:bodyPr>
           <a:lstStyle/>
           <a:p>
-            <a:r>
-              <a:rPr lang="en-US" sz="1380" dirty="0">
+            <a:pPr indent="0" marL="0">
+              <a:buNone/>
+            </a:pPr>
+            <a:r>
+              <a:rPr lang="en-US" sz="1220" dirty="0">
                 <a:solidFill>
                   <a:srgbClr val="17364A"/>
                 </a:solidFill>
@@ -15491,13 +15757,16 @@
                 <a:ea typeface="Aptos" pitchFamily="34" charset="-122"/>
                 <a:cs typeface="Aptos" pitchFamily="34" charset="-120"/>
               </a:rPr>
-              <a:t>It is not legal advice and does not replace review by agency legal counsel, privacy.</a:t>
-            </a:r>
-            <a:endParaRPr lang="en-US" sz="1380" dirty="0"/>
-          </a:p>
-          <a:p>
-            <a:r>
-              <a:rPr lang="en-US" sz="1380" dirty="0">
+              <a:t>It is not legal advice and does not replace review by agency legal.</a:t>
+            </a:r>
+            <a:endParaRPr lang="en-US" sz="1220" dirty="0"/>
+          </a:p>
+          <a:p>
+            <a:pPr indent="0" marL="0">
+              <a:buNone/>
+            </a:pPr>
+            <a:r>
+              <a:rPr lang="en-US" sz="1220" dirty="0">
                 <a:solidFill>
                   <a:srgbClr val="17364A"/>
                 </a:solidFill>
@@ -15505,13 +15774,16 @@
                 <a:ea typeface="Aptos" pitchFamily="34" charset="-122"/>
                 <a:cs typeface="Aptos" pitchFamily="34" charset="-120"/>
               </a:rPr>
-              <a:t>Requirements may vary by state, locality, territory, Tribe, agency, funding source,.</a:t>
-            </a:r>
-            <a:endParaRPr lang="en-US" sz="1380" dirty="0"/>
-          </a:p>
-          <a:p>
-            <a:r>
-              <a:rPr lang="en-US" sz="1380" dirty="0">
+              <a:t>Requirements may vary by state, locality, territory, Tribe,.</a:t>
+            </a:r>
+            <a:endParaRPr lang="en-US" sz="1220" dirty="0"/>
+          </a:p>
+          <a:p>
+            <a:pPr indent="0" marL="0">
+              <a:buNone/>
+            </a:pPr>
+            <a:r>
+              <a:rPr lang="en-US" sz="1220" dirty="0">
                 <a:solidFill>
                   <a:srgbClr val="17364A"/>
                 </a:solidFill>
@@ -15519,9 +15791,9 @@
                 <a:ea typeface="Aptos" pitchFamily="34" charset="-122"/>
                 <a:cs typeface="Aptos" pitchFamily="34" charset="-120"/>
               </a:rPr>
-              <a:t>Learners should use this module to identify the issues that require review and should.</a:t>
-            </a:r>
-            <a:endParaRPr lang="en-US" sz="1380" dirty="0"/>
+              <a:t>Learners should use this module to identify the issues that.</a:t>
+            </a:r>
+            <a:endParaRPr lang="en-US" sz="1220" dirty="0"/>
           </a:p>
         </p:txBody>
       </p:sp>
@@ -15599,17 +15871,17 @@
         </p:nvSpPr>
         <p:spPr>
           <a:xfrm>
-            <a:off x="7799832" y="5001768"/>
-            <a:ext cx="3145536" cy="502920"/>
-          </a:xfrm>
-          <a:prstGeom prst="rect">
-            <a:avLst/>
-          </a:prstGeom>
-          <a:noFill/>
-          <a:ln/>
-        </p:spPr>
-        <p:txBody>
-          <a:bodyPr wrap="square" lIns="0" tIns="0" rIns="0" bIns="0" rtlCol="0" anchor="t">
+            <a:off x="7799832" y="4974336"/>
+            <a:ext cx="3145536" cy="576072"/>
+          </a:xfrm>
+          <a:prstGeom prst="rect">
+            <a:avLst/>
+          </a:prstGeom>
+          <a:noFill/>
+          <a:ln/>
+        </p:spPr>
+        <p:txBody>
+          <a:bodyPr wrap="square" lIns="254" tIns="254" rIns="254" bIns="254" rtlCol="0" anchor="t">
             <a:normAutofit/>
           </a:bodyPr>
           <a:lstStyle/>
@@ -15618,7 +15890,7 @@
               <a:buNone/>
             </a:pPr>
             <a:r>
-              <a:rPr lang="en-US" sz="1550" dirty="0">
+              <a:rPr lang="en-US" sz="1320" dirty="0">
                 <a:solidFill>
                   <a:srgbClr val="17364A"/>
                 </a:solidFill>
@@ -15626,9 +15898,9 @@
                 <a:ea typeface="Aptos" pitchFamily="34" charset="-122"/>
                 <a:cs typeface="Aptos" pitchFamily="34" charset="-120"/>
               </a:rPr>
-              <a:t>Translate this concept into clear decision rights, review steps, documentation expectations, and escalation paths before an AI-supported workflow is approved.</a:t>
-            </a:r>
-            <a:endParaRPr lang="en-US" sz="1550" dirty="0"/>
+              <a:t>Translate this concept into clear decision rights, review steps, documentation expectations, and escalation paths before.</a:t>
+            </a:r>
+            <a:endParaRPr lang="en-US" sz="1320" dirty="0"/>
           </a:p>
         </p:txBody>
       </p:sp>
@@ -15929,49 +16201,58 @@
           <a:ln/>
         </p:spPr>
         <p:txBody>
-          <a:bodyPr wrap="square" lIns="635" tIns="635" rIns="635" bIns="635" rtlCol="0" anchor="t">
+          <a:bodyPr wrap="square" lIns="1016" tIns="1016" rIns="1016" bIns="1016" rtlCol="0" anchor="t">
             <a:normAutofit/>
           </a:bodyPr>
           <a:lstStyle/>
           <a:p>
+            <a:pPr indent="0" marL="0">
+              <a:buNone/>
+            </a:pPr>
             <a:r>
               <a:rPr lang="en-US" sz="2100" dirty="0">
                 <a:solidFill>
-                  <a:srgbClr val="17364A"/>
-                </a:solidFill>
-                <a:latin typeface="Aptos" pitchFamily="34" charset="0"/>
-                <a:ea typeface="Aptos" pitchFamily="34" charset="-122"/>
-                <a:cs typeface="Aptos" pitchFamily="34" charset="-120"/>
-              </a:rPr>
-              <a:t>Data Governance for AI-Ready Public Health Data matters because AI systems are embedded in public.</a:t>
+                  <a:srgbClr val="003A63"/>
+                </a:solidFill>
+                <a:latin typeface="Aptos" pitchFamily="34" charset="0"/>
+                <a:ea typeface="Aptos" pitchFamily="34" charset="-122"/>
+                <a:cs typeface="Aptos" pitchFamily="34" charset="-120"/>
+              </a:rPr>
+              <a:t>• Data Governance for AI-Ready Public Health Data matters because AI systems are embedded in.</a:t>
             </a:r>
             <a:endParaRPr lang="en-US" sz="2100" dirty="0"/>
           </a:p>
           <a:p>
+            <a:pPr indent="0" marL="0">
+              <a:buNone/>
+            </a:pPr>
             <a:r>
               <a:rPr lang="en-US" sz="2100" dirty="0">
                 <a:solidFill>
-                  <a:srgbClr val="17364A"/>
-                </a:solidFill>
-                <a:latin typeface="Aptos" pitchFamily="34" charset="0"/>
-                <a:ea typeface="Aptos" pitchFamily="34" charset="-122"/>
-                <a:cs typeface="Aptos" pitchFamily="34" charset="-120"/>
-              </a:rPr>
-              <a:t>The topic affects whether AI outputs are accurate, explainable, safe, equitable, secure, and sustainable.</a:t>
+                  <a:srgbClr val="003A63"/>
+                </a:solidFill>
+                <a:latin typeface="Aptos" pitchFamily="34" charset="0"/>
+                <a:ea typeface="Aptos" pitchFamily="34" charset="-122"/>
+                <a:cs typeface="Aptos" pitchFamily="34" charset="-120"/>
+              </a:rPr>
+              <a:t>• The topic affects whether AI outputs are accurate, explainable, safe, equitable, secure, and.</a:t>
             </a:r>
             <a:endParaRPr lang="en-US" sz="2100" dirty="0"/>
           </a:p>
           <a:p>
+            <a:pPr indent="0" marL="0">
+              <a:buNone/>
+            </a:pPr>
             <a:r>
               <a:rPr lang="en-US" sz="2100" dirty="0">
                 <a:solidFill>
-                  <a:srgbClr val="17364A"/>
-                </a:solidFill>
-                <a:latin typeface="Aptos" pitchFamily="34" charset="0"/>
-                <a:ea typeface="Aptos" pitchFamily="34" charset="-122"/>
-                <a:cs typeface="Aptos" pitchFamily="34" charset="-120"/>
-              </a:rPr>
-              <a:t>Agencies that ignore this area may create tools that work in a demonstration but fail in actual practice.</a:t>
+                  <a:srgbClr val="003A63"/>
+                </a:solidFill>
+                <a:latin typeface="Aptos" pitchFamily="34" charset="0"/>
+                <a:ea typeface="Aptos" pitchFamily="34" charset="-122"/>
+                <a:cs typeface="Aptos" pitchFamily="34" charset="-120"/>
+              </a:rPr>
+              <a:t>• Agencies that ignore this area may create tools that work in a demonstration but fail in.</a:t>
             </a:r>
             <a:endParaRPr lang="en-US" sz="2100" dirty="0"/>
           </a:p>
@@ -16051,17 +16332,17 @@
         </p:nvSpPr>
         <p:spPr>
           <a:xfrm>
-            <a:off x="7799832" y="1828800"/>
-            <a:ext cx="3145536" cy="685800"/>
-          </a:xfrm>
-          <a:prstGeom prst="rect">
-            <a:avLst/>
-          </a:prstGeom>
-          <a:noFill/>
-          <a:ln/>
-        </p:spPr>
-        <p:txBody>
-          <a:bodyPr wrap="square" lIns="0" tIns="0" rIns="0" bIns="0" rtlCol="0" anchor="t">
+            <a:off x="7799832" y="1801368"/>
+            <a:ext cx="3145536" cy="758952"/>
+          </a:xfrm>
+          <a:prstGeom prst="rect">
+            <a:avLst/>
+          </a:prstGeom>
+          <a:noFill/>
+          <a:ln/>
+        </p:spPr>
+        <p:txBody>
+          <a:bodyPr wrap="square" lIns="254" tIns="254" rIns="254" bIns="254" rtlCol="0" anchor="t">
             <a:normAutofit/>
           </a:bodyPr>
           <a:lstStyle/>
@@ -16070,7 +16351,7 @@
               <a:buNone/>
             </a:pPr>
             <a:r>
-              <a:rPr lang="en-US" sz="1550" dirty="0">
+              <a:rPr lang="en-US" sz="1320" dirty="0">
                 <a:solidFill>
                   <a:srgbClr val="17364A"/>
                 </a:solidFill>
@@ -16080,7 +16361,7 @@
               </a:rPr>
               <a:t>Data Governance for AI-Ready Public Health Data matters because AI systems are embedded in public.</a:t>
             </a:r>
-            <a:endParaRPr lang="en-US" sz="1550" dirty="0"/>
+            <a:endParaRPr lang="en-US" sz="1320" dirty="0"/>
           </a:p>
         </p:txBody>
       </p:sp>
@@ -16168,13 +16449,16 @@
           <a:ln/>
         </p:spPr>
         <p:txBody>
-          <a:bodyPr wrap="square" lIns="254" tIns="254" rIns="254" bIns="254" rtlCol="0" anchor="t">
+          <a:bodyPr wrap="square" lIns="508" tIns="508" rIns="508" bIns="508" rtlCol="0" anchor="t">
             <a:normAutofit/>
           </a:bodyPr>
           <a:lstStyle/>
           <a:p>
-            <a:r>
-              <a:rPr lang="en-US" sz="1380" dirty="0">
+            <a:pPr indent="0" marL="0">
+              <a:buNone/>
+            </a:pPr>
+            <a:r>
+              <a:rPr lang="en-US" sz="1220" dirty="0">
                 <a:solidFill>
                   <a:srgbClr val="17364A"/>
                 </a:solidFill>
@@ -16182,13 +16466,16 @@
                 <a:ea typeface="Aptos" pitchFamily="34" charset="-122"/>
                 <a:cs typeface="Aptos" pitchFamily="34" charset="-120"/>
               </a:rPr>
-              <a:t>Data Governance for AI-Ready Public Health Data matters because AI systems are embedded in.</a:t>
-            </a:r>
-            <a:endParaRPr lang="en-US" sz="1380" dirty="0"/>
-          </a:p>
-          <a:p>
-            <a:r>
-              <a:rPr lang="en-US" sz="1380" dirty="0">
+              <a:t>Data Governance for AI-Ready Public Health Data matters because AI.</a:t>
+            </a:r>
+            <a:endParaRPr lang="en-US" sz="1220" dirty="0"/>
+          </a:p>
+          <a:p>
+            <a:pPr indent="0" marL="0">
+              <a:buNone/>
+            </a:pPr>
+            <a:r>
+              <a:rPr lang="en-US" sz="1220" dirty="0">
                 <a:solidFill>
                   <a:srgbClr val="17364A"/>
                 </a:solidFill>
@@ -16198,11 +16485,14 @@
               </a:rPr>
               <a:t>The topic also affects accountability.</a:t>
             </a:r>
-            <a:endParaRPr lang="en-US" sz="1380" dirty="0"/>
-          </a:p>
-          <a:p>
-            <a:r>
-              <a:rPr lang="en-US" sz="1380" dirty="0">
+            <a:endParaRPr lang="en-US" sz="1220" dirty="0"/>
+          </a:p>
+          <a:p>
+            <a:pPr indent="0" marL="0">
+              <a:buNone/>
+            </a:pPr>
+            <a:r>
+              <a:rPr lang="en-US" sz="1220" dirty="0">
                 <a:solidFill>
                   <a:srgbClr val="17364A"/>
                 </a:solidFill>
@@ -16210,9 +16500,9 @@
                 <a:ea typeface="Aptos" pitchFamily="34" charset="-122"/>
                 <a:cs typeface="Aptos" pitchFamily="34" charset="-120"/>
               </a:rPr>
-              <a:t>Public health agencies must be able to explain how data are used, why a tool was approved,.</a:t>
-            </a:r>
-            <a:endParaRPr lang="en-US" sz="1380" dirty="0"/>
+              <a:t>Public health agencies must be able to explain how data are used,.</a:t>
+            </a:r>
+            <a:endParaRPr lang="en-US" sz="1220" dirty="0"/>
           </a:p>
         </p:txBody>
       </p:sp>
@@ -16290,17 +16580,17 @@
         </p:nvSpPr>
         <p:spPr>
           <a:xfrm>
-            <a:off x="7799832" y="5001768"/>
-            <a:ext cx="3145536" cy="502920"/>
-          </a:xfrm>
-          <a:prstGeom prst="rect">
-            <a:avLst/>
-          </a:prstGeom>
-          <a:noFill/>
-          <a:ln/>
-        </p:spPr>
-        <p:txBody>
-          <a:bodyPr wrap="square" lIns="0" tIns="0" rIns="0" bIns="0" rtlCol="0" anchor="t">
+            <a:off x="7799832" y="4974336"/>
+            <a:ext cx="3145536" cy="576072"/>
+          </a:xfrm>
+          <a:prstGeom prst="rect">
+            <a:avLst/>
+          </a:prstGeom>
+          <a:noFill/>
+          <a:ln/>
+        </p:spPr>
+        <p:txBody>
+          <a:bodyPr wrap="square" lIns="254" tIns="254" rIns="254" bIns="254" rtlCol="0" anchor="t">
             <a:normAutofit/>
           </a:bodyPr>
           <a:lstStyle/>
@@ -16309,7 +16599,7 @@
               <a:buNone/>
             </a:pPr>
             <a:r>
-              <a:rPr lang="en-US" sz="1550" dirty="0">
+              <a:rPr lang="en-US" sz="1320" dirty="0">
                 <a:solidFill>
                   <a:srgbClr val="17364A"/>
                 </a:solidFill>
@@ -16317,9 +16607,9 @@
                 <a:ea typeface="Aptos" pitchFamily="34" charset="-122"/>
                 <a:cs typeface="Aptos" pitchFamily="34" charset="-120"/>
               </a:rPr>
-              <a:t>Translate this concept into clear decision rights, review steps, documentation expectations, and escalation paths before an AI-supported workflow is approved.</a:t>
-            </a:r>
-            <a:endParaRPr lang="en-US" sz="1550" dirty="0"/>
+              <a:t>Translate this concept into clear decision rights, review steps, documentation expectations, and escalation paths before.</a:t>
+            </a:r>
+            <a:endParaRPr lang="en-US" sz="1320" dirty="0"/>
           </a:p>
         </p:txBody>
       </p:sp>

--- a/downloads/presentations/modules/gov-330.pptx
+++ b/downloads/presentations/modules/gov-330.pptx
@@ -3321,11 +3321,11 @@
         <p:spPr>
           <a:xfrm>
             <a:off x="7635240" y="1325880"/>
-            <a:ext cx="3474720" cy="1325880"/>
+            <a:ext cx="3474720" cy="1255471"/>
           </a:xfrm>
           <a:prstGeom prst="roundRect">
             <a:avLst>
-              <a:gd name="adj" fmla="val 8276"/>
+              <a:gd name="adj" fmla="val 8740"/>
             </a:avLst>
           </a:prstGeom>
           <a:solidFill>
@@ -3387,7 +3387,7 @@
         <p:spPr>
           <a:xfrm>
             <a:off x="7799832" y="1801368"/>
-            <a:ext cx="3145536" cy="758952"/>
+            <a:ext cx="3145536" cy="688543"/>
           </a:xfrm>
           <a:prstGeom prst="rect">
             <a:avLst/>
@@ -3427,12 +3427,12 @@
         </p:nvSpPr>
         <p:spPr>
           <a:xfrm>
-            <a:off x="7635240" y="2788920"/>
-            <a:ext cx="3474720" cy="1536192"/>
+            <a:off x="7635240" y="2718511"/>
+            <a:ext cx="3474720" cy="1328623"/>
           </a:xfrm>
           <a:prstGeom prst="roundRect">
             <a:avLst>
-              <a:gd name="adj" fmla="val 7143"/>
+              <a:gd name="adj" fmla="val 8259"/>
             </a:avLst>
           </a:prstGeom>
           <a:solidFill>
@@ -3454,7 +3454,7 @@
         </p:nvSpPr>
         <p:spPr>
           <a:xfrm>
-            <a:off x="7799832" y="2935224"/>
+            <a:off x="7799832" y="2864815"/>
             <a:ext cx="3145536" cy="256032"/>
           </a:xfrm>
           <a:prstGeom prst="rect">
@@ -3493,8 +3493,8 @@
         </p:nvSpPr>
         <p:spPr>
           <a:xfrm>
-            <a:off x="7818120" y="3300984"/>
-            <a:ext cx="3090672" cy="877824"/>
+            <a:off x="7818120" y="3230575"/>
+            <a:ext cx="3090672" cy="670255"/>
           </a:xfrm>
           <a:prstGeom prst="rect">
             <a:avLst/>
@@ -3568,12 +3568,12 @@
         </p:nvSpPr>
         <p:spPr>
           <a:xfrm>
-            <a:off x="7635240" y="4498848"/>
-            <a:ext cx="3474720" cy="1143000"/>
+            <a:off x="7635240" y="4184294"/>
+            <a:ext cx="3474720" cy="1466698"/>
           </a:xfrm>
           <a:prstGeom prst="roundRect">
             <a:avLst>
-              <a:gd name="adj" fmla="val 9600"/>
+              <a:gd name="adj" fmla="val 7481"/>
             </a:avLst>
           </a:prstGeom>
           <a:solidFill>
@@ -3595,7 +3595,7 @@
         </p:nvSpPr>
         <p:spPr>
           <a:xfrm>
-            <a:off x="7799832" y="4645152"/>
+            <a:off x="7799832" y="4330598"/>
             <a:ext cx="3145536" cy="256032"/>
           </a:xfrm>
           <a:prstGeom prst="rect">
@@ -3634,8 +3634,8 @@
         </p:nvSpPr>
         <p:spPr>
           <a:xfrm>
-            <a:off x="7799832" y="4974336"/>
-            <a:ext cx="3145536" cy="576072"/>
+            <a:off x="7799832" y="4659782"/>
+            <a:ext cx="3145536" cy="899770"/>
           </a:xfrm>
           <a:prstGeom prst="rect">
             <a:avLst/>
@@ -3661,7 +3661,7 @@
                 <a:ea typeface="Aptos" pitchFamily="34" charset="-122"/>
                 <a:cs typeface="Aptos" pitchFamily="34" charset="-120"/>
               </a:rPr>
-              <a:t>Translate this concept into clear decision rights, review steps, documentation expectations, and escalation paths before.</a:t>
+              <a:t>Translate this concept into clear decision rights, review steps, documentation expectations, and escalation paths before an AI-supported workflow is approved.</a:t>
             </a:r>
             <a:endParaRPr lang="en-US" sz="1320" dirty="0"/>
           </a:p>
@@ -4030,11 +4030,11 @@
         <p:spPr>
           <a:xfrm>
             <a:off x="7635240" y="1325880"/>
-            <a:ext cx="3474720" cy="1325880"/>
+            <a:ext cx="3474720" cy="1255471"/>
           </a:xfrm>
           <a:prstGeom prst="roundRect">
             <a:avLst>
-              <a:gd name="adj" fmla="val 8276"/>
+              <a:gd name="adj" fmla="val 8740"/>
             </a:avLst>
           </a:prstGeom>
           <a:solidFill>
@@ -4096,7 +4096,7 @@
         <p:spPr>
           <a:xfrm>
             <a:off x="7799832" y="1801368"/>
-            <a:ext cx="3145536" cy="758952"/>
+            <a:ext cx="3145536" cy="688543"/>
           </a:xfrm>
           <a:prstGeom prst="rect">
             <a:avLst/>
@@ -4136,12 +4136,12 @@
         </p:nvSpPr>
         <p:spPr>
           <a:xfrm>
-            <a:off x="7635240" y="2788920"/>
-            <a:ext cx="3474720" cy="1536192"/>
+            <a:off x="7635240" y="2718511"/>
+            <a:ext cx="3474720" cy="1328623"/>
           </a:xfrm>
           <a:prstGeom prst="roundRect">
             <a:avLst>
-              <a:gd name="adj" fmla="val 7143"/>
+              <a:gd name="adj" fmla="val 8259"/>
             </a:avLst>
           </a:prstGeom>
           <a:solidFill>
@@ -4163,7 +4163,7 @@
         </p:nvSpPr>
         <p:spPr>
           <a:xfrm>
-            <a:off x="7799832" y="2935224"/>
+            <a:off x="7799832" y="2864815"/>
             <a:ext cx="3145536" cy="256032"/>
           </a:xfrm>
           <a:prstGeom prst="rect">
@@ -4202,8 +4202,8 @@
         </p:nvSpPr>
         <p:spPr>
           <a:xfrm>
-            <a:off x="7818120" y="3300984"/>
-            <a:ext cx="3090672" cy="877824"/>
+            <a:off x="7818120" y="3230575"/>
+            <a:ext cx="3090672" cy="670255"/>
           </a:xfrm>
           <a:prstGeom prst="rect">
             <a:avLst/>
@@ -4260,12 +4260,12 @@
         </p:nvSpPr>
         <p:spPr>
           <a:xfrm>
-            <a:off x="7635240" y="4498848"/>
-            <a:ext cx="3474720" cy="1143000"/>
+            <a:off x="7635240" y="4184294"/>
+            <a:ext cx="3474720" cy="1466698"/>
           </a:xfrm>
           <a:prstGeom prst="roundRect">
             <a:avLst>
-              <a:gd name="adj" fmla="val 9600"/>
+              <a:gd name="adj" fmla="val 7481"/>
             </a:avLst>
           </a:prstGeom>
           <a:solidFill>
@@ -4287,7 +4287,7 @@
         </p:nvSpPr>
         <p:spPr>
           <a:xfrm>
-            <a:off x="7799832" y="4645152"/>
+            <a:off x="7799832" y="4330598"/>
             <a:ext cx="3145536" cy="256032"/>
           </a:xfrm>
           <a:prstGeom prst="rect">
@@ -4326,8 +4326,8 @@
         </p:nvSpPr>
         <p:spPr>
           <a:xfrm>
-            <a:off x="7799832" y="4974336"/>
-            <a:ext cx="3145536" cy="576072"/>
+            <a:off x="7799832" y="4659782"/>
+            <a:ext cx="3145536" cy="899770"/>
           </a:xfrm>
           <a:prstGeom prst="rect">
             <a:avLst/>
@@ -4353,7 +4353,7 @@
                 <a:ea typeface="Aptos" pitchFamily="34" charset="-122"/>
                 <a:cs typeface="Aptos" pitchFamily="34" charset="-120"/>
               </a:rPr>
-              <a:t>Translate this concept into clear decision rights, review steps, documentation expectations, and escalation paths before.</a:t>
+              <a:t>Translate this concept into clear decision rights, review steps, documentation expectations, and escalation paths before an AI-supported workflow is approved.</a:t>
             </a:r>
             <a:endParaRPr lang="en-US" sz="1320" dirty="0"/>
           </a:p>
@@ -4722,11 +4722,11 @@
         <p:spPr>
           <a:xfrm>
             <a:off x="7635240" y="1325880"/>
-            <a:ext cx="3474720" cy="1325880"/>
+            <a:ext cx="3474720" cy="1207008"/>
           </a:xfrm>
           <a:prstGeom prst="roundRect">
             <a:avLst>
-              <a:gd name="adj" fmla="val 8276"/>
+              <a:gd name="adj" fmla="val 9091"/>
             </a:avLst>
           </a:prstGeom>
           <a:solidFill>
@@ -4788,7 +4788,7 @@
         <p:spPr>
           <a:xfrm>
             <a:off x="7799832" y="1801368"/>
-            <a:ext cx="3145536" cy="758952"/>
+            <a:ext cx="3145536" cy="640080"/>
           </a:xfrm>
           <a:prstGeom prst="rect">
             <a:avLst/>
@@ -4828,12 +4828,12 @@
         </p:nvSpPr>
         <p:spPr>
           <a:xfrm>
-            <a:off x="7635240" y="2788920"/>
-            <a:ext cx="3474720" cy="1536192"/>
+            <a:off x="7635240" y="2670048"/>
+            <a:ext cx="3474720" cy="1377086"/>
           </a:xfrm>
           <a:prstGeom prst="roundRect">
             <a:avLst>
-              <a:gd name="adj" fmla="val 7143"/>
+              <a:gd name="adj" fmla="val 7968"/>
             </a:avLst>
           </a:prstGeom>
           <a:solidFill>
@@ -4855,7 +4855,7 @@
         </p:nvSpPr>
         <p:spPr>
           <a:xfrm>
-            <a:off x="7799832" y="2935224"/>
+            <a:off x="7799832" y="2816352"/>
             <a:ext cx="3145536" cy="256032"/>
           </a:xfrm>
           <a:prstGeom prst="rect">
@@ -4894,8 +4894,8 @@
         </p:nvSpPr>
         <p:spPr>
           <a:xfrm>
-            <a:off x="7818120" y="3300984"/>
-            <a:ext cx="3090672" cy="877824"/>
+            <a:off x="7818120" y="3182112"/>
+            <a:ext cx="3090672" cy="718718"/>
           </a:xfrm>
           <a:prstGeom prst="rect">
             <a:avLst/>
@@ -4969,12 +4969,12 @@
         </p:nvSpPr>
         <p:spPr>
           <a:xfrm>
-            <a:off x="7635240" y="4498848"/>
-            <a:ext cx="3474720" cy="1143000"/>
+            <a:off x="7635240" y="4184294"/>
+            <a:ext cx="3474720" cy="1466698"/>
           </a:xfrm>
           <a:prstGeom prst="roundRect">
             <a:avLst>
-              <a:gd name="adj" fmla="val 9600"/>
+              <a:gd name="adj" fmla="val 7481"/>
             </a:avLst>
           </a:prstGeom>
           <a:solidFill>
@@ -4996,7 +4996,7 @@
         </p:nvSpPr>
         <p:spPr>
           <a:xfrm>
-            <a:off x="7799832" y="4645152"/>
+            <a:off x="7799832" y="4330598"/>
             <a:ext cx="3145536" cy="256032"/>
           </a:xfrm>
           <a:prstGeom prst="rect">
@@ -5035,8 +5035,8 @@
         </p:nvSpPr>
         <p:spPr>
           <a:xfrm>
-            <a:off x="7799832" y="4974336"/>
-            <a:ext cx="3145536" cy="576072"/>
+            <a:off x="7799832" y="4659782"/>
+            <a:ext cx="3145536" cy="899770"/>
           </a:xfrm>
           <a:prstGeom prst="rect">
             <a:avLst/>
@@ -5062,7 +5062,7 @@
                 <a:ea typeface="Aptos" pitchFamily="34" charset="-122"/>
                 <a:cs typeface="Aptos" pitchFamily="34" charset="-120"/>
               </a:rPr>
-              <a:t>Translate this concept into clear decision rights, review steps, documentation expectations, and escalation paths before.</a:t>
+              <a:t>Translate this concept into clear decision rights, review steps, documentation expectations, and escalation paths before an AI-supported workflow is approved.</a:t>
             </a:r>
             <a:endParaRPr lang="en-US" sz="1320" dirty="0"/>
           </a:p>
@@ -5431,11 +5431,11 @@
         <p:spPr>
           <a:xfrm>
             <a:off x="7635240" y="1325880"/>
-            <a:ext cx="3474720" cy="1325880"/>
+            <a:ext cx="3474720" cy="1255471"/>
           </a:xfrm>
           <a:prstGeom prst="roundRect">
             <a:avLst>
-              <a:gd name="adj" fmla="val 8276"/>
+              <a:gd name="adj" fmla="val 8740"/>
             </a:avLst>
           </a:prstGeom>
           <a:solidFill>
@@ -5497,7 +5497,7 @@
         <p:spPr>
           <a:xfrm>
             <a:off x="7799832" y="1801368"/>
-            <a:ext cx="3145536" cy="758952"/>
+            <a:ext cx="3145536" cy="688543"/>
           </a:xfrm>
           <a:prstGeom prst="rect">
             <a:avLst/>
@@ -5537,12 +5537,12 @@
         </p:nvSpPr>
         <p:spPr>
           <a:xfrm>
-            <a:off x="7635240" y="2788920"/>
-            <a:ext cx="3474720" cy="1536192"/>
+            <a:off x="7635240" y="2718511"/>
+            <a:ext cx="3474720" cy="1328623"/>
           </a:xfrm>
           <a:prstGeom prst="roundRect">
             <a:avLst>
-              <a:gd name="adj" fmla="val 7143"/>
+              <a:gd name="adj" fmla="val 8259"/>
             </a:avLst>
           </a:prstGeom>
           <a:solidFill>
@@ -5564,7 +5564,7 @@
         </p:nvSpPr>
         <p:spPr>
           <a:xfrm>
-            <a:off x="7799832" y="2935224"/>
+            <a:off x="7799832" y="2864815"/>
             <a:ext cx="3145536" cy="256032"/>
           </a:xfrm>
           <a:prstGeom prst="rect">
@@ -5603,8 +5603,8 @@
         </p:nvSpPr>
         <p:spPr>
           <a:xfrm>
-            <a:off x="7818120" y="3300984"/>
-            <a:ext cx="3090672" cy="877824"/>
+            <a:off x="7818120" y="3230575"/>
+            <a:ext cx="3090672" cy="670255"/>
           </a:xfrm>
           <a:prstGeom prst="rect">
             <a:avLst/>
@@ -5678,12 +5678,12 @@
         </p:nvSpPr>
         <p:spPr>
           <a:xfrm>
-            <a:off x="7635240" y="4498848"/>
-            <a:ext cx="3474720" cy="1143000"/>
+            <a:off x="7635240" y="4184294"/>
+            <a:ext cx="3474720" cy="1466698"/>
           </a:xfrm>
           <a:prstGeom prst="roundRect">
             <a:avLst>
-              <a:gd name="adj" fmla="val 9600"/>
+              <a:gd name="adj" fmla="val 7481"/>
             </a:avLst>
           </a:prstGeom>
           <a:solidFill>
@@ -5705,7 +5705,7 @@
         </p:nvSpPr>
         <p:spPr>
           <a:xfrm>
-            <a:off x="7799832" y="4645152"/>
+            <a:off x="7799832" y="4330598"/>
             <a:ext cx="3145536" cy="256032"/>
           </a:xfrm>
           <a:prstGeom prst="rect">
@@ -5744,8 +5744,8 @@
         </p:nvSpPr>
         <p:spPr>
           <a:xfrm>
-            <a:off x="7799832" y="4974336"/>
-            <a:ext cx="3145536" cy="576072"/>
+            <a:off x="7799832" y="4659782"/>
+            <a:ext cx="3145536" cy="899770"/>
           </a:xfrm>
           <a:prstGeom prst="rect">
             <a:avLst/>
@@ -5771,7 +5771,7 @@
                 <a:ea typeface="Aptos" pitchFamily="34" charset="-122"/>
                 <a:cs typeface="Aptos" pitchFamily="34" charset="-120"/>
               </a:rPr>
-              <a:t>Translate this concept into clear decision rights, review steps, documentation expectations, and escalation paths before.</a:t>
+              <a:t>Translate this concept into clear decision rights, review steps, documentation expectations, and escalation paths before an AI-supported workflow is approved.</a:t>
             </a:r>
             <a:endParaRPr lang="en-US" sz="1320" dirty="0"/>
           </a:p>
@@ -6140,11 +6140,11 @@
         <p:spPr>
           <a:xfrm>
             <a:off x="7635240" y="1325880"/>
-            <a:ext cx="3474720" cy="1325880"/>
+            <a:ext cx="3474720" cy="1255471"/>
           </a:xfrm>
           <a:prstGeom prst="roundRect">
             <a:avLst>
-              <a:gd name="adj" fmla="val 8276"/>
+              <a:gd name="adj" fmla="val 8740"/>
             </a:avLst>
           </a:prstGeom>
           <a:solidFill>
@@ -6206,7 +6206,7 @@
         <p:spPr>
           <a:xfrm>
             <a:off x="7799832" y="1801368"/>
-            <a:ext cx="3145536" cy="758952"/>
+            <a:ext cx="3145536" cy="688543"/>
           </a:xfrm>
           <a:prstGeom prst="rect">
             <a:avLst/>
@@ -6246,12 +6246,12 @@
         </p:nvSpPr>
         <p:spPr>
           <a:xfrm>
-            <a:off x="7635240" y="2788920"/>
-            <a:ext cx="3474720" cy="1536192"/>
+            <a:off x="7635240" y="2718511"/>
+            <a:ext cx="3474720" cy="1328623"/>
           </a:xfrm>
           <a:prstGeom prst="roundRect">
             <a:avLst>
-              <a:gd name="adj" fmla="val 7143"/>
+              <a:gd name="adj" fmla="val 8259"/>
             </a:avLst>
           </a:prstGeom>
           <a:solidFill>
@@ -6273,7 +6273,7 @@
         </p:nvSpPr>
         <p:spPr>
           <a:xfrm>
-            <a:off x="7799832" y="2935224"/>
+            <a:off x="7799832" y="2864815"/>
             <a:ext cx="3145536" cy="256032"/>
           </a:xfrm>
           <a:prstGeom prst="rect">
@@ -6312,8 +6312,8 @@
         </p:nvSpPr>
         <p:spPr>
           <a:xfrm>
-            <a:off x="7818120" y="3300984"/>
-            <a:ext cx="3090672" cy="877824"/>
+            <a:off x="7818120" y="3230575"/>
+            <a:ext cx="3090672" cy="670255"/>
           </a:xfrm>
           <a:prstGeom prst="rect">
             <a:avLst/>
@@ -6387,12 +6387,12 @@
         </p:nvSpPr>
         <p:spPr>
           <a:xfrm>
-            <a:off x="7635240" y="4498848"/>
-            <a:ext cx="3474720" cy="1143000"/>
+            <a:off x="7635240" y="4184294"/>
+            <a:ext cx="3474720" cy="1466698"/>
           </a:xfrm>
           <a:prstGeom prst="roundRect">
             <a:avLst>
-              <a:gd name="adj" fmla="val 9600"/>
+              <a:gd name="adj" fmla="val 7481"/>
             </a:avLst>
           </a:prstGeom>
           <a:solidFill>
@@ -6414,7 +6414,7 @@
         </p:nvSpPr>
         <p:spPr>
           <a:xfrm>
-            <a:off x="7799832" y="4645152"/>
+            <a:off x="7799832" y="4330598"/>
             <a:ext cx="3145536" cy="256032"/>
           </a:xfrm>
           <a:prstGeom prst="rect">
@@ -6453,8 +6453,8 @@
         </p:nvSpPr>
         <p:spPr>
           <a:xfrm>
-            <a:off x="7799832" y="4974336"/>
-            <a:ext cx="3145536" cy="576072"/>
+            <a:off x="7799832" y="4659782"/>
+            <a:ext cx="3145536" cy="899770"/>
           </a:xfrm>
           <a:prstGeom prst="rect">
             <a:avLst/>
@@ -6480,7 +6480,7 @@
                 <a:ea typeface="Aptos" pitchFamily="34" charset="-122"/>
                 <a:cs typeface="Aptos" pitchFamily="34" charset="-120"/>
               </a:rPr>
-              <a:t>Translate this concept into clear decision rights, review steps, documentation expectations, and escalation paths before.</a:t>
+              <a:t>Translate this concept into clear decision rights, review steps, documentation expectations, and escalation paths before an AI-supported workflow is approved.</a:t>
             </a:r>
             <a:endParaRPr lang="en-US" sz="1320" dirty="0"/>
           </a:p>
@@ -6849,11 +6849,11 @@
         <p:spPr>
           <a:xfrm>
             <a:off x="7635240" y="1325880"/>
-            <a:ext cx="3474720" cy="1325880"/>
+            <a:ext cx="3474720" cy="1207008"/>
           </a:xfrm>
           <a:prstGeom prst="roundRect">
             <a:avLst>
-              <a:gd name="adj" fmla="val 8276"/>
+              <a:gd name="adj" fmla="val 9091"/>
             </a:avLst>
           </a:prstGeom>
           <a:solidFill>
@@ -6915,7 +6915,7 @@
         <p:spPr>
           <a:xfrm>
             <a:off x="7799832" y="1801368"/>
-            <a:ext cx="3145536" cy="758952"/>
+            <a:ext cx="3145536" cy="640080"/>
           </a:xfrm>
           <a:prstGeom prst="rect">
             <a:avLst/>
@@ -6955,12 +6955,12 @@
         </p:nvSpPr>
         <p:spPr>
           <a:xfrm>
-            <a:off x="7635240" y="2788920"/>
-            <a:ext cx="3474720" cy="1536192"/>
+            <a:off x="7635240" y="2670048"/>
+            <a:ext cx="3474720" cy="1377086"/>
           </a:xfrm>
           <a:prstGeom prst="roundRect">
             <a:avLst>
-              <a:gd name="adj" fmla="val 7143"/>
+              <a:gd name="adj" fmla="val 7968"/>
             </a:avLst>
           </a:prstGeom>
           <a:solidFill>
@@ -6982,7 +6982,7 @@
         </p:nvSpPr>
         <p:spPr>
           <a:xfrm>
-            <a:off x="7799832" y="2935224"/>
+            <a:off x="7799832" y="2816352"/>
             <a:ext cx="3145536" cy="256032"/>
           </a:xfrm>
           <a:prstGeom prst="rect">
@@ -7021,8 +7021,8 @@
         </p:nvSpPr>
         <p:spPr>
           <a:xfrm>
-            <a:off x="7818120" y="3300984"/>
-            <a:ext cx="3090672" cy="877824"/>
+            <a:off x="7818120" y="3182112"/>
+            <a:ext cx="3090672" cy="718718"/>
           </a:xfrm>
           <a:prstGeom prst="rect">
             <a:avLst/>
@@ -7096,12 +7096,12 @@
         </p:nvSpPr>
         <p:spPr>
           <a:xfrm>
-            <a:off x="7635240" y="4498848"/>
-            <a:ext cx="3474720" cy="1143000"/>
+            <a:off x="7635240" y="4184294"/>
+            <a:ext cx="3474720" cy="1466698"/>
           </a:xfrm>
           <a:prstGeom prst="roundRect">
             <a:avLst>
-              <a:gd name="adj" fmla="val 9600"/>
+              <a:gd name="adj" fmla="val 7481"/>
             </a:avLst>
           </a:prstGeom>
           <a:solidFill>
@@ -7123,7 +7123,7 @@
         </p:nvSpPr>
         <p:spPr>
           <a:xfrm>
-            <a:off x="7799832" y="4645152"/>
+            <a:off x="7799832" y="4330598"/>
             <a:ext cx="3145536" cy="256032"/>
           </a:xfrm>
           <a:prstGeom prst="rect">
@@ -7162,8 +7162,8 @@
         </p:nvSpPr>
         <p:spPr>
           <a:xfrm>
-            <a:off x="7799832" y="4974336"/>
-            <a:ext cx="3145536" cy="576072"/>
+            <a:off x="7799832" y="4659782"/>
+            <a:ext cx="3145536" cy="899770"/>
           </a:xfrm>
           <a:prstGeom prst="rect">
             <a:avLst/>
@@ -7189,7 +7189,7 @@
                 <a:ea typeface="Aptos" pitchFamily="34" charset="-122"/>
                 <a:cs typeface="Aptos" pitchFamily="34" charset="-120"/>
               </a:rPr>
-              <a:t>Translate this concept into clear decision rights, review steps, documentation expectations, and escalation paths before.</a:t>
+              <a:t>Translate this concept into clear decision rights, review steps, documentation expectations, and escalation paths before an AI-supported workflow is approved.</a:t>
             </a:r>
             <a:endParaRPr lang="en-US" sz="1320" dirty="0"/>
           </a:p>
@@ -7541,11 +7541,11 @@
         <p:spPr>
           <a:xfrm>
             <a:off x="7635240" y="1325880"/>
-            <a:ext cx="3474720" cy="1325880"/>
+            <a:ext cx="3474720" cy="1207008"/>
           </a:xfrm>
           <a:prstGeom prst="roundRect">
             <a:avLst>
-              <a:gd name="adj" fmla="val 8276"/>
+              <a:gd name="adj" fmla="val 9091"/>
             </a:avLst>
           </a:prstGeom>
           <a:solidFill>
@@ -7607,7 +7607,7 @@
         <p:spPr>
           <a:xfrm>
             <a:off x="7799832" y="1801368"/>
-            <a:ext cx="3145536" cy="758952"/>
+            <a:ext cx="3145536" cy="640080"/>
           </a:xfrm>
           <a:prstGeom prst="rect">
             <a:avLst/>
@@ -7647,12 +7647,12 @@
         </p:nvSpPr>
         <p:spPr>
           <a:xfrm>
-            <a:off x="7635240" y="2788920"/>
-            <a:ext cx="3474720" cy="1536192"/>
+            <a:off x="7635240" y="2670048"/>
+            <a:ext cx="3474720" cy="1377086"/>
           </a:xfrm>
           <a:prstGeom prst="roundRect">
             <a:avLst>
-              <a:gd name="adj" fmla="val 7143"/>
+              <a:gd name="adj" fmla="val 7968"/>
             </a:avLst>
           </a:prstGeom>
           <a:solidFill>
@@ -7674,7 +7674,7 @@
         </p:nvSpPr>
         <p:spPr>
           <a:xfrm>
-            <a:off x="7799832" y="2935224"/>
+            <a:off x="7799832" y="2816352"/>
             <a:ext cx="3145536" cy="256032"/>
           </a:xfrm>
           <a:prstGeom prst="rect">
@@ -7713,8 +7713,8 @@
         </p:nvSpPr>
         <p:spPr>
           <a:xfrm>
-            <a:off x="7818120" y="3300984"/>
-            <a:ext cx="3090672" cy="877824"/>
+            <a:off x="7818120" y="3182112"/>
+            <a:ext cx="3090672" cy="718718"/>
           </a:xfrm>
           <a:prstGeom prst="rect">
             <a:avLst/>
@@ -7771,12 +7771,12 @@
         </p:nvSpPr>
         <p:spPr>
           <a:xfrm>
-            <a:off x="7635240" y="4498848"/>
-            <a:ext cx="3474720" cy="1143000"/>
+            <a:off x="7635240" y="4184294"/>
+            <a:ext cx="3474720" cy="1466698"/>
           </a:xfrm>
           <a:prstGeom prst="roundRect">
             <a:avLst>
-              <a:gd name="adj" fmla="val 9600"/>
+              <a:gd name="adj" fmla="val 7481"/>
             </a:avLst>
           </a:prstGeom>
           <a:solidFill>
@@ -7798,7 +7798,7 @@
         </p:nvSpPr>
         <p:spPr>
           <a:xfrm>
-            <a:off x="7799832" y="4645152"/>
+            <a:off x="7799832" y="4330598"/>
             <a:ext cx="3145536" cy="256032"/>
           </a:xfrm>
           <a:prstGeom prst="rect">
@@ -7837,8 +7837,8 @@
         </p:nvSpPr>
         <p:spPr>
           <a:xfrm>
-            <a:off x="7799832" y="4974336"/>
-            <a:ext cx="3145536" cy="576072"/>
+            <a:off x="7799832" y="4659782"/>
+            <a:ext cx="3145536" cy="899770"/>
           </a:xfrm>
           <a:prstGeom prst="rect">
             <a:avLst/>
@@ -7864,7 +7864,7 @@
                 <a:ea typeface="Aptos" pitchFamily="34" charset="-122"/>
                 <a:cs typeface="Aptos" pitchFamily="34" charset="-120"/>
               </a:rPr>
-              <a:t>Translate this concept into clear decision rights, review steps, documentation expectations, and escalation paths before.</a:t>
+              <a:t>Translate this concept into clear decision rights, review steps, documentation expectations, and escalation paths before an AI-supported workflow is approved.</a:t>
             </a:r>
             <a:endParaRPr lang="en-US" sz="1320" dirty="0"/>
           </a:p>
@@ -8233,11 +8233,11 @@
         <p:spPr>
           <a:xfrm>
             <a:off x="7635240" y="1325880"/>
-            <a:ext cx="3474720" cy="1325880"/>
+            <a:ext cx="3474720" cy="1255471"/>
           </a:xfrm>
           <a:prstGeom prst="roundRect">
             <a:avLst>
-              <a:gd name="adj" fmla="val 8276"/>
+              <a:gd name="adj" fmla="val 8740"/>
             </a:avLst>
           </a:prstGeom>
           <a:solidFill>
@@ -8299,7 +8299,7 @@
         <p:spPr>
           <a:xfrm>
             <a:off x="7799832" y="1801368"/>
-            <a:ext cx="3145536" cy="758952"/>
+            <a:ext cx="3145536" cy="688543"/>
           </a:xfrm>
           <a:prstGeom prst="rect">
             <a:avLst/>
@@ -8339,12 +8339,12 @@
         </p:nvSpPr>
         <p:spPr>
           <a:xfrm>
-            <a:off x="7635240" y="2788920"/>
-            <a:ext cx="3474720" cy="1536192"/>
+            <a:off x="7635240" y="2718511"/>
+            <a:ext cx="3474720" cy="1328623"/>
           </a:xfrm>
           <a:prstGeom prst="roundRect">
             <a:avLst>
-              <a:gd name="adj" fmla="val 7143"/>
+              <a:gd name="adj" fmla="val 8259"/>
             </a:avLst>
           </a:prstGeom>
           <a:solidFill>
@@ -8366,7 +8366,7 @@
         </p:nvSpPr>
         <p:spPr>
           <a:xfrm>
-            <a:off x="7799832" y="2935224"/>
+            <a:off x="7799832" y="2864815"/>
             <a:ext cx="3145536" cy="256032"/>
           </a:xfrm>
           <a:prstGeom prst="rect">
@@ -8405,8 +8405,8 @@
         </p:nvSpPr>
         <p:spPr>
           <a:xfrm>
-            <a:off x="7818120" y="3300984"/>
-            <a:ext cx="3090672" cy="877824"/>
+            <a:off x="7818120" y="3230575"/>
+            <a:ext cx="3090672" cy="670255"/>
           </a:xfrm>
           <a:prstGeom prst="rect">
             <a:avLst/>
@@ -8480,12 +8480,12 @@
         </p:nvSpPr>
         <p:spPr>
           <a:xfrm>
-            <a:off x="7635240" y="4498848"/>
-            <a:ext cx="3474720" cy="1143000"/>
+            <a:off x="7635240" y="4184294"/>
+            <a:ext cx="3474720" cy="1466698"/>
           </a:xfrm>
           <a:prstGeom prst="roundRect">
             <a:avLst>
-              <a:gd name="adj" fmla="val 9600"/>
+              <a:gd name="adj" fmla="val 7481"/>
             </a:avLst>
           </a:prstGeom>
           <a:solidFill>
@@ -8507,7 +8507,7 @@
         </p:nvSpPr>
         <p:spPr>
           <a:xfrm>
-            <a:off x="7799832" y="4645152"/>
+            <a:off x="7799832" y="4330598"/>
             <a:ext cx="3145536" cy="256032"/>
           </a:xfrm>
           <a:prstGeom prst="rect">
@@ -8546,8 +8546,8 @@
         </p:nvSpPr>
         <p:spPr>
           <a:xfrm>
-            <a:off x="7799832" y="4974336"/>
-            <a:ext cx="3145536" cy="576072"/>
+            <a:off x="7799832" y="4659782"/>
+            <a:ext cx="3145536" cy="899770"/>
           </a:xfrm>
           <a:prstGeom prst="rect">
             <a:avLst/>
@@ -8573,7 +8573,7 @@
                 <a:ea typeface="Aptos" pitchFamily="34" charset="-122"/>
                 <a:cs typeface="Aptos" pitchFamily="34" charset="-120"/>
               </a:rPr>
-              <a:t>Use the assignment to test whether you can explain the concept, apply it to a realistic public health situation, and.</a:t>
+              <a:t>Use the assignment to test whether you can explain the concept, apply it to a realistic public health situation, and identify what would need review before the work moves forward.</a:t>
             </a:r>
             <a:endParaRPr lang="en-US" sz="1320" dirty="0"/>
           </a:p>
@@ -8925,11 +8925,11 @@
         <p:spPr>
           <a:xfrm>
             <a:off x="7635240" y="1325880"/>
-            <a:ext cx="3474720" cy="1325880"/>
+            <a:ext cx="3474720" cy="1207008"/>
           </a:xfrm>
           <a:prstGeom prst="roundRect">
             <a:avLst>
-              <a:gd name="adj" fmla="val 8276"/>
+              <a:gd name="adj" fmla="val 9091"/>
             </a:avLst>
           </a:prstGeom>
           <a:solidFill>
@@ -8991,7 +8991,7 @@
         <p:spPr>
           <a:xfrm>
             <a:off x="7799832" y="1801368"/>
-            <a:ext cx="3145536" cy="758952"/>
+            <a:ext cx="3145536" cy="640080"/>
           </a:xfrm>
           <a:prstGeom prst="rect">
             <a:avLst/>
@@ -9031,12 +9031,12 @@
         </p:nvSpPr>
         <p:spPr>
           <a:xfrm>
-            <a:off x="7635240" y="2788920"/>
-            <a:ext cx="3474720" cy="1536192"/>
+            <a:off x="7635240" y="2670048"/>
+            <a:ext cx="3474720" cy="1377086"/>
           </a:xfrm>
           <a:prstGeom prst="roundRect">
             <a:avLst>
-              <a:gd name="adj" fmla="val 7143"/>
+              <a:gd name="adj" fmla="val 7968"/>
             </a:avLst>
           </a:prstGeom>
           <a:solidFill>
@@ -9058,7 +9058,7 @@
         </p:nvSpPr>
         <p:spPr>
           <a:xfrm>
-            <a:off x="7799832" y="2935224"/>
+            <a:off x="7799832" y="2816352"/>
             <a:ext cx="3145536" cy="256032"/>
           </a:xfrm>
           <a:prstGeom prst="rect">
@@ -9097,8 +9097,8 @@
         </p:nvSpPr>
         <p:spPr>
           <a:xfrm>
-            <a:off x="7818120" y="3300984"/>
-            <a:ext cx="3090672" cy="877824"/>
+            <a:off x="7818120" y="3182112"/>
+            <a:ext cx="3090672" cy="718718"/>
           </a:xfrm>
           <a:prstGeom prst="rect">
             <a:avLst/>
@@ -9155,12 +9155,12 @@
         </p:nvSpPr>
         <p:spPr>
           <a:xfrm>
-            <a:off x="7635240" y="4498848"/>
-            <a:ext cx="3474720" cy="1143000"/>
+            <a:off x="7635240" y="4184294"/>
+            <a:ext cx="3474720" cy="1466698"/>
           </a:xfrm>
           <a:prstGeom prst="roundRect">
             <a:avLst>
-              <a:gd name="adj" fmla="val 9600"/>
+              <a:gd name="adj" fmla="val 7481"/>
             </a:avLst>
           </a:prstGeom>
           <a:solidFill>
@@ -9182,7 +9182,7 @@
         </p:nvSpPr>
         <p:spPr>
           <a:xfrm>
-            <a:off x="7799832" y="4645152"/>
+            <a:off x="7799832" y="4330598"/>
             <a:ext cx="3145536" cy="256032"/>
           </a:xfrm>
           <a:prstGeom prst="rect">
@@ -9221,8 +9221,8 @@
         </p:nvSpPr>
         <p:spPr>
           <a:xfrm>
-            <a:off x="7799832" y="4974336"/>
-            <a:ext cx="3145536" cy="576072"/>
+            <a:off x="7799832" y="4659782"/>
+            <a:ext cx="3145536" cy="899770"/>
           </a:xfrm>
           <a:prstGeom prst="rect">
             <a:avLst/>
@@ -9248,7 +9248,7 @@
                 <a:ea typeface="Aptos" pitchFamily="34" charset="-122"/>
                 <a:cs typeface="Aptos" pitchFamily="34" charset="-120"/>
               </a:rPr>
-              <a:t>Translate this concept into clear decision rights, review steps, documentation expectations, and escalation paths before.</a:t>
+              <a:t>Translate this concept into clear decision rights, review steps, documentation expectations, and escalation paths before an AI-supported workflow is approved.</a:t>
             </a:r>
             <a:endParaRPr lang="en-US" sz="1320" dirty="0"/>
           </a:p>
@@ -9583,11 +9583,11 @@
         <p:spPr>
           <a:xfrm>
             <a:off x="7635240" y="1325880"/>
-            <a:ext cx="3474720" cy="1325880"/>
+            <a:ext cx="3474720" cy="1255471"/>
           </a:xfrm>
           <a:prstGeom prst="roundRect">
             <a:avLst>
-              <a:gd name="adj" fmla="val 8276"/>
+              <a:gd name="adj" fmla="val 8740"/>
             </a:avLst>
           </a:prstGeom>
           <a:solidFill>
@@ -9649,7 +9649,7 @@
         <p:spPr>
           <a:xfrm>
             <a:off x="7799832" y="1801368"/>
-            <a:ext cx="3145536" cy="758952"/>
+            <a:ext cx="3145536" cy="688543"/>
           </a:xfrm>
           <a:prstGeom prst="rect">
             <a:avLst/>
@@ -9689,12 +9689,12 @@
         </p:nvSpPr>
         <p:spPr>
           <a:xfrm>
-            <a:off x="7635240" y="2788920"/>
-            <a:ext cx="3474720" cy="1536192"/>
+            <a:off x="7635240" y="2718511"/>
+            <a:ext cx="3474720" cy="1328623"/>
           </a:xfrm>
           <a:prstGeom prst="roundRect">
             <a:avLst>
-              <a:gd name="adj" fmla="val 7143"/>
+              <a:gd name="adj" fmla="val 8259"/>
             </a:avLst>
           </a:prstGeom>
           <a:solidFill>
@@ -9716,7 +9716,7 @@
         </p:nvSpPr>
         <p:spPr>
           <a:xfrm>
-            <a:off x="7799832" y="2935224"/>
+            <a:off x="7799832" y="2864815"/>
             <a:ext cx="3145536" cy="256032"/>
           </a:xfrm>
           <a:prstGeom prst="rect">
@@ -9755,8 +9755,8 @@
         </p:nvSpPr>
         <p:spPr>
           <a:xfrm>
-            <a:off x="7818120" y="3300984"/>
-            <a:ext cx="3090672" cy="877824"/>
+            <a:off x="7818120" y="3230575"/>
+            <a:ext cx="3090672" cy="670255"/>
           </a:xfrm>
           <a:prstGeom prst="rect">
             <a:avLst/>
@@ -9813,12 +9813,12 @@
         </p:nvSpPr>
         <p:spPr>
           <a:xfrm>
-            <a:off x="7635240" y="4498848"/>
-            <a:ext cx="3474720" cy="1143000"/>
+            <a:off x="7635240" y="4184294"/>
+            <a:ext cx="3474720" cy="1466698"/>
           </a:xfrm>
           <a:prstGeom prst="roundRect">
             <a:avLst>
-              <a:gd name="adj" fmla="val 9600"/>
+              <a:gd name="adj" fmla="val 7481"/>
             </a:avLst>
           </a:prstGeom>
           <a:solidFill>
@@ -9840,7 +9840,7 @@
         </p:nvSpPr>
         <p:spPr>
           <a:xfrm>
-            <a:off x="7799832" y="4645152"/>
+            <a:off x="7799832" y="4330598"/>
             <a:ext cx="3145536" cy="256032"/>
           </a:xfrm>
           <a:prstGeom prst="rect">
@@ -9879,8 +9879,8 @@
         </p:nvSpPr>
         <p:spPr>
           <a:xfrm>
-            <a:off x="7799832" y="4974336"/>
-            <a:ext cx="3145536" cy="576072"/>
+            <a:off x="7799832" y="4659782"/>
+            <a:ext cx="3145536" cy="899770"/>
           </a:xfrm>
           <a:prstGeom prst="rect">
             <a:avLst/>
@@ -9906,7 +9906,7 @@
                 <a:ea typeface="Aptos" pitchFamily="34" charset="-122"/>
                 <a:cs typeface="Aptos" pitchFamily="34" charset="-120"/>
               </a:rPr>
-              <a:t>Use the assignment to test whether you can explain the concept, apply it to a realistic public health situation, and.</a:t>
+              <a:t>Use the assignment to test whether you can explain the concept, apply it to a realistic public health situation, and identify what would need review before the work moves forward.</a:t>
             </a:r>
             <a:endParaRPr lang="en-US" sz="1320" dirty="0"/>
           </a:p>
@@ -10877,11 +10877,11 @@
         <p:spPr>
           <a:xfrm>
             <a:off x="7635240" y="1325880"/>
-            <a:ext cx="3474720" cy="1325880"/>
+            <a:ext cx="3474720" cy="1255471"/>
           </a:xfrm>
           <a:prstGeom prst="roundRect">
             <a:avLst>
-              <a:gd name="adj" fmla="val 8276"/>
+              <a:gd name="adj" fmla="val 8740"/>
             </a:avLst>
           </a:prstGeom>
           <a:solidFill>
@@ -10943,7 +10943,7 @@
         <p:spPr>
           <a:xfrm>
             <a:off x="7799832" y="1801368"/>
-            <a:ext cx="3145536" cy="758952"/>
+            <a:ext cx="3145536" cy="688543"/>
           </a:xfrm>
           <a:prstGeom prst="rect">
             <a:avLst/>
@@ -10983,12 +10983,12 @@
         </p:nvSpPr>
         <p:spPr>
           <a:xfrm>
-            <a:off x="7635240" y="2788920"/>
-            <a:ext cx="3474720" cy="1536192"/>
+            <a:off x="7635240" y="2718511"/>
+            <a:ext cx="3474720" cy="1328623"/>
           </a:xfrm>
           <a:prstGeom prst="roundRect">
             <a:avLst>
-              <a:gd name="adj" fmla="val 7143"/>
+              <a:gd name="adj" fmla="val 8259"/>
             </a:avLst>
           </a:prstGeom>
           <a:solidFill>
@@ -11010,7 +11010,7 @@
         </p:nvSpPr>
         <p:spPr>
           <a:xfrm>
-            <a:off x="7799832" y="2935224"/>
+            <a:off x="7799832" y="2864815"/>
             <a:ext cx="3145536" cy="256032"/>
           </a:xfrm>
           <a:prstGeom prst="rect">
@@ -11049,8 +11049,8 @@
         </p:nvSpPr>
         <p:spPr>
           <a:xfrm>
-            <a:off x="7818120" y="3300984"/>
-            <a:ext cx="3090672" cy="877824"/>
+            <a:off x="7818120" y="3230575"/>
+            <a:ext cx="3090672" cy="670255"/>
           </a:xfrm>
           <a:prstGeom prst="rect">
             <a:avLst/>
@@ -11124,12 +11124,12 @@
         </p:nvSpPr>
         <p:spPr>
           <a:xfrm>
-            <a:off x="7635240" y="4498848"/>
-            <a:ext cx="3474720" cy="1143000"/>
+            <a:off x="7635240" y="4184294"/>
+            <a:ext cx="3474720" cy="1466698"/>
           </a:xfrm>
           <a:prstGeom prst="roundRect">
             <a:avLst>
-              <a:gd name="adj" fmla="val 9600"/>
+              <a:gd name="adj" fmla="val 7481"/>
             </a:avLst>
           </a:prstGeom>
           <a:solidFill>
@@ -11151,7 +11151,7 @@
         </p:nvSpPr>
         <p:spPr>
           <a:xfrm>
-            <a:off x="7799832" y="4645152"/>
+            <a:off x="7799832" y="4330598"/>
             <a:ext cx="3145536" cy="256032"/>
           </a:xfrm>
           <a:prstGeom prst="rect">
@@ -11190,8 +11190,8 @@
         </p:nvSpPr>
         <p:spPr>
           <a:xfrm>
-            <a:off x="7799832" y="4974336"/>
-            <a:ext cx="3145536" cy="576072"/>
+            <a:off x="7799832" y="4659782"/>
+            <a:ext cx="3145536" cy="899770"/>
           </a:xfrm>
           <a:prstGeom prst="rect">
             <a:avLst/>
@@ -11217,7 +11217,7 @@
                 <a:ea typeface="Aptos" pitchFamily="34" charset="-122"/>
                 <a:cs typeface="Aptos" pitchFamily="34" charset="-120"/>
               </a:rPr>
-              <a:t>Use the assignment to test whether you can explain the concept, apply it to a realistic public health situation, and.</a:t>
+              <a:t>Use the assignment to test whether you can explain the concept, apply it to a realistic public health situation, and identify what would need review before the work moves forward.</a:t>
             </a:r>
             <a:endParaRPr lang="en-US" sz="1320" dirty="0"/>
           </a:p>
@@ -11586,11 +11586,11 @@
         <p:spPr>
           <a:xfrm>
             <a:off x="7635240" y="1325880"/>
-            <a:ext cx="3474720" cy="1325880"/>
+            <a:ext cx="3474720" cy="1207008"/>
           </a:xfrm>
           <a:prstGeom prst="roundRect">
             <a:avLst>
-              <a:gd name="adj" fmla="val 8276"/>
+              <a:gd name="adj" fmla="val 9091"/>
             </a:avLst>
           </a:prstGeom>
           <a:solidFill>
@@ -11652,7 +11652,7 @@
         <p:spPr>
           <a:xfrm>
             <a:off x="7799832" y="1801368"/>
-            <a:ext cx="3145536" cy="758952"/>
+            <a:ext cx="3145536" cy="640080"/>
           </a:xfrm>
           <a:prstGeom prst="rect">
             <a:avLst/>
@@ -11692,12 +11692,12 @@
         </p:nvSpPr>
         <p:spPr>
           <a:xfrm>
-            <a:off x="7635240" y="2788920"/>
-            <a:ext cx="3474720" cy="1536192"/>
+            <a:off x="7635240" y="2670048"/>
+            <a:ext cx="3474720" cy="1377086"/>
           </a:xfrm>
           <a:prstGeom prst="roundRect">
             <a:avLst>
-              <a:gd name="adj" fmla="val 7143"/>
+              <a:gd name="adj" fmla="val 7968"/>
             </a:avLst>
           </a:prstGeom>
           <a:solidFill>
@@ -11719,7 +11719,7 @@
         </p:nvSpPr>
         <p:spPr>
           <a:xfrm>
-            <a:off x="7799832" y="2935224"/>
+            <a:off x="7799832" y="2816352"/>
             <a:ext cx="3145536" cy="256032"/>
           </a:xfrm>
           <a:prstGeom prst="rect">
@@ -11758,8 +11758,8 @@
         </p:nvSpPr>
         <p:spPr>
           <a:xfrm>
-            <a:off x="7818120" y="3300984"/>
-            <a:ext cx="3090672" cy="877824"/>
+            <a:off x="7818120" y="3182112"/>
+            <a:ext cx="3090672" cy="718718"/>
           </a:xfrm>
           <a:prstGeom prst="rect">
             <a:avLst/>
@@ -11816,12 +11816,12 @@
         </p:nvSpPr>
         <p:spPr>
           <a:xfrm>
-            <a:off x="7635240" y="4498848"/>
-            <a:ext cx="3474720" cy="1143000"/>
+            <a:off x="7635240" y="4184294"/>
+            <a:ext cx="3474720" cy="1466698"/>
           </a:xfrm>
           <a:prstGeom prst="roundRect">
             <a:avLst>
-              <a:gd name="adj" fmla="val 9600"/>
+              <a:gd name="adj" fmla="val 7481"/>
             </a:avLst>
           </a:prstGeom>
           <a:solidFill>
@@ -11843,7 +11843,7 @@
         </p:nvSpPr>
         <p:spPr>
           <a:xfrm>
-            <a:off x="7799832" y="4645152"/>
+            <a:off x="7799832" y="4330598"/>
             <a:ext cx="3145536" cy="256032"/>
           </a:xfrm>
           <a:prstGeom prst="rect">
@@ -11882,8 +11882,8 @@
         </p:nvSpPr>
         <p:spPr>
           <a:xfrm>
-            <a:off x="7799832" y="4974336"/>
-            <a:ext cx="3145536" cy="576072"/>
+            <a:off x="7799832" y="4659782"/>
+            <a:ext cx="3145536" cy="899770"/>
           </a:xfrm>
           <a:prstGeom prst="rect">
             <a:avLst/>
@@ -11909,7 +11909,7 @@
                 <a:ea typeface="Aptos" pitchFamily="34" charset="-122"/>
                 <a:cs typeface="Aptos" pitchFamily="34" charset="-120"/>
               </a:rPr>
-              <a:t>Translate this concept into clear decision rights, review steps, documentation expectations, and escalation paths before.</a:t>
+              <a:t>Translate this concept into clear decision rights, review steps, documentation expectations, and escalation paths before an AI-supported workflow is approved.</a:t>
             </a:r>
             <a:endParaRPr lang="en-US" sz="1320" dirty="0"/>
           </a:p>
@@ -12387,7 +12387,7 @@
                 <a:ea typeface="Aptos" pitchFamily="34" charset="-122"/>
                 <a:cs typeface="Aptos" pitchFamily="34" charset="-120"/>
               </a:rPr>
-              <a:t>Use the related plays to identify decisions, participants, timing, approvals, and documentation needed for responsible.</a:t>
+              <a:t>Use the related plays to identify decisions, participants, timing, approvals, and documentation needed for responsible implementation.</a:t>
             </a:r>
             <a:endParaRPr lang="en-US" sz="1320" dirty="0"/>
           </a:p>
@@ -13006,7 +13006,7 @@
                 <a:ea typeface="Aptos" pitchFamily="34" charset="-122"/>
                 <a:cs typeface="Aptos" pitchFamily="34" charset="-120"/>
               </a:rPr>
-              <a:t>Use linked tools when your department needs a structured worksheet, template, checklist, review process, or.</a:t>
+              <a:t>Use linked tools when your department needs a structured worksheet, template, checklist, review process, or documentation artifact.</a:t>
             </a:r>
             <a:endParaRPr lang="en-US" sz="1320" dirty="0"/>
           </a:p>
@@ -13516,11 +13516,11 @@
         <p:spPr>
           <a:xfrm>
             <a:off x="7635240" y="1325880"/>
-            <a:ext cx="3474720" cy="1325880"/>
+            <a:ext cx="3474720" cy="1255471"/>
           </a:xfrm>
           <a:prstGeom prst="roundRect">
             <a:avLst>
-              <a:gd name="adj" fmla="val 8276"/>
+              <a:gd name="adj" fmla="val 8740"/>
             </a:avLst>
           </a:prstGeom>
           <a:solidFill>
@@ -13582,7 +13582,7 @@
         <p:spPr>
           <a:xfrm>
             <a:off x="7799832" y="1801368"/>
-            <a:ext cx="3145536" cy="758952"/>
+            <a:ext cx="3145536" cy="688543"/>
           </a:xfrm>
           <a:prstGeom prst="rect">
             <a:avLst/>
@@ -13622,12 +13622,12 @@
         </p:nvSpPr>
         <p:spPr>
           <a:xfrm>
-            <a:off x="7635240" y="2788920"/>
-            <a:ext cx="3474720" cy="1536192"/>
+            <a:off x="7635240" y="2718511"/>
+            <a:ext cx="3474720" cy="1328623"/>
           </a:xfrm>
           <a:prstGeom prst="roundRect">
             <a:avLst>
-              <a:gd name="adj" fmla="val 7143"/>
+              <a:gd name="adj" fmla="val 8259"/>
             </a:avLst>
           </a:prstGeom>
           <a:solidFill>
@@ -13649,7 +13649,7 @@
         </p:nvSpPr>
         <p:spPr>
           <a:xfrm>
-            <a:off x="7799832" y="2935224"/>
+            <a:off x="7799832" y="2864815"/>
             <a:ext cx="3145536" cy="256032"/>
           </a:xfrm>
           <a:prstGeom prst="rect">
@@ -13688,8 +13688,8 @@
         </p:nvSpPr>
         <p:spPr>
           <a:xfrm>
-            <a:off x="7818120" y="3300984"/>
-            <a:ext cx="3090672" cy="877824"/>
+            <a:off x="7818120" y="3230575"/>
+            <a:ext cx="3090672" cy="670255"/>
           </a:xfrm>
           <a:prstGeom prst="rect">
             <a:avLst/>
@@ -13763,12 +13763,12 @@
         </p:nvSpPr>
         <p:spPr>
           <a:xfrm>
-            <a:off x="7635240" y="4498848"/>
-            <a:ext cx="3474720" cy="1143000"/>
+            <a:off x="7635240" y="4184294"/>
+            <a:ext cx="3474720" cy="1466698"/>
           </a:xfrm>
           <a:prstGeom prst="roundRect">
             <a:avLst>
-              <a:gd name="adj" fmla="val 9600"/>
+              <a:gd name="adj" fmla="val 7481"/>
             </a:avLst>
           </a:prstGeom>
           <a:solidFill>
@@ -13790,7 +13790,7 @@
         </p:nvSpPr>
         <p:spPr>
           <a:xfrm>
-            <a:off x="7799832" y="4645152"/>
+            <a:off x="7799832" y="4330598"/>
             <a:ext cx="3145536" cy="256032"/>
           </a:xfrm>
           <a:prstGeom prst="rect">
@@ -13829,8 +13829,8 @@
         </p:nvSpPr>
         <p:spPr>
           <a:xfrm>
-            <a:off x="7799832" y="4974336"/>
-            <a:ext cx="3145536" cy="576072"/>
+            <a:off x="7799832" y="4659782"/>
+            <a:ext cx="3145536" cy="899770"/>
           </a:xfrm>
           <a:prstGeom prst="rect">
             <a:avLst/>
@@ -13856,7 +13856,7 @@
                 <a:ea typeface="Aptos" pitchFamily="34" charset="-122"/>
                 <a:cs typeface="Aptos" pitchFamily="34" charset="-120"/>
               </a:rPr>
-              <a:t>Use the assignment to test whether you can explain the concept, apply it to a realistic public health situation, and.</a:t>
+              <a:t>Use the assignment to test whether you can explain the concept, apply it to a realistic public health situation, and identify what would need review before the work moves forward.</a:t>
             </a:r>
             <a:endParaRPr lang="en-US" sz="1320" dirty="0"/>
           </a:p>
@@ -14191,11 +14191,11 @@
         <p:spPr>
           <a:xfrm>
             <a:off x="7635240" y="1325880"/>
-            <a:ext cx="3474720" cy="1325880"/>
+            <a:ext cx="3474720" cy="1255471"/>
           </a:xfrm>
           <a:prstGeom prst="roundRect">
             <a:avLst>
-              <a:gd name="adj" fmla="val 8276"/>
+              <a:gd name="adj" fmla="val 8740"/>
             </a:avLst>
           </a:prstGeom>
           <a:solidFill>
@@ -14257,7 +14257,7 @@
         <p:spPr>
           <a:xfrm>
             <a:off x="7799832" y="1801368"/>
-            <a:ext cx="3145536" cy="758952"/>
+            <a:ext cx="3145536" cy="688543"/>
           </a:xfrm>
           <a:prstGeom prst="rect">
             <a:avLst/>
@@ -14297,12 +14297,12 @@
         </p:nvSpPr>
         <p:spPr>
           <a:xfrm>
-            <a:off x="7635240" y="2788920"/>
-            <a:ext cx="3474720" cy="1536192"/>
+            <a:off x="7635240" y="2718511"/>
+            <a:ext cx="3474720" cy="1328623"/>
           </a:xfrm>
           <a:prstGeom prst="roundRect">
             <a:avLst>
-              <a:gd name="adj" fmla="val 7143"/>
+              <a:gd name="adj" fmla="val 8259"/>
             </a:avLst>
           </a:prstGeom>
           <a:solidFill>
@@ -14324,7 +14324,7 @@
         </p:nvSpPr>
         <p:spPr>
           <a:xfrm>
-            <a:off x="7799832" y="2935224"/>
+            <a:off x="7799832" y="2864815"/>
             <a:ext cx="3145536" cy="256032"/>
           </a:xfrm>
           <a:prstGeom prst="rect">
@@ -14363,8 +14363,8 @@
         </p:nvSpPr>
         <p:spPr>
           <a:xfrm>
-            <a:off x="7818120" y="3300984"/>
-            <a:ext cx="3090672" cy="877824"/>
+            <a:off x="7818120" y="3230575"/>
+            <a:ext cx="3090672" cy="670255"/>
           </a:xfrm>
           <a:prstGeom prst="rect">
             <a:avLst/>
@@ -14404,12 +14404,12 @@
         </p:nvSpPr>
         <p:spPr>
           <a:xfrm>
-            <a:off x="7635240" y="4498848"/>
-            <a:ext cx="3474720" cy="1143000"/>
+            <a:off x="7635240" y="4184294"/>
+            <a:ext cx="3474720" cy="1466698"/>
           </a:xfrm>
           <a:prstGeom prst="roundRect">
             <a:avLst>
-              <a:gd name="adj" fmla="val 9600"/>
+              <a:gd name="adj" fmla="val 7481"/>
             </a:avLst>
           </a:prstGeom>
           <a:solidFill>
@@ -14431,7 +14431,7 @@
         </p:nvSpPr>
         <p:spPr>
           <a:xfrm>
-            <a:off x="7799832" y="4645152"/>
+            <a:off x="7799832" y="4330598"/>
             <a:ext cx="3145536" cy="256032"/>
           </a:xfrm>
           <a:prstGeom prst="rect">
@@ -14470,8 +14470,8 @@
         </p:nvSpPr>
         <p:spPr>
           <a:xfrm>
-            <a:off x="7799832" y="4974336"/>
-            <a:ext cx="3145536" cy="576072"/>
+            <a:off x="7799832" y="4659782"/>
+            <a:ext cx="3145536" cy="899770"/>
           </a:xfrm>
           <a:prstGeom prst="rect">
             <a:avLst/>
@@ -14497,7 +14497,7 @@
                 <a:ea typeface="Aptos" pitchFamily="34" charset="-122"/>
                 <a:cs typeface="Aptos" pitchFamily="34" charset="-120"/>
               </a:rPr>
-              <a:t>Use the assignment to test whether you can explain the concept, apply it to a realistic public health situation, and.</a:t>
+              <a:t>Use the assignment to test whether you can explain the concept, apply it to a realistic public health situation, and identify what would need review before the work moves forward.</a:t>
             </a:r>
             <a:endParaRPr lang="en-US" sz="1320" dirty="0"/>
           </a:p>
@@ -14866,11 +14866,11 @@
         <p:spPr>
           <a:xfrm>
             <a:off x="7635240" y="1325880"/>
-            <a:ext cx="3474720" cy="1325880"/>
+            <a:ext cx="3474720" cy="1207008"/>
           </a:xfrm>
           <a:prstGeom prst="roundRect">
             <a:avLst>
-              <a:gd name="adj" fmla="val 8276"/>
+              <a:gd name="adj" fmla="val 9091"/>
             </a:avLst>
           </a:prstGeom>
           <a:solidFill>
@@ -14932,7 +14932,7 @@
         <p:spPr>
           <a:xfrm>
             <a:off x="7799832" y="1801368"/>
-            <a:ext cx="3145536" cy="758952"/>
+            <a:ext cx="3145536" cy="640080"/>
           </a:xfrm>
           <a:prstGeom prst="rect">
             <a:avLst/>
@@ -14972,12 +14972,12 @@
         </p:nvSpPr>
         <p:spPr>
           <a:xfrm>
-            <a:off x="7635240" y="2788920"/>
-            <a:ext cx="3474720" cy="1536192"/>
+            <a:off x="7635240" y="2670048"/>
+            <a:ext cx="3474720" cy="1377086"/>
           </a:xfrm>
           <a:prstGeom prst="roundRect">
             <a:avLst>
-              <a:gd name="adj" fmla="val 7143"/>
+              <a:gd name="adj" fmla="val 7968"/>
             </a:avLst>
           </a:prstGeom>
           <a:solidFill>
@@ -14999,8 +14999,8 @@
         </p:nvSpPr>
         <p:spPr>
           <a:xfrm>
-            <a:off x="7799832" y="2935224"/>
-            <a:ext cx="3145536" cy="256032"/>
+            <a:off x="7799832" y="2798064"/>
+            <a:ext cx="3145536" cy="237744"/>
           </a:xfrm>
           <a:prstGeom prst="rect">
             <a:avLst/>
@@ -15016,7 +15016,7 @@
               <a:buNone/>
             </a:pPr>
             <a:r>
-              <a:rPr lang="en-US" sz="1300" b="1" dirty="0">
+              <a:rPr lang="en-US" sz="1250" b="1" dirty="0">
                 <a:solidFill>
                   <a:srgbClr val="0068B7"/>
                 </a:solidFill>
@@ -15024,84 +15024,317 @@
                 <a:ea typeface="Aptos" pitchFamily="34" charset="-122"/>
                 <a:cs typeface="Aptos" pitchFamily="34" charset="-120"/>
               </a:rPr>
-              <a:t>Concept checkpoints</a:t>
-            </a:r>
-            <a:endParaRPr lang="en-US" sz="1300" dirty="0"/>
-          </a:p>
-        </p:txBody>
-      </p:sp>
-      <p:sp>
-        <p:nvSpPr>
-          <p:cNvPr id="15" name="Text 13"/>
-          <p:cNvSpPr/>
-          <p:nvPr/>
-        </p:nvSpPr>
-        <p:spPr>
-          <a:xfrm>
-            <a:off x="7818120" y="3300984"/>
-            <a:ext cx="3090672" cy="877824"/>
-          </a:xfrm>
-          <a:prstGeom prst="rect">
-            <a:avLst/>
-          </a:prstGeom>
-          <a:noFill/>
-          <a:ln/>
-        </p:spPr>
-        <p:txBody>
-          <a:bodyPr wrap="square" lIns="508" tIns="508" rIns="508" bIns="508" rtlCol="0" anchor="t">
+              <a:t>Governance pathway</a:t>
+            </a:r>
+            <a:endParaRPr lang="en-US" sz="1250" dirty="0"/>
+          </a:p>
+        </p:txBody>
+      </p:sp>
+      <p:sp>
+        <p:nvSpPr>
+          <p:cNvPr id="15" name="Shape 13"/>
+          <p:cNvSpPr/>
+          <p:nvPr/>
+        </p:nvSpPr>
+        <p:spPr>
+          <a:xfrm>
+            <a:off x="8763000" y="3351276"/>
+            <a:ext cx="164592" cy="0"/>
+          </a:xfrm>
+          <a:prstGeom prst="line">
+            <a:avLst/>
+          </a:prstGeom>
+          <a:noFill/>
+          <a:ln w="15240">
+            <a:solidFill>
+              <a:srgbClr val="8ABBD8"/>
+            </a:solidFill>
+            <a:prstDash val="solid"/>
+          </a:ln>
+        </p:spPr>
+      </p:sp>
+      <p:sp>
+        <p:nvSpPr>
+          <p:cNvPr id="16" name="Shape 14"/>
+          <p:cNvSpPr/>
+          <p:nvPr/>
+        </p:nvSpPr>
+        <p:spPr>
+          <a:xfrm>
+            <a:off x="7872984" y="3200400"/>
+            <a:ext cx="890016" cy="301752"/>
+          </a:xfrm>
+          <a:prstGeom prst="roundRect">
+            <a:avLst>
+              <a:gd name="adj" fmla="val 24242"/>
+            </a:avLst>
+          </a:prstGeom>
+          <a:solidFill>
+            <a:srgbClr val="0068B7"/>
+          </a:solidFill>
+          <a:ln w="12700">
+            <a:solidFill>
+              <a:srgbClr val="0068B7"/>
+            </a:solidFill>
+            <a:prstDash val="solid"/>
+          </a:ln>
+        </p:spPr>
+      </p:sp>
+      <p:sp>
+        <p:nvSpPr>
+          <p:cNvPr id="17" name="Text 15"/>
+          <p:cNvSpPr/>
+          <p:nvPr/>
+        </p:nvSpPr>
+        <p:spPr>
+          <a:xfrm>
+            <a:off x="7909560" y="3273552"/>
+            <a:ext cx="816864" cy="146304"/>
+          </a:xfrm>
+          <a:prstGeom prst="rect">
+            <a:avLst/>
+          </a:prstGeom>
+          <a:noFill/>
+          <a:ln/>
+        </p:spPr>
+        <p:txBody>
+          <a:bodyPr wrap="square" lIns="0" tIns="0" rIns="0" bIns="0" rtlCol="0" anchor="ctr">
             <a:normAutofit/>
           </a:bodyPr>
           <a:lstStyle/>
           <a:p>
-            <a:pPr indent="0" marL="0">
-              <a:buNone/>
-            </a:pPr>
-            <a:r>
-              <a:rPr lang="en-US" sz="1220" dirty="0">
-                <a:solidFill>
-                  <a:srgbClr val="17364A"/>
-                </a:solidFill>
-                <a:latin typeface="Aptos" pitchFamily="34" charset="0"/>
-                <a:ea typeface="Aptos" pitchFamily="34" charset="-122"/>
-                <a:cs typeface="Aptos" pitchFamily="34" charset="-120"/>
-              </a:rPr>
-              <a:t>Data governance defines ownership, stewardship, metadata,.</a:t>
-            </a:r>
-            <a:endParaRPr lang="en-US" sz="1220" dirty="0"/>
-          </a:p>
-          <a:p>
-            <a:pPr indent="0" marL="0">
-              <a:buNone/>
-            </a:pPr>
-            <a:r>
-              <a:rPr lang="en-US" sz="1220" dirty="0">
-                <a:solidFill>
-                  <a:srgbClr val="17364A"/>
-                </a:solidFill>
-                <a:latin typeface="Aptos" pitchFamily="34" charset="0"/>
-                <a:ea typeface="Aptos" pitchFamily="34" charset="-122"/>
-                <a:cs typeface="Aptos" pitchFamily="34" charset="-120"/>
-              </a:rPr>
-              <a:t>This module helps learners connect governance practices to safe AI.</a:t>
-            </a:r>
-            <a:endParaRPr lang="en-US" sz="1220" dirty="0"/>
-          </a:p>
-        </p:txBody>
-      </p:sp>
-      <p:sp>
-        <p:nvSpPr>
-          <p:cNvPr id="16" name="Shape 14"/>
-          <p:cNvSpPr/>
-          <p:nvPr/>
-        </p:nvSpPr>
-        <p:spPr>
-          <a:xfrm>
-            <a:off x="7635240" y="4498848"/>
-            <a:ext cx="3474720" cy="1143000"/>
+            <a:pPr algn="ctr" indent="0" marL="0">
+              <a:buNone/>
+            </a:pPr>
+            <a:r>
+              <a:rPr lang="en-US" sz="880" b="1" dirty="0">
+                <a:solidFill>
+                  <a:srgbClr val="FFFFFF"/>
+                </a:solidFill>
+                <a:latin typeface="Aptos" pitchFamily="34" charset="0"/>
+                <a:ea typeface="Aptos" pitchFamily="34" charset="-122"/>
+                <a:cs typeface="Aptos" pitchFamily="34" charset="-120"/>
+              </a:rPr>
+              <a:t>Submit</a:t>
+            </a:r>
+            <a:endParaRPr lang="en-US" sz="880" dirty="0"/>
+          </a:p>
+        </p:txBody>
+      </p:sp>
+      <p:sp>
+        <p:nvSpPr>
+          <p:cNvPr id="18" name="Shape 16"/>
+          <p:cNvSpPr/>
+          <p:nvPr/>
+        </p:nvSpPr>
+        <p:spPr>
+          <a:xfrm>
+            <a:off x="9817608" y="3351276"/>
+            <a:ext cx="164592" cy="0"/>
+          </a:xfrm>
+          <a:prstGeom prst="line">
+            <a:avLst/>
+          </a:prstGeom>
+          <a:noFill/>
+          <a:ln w="15240">
+            <a:solidFill>
+              <a:srgbClr val="8ABBD8"/>
+            </a:solidFill>
+            <a:prstDash val="solid"/>
+          </a:ln>
+        </p:spPr>
+      </p:sp>
+      <p:sp>
+        <p:nvSpPr>
+          <p:cNvPr id="19" name="Shape 17"/>
+          <p:cNvSpPr/>
+          <p:nvPr/>
+        </p:nvSpPr>
+        <p:spPr>
+          <a:xfrm>
+            <a:off x="8927592" y="3200400"/>
+            <a:ext cx="890016" cy="301752"/>
           </a:xfrm>
           <a:prstGeom prst="roundRect">
             <a:avLst>
-              <a:gd name="adj" fmla="val 9600"/>
+              <a:gd name="adj" fmla="val 24242"/>
+            </a:avLst>
+          </a:prstGeom>
+          <a:solidFill>
+            <a:srgbClr val="2F8A28"/>
+          </a:solidFill>
+          <a:ln w="12700">
+            <a:solidFill>
+              <a:srgbClr val="2F8A28"/>
+            </a:solidFill>
+            <a:prstDash val="solid"/>
+          </a:ln>
+        </p:spPr>
+      </p:sp>
+      <p:sp>
+        <p:nvSpPr>
+          <p:cNvPr id="20" name="Text 18"/>
+          <p:cNvSpPr/>
+          <p:nvPr/>
+        </p:nvSpPr>
+        <p:spPr>
+          <a:xfrm>
+            <a:off x="8964168" y="3273552"/>
+            <a:ext cx="816864" cy="146304"/>
+          </a:xfrm>
+          <a:prstGeom prst="rect">
+            <a:avLst/>
+          </a:prstGeom>
+          <a:noFill/>
+          <a:ln/>
+        </p:spPr>
+        <p:txBody>
+          <a:bodyPr wrap="square" lIns="0" tIns="0" rIns="0" bIns="0" rtlCol="0" anchor="ctr">
+            <a:normAutofit/>
+          </a:bodyPr>
+          <a:lstStyle/>
+          <a:p>
+            <a:pPr algn="ctr" indent="0" marL="0">
+              <a:buNone/>
+            </a:pPr>
+            <a:r>
+              <a:rPr lang="en-US" sz="880" b="1" dirty="0">
+                <a:solidFill>
+                  <a:srgbClr val="FFFFFF"/>
+                </a:solidFill>
+                <a:latin typeface="Aptos" pitchFamily="34" charset="0"/>
+                <a:ea typeface="Aptos" pitchFamily="34" charset="-122"/>
+                <a:cs typeface="Aptos" pitchFamily="34" charset="-120"/>
+              </a:rPr>
+              <a:t>Review</a:t>
+            </a:r>
+            <a:endParaRPr lang="en-US" sz="880" dirty="0"/>
+          </a:p>
+        </p:txBody>
+      </p:sp>
+      <p:sp>
+        <p:nvSpPr>
+          <p:cNvPr id="21" name="Shape 19"/>
+          <p:cNvSpPr/>
+          <p:nvPr/>
+        </p:nvSpPr>
+        <p:spPr>
+          <a:xfrm>
+            <a:off x="9982200" y="3200400"/>
+            <a:ext cx="890016" cy="301752"/>
+          </a:xfrm>
+          <a:prstGeom prst="roundRect">
+            <a:avLst>
+              <a:gd name="adj" fmla="val 24242"/>
+            </a:avLst>
+          </a:prstGeom>
+          <a:solidFill>
+            <a:srgbClr val="6A4CA3"/>
+          </a:solidFill>
+          <a:ln w="12700">
+            <a:solidFill>
+              <a:srgbClr val="6A4CA3"/>
+            </a:solidFill>
+            <a:prstDash val="solid"/>
+          </a:ln>
+        </p:spPr>
+      </p:sp>
+      <p:sp>
+        <p:nvSpPr>
+          <p:cNvPr id="22" name="Text 20"/>
+          <p:cNvSpPr/>
+          <p:nvPr/>
+        </p:nvSpPr>
+        <p:spPr>
+          <a:xfrm>
+            <a:off x="10018776" y="3273552"/>
+            <a:ext cx="816864" cy="146304"/>
+          </a:xfrm>
+          <a:prstGeom prst="rect">
+            <a:avLst/>
+          </a:prstGeom>
+          <a:noFill/>
+          <a:ln/>
+        </p:spPr>
+        <p:txBody>
+          <a:bodyPr wrap="square" lIns="0" tIns="0" rIns="0" bIns="0" rtlCol="0" anchor="ctr">
+            <a:normAutofit/>
+          </a:bodyPr>
+          <a:lstStyle/>
+          <a:p>
+            <a:pPr algn="ctr" indent="0" marL="0">
+              <a:buNone/>
+            </a:pPr>
+            <a:r>
+              <a:rPr lang="en-US" sz="880" b="1" dirty="0">
+                <a:solidFill>
+                  <a:srgbClr val="FFFFFF"/>
+                </a:solidFill>
+                <a:latin typeface="Aptos" pitchFamily="34" charset="0"/>
+                <a:ea typeface="Aptos" pitchFamily="34" charset="-122"/>
+                <a:cs typeface="Aptos" pitchFamily="34" charset="-120"/>
+              </a:rPr>
+              <a:t>Oversee</a:t>
+            </a:r>
+            <a:endParaRPr lang="en-US" sz="880" dirty="0"/>
+          </a:p>
+        </p:txBody>
+      </p:sp>
+      <p:sp>
+        <p:nvSpPr>
+          <p:cNvPr id="23" name="Text 21"/>
+          <p:cNvSpPr/>
+          <p:nvPr/>
+        </p:nvSpPr>
+        <p:spPr>
+          <a:xfrm>
+            <a:off x="7854696" y="3694176"/>
+            <a:ext cx="3035808" cy="206654"/>
+          </a:xfrm>
+          <a:prstGeom prst="rect">
+            <a:avLst/>
+          </a:prstGeom>
+          <a:noFill/>
+          <a:ln/>
+        </p:spPr>
+        <p:txBody>
+          <a:bodyPr wrap="square" lIns="254" tIns="254" rIns="254" bIns="254" rtlCol="0" anchor="t">
+            <a:normAutofit/>
+          </a:bodyPr>
+          <a:lstStyle/>
+          <a:p>
+            <a:pPr indent="0" marL="0">
+              <a:buNone/>
+            </a:pPr>
+            <a:r>
+              <a:rPr lang="en-US" sz="1120" dirty="0">
+                <a:solidFill>
+                  <a:srgbClr val="17364A"/>
+                </a:solidFill>
+                <a:latin typeface="Aptos" pitchFamily="34" charset="0"/>
+                <a:ea typeface="Aptos" pitchFamily="34" charset="-122"/>
+                <a:cs typeface="Aptos" pitchFamily="34" charset="-120"/>
+              </a:rPr>
+              <a:t>A proposed AI use should move through documented review before it becomes an operational workflow.</a:t>
+            </a:r>
+            <a:endParaRPr lang="en-US" sz="1120" dirty="0"/>
+          </a:p>
+        </p:txBody>
+      </p:sp>
+      <p:sp>
+        <p:nvSpPr>
+          <p:cNvPr id="24" name="Shape 22"/>
+          <p:cNvSpPr/>
+          <p:nvPr/>
+        </p:nvSpPr>
+        <p:spPr>
+          <a:xfrm>
+            <a:off x="7635240" y="4184294"/>
+            <a:ext cx="3474720" cy="1466698"/>
+          </a:xfrm>
+          <a:prstGeom prst="roundRect">
+            <a:avLst>
+              <a:gd name="adj" fmla="val 7481"/>
             </a:avLst>
           </a:prstGeom>
           <a:solidFill>
@@ -15117,13 +15350,13 @@
       </p:sp>
       <p:sp>
         <p:nvSpPr>
-          <p:cNvPr id="17" name="Text 15"/>
-          <p:cNvSpPr/>
-          <p:nvPr/>
-        </p:nvSpPr>
-        <p:spPr>
-          <a:xfrm>
-            <a:off x="7799832" y="4645152"/>
+          <p:cNvPr id="25" name="Text 23"/>
+          <p:cNvSpPr/>
+          <p:nvPr/>
+        </p:nvSpPr>
+        <p:spPr>
+          <a:xfrm>
+            <a:off x="7799832" y="4330598"/>
             <a:ext cx="3145536" cy="256032"/>
           </a:xfrm>
           <a:prstGeom prst="rect">
@@ -15156,14 +15389,14 @@
       </p:sp>
       <p:sp>
         <p:nvSpPr>
-          <p:cNvPr id="18" name="Text 16"/>
-          <p:cNvSpPr/>
-          <p:nvPr/>
-        </p:nvSpPr>
-        <p:spPr>
-          <a:xfrm>
-            <a:off x="7799832" y="4974336"/>
-            <a:ext cx="3145536" cy="576072"/>
+          <p:cNvPr id="26" name="Text 24"/>
+          <p:cNvSpPr/>
+          <p:nvPr/>
+        </p:nvSpPr>
+        <p:spPr>
+          <a:xfrm>
+            <a:off x="7799832" y="4659782"/>
+            <a:ext cx="3145536" cy="899770"/>
           </a:xfrm>
           <a:prstGeom prst="rect">
             <a:avLst/>
@@ -15189,7 +15422,7 @@
                 <a:ea typeface="Aptos" pitchFamily="34" charset="-122"/>
                 <a:cs typeface="Aptos" pitchFamily="34" charset="-120"/>
               </a:rPr>
-              <a:t>Translate this concept into clear decision rights, review steps, documentation expectations, and escalation paths before.</a:t>
+              <a:t>Translate this concept into clear decision rights, review steps, documentation expectations, and escalation paths before an AI-supported workflow is approved.</a:t>
             </a:r>
             <a:endParaRPr lang="en-US" sz="1320" dirty="0"/>
           </a:p>
@@ -15558,11 +15791,11 @@
         <p:spPr>
           <a:xfrm>
             <a:off x="7635240" y="1325880"/>
-            <a:ext cx="3474720" cy="1325880"/>
+            <a:ext cx="3474720" cy="1207008"/>
           </a:xfrm>
           <a:prstGeom prst="roundRect">
             <a:avLst>
-              <a:gd name="adj" fmla="val 8276"/>
+              <a:gd name="adj" fmla="val 9091"/>
             </a:avLst>
           </a:prstGeom>
           <a:solidFill>
@@ -15624,7 +15857,7 @@
         <p:spPr>
           <a:xfrm>
             <a:off x="7799832" y="1801368"/>
-            <a:ext cx="3145536" cy="758952"/>
+            <a:ext cx="3145536" cy="640080"/>
           </a:xfrm>
           <a:prstGeom prst="rect">
             <a:avLst/>
@@ -15650,7 +15883,7 @@
                 <a:ea typeface="Aptos" pitchFamily="34" charset="-122"/>
                 <a:cs typeface="Aptos" pitchFamily="34" charset="-120"/>
               </a:rPr>
-              <a:t>This module provides national-level training guidance for public health agencies and partners.</a:t>
+              <a:t>This module provides national-level training guidance for public health agencies and.</a:t>
             </a:r>
             <a:endParaRPr lang="en-US" sz="1320" dirty="0"/>
           </a:p>
@@ -15664,12 +15897,12 @@
         </p:nvSpPr>
         <p:spPr>
           <a:xfrm>
-            <a:off x="7635240" y="2788920"/>
-            <a:ext cx="3474720" cy="1536192"/>
+            <a:off x="7635240" y="2670048"/>
+            <a:ext cx="3474720" cy="1377086"/>
           </a:xfrm>
           <a:prstGeom prst="roundRect">
             <a:avLst>
-              <a:gd name="adj" fmla="val 7143"/>
+              <a:gd name="adj" fmla="val 7968"/>
             </a:avLst>
           </a:prstGeom>
           <a:solidFill>
@@ -15691,8 +15924,8 @@
         </p:nvSpPr>
         <p:spPr>
           <a:xfrm>
-            <a:off x="7799832" y="2935224"/>
-            <a:ext cx="3145536" cy="256032"/>
+            <a:off x="7799832" y="2798064"/>
+            <a:ext cx="3145536" cy="237744"/>
           </a:xfrm>
           <a:prstGeom prst="rect">
             <a:avLst/>
@@ -15708,7 +15941,7 @@
               <a:buNone/>
             </a:pPr>
             <a:r>
-              <a:rPr lang="en-US" sz="1300" b="1" dirty="0">
+              <a:rPr lang="en-US" sz="1250" b="1" dirty="0">
                 <a:solidFill>
                   <a:srgbClr val="0068B7"/>
                 </a:solidFill>
@@ -15716,101 +15949,317 @@
                 <a:ea typeface="Aptos" pitchFamily="34" charset="-122"/>
                 <a:cs typeface="Aptos" pitchFamily="34" charset="-120"/>
               </a:rPr>
-              <a:t>Concept checkpoints</a:t>
-            </a:r>
-            <a:endParaRPr lang="en-US" sz="1300" dirty="0"/>
-          </a:p>
-        </p:txBody>
-      </p:sp>
-      <p:sp>
-        <p:nvSpPr>
-          <p:cNvPr id="15" name="Text 13"/>
-          <p:cNvSpPr/>
-          <p:nvPr/>
-        </p:nvSpPr>
-        <p:spPr>
-          <a:xfrm>
-            <a:off x="7818120" y="3300984"/>
-            <a:ext cx="3090672" cy="877824"/>
-          </a:xfrm>
-          <a:prstGeom prst="rect">
-            <a:avLst/>
-          </a:prstGeom>
-          <a:noFill/>
-          <a:ln/>
-        </p:spPr>
-        <p:txBody>
-          <a:bodyPr wrap="square" lIns="508" tIns="508" rIns="508" bIns="508" rtlCol="0" anchor="t">
+              <a:t>Governance pathway</a:t>
+            </a:r>
+            <a:endParaRPr lang="en-US" sz="1250" dirty="0"/>
+          </a:p>
+        </p:txBody>
+      </p:sp>
+      <p:sp>
+        <p:nvSpPr>
+          <p:cNvPr id="15" name="Shape 13"/>
+          <p:cNvSpPr/>
+          <p:nvPr/>
+        </p:nvSpPr>
+        <p:spPr>
+          <a:xfrm>
+            <a:off x="8763000" y="3351276"/>
+            <a:ext cx="164592" cy="0"/>
+          </a:xfrm>
+          <a:prstGeom prst="line">
+            <a:avLst/>
+          </a:prstGeom>
+          <a:noFill/>
+          <a:ln w="15240">
+            <a:solidFill>
+              <a:srgbClr val="8ABBD8"/>
+            </a:solidFill>
+            <a:prstDash val="solid"/>
+          </a:ln>
+        </p:spPr>
+      </p:sp>
+      <p:sp>
+        <p:nvSpPr>
+          <p:cNvPr id="16" name="Shape 14"/>
+          <p:cNvSpPr/>
+          <p:nvPr/>
+        </p:nvSpPr>
+        <p:spPr>
+          <a:xfrm>
+            <a:off x="7872984" y="3200400"/>
+            <a:ext cx="890016" cy="301752"/>
+          </a:xfrm>
+          <a:prstGeom prst="roundRect">
+            <a:avLst>
+              <a:gd name="adj" fmla="val 24242"/>
+            </a:avLst>
+          </a:prstGeom>
+          <a:solidFill>
+            <a:srgbClr val="0068B7"/>
+          </a:solidFill>
+          <a:ln w="12700">
+            <a:solidFill>
+              <a:srgbClr val="0068B7"/>
+            </a:solidFill>
+            <a:prstDash val="solid"/>
+          </a:ln>
+        </p:spPr>
+      </p:sp>
+      <p:sp>
+        <p:nvSpPr>
+          <p:cNvPr id="17" name="Text 15"/>
+          <p:cNvSpPr/>
+          <p:nvPr/>
+        </p:nvSpPr>
+        <p:spPr>
+          <a:xfrm>
+            <a:off x="7909560" y="3273552"/>
+            <a:ext cx="816864" cy="146304"/>
+          </a:xfrm>
+          <a:prstGeom prst="rect">
+            <a:avLst/>
+          </a:prstGeom>
+          <a:noFill/>
+          <a:ln/>
+        </p:spPr>
+        <p:txBody>
+          <a:bodyPr wrap="square" lIns="0" tIns="0" rIns="0" bIns="0" rtlCol="0" anchor="ctr">
             <a:normAutofit/>
           </a:bodyPr>
           <a:lstStyle/>
           <a:p>
-            <a:pPr indent="0" marL="0">
-              <a:buNone/>
-            </a:pPr>
-            <a:r>
-              <a:rPr lang="en-US" sz="1220" dirty="0">
-                <a:solidFill>
-                  <a:srgbClr val="17364A"/>
-                </a:solidFill>
-                <a:latin typeface="Aptos" pitchFamily="34" charset="0"/>
-                <a:ea typeface="Aptos" pitchFamily="34" charset="-122"/>
-                <a:cs typeface="Aptos" pitchFamily="34" charset="-120"/>
-              </a:rPr>
-              <a:t>It is not legal advice and does not replace review by agency legal.</a:t>
-            </a:r>
-            <a:endParaRPr lang="en-US" sz="1220" dirty="0"/>
-          </a:p>
-          <a:p>
-            <a:pPr indent="0" marL="0">
-              <a:buNone/>
-            </a:pPr>
-            <a:r>
-              <a:rPr lang="en-US" sz="1220" dirty="0">
-                <a:solidFill>
-                  <a:srgbClr val="17364A"/>
-                </a:solidFill>
-                <a:latin typeface="Aptos" pitchFamily="34" charset="0"/>
-                <a:ea typeface="Aptos" pitchFamily="34" charset="-122"/>
-                <a:cs typeface="Aptos" pitchFamily="34" charset="-120"/>
-              </a:rPr>
-              <a:t>Requirements may vary by state, locality, territory, Tribe,.</a:t>
-            </a:r>
-            <a:endParaRPr lang="en-US" sz="1220" dirty="0"/>
-          </a:p>
-          <a:p>
-            <a:pPr indent="0" marL="0">
-              <a:buNone/>
-            </a:pPr>
-            <a:r>
-              <a:rPr lang="en-US" sz="1220" dirty="0">
-                <a:solidFill>
-                  <a:srgbClr val="17364A"/>
-                </a:solidFill>
-                <a:latin typeface="Aptos" pitchFamily="34" charset="0"/>
-                <a:ea typeface="Aptos" pitchFamily="34" charset="-122"/>
-                <a:cs typeface="Aptos" pitchFamily="34" charset="-120"/>
-              </a:rPr>
-              <a:t>Learners should use this module to identify the issues that.</a:t>
-            </a:r>
-            <a:endParaRPr lang="en-US" sz="1220" dirty="0"/>
-          </a:p>
-        </p:txBody>
-      </p:sp>
-      <p:sp>
-        <p:nvSpPr>
-          <p:cNvPr id="16" name="Shape 14"/>
-          <p:cNvSpPr/>
-          <p:nvPr/>
-        </p:nvSpPr>
-        <p:spPr>
-          <a:xfrm>
-            <a:off x="7635240" y="4498848"/>
-            <a:ext cx="3474720" cy="1143000"/>
+            <a:pPr algn="ctr" indent="0" marL="0">
+              <a:buNone/>
+            </a:pPr>
+            <a:r>
+              <a:rPr lang="en-US" sz="880" b="1" dirty="0">
+                <a:solidFill>
+                  <a:srgbClr val="FFFFFF"/>
+                </a:solidFill>
+                <a:latin typeface="Aptos" pitchFamily="34" charset="0"/>
+                <a:ea typeface="Aptos" pitchFamily="34" charset="-122"/>
+                <a:cs typeface="Aptos" pitchFamily="34" charset="-120"/>
+              </a:rPr>
+              <a:t>Submit</a:t>
+            </a:r>
+            <a:endParaRPr lang="en-US" sz="880" dirty="0"/>
+          </a:p>
+        </p:txBody>
+      </p:sp>
+      <p:sp>
+        <p:nvSpPr>
+          <p:cNvPr id="18" name="Shape 16"/>
+          <p:cNvSpPr/>
+          <p:nvPr/>
+        </p:nvSpPr>
+        <p:spPr>
+          <a:xfrm>
+            <a:off x="9817608" y="3351276"/>
+            <a:ext cx="164592" cy="0"/>
+          </a:xfrm>
+          <a:prstGeom prst="line">
+            <a:avLst/>
+          </a:prstGeom>
+          <a:noFill/>
+          <a:ln w="15240">
+            <a:solidFill>
+              <a:srgbClr val="8ABBD8"/>
+            </a:solidFill>
+            <a:prstDash val="solid"/>
+          </a:ln>
+        </p:spPr>
+      </p:sp>
+      <p:sp>
+        <p:nvSpPr>
+          <p:cNvPr id="19" name="Shape 17"/>
+          <p:cNvSpPr/>
+          <p:nvPr/>
+        </p:nvSpPr>
+        <p:spPr>
+          <a:xfrm>
+            <a:off x="8927592" y="3200400"/>
+            <a:ext cx="890016" cy="301752"/>
           </a:xfrm>
           <a:prstGeom prst="roundRect">
             <a:avLst>
-              <a:gd name="adj" fmla="val 9600"/>
+              <a:gd name="adj" fmla="val 24242"/>
+            </a:avLst>
+          </a:prstGeom>
+          <a:solidFill>
+            <a:srgbClr val="2F8A28"/>
+          </a:solidFill>
+          <a:ln w="12700">
+            <a:solidFill>
+              <a:srgbClr val="2F8A28"/>
+            </a:solidFill>
+            <a:prstDash val="solid"/>
+          </a:ln>
+        </p:spPr>
+      </p:sp>
+      <p:sp>
+        <p:nvSpPr>
+          <p:cNvPr id="20" name="Text 18"/>
+          <p:cNvSpPr/>
+          <p:nvPr/>
+        </p:nvSpPr>
+        <p:spPr>
+          <a:xfrm>
+            <a:off x="8964168" y="3273552"/>
+            <a:ext cx="816864" cy="146304"/>
+          </a:xfrm>
+          <a:prstGeom prst="rect">
+            <a:avLst/>
+          </a:prstGeom>
+          <a:noFill/>
+          <a:ln/>
+        </p:spPr>
+        <p:txBody>
+          <a:bodyPr wrap="square" lIns="0" tIns="0" rIns="0" bIns="0" rtlCol="0" anchor="ctr">
+            <a:normAutofit/>
+          </a:bodyPr>
+          <a:lstStyle/>
+          <a:p>
+            <a:pPr algn="ctr" indent="0" marL="0">
+              <a:buNone/>
+            </a:pPr>
+            <a:r>
+              <a:rPr lang="en-US" sz="880" b="1" dirty="0">
+                <a:solidFill>
+                  <a:srgbClr val="FFFFFF"/>
+                </a:solidFill>
+                <a:latin typeface="Aptos" pitchFamily="34" charset="0"/>
+                <a:ea typeface="Aptos" pitchFamily="34" charset="-122"/>
+                <a:cs typeface="Aptos" pitchFamily="34" charset="-120"/>
+              </a:rPr>
+              <a:t>Review</a:t>
+            </a:r>
+            <a:endParaRPr lang="en-US" sz="880" dirty="0"/>
+          </a:p>
+        </p:txBody>
+      </p:sp>
+      <p:sp>
+        <p:nvSpPr>
+          <p:cNvPr id="21" name="Shape 19"/>
+          <p:cNvSpPr/>
+          <p:nvPr/>
+        </p:nvSpPr>
+        <p:spPr>
+          <a:xfrm>
+            <a:off x="9982200" y="3200400"/>
+            <a:ext cx="890016" cy="301752"/>
+          </a:xfrm>
+          <a:prstGeom prst="roundRect">
+            <a:avLst>
+              <a:gd name="adj" fmla="val 24242"/>
+            </a:avLst>
+          </a:prstGeom>
+          <a:solidFill>
+            <a:srgbClr val="6A4CA3"/>
+          </a:solidFill>
+          <a:ln w="12700">
+            <a:solidFill>
+              <a:srgbClr val="6A4CA3"/>
+            </a:solidFill>
+            <a:prstDash val="solid"/>
+          </a:ln>
+        </p:spPr>
+      </p:sp>
+      <p:sp>
+        <p:nvSpPr>
+          <p:cNvPr id="22" name="Text 20"/>
+          <p:cNvSpPr/>
+          <p:nvPr/>
+        </p:nvSpPr>
+        <p:spPr>
+          <a:xfrm>
+            <a:off x="10018776" y="3273552"/>
+            <a:ext cx="816864" cy="146304"/>
+          </a:xfrm>
+          <a:prstGeom prst="rect">
+            <a:avLst/>
+          </a:prstGeom>
+          <a:noFill/>
+          <a:ln/>
+        </p:spPr>
+        <p:txBody>
+          <a:bodyPr wrap="square" lIns="0" tIns="0" rIns="0" bIns="0" rtlCol="0" anchor="ctr">
+            <a:normAutofit/>
+          </a:bodyPr>
+          <a:lstStyle/>
+          <a:p>
+            <a:pPr algn="ctr" indent="0" marL="0">
+              <a:buNone/>
+            </a:pPr>
+            <a:r>
+              <a:rPr lang="en-US" sz="880" b="1" dirty="0">
+                <a:solidFill>
+                  <a:srgbClr val="FFFFFF"/>
+                </a:solidFill>
+                <a:latin typeface="Aptos" pitchFamily="34" charset="0"/>
+                <a:ea typeface="Aptos" pitchFamily="34" charset="-122"/>
+                <a:cs typeface="Aptos" pitchFamily="34" charset="-120"/>
+              </a:rPr>
+              <a:t>Oversee</a:t>
+            </a:r>
+            <a:endParaRPr lang="en-US" sz="880" dirty="0"/>
+          </a:p>
+        </p:txBody>
+      </p:sp>
+      <p:sp>
+        <p:nvSpPr>
+          <p:cNvPr id="23" name="Text 21"/>
+          <p:cNvSpPr/>
+          <p:nvPr/>
+        </p:nvSpPr>
+        <p:spPr>
+          <a:xfrm>
+            <a:off x="7854696" y="3694176"/>
+            <a:ext cx="3035808" cy="206654"/>
+          </a:xfrm>
+          <a:prstGeom prst="rect">
+            <a:avLst/>
+          </a:prstGeom>
+          <a:noFill/>
+          <a:ln/>
+        </p:spPr>
+        <p:txBody>
+          <a:bodyPr wrap="square" lIns="254" tIns="254" rIns="254" bIns="254" rtlCol="0" anchor="t">
+            <a:normAutofit/>
+          </a:bodyPr>
+          <a:lstStyle/>
+          <a:p>
+            <a:pPr indent="0" marL="0">
+              <a:buNone/>
+            </a:pPr>
+            <a:r>
+              <a:rPr lang="en-US" sz="1120" dirty="0">
+                <a:solidFill>
+                  <a:srgbClr val="17364A"/>
+                </a:solidFill>
+                <a:latin typeface="Aptos" pitchFamily="34" charset="0"/>
+                <a:ea typeface="Aptos" pitchFamily="34" charset="-122"/>
+                <a:cs typeface="Aptos" pitchFamily="34" charset="-120"/>
+              </a:rPr>
+              <a:t>A proposed AI use should move through documented review before it becomes an operational workflow.</a:t>
+            </a:r>
+            <a:endParaRPr lang="en-US" sz="1120" dirty="0"/>
+          </a:p>
+        </p:txBody>
+      </p:sp>
+      <p:sp>
+        <p:nvSpPr>
+          <p:cNvPr id="24" name="Shape 22"/>
+          <p:cNvSpPr/>
+          <p:nvPr/>
+        </p:nvSpPr>
+        <p:spPr>
+          <a:xfrm>
+            <a:off x="7635240" y="4184294"/>
+            <a:ext cx="3474720" cy="1466698"/>
+          </a:xfrm>
+          <a:prstGeom prst="roundRect">
+            <a:avLst>
+              <a:gd name="adj" fmla="val 7481"/>
             </a:avLst>
           </a:prstGeom>
           <a:solidFill>
@@ -15826,13 +16275,13 @@
       </p:sp>
       <p:sp>
         <p:nvSpPr>
-          <p:cNvPr id="17" name="Text 15"/>
-          <p:cNvSpPr/>
-          <p:nvPr/>
-        </p:nvSpPr>
-        <p:spPr>
-          <a:xfrm>
-            <a:off x="7799832" y="4645152"/>
+          <p:cNvPr id="25" name="Text 23"/>
+          <p:cNvSpPr/>
+          <p:nvPr/>
+        </p:nvSpPr>
+        <p:spPr>
+          <a:xfrm>
+            <a:off x="7799832" y="4330598"/>
             <a:ext cx="3145536" cy="256032"/>
           </a:xfrm>
           <a:prstGeom prst="rect">
@@ -15865,14 +16314,14 @@
       </p:sp>
       <p:sp>
         <p:nvSpPr>
-          <p:cNvPr id="18" name="Text 16"/>
-          <p:cNvSpPr/>
-          <p:nvPr/>
-        </p:nvSpPr>
-        <p:spPr>
-          <a:xfrm>
-            <a:off x="7799832" y="4974336"/>
-            <a:ext cx="3145536" cy="576072"/>
+          <p:cNvPr id="26" name="Text 24"/>
+          <p:cNvSpPr/>
+          <p:nvPr/>
+        </p:nvSpPr>
+        <p:spPr>
+          <a:xfrm>
+            <a:off x="7799832" y="4659782"/>
+            <a:ext cx="3145536" cy="899770"/>
           </a:xfrm>
           <a:prstGeom prst="rect">
             <a:avLst/>
@@ -15898,7 +16347,7 @@
                 <a:ea typeface="Aptos" pitchFamily="34" charset="-122"/>
                 <a:cs typeface="Aptos" pitchFamily="34" charset="-120"/>
               </a:rPr>
-              <a:t>Translate this concept into clear decision rights, review steps, documentation expectations, and escalation paths before.</a:t>
+              <a:t>Translate this concept into clear decision rights, review steps, documentation expectations, and escalation paths before an AI-supported workflow is approved.</a:t>
             </a:r>
             <a:endParaRPr lang="en-US" sz="1320" dirty="0"/>
           </a:p>
@@ -16267,11 +16716,11 @@
         <p:spPr>
           <a:xfrm>
             <a:off x="7635240" y="1325880"/>
-            <a:ext cx="3474720" cy="1325880"/>
+            <a:ext cx="3474720" cy="1255471"/>
           </a:xfrm>
           <a:prstGeom prst="roundRect">
             <a:avLst>
-              <a:gd name="adj" fmla="val 8276"/>
+              <a:gd name="adj" fmla="val 8740"/>
             </a:avLst>
           </a:prstGeom>
           <a:solidFill>
@@ -16333,7 +16782,7 @@
         <p:spPr>
           <a:xfrm>
             <a:off x="7799832" y="1801368"/>
-            <a:ext cx="3145536" cy="758952"/>
+            <a:ext cx="3145536" cy="688543"/>
           </a:xfrm>
           <a:prstGeom prst="rect">
             <a:avLst/>
@@ -16373,12 +16822,12 @@
         </p:nvSpPr>
         <p:spPr>
           <a:xfrm>
-            <a:off x="7635240" y="2788920"/>
-            <a:ext cx="3474720" cy="1536192"/>
+            <a:off x="7635240" y="2718511"/>
+            <a:ext cx="3474720" cy="1328623"/>
           </a:xfrm>
           <a:prstGeom prst="roundRect">
             <a:avLst>
-              <a:gd name="adj" fmla="val 7143"/>
+              <a:gd name="adj" fmla="val 8259"/>
             </a:avLst>
           </a:prstGeom>
           <a:solidFill>
@@ -16400,8 +16849,8 @@
         </p:nvSpPr>
         <p:spPr>
           <a:xfrm>
-            <a:off x="7799832" y="2935224"/>
-            <a:ext cx="3145536" cy="256032"/>
+            <a:off x="7799832" y="2846527"/>
+            <a:ext cx="3145536" cy="237744"/>
           </a:xfrm>
           <a:prstGeom prst="rect">
             <a:avLst/>
@@ -16417,7 +16866,7 @@
               <a:buNone/>
             </a:pPr>
             <a:r>
-              <a:rPr lang="en-US" sz="1300" b="1" dirty="0">
+              <a:rPr lang="en-US" sz="1250" b="1" dirty="0">
                 <a:solidFill>
                   <a:srgbClr val="0068B7"/>
                 </a:solidFill>
@@ -16425,101 +16874,317 @@
                 <a:ea typeface="Aptos" pitchFamily="34" charset="-122"/>
                 <a:cs typeface="Aptos" pitchFamily="34" charset="-120"/>
               </a:rPr>
-              <a:t>Concept checkpoints</a:t>
-            </a:r>
-            <a:endParaRPr lang="en-US" sz="1300" dirty="0"/>
-          </a:p>
-        </p:txBody>
-      </p:sp>
-      <p:sp>
-        <p:nvSpPr>
-          <p:cNvPr id="15" name="Text 13"/>
-          <p:cNvSpPr/>
-          <p:nvPr/>
-        </p:nvSpPr>
-        <p:spPr>
-          <a:xfrm>
-            <a:off x="7818120" y="3300984"/>
-            <a:ext cx="3090672" cy="877824"/>
-          </a:xfrm>
-          <a:prstGeom prst="rect">
-            <a:avLst/>
-          </a:prstGeom>
-          <a:noFill/>
-          <a:ln/>
-        </p:spPr>
-        <p:txBody>
-          <a:bodyPr wrap="square" lIns="508" tIns="508" rIns="508" bIns="508" rtlCol="0" anchor="t">
+              <a:t>Governance pathway</a:t>
+            </a:r>
+            <a:endParaRPr lang="en-US" sz="1250" dirty="0"/>
+          </a:p>
+        </p:txBody>
+      </p:sp>
+      <p:sp>
+        <p:nvSpPr>
+          <p:cNvPr id="15" name="Shape 13"/>
+          <p:cNvSpPr/>
+          <p:nvPr/>
+        </p:nvSpPr>
+        <p:spPr>
+          <a:xfrm>
+            <a:off x="8763000" y="3399739"/>
+            <a:ext cx="164592" cy="0"/>
+          </a:xfrm>
+          <a:prstGeom prst="line">
+            <a:avLst/>
+          </a:prstGeom>
+          <a:noFill/>
+          <a:ln w="15240">
+            <a:solidFill>
+              <a:srgbClr val="8ABBD8"/>
+            </a:solidFill>
+            <a:prstDash val="solid"/>
+          </a:ln>
+        </p:spPr>
+      </p:sp>
+      <p:sp>
+        <p:nvSpPr>
+          <p:cNvPr id="16" name="Shape 14"/>
+          <p:cNvSpPr/>
+          <p:nvPr/>
+        </p:nvSpPr>
+        <p:spPr>
+          <a:xfrm>
+            <a:off x="7872984" y="3248863"/>
+            <a:ext cx="890016" cy="301752"/>
+          </a:xfrm>
+          <a:prstGeom prst="roundRect">
+            <a:avLst>
+              <a:gd name="adj" fmla="val 24242"/>
+            </a:avLst>
+          </a:prstGeom>
+          <a:solidFill>
+            <a:srgbClr val="0068B7"/>
+          </a:solidFill>
+          <a:ln w="12700">
+            <a:solidFill>
+              <a:srgbClr val="0068B7"/>
+            </a:solidFill>
+            <a:prstDash val="solid"/>
+          </a:ln>
+        </p:spPr>
+      </p:sp>
+      <p:sp>
+        <p:nvSpPr>
+          <p:cNvPr id="17" name="Text 15"/>
+          <p:cNvSpPr/>
+          <p:nvPr/>
+        </p:nvSpPr>
+        <p:spPr>
+          <a:xfrm>
+            <a:off x="7909560" y="3322015"/>
+            <a:ext cx="816864" cy="146304"/>
+          </a:xfrm>
+          <a:prstGeom prst="rect">
+            <a:avLst/>
+          </a:prstGeom>
+          <a:noFill/>
+          <a:ln/>
+        </p:spPr>
+        <p:txBody>
+          <a:bodyPr wrap="square" lIns="0" tIns="0" rIns="0" bIns="0" rtlCol="0" anchor="ctr">
             <a:normAutofit/>
           </a:bodyPr>
           <a:lstStyle/>
           <a:p>
-            <a:pPr indent="0" marL="0">
-              <a:buNone/>
-            </a:pPr>
-            <a:r>
-              <a:rPr lang="en-US" sz="1220" dirty="0">
-                <a:solidFill>
-                  <a:srgbClr val="17364A"/>
-                </a:solidFill>
-                <a:latin typeface="Aptos" pitchFamily="34" charset="0"/>
-                <a:ea typeface="Aptos" pitchFamily="34" charset="-122"/>
-                <a:cs typeface="Aptos" pitchFamily="34" charset="-120"/>
-              </a:rPr>
-              <a:t>Data Governance for AI-Ready Public Health Data matters because AI.</a:t>
-            </a:r>
-            <a:endParaRPr lang="en-US" sz="1220" dirty="0"/>
-          </a:p>
-          <a:p>
-            <a:pPr indent="0" marL="0">
-              <a:buNone/>
-            </a:pPr>
-            <a:r>
-              <a:rPr lang="en-US" sz="1220" dirty="0">
-                <a:solidFill>
-                  <a:srgbClr val="17364A"/>
-                </a:solidFill>
-                <a:latin typeface="Aptos" pitchFamily="34" charset="0"/>
-                <a:ea typeface="Aptos" pitchFamily="34" charset="-122"/>
-                <a:cs typeface="Aptos" pitchFamily="34" charset="-120"/>
-              </a:rPr>
-              <a:t>The topic also affects accountability.</a:t>
-            </a:r>
-            <a:endParaRPr lang="en-US" sz="1220" dirty="0"/>
-          </a:p>
-          <a:p>
-            <a:pPr indent="0" marL="0">
-              <a:buNone/>
-            </a:pPr>
-            <a:r>
-              <a:rPr lang="en-US" sz="1220" dirty="0">
-                <a:solidFill>
-                  <a:srgbClr val="17364A"/>
-                </a:solidFill>
-                <a:latin typeface="Aptos" pitchFamily="34" charset="0"/>
-                <a:ea typeface="Aptos" pitchFamily="34" charset="-122"/>
-                <a:cs typeface="Aptos" pitchFamily="34" charset="-120"/>
-              </a:rPr>
-              <a:t>Public health agencies must be able to explain how data are used,.</a:t>
-            </a:r>
-            <a:endParaRPr lang="en-US" sz="1220" dirty="0"/>
-          </a:p>
-        </p:txBody>
-      </p:sp>
-      <p:sp>
-        <p:nvSpPr>
-          <p:cNvPr id="16" name="Shape 14"/>
-          <p:cNvSpPr/>
-          <p:nvPr/>
-        </p:nvSpPr>
-        <p:spPr>
-          <a:xfrm>
-            <a:off x="7635240" y="4498848"/>
-            <a:ext cx="3474720" cy="1143000"/>
+            <a:pPr algn="ctr" indent="0" marL="0">
+              <a:buNone/>
+            </a:pPr>
+            <a:r>
+              <a:rPr lang="en-US" sz="880" b="1" dirty="0">
+                <a:solidFill>
+                  <a:srgbClr val="FFFFFF"/>
+                </a:solidFill>
+                <a:latin typeface="Aptos" pitchFamily="34" charset="0"/>
+                <a:ea typeface="Aptos" pitchFamily="34" charset="-122"/>
+                <a:cs typeface="Aptos" pitchFamily="34" charset="-120"/>
+              </a:rPr>
+              <a:t>Submit</a:t>
+            </a:r>
+            <a:endParaRPr lang="en-US" sz="880" dirty="0"/>
+          </a:p>
+        </p:txBody>
+      </p:sp>
+      <p:sp>
+        <p:nvSpPr>
+          <p:cNvPr id="18" name="Shape 16"/>
+          <p:cNvSpPr/>
+          <p:nvPr/>
+        </p:nvSpPr>
+        <p:spPr>
+          <a:xfrm>
+            <a:off x="9817608" y="3399739"/>
+            <a:ext cx="164592" cy="0"/>
+          </a:xfrm>
+          <a:prstGeom prst="line">
+            <a:avLst/>
+          </a:prstGeom>
+          <a:noFill/>
+          <a:ln w="15240">
+            <a:solidFill>
+              <a:srgbClr val="8ABBD8"/>
+            </a:solidFill>
+            <a:prstDash val="solid"/>
+          </a:ln>
+        </p:spPr>
+      </p:sp>
+      <p:sp>
+        <p:nvSpPr>
+          <p:cNvPr id="19" name="Shape 17"/>
+          <p:cNvSpPr/>
+          <p:nvPr/>
+        </p:nvSpPr>
+        <p:spPr>
+          <a:xfrm>
+            <a:off x="8927592" y="3248863"/>
+            <a:ext cx="890016" cy="301752"/>
           </a:xfrm>
           <a:prstGeom prst="roundRect">
             <a:avLst>
-              <a:gd name="adj" fmla="val 9600"/>
+              <a:gd name="adj" fmla="val 24242"/>
+            </a:avLst>
+          </a:prstGeom>
+          <a:solidFill>
+            <a:srgbClr val="2F8A28"/>
+          </a:solidFill>
+          <a:ln w="12700">
+            <a:solidFill>
+              <a:srgbClr val="2F8A28"/>
+            </a:solidFill>
+            <a:prstDash val="solid"/>
+          </a:ln>
+        </p:spPr>
+      </p:sp>
+      <p:sp>
+        <p:nvSpPr>
+          <p:cNvPr id="20" name="Text 18"/>
+          <p:cNvSpPr/>
+          <p:nvPr/>
+        </p:nvSpPr>
+        <p:spPr>
+          <a:xfrm>
+            <a:off x="8964168" y="3322015"/>
+            <a:ext cx="816864" cy="146304"/>
+          </a:xfrm>
+          <a:prstGeom prst="rect">
+            <a:avLst/>
+          </a:prstGeom>
+          <a:noFill/>
+          <a:ln/>
+        </p:spPr>
+        <p:txBody>
+          <a:bodyPr wrap="square" lIns="0" tIns="0" rIns="0" bIns="0" rtlCol="0" anchor="ctr">
+            <a:normAutofit/>
+          </a:bodyPr>
+          <a:lstStyle/>
+          <a:p>
+            <a:pPr algn="ctr" indent="0" marL="0">
+              <a:buNone/>
+            </a:pPr>
+            <a:r>
+              <a:rPr lang="en-US" sz="880" b="1" dirty="0">
+                <a:solidFill>
+                  <a:srgbClr val="FFFFFF"/>
+                </a:solidFill>
+                <a:latin typeface="Aptos" pitchFamily="34" charset="0"/>
+                <a:ea typeface="Aptos" pitchFamily="34" charset="-122"/>
+                <a:cs typeface="Aptos" pitchFamily="34" charset="-120"/>
+              </a:rPr>
+              <a:t>Review</a:t>
+            </a:r>
+            <a:endParaRPr lang="en-US" sz="880" dirty="0"/>
+          </a:p>
+        </p:txBody>
+      </p:sp>
+      <p:sp>
+        <p:nvSpPr>
+          <p:cNvPr id="21" name="Shape 19"/>
+          <p:cNvSpPr/>
+          <p:nvPr/>
+        </p:nvSpPr>
+        <p:spPr>
+          <a:xfrm>
+            <a:off x="9982200" y="3248863"/>
+            <a:ext cx="890016" cy="301752"/>
+          </a:xfrm>
+          <a:prstGeom prst="roundRect">
+            <a:avLst>
+              <a:gd name="adj" fmla="val 24242"/>
+            </a:avLst>
+          </a:prstGeom>
+          <a:solidFill>
+            <a:srgbClr val="6A4CA3"/>
+          </a:solidFill>
+          <a:ln w="12700">
+            <a:solidFill>
+              <a:srgbClr val="6A4CA3"/>
+            </a:solidFill>
+            <a:prstDash val="solid"/>
+          </a:ln>
+        </p:spPr>
+      </p:sp>
+      <p:sp>
+        <p:nvSpPr>
+          <p:cNvPr id="22" name="Text 20"/>
+          <p:cNvSpPr/>
+          <p:nvPr/>
+        </p:nvSpPr>
+        <p:spPr>
+          <a:xfrm>
+            <a:off x="10018776" y="3322015"/>
+            <a:ext cx="816864" cy="146304"/>
+          </a:xfrm>
+          <a:prstGeom prst="rect">
+            <a:avLst/>
+          </a:prstGeom>
+          <a:noFill/>
+          <a:ln/>
+        </p:spPr>
+        <p:txBody>
+          <a:bodyPr wrap="square" lIns="0" tIns="0" rIns="0" bIns="0" rtlCol="0" anchor="ctr">
+            <a:normAutofit/>
+          </a:bodyPr>
+          <a:lstStyle/>
+          <a:p>
+            <a:pPr algn="ctr" indent="0" marL="0">
+              <a:buNone/>
+            </a:pPr>
+            <a:r>
+              <a:rPr lang="en-US" sz="880" b="1" dirty="0">
+                <a:solidFill>
+                  <a:srgbClr val="FFFFFF"/>
+                </a:solidFill>
+                <a:latin typeface="Aptos" pitchFamily="34" charset="0"/>
+                <a:ea typeface="Aptos" pitchFamily="34" charset="-122"/>
+                <a:cs typeface="Aptos" pitchFamily="34" charset="-120"/>
+              </a:rPr>
+              <a:t>Oversee</a:t>
+            </a:r>
+            <a:endParaRPr lang="en-US" sz="880" dirty="0"/>
+          </a:p>
+        </p:txBody>
+      </p:sp>
+      <p:sp>
+        <p:nvSpPr>
+          <p:cNvPr id="23" name="Text 21"/>
+          <p:cNvSpPr/>
+          <p:nvPr/>
+        </p:nvSpPr>
+        <p:spPr>
+          <a:xfrm>
+            <a:off x="7854696" y="3742639"/>
+            <a:ext cx="3035808" cy="158191"/>
+          </a:xfrm>
+          <a:prstGeom prst="rect">
+            <a:avLst/>
+          </a:prstGeom>
+          <a:noFill/>
+          <a:ln/>
+        </p:spPr>
+        <p:txBody>
+          <a:bodyPr wrap="square" lIns="254" tIns="254" rIns="254" bIns="254" rtlCol="0" anchor="t">
+            <a:normAutofit/>
+          </a:bodyPr>
+          <a:lstStyle/>
+          <a:p>
+            <a:pPr indent="0" marL="0">
+              <a:buNone/>
+            </a:pPr>
+            <a:r>
+              <a:rPr lang="en-US" sz="1120" dirty="0">
+                <a:solidFill>
+                  <a:srgbClr val="17364A"/>
+                </a:solidFill>
+                <a:latin typeface="Aptos" pitchFamily="34" charset="0"/>
+                <a:ea typeface="Aptos" pitchFamily="34" charset="-122"/>
+                <a:cs typeface="Aptos" pitchFamily="34" charset="-120"/>
+              </a:rPr>
+              <a:t>A proposed AI use should move through documented review before it becomes an operational workflow.</a:t>
+            </a:r>
+            <a:endParaRPr lang="en-US" sz="1120" dirty="0"/>
+          </a:p>
+        </p:txBody>
+      </p:sp>
+      <p:sp>
+        <p:nvSpPr>
+          <p:cNvPr id="24" name="Shape 22"/>
+          <p:cNvSpPr/>
+          <p:nvPr/>
+        </p:nvSpPr>
+        <p:spPr>
+          <a:xfrm>
+            <a:off x="7635240" y="4184294"/>
+            <a:ext cx="3474720" cy="1466698"/>
+          </a:xfrm>
+          <a:prstGeom prst="roundRect">
+            <a:avLst>
+              <a:gd name="adj" fmla="val 7481"/>
             </a:avLst>
           </a:prstGeom>
           <a:solidFill>
@@ -16535,13 +17200,13 @@
       </p:sp>
       <p:sp>
         <p:nvSpPr>
-          <p:cNvPr id="17" name="Text 15"/>
-          <p:cNvSpPr/>
-          <p:nvPr/>
-        </p:nvSpPr>
-        <p:spPr>
-          <a:xfrm>
-            <a:off x="7799832" y="4645152"/>
+          <p:cNvPr id="25" name="Text 23"/>
+          <p:cNvSpPr/>
+          <p:nvPr/>
+        </p:nvSpPr>
+        <p:spPr>
+          <a:xfrm>
+            <a:off x="7799832" y="4330598"/>
             <a:ext cx="3145536" cy="256032"/>
           </a:xfrm>
           <a:prstGeom prst="rect">
@@ -16574,14 +17239,14 @@
       </p:sp>
       <p:sp>
         <p:nvSpPr>
-          <p:cNvPr id="18" name="Text 16"/>
-          <p:cNvSpPr/>
-          <p:nvPr/>
-        </p:nvSpPr>
-        <p:spPr>
-          <a:xfrm>
-            <a:off x="7799832" y="4974336"/>
-            <a:ext cx="3145536" cy="576072"/>
+          <p:cNvPr id="26" name="Text 24"/>
+          <p:cNvSpPr/>
+          <p:nvPr/>
+        </p:nvSpPr>
+        <p:spPr>
+          <a:xfrm>
+            <a:off x="7799832" y="4659782"/>
+            <a:ext cx="3145536" cy="899770"/>
           </a:xfrm>
           <a:prstGeom prst="rect">
             <a:avLst/>
@@ -16607,7 +17272,7 @@
                 <a:ea typeface="Aptos" pitchFamily="34" charset="-122"/>
                 <a:cs typeface="Aptos" pitchFamily="34" charset="-120"/>
               </a:rPr>
-              <a:t>Translate this concept into clear decision rights, review steps, documentation expectations, and escalation paths before.</a:t>
+              <a:t>Translate this concept into clear decision rights, review steps, documentation expectations, and escalation paths before an AI-supported workflow is approved.</a:t>
             </a:r>
             <a:endParaRPr lang="en-US" sz="1320" dirty="0"/>
           </a:p>

--- a/downloads/presentations/modules/gov-330.pptx
+++ b/downloads/presentations/modules/gov-330.pptx
@@ -3245,8 +3245,8 @@
         </p:nvSpPr>
         <p:spPr>
           <a:xfrm>
-            <a:off x="868680" y="1508760"/>
-            <a:ext cx="6309360" cy="4160520"/>
+            <a:off x="822960" y="1463040"/>
+            <a:ext cx="6565392" cy="4343400"/>
           </a:xfrm>
           <a:prstGeom prst="rect">
             <a:avLst/>
@@ -3264,7 +3264,7 @@
               <a:buNone/>
             </a:pPr>
             <a:r>
-              <a:rPr lang="en-US" sz="2100" dirty="0">
+              <a:rPr lang="en-US" sz="1920" dirty="0">
                 <a:solidFill>
                   <a:srgbClr val="003A63"/>
                 </a:solidFill>
@@ -3272,16 +3272,16 @@
                 <a:ea typeface="Aptos" pitchFamily="34" charset="-122"/>
                 <a:cs typeface="Aptos" pitchFamily="34" charset="-120"/>
               </a:rPr>
-              <a:t>• Data governance is the set of decision rights, roles, policies, standards, and practices that.</a:t>
-            </a:r>
-            <a:endParaRPr lang="en-US" sz="2100" dirty="0"/>
-          </a:p>
-          <a:p>
-            <a:pPr indent="0" marL="0">
-              <a:buNone/>
-            </a:pPr>
-            <a:r>
-              <a:rPr lang="en-US" sz="2100" dirty="0">
+              <a:t>• Data governance is the set of decision rights, roles, policies, standards,.</a:t>
+            </a:r>
+            <a:endParaRPr lang="en-US" sz="1920" dirty="0"/>
+          </a:p>
+          <a:p>
+            <a:pPr indent="0" marL="0">
+              <a:buNone/>
+            </a:pPr>
+            <a:r>
+              <a:rPr lang="en-US" sz="1920" dirty="0">
                 <a:solidFill>
                   <a:srgbClr val="003A63"/>
                 </a:solidFill>
@@ -3289,16 +3289,16 @@
                 <a:ea typeface="Aptos" pitchFamily="34" charset="-122"/>
                 <a:cs typeface="Aptos" pitchFamily="34" charset="-120"/>
               </a:rPr>
-              <a:t>• AI-ready data depend on governance because data must be understandable, authorized, high.</a:t>
-            </a:r>
-            <a:endParaRPr lang="en-US" sz="2100" dirty="0"/>
-          </a:p>
-          <a:p>
-            <a:pPr indent="0" marL="0">
-              <a:buNone/>
-            </a:pPr>
-            <a:r>
-              <a:rPr lang="en-US" sz="2100" dirty="0">
+              <a:t>• AI-ready data depend on governance because data must be understandable,.</a:t>
+            </a:r>
+            <a:endParaRPr lang="en-US" sz="1920" dirty="0"/>
+          </a:p>
+          <a:p>
+            <a:pPr indent="0" marL="0">
+              <a:buNone/>
+            </a:pPr>
+            <a:r>
+              <a:rPr lang="en-US" sz="1920" dirty="0">
                 <a:solidFill>
                   <a:srgbClr val="003A63"/>
                 </a:solidFill>
@@ -3306,9 +3306,9 @@
                 <a:ea typeface="Aptos" pitchFamily="34" charset="-122"/>
                 <a:cs typeface="Aptos" pitchFamily="34" charset="-120"/>
               </a:rPr>
-              <a:t>• Data stewardship assigns responsibility for data quality, definitions, metadata, access, and.</a:t>
-            </a:r>
-            <a:endParaRPr lang="en-US" sz="2100" dirty="0"/>
+              <a:t>• Data stewardship assigns responsibility for data quality, definitions,.</a:t>
+            </a:r>
+            <a:endParaRPr lang="en-US" sz="1920" dirty="0"/>
           </a:p>
         </p:txBody>
       </p:sp>
@@ -3320,12 +3320,12 @@
         </p:nvSpPr>
         <p:spPr>
           <a:xfrm>
-            <a:off x="7635240" y="1325880"/>
-            <a:ext cx="3474720" cy="1255471"/>
+            <a:off x="7543800" y="1325880"/>
+            <a:ext cx="3611880" cy="1261872"/>
           </a:xfrm>
           <a:prstGeom prst="roundRect">
             <a:avLst>
-              <a:gd name="adj" fmla="val 8740"/>
+              <a:gd name="adj" fmla="val 8696"/>
             </a:avLst>
           </a:prstGeom>
           <a:solidFill>
@@ -3347,8 +3347,8 @@
         </p:nvSpPr>
         <p:spPr>
           <a:xfrm>
-            <a:off x="7799832" y="1472184"/>
-            <a:ext cx="3145536" cy="256032"/>
+            <a:off x="7708392" y="1453896"/>
+            <a:ext cx="3282696" cy="228600"/>
           </a:xfrm>
           <a:prstGeom prst="rect">
             <a:avLst/>
@@ -3364,7 +3364,7 @@
               <a:buNone/>
             </a:pPr>
             <a:r>
-              <a:rPr lang="en-US" sz="1300" b="1" dirty="0">
+              <a:rPr lang="en-US" sz="1220" b="1" dirty="0">
                 <a:solidFill>
                   <a:srgbClr val="0068B7"/>
                 </a:solidFill>
@@ -3374,7 +3374,7 @@
               </a:rPr>
               <a:t>Governance lens</a:t>
             </a:r>
-            <a:endParaRPr lang="en-US" sz="1300" dirty="0"/>
+            <a:endParaRPr lang="en-US" sz="1220" dirty="0"/>
           </a:p>
         </p:txBody>
       </p:sp>
@@ -3386,8 +3386,8 @@
         </p:nvSpPr>
         <p:spPr>
           <a:xfrm>
-            <a:off x="7799832" y="1801368"/>
-            <a:ext cx="3145536" cy="688543"/>
+            <a:off x="7708392" y="1764792"/>
+            <a:ext cx="3282696" cy="749808"/>
           </a:xfrm>
           <a:prstGeom prst="rect">
             <a:avLst/>
@@ -3405,7 +3405,7 @@
               <a:buNone/>
             </a:pPr>
             <a:r>
-              <a:rPr lang="en-US" sz="1320" dirty="0">
+              <a:rPr lang="en-US" sz="1220" dirty="0">
                 <a:solidFill>
                   <a:srgbClr val="17364A"/>
                 </a:solidFill>
@@ -3413,9 +3413,9 @@
                 <a:ea typeface="Aptos" pitchFamily="34" charset="-122"/>
                 <a:cs typeface="Aptos" pitchFamily="34" charset="-120"/>
               </a:rPr>
-              <a:t>Data governance is the set of decision rights, roles, policies, standards, and practices that guide how.</a:t>
-            </a:r>
-            <a:endParaRPr lang="en-US" sz="1320" dirty="0"/>
+              <a:t>Data governance is the set of decision rights, roles, policies, standards, and.</a:t>
+            </a:r>
+            <a:endParaRPr lang="en-US" sz="1220" dirty="0"/>
           </a:p>
         </p:txBody>
       </p:sp>
@@ -3427,12 +3427,12 @@
         </p:nvSpPr>
         <p:spPr>
           <a:xfrm>
-            <a:off x="7635240" y="2718511"/>
-            <a:ext cx="3474720" cy="1328623"/>
+            <a:off x="7543800" y="2724912"/>
+            <a:ext cx="3611880" cy="1527048"/>
           </a:xfrm>
           <a:prstGeom prst="roundRect">
             <a:avLst>
-              <a:gd name="adj" fmla="val 8259"/>
+              <a:gd name="adj" fmla="val 7186"/>
             </a:avLst>
           </a:prstGeom>
           <a:solidFill>
@@ -3454,8 +3454,8 @@
         </p:nvSpPr>
         <p:spPr>
           <a:xfrm>
-            <a:off x="7799832" y="2864815"/>
-            <a:ext cx="3145536" cy="256032"/>
+            <a:off x="7708392" y="2852928"/>
+            <a:ext cx="3282696" cy="228600"/>
           </a:xfrm>
           <a:prstGeom prst="rect">
             <a:avLst/>
@@ -3471,7 +3471,7 @@
               <a:buNone/>
             </a:pPr>
             <a:r>
-              <a:rPr lang="en-US" sz="1300" b="1" dirty="0">
+              <a:rPr lang="en-US" sz="1220" b="1" dirty="0">
                 <a:solidFill>
                   <a:srgbClr val="0068B7"/>
                 </a:solidFill>
@@ -3481,7 +3481,7 @@
               </a:rPr>
               <a:t>Concept checkpoints</a:t>
             </a:r>
-            <a:endParaRPr lang="en-US" sz="1300" dirty="0"/>
+            <a:endParaRPr lang="en-US" sz="1220" dirty="0"/>
           </a:p>
         </p:txBody>
       </p:sp>
@@ -3493,8 +3493,8 @@
         </p:nvSpPr>
         <p:spPr>
           <a:xfrm>
-            <a:off x="7818120" y="3230575"/>
-            <a:ext cx="3090672" cy="670255"/>
+            <a:off x="7726680" y="3182112"/>
+            <a:ext cx="3227832" cy="960120"/>
           </a:xfrm>
           <a:prstGeom prst="rect">
             <a:avLst/>
@@ -3512,7 +3512,7 @@
               <a:buNone/>
             </a:pPr>
             <a:r>
-              <a:rPr lang="en-US" sz="1220" dirty="0">
+              <a:rPr lang="en-US" sz="1140" dirty="0">
                 <a:solidFill>
                   <a:srgbClr val="17364A"/>
                 </a:solidFill>
@@ -3520,16 +3520,16 @@
                 <a:ea typeface="Aptos" pitchFamily="34" charset="-122"/>
                 <a:cs typeface="Aptos" pitchFamily="34" charset="-120"/>
               </a:rPr>
-              <a:t>Data governance is the set of decision rights, roles, policies,.</a:t>
-            </a:r>
-            <a:endParaRPr lang="en-US" sz="1220" dirty="0"/>
-          </a:p>
-          <a:p>
-            <a:pPr indent="0" marL="0">
-              <a:buNone/>
-            </a:pPr>
-            <a:r>
-              <a:rPr lang="en-US" sz="1220" dirty="0">
+              <a:t>Data governance is the set of decision rights,.</a:t>
+            </a:r>
+            <a:endParaRPr lang="en-US" sz="1140" dirty="0"/>
+          </a:p>
+          <a:p>
+            <a:pPr indent="0" marL="0">
+              <a:buNone/>
+            </a:pPr>
+            <a:r>
+              <a:rPr lang="en-US" sz="1140" dirty="0">
                 <a:solidFill>
                   <a:srgbClr val="17364A"/>
                 </a:solidFill>
@@ -3537,16 +3537,16 @@
                 <a:ea typeface="Aptos" pitchFamily="34" charset="-122"/>
                 <a:cs typeface="Aptos" pitchFamily="34" charset="-120"/>
               </a:rPr>
-              <a:t>AI-ready data depend on governance because data must be.</a:t>
-            </a:r>
-            <a:endParaRPr lang="en-US" sz="1220" dirty="0"/>
-          </a:p>
-          <a:p>
-            <a:pPr indent="0" marL="0">
-              <a:buNone/>
-            </a:pPr>
-            <a:r>
-              <a:rPr lang="en-US" sz="1220" dirty="0">
+              <a:t>AI-ready data depend on governance because data.</a:t>
+            </a:r>
+            <a:endParaRPr lang="en-US" sz="1140" dirty="0"/>
+          </a:p>
+          <a:p>
+            <a:pPr indent="0" marL="0">
+              <a:buNone/>
+            </a:pPr>
+            <a:r>
+              <a:rPr lang="en-US" sz="1140" dirty="0">
                 <a:solidFill>
                   <a:srgbClr val="17364A"/>
                 </a:solidFill>
@@ -3554,9 +3554,9 @@
                 <a:ea typeface="Aptos" pitchFamily="34" charset="-122"/>
                 <a:cs typeface="Aptos" pitchFamily="34" charset="-120"/>
               </a:rPr>
-              <a:t>Data stewardship assigns responsibility for data quality,.</a:t>
-            </a:r>
-            <a:endParaRPr lang="en-US" sz="1220" dirty="0"/>
+              <a:t>Data stewardship assigns responsibility for data.</a:t>
+            </a:r>
+            <a:endParaRPr lang="en-US" sz="1140" dirty="0"/>
           </a:p>
         </p:txBody>
       </p:sp>
@@ -3568,12 +3568,12 @@
         </p:nvSpPr>
         <p:spPr>
           <a:xfrm>
-            <a:off x="7635240" y="4184294"/>
-            <a:ext cx="3474720" cy="1466698"/>
+            <a:off x="7543800" y="4389120"/>
+            <a:ext cx="3611880" cy="1261872"/>
           </a:xfrm>
           <a:prstGeom prst="roundRect">
             <a:avLst>
-              <a:gd name="adj" fmla="val 7481"/>
+              <a:gd name="adj" fmla="val 8696"/>
             </a:avLst>
           </a:prstGeom>
           <a:solidFill>
@@ -3595,8 +3595,8 @@
         </p:nvSpPr>
         <p:spPr>
           <a:xfrm>
-            <a:off x="7799832" y="4330598"/>
-            <a:ext cx="3145536" cy="256032"/>
+            <a:off x="7708392" y="4517136"/>
+            <a:ext cx="3282696" cy="228600"/>
           </a:xfrm>
           <a:prstGeom prst="rect">
             <a:avLst/>
@@ -3612,7 +3612,7 @@
               <a:buNone/>
             </a:pPr>
             <a:r>
-              <a:rPr lang="en-US" sz="1300" b="1" dirty="0">
+              <a:rPr lang="en-US" sz="1220" b="1" dirty="0">
                 <a:solidFill>
                   <a:srgbClr val="0068B7"/>
                 </a:solidFill>
@@ -3622,7 +3622,7 @@
               </a:rPr>
               <a:t>What to document</a:t>
             </a:r>
-            <a:endParaRPr lang="en-US" sz="1300" dirty="0"/>
+            <a:endParaRPr lang="en-US" sz="1220" dirty="0"/>
           </a:p>
         </p:txBody>
       </p:sp>
@@ -3634,8 +3634,8 @@
         </p:nvSpPr>
         <p:spPr>
           <a:xfrm>
-            <a:off x="7799832" y="4659782"/>
-            <a:ext cx="3145536" cy="899770"/>
+            <a:off x="7708392" y="4828032"/>
+            <a:ext cx="3282696" cy="749808"/>
           </a:xfrm>
           <a:prstGeom prst="rect">
             <a:avLst/>
@@ -3653,7 +3653,7 @@
               <a:buNone/>
             </a:pPr>
             <a:r>
-              <a:rPr lang="en-US" sz="1320" dirty="0">
+              <a:rPr lang="en-US" sz="1220" dirty="0">
                 <a:solidFill>
                   <a:srgbClr val="17364A"/>
                 </a:solidFill>
@@ -3661,9 +3661,9 @@
                 <a:ea typeface="Aptos" pitchFamily="34" charset="-122"/>
                 <a:cs typeface="Aptos" pitchFamily="34" charset="-120"/>
               </a:rPr>
-              <a:t>Translate this concept into clear decision rights, review steps, documentation expectations, and escalation paths before an AI-supported workflow is approved.</a:t>
-            </a:r>
-            <a:endParaRPr lang="en-US" sz="1320" dirty="0"/>
+              <a:t>Translate this concept into clear decision rights, review steps, documentation.</a:t>
+            </a:r>
+            <a:endParaRPr lang="en-US" sz="1220" dirty="0"/>
           </a:p>
         </p:txBody>
       </p:sp>
@@ -3954,8 +3954,8 @@
         </p:nvSpPr>
         <p:spPr>
           <a:xfrm>
-            <a:off x="868680" y="1508760"/>
-            <a:ext cx="6309360" cy="4160520"/>
+            <a:off x="822960" y="1463040"/>
+            <a:ext cx="6565392" cy="4343400"/>
           </a:xfrm>
           <a:prstGeom prst="rect">
             <a:avLst/>
@@ -3973,7 +3973,7 @@
               <a:buNone/>
             </a:pPr>
             <a:r>
-              <a:rPr lang="en-US" sz="2100" dirty="0">
+              <a:rPr lang="en-US" sz="1920" dirty="0">
                 <a:solidFill>
                   <a:srgbClr val="003A63"/>
                 </a:solidFill>
@@ -3981,16 +3981,16 @@
                 <a:ea typeface="Aptos" pitchFamily="34" charset="-122"/>
                 <a:cs typeface="Aptos" pitchFamily="34" charset="-120"/>
               </a:rPr>
-              <a:t>• A public health agency may want to use multiple datasets to prioritize outreach for vaccination.</a:t>
-            </a:r>
-            <a:endParaRPr lang="en-US" sz="2100" dirty="0"/>
-          </a:p>
-          <a:p>
-            <a:pPr indent="0" marL="0">
-              <a:buNone/>
-            </a:pPr>
-            <a:r>
-              <a:rPr lang="en-US" sz="2100" dirty="0">
+              <a:t>• A public health agency may want to use multiple datasets to prioritize.</a:t>
+            </a:r>
+            <a:endParaRPr lang="en-US" sz="1920" dirty="0"/>
+          </a:p>
+          <a:p>
+            <a:pPr indent="0" marL="0">
+              <a:buNone/>
+            </a:pPr>
+            <a:r>
+              <a:rPr lang="en-US" sz="1920" dirty="0">
                 <a:solidFill>
                   <a:srgbClr val="003A63"/>
                 </a:solidFill>
@@ -3998,16 +3998,16 @@
                 <a:ea typeface="Aptos" pitchFamily="34" charset="-122"/>
                 <a:cs typeface="Aptos" pitchFamily="34" charset="-120"/>
               </a:rPr>
-              <a:t>• Data governance would clarify which datasets can be linked, which fields are authoritative,.</a:t>
-            </a:r>
-            <a:endParaRPr lang="en-US" sz="2100" dirty="0"/>
-          </a:p>
-          <a:p>
-            <a:pPr indent="0" marL="0">
-              <a:buNone/>
-            </a:pPr>
-            <a:r>
-              <a:rPr lang="en-US" sz="2100" dirty="0">
+              <a:t>• Data governance would clarify which datasets can be linked, which fields are.</a:t>
+            </a:r>
+            <a:endParaRPr lang="en-US" sz="1920" dirty="0"/>
+          </a:p>
+          <a:p>
+            <a:pPr indent="0" marL="0">
+              <a:buNone/>
+            </a:pPr>
+            <a:r>
+              <a:rPr lang="en-US" sz="1920" dirty="0">
                 <a:solidFill>
                   <a:srgbClr val="003A63"/>
                 </a:solidFill>
@@ -4015,9 +4015,9 @@
                 <a:ea typeface="Aptos" pitchFamily="34" charset="-122"/>
                 <a:cs typeface="Aptos" pitchFamily="34" charset="-120"/>
               </a:rPr>
-              <a:t>• Without governance, the model may appear technical while resting on unclear authority and.</a:t>
-            </a:r>
-            <a:endParaRPr lang="en-US" sz="2100" dirty="0"/>
+              <a:t>• Without governance, the model may appear technical while resting on unclear.</a:t>
+            </a:r>
+            <a:endParaRPr lang="en-US" sz="1920" dirty="0"/>
           </a:p>
         </p:txBody>
       </p:sp>
@@ -4029,12 +4029,12 @@
         </p:nvSpPr>
         <p:spPr>
           <a:xfrm>
-            <a:off x="7635240" y="1325880"/>
-            <a:ext cx="3474720" cy="1255471"/>
+            <a:off x="7543800" y="1325880"/>
+            <a:ext cx="3611880" cy="1261872"/>
           </a:xfrm>
           <a:prstGeom prst="roundRect">
             <a:avLst>
-              <a:gd name="adj" fmla="val 8740"/>
+              <a:gd name="adj" fmla="val 8696"/>
             </a:avLst>
           </a:prstGeom>
           <a:solidFill>
@@ -4056,8 +4056,8 @@
         </p:nvSpPr>
         <p:spPr>
           <a:xfrm>
-            <a:off x="7799832" y="1472184"/>
-            <a:ext cx="3145536" cy="256032"/>
+            <a:off x="7708392" y="1453896"/>
+            <a:ext cx="3282696" cy="228600"/>
           </a:xfrm>
           <a:prstGeom prst="rect">
             <a:avLst/>
@@ -4073,7 +4073,7 @@
               <a:buNone/>
             </a:pPr>
             <a:r>
-              <a:rPr lang="en-US" sz="1300" b="1" dirty="0">
+              <a:rPr lang="en-US" sz="1220" b="1" dirty="0">
                 <a:solidFill>
                   <a:srgbClr val="0068B7"/>
                 </a:solidFill>
@@ -4083,7 +4083,7 @@
               </a:rPr>
               <a:t>Governance lens</a:t>
             </a:r>
-            <a:endParaRPr lang="en-US" sz="1300" dirty="0"/>
+            <a:endParaRPr lang="en-US" sz="1220" dirty="0"/>
           </a:p>
         </p:txBody>
       </p:sp>
@@ -4095,8 +4095,8 @@
         </p:nvSpPr>
         <p:spPr>
           <a:xfrm>
-            <a:off x="7799832" y="1801368"/>
-            <a:ext cx="3145536" cy="688543"/>
+            <a:off x="7708392" y="1764792"/>
+            <a:ext cx="3282696" cy="749808"/>
           </a:xfrm>
           <a:prstGeom prst="rect">
             <a:avLst/>
@@ -4114,7 +4114,7 @@
               <a:buNone/>
             </a:pPr>
             <a:r>
-              <a:rPr lang="en-US" sz="1320" dirty="0">
+              <a:rPr lang="en-US" sz="1220" dirty="0">
                 <a:solidFill>
                   <a:srgbClr val="17364A"/>
                 </a:solidFill>
@@ -4122,9 +4122,9 @@
                 <a:ea typeface="Aptos" pitchFamily="34" charset="-122"/>
                 <a:cs typeface="Aptos" pitchFamily="34" charset="-120"/>
               </a:rPr>
-              <a:t>A public health agency may want to use multiple datasets to prioritize outreach for vaccination.</a:t>
-            </a:r>
-            <a:endParaRPr lang="en-US" sz="1320" dirty="0"/>
+              <a:t>A public health agency may want to use multiple datasets to prioritize outreach.</a:t>
+            </a:r>
+            <a:endParaRPr lang="en-US" sz="1220" dirty="0"/>
           </a:p>
         </p:txBody>
       </p:sp>
@@ -4136,12 +4136,12 @@
         </p:nvSpPr>
         <p:spPr>
           <a:xfrm>
-            <a:off x="7635240" y="2718511"/>
-            <a:ext cx="3474720" cy="1328623"/>
+            <a:off x="7543800" y="2724912"/>
+            <a:ext cx="3611880" cy="1527048"/>
           </a:xfrm>
           <a:prstGeom prst="roundRect">
             <a:avLst>
-              <a:gd name="adj" fmla="val 8259"/>
+              <a:gd name="adj" fmla="val 7186"/>
             </a:avLst>
           </a:prstGeom>
           <a:solidFill>
@@ -4163,8 +4163,8 @@
         </p:nvSpPr>
         <p:spPr>
           <a:xfrm>
-            <a:off x="7799832" y="2864815"/>
-            <a:ext cx="3145536" cy="256032"/>
+            <a:off x="7708392" y="2852928"/>
+            <a:ext cx="3282696" cy="228600"/>
           </a:xfrm>
           <a:prstGeom prst="rect">
             <a:avLst/>
@@ -4180,7 +4180,7 @@
               <a:buNone/>
             </a:pPr>
             <a:r>
-              <a:rPr lang="en-US" sz="1300" b="1" dirty="0">
+              <a:rPr lang="en-US" sz="1220" b="1" dirty="0">
                 <a:solidFill>
                   <a:srgbClr val="0068B7"/>
                 </a:solidFill>
@@ -4190,7 +4190,7 @@
               </a:rPr>
               <a:t>Concept checkpoints</a:t>
             </a:r>
-            <a:endParaRPr lang="en-US" sz="1300" dirty="0"/>
+            <a:endParaRPr lang="en-US" sz="1220" dirty="0"/>
           </a:p>
         </p:txBody>
       </p:sp>
@@ -4202,8 +4202,8 @@
         </p:nvSpPr>
         <p:spPr>
           <a:xfrm>
-            <a:off x="7818120" y="3230575"/>
-            <a:ext cx="3090672" cy="670255"/>
+            <a:off x="7726680" y="3182112"/>
+            <a:ext cx="3227832" cy="960120"/>
           </a:xfrm>
           <a:prstGeom prst="rect">
             <a:avLst/>
@@ -4221,7 +4221,7 @@
               <a:buNone/>
             </a:pPr>
             <a:r>
-              <a:rPr lang="en-US" sz="1220" dirty="0">
+              <a:rPr lang="en-US" sz="1140" dirty="0">
                 <a:solidFill>
                   <a:srgbClr val="17364A"/>
                 </a:solidFill>
@@ -4229,16 +4229,16 @@
                 <a:ea typeface="Aptos" pitchFamily="34" charset="-122"/>
                 <a:cs typeface="Aptos" pitchFamily="34" charset="-120"/>
               </a:rPr>
-              <a:t>Data governance would clarify which datasets can be linked, which.</a:t>
-            </a:r>
-            <a:endParaRPr lang="en-US" sz="1220" dirty="0"/>
-          </a:p>
-          <a:p>
-            <a:pPr indent="0" marL="0">
-              <a:buNone/>
-            </a:pPr>
-            <a:r>
-              <a:rPr lang="en-US" sz="1220" dirty="0">
+              <a:t>Data governance would clarify which datasets can.</a:t>
+            </a:r>
+            <a:endParaRPr lang="en-US" sz="1140" dirty="0"/>
+          </a:p>
+          <a:p>
+            <a:pPr indent="0" marL="0">
+              <a:buNone/>
+            </a:pPr>
+            <a:r>
+              <a:rPr lang="en-US" sz="1140" dirty="0">
                 <a:solidFill>
                   <a:srgbClr val="17364A"/>
                 </a:solidFill>
@@ -4246,9 +4246,9 @@
                 <a:ea typeface="Aptos" pitchFamily="34" charset="-122"/>
                 <a:cs typeface="Aptos" pitchFamily="34" charset="-120"/>
               </a:rPr>
-              <a:t>Without governance, the model may appear technical while resting.</a:t>
-            </a:r>
-            <a:endParaRPr lang="en-US" sz="1220" dirty="0"/>
+              <a:t>Without governance, the model may appear technical.</a:t>
+            </a:r>
+            <a:endParaRPr lang="en-US" sz="1140" dirty="0"/>
           </a:p>
         </p:txBody>
       </p:sp>
@@ -4260,12 +4260,12 @@
         </p:nvSpPr>
         <p:spPr>
           <a:xfrm>
-            <a:off x="7635240" y="4184294"/>
-            <a:ext cx="3474720" cy="1466698"/>
+            <a:off x="7543800" y="4389120"/>
+            <a:ext cx="3611880" cy="1261872"/>
           </a:xfrm>
           <a:prstGeom prst="roundRect">
             <a:avLst>
-              <a:gd name="adj" fmla="val 7481"/>
+              <a:gd name="adj" fmla="val 8696"/>
             </a:avLst>
           </a:prstGeom>
           <a:solidFill>
@@ -4287,8 +4287,8 @@
         </p:nvSpPr>
         <p:spPr>
           <a:xfrm>
-            <a:off x="7799832" y="4330598"/>
-            <a:ext cx="3145536" cy="256032"/>
+            <a:off x="7708392" y="4517136"/>
+            <a:ext cx="3282696" cy="228600"/>
           </a:xfrm>
           <a:prstGeom prst="rect">
             <a:avLst/>
@@ -4304,7 +4304,7 @@
               <a:buNone/>
             </a:pPr>
             <a:r>
-              <a:rPr lang="en-US" sz="1300" b="1" dirty="0">
+              <a:rPr lang="en-US" sz="1220" b="1" dirty="0">
                 <a:solidFill>
                   <a:srgbClr val="0068B7"/>
                 </a:solidFill>
@@ -4314,7 +4314,7 @@
               </a:rPr>
               <a:t>What to document</a:t>
             </a:r>
-            <a:endParaRPr lang="en-US" sz="1300" dirty="0"/>
+            <a:endParaRPr lang="en-US" sz="1220" dirty="0"/>
           </a:p>
         </p:txBody>
       </p:sp>
@@ -4326,8 +4326,8 @@
         </p:nvSpPr>
         <p:spPr>
           <a:xfrm>
-            <a:off x="7799832" y="4659782"/>
-            <a:ext cx="3145536" cy="899770"/>
+            <a:off x="7708392" y="4828032"/>
+            <a:ext cx="3282696" cy="749808"/>
           </a:xfrm>
           <a:prstGeom prst="rect">
             <a:avLst/>
@@ -4345,7 +4345,7 @@
               <a:buNone/>
             </a:pPr>
             <a:r>
-              <a:rPr lang="en-US" sz="1320" dirty="0">
+              <a:rPr lang="en-US" sz="1220" dirty="0">
                 <a:solidFill>
                   <a:srgbClr val="17364A"/>
                 </a:solidFill>
@@ -4353,9 +4353,9 @@
                 <a:ea typeface="Aptos" pitchFamily="34" charset="-122"/>
                 <a:cs typeface="Aptos" pitchFamily="34" charset="-120"/>
               </a:rPr>
-              <a:t>Translate this concept into clear decision rights, review steps, documentation expectations, and escalation paths before an AI-supported workflow is approved.</a:t>
-            </a:r>
-            <a:endParaRPr lang="en-US" sz="1320" dirty="0"/>
+              <a:t>Translate this concept into clear decision rights, review steps, documentation.</a:t>
+            </a:r>
+            <a:endParaRPr lang="en-US" sz="1220" dirty="0"/>
           </a:p>
         </p:txBody>
       </p:sp>
@@ -4646,8 +4646,8 @@
         </p:nvSpPr>
         <p:spPr>
           <a:xfrm>
-            <a:off x="868680" y="1508760"/>
-            <a:ext cx="6309360" cy="4160520"/>
+            <a:off x="822960" y="1463040"/>
+            <a:ext cx="6565392" cy="4343400"/>
           </a:xfrm>
           <a:prstGeom prst="rect">
             <a:avLst/>
@@ -4665,7 +4665,7 @@
               <a:buNone/>
             </a:pPr>
             <a:r>
-              <a:rPr lang="en-US" sz="2100" dirty="0">
+              <a:rPr lang="en-US" sz="1920" dirty="0">
                 <a:solidFill>
                   <a:srgbClr val="003A63"/>
                 </a:solidFill>
@@ -4675,14 +4675,14 @@
               </a:rPr>
               <a:t>• AI-ready data begin with inventory.</a:t>
             </a:r>
-            <a:endParaRPr lang="en-US" sz="2100" dirty="0"/>
-          </a:p>
-          <a:p>
-            <a:pPr indent="0" marL="0">
-              <a:buNone/>
-            </a:pPr>
-            <a:r>
-              <a:rPr lang="en-US" sz="2100" dirty="0">
+            <a:endParaRPr lang="en-US" sz="1920" dirty="0"/>
+          </a:p>
+          <a:p>
+            <a:pPr indent="0" marL="0">
+              <a:buNone/>
+            </a:pPr>
+            <a:r>
+              <a:rPr lang="en-US" sz="1920" dirty="0">
                 <a:solidFill>
                   <a:srgbClr val="003A63"/>
                 </a:solidFill>
@@ -4690,16 +4690,16 @@
                 <a:ea typeface="Aptos" pitchFamily="34" charset="-122"/>
                 <a:cs typeface="Aptos" pitchFamily="34" charset="-120"/>
               </a:rPr>
-              <a:t>• Agencies should know what datasets exist, who stewards them, what they contain, how often they.</a:t>
-            </a:r>
-            <a:endParaRPr lang="en-US" sz="2100" dirty="0"/>
-          </a:p>
-          <a:p>
-            <a:pPr indent="0" marL="0">
-              <a:buNone/>
-            </a:pPr>
-            <a:r>
-              <a:rPr lang="en-US" sz="2100" dirty="0">
+              <a:t>• Agencies should know what datasets exist, who stewards them, what they.</a:t>
+            </a:r>
+            <a:endParaRPr lang="en-US" sz="1920" dirty="0"/>
+          </a:p>
+          <a:p>
+            <a:pPr indent="0" marL="0">
+              <a:buNone/>
+            </a:pPr>
+            <a:r>
+              <a:rPr lang="en-US" sz="1920" dirty="0">
                 <a:solidFill>
                   <a:srgbClr val="003A63"/>
                 </a:solidFill>
@@ -4707,9 +4707,9 @@
                 <a:ea typeface="Aptos" pitchFamily="34" charset="-122"/>
                 <a:cs typeface="Aptos" pitchFamily="34" charset="-120"/>
               </a:rPr>
-              <a:t>• A data catalog can make this information visible to program, analytics, informatics, and.</a:t>
-            </a:r>
-            <a:endParaRPr lang="en-US" sz="2100" dirty="0"/>
+              <a:t>• A data catalog can make this information visible to program, analytics,.</a:t>
+            </a:r>
+            <a:endParaRPr lang="en-US" sz="1920" dirty="0"/>
           </a:p>
         </p:txBody>
       </p:sp>
@@ -4721,12 +4721,12 @@
         </p:nvSpPr>
         <p:spPr>
           <a:xfrm>
-            <a:off x="7635240" y="1325880"/>
-            <a:ext cx="3474720" cy="1207008"/>
+            <a:off x="7543800" y="1325880"/>
+            <a:ext cx="3611880" cy="1261872"/>
           </a:xfrm>
           <a:prstGeom prst="roundRect">
             <a:avLst>
-              <a:gd name="adj" fmla="val 9091"/>
+              <a:gd name="adj" fmla="val 8696"/>
             </a:avLst>
           </a:prstGeom>
           <a:solidFill>
@@ -4748,8 +4748,8 @@
         </p:nvSpPr>
         <p:spPr>
           <a:xfrm>
-            <a:off x="7799832" y="1472184"/>
-            <a:ext cx="3145536" cy="256032"/>
+            <a:off x="7708392" y="1453896"/>
+            <a:ext cx="3282696" cy="228600"/>
           </a:xfrm>
           <a:prstGeom prst="rect">
             <a:avLst/>
@@ -4765,7 +4765,7 @@
               <a:buNone/>
             </a:pPr>
             <a:r>
-              <a:rPr lang="en-US" sz="1300" b="1" dirty="0">
+              <a:rPr lang="en-US" sz="1220" b="1" dirty="0">
                 <a:solidFill>
                   <a:srgbClr val="0068B7"/>
                 </a:solidFill>
@@ -4775,7 +4775,7 @@
               </a:rPr>
               <a:t>Governance lens</a:t>
             </a:r>
-            <a:endParaRPr lang="en-US" sz="1300" dirty="0"/>
+            <a:endParaRPr lang="en-US" sz="1220" dirty="0"/>
           </a:p>
         </p:txBody>
       </p:sp>
@@ -4787,8 +4787,8 @@
         </p:nvSpPr>
         <p:spPr>
           <a:xfrm>
-            <a:off x="7799832" y="1801368"/>
-            <a:ext cx="3145536" cy="640080"/>
+            <a:off x="7708392" y="1764792"/>
+            <a:ext cx="3282696" cy="749808"/>
           </a:xfrm>
           <a:prstGeom prst="rect">
             <a:avLst/>
@@ -4806,7 +4806,7 @@
               <a:buNone/>
             </a:pPr>
             <a:r>
-              <a:rPr lang="en-US" sz="1320" dirty="0">
+              <a:rPr lang="en-US" sz="1220" dirty="0">
                 <a:solidFill>
                   <a:srgbClr val="17364A"/>
                 </a:solidFill>
@@ -4816,7 +4816,7 @@
               </a:rPr>
               <a:t>AI-ready data begin with inventory.</a:t>
             </a:r>
-            <a:endParaRPr lang="en-US" sz="1320" dirty="0"/>
+            <a:endParaRPr lang="en-US" sz="1220" dirty="0"/>
           </a:p>
         </p:txBody>
       </p:sp>
@@ -4828,12 +4828,12 @@
         </p:nvSpPr>
         <p:spPr>
           <a:xfrm>
-            <a:off x="7635240" y="2670048"/>
-            <a:ext cx="3474720" cy="1377086"/>
+            <a:off x="7543800" y="2724912"/>
+            <a:ext cx="3611880" cy="1527048"/>
           </a:xfrm>
           <a:prstGeom prst="roundRect">
             <a:avLst>
-              <a:gd name="adj" fmla="val 7968"/>
+              <a:gd name="adj" fmla="val 7186"/>
             </a:avLst>
           </a:prstGeom>
           <a:solidFill>
@@ -4855,8 +4855,8 @@
         </p:nvSpPr>
         <p:spPr>
           <a:xfrm>
-            <a:off x="7799832" y="2816352"/>
-            <a:ext cx="3145536" cy="256032"/>
+            <a:off x="7708392" y="2852928"/>
+            <a:ext cx="3282696" cy="228600"/>
           </a:xfrm>
           <a:prstGeom prst="rect">
             <a:avLst/>
@@ -4872,7 +4872,7 @@
               <a:buNone/>
             </a:pPr>
             <a:r>
-              <a:rPr lang="en-US" sz="1300" b="1" dirty="0">
+              <a:rPr lang="en-US" sz="1220" b="1" dirty="0">
                 <a:solidFill>
                   <a:srgbClr val="0068B7"/>
                 </a:solidFill>
@@ -4882,7 +4882,7 @@
               </a:rPr>
               <a:t>Concept checkpoints</a:t>
             </a:r>
-            <a:endParaRPr lang="en-US" sz="1300" dirty="0"/>
+            <a:endParaRPr lang="en-US" sz="1220" dirty="0"/>
           </a:p>
         </p:txBody>
       </p:sp>
@@ -4894,8 +4894,8 @@
         </p:nvSpPr>
         <p:spPr>
           <a:xfrm>
-            <a:off x="7818120" y="3182112"/>
-            <a:ext cx="3090672" cy="718718"/>
+            <a:off x="7726680" y="3182112"/>
+            <a:ext cx="3227832" cy="960120"/>
           </a:xfrm>
           <a:prstGeom prst="rect">
             <a:avLst/>
@@ -4913,7 +4913,7 @@
               <a:buNone/>
             </a:pPr>
             <a:r>
-              <a:rPr lang="en-US" sz="1220" dirty="0">
+              <a:rPr lang="en-US" sz="1140" dirty="0">
                 <a:solidFill>
                   <a:srgbClr val="17364A"/>
                 </a:solidFill>
@@ -4921,16 +4921,16 @@
                 <a:ea typeface="Aptos" pitchFamily="34" charset="-122"/>
                 <a:cs typeface="Aptos" pitchFamily="34" charset="-120"/>
               </a:rPr>
-              <a:t>Agencies should know what datasets exist, who stewards them, what.</a:t>
-            </a:r>
-            <a:endParaRPr lang="en-US" sz="1220" dirty="0"/>
-          </a:p>
-          <a:p>
-            <a:pPr indent="0" marL="0">
-              <a:buNone/>
-            </a:pPr>
-            <a:r>
-              <a:rPr lang="en-US" sz="1220" dirty="0">
+              <a:t>Agencies should know what datasets exist, who.</a:t>
+            </a:r>
+            <a:endParaRPr lang="en-US" sz="1140" dirty="0"/>
+          </a:p>
+          <a:p>
+            <a:pPr indent="0" marL="0">
+              <a:buNone/>
+            </a:pPr>
+            <a:r>
+              <a:rPr lang="en-US" sz="1140" dirty="0">
                 <a:solidFill>
                   <a:srgbClr val="17364A"/>
                 </a:solidFill>
@@ -4938,16 +4938,16 @@
                 <a:ea typeface="Aptos" pitchFamily="34" charset="-122"/>
                 <a:cs typeface="Aptos" pitchFamily="34" charset="-120"/>
               </a:rPr>
-              <a:t>A data catalog can make this information visible to program,.</a:t>
-            </a:r>
-            <a:endParaRPr lang="en-US" sz="1220" dirty="0"/>
-          </a:p>
-          <a:p>
-            <a:pPr indent="0" marL="0">
-              <a:buNone/>
-            </a:pPr>
-            <a:r>
-              <a:rPr lang="en-US" sz="1220" dirty="0">
+              <a:t>A data catalog can make this information visible.</a:t>
+            </a:r>
+            <a:endParaRPr lang="en-US" sz="1140" dirty="0"/>
+          </a:p>
+          <a:p>
+            <a:pPr indent="0" marL="0">
+              <a:buNone/>
+            </a:pPr>
+            <a:r>
+              <a:rPr lang="en-US" sz="1140" dirty="0">
                 <a:solidFill>
                   <a:srgbClr val="17364A"/>
                 </a:solidFill>
@@ -4955,9 +4955,9 @@
                 <a:ea typeface="Aptos" pitchFamily="34" charset="-122"/>
                 <a:cs typeface="Aptos" pitchFamily="34" charset="-120"/>
               </a:rPr>
-              <a:t>Governance must also address data lineage and transformation.</a:t>
-            </a:r>
-            <a:endParaRPr lang="en-US" sz="1220" dirty="0"/>
+              <a:t>Governance must also address data lineage and.</a:t>
+            </a:r>
+            <a:endParaRPr lang="en-US" sz="1140" dirty="0"/>
           </a:p>
         </p:txBody>
       </p:sp>
@@ -4969,12 +4969,12 @@
         </p:nvSpPr>
         <p:spPr>
           <a:xfrm>
-            <a:off x="7635240" y="4184294"/>
-            <a:ext cx="3474720" cy="1466698"/>
+            <a:off x="7543800" y="4389120"/>
+            <a:ext cx="3611880" cy="1261872"/>
           </a:xfrm>
           <a:prstGeom prst="roundRect">
             <a:avLst>
-              <a:gd name="adj" fmla="val 7481"/>
+              <a:gd name="adj" fmla="val 8696"/>
             </a:avLst>
           </a:prstGeom>
           <a:solidFill>
@@ -4996,8 +4996,8 @@
         </p:nvSpPr>
         <p:spPr>
           <a:xfrm>
-            <a:off x="7799832" y="4330598"/>
-            <a:ext cx="3145536" cy="256032"/>
+            <a:off x="7708392" y="4517136"/>
+            <a:ext cx="3282696" cy="228600"/>
           </a:xfrm>
           <a:prstGeom prst="rect">
             <a:avLst/>
@@ -5013,7 +5013,7 @@
               <a:buNone/>
             </a:pPr>
             <a:r>
-              <a:rPr lang="en-US" sz="1300" b="1" dirty="0">
+              <a:rPr lang="en-US" sz="1220" b="1" dirty="0">
                 <a:solidFill>
                   <a:srgbClr val="0068B7"/>
                 </a:solidFill>
@@ -5023,7 +5023,7 @@
               </a:rPr>
               <a:t>What to document</a:t>
             </a:r>
-            <a:endParaRPr lang="en-US" sz="1300" dirty="0"/>
+            <a:endParaRPr lang="en-US" sz="1220" dirty="0"/>
           </a:p>
         </p:txBody>
       </p:sp>
@@ -5035,8 +5035,8 @@
         </p:nvSpPr>
         <p:spPr>
           <a:xfrm>
-            <a:off x="7799832" y="4659782"/>
-            <a:ext cx="3145536" cy="899770"/>
+            <a:off x="7708392" y="4828032"/>
+            <a:ext cx="3282696" cy="749808"/>
           </a:xfrm>
           <a:prstGeom prst="rect">
             <a:avLst/>
@@ -5054,7 +5054,7 @@
               <a:buNone/>
             </a:pPr>
             <a:r>
-              <a:rPr lang="en-US" sz="1320" dirty="0">
+              <a:rPr lang="en-US" sz="1220" dirty="0">
                 <a:solidFill>
                   <a:srgbClr val="17364A"/>
                 </a:solidFill>
@@ -5062,9 +5062,9 @@
                 <a:ea typeface="Aptos" pitchFamily="34" charset="-122"/>
                 <a:cs typeface="Aptos" pitchFamily="34" charset="-120"/>
               </a:rPr>
-              <a:t>Translate this concept into clear decision rights, review steps, documentation expectations, and escalation paths before an AI-supported workflow is approved.</a:t>
-            </a:r>
-            <a:endParaRPr lang="en-US" sz="1320" dirty="0"/>
+              <a:t>Translate this concept into clear decision rights, review steps, documentation.</a:t>
+            </a:r>
+            <a:endParaRPr lang="en-US" sz="1220" dirty="0"/>
           </a:p>
         </p:txBody>
       </p:sp>
@@ -5355,8 +5355,8 @@
         </p:nvSpPr>
         <p:spPr>
           <a:xfrm>
-            <a:off x="868680" y="1508760"/>
-            <a:ext cx="6309360" cy="4160520"/>
+            <a:off x="822960" y="1463040"/>
+            <a:ext cx="6565392" cy="4343400"/>
           </a:xfrm>
           <a:prstGeom prst="rect">
             <a:avLst/>
@@ -5374,7 +5374,7 @@
               <a:buNone/>
             </a:pPr>
             <a:r>
-              <a:rPr lang="en-US" sz="2100" dirty="0">
+              <a:rPr lang="en-US" sz="1920" dirty="0">
                 <a:solidFill>
                   <a:srgbClr val="003A63"/>
                 </a:solidFill>
@@ -5382,16 +5382,16 @@
                 <a:ea typeface="Aptos" pitchFamily="34" charset="-122"/>
                 <a:cs typeface="Aptos" pitchFamily="34" charset="-120"/>
               </a:rPr>
-              <a:t>• A common failure mode is treating the topic as a technical detail rather than a public health.</a:t>
-            </a:r>
-            <a:endParaRPr lang="en-US" sz="2100" dirty="0"/>
-          </a:p>
-          <a:p>
-            <a:pPr indent="0" marL="0">
-              <a:buNone/>
-            </a:pPr>
-            <a:r>
-              <a:rPr lang="en-US" sz="2100" dirty="0">
+              <a:t>• A common failure mode is treating the topic as a technical detail rather.</a:t>
+            </a:r>
+            <a:endParaRPr lang="en-US" sz="1920" dirty="0"/>
+          </a:p>
+          <a:p>
+            <a:pPr indent="0" marL="0">
+              <a:buNone/>
+            </a:pPr>
+            <a:r>
+              <a:rPr lang="en-US" sz="1920" dirty="0">
                 <a:solidFill>
                   <a:srgbClr val="003A63"/>
                 </a:solidFill>
@@ -5399,16 +5399,16 @@
                 <a:ea typeface="Aptos" pitchFamily="34" charset="-122"/>
                 <a:cs typeface="Aptos" pitchFamily="34" charset="-120"/>
               </a:rPr>
-              <a:t>• When staff do not connect technical decisions to authority, workflow, equity, privacy,.</a:t>
-            </a:r>
-            <a:endParaRPr lang="en-US" sz="2100" dirty="0"/>
-          </a:p>
-          <a:p>
-            <a:pPr indent="0" marL="0">
-              <a:buNone/>
-            </a:pPr>
-            <a:r>
-              <a:rPr lang="en-US" sz="2100" dirty="0">
+              <a:t>• When staff do not connect technical decisions to authority, workflow,.</a:t>
+            </a:r>
+            <a:endParaRPr lang="en-US" sz="1920" dirty="0"/>
+          </a:p>
+          <a:p>
+            <a:pPr indent="0" marL="0">
+              <a:buNone/>
+            </a:pPr>
+            <a:r>
+              <a:rPr lang="en-US" sz="1920" dirty="0">
                 <a:solidFill>
                   <a:srgbClr val="003A63"/>
                 </a:solidFill>
@@ -5418,7 +5418,7 @@
               </a:rPr>
               <a:t>• Another risk is relying on vendor claims without agency-defined evidence.</a:t>
             </a:r>
-            <a:endParaRPr lang="en-US" sz="2100" dirty="0"/>
+            <a:endParaRPr lang="en-US" sz="1920" dirty="0"/>
           </a:p>
         </p:txBody>
       </p:sp>
@@ -5430,12 +5430,12 @@
         </p:nvSpPr>
         <p:spPr>
           <a:xfrm>
-            <a:off x="7635240" y="1325880"/>
-            <a:ext cx="3474720" cy="1255471"/>
+            <a:off x="7543800" y="1325880"/>
+            <a:ext cx="3611880" cy="1261872"/>
           </a:xfrm>
           <a:prstGeom prst="roundRect">
             <a:avLst>
-              <a:gd name="adj" fmla="val 8740"/>
+              <a:gd name="adj" fmla="val 8696"/>
             </a:avLst>
           </a:prstGeom>
           <a:solidFill>
@@ -5457,8 +5457,8 @@
         </p:nvSpPr>
         <p:spPr>
           <a:xfrm>
-            <a:off x="7799832" y="1472184"/>
-            <a:ext cx="3145536" cy="256032"/>
+            <a:off x="7708392" y="1453896"/>
+            <a:ext cx="3282696" cy="228600"/>
           </a:xfrm>
           <a:prstGeom prst="rect">
             <a:avLst/>
@@ -5474,7 +5474,7 @@
               <a:buNone/>
             </a:pPr>
             <a:r>
-              <a:rPr lang="en-US" sz="1300" b="1" dirty="0">
+              <a:rPr lang="en-US" sz="1220" b="1" dirty="0">
                 <a:solidFill>
                   <a:srgbClr val="0068B7"/>
                 </a:solidFill>
@@ -5484,7 +5484,7 @@
               </a:rPr>
               <a:t>Governance lens</a:t>
             </a:r>
-            <a:endParaRPr lang="en-US" sz="1300" dirty="0"/>
+            <a:endParaRPr lang="en-US" sz="1220" dirty="0"/>
           </a:p>
         </p:txBody>
       </p:sp>
@@ -5496,8 +5496,8 @@
         </p:nvSpPr>
         <p:spPr>
           <a:xfrm>
-            <a:off x="7799832" y="1801368"/>
-            <a:ext cx="3145536" cy="688543"/>
+            <a:off x="7708392" y="1764792"/>
+            <a:ext cx="3282696" cy="749808"/>
           </a:xfrm>
           <a:prstGeom prst="rect">
             <a:avLst/>
@@ -5515,7 +5515,7 @@
               <a:buNone/>
             </a:pPr>
             <a:r>
-              <a:rPr lang="en-US" sz="1320" dirty="0">
+              <a:rPr lang="en-US" sz="1220" dirty="0">
                 <a:solidFill>
                   <a:srgbClr val="17364A"/>
                 </a:solidFill>
@@ -5523,9 +5523,9 @@
                 <a:ea typeface="Aptos" pitchFamily="34" charset="-122"/>
                 <a:cs typeface="Aptos" pitchFamily="34" charset="-120"/>
               </a:rPr>
-              <a:t>A common failure mode is treating the topic as a technical detail rather than a public health control.</a:t>
-            </a:r>
-            <a:endParaRPr lang="en-US" sz="1320" dirty="0"/>
+              <a:t>A common failure mode is treating the topic as a technical detail rather than a.</a:t>
+            </a:r>
+            <a:endParaRPr lang="en-US" sz="1220" dirty="0"/>
           </a:p>
         </p:txBody>
       </p:sp>
@@ -5537,12 +5537,12 @@
         </p:nvSpPr>
         <p:spPr>
           <a:xfrm>
-            <a:off x="7635240" y="2718511"/>
-            <a:ext cx="3474720" cy="1328623"/>
+            <a:off x="7543800" y="2724912"/>
+            <a:ext cx="3611880" cy="1527048"/>
           </a:xfrm>
           <a:prstGeom prst="roundRect">
             <a:avLst>
-              <a:gd name="adj" fmla="val 8259"/>
+              <a:gd name="adj" fmla="val 7186"/>
             </a:avLst>
           </a:prstGeom>
           <a:solidFill>
@@ -5564,8 +5564,8 @@
         </p:nvSpPr>
         <p:spPr>
           <a:xfrm>
-            <a:off x="7799832" y="2864815"/>
-            <a:ext cx="3145536" cy="256032"/>
+            <a:off x="7708392" y="2852928"/>
+            <a:ext cx="3282696" cy="228600"/>
           </a:xfrm>
           <a:prstGeom prst="rect">
             <a:avLst/>
@@ -5581,7 +5581,7 @@
               <a:buNone/>
             </a:pPr>
             <a:r>
-              <a:rPr lang="en-US" sz="1300" b="1" dirty="0">
+              <a:rPr lang="en-US" sz="1220" b="1" dirty="0">
                 <a:solidFill>
                   <a:srgbClr val="0068B7"/>
                 </a:solidFill>
@@ -5591,7 +5591,7 @@
               </a:rPr>
               <a:t>Concept checkpoints</a:t>
             </a:r>
-            <a:endParaRPr lang="en-US" sz="1300" dirty="0"/>
+            <a:endParaRPr lang="en-US" sz="1220" dirty="0"/>
           </a:p>
         </p:txBody>
       </p:sp>
@@ -5603,8 +5603,8 @@
         </p:nvSpPr>
         <p:spPr>
           <a:xfrm>
-            <a:off x="7818120" y="3230575"/>
-            <a:ext cx="3090672" cy="670255"/>
+            <a:off x="7726680" y="3182112"/>
+            <a:ext cx="3227832" cy="960120"/>
           </a:xfrm>
           <a:prstGeom prst="rect">
             <a:avLst/>
@@ -5622,7 +5622,7 @@
               <a:buNone/>
             </a:pPr>
             <a:r>
-              <a:rPr lang="en-US" sz="1220" dirty="0">
+              <a:rPr lang="en-US" sz="1140" dirty="0">
                 <a:solidFill>
                   <a:srgbClr val="17364A"/>
                 </a:solidFill>
@@ -5630,16 +5630,16 @@
                 <a:ea typeface="Aptos" pitchFamily="34" charset="-122"/>
                 <a:cs typeface="Aptos" pitchFamily="34" charset="-120"/>
               </a:rPr>
-              <a:t>When staff do not connect technical decisions to authority,.</a:t>
-            </a:r>
-            <a:endParaRPr lang="en-US" sz="1220" dirty="0"/>
-          </a:p>
-          <a:p>
-            <a:pPr indent="0" marL="0">
-              <a:buNone/>
-            </a:pPr>
-            <a:r>
-              <a:rPr lang="en-US" sz="1220" dirty="0">
+              <a:t>When staff do not connect technical decisions to.</a:t>
+            </a:r>
+            <a:endParaRPr lang="en-US" sz="1140" dirty="0"/>
+          </a:p>
+          <a:p>
+            <a:pPr indent="0" marL="0">
+              <a:buNone/>
+            </a:pPr>
+            <a:r>
+              <a:rPr lang="en-US" sz="1140" dirty="0">
                 <a:solidFill>
                   <a:srgbClr val="17364A"/>
                 </a:solidFill>
@@ -5647,16 +5647,16 @@
                 <a:ea typeface="Aptos" pitchFamily="34" charset="-122"/>
                 <a:cs typeface="Aptos" pitchFamily="34" charset="-120"/>
               </a:rPr>
-              <a:t>Vendors may provide demonstrations, dashboards, or summary metrics.</a:t>
-            </a:r>
-            <a:endParaRPr lang="en-US" sz="1220" dirty="0"/>
-          </a:p>
-          <a:p>
-            <a:pPr indent="0" marL="0">
-              <a:buNone/>
-            </a:pPr>
-            <a:r>
-              <a:rPr lang="en-US" sz="1220" dirty="0">
+              <a:t>Vendors may provide demonstrations, dashboards, or.</a:t>
+            </a:r>
+            <a:endParaRPr lang="en-US" sz="1140" dirty="0"/>
+          </a:p>
+          <a:p>
+            <a:pPr indent="0" marL="0">
+              <a:buNone/>
+            </a:pPr>
+            <a:r>
+              <a:rPr lang="en-US" sz="1140" dirty="0">
                 <a:solidFill>
                   <a:srgbClr val="17364A"/>
                 </a:solidFill>
@@ -5664,9 +5664,9 @@
                 <a:ea typeface="Aptos" pitchFamily="34" charset="-122"/>
                 <a:cs typeface="Aptos" pitchFamily="34" charset="-120"/>
               </a:rPr>
-              <a:t>A guardrail is to require documentation, test results, acceptance.</a:t>
-            </a:r>
-            <a:endParaRPr lang="en-US" sz="1220" dirty="0"/>
+              <a:t>A guardrail is to require documentation, test.</a:t>
+            </a:r>
+            <a:endParaRPr lang="en-US" sz="1140" dirty="0"/>
           </a:p>
         </p:txBody>
       </p:sp>
@@ -5678,12 +5678,12 @@
         </p:nvSpPr>
         <p:spPr>
           <a:xfrm>
-            <a:off x="7635240" y="4184294"/>
-            <a:ext cx="3474720" cy="1466698"/>
+            <a:off x="7543800" y="4389120"/>
+            <a:ext cx="3611880" cy="1261872"/>
           </a:xfrm>
           <a:prstGeom prst="roundRect">
             <a:avLst>
-              <a:gd name="adj" fmla="val 7481"/>
+              <a:gd name="adj" fmla="val 8696"/>
             </a:avLst>
           </a:prstGeom>
           <a:solidFill>
@@ -5705,8 +5705,8 @@
         </p:nvSpPr>
         <p:spPr>
           <a:xfrm>
-            <a:off x="7799832" y="4330598"/>
-            <a:ext cx="3145536" cy="256032"/>
+            <a:off x="7708392" y="4517136"/>
+            <a:ext cx="3282696" cy="228600"/>
           </a:xfrm>
           <a:prstGeom prst="rect">
             <a:avLst/>
@@ -5722,7 +5722,7 @@
               <a:buNone/>
             </a:pPr>
             <a:r>
-              <a:rPr lang="en-US" sz="1300" b="1" dirty="0">
+              <a:rPr lang="en-US" sz="1220" b="1" dirty="0">
                 <a:solidFill>
                   <a:srgbClr val="0068B7"/>
                 </a:solidFill>
@@ -5732,7 +5732,7 @@
               </a:rPr>
               <a:t>What to document</a:t>
             </a:r>
-            <a:endParaRPr lang="en-US" sz="1300" dirty="0"/>
+            <a:endParaRPr lang="en-US" sz="1220" dirty="0"/>
           </a:p>
         </p:txBody>
       </p:sp>
@@ -5744,8 +5744,8 @@
         </p:nvSpPr>
         <p:spPr>
           <a:xfrm>
-            <a:off x="7799832" y="4659782"/>
-            <a:ext cx="3145536" cy="899770"/>
+            <a:off x="7708392" y="4828032"/>
+            <a:ext cx="3282696" cy="749808"/>
           </a:xfrm>
           <a:prstGeom prst="rect">
             <a:avLst/>
@@ -5763,7 +5763,7 @@
               <a:buNone/>
             </a:pPr>
             <a:r>
-              <a:rPr lang="en-US" sz="1320" dirty="0">
+              <a:rPr lang="en-US" sz="1220" dirty="0">
                 <a:solidFill>
                   <a:srgbClr val="17364A"/>
                 </a:solidFill>
@@ -5771,9 +5771,9 @@
                 <a:ea typeface="Aptos" pitchFamily="34" charset="-122"/>
                 <a:cs typeface="Aptos" pitchFamily="34" charset="-120"/>
               </a:rPr>
-              <a:t>Translate this concept into clear decision rights, review steps, documentation expectations, and escalation paths before an AI-supported workflow is approved.</a:t>
-            </a:r>
-            <a:endParaRPr lang="en-US" sz="1320" dirty="0"/>
+              <a:t>Translate this concept into clear decision rights, review steps, documentation.</a:t>
+            </a:r>
+            <a:endParaRPr lang="en-US" sz="1220" dirty="0"/>
           </a:p>
         </p:txBody>
       </p:sp>
@@ -6064,8 +6064,8 @@
         </p:nvSpPr>
         <p:spPr>
           <a:xfrm>
-            <a:off x="868680" y="1508760"/>
-            <a:ext cx="6309360" cy="4160520"/>
+            <a:off x="822960" y="1463040"/>
+            <a:ext cx="6565392" cy="4343400"/>
           </a:xfrm>
           <a:prstGeom prst="rect">
             <a:avLst/>
@@ -6083,7 +6083,7 @@
               <a:buNone/>
             </a:pPr>
             <a:r>
-              <a:rPr lang="en-US" sz="2100" dirty="0">
+              <a:rPr lang="en-US" sz="1920" dirty="0">
                 <a:solidFill>
                   <a:srgbClr val="003A63"/>
                 </a:solidFill>
@@ -6091,16 +6091,16 @@
                 <a:ea typeface="Aptos" pitchFamily="34" charset="-122"/>
                 <a:cs typeface="Aptos" pitchFamily="34" charset="-120"/>
               </a:rPr>
-              <a:t>• Generative AI, predictive analytics, RAG, automation, and agentic workflows all depend on the.</a:t>
-            </a:r>
-            <a:endParaRPr lang="en-US" sz="2100" dirty="0"/>
-          </a:p>
-          <a:p>
-            <a:pPr indent="0" marL="0">
-              <a:buNone/>
-            </a:pPr>
-            <a:r>
-              <a:rPr lang="en-US" sz="2100" dirty="0">
+              <a:t>• Generative AI, predictive analytics, RAG, automation, and agentic workflows.</a:t>
+            </a:r>
+            <a:endParaRPr lang="en-US" sz="1920" dirty="0"/>
+          </a:p>
+          <a:p>
+            <a:pPr indent="0" marL="0">
+              <a:buNone/>
+            </a:pPr>
+            <a:r>
+              <a:rPr lang="en-US" sz="1920" dirty="0">
                 <a:solidFill>
                   <a:srgbClr val="003A63"/>
                 </a:solidFill>
@@ -6110,14 +6110,14 @@
               </a:rPr>
               <a:t>• The controls should be scaled to the risk of the use case.</a:t>
             </a:r>
-            <a:endParaRPr lang="en-US" sz="2100" dirty="0"/>
-          </a:p>
-          <a:p>
-            <a:pPr indent="0" marL="0">
-              <a:buNone/>
-            </a:pPr>
-            <a:r>
-              <a:rPr lang="en-US" sz="2100" dirty="0">
+            <a:endParaRPr lang="en-US" sz="1920" dirty="0"/>
+          </a:p>
+          <a:p>
+            <a:pPr indent="0" marL="0">
+              <a:buNone/>
+            </a:pPr>
+            <a:r>
+              <a:rPr lang="en-US" sz="1920" dirty="0">
                 <a:solidFill>
                   <a:srgbClr val="003A63"/>
                 </a:solidFill>
@@ -6125,9 +6125,9 @@
                 <a:ea typeface="Aptos" pitchFamily="34" charset="-122"/>
                 <a:cs typeface="Aptos" pitchFamily="34" charset="-120"/>
               </a:rPr>
-              <a:t>• A tool that drafts internal training text may require lighter review than a tool that updates.</a:t>
-            </a:r>
-            <a:endParaRPr lang="en-US" sz="2100" dirty="0"/>
+              <a:t>• A tool that drafts internal training text may require lighter review than a.</a:t>
+            </a:r>
+            <a:endParaRPr lang="en-US" sz="1920" dirty="0"/>
           </a:p>
         </p:txBody>
       </p:sp>
@@ -6139,12 +6139,12 @@
         </p:nvSpPr>
         <p:spPr>
           <a:xfrm>
-            <a:off x="7635240" y="1325880"/>
-            <a:ext cx="3474720" cy="1255471"/>
+            <a:off x="7543800" y="1325880"/>
+            <a:ext cx="3611880" cy="1261872"/>
           </a:xfrm>
           <a:prstGeom prst="roundRect">
             <a:avLst>
-              <a:gd name="adj" fmla="val 8740"/>
+              <a:gd name="adj" fmla="val 8696"/>
             </a:avLst>
           </a:prstGeom>
           <a:solidFill>
@@ -6166,8 +6166,8 @@
         </p:nvSpPr>
         <p:spPr>
           <a:xfrm>
-            <a:off x="7799832" y="1472184"/>
-            <a:ext cx="3145536" cy="256032"/>
+            <a:off x="7708392" y="1453896"/>
+            <a:ext cx="3282696" cy="228600"/>
           </a:xfrm>
           <a:prstGeom prst="rect">
             <a:avLst/>
@@ -6183,7 +6183,7 @@
               <a:buNone/>
             </a:pPr>
             <a:r>
-              <a:rPr lang="en-US" sz="1300" b="1" dirty="0">
+              <a:rPr lang="en-US" sz="1220" b="1" dirty="0">
                 <a:solidFill>
                   <a:srgbClr val="0068B7"/>
                 </a:solidFill>
@@ -6193,7 +6193,7 @@
               </a:rPr>
               <a:t>Governance lens</a:t>
             </a:r>
-            <a:endParaRPr lang="en-US" sz="1300" dirty="0"/>
+            <a:endParaRPr lang="en-US" sz="1220" dirty="0"/>
           </a:p>
         </p:txBody>
       </p:sp>
@@ -6205,8 +6205,8 @@
         </p:nvSpPr>
         <p:spPr>
           <a:xfrm>
-            <a:off x="7799832" y="1801368"/>
-            <a:ext cx="3145536" cy="688543"/>
+            <a:off x="7708392" y="1764792"/>
+            <a:ext cx="3282696" cy="749808"/>
           </a:xfrm>
           <a:prstGeom prst="rect">
             <a:avLst/>
@@ -6224,7 +6224,7 @@
               <a:buNone/>
             </a:pPr>
             <a:r>
-              <a:rPr lang="en-US" sz="1320" dirty="0">
+              <a:rPr lang="en-US" sz="1220" dirty="0">
                 <a:solidFill>
                   <a:srgbClr val="17364A"/>
                 </a:solidFill>
@@ -6232,9 +6232,9 @@
                 <a:ea typeface="Aptos" pitchFamily="34" charset="-122"/>
                 <a:cs typeface="Aptos" pitchFamily="34" charset="-120"/>
               </a:rPr>
-              <a:t>Generative AI, predictive analytics, RAG, automation, and agentic workflows all depend on the controls.</a:t>
-            </a:r>
-            <a:endParaRPr lang="en-US" sz="1320" dirty="0"/>
+              <a:t>Generative AI, predictive analytics, RAG, automation, and agentic workflows all.</a:t>
+            </a:r>
+            <a:endParaRPr lang="en-US" sz="1220" dirty="0"/>
           </a:p>
         </p:txBody>
       </p:sp>
@@ -6246,12 +6246,12 @@
         </p:nvSpPr>
         <p:spPr>
           <a:xfrm>
-            <a:off x="7635240" y="2718511"/>
-            <a:ext cx="3474720" cy="1328623"/>
+            <a:off x="7543800" y="2724912"/>
+            <a:ext cx="3611880" cy="1527048"/>
           </a:xfrm>
           <a:prstGeom prst="roundRect">
             <a:avLst>
-              <a:gd name="adj" fmla="val 8259"/>
+              <a:gd name="adj" fmla="val 7186"/>
             </a:avLst>
           </a:prstGeom>
           <a:solidFill>
@@ -6273,8 +6273,8 @@
         </p:nvSpPr>
         <p:spPr>
           <a:xfrm>
-            <a:off x="7799832" y="2864815"/>
-            <a:ext cx="3145536" cy="256032"/>
+            <a:off x="7708392" y="2852928"/>
+            <a:ext cx="3282696" cy="228600"/>
           </a:xfrm>
           <a:prstGeom prst="rect">
             <a:avLst/>
@@ -6290,7 +6290,7 @@
               <a:buNone/>
             </a:pPr>
             <a:r>
-              <a:rPr lang="en-US" sz="1300" b="1" dirty="0">
+              <a:rPr lang="en-US" sz="1220" b="1" dirty="0">
                 <a:solidFill>
                   <a:srgbClr val="0068B7"/>
                 </a:solidFill>
@@ -6300,7 +6300,7 @@
               </a:rPr>
               <a:t>Concept checkpoints</a:t>
             </a:r>
-            <a:endParaRPr lang="en-US" sz="1300" dirty="0"/>
+            <a:endParaRPr lang="en-US" sz="1220" dirty="0"/>
           </a:p>
         </p:txBody>
       </p:sp>
@@ -6312,8 +6312,8 @@
         </p:nvSpPr>
         <p:spPr>
           <a:xfrm>
-            <a:off x="7818120" y="3230575"/>
-            <a:ext cx="3090672" cy="670255"/>
+            <a:off x="7726680" y="3182112"/>
+            <a:ext cx="3227832" cy="960120"/>
           </a:xfrm>
           <a:prstGeom prst="rect">
             <a:avLst/>
@@ -6331,7 +6331,7 @@
               <a:buNone/>
             </a:pPr>
             <a:r>
-              <a:rPr lang="en-US" sz="1220" dirty="0">
+              <a:rPr lang="en-US" sz="1140" dirty="0">
                 <a:solidFill>
                   <a:srgbClr val="17364A"/>
                 </a:solidFill>
@@ -6339,16 +6339,16 @@
                 <a:ea typeface="Aptos" pitchFamily="34" charset="-122"/>
                 <a:cs typeface="Aptos" pitchFamily="34" charset="-120"/>
               </a:rPr>
-              <a:t>Generative AI, predictive analytics, RAG, automation, and agentic.</a:t>
-            </a:r>
-            <a:endParaRPr lang="en-US" sz="1220" dirty="0"/>
-          </a:p>
-          <a:p>
-            <a:pPr indent="0" marL="0">
-              <a:buNone/>
-            </a:pPr>
-            <a:r>
-              <a:rPr lang="en-US" sz="1220" dirty="0">
+              <a:t>Generative AI, predictive analytics, RAG,.</a:t>
+            </a:r>
+            <a:endParaRPr lang="en-US" sz="1140" dirty="0"/>
+          </a:p>
+          <a:p>
+            <a:pPr indent="0" marL="0">
+              <a:buNone/>
+            </a:pPr>
+            <a:r>
+              <a:rPr lang="en-US" sz="1140" dirty="0">
                 <a:solidFill>
                   <a:srgbClr val="17364A"/>
                 </a:solidFill>
@@ -6356,16 +6356,16 @@
                 <a:ea typeface="Aptos" pitchFamily="34" charset="-122"/>
                 <a:cs typeface="Aptos" pitchFamily="34" charset="-120"/>
               </a:rPr>
-              <a:t>A tool that drafts internal training text may require lighter.</a:t>
-            </a:r>
-            <a:endParaRPr lang="en-US" sz="1220" dirty="0"/>
-          </a:p>
-          <a:p>
-            <a:pPr indent="0" marL="0">
-              <a:buNone/>
-            </a:pPr>
-            <a:r>
-              <a:rPr lang="en-US" sz="1220" dirty="0">
+              <a:t>A tool that drafts internal training text may.</a:t>
+            </a:r>
+            <a:endParaRPr lang="en-US" sz="1140" dirty="0"/>
+          </a:p>
+          <a:p>
+            <a:pPr indent="0" marL="0">
+              <a:buNone/>
+            </a:pPr>
+            <a:r>
+              <a:rPr lang="en-US" sz="1140" dirty="0">
                 <a:solidFill>
                   <a:srgbClr val="17364A"/>
                 </a:solidFill>
@@ -6373,9 +6373,9 @@
                 <a:ea typeface="Aptos" pitchFamily="34" charset="-122"/>
                 <a:cs typeface="Aptos" pitchFamily="34" charset="-120"/>
               </a:rPr>
-              <a:t>The module should be applied during readiness assessment,.</a:t>
-            </a:r>
-            <a:endParaRPr lang="en-US" sz="1220" dirty="0"/>
+              <a:t>The module should be applied during readiness.</a:t>
+            </a:r>
+            <a:endParaRPr lang="en-US" sz="1140" dirty="0"/>
           </a:p>
         </p:txBody>
       </p:sp>
@@ -6387,12 +6387,12 @@
         </p:nvSpPr>
         <p:spPr>
           <a:xfrm>
-            <a:off x="7635240" y="4184294"/>
-            <a:ext cx="3474720" cy="1466698"/>
+            <a:off x="7543800" y="4389120"/>
+            <a:ext cx="3611880" cy="1261872"/>
           </a:xfrm>
           <a:prstGeom prst="roundRect">
             <a:avLst>
-              <a:gd name="adj" fmla="val 7481"/>
+              <a:gd name="adj" fmla="val 8696"/>
             </a:avLst>
           </a:prstGeom>
           <a:solidFill>
@@ -6414,8 +6414,8 @@
         </p:nvSpPr>
         <p:spPr>
           <a:xfrm>
-            <a:off x="7799832" y="4330598"/>
-            <a:ext cx="3145536" cy="256032"/>
+            <a:off x="7708392" y="4517136"/>
+            <a:ext cx="3282696" cy="228600"/>
           </a:xfrm>
           <a:prstGeom prst="rect">
             <a:avLst/>
@@ -6431,7 +6431,7 @@
               <a:buNone/>
             </a:pPr>
             <a:r>
-              <a:rPr lang="en-US" sz="1300" b="1" dirty="0">
+              <a:rPr lang="en-US" sz="1220" b="1" dirty="0">
                 <a:solidFill>
                   <a:srgbClr val="0068B7"/>
                 </a:solidFill>
@@ -6441,7 +6441,7 @@
               </a:rPr>
               <a:t>What to document</a:t>
             </a:r>
-            <a:endParaRPr lang="en-US" sz="1300" dirty="0"/>
+            <a:endParaRPr lang="en-US" sz="1220" dirty="0"/>
           </a:p>
         </p:txBody>
       </p:sp>
@@ -6453,8 +6453,8 @@
         </p:nvSpPr>
         <p:spPr>
           <a:xfrm>
-            <a:off x="7799832" y="4659782"/>
-            <a:ext cx="3145536" cy="899770"/>
+            <a:off x="7708392" y="4828032"/>
+            <a:ext cx="3282696" cy="749808"/>
           </a:xfrm>
           <a:prstGeom prst="rect">
             <a:avLst/>
@@ -6472,7 +6472,7 @@
               <a:buNone/>
             </a:pPr>
             <a:r>
-              <a:rPr lang="en-US" sz="1320" dirty="0">
+              <a:rPr lang="en-US" sz="1220" dirty="0">
                 <a:solidFill>
                   <a:srgbClr val="17364A"/>
                 </a:solidFill>
@@ -6480,9 +6480,9 @@
                 <a:ea typeface="Aptos" pitchFamily="34" charset="-122"/>
                 <a:cs typeface="Aptos" pitchFamily="34" charset="-120"/>
               </a:rPr>
-              <a:t>Translate this concept into clear decision rights, review steps, documentation expectations, and escalation paths before an AI-supported workflow is approved.</a:t>
-            </a:r>
-            <a:endParaRPr lang="en-US" sz="1320" dirty="0"/>
+              <a:t>Translate this concept into clear decision rights, review steps, documentation.</a:t>
+            </a:r>
+            <a:endParaRPr lang="en-US" sz="1220" dirty="0"/>
           </a:p>
         </p:txBody>
       </p:sp>
@@ -6773,8 +6773,8 @@
         </p:nvSpPr>
         <p:spPr>
           <a:xfrm>
-            <a:off x="868680" y="1508760"/>
-            <a:ext cx="6309360" cy="4160520"/>
+            <a:off x="822960" y="1463040"/>
+            <a:ext cx="6565392" cy="4343400"/>
           </a:xfrm>
           <a:prstGeom prst="rect">
             <a:avLst/>
@@ -6792,7 +6792,7 @@
               <a:buNone/>
             </a:pPr>
             <a:r>
-              <a:rPr lang="en-US" sz="2100" dirty="0">
+              <a:rPr lang="en-US" sz="1920" dirty="0">
                 <a:solidFill>
                   <a:srgbClr val="003A63"/>
                 </a:solidFill>
@@ -6800,16 +6800,16 @@
                 <a:ea typeface="Aptos" pitchFamily="34" charset="-122"/>
                 <a:cs typeface="Aptos" pitchFamily="34" charset="-120"/>
               </a:rPr>
-              <a:t>• Where does this topic appear in one current or proposed AI workflow in your agency?</a:t>
-            </a:r>
-            <a:endParaRPr lang="en-US" sz="2100" dirty="0"/>
-          </a:p>
-          <a:p>
-            <a:pPr indent="0" marL="0">
-              <a:buNone/>
-            </a:pPr>
-            <a:r>
-              <a:rPr lang="en-US" sz="2100" dirty="0">
+              <a:t>• Where does this topic appear in one current or proposed AI workflow in your.</a:t>
+            </a:r>
+            <a:endParaRPr lang="en-US" sz="1920" dirty="0"/>
+          </a:p>
+          <a:p>
+            <a:pPr indent="0" marL="0">
+              <a:buNone/>
+            </a:pPr>
+            <a:r>
+              <a:rPr lang="en-US" sz="1920" dirty="0">
                 <a:solidFill>
                   <a:srgbClr val="003A63"/>
                 </a:solidFill>
@@ -6817,16 +6817,16 @@
                 <a:ea typeface="Aptos" pitchFamily="34" charset="-122"/>
                 <a:cs typeface="Aptos" pitchFamily="34" charset="-120"/>
               </a:rPr>
-              <a:t>• What decisions, data sources, users, or partners would be affected if this area is poorly.</a:t>
-            </a:r>
-            <a:endParaRPr lang="en-US" sz="2100" dirty="0"/>
-          </a:p>
-          <a:p>
-            <a:pPr indent="0" marL="0">
-              <a:buNone/>
-            </a:pPr>
-            <a:r>
-              <a:rPr lang="en-US" sz="2100" dirty="0">
+              <a:t>• What decisions, data sources, users, or partners would be affected if this.</a:t>
+            </a:r>
+            <a:endParaRPr lang="en-US" sz="1920" dirty="0"/>
+          </a:p>
+          <a:p>
+            <a:pPr indent="0" marL="0">
+              <a:buNone/>
+            </a:pPr>
+            <a:r>
+              <a:rPr lang="en-US" sz="1920" dirty="0">
                 <a:solidFill>
                   <a:srgbClr val="003A63"/>
                 </a:solidFill>
@@ -6836,7 +6836,7 @@
               </a:rPr>
               <a:t>• What evidence would governance reviewers need before approving the workflow?</a:t>
             </a:r>
-            <a:endParaRPr lang="en-US" sz="2100" dirty="0"/>
+            <a:endParaRPr lang="en-US" sz="1920" dirty="0"/>
           </a:p>
         </p:txBody>
       </p:sp>
@@ -6848,12 +6848,12 @@
         </p:nvSpPr>
         <p:spPr>
           <a:xfrm>
-            <a:off x="7635240" y="1325880"/>
-            <a:ext cx="3474720" cy="1207008"/>
+            <a:off x="7543800" y="1325880"/>
+            <a:ext cx="3611880" cy="1261872"/>
           </a:xfrm>
           <a:prstGeom prst="roundRect">
             <a:avLst>
-              <a:gd name="adj" fmla="val 9091"/>
+              <a:gd name="adj" fmla="val 8696"/>
             </a:avLst>
           </a:prstGeom>
           <a:solidFill>
@@ -6875,8 +6875,8 @@
         </p:nvSpPr>
         <p:spPr>
           <a:xfrm>
-            <a:off x="7799832" y="1472184"/>
-            <a:ext cx="3145536" cy="256032"/>
+            <a:off x="7708392" y="1453896"/>
+            <a:ext cx="3282696" cy="228600"/>
           </a:xfrm>
           <a:prstGeom prst="rect">
             <a:avLst/>
@@ -6892,7 +6892,7 @@
               <a:buNone/>
             </a:pPr>
             <a:r>
-              <a:rPr lang="en-US" sz="1300" b="1" dirty="0">
+              <a:rPr lang="en-US" sz="1220" b="1" dirty="0">
                 <a:solidFill>
                   <a:srgbClr val="0068B7"/>
                 </a:solidFill>
@@ -6902,7 +6902,7 @@
               </a:rPr>
               <a:t>Governance lens</a:t>
             </a:r>
-            <a:endParaRPr lang="en-US" sz="1300" dirty="0"/>
+            <a:endParaRPr lang="en-US" sz="1220" dirty="0"/>
           </a:p>
         </p:txBody>
       </p:sp>
@@ -6914,8 +6914,8 @@
         </p:nvSpPr>
         <p:spPr>
           <a:xfrm>
-            <a:off x="7799832" y="1801368"/>
-            <a:ext cx="3145536" cy="640080"/>
+            <a:off x="7708392" y="1764792"/>
+            <a:ext cx="3282696" cy="749808"/>
           </a:xfrm>
           <a:prstGeom prst="rect">
             <a:avLst/>
@@ -6933,7 +6933,7 @@
               <a:buNone/>
             </a:pPr>
             <a:r>
-              <a:rPr lang="en-US" sz="1320" dirty="0">
+              <a:rPr lang="en-US" sz="1220" dirty="0">
                 <a:solidFill>
                   <a:srgbClr val="17364A"/>
                 </a:solidFill>
@@ -6941,9 +6941,9 @@
                 <a:ea typeface="Aptos" pitchFamily="34" charset="-122"/>
                 <a:cs typeface="Aptos" pitchFamily="34" charset="-120"/>
               </a:rPr>
-              <a:t>Where does this topic appear in one current or proposed AI workflow in your agency?</a:t>
-            </a:r>
-            <a:endParaRPr lang="en-US" sz="1320" dirty="0"/>
+              <a:t>Where does this topic appear in one current or proposed AI workflow in your.</a:t>
+            </a:r>
+            <a:endParaRPr lang="en-US" sz="1220" dirty="0"/>
           </a:p>
         </p:txBody>
       </p:sp>
@@ -6955,12 +6955,12 @@
         </p:nvSpPr>
         <p:spPr>
           <a:xfrm>
-            <a:off x="7635240" y="2670048"/>
-            <a:ext cx="3474720" cy="1377086"/>
+            <a:off x="7543800" y="2724912"/>
+            <a:ext cx="3611880" cy="1527048"/>
           </a:xfrm>
           <a:prstGeom prst="roundRect">
             <a:avLst>
-              <a:gd name="adj" fmla="val 7968"/>
+              <a:gd name="adj" fmla="val 7186"/>
             </a:avLst>
           </a:prstGeom>
           <a:solidFill>
@@ -6982,8 +6982,8 @@
         </p:nvSpPr>
         <p:spPr>
           <a:xfrm>
-            <a:off x="7799832" y="2816352"/>
-            <a:ext cx="3145536" cy="256032"/>
+            <a:off x="7708392" y="2852928"/>
+            <a:ext cx="3282696" cy="228600"/>
           </a:xfrm>
           <a:prstGeom prst="rect">
             <a:avLst/>
@@ -6999,7 +6999,7 @@
               <a:buNone/>
             </a:pPr>
             <a:r>
-              <a:rPr lang="en-US" sz="1300" b="1" dirty="0">
+              <a:rPr lang="en-US" sz="1220" b="1" dirty="0">
                 <a:solidFill>
                   <a:srgbClr val="0068B7"/>
                 </a:solidFill>
@@ -7009,7 +7009,7 @@
               </a:rPr>
               <a:t>Concept checkpoints</a:t>
             </a:r>
-            <a:endParaRPr lang="en-US" sz="1300" dirty="0"/>
+            <a:endParaRPr lang="en-US" sz="1220" dirty="0"/>
           </a:p>
         </p:txBody>
       </p:sp>
@@ -7021,8 +7021,8 @@
         </p:nvSpPr>
         <p:spPr>
           <a:xfrm>
-            <a:off x="7818120" y="3182112"/>
-            <a:ext cx="3090672" cy="718718"/>
+            <a:off x="7726680" y="3182112"/>
+            <a:ext cx="3227832" cy="960120"/>
           </a:xfrm>
           <a:prstGeom prst="rect">
             <a:avLst/>
@@ -7040,7 +7040,7 @@
               <a:buNone/>
             </a:pPr>
             <a:r>
-              <a:rPr lang="en-US" sz="1220" dirty="0">
+              <a:rPr lang="en-US" sz="1140" dirty="0">
                 <a:solidFill>
                   <a:srgbClr val="17364A"/>
                 </a:solidFill>
@@ -7048,16 +7048,16 @@
                 <a:ea typeface="Aptos" pitchFamily="34" charset="-122"/>
                 <a:cs typeface="Aptos" pitchFamily="34" charset="-120"/>
               </a:rPr>
-              <a:t>Where does this topic appear in one current or proposed AI.</a:t>
-            </a:r>
-            <a:endParaRPr lang="en-US" sz="1220" dirty="0"/>
-          </a:p>
-          <a:p>
-            <a:pPr indent="0" marL="0">
-              <a:buNone/>
-            </a:pPr>
-            <a:r>
-              <a:rPr lang="en-US" sz="1220" dirty="0">
+              <a:t>Where does this topic appear in one current or.</a:t>
+            </a:r>
+            <a:endParaRPr lang="en-US" sz="1140" dirty="0"/>
+          </a:p>
+          <a:p>
+            <a:pPr indent="0" marL="0">
+              <a:buNone/>
+            </a:pPr>
+            <a:r>
+              <a:rPr lang="en-US" sz="1140" dirty="0">
                 <a:solidFill>
                   <a:srgbClr val="17364A"/>
                 </a:solidFill>
@@ -7065,16 +7065,16 @@
                 <a:ea typeface="Aptos" pitchFamily="34" charset="-122"/>
                 <a:cs typeface="Aptos" pitchFamily="34" charset="-120"/>
               </a:rPr>
-              <a:t>What decisions, data sources, users, or partners would be affected.</a:t>
-            </a:r>
-            <a:endParaRPr lang="en-US" sz="1220" dirty="0"/>
-          </a:p>
-          <a:p>
-            <a:pPr indent="0" marL="0">
-              <a:buNone/>
-            </a:pPr>
-            <a:r>
-              <a:rPr lang="en-US" sz="1220" dirty="0">
+              <a:t>What decisions, data sources, users, or partners.</a:t>
+            </a:r>
+            <a:endParaRPr lang="en-US" sz="1140" dirty="0"/>
+          </a:p>
+          <a:p>
+            <a:pPr indent="0" marL="0">
+              <a:buNone/>
+            </a:pPr>
+            <a:r>
+              <a:rPr lang="en-US" sz="1140" dirty="0">
                 <a:solidFill>
                   <a:srgbClr val="17364A"/>
                 </a:solidFill>
@@ -7082,9 +7082,9 @@
                 <a:ea typeface="Aptos" pitchFamily="34" charset="-122"/>
                 <a:cs typeface="Aptos" pitchFamily="34" charset="-120"/>
               </a:rPr>
-              <a:t>What evidence would governance reviewers need before approving the.</a:t>
-            </a:r>
-            <a:endParaRPr lang="en-US" sz="1220" dirty="0"/>
+              <a:t>What evidence would governance reviewers need.</a:t>
+            </a:r>
+            <a:endParaRPr lang="en-US" sz="1140" dirty="0"/>
           </a:p>
         </p:txBody>
       </p:sp>
@@ -7096,12 +7096,12 @@
         </p:nvSpPr>
         <p:spPr>
           <a:xfrm>
-            <a:off x="7635240" y="4184294"/>
-            <a:ext cx="3474720" cy="1466698"/>
+            <a:off x="7543800" y="4389120"/>
+            <a:ext cx="3611880" cy="1261872"/>
           </a:xfrm>
           <a:prstGeom prst="roundRect">
             <a:avLst>
-              <a:gd name="adj" fmla="val 7481"/>
+              <a:gd name="adj" fmla="val 8696"/>
             </a:avLst>
           </a:prstGeom>
           <a:solidFill>
@@ -7123,8 +7123,8 @@
         </p:nvSpPr>
         <p:spPr>
           <a:xfrm>
-            <a:off x="7799832" y="4330598"/>
-            <a:ext cx="3145536" cy="256032"/>
+            <a:off x="7708392" y="4517136"/>
+            <a:ext cx="3282696" cy="228600"/>
           </a:xfrm>
           <a:prstGeom prst="rect">
             <a:avLst/>
@@ -7140,7 +7140,7 @@
               <a:buNone/>
             </a:pPr>
             <a:r>
-              <a:rPr lang="en-US" sz="1300" b="1" dirty="0">
+              <a:rPr lang="en-US" sz="1220" b="1" dirty="0">
                 <a:solidFill>
                   <a:srgbClr val="0068B7"/>
                 </a:solidFill>
@@ -7150,7 +7150,7 @@
               </a:rPr>
               <a:t>What to document</a:t>
             </a:r>
-            <a:endParaRPr lang="en-US" sz="1300" dirty="0"/>
+            <a:endParaRPr lang="en-US" sz="1220" dirty="0"/>
           </a:p>
         </p:txBody>
       </p:sp>
@@ -7162,8 +7162,8 @@
         </p:nvSpPr>
         <p:spPr>
           <a:xfrm>
-            <a:off x="7799832" y="4659782"/>
-            <a:ext cx="3145536" cy="899770"/>
+            <a:off x="7708392" y="4828032"/>
+            <a:ext cx="3282696" cy="749808"/>
           </a:xfrm>
           <a:prstGeom prst="rect">
             <a:avLst/>
@@ -7181,7 +7181,7 @@
               <a:buNone/>
             </a:pPr>
             <a:r>
-              <a:rPr lang="en-US" sz="1320" dirty="0">
+              <a:rPr lang="en-US" sz="1220" dirty="0">
                 <a:solidFill>
                   <a:srgbClr val="17364A"/>
                 </a:solidFill>
@@ -7189,9 +7189,9 @@
                 <a:ea typeface="Aptos" pitchFamily="34" charset="-122"/>
                 <a:cs typeface="Aptos" pitchFamily="34" charset="-120"/>
               </a:rPr>
-              <a:t>Translate this concept into clear decision rights, review steps, documentation expectations, and escalation paths before an AI-supported workflow is approved.</a:t>
-            </a:r>
-            <a:endParaRPr lang="en-US" sz="1320" dirty="0"/>
+              <a:t>Translate this concept into clear decision rights, review steps, documentation.</a:t>
+            </a:r>
+            <a:endParaRPr lang="en-US" sz="1220" dirty="0"/>
           </a:p>
         </p:txBody>
       </p:sp>
@@ -7482,8 +7482,8 @@
         </p:nvSpPr>
         <p:spPr>
           <a:xfrm>
-            <a:off x="868680" y="1508760"/>
-            <a:ext cx="6309360" cy="4160520"/>
+            <a:off x="822960" y="1463040"/>
+            <a:ext cx="6565392" cy="4343400"/>
           </a:xfrm>
           <a:prstGeom prst="rect">
             <a:avLst/>
@@ -7501,7 +7501,7 @@
               <a:buNone/>
             </a:pPr>
             <a:r>
-              <a:rPr lang="en-US" sz="2100" dirty="0">
+              <a:rPr lang="en-US" sz="1920" dirty="0">
                 <a:solidFill>
                   <a:srgbClr val="003A63"/>
                 </a:solidFill>
@@ -7511,14 +7511,14 @@
               </a:rPr>
               <a:t>• Which safeguards should be required before pilot testing?</a:t>
             </a:r>
-            <a:endParaRPr lang="en-US" sz="2100" dirty="0"/>
-          </a:p>
-          <a:p>
-            <a:pPr indent="0" marL="0">
-              <a:buNone/>
-            </a:pPr>
-            <a:r>
-              <a:rPr lang="en-US" sz="2100" dirty="0">
+            <a:endParaRPr lang="en-US" sz="1920" dirty="0"/>
+          </a:p>
+          <a:p>
+            <a:pPr indent="0" marL="0">
+              <a:buNone/>
+            </a:pPr>
+            <a:r>
+              <a:rPr lang="en-US" sz="1920" dirty="0">
                 <a:solidFill>
                   <a:srgbClr val="003A63"/>
                 </a:solidFill>
@@ -7528,7 +7528,7 @@
               </a:rPr>
               <a:t>• Who owns ongoing monitoring and review?</a:t>
             </a:r>
-            <a:endParaRPr lang="en-US" sz="2100" dirty="0"/>
+            <a:endParaRPr lang="en-US" sz="1920" dirty="0"/>
           </a:p>
         </p:txBody>
       </p:sp>
@@ -7540,12 +7540,12 @@
         </p:nvSpPr>
         <p:spPr>
           <a:xfrm>
-            <a:off x="7635240" y="1325880"/>
-            <a:ext cx="3474720" cy="1207008"/>
+            <a:off x="7543800" y="1325880"/>
+            <a:ext cx="3611880" cy="1261872"/>
           </a:xfrm>
           <a:prstGeom prst="roundRect">
             <a:avLst>
-              <a:gd name="adj" fmla="val 9091"/>
+              <a:gd name="adj" fmla="val 8696"/>
             </a:avLst>
           </a:prstGeom>
           <a:solidFill>
@@ -7567,8 +7567,8 @@
         </p:nvSpPr>
         <p:spPr>
           <a:xfrm>
-            <a:off x="7799832" y="1472184"/>
-            <a:ext cx="3145536" cy="256032"/>
+            <a:off x="7708392" y="1453896"/>
+            <a:ext cx="3282696" cy="228600"/>
           </a:xfrm>
           <a:prstGeom prst="rect">
             <a:avLst/>
@@ -7584,7 +7584,7 @@
               <a:buNone/>
             </a:pPr>
             <a:r>
-              <a:rPr lang="en-US" sz="1300" b="1" dirty="0">
+              <a:rPr lang="en-US" sz="1220" b="1" dirty="0">
                 <a:solidFill>
                   <a:srgbClr val="0068B7"/>
                 </a:solidFill>
@@ -7594,7 +7594,7 @@
               </a:rPr>
               <a:t>Governance lens</a:t>
             </a:r>
-            <a:endParaRPr lang="en-US" sz="1300" dirty="0"/>
+            <a:endParaRPr lang="en-US" sz="1220" dirty="0"/>
           </a:p>
         </p:txBody>
       </p:sp>
@@ -7606,8 +7606,8 @@
         </p:nvSpPr>
         <p:spPr>
           <a:xfrm>
-            <a:off x="7799832" y="1801368"/>
-            <a:ext cx="3145536" cy="640080"/>
+            <a:off x="7708392" y="1764792"/>
+            <a:ext cx="3282696" cy="749808"/>
           </a:xfrm>
           <a:prstGeom prst="rect">
             <a:avLst/>
@@ -7625,7 +7625,7 @@
               <a:buNone/>
             </a:pPr>
             <a:r>
-              <a:rPr lang="en-US" sz="1320" dirty="0">
+              <a:rPr lang="en-US" sz="1220" dirty="0">
                 <a:solidFill>
                   <a:srgbClr val="17364A"/>
                 </a:solidFill>
@@ -7635,7 +7635,7 @@
               </a:rPr>
               <a:t>Which safeguards should be required before pilot testing?</a:t>
             </a:r>
-            <a:endParaRPr lang="en-US" sz="1320" dirty="0"/>
+            <a:endParaRPr lang="en-US" sz="1220" dirty="0"/>
           </a:p>
         </p:txBody>
       </p:sp>
@@ -7647,12 +7647,12 @@
         </p:nvSpPr>
         <p:spPr>
           <a:xfrm>
-            <a:off x="7635240" y="2670048"/>
-            <a:ext cx="3474720" cy="1377086"/>
+            <a:off x="7543800" y="2724912"/>
+            <a:ext cx="3611880" cy="1527048"/>
           </a:xfrm>
           <a:prstGeom prst="roundRect">
             <a:avLst>
-              <a:gd name="adj" fmla="val 7968"/>
+              <a:gd name="adj" fmla="val 7186"/>
             </a:avLst>
           </a:prstGeom>
           <a:solidFill>
@@ -7674,8 +7674,8 @@
         </p:nvSpPr>
         <p:spPr>
           <a:xfrm>
-            <a:off x="7799832" y="2816352"/>
-            <a:ext cx="3145536" cy="256032"/>
+            <a:off x="7708392" y="2852928"/>
+            <a:ext cx="3282696" cy="228600"/>
           </a:xfrm>
           <a:prstGeom prst="rect">
             <a:avLst/>
@@ -7691,7 +7691,7 @@
               <a:buNone/>
             </a:pPr>
             <a:r>
-              <a:rPr lang="en-US" sz="1300" b="1" dirty="0">
+              <a:rPr lang="en-US" sz="1220" b="1" dirty="0">
                 <a:solidFill>
                   <a:srgbClr val="0068B7"/>
                 </a:solidFill>
@@ -7701,7 +7701,7 @@
               </a:rPr>
               <a:t>Concept checkpoints</a:t>
             </a:r>
-            <a:endParaRPr lang="en-US" sz="1300" dirty="0"/>
+            <a:endParaRPr lang="en-US" sz="1220" dirty="0"/>
           </a:p>
         </p:txBody>
       </p:sp>
@@ -7713,8 +7713,8 @@
         </p:nvSpPr>
         <p:spPr>
           <a:xfrm>
-            <a:off x="7818120" y="3182112"/>
-            <a:ext cx="3090672" cy="718718"/>
+            <a:off x="7726680" y="3182112"/>
+            <a:ext cx="3227832" cy="960120"/>
           </a:xfrm>
           <a:prstGeom prst="rect">
             <a:avLst/>
@@ -7732,7 +7732,7 @@
               <a:buNone/>
             </a:pPr>
             <a:r>
-              <a:rPr lang="en-US" sz="1220" dirty="0">
+              <a:rPr lang="en-US" sz="1140" dirty="0">
                 <a:solidFill>
                   <a:srgbClr val="17364A"/>
                 </a:solidFill>
@@ -7740,16 +7740,16 @@
                 <a:ea typeface="Aptos" pitchFamily="34" charset="-122"/>
                 <a:cs typeface="Aptos" pitchFamily="34" charset="-120"/>
               </a:rPr>
-              <a:t>Which safeguards should be required before pilot testing?</a:t>
-            </a:r>
-            <a:endParaRPr lang="en-US" sz="1220" dirty="0"/>
-          </a:p>
-          <a:p>
-            <a:pPr indent="0" marL="0">
-              <a:buNone/>
-            </a:pPr>
-            <a:r>
-              <a:rPr lang="en-US" sz="1220" dirty="0">
+              <a:t>Which safeguards should be required before pilot.</a:t>
+            </a:r>
+            <a:endParaRPr lang="en-US" sz="1140" dirty="0"/>
+          </a:p>
+          <a:p>
+            <a:pPr indent="0" marL="0">
+              <a:buNone/>
+            </a:pPr>
+            <a:r>
+              <a:rPr lang="en-US" sz="1140" dirty="0">
                 <a:solidFill>
                   <a:srgbClr val="17364A"/>
                 </a:solidFill>
@@ -7759,7 +7759,7 @@
               </a:rPr>
               <a:t>Who owns ongoing monitoring and review?</a:t>
             </a:r>
-            <a:endParaRPr lang="en-US" sz="1220" dirty="0"/>
+            <a:endParaRPr lang="en-US" sz="1140" dirty="0"/>
           </a:p>
         </p:txBody>
       </p:sp>
@@ -7771,12 +7771,12 @@
         </p:nvSpPr>
         <p:spPr>
           <a:xfrm>
-            <a:off x="7635240" y="4184294"/>
-            <a:ext cx="3474720" cy="1466698"/>
+            <a:off x="7543800" y="4389120"/>
+            <a:ext cx="3611880" cy="1261872"/>
           </a:xfrm>
           <a:prstGeom prst="roundRect">
             <a:avLst>
-              <a:gd name="adj" fmla="val 7481"/>
+              <a:gd name="adj" fmla="val 8696"/>
             </a:avLst>
           </a:prstGeom>
           <a:solidFill>
@@ -7798,8 +7798,8 @@
         </p:nvSpPr>
         <p:spPr>
           <a:xfrm>
-            <a:off x="7799832" y="4330598"/>
-            <a:ext cx="3145536" cy="256032"/>
+            <a:off x="7708392" y="4517136"/>
+            <a:ext cx="3282696" cy="228600"/>
           </a:xfrm>
           <a:prstGeom prst="rect">
             <a:avLst/>
@@ -7815,7 +7815,7 @@
               <a:buNone/>
             </a:pPr>
             <a:r>
-              <a:rPr lang="en-US" sz="1300" b="1" dirty="0">
+              <a:rPr lang="en-US" sz="1220" b="1" dirty="0">
                 <a:solidFill>
                   <a:srgbClr val="0068B7"/>
                 </a:solidFill>
@@ -7825,7 +7825,7 @@
               </a:rPr>
               <a:t>What to document</a:t>
             </a:r>
-            <a:endParaRPr lang="en-US" sz="1300" dirty="0"/>
+            <a:endParaRPr lang="en-US" sz="1220" dirty="0"/>
           </a:p>
         </p:txBody>
       </p:sp>
@@ -7837,8 +7837,8 @@
         </p:nvSpPr>
         <p:spPr>
           <a:xfrm>
-            <a:off x="7799832" y="4659782"/>
-            <a:ext cx="3145536" cy="899770"/>
+            <a:off x="7708392" y="4828032"/>
+            <a:ext cx="3282696" cy="749808"/>
           </a:xfrm>
           <a:prstGeom prst="rect">
             <a:avLst/>
@@ -7856,7 +7856,7 @@
               <a:buNone/>
             </a:pPr>
             <a:r>
-              <a:rPr lang="en-US" sz="1320" dirty="0">
+              <a:rPr lang="en-US" sz="1220" dirty="0">
                 <a:solidFill>
                   <a:srgbClr val="17364A"/>
                 </a:solidFill>
@@ -7864,9 +7864,9 @@
                 <a:ea typeface="Aptos" pitchFamily="34" charset="-122"/>
                 <a:cs typeface="Aptos" pitchFamily="34" charset="-120"/>
               </a:rPr>
-              <a:t>Translate this concept into clear decision rights, review steps, documentation expectations, and escalation paths before an AI-supported workflow is approved.</a:t>
-            </a:r>
-            <a:endParaRPr lang="en-US" sz="1320" dirty="0"/>
+              <a:t>Translate this concept into clear decision rights, review steps, documentation.</a:t>
+            </a:r>
+            <a:endParaRPr lang="en-US" sz="1220" dirty="0"/>
           </a:p>
         </p:txBody>
       </p:sp>
@@ -8157,8 +8157,8 @@
         </p:nvSpPr>
         <p:spPr>
           <a:xfrm>
-            <a:off x="868680" y="1508760"/>
-            <a:ext cx="6309360" cy="4160520"/>
+            <a:off x="822960" y="1463040"/>
+            <a:ext cx="6565392" cy="4343400"/>
           </a:xfrm>
           <a:prstGeom prst="rect">
             <a:avLst/>
@@ -8176,7 +8176,7 @@
               <a:buNone/>
             </a:pPr>
             <a:r>
-              <a:rPr lang="en-US" sz="2100" dirty="0">
+              <a:rPr lang="en-US" sz="1920" dirty="0">
                 <a:solidFill>
                   <a:srgbClr val="003A63"/>
                 </a:solidFill>
@@ -8184,16 +8184,16 @@
                 <a:ea typeface="Aptos" pitchFamily="34" charset="-122"/>
                 <a:cs typeface="Aptos" pitchFamily="34" charset="-120"/>
               </a:rPr>
-              <a:t>• Create a AI-ready data governance checklist for one real or realistic public health AI workflow.</a:t>
-            </a:r>
-            <a:endParaRPr lang="en-US" sz="2100" dirty="0"/>
-          </a:p>
-          <a:p>
-            <a:pPr indent="0" marL="0">
-              <a:buNone/>
-            </a:pPr>
-            <a:r>
-              <a:rPr lang="en-US" sz="2100" dirty="0">
+              <a:t>• Create a AI-ready data governance checklist for one real or realistic public.</a:t>
+            </a:r>
+            <a:endParaRPr lang="en-US" sz="1920" dirty="0"/>
+          </a:p>
+          <a:p>
+            <a:pPr indent="0" marL="0">
+              <a:buNone/>
+            </a:pPr>
+            <a:r>
+              <a:rPr lang="en-US" sz="1920" dirty="0">
                 <a:solidFill>
                   <a:srgbClr val="003A63"/>
                 </a:solidFill>
@@ -8201,16 +8201,16 @@
                 <a:ea typeface="Aptos" pitchFamily="34" charset="-122"/>
                 <a:cs typeface="Aptos" pitchFamily="34" charset="-120"/>
               </a:rPr>
-              <a:t>• The artifact should describe the use case, affected users, data sources, system dependencies,.</a:t>
-            </a:r>
-            <a:endParaRPr lang="en-US" sz="2100" dirty="0"/>
-          </a:p>
-          <a:p>
-            <a:pPr indent="0" marL="0">
-              <a:buNone/>
-            </a:pPr>
-            <a:r>
-              <a:rPr lang="en-US" sz="2100" dirty="0">
+              <a:t>• The artifact should describe the use case, affected users, data sources,.</a:t>
+            </a:r>
+            <a:endParaRPr lang="en-US" sz="1920" dirty="0"/>
+          </a:p>
+          <a:p>
+            <a:pPr indent="0" marL="0">
+              <a:buNone/>
+            </a:pPr>
+            <a:r>
+              <a:rPr lang="en-US" sz="1920" dirty="0">
                 <a:solidFill>
                   <a:srgbClr val="003A63"/>
                 </a:solidFill>
@@ -8218,9 +8218,9 @@
                 <a:ea typeface="Aptos" pitchFamily="34" charset="-122"/>
                 <a:cs typeface="Aptos" pitchFamily="34" charset="-120"/>
               </a:rPr>
-              <a:t>• The exercise should produce a work product that could be used in a governance meeting,.</a:t>
-            </a:r>
-            <a:endParaRPr lang="en-US" sz="2100" dirty="0"/>
+              <a:t>• The exercise should produce a work product that could be used in a.</a:t>
+            </a:r>
+            <a:endParaRPr lang="en-US" sz="1920" dirty="0"/>
           </a:p>
         </p:txBody>
       </p:sp>
@@ -8232,12 +8232,12 @@
         </p:nvSpPr>
         <p:spPr>
           <a:xfrm>
-            <a:off x="7635240" y="1325880"/>
-            <a:ext cx="3474720" cy="1255471"/>
+            <a:off x="7543800" y="1325880"/>
+            <a:ext cx="3611880" cy="1261872"/>
           </a:xfrm>
           <a:prstGeom prst="roundRect">
             <a:avLst>
-              <a:gd name="adj" fmla="val 8740"/>
+              <a:gd name="adj" fmla="val 8696"/>
             </a:avLst>
           </a:prstGeom>
           <a:solidFill>
@@ -8259,8 +8259,8 @@
         </p:nvSpPr>
         <p:spPr>
           <a:xfrm>
-            <a:off x="7799832" y="1472184"/>
-            <a:ext cx="3145536" cy="256032"/>
+            <a:off x="7708392" y="1453896"/>
+            <a:ext cx="3282696" cy="228600"/>
           </a:xfrm>
           <a:prstGeom prst="rect">
             <a:avLst/>
@@ -8276,7 +8276,7 @@
               <a:buNone/>
             </a:pPr>
             <a:r>
-              <a:rPr lang="en-US" sz="1300" b="1" dirty="0">
+              <a:rPr lang="en-US" sz="1220" b="1" dirty="0">
                 <a:solidFill>
                   <a:srgbClr val="0068B7"/>
                 </a:solidFill>
@@ -8286,7 +8286,7 @@
               </a:rPr>
               <a:t>Governance lens</a:t>
             </a:r>
-            <a:endParaRPr lang="en-US" sz="1300" dirty="0"/>
+            <a:endParaRPr lang="en-US" sz="1220" dirty="0"/>
           </a:p>
         </p:txBody>
       </p:sp>
@@ -8298,8 +8298,8 @@
         </p:nvSpPr>
         <p:spPr>
           <a:xfrm>
-            <a:off x="7799832" y="1801368"/>
-            <a:ext cx="3145536" cy="688543"/>
+            <a:off x="7708392" y="1764792"/>
+            <a:ext cx="3282696" cy="749808"/>
           </a:xfrm>
           <a:prstGeom prst="rect">
             <a:avLst/>
@@ -8317,7 +8317,7 @@
               <a:buNone/>
             </a:pPr>
             <a:r>
-              <a:rPr lang="en-US" sz="1320" dirty="0">
+              <a:rPr lang="en-US" sz="1220" dirty="0">
                 <a:solidFill>
                   <a:srgbClr val="17364A"/>
                 </a:solidFill>
@@ -8325,9 +8325,9 @@
                 <a:ea typeface="Aptos" pitchFamily="34" charset="-122"/>
                 <a:cs typeface="Aptos" pitchFamily="34" charset="-120"/>
               </a:rPr>
-              <a:t>Create a AI-ready data governance checklist for one real or realistic public health AI workflow.</a:t>
-            </a:r>
-            <a:endParaRPr lang="en-US" sz="1320" dirty="0"/>
+              <a:t>Create a AI-ready data governance checklist for one real or realistic public.</a:t>
+            </a:r>
+            <a:endParaRPr lang="en-US" sz="1220" dirty="0"/>
           </a:p>
         </p:txBody>
       </p:sp>
@@ -8339,12 +8339,12 @@
         </p:nvSpPr>
         <p:spPr>
           <a:xfrm>
-            <a:off x="7635240" y="2718511"/>
-            <a:ext cx="3474720" cy="1328623"/>
+            <a:off x="7543800" y="2724912"/>
+            <a:ext cx="3611880" cy="1527048"/>
           </a:xfrm>
           <a:prstGeom prst="roundRect">
             <a:avLst>
-              <a:gd name="adj" fmla="val 8259"/>
+              <a:gd name="adj" fmla="val 7186"/>
             </a:avLst>
           </a:prstGeom>
           <a:solidFill>
@@ -8366,8 +8366,8 @@
         </p:nvSpPr>
         <p:spPr>
           <a:xfrm>
-            <a:off x="7799832" y="2864815"/>
-            <a:ext cx="3145536" cy="256032"/>
+            <a:off x="7708392" y="2852928"/>
+            <a:ext cx="3282696" cy="228600"/>
           </a:xfrm>
           <a:prstGeom prst="rect">
             <a:avLst/>
@@ -8383,7 +8383,7 @@
               <a:buNone/>
             </a:pPr>
             <a:r>
-              <a:rPr lang="en-US" sz="1300" b="1" dirty="0">
+              <a:rPr lang="en-US" sz="1220" b="1" dirty="0">
                 <a:solidFill>
                   <a:srgbClr val="0068B7"/>
                 </a:solidFill>
@@ -8393,7 +8393,7 @@
               </a:rPr>
               <a:t>Concept checkpoints</a:t>
             </a:r>
-            <a:endParaRPr lang="en-US" sz="1300" dirty="0"/>
+            <a:endParaRPr lang="en-US" sz="1220" dirty="0"/>
           </a:p>
         </p:txBody>
       </p:sp>
@@ -8405,8 +8405,8 @@
         </p:nvSpPr>
         <p:spPr>
           <a:xfrm>
-            <a:off x="7818120" y="3230575"/>
-            <a:ext cx="3090672" cy="670255"/>
+            <a:off x="7726680" y="3182112"/>
+            <a:ext cx="3227832" cy="960120"/>
           </a:xfrm>
           <a:prstGeom prst="rect">
             <a:avLst/>
@@ -8424,7 +8424,7 @@
               <a:buNone/>
             </a:pPr>
             <a:r>
-              <a:rPr lang="en-US" sz="1220" dirty="0">
+              <a:rPr lang="en-US" sz="1140" dirty="0">
                 <a:solidFill>
                   <a:srgbClr val="17364A"/>
                 </a:solidFill>
@@ -8432,16 +8432,16 @@
                 <a:ea typeface="Aptos" pitchFamily="34" charset="-122"/>
                 <a:cs typeface="Aptos" pitchFamily="34" charset="-120"/>
               </a:rPr>
-              <a:t>The artifact should describe the use case, affected users, data.</a:t>
-            </a:r>
-            <a:endParaRPr lang="en-US" sz="1220" dirty="0"/>
-          </a:p>
-          <a:p>
-            <a:pPr indent="0" marL="0">
-              <a:buNone/>
-            </a:pPr>
-            <a:r>
-              <a:rPr lang="en-US" sz="1220" dirty="0">
+              <a:t>The artifact should describe the use case,.</a:t>
+            </a:r>
+            <a:endParaRPr lang="en-US" sz="1140" dirty="0"/>
+          </a:p>
+          <a:p>
+            <a:pPr indent="0" marL="0">
+              <a:buNone/>
+            </a:pPr>
+            <a:r>
+              <a:rPr lang="en-US" sz="1140" dirty="0">
                 <a:solidFill>
                   <a:srgbClr val="17364A"/>
                 </a:solidFill>
@@ -8449,16 +8449,16 @@
                 <a:ea typeface="Aptos" pitchFamily="34" charset="-122"/>
                 <a:cs typeface="Aptos" pitchFamily="34" charset="-120"/>
               </a:rPr>
-              <a:t>The exercise should produce a work product that could be used in a.</a:t>
-            </a:r>
-            <a:endParaRPr lang="en-US" sz="1220" dirty="0"/>
-          </a:p>
-          <a:p>
-            <a:pPr indent="0" marL="0">
-              <a:buNone/>
-            </a:pPr>
-            <a:r>
-              <a:rPr lang="en-US" sz="1220" dirty="0">
+              <a:t>The exercise should produce a work product that.</a:t>
+            </a:r>
+            <a:endParaRPr lang="en-US" sz="1140" dirty="0"/>
+          </a:p>
+          <a:p>
+            <a:pPr indent="0" marL="0">
+              <a:buNone/>
+            </a:pPr>
+            <a:r>
+              <a:rPr lang="en-US" sz="1140" dirty="0">
                 <a:solidFill>
                   <a:srgbClr val="17364A"/>
                 </a:solidFill>
@@ -8466,9 +8466,9 @@
                 <a:ea typeface="Aptos" pitchFamily="34" charset="-122"/>
                 <a:cs typeface="Aptos" pitchFamily="34" charset="-120"/>
               </a:rPr>
-              <a:t>Learners should document assumptions and identify which staff or.</a:t>
-            </a:r>
-            <a:endParaRPr lang="en-US" sz="1220" dirty="0"/>
+              <a:t>Learners should document assumptions and identify.</a:t>
+            </a:r>
+            <a:endParaRPr lang="en-US" sz="1140" dirty="0"/>
           </a:p>
         </p:txBody>
       </p:sp>
@@ -8480,12 +8480,12 @@
         </p:nvSpPr>
         <p:spPr>
           <a:xfrm>
-            <a:off x="7635240" y="4184294"/>
-            <a:ext cx="3474720" cy="1466698"/>
+            <a:off x="7543800" y="4389120"/>
+            <a:ext cx="3611880" cy="1261872"/>
           </a:xfrm>
           <a:prstGeom prst="roundRect">
             <a:avLst>
-              <a:gd name="adj" fmla="val 7481"/>
+              <a:gd name="adj" fmla="val 8696"/>
             </a:avLst>
           </a:prstGeom>
           <a:solidFill>
@@ -8507,8 +8507,8 @@
         </p:nvSpPr>
         <p:spPr>
           <a:xfrm>
-            <a:off x="7799832" y="4330598"/>
-            <a:ext cx="3145536" cy="256032"/>
+            <a:off x="7708392" y="4517136"/>
+            <a:ext cx="3282696" cy="228600"/>
           </a:xfrm>
           <a:prstGeom prst="rect">
             <a:avLst/>
@@ -8524,7 +8524,7 @@
               <a:buNone/>
             </a:pPr>
             <a:r>
-              <a:rPr lang="en-US" sz="1300" b="1" dirty="0">
+              <a:rPr lang="en-US" sz="1220" b="1" dirty="0">
                 <a:solidFill>
                   <a:srgbClr val="0068B7"/>
                 </a:solidFill>
@@ -8534,7 +8534,7 @@
               </a:rPr>
               <a:t>What to document</a:t>
             </a:r>
-            <a:endParaRPr lang="en-US" sz="1300" dirty="0"/>
+            <a:endParaRPr lang="en-US" sz="1220" dirty="0"/>
           </a:p>
         </p:txBody>
       </p:sp>
@@ -8546,8 +8546,8 @@
         </p:nvSpPr>
         <p:spPr>
           <a:xfrm>
-            <a:off x="7799832" y="4659782"/>
-            <a:ext cx="3145536" cy="899770"/>
+            <a:off x="7708392" y="4828032"/>
+            <a:ext cx="3282696" cy="749808"/>
           </a:xfrm>
           <a:prstGeom prst="rect">
             <a:avLst/>
@@ -8565,7 +8565,7 @@
               <a:buNone/>
             </a:pPr>
             <a:r>
-              <a:rPr lang="en-US" sz="1320" dirty="0">
+              <a:rPr lang="en-US" sz="1220" dirty="0">
                 <a:solidFill>
                   <a:srgbClr val="17364A"/>
                 </a:solidFill>
@@ -8573,9 +8573,9 @@
                 <a:ea typeface="Aptos" pitchFamily="34" charset="-122"/>
                 <a:cs typeface="Aptos" pitchFamily="34" charset="-120"/>
               </a:rPr>
-              <a:t>Use the assignment to test whether you can explain the concept, apply it to a realistic public health situation, and identify what would need review before the work moves forward.</a:t>
-            </a:r>
-            <a:endParaRPr lang="en-US" sz="1320" dirty="0"/>
+              <a:t>Use the assignment to test whether you can explain the concept, apply it to a.</a:t>
+            </a:r>
+            <a:endParaRPr lang="en-US" sz="1220" dirty="0"/>
           </a:p>
         </p:txBody>
       </p:sp>
@@ -8866,8 +8866,8 @@
         </p:nvSpPr>
         <p:spPr>
           <a:xfrm>
-            <a:off x="868680" y="1508760"/>
-            <a:ext cx="6309360" cy="4160520"/>
+            <a:off x="822960" y="1463040"/>
+            <a:ext cx="6565392" cy="4343400"/>
           </a:xfrm>
           <a:prstGeom prst="rect">
             <a:avLst/>
@@ -8885,7 +8885,7 @@
               <a:buNone/>
             </a:pPr>
             <a:r>
-              <a:rPr lang="en-US" sz="2100" dirty="0">
+              <a:rPr lang="en-US" sz="1920" dirty="0">
                 <a:solidFill>
                   <a:srgbClr val="003A63"/>
                 </a:solidFill>
@@ -8895,14 +8895,14 @@
               </a:rPr>
               <a:t>• The expected artifact is a completed AI-ready data governance checklist.</a:t>
             </a:r>
-            <a:endParaRPr lang="en-US" sz="2100" dirty="0"/>
-          </a:p>
-          <a:p>
-            <a:pPr indent="0" marL="0">
-              <a:buNone/>
-            </a:pPr>
-            <a:r>
-              <a:rPr lang="en-US" sz="2100" dirty="0">
+            <a:endParaRPr lang="en-US" sz="1920" dirty="0"/>
+          </a:p>
+          <a:p>
+            <a:pPr indent="0" marL="0">
+              <a:buNone/>
+            </a:pPr>
+            <a:r>
+              <a:rPr lang="en-US" sz="1920" dirty="0">
                 <a:solidFill>
                   <a:srgbClr val="003A63"/>
                 </a:solidFill>
@@ -8910,9 +8910,9 @@
                 <a:ea typeface="Aptos" pitchFamily="34" charset="-122"/>
                 <a:cs typeface="Aptos" pitchFamily="34" charset="-120"/>
               </a:rPr>
-              <a:t>• It should be specific to a public health workflow and should include technical dependencies,.</a:t>
-            </a:r>
-            <a:endParaRPr lang="en-US" sz="2100" dirty="0"/>
+              <a:t>• It should be specific to a public health workflow and should include.</a:t>
+            </a:r>
+            <a:endParaRPr lang="en-US" sz="1920" dirty="0"/>
           </a:p>
         </p:txBody>
       </p:sp>
@@ -8924,12 +8924,12 @@
         </p:nvSpPr>
         <p:spPr>
           <a:xfrm>
-            <a:off x="7635240" y="1325880"/>
-            <a:ext cx="3474720" cy="1207008"/>
+            <a:off x="7543800" y="1325880"/>
+            <a:ext cx="3611880" cy="1261872"/>
           </a:xfrm>
           <a:prstGeom prst="roundRect">
             <a:avLst>
-              <a:gd name="adj" fmla="val 9091"/>
+              <a:gd name="adj" fmla="val 8696"/>
             </a:avLst>
           </a:prstGeom>
           <a:solidFill>
@@ -8951,8 +8951,8 @@
         </p:nvSpPr>
         <p:spPr>
           <a:xfrm>
-            <a:off x="7799832" y="1472184"/>
-            <a:ext cx="3145536" cy="256032"/>
+            <a:off x="7708392" y="1453896"/>
+            <a:ext cx="3282696" cy="228600"/>
           </a:xfrm>
           <a:prstGeom prst="rect">
             <a:avLst/>
@@ -8968,7 +8968,7 @@
               <a:buNone/>
             </a:pPr>
             <a:r>
-              <a:rPr lang="en-US" sz="1300" b="1" dirty="0">
+              <a:rPr lang="en-US" sz="1220" b="1" dirty="0">
                 <a:solidFill>
                   <a:srgbClr val="0068B7"/>
                 </a:solidFill>
@@ -8978,7 +8978,7 @@
               </a:rPr>
               <a:t>Governance lens</a:t>
             </a:r>
-            <a:endParaRPr lang="en-US" sz="1300" dirty="0"/>
+            <a:endParaRPr lang="en-US" sz="1220" dirty="0"/>
           </a:p>
         </p:txBody>
       </p:sp>
@@ -8990,8 +8990,8 @@
         </p:nvSpPr>
         <p:spPr>
           <a:xfrm>
-            <a:off x="7799832" y="1801368"/>
-            <a:ext cx="3145536" cy="640080"/>
+            <a:off x="7708392" y="1764792"/>
+            <a:ext cx="3282696" cy="749808"/>
           </a:xfrm>
           <a:prstGeom prst="rect">
             <a:avLst/>
@@ -9009,7 +9009,7 @@
               <a:buNone/>
             </a:pPr>
             <a:r>
-              <a:rPr lang="en-US" sz="1320" dirty="0">
+              <a:rPr lang="en-US" sz="1220" dirty="0">
                 <a:solidFill>
                   <a:srgbClr val="17364A"/>
                 </a:solidFill>
@@ -9019,7 +9019,7 @@
               </a:rPr>
               <a:t>The expected artifact is a completed AI-ready data governance checklist.</a:t>
             </a:r>
-            <a:endParaRPr lang="en-US" sz="1320" dirty="0"/>
+            <a:endParaRPr lang="en-US" sz="1220" dirty="0"/>
           </a:p>
         </p:txBody>
       </p:sp>
@@ -9031,12 +9031,12 @@
         </p:nvSpPr>
         <p:spPr>
           <a:xfrm>
-            <a:off x="7635240" y="2670048"/>
-            <a:ext cx="3474720" cy="1377086"/>
+            <a:off x="7543800" y="2724912"/>
+            <a:ext cx="3611880" cy="1527048"/>
           </a:xfrm>
           <a:prstGeom prst="roundRect">
             <a:avLst>
-              <a:gd name="adj" fmla="val 7968"/>
+              <a:gd name="adj" fmla="val 7186"/>
             </a:avLst>
           </a:prstGeom>
           <a:solidFill>
@@ -9058,8 +9058,8 @@
         </p:nvSpPr>
         <p:spPr>
           <a:xfrm>
-            <a:off x="7799832" y="2816352"/>
-            <a:ext cx="3145536" cy="256032"/>
+            <a:off x="7708392" y="2852928"/>
+            <a:ext cx="3282696" cy="228600"/>
           </a:xfrm>
           <a:prstGeom prst="rect">
             <a:avLst/>
@@ -9075,7 +9075,7 @@
               <a:buNone/>
             </a:pPr>
             <a:r>
-              <a:rPr lang="en-US" sz="1300" b="1" dirty="0">
+              <a:rPr lang="en-US" sz="1220" b="1" dirty="0">
                 <a:solidFill>
                   <a:srgbClr val="0068B7"/>
                 </a:solidFill>
@@ -9085,7 +9085,7 @@
               </a:rPr>
               <a:t>Concept checkpoints</a:t>
             </a:r>
-            <a:endParaRPr lang="en-US" sz="1300" dirty="0"/>
+            <a:endParaRPr lang="en-US" sz="1220" dirty="0"/>
           </a:p>
         </p:txBody>
       </p:sp>
@@ -9097,8 +9097,8 @@
         </p:nvSpPr>
         <p:spPr>
           <a:xfrm>
-            <a:off x="7818120" y="3182112"/>
-            <a:ext cx="3090672" cy="718718"/>
+            <a:off x="7726680" y="3182112"/>
+            <a:ext cx="3227832" cy="960120"/>
           </a:xfrm>
           <a:prstGeom prst="rect">
             <a:avLst/>
@@ -9116,7 +9116,7 @@
               <a:buNone/>
             </a:pPr>
             <a:r>
-              <a:rPr lang="en-US" sz="1220" dirty="0">
+              <a:rPr lang="en-US" sz="1140" dirty="0">
                 <a:solidFill>
                   <a:srgbClr val="17364A"/>
                 </a:solidFill>
@@ -9124,16 +9124,16 @@
                 <a:ea typeface="Aptos" pitchFamily="34" charset="-122"/>
                 <a:cs typeface="Aptos" pitchFamily="34" charset="-120"/>
               </a:rPr>
-              <a:t>The expected artifact is a completed AI-ready data governance.</a:t>
-            </a:r>
-            <a:endParaRPr lang="en-US" sz="1220" dirty="0"/>
-          </a:p>
-          <a:p>
-            <a:pPr indent="0" marL="0">
-              <a:buNone/>
-            </a:pPr>
-            <a:r>
-              <a:rPr lang="en-US" sz="1220" dirty="0">
+              <a:t>The expected artifact is a completed AI-ready data.</a:t>
+            </a:r>
+            <a:endParaRPr lang="en-US" sz="1140" dirty="0"/>
+          </a:p>
+          <a:p>
+            <a:pPr indent="0" marL="0">
+              <a:buNone/>
+            </a:pPr>
+            <a:r>
+              <a:rPr lang="en-US" sz="1140" dirty="0">
                 <a:solidFill>
                   <a:srgbClr val="17364A"/>
                 </a:solidFill>
@@ -9141,9 +9141,9 @@
                 <a:ea typeface="Aptos" pitchFamily="34" charset="-122"/>
                 <a:cs typeface="Aptos" pitchFamily="34" charset="-120"/>
               </a:rPr>
-              <a:t>It should be specific to a public health workflow and should.</a:t>
-            </a:r>
-            <a:endParaRPr lang="en-US" sz="1220" dirty="0"/>
+              <a:t>It should be specific to a public health workflow.</a:t>
+            </a:r>
+            <a:endParaRPr lang="en-US" sz="1140" dirty="0"/>
           </a:p>
         </p:txBody>
       </p:sp>
@@ -9155,12 +9155,12 @@
         </p:nvSpPr>
         <p:spPr>
           <a:xfrm>
-            <a:off x="7635240" y="4184294"/>
-            <a:ext cx="3474720" cy="1466698"/>
+            <a:off x="7543800" y="4389120"/>
+            <a:ext cx="3611880" cy="1261872"/>
           </a:xfrm>
           <a:prstGeom prst="roundRect">
             <a:avLst>
-              <a:gd name="adj" fmla="val 7481"/>
+              <a:gd name="adj" fmla="val 8696"/>
             </a:avLst>
           </a:prstGeom>
           <a:solidFill>
@@ -9182,8 +9182,8 @@
         </p:nvSpPr>
         <p:spPr>
           <a:xfrm>
-            <a:off x="7799832" y="4330598"/>
-            <a:ext cx="3145536" cy="256032"/>
+            <a:off x="7708392" y="4517136"/>
+            <a:ext cx="3282696" cy="228600"/>
           </a:xfrm>
           <a:prstGeom prst="rect">
             <a:avLst/>
@@ -9199,7 +9199,7 @@
               <a:buNone/>
             </a:pPr>
             <a:r>
-              <a:rPr lang="en-US" sz="1300" b="1" dirty="0">
+              <a:rPr lang="en-US" sz="1220" b="1" dirty="0">
                 <a:solidFill>
                   <a:srgbClr val="0068B7"/>
                 </a:solidFill>
@@ -9209,7 +9209,7 @@
               </a:rPr>
               <a:t>What to document</a:t>
             </a:r>
-            <a:endParaRPr lang="en-US" sz="1300" dirty="0"/>
+            <a:endParaRPr lang="en-US" sz="1220" dirty="0"/>
           </a:p>
         </p:txBody>
       </p:sp>
@@ -9221,8 +9221,8 @@
         </p:nvSpPr>
         <p:spPr>
           <a:xfrm>
-            <a:off x="7799832" y="4659782"/>
-            <a:ext cx="3145536" cy="899770"/>
+            <a:off x="7708392" y="4828032"/>
+            <a:ext cx="3282696" cy="749808"/>
           </a:xfrm>
           <a:prstGeom prst="rect">
             <a:avLst/>
@@ -9240,7 +9240,7 @@
               <a:buNone/>
             </a:pPr>
             <a:r>
-              <a:rPr lang="en-US" sz="1320" dirty="0">
+              <a:rPr lang="en-US" sz="1220" dirty="0">
                 <a:solidFill>
                   <a:srgbClr val="17364A"/>
                 </a:solidFill>
@@ -9248,9 +9248,9 @@
                 <a:ea typeface="Aptos" pitchFamily="34" charset="-122"/>
                 <a:cs typeface="Aptos" pitchFamily="34" charset="-120"/>
               </a:rPr>
-              <a:t>Translate this concept into clear decision rights, review steps, documentation expectations, and escalation paths before an AI-supported workflow is approved.</a:t>
-            </a:r>
-            <a:endParaRPr lang="en-US" sz="1320" dirty="0"/>
+              <a:t>Translate this concept into clear decision rights, review steps, documentation.</a:t>
+            </a:r>
+            <a:endParaRPr lang="en-US" sz="1220" dirty="0"/>
           </a:p>
         </p:txBody>
       </p:sp>
@@ -9541,8 +9541,8 @@
         </p:nvSpPr>
         <p:spPr>
           <a:xfrm>
-            <a:off x="868680" y="1508760"/>
-            <a:ext cx="6309360" cy="4160520"/>
+            <a:off x="822960" y="1463040"/>
+            <a:ext cx="6565392" cy="4343400"/>
           </a:xfrm>
           <a:prstGeom prst="rect">
             <a:avLst/>
@@ -9560,7 +9560,7 @@
               <a:buNone/>
             </a:pPr>
             <a:r>
-              <a:rPr lang="en-US" sz="2100" dirty="0">
+              <a:rPr lang="en-US" sz="1920" dirty="0">
                 <a:solidFill>
                   <a:srgbClr val="003A63"/>
                 </a:solidFill>
@@ -9568,9 +9568,9 @@
                 <a:ea typeface="Aptos" pitchFamily="34" charset="-122"/>
                 <a:cs typeface="Aptos" pitchFamily="34" charset="-120"/>
               </a:rPr>
-              <a:t>• The expected artifact is a completed AI-ready data governance checklist. It should be specific.</a:t>
-            </a:r>
-            <a:endParaRPr lang="en-US" sz="2100" dirty="0"/>
+              <a:t>• The expected artifact is a completed AI-ready data governance checklist. It.</a:t>
+            </a:r>
+            <a:endParaRPr lang="en-US" sz="1920" dirty="0"/>
           </a:p>
         </p:txBody>
       </p:sp>
@@ -9582,12 +9582,12 @@
         </p:nvSpPr>
         <p:spPr>
           <a:xfrm>
-            <a:off x="7635240" y="1325880"/>
-            <a:ext cx="3474720" cy="1255471"/>
+            <a:off x="7543800" y="1325880"/>
+            <a:ext cx="3611880" cy="1261872"/>
           </a:xfrm>
           <a:prstGeom prst="roundRect">
             <a:avLst>
-              <a:gd name="adj" fmla="val 8740"/>
+              <a:gd name="adj" fmla="val 8696"/>
             </a:avLst>
           </a:prstGeom>
           <a:solidFill>
@@ -9609,8 +9609,8 @@
         </p:nvSpPr>
         <p:spPr>
           <a:xfrm>
-            <a:off x="7799832" y="1472184"/>
-            <a:ext cx="3145536" cy="256032"/>
+            <a:off x="7708392" y="1453896"/>
+            <a:ext cx="3282696" cy="228600"/>
           </a:xfrm>
           <a:prstGeom prst="rect">
             <a:avLst/>
@@ -9626,7 +9626,7 @@
               <a:buNone/>
             </a:pPr>
             <a:r>
-              <a:rPr lang="en-US" sz="1300" b="1" dirty="0">
+              <a:rPr lang="en-US" sz="1220" b="1" dirty="0">
                 <a:solidFill>
                   <a:srgbClr val="0068B7"/>
                 </a:solidFill>
@@ -9636,7 +9636,7 @@
               </a:rPr>
               <a:t>Governance lens</a:t>
             </a:r>
-            <a:endParaRPr lang="en-US" sz="1300" dirty="0"/>
+            <a:endParaRPr lang="en-US" sz="1220" dirty="0"/>
           </a:p>
         </p:txBody>
       </p:sp>
@@ -9648,8 +9648,8 @@
         </p:nvSpPr>
         <p:spPr>
           <a:xfrm>
-            <a:off x="7799832" y="1801368"/>
-            <a:ext cx="3145536" cy="688543"/>
+            <a:off x="7708392" y="1764792"/>
+            <a:ext cx="3282696" cy="749808"/>
           </a:xfrm>
           <a:prstGeom prst="rect">
             <a:avLst/>
@@ -9667,7 +9667,7 @@
               <a:buNone/>
             </a:pPr>
             <a:r>
-              <a:rPr lang="en-US" sz="1320" dirty="0">
+              <a:rPr lang="en-US" sz="1220" dirty="0">
                 <a:solidFill>
                   <a:srgbClr val="17364A"/>
                 </a:solidFill>
@@ -9675,9 +9675,9 @@
                 <a:ea typeface="Aptos" pitchFamily="34" charset="-122"/>
                 <a:cs typeface="Aptos" pitchFamily="34" charset="-120"/>
               </a:rPr>
-              <a:t>The expected artifact is a completed AI-ready data governance checklist. It should be specific to a.</a:t>
-            </a:r>
-            <a:endParaRPr lang="en-US" sz="1320" dirty="0"/>
+              <a:t>The expected artifact is a completed AI-ready data governance checklist. It.</a:t>
+            </a:r>
+            <a:endParaRPr lang="en-US" sz="1220" dirty="0"/>
           </a:p>
         </p:txBody>
       </p:sp>
@@ -9689,12 +9689,12 @@
         </p:nvSpPr>
         <p:spPr>
           <a:xfrm>
-            <a:off x="7635240" y="2718511"/>
-            <a:ext cx="3474720" cy="1328623"/>
+            <a:off x="7543800" y="2724912"/>
+            <a:ext cx="3611880" cy="1527048"/>
           </a:xfrm>
           <a:prstGeom prst="roundRect">
             <a:avLst>
-              <a:gd name="adj" fmla="val 8259"/>
+              <a:gd name="adj" fmla="val 7186"/>
             </a:avLst>
           </a:prstGeom>
           <a:solidFill>
@@ -9716,8 +9716,8 @@
         </p:nvSpPr>
         <p:spPr>
           <a:xfrm>
-            <a:off x="7799832" y="2864815"/>
-            <a:ext cx="3145536" cy="256032"/>
+            <a:off x="7708392" y="2852928"/>
+            <a:ext cx="3282696" cy="228600"/>
           </a:xfrm>
           <a:prstGeom prst="rect">
             <a:avLst/>
@@ -9733,7 +9733,7 @@
               <a:buNone/>
             </a:pPr>
             <a:r>
-              <a:rPr lang="en-US" sz="1300" b="1" dirty="0">
+              <a:rPr lang="en-US" sz="1220" b="1" dirty="0">
                 <a:solidFill>
                   <a:srgbClr val="0068B7"/>
                 </a:solidFill>
@@ -9743,7 +9743,7 @@
               </a:rPr>
               <a:t>Concept checkpoints</a:t>
             </a:r>
-            <a:endParaRPr lang="en-US" sz="1300" dirty="0"/>
+            <a:endParaRPr lang="en-US" sz="1220" dirty="0"/>
           </a:p>
         </p:txBody>
       </p:sp>
@@ -9755,8 +9755,8 @@
         </p:nvSpPr>
         <p:spPr>
           <a:xfrm>
-            <a:off x="7818120" y="3230575"/>
-            <a:ext cx="3090672" cy="670255"/>
+            <a:off x="7726680" y="3182112"/>
+            <a:ext cx="3227832" cy="960120"/>
           </a:xfrm>
           <a:prstGeom prst="rect">
             <a:avLst/>
@@ -9774,7 +9774,7 @@
               <a:buNone/>
             </a:pPr>
             <a:r>
-              <a:rPr lang="en-US" sz="1220" dirty="0">
+              <a:rPr lang="en-US" sz="1140" dirty="0">
                 <a:solidFill>
                   <a:srgbClr val="17364A"/>
                 </a:solidFill>
@@ -9782,16 +9782,16 @@
                 <a:ea typeface="Aptos" pitchFamily="34" charset="-122"/>
                 <a:cs typeface="Aptos" pitchFamily="34" charset="-120"/>
               </a:rPr>
-              <a:t>The expected artifact is a completed AI-ready data governance.</a:t>
-            </a:r>
-            <a:endParaRPr lang="en-US" sz="1220" dirty="0"/>
-          </a:p>
-          <a:p>
-            <a:pPr indent="0" marL="0">
-              <a:buNone/>
-            </a:pPr>
-            <a:r>
-              <a:rPr lang="en-US" sz="1220" dirty="0">
+              <a:t>The expected artifact is a completed AI-ready data.</a:t>
+            </a:r>
+            <a:endParaRPr lang="en-US" sz="1140" dirty="0"/>
+          </a:p>
+          <a:p>
+            <a:pPr indent="0" marL="0">
+              <a:buNone/>
+            </a:pPr>
+            <a:r>
+              <a:rPr lang="en-US" sz="1140" dirty="0">
                 <a:solidFill>
                   <a:srgbClr val="17364A"/>
                 </a:solidFill>
@@ -9799,9 +9799,9 @@
                 <a:ea typeface="Aptos" pitchFamily="34" charset="-122"/>
                 <a:cs typeface="Aptos" pitchFamily="34" charset="-120"/>
               </a:rPr>
-              <a:t>It should be specific to a public health workflow and should.</a:t>
-            </a:r>
-            <a:endParaRPr lang="en-US" sz="1220" dirty="0"/>
+              <a:t>It should be specific to a public health workflow.</a:t>
+            </a:r>
+            <a:endParaRPr lang="en-US" sz="1140" dirty="0"/>
           </a:p>
         </p:txBody>
       </p:sp>
@@ -9813,12 +9813,12 @@
         </p:nvSpPr>
         <p:spPr>
           <a:xfrm>
-            <a:off x="7635240" y="4184294"/>
-            <a:ext cx="3474720" cy="1466698"/>
+            <a:off x="7543800" y="4389120"/>
+            <a:ext cx="3611880" cy="1261872"/>
           </a:xfrm>
           <a:prstGeom prst="roundRect">
             <a:avLst>
-              <a:gd name="adj" fmla="val 7481"/>
+              <a:gd name="adj" fmla="val 8696"/>
             </a:avLst>
           </a:prstGeom>
           <a:solidFill>
@@ -9840,8 +9840,8 @@
         </p:nvSpPr>
         <p:spPr>
           <a:xfrm>
-            <a:off x="7799832" y="4330598"/>
-            <a:ext cx="3145536" cy="256032"/>
+            <a:off x="7708392" y="4517136"/>
+            <a:ext cx="3282696" cy="228600"/>
           </a:xfrm>
           <a:prstGeom prst="rect">
             <a:avLst/>
@@ -9857,7 +9857,7 @@
               <a:buNone/>
             </a:pPr>
             <a:r>
-              <a:rPr lang="en-US" sz="1300" b="1" dirty="0">
+              <a:rPr lang="en-US" sz="1220" b="1" dirty="0">
                 <a:solidFill>
                   <a:srgbClr val="0068B7"/>
                 </a:solidFill>
@@ -9867,7 +9867,7 @@
               </a:rPr>
               <a:t>What to document</a:t>
             </a:r>
-            <a:endParaRPr lang="en-US" sz="1300" dirty="0"/>
+            <a:endParaRPr lang="en-US" sz="1220" dirty="0"/>
           </a:p>
         </p:txBody>
       </p:sp>
@@ -9879,8 +9879,8 @@
         </p:nvSpPr>
         <p:spPr>
           <a:xfrm>
-            <a:off x="7799832" y="4659782"/>
-            <a:ext cx="3145536" cy="899770"/>
+            <a:off x="7708392" y="4828032"/>
+            <a:ext cx="3282696" cy="749808"/>
           </a:xfrm>
           <a:prstGeom prst="rect">
             <a:avLst/>
@@ -9898,7 +9898,7 @@
               <a:buNone/>
             </a:pPr>
             <a:r>
-              <a:rPr lang="en-US" sz="1320" dirty="0">
+              <a:rPr lang="en-US" sz="1220" dirty="0">
                 <a:solidFill>
                   <a:srgbClr val="17364A"/>
                 </a:solidFill>
@@ -9906,9 +9906,9 @@
                 <a:ea typeface="Aptos" pitchFamily="34" charset="-122"/>
                 <a:cs typeface="Aptos" pitchFamily="34" charset="-120"/>
               </a:rPr>
-              <a:t>Use the assignment to test whether you can explain the concept, apply it to a realistic public health situation, and identify what would need review before the work moves forward.</a:t>
-            </a:r>
-            <a:endParaRPr lang="en-US" sz="1320" dirty="0"/>
+              <a:t>Use the assignment to test whether you can explain the concept, apply it to a.</a:t>
+            </a:r>
+            <a:endParaRPr lang="en-US" sz="1220" dirty="0"/>
           </a:p>
         </p:txBody>
       </p:sp>
@@ -10243,7 +10243,7 @@
                 <a:ea typeface="Aptos" pitchFamily="34" charset="-122"/>
                 <a:cs typeface="Aptos" pitchFamily="34" charset="-120"/>
               </a:rPr>
-              <a:t>• Data governance defines ownership, stewardship, metadata, permissible use, data quality.</a:t>
+              <a:t>• Data governance defines ownership, stewardship, metadata, permissible use,.</a:t>
             </a:r>
             <a:endParaRPr lang="en-US" sz="2100" dirty="0"/>
           </a:p>
@@ -10260,7 +10260,7 @@
                 <a:ea typeface="Aptos" pitchFamily="34" charset="-122"/>
                 <a:cs typeface="Aptos" pitchFamily="34" charset="-120"/>
               </a:rPr>
-              <a:t>• This module helps learners connect governance practices to safe AI use across surveillance,.</a:t>
+              <a:t>• This module helps learners connect governance practices to safe AI use.</a:t>
             </a:r>
             <a:endParaRPr lang="en-US" sz="2100" dirty="0"/>
           </a:p>
@@ -10301,8 +10301,8 @@
         </p:nvSpPr>
         <p:spPr>
           <a:xfrm>
-            <a:off x="8074152" y="1563624"/>
-            <a:ext cx="2825496" cy="256032"/>
+            <a:off x="8074152" y="1545336"/>
+            <a:ext cx="2825496" cy="228600"/>
           </a:xfrm>
           <a:prstGeom prst="rect">
             <a:avLst/>
@@ -10318,7 +10318,7 @@
               <a:buNone/>
             </a:pPr>
             <a:r>
-              <a:rPr lang="en-US" sz="1300" b="1" dirty="0">
+              <a:rPr lang="en-US" sz="1220" b="1" dirty="0">
                 <a:solidFill>
                   <a:srgbClr val="0068B7"/>
                 </a:solidFill>
@@ -10328,7 +10328,7 @@
               </a:rPr>
               <a:t>Module details</a:t>
             </a:r>
-            <a:endParaRPr lang="en-US" sz="1300" dirty="0"/>
+            <a:endParaRPr lang="en-US" sz="1220" dirty="0"/>
           </a:p>
         </p:txBody>
       </p:sp>
@@ -10340,8 +10340,8 @@
         </p:nvSpPr>
         <p:spPr>
           <a:xfrm>
-            <a:off x="8074152" y="1892808"/>
-            <a:ext cx="2825496" cy="1353312"/>
+            <a:off x="8074152" y="1856232"/>
+            <a:ext cx="2825496" cy="1408176"/>
           </a:xfrm>
           <a:prstGeom prst="rect">
             <a:avLst/>
@@ -10359,7 +10359,7 @@
               <a:buNone/>
             </a:pPr>
             <a:r>
-              <a:rPr lang="en-US" sz="1320" dirty="0">
+              <a:rPr lang="en-US" sz="1220" dirty="0">
                 <a:solidFill>
                   <a:srgbClr val="17364A"/>
                 </a:solidFill>
@@ -10367,9 +10367,9 @@
                 <a:ea typeface="Aptos" pitchFamily="34" charset="-122"/>
                 <a:cs typeface="Aptos" pitchFamily="34" charset="-120"/>
               </a:rPr>
-              <a:t>Level: intermediate/practitioner Primary track: Governance and Security Track Appears in tracks: operations-data-quality</a:t>
-            </a:r>
-            <a:endParaRPr lang="en-US" sz="1320" dirty="0"/>
+              <a:t>Level: intermediate/practitioner Primary track: Governance and Security Track.</a:t>
+            </a:r>
+            <a:endParaRPr lang="en-US" sz="1220" dirty="0"/>
           </a:p>
         </p:txBody>
       </p:sp>
@@ -10408,8 +10408,8 @@
         </p:nvSpPr>
         <p:spPr>
           <a:xfrm>
-            <a:off x="8074152" y="3822192"/>
-            <a:ext cx="2825496" cy="256032"/>
+            <a:off x="8074152" y="3803904"/>
+            <a:ext cx="2825496" cy="228600"/>
           </a:xfrm>
           <a:prstGeom prst="rect">
             <a:avLst/>
@@ -10425,7 +10425,7 @@
               <a:buNone/>
             </a:pPr>
             <a:r>
-              <a:rPr lang="en-US" sz="1300" b="1" dirty="0">
+              <a:rPr lang="en-US" sz="1220" b="1" dirty="0">
                 <a:solidFill>
                   <a:srgbClr val="0068B7"/>
                 </a:solidFill>
@@ -10435,7 +10435,7 @@
               </a:rPr>
               <a:t>Learning sequence</a:t>
             </a:r>
-            <a:endParaRPr lang="en-US" sz="1300" dirty="0"/>
+            <a:endParaRPr lang="en-US" sz="1220" dirty="0"/>
           </a:p>
         </p:txBody>
       </p:sp>
@@ -10447,8 +10447,8 @@
         </p:nvSpPr>
         <p:spPr>
           <a:xfrm>
-            <a:off x="8092440" y="4187952"/>
-            <a:ext cx="2770632" cy="1033272"/>
+            <a:off x="8092440" y="4133088"/>
+            <a:ext cx="2770632" cy="1124712"/>
           </a:xfrm>
           <a:prstGeom prst="rect">
             <a:avLst/>
@@ -10466,7 +10466,7 @@
               <a:buNone/>
             </a:pPr>
             <a:r>
-              <a:rPr lang="en-US" sz="1220" dirty="0">
+              <a:rPr lang="en-US" sz="1140" dirty="0">
                 <a:solidFill>
                   <a:srgbClr val="17364A"/>
                 </a:solidFill>
@@ -10476,14 +10476,14 @@
               </a:rPr>
               <a:t>Read the module for shared vocabulary and context.</a:t>
             </a:r>
-            <a:endParaRPr lang="en-US" sz="1220" dirty="0"/>
-          </a:p>
-          <a:p>
-            <a:pPr indent="0" marL="0">
-              <a:buNone/>
-            </a:pPr>
-            <a:r>
-              <a:rPr lang="en-US" sz="1220" dirty="0">
+            <a:endParaRPr lang="en-US" sz="1140" dirty="0"/>
+          </a:p>
+          <a:p>
+            <a:pPr indent="0" marL="0">
+              <a:buNone/>
+            </a:pPr>
+            <a:r>
+              <a:rPr lang="en-US" sz="1140" dirty="0">
                 <a:solidFill>
                   <a:srgbClr val="17364A"/>
                 </a:solidFill>
@@ -10491,16 +10491,16 @@
                 <a:ea typeface="Aptos" pitchFamily="34" charset="-122"/>
                 <a:cs typeface="Aptos" pitchFamily="34" charset="-120"/>
               </a:rPr>
-              <a:t>Complete the practical exercise to apply the concept.</a:t>
-            </a:r>
-            <a:endParaRPr lang="en-US" sz="1220" dirty="0"/>
-          </a:p>
-          <a:p>
-            <a:pPr indent="0" marL="0">
-              <a:buNone/>
-            </a:pPr>
-            <a:r>
-              <a:rPr lang="en-US" sz="1220" dirty="0">
+              <a:t>Complete the practical exercise to apply the.</a:t>
+            </a:r>
+            <a:endParaRPr lang="en-US" sz="1140" dirty="0"/>
+          </a:p>
+          <a:p>
+            <a:pPr indent="0" marL="0">
+              <a:buNone/>
+            </a:pPr>
+            <a:r>
+              <a:rPr lang="en-US" sz="1140" dirty="0">
                 <a:solidFill>
                   <a:srgbClr val="17364A"/>
                 </a:solidFill>
@@ -10510,7 +10510,7 @@
               </a:rPr>
               <a:t>Use the notes and references for deeper review.</a:t>
             </a:r>
-            <a:endParaRPr lang="en-US" sz="1220" dirty="0"/>
+            <a:endParaRPr lang="en-US" sz="1140" dirty="0"/>
           </a:p>
         </p:txBody>
       </p:sp>
@@ -10801,8 +10801,8 @@
         </p:nvSpPr>
         <p:spPr>
           <a:xfrm>
-            <a:off x="868680" y="1508760"/>
-            <a:ext cx="6309360" cy="4160520"/>
+            <a:off x="822960" y="1463040"/>
+            <a:ext cx="6565392" cy="4343400"/>
           </a:xfrm>
           <a:prstGeom prst="rect">
             <a:avLst/>
@@ -10820,7 +10820,7 @@
               <a:buNone/>
             </a:pPr>
             <a:r>
-              <a:rPr lang="en-US" sz="2100" dirty="0">
+              <a:rPr lang="en-US" sz="1920" dirty="0">
                 <a:solidFill>
                   <a:srgbClr val="003A63"/>
                 </a:solidFill>
@@ -10828,16 +10828,16 @@
                 <a:ea typeface="Aptos" pitchFamily="34" charset="-122"/>
                 <a:cs typeface="Aptos" pitchFamily="34" charset="-120"/>
               </a:rPr>
-              <a:t>• 1. What is the best reason to address data governance for ai-ready public health data before.</a:t>
-            </a:r>
-            <a:endParaRPr lang="en-US" sz="2100" dirty="0"/>
-          </a:p>
-          <a:p>
-            <a:pPr indent="0" marL="0">
-              <a:buNone/>
-            </a:pPr>
-            <a:r>
-              <a:rPr lang="en-US" sz="2100" dirty="0">
+              <a:t>• 1. What is the best reason to address data governance for ai-ready public.</a:t>
+            </a:r>
+            <a:endParaRPr lang="en-US" sz="1920" dirty="0"/>
+          </a:p>
+          <a:p>
+            <a:pPr indent="0" marL="0">
+              <a:buNone/>
+            </a:pPr>
+            <a:r>
+              <a:rPr lang="en-US" sz="1920" dirty="0">
                 <a:solidFill>
                   <a:srgbClr val="003A63"/>
                 </a:solidFill>
@@ -10847,14 +10847,14 @@
               </a:rPr>
               <a:t>• 2. Which practice best supports responsible implementation?</a:t>
             </a:r>
-            <a:endParaRPr lang="en-US" sz="2100" dirty="0"/>
-          </a:p>
-          <a:p>
-            <a:pPr indent="0" marL="0">
-              <a:buNone/>
-            </a:pPr>
-            <a:r>
-              <a:rPr lang="en-US" sz="2100" dirty="0">
+            <a:endParaRPr lang="en-US" sz="1920" dirty="0"/>
+          </a:p>
+          <a:p>
+            <a:pPr indent="0" marL="0">
+              <a:buNone/>
+            </a:pPr>
+            <a:r>
+              <a:rPr lang="en-US" sz="1920" dirty="0">
                 <a:solidFill>
                   <a:srgbClr val="003A63"/>
                 </a:solidFill>
@@ -10864,7 +10864,7 @@
               </a:rPr>
               <a:t>• 3. Which statement best describes a common failure mode?</a:t>
             </a:r>
-            <a:endParaRPr lang="en-US" sz="2100" dirty="0"/>
+            <a:endParaRPr lang="en-US" sz="1920" dirty="0"/>
           </a:p>
         </p:txBody>
       </p:sp>
@@ -10876,12 +10876,12 @@
         </p:nvSpPr>
         <p:spPr>
           <a:xfrm>
-            <a:off x="7635240" y="1325880"/>
-            <a:ext cx="3474720" cy="1255471"/>
+            <a:off x="7543800" y="1325880"/>
+            <a:ext cx="3611880" cy="1261872"/>
           </a:xfrm>
           <a:prstGeom prst="roundRect">
             <a:avLst>
-              <a:gd name="adj" fmla="val 8740"/>
+              <a:gd name="adj" fmla="val 8696"/>
             </a:avLst>
           </a:prstGeom>
           <a:solidFill>
@@ -10903,8 +10903,8 @@
         </p:nvSpPr>
         <p:spPr>
           <a:xfrm>
-            <a:off x="7799832" y="1472184"/>
-            <a:ext cx="3145536" cy="256032"/>
+            <a:off x="7708392" y="1453896"/>
+            <a:ext cx="3282696" cy="228600"/>
           </a:xfrm>
           <a:prstGeom prst="rect">
             <a:avLst/>
@@ -10920,7 +10920,7 @@
               <a:buNone/>
             </a:pPr>
             <a:r>
-              <a:rPr lang="en-US" sz="1300" b="1" dirty="0">
+              <a:rPr lang="en-US" sz="1220" b="1" dirty="0">
                 <a:solidFill>
                   <a:srgbClr val="0068B7"/>
                 </a:solidFill>
@@ -10930,7 +10930,7 @@
               </a:rPr>
               <a:t>Governance lens</a:t>
             </a:r>
-            <a:endParaRPr lang="en-US" sz="1300" dirty="0"/>
+            <a:endParaRPr lang="en-US" sz="1220" dirty="0"/>
           </a:p>
         </p:txBody>
       </p:sp>
@@ -10942,8 +10942,8 @@
         </p:nvSpPr>
         <p:spPr>
           <a:xfrm>
-            <a:off x="7799832" y="1801368"/>
-            <a:ext cx="3145536" cy="688543"/>
+            <a:off x="7708392" y="1764792"/>
+            <a:ext cx="3282696" cy="749808"/>
           </a:xfrm>
           <a:prstGeom prst="rect">
             <a:avLst/>
@@ -10961,7 +10961,7 @@
               <a:buNone/>
             </a:pPr>
             <a:r>
-              <a:rPr lang="en-US" sz="1320" dirty="0">
+              <a:rPr lang="en-US" sz="1220" dirty="0">
                 <a:solidFill>
                   <a:srgbClr val="17364A"/>
                 </a:solidFill>
@@ -10969,9 +10969,9 @@
                 <a:ea typeface="Aptos" pitchFamily="34" charset="-122"/>
                 <a:cs typeface="Aptos" pitchFamily="34" charset="-120"/>
               </a:rPr>
-              <a:t>1. What is the best reason to address data governance for ai-ready public health data before deployment?</a:t>
-            </a:r>
-            <a:endParaRPr lang="en-US" sz="1320" dirty="0"/>
+              <a:t>1. What is the best reason to address data governance for ai-ready public health.</a:t>
+            </a:r>
+            <a:endParaRPr lang="en-US" sz="1220" dirty="0"/>
           </a:p>
         </p:txBody>
       </p:sp>
@@ -10983,12 +10983,12 @@
         </p:nvSpPr>
         <p:spPr>
           <a:xfrm>
-            <a:off x="7635240" y="2718511"/>
-            <a:ext cx="3474720" cy="1328623"/>
+            <a:off x="7543800" y="2724912"/>
+            <a:ext cx="3611880" cy="1527048"/>
           </a:xfrm>
           <a:prstGeom prst="roundRect">
             <a:avLst>
-              <a:gd name="adj" fmla="val 8259"/>
+              <a:gd name="adj" fmla="val 7186"/>
             </a:avLst>
           </a:prstGeom>
           <a:solidFill>
@@ -11010,8 +11010,8 @@
         </p:nvSpPr>
         <p:spPr>
           <a:xfrm>
-            <a:off x="7799832" y="2864815"/>
-            <a:ext cx="3145536" cy="256032"/>
+            <a:off x="7708392" y="2852928"/>
+            <a:ext cx="3282696" cy="228600"/>
           </a:xfrm>
           <a:prstGeom prst="rect">
             <a:avLst/>
@@ -11027,7 +11027,7 @@
               <a:buNone/>
             </a:pPr>
             <a:r>
-              <a:rPr lang="en-US" sz="1300" b="1" dirty="0">
+              <a:rPr lang="en-US" sz="1220" b="1" dirty="0">
                 <a:solidFill>
                   <a:srgbClr val="0068B7"/>
                 </a:solidFill>
@@ -11037,7 +11037,7 @@
               </a:rPr>
               <a:t>Concept checkpoints</a:t>
             </a:r>
-            <a:endParaRPr lang="en-US" sz="1300" dirty="0"/>
+            <a:endParaRPr lang="en-US" sz="1220" dirty="0"/>
           </a:p>
         </p:txBody>
       </p:sp>
@@ -11049,8 +11049,8 @@
         </p:nvSpPr>
         <p:spPr>
           <a:xfrm>
-            <a:off x="7818120" y="3230575"/>
-            <a:ext cx="3090672" cy="670255"/>
+            <a:off x="7726680" y="3182112"/>
+            <a:ext cx="3227832" cy="960120"/>
           </a:xfrm>
           <a:prstGeom prst="rect">
             <a:avLst/>
@@ -11068,7 +11068,7 @@
               <a:buNone/>
             </a:pPr>
             <a:r>
-              <a:rPr lang="en-US" sz="1220" dirty="0">
+              <a:rPr lang="en-US" sz="1140" dirty="0">
                 <a:solidFill>
                   <a:srgbClr val="17364A"/>
                 </a:solidFill>
@@ -11078,14 +11078,14 @@
               </a:rPr>
               <a:t>1.</a:t>
             </a:r>
-            <a:endParaRPr lang="en-US" sz="1220" dirty="0"/>
-          </a:p>
-          <a:p>
-            <a:pPr indent="0" marL="0">
-              <a:buNone/>
-            </a:pPr>
-            <a:r>
-              <a:rPr lang="en-US" sz="1220" dirty="0">
+            <a:endParaRPr lang="en-US" sz="1140" dirty="0"/>
+          </a:p>
+          <a:p>
+            <a:pPr indent="0" marL="0">
+              <a:buNone/>
+            </a:pPr>
+            <a:r>
+              <a:rPr lang="en-US" sz="1140" dirty="0">
                 <a:solidFill>
                   <a:srgbClr val="17364A"/>
                 </a:solidFill>
@@ -11093,16 +11093,16 @@
                 <a:ea typeface="Aptos" pitchFamily="34" charset="-122"/>
                 <a:cs typeface="Aptos" pitchFamily="34" charset="-120"/>
               </a:rPr>
-              <a:t>What is the best reason to address data governance for ai-ready.</a:t>
-            </a:r>
-            <a:endParaRPr lang="en-US" sz="1220" dirty="0"/>
-          </a:p>
-          <a:p>
-            <a:pPr indent="0" marL="0">
-              <a:buNone/>
-            </a:pPr>
-            <a:r>
-              <a:rPr lang="en-US" sz="1220" dirty="0">
+              <a:t>What is the best reason to address data governance.</a:t>
+            </a:r>
+            <a:endParaRPr lang="en-US" sz="1140" dirty="0"/>
+          </a:p>
+          <a:p>
+            <a:pPr indent="0" marL="0">
+              <a:buNone/>
+            </a:pPr>
+            <a:r>
+              <a:rPr lang="en-US" sz="1140" dirty="0">
                 <a:solidFill>
                   <a:srgbClr val="17364A"/>
                 </a:solidFill>
@@ -11112,7 +11112,7 @@
               </a:rPr>
               <a:t>2.</a:t>
             </a:r>
-            <a:endParaRPr lang="en-US" sz="1220" dirty="0"/>
+            <a:endParaRPr lang="en-US" sz="1140" dirty="0"/>
           </a:p>
         </p:txBody>
       </p:sp>
@@ -11124,12 +11124,12 @@
         </p:nvSpPr>
         <p:spPr>
           <a:xfrm>
-            <a:off x="7635240" y="4184294"/>
-            <a:ext cx="3474720" cy="1466698"/>
+            <a:off x="7543800" y="4389120"/>
+            <a:ext cx="3611880" cy="1261872"/>
           </a:xfrm>
           <a:prstGeom prst="roundRect">
             <a:avLst>
-              <a:gd name="adj" fmla="val 7481"/>
+              <a:gd name="adj" fmla="val 8696"/>
             </a:avLst>
           </a:prstGeom>
           <a:solidFill>
@@ -11151,8 +11151,8 @@
         </p:nvSpPr>
         <p:spPr>
           <a:xfrm>
-            <a:off x="7799832" y="4330598"/>
-            <a:ext cx="3145536" cy="256032"/>
+            <a:off x="7708392" y="4517136"/>
+            <a:ext cx="3282696" cy="228600"/>
           </a:xfrm>
           <a:prstGeom prst="rect">
             <a:avLst/>
@@ -11168,7 +11168,7 @@
               <a:buNone/>
             </a:pPr>
             <a:r>
-              <a:rPr lang="en-US" sz="1300" b="1" dirty="0">
+              <a:rPr lang="en-US" sz="1220" b="1" dirty="0">
                 <a:solidFill>
                   <a:srgbClr val="0068B7"/>
                 </a:solidFill>
@@ -11178,7 +11178,7 @@
               </a:rPr>
               <a:t>What to document</a:t>
             </a:r>
-            <a:endParaRPr lang="en-US" sz="1300" dirty="0"/>
+            <a:endParaRPr lang="en-US" sz="1220" dirty="0"/>
           </a:p>
         </p:txBody>
       </p:sp>
@@ -11190,8 +11190,8 @@
         </p:nvSpPr>
         <p:spPr>
           <a:xfrm>
-            <a:off x="7799832" y="4659782"/>
-            <a:ext cx="3145536" cy="899770"/>
+            <a:off x="7708392" y="4828032"/>
+            <a:ext cx="3282696" cy="749808"/>
           </a:xfrm>
           <a:prstGeom prst="rect">
             <a:avLst/>
@@ -11209,7 +11209,7 @@
               <a:buNone/>
             </a:pPr>
             <a:r>
-              <a:rPr lang="en-US" sz="1320" dirty="0">
+              <a:rPr lang="en-US" sz="1220" dirty="0">
                 <a:solidFill>
                   <a:srgbClr val="17364A"/>
                 </a:solidFill>
@@ -11217,9 +11217,9 @@
                 <a:ea typeface="Aptos" pitchFamily="34" charset="-122"/>
                 <a:cs typeface="Aptos" pitchFamily="34" charset="-120"/>
               </a:rPr>
-              <a:t>Use the assignment to test whether you can explain the concept, apply it to a realistic public health situation, and identify what would need review before the work moves forward.</a:t>
-            </a:r>
-            <a:endParaRPr lang="en-US" sz="1320" dirty="0"/>
+              <a:t>Use the assignment to test whether you can explain the concept, apply it to a.</a:t>
+            </a:r>
+            <a:endParaRPr lang="en-US" sz="1220" dirty="0"/>
           </a:p>
         </p:txBody>
       </p:sp>
@@ -11510,8 +11510,8 @@
         </p:nvSpPr>
         <p:spPr>
           <a:xfrm>
-            <a:off x="868680" y="1508760"/>
-            <a:ext cx="6309360" cy="4160520"/>
+            <a:off x="822960" y="1463040"/>
+            <a:ext cx="6565392" cy="4343400"/>
           </a:xfrm>
           <a:prstGeom prst="rect">
             <a:avLst/>
@@ -11529,7 +11529,7 @@
               <a:buNone/>
             </a:pPr>
             <a:r>
-              <a:rPr lang="en-US" sz="2100" dirty="0">
+              <a:rPr lang="en-US" sz="1920" dirty="0">
                 <a:solidFill>
                   <a:srgbClr val="003A63"/>
                 </a:solidFill>
@@ -11537,16 +11537,16 @@
                 <a:ea typeface="Aptos" pitchFamily="34" charset="-122"/>
                 <a:cs typeface="Aptos" pitchFamily="34" charset="-120"/>
               </a:rPr>
-              <a:t>• NIST AI Risk Management Framework: https://www.nist.gov/itl/ai-risk-management-framework</a:t>
-            </a:r>
-            <a:endParaRPr lang="en-US" sz="2100" dirty="0"/>
-          </a:p>
-          <a:p>
-            <a:pPr indent="0" marL="0">
-              <a:buNone/>
-            </a:pPr>
-            <a:r>
-              <a:rPr lang="en-US" sz="2100" dirty="0">
+              <a:t>• NIST AI Risk Management Framework:.</a:t>
+            </a:r>
+            <a:endParaRPr lang="en-US" sz="1920" dirty="0"/>
+          </a:p>
+          <a:p>
+            <a:pPr indent="0" marL="0">
+              <a:buNone/>
+            </a:pPr>
+            <a:r>
+              <a:rPr lang="en-US" sz="1920" dirty="0">
                 <a:solidFill>
                   <a:srgbClr val="003A63"/>
                 </a:solidFill>
@@ -11556,14 +11556,14 @@
               </a:rPr>
               <a:t>• NIST Generative AI Profile:.</a:t>
             </a:r>
-            <a:endParaRPr lang="en-US" sz="2100" dirty="0"/>
-          </a:p>
-          <a:p>
-            <a:pPr indent="0" marL="0">
-              <a:buNone/>
-            </a:pPr>
-            <a:r>
-              <a:rPr lang="en-US" sz="2100" dirty="0">
+            <a:endParaRPr lang="en-US" sz="1920" dirty="0"/>
+          </a:p>
+          <a:p>
+            <a:pPr indent="0" marL="0">
+              <a:buNone/>
+            </a:pPr>
+            <a:r>
+              <a:rPr lang="en-US" sz="1920" dirty="0">
                 <a:solidFill>
                   <a:srgbClr val="003A63"/>
                 </a:solidFill>
@@ -11573,7 +11573,7 @@
               </a:rPr>
               <a:t>• CDC Public Health Data Strategy and Data Modernization resources:.</a:t>
             </a:r>
-            <a:endParaRPr lang="en-US" sz="2100" dirty="0"/>
+            <a:endParaRPr lang="en-US" sz="1920" dirty="0"/>
           </a:p>
         </p:txBody>
       </p:sp>
@@ -11585,12 +11585,12 @@
         </p:nvSpPr>
         <p:spPr>
           <a:xfrm>
-            <a:off x="7635240" y="1325880"/>
-            <a:ext cx="3474720" cy="1207008"/>
+            <a:off x="7543800" y="1325880"/>
+            <a:ext cx="3611880" cy="1261872"/>
           </a:xfrm>
           <a:prstGeom prst="roundRect">
             <a:avLst>
-              <a:gd name="adj" fmla="val 9091"/>
+              <a:gd name="adj" fmla="val 8696"/>
             </a:avLst>
           </a:prstGeom>
           <a:solidFill>
@@ -11612,8 +11612,8 @@
         </p:nvSpPr>
         <p:spPr>
           <a:xfrm>
-            <a:off x="7799832" y="1472184"/>
-            <a:ext cx="3145536" cy="256032"/>
+            <a:off x="7708392" y="1453896"/>
+            <a:ext cx="3282696" cy="228600"/>
           </a:xfrm>
           <a:prstGeom prst="rect">
             <a:avLst/>
@@ -11629,7 +11629,7 @@
               <a:buNone/>
             </a:pPr>
             <a:r>
-              <a:rPr lang="en-US" sz="1300" b="1" dirty="0">
+              <a:rPr lang="en-US" sz="1220" b="1" dirty="0">
                 <a:solidFill>
                   <a:srgbClr val="0068B7"/>
                 </a:solidFill>
@@ -11639,7 +11639,7 @@
               </a:rPr>
               <a:t>Governance lens</a:t>
             </a:r>
-            <a:endParaRPr lang="en-US" sz="1300" dirty="0"/>
+            <a:endParaRPr lang="en-US" sz="1220" dirty="0"/>
           </a:p>
         </p:txBody>
       </p:sp>
@@ -11651,8 +11651,8 @@
         </p:nvSpPr>
         <p:spPr>
           <a:xfrm>
-            <a:off x="7799832" y="1801368"/>
-            <a:ext cx="3145536" cy="640080"/>
+            <a:off x="7708392" y="1764792"/>
+            <a:ext cx="3282696" cy="749808"/>
           </a:xfrm>
           <a:prstGeom prst="rect">
             <a:avLst/>
@@ -11670,7 +11670,7 @@
               <a:buNone/>
             </a:pPr>
             <a:r>
-              <a:rPr lang="en-US" sz="1320" dirty="0">
+              <a:rPr lang="en-US" sz="1220" dirty="0">
                 <a:solidFill>
                   <a:srgbClr val="17364A"/>
                 </a:solidFill>
@@ -11678,9 +11678,9 @@
                 <a:ea typeface="Aptos" pitchFamily="34" charset="-122"/>
                 <a:cs typeface="Aptos" pitchFamily="34" charset="-120"/>
               </a:rPr>
-              <a:t>NIST AI Risk Management Framework: https://www.nist.gov/itl/ai-risk-management-framework</a:t>
-            </a:r>
-            <a:endParaRPr lang="en-US" sz="1320" dirty="0"/>
+              <a:t>NIST AI Risk Management Framework:.</a:t>
+            </a:r>
+            <a:endParaRPr lang="en-US" sz="1220" dirty="0"/>
           </a:p>
         </p:txBody>
       </p:sp>
@@ -11692,12 +11692,12 @@
         </p:nvSpPr>
         <p:spPr>
           <a:xfrm>
-            <a:off x="7635240" y="2670048"/>
-            <a:ext cx="3474720" cy="1377086"/>
+            <a:off x="7543800" y="2724912"/>
+            <a:ext cx="3611880" cy="1527048"/>
           </a:xfrm>
           <a:prstGeom prst="roundRect">
             <a:avLst>
-              <a:gd name="adj" fmla="val 7968"/>
+              <a:gd name="adj" fmla="val 7186"/>
             </a:avLst>
           </a:prstGeom>
           <a:solidFill>
@@ -11719,8 +11719,8 @@
         </p:nvSpPr>
         <p:spPr>
           <a:xfrm>
-            <a:off x="7799832" y="2816352"/>
-            <a:ext cx="3145536" cy="256032"/>
+            <a:off x="7708392" y="2852928"/>
+            <a:ext cx="3282696" cy="228600"/>
           </a:xfrm>
           <a:prstGeom prst="rect">
             <a:avLst/>
@@ -11736,7 +11736,7 @@
               <a:buNone/>
             </a:pPr>
             <a:r>
-              <a:rPr lang="en-US" sz="1300" b="1" dirty="0">
+              <a:rPr lang="en-US" sz="1220" b="1" dirty="0">
                 <a:solidFill>
                   <a:srgbClr val="0068B7"/>
                 </a:solidFill>
@@ -11746,7 +11746,7 @@
               </a:rPr>
               <a:t>Concept checkpoints</a:t>
             </a:r>
-            <a:endParaRPr lang="en-US" sz="1300" dirty="0"/>
+            <a:endParaRPr lang="en-US" sz="1220" dirty="0"/>
           </a:p>
         </p:txBody>
       </p:sp>
@@ -11758,8 +11758,8 @@
         </p:nvSpPr>
         <p:spPr>
           <a:xfrm>
-            <a:off x="7818120" y="3182112"/>
-            <a:ext cx="3090672" cy="718718"/>
+            <a:off x="7726680" y="3182112"/>
+            <a:ext cx="3227832" cy="960120"/>
           </a:xfrm>
           <a:prstGeom prst="rect">
             <a:avLst/>
@@ -11777,7 +11777,7 @@
               <a:buNone/>
             </a:pPr>
             <a:r>
-              <a:rPr lang="en-US" sz="1220" dirty="0">
+              <a:rPr lang="en-US" sz="1140" dirty="0">
                 <a:solidFill>
                   <a:srgbClr val="17364A"/>
                 </a:solidFill>
@@ -11785,16 +11785,16 @@
                 <a:ea typeface="Aptos" pitchFamily="34" charset="-122"/>
                 <a:cs typeface="Aptos" pitchFamily="34" charset="-120"/>
               </a:rPr>
-              <a:t>OWASP Top 10 for LLM Applications, when security or AI.</a:t>
-            </a:r>
-            <a:endParaRPr lang="en-US" sz="1220" dirty="0"/>
-          </a:p>
-          <a:p>
-            <a:pPr indent="0" marL="0">
-              <a:buNone/>
-            </a:pPr>
-            <a:r>
-              <a:rPr lang="en-US" sz="1220" dirty="0">
+              <a:t>OWASP Top 10 for LLM Applications, when security.</a:t>
+            </a:r>
+            <a:endParaRPr lang="en-US" sz="1140" dirty="0"/>
+          </a:p>
+          <a:p>
+            <a:pPr indent="0" marL="0">
+              <a:buNone/>
+            </a:pPr>
+            <a:r>
+              <a:rPr lang="en-US" sz="1140" dirty="0">
                 <a:solidFill>
                   <a:srgbClr val="17364A"/>
                 </a:solidFill>
@@ -11802,9 +11802,9 @@
                 <a:ea typeface="Aptos" pitchFamily="34" charset="-122"/>
                 <a:cs typeface="Aptos" pitchFamily="34" charset="-120"/>
               </a:rPr>
-              <a:t>Agency privacy, cybersecurity, data governance, procurement, and.</a:t>
-            </a:r>
-            <a:endParaRPr lang="en-US" sz="1220" dirty="0"/>
+              <a:t>Agency privacy, cybersecurity, data governance,.</a:t>
+            </a:r>
+            <a:endParaRPr lang="en-US" sz="1140" dirty="0"/>
           </a:p>
         </p:txBody>
       </p:sp>
@@ -11816,12 +11816,12 @@
         </p:nvSpPr>
         <p:spPr>
           <a:xfrm>
-            <a:off x="7635240" y="4184294"/>
-            <a:ext cx="3474720" cy="1466698"/>
+            <a:off x="7543800" y="4389120"/>
+            <a:ext cx="3611880" cy="1261872"/>
           </a:xfrm>
           <a:prstGeom prst="roundRect">
             <a:avLst>
-              <a:gd name="adj" fmla="val 7481"/>
+              <a:gd name="adj" fmla="val 8696"/>
             </a:avLst>
           </a:prstGeom>
           <a:solidFill>
@@ -11843,8 +11843,8 @@
         </p:nvSpPr>
         <p:spPr>
           <a:xfrm>
-            <a:off x="7799832" y="4330598"/>
-            <a:ext cx="3145536" cy="256032"/>
+            <a:off x="7708392" y="4517136"/>
+            <a:ext cx="3282696" cy="228600"/>
           </a:xfrm>
           <a:prstGeom prst="rect">
             <a:avLst/>
@@ -11860,7 +11860,7 @@
               <a:buNone/>
             </a:pPr>
             <a:r>
-              <a:rPr lang="en-US" sz="1300" b="1" dirty="0">
+              <a:rPr lang="en-US" sz="1220" b="1" dirty="0">
                 <a:solidFill>
                   <a:srgbClr val="0068B7"/>
                 </a:solidFill>
@@ -11870,7 +11870,7 @@
               </a:rPr>
               <a:t>What to document</a:t>
             </a:r>
-            <a:endParaRPr lang="en-US" sz="1300" dirty="0"/>
+            <a:endParaRPr lang="en-US" sz="1220" dirty="0"/>
           </a:p>
         </p:txBody>
       </p:sp>
@@ -11882,8 +11882,8 @@
         </p:nvSpPr>
         <p:spPr>
           <a:xfrm>
-            <a:off x="7799832" y="4659782"/>
-            <a:ext cx="3145536" cy="899770"/>
+            <a:off x="7708392" y="4828032"/>
+            <a:ext cx="3282696" cy="749808"/>
           </a:xfrm>
           <a:prstGeom prst="rect">
             <a:avLst/>
@@ -11901,7 +11901,7 @@
               <a:buNone/>
             </a:pPr>
             <a:r>
-              <a:rPr lang="en-US" sz="1320" dirty="0">
+              <a:rPr lang="en-US" sz="1220" dirty="0">
                 <a:solidFill>
                   <a:srgbClr val="17364A"/>
                 </a:solidFill>
@@ -11909,9 +11909,9 @@
                 <a:ea typeface="Aptos" pitchFamily="34" charset="-122"/>
                 <a:cs typeface="Aptos" pitchFamily="34" charset="-120"/>
               </a:rPr>
-              <a:t>Translate this concept into clear decision rights, review steps, documentation expectations, and escalation paths before an AI-supported workflow is approved.</a:t>
-            </a:r>
-            <a:endParaRPr lang="en-US" sz="1320" dirty="0"/>
+              <a:t>Translate this concept into clear decision rights, review steps, documentation.</a:t>
+            </a:r>
+            <a:endParaRPr lang="en-US" sz="1220" dirty="0"/>
           </a:p>
         </p:txBody>
       </p:sp>
@@ -12229,7 +12229,7 @@
                 <a:ea typeface="Aptos" pitchFamily="34" charset="-122"/>
                 <a:cs typeface="Aptos" pitchFamily="34" charset="-120"/>
               </a:rPr>
-              <a:t>• Play 11: Build and Deploy AI Solutions - This lesson informs Play 11 by helping learners.</a:t>
+              <a:t>• Play 11: Build and Deploy AI Solutions - This lesson informs Play 11 by.</a:t>
             </a:r>
             <a:endParaRPr lang="en-US" sz="1900" dirty="0"/>
           </a:p>
@@ -12246,7 +12246,7 @@
                 <a:ea typeface="Aptos" pitchFamily="34" charset="-122"/>
                 <a:cs typeface="Aptos" pitchFamily="34" charset="-120"/>
               </a:rPr>
-              <a:t>• Play 2: Readiness Assessment - This lesson informs Play 2 by helping learners connect the.</a:t>
+              <a:t>• Play 2: Readiness Assessment - This lesson informs Play 2 by helping.</a:t>
             </a:r>
             <a:endParaRPr lang="en-US" sz="1900" dirty="0"/>
           </a:p>
@@ -12263,7 +12263,7 @@
                 <a:ea typeface="Aptos" pitchFamily="34" charset="-122"/>
                 <a:cs typeface="Aptos" pitchFamily="34" charset="-120"/>
               </a:rPr>
-              <a:t>• Play 3: Establish AI Governance - This lesson informs Play 3 by helping learners connect the.</a:t>
+              <a:t>• Play 3: Establish AI Governance - This lesson informs Play 3 by helping.</a:t>
             </a:r>
             <a:endParaRPr lang="en-US" sz="1900" dirty="0"/>
           </a:p>
@@ -12280,7 +12280,7 @@
                 <a:ea typeface="Aptos" pitchFamily="34" charset="-122"/>
                 <a:cs typeface="Aptos" pitchFamily="34" charset="-120"/>
               </a:rPr>
-              <a:t>• Play 1: Vision &amp; Guardrails - This lesson informs Play 1 by helping learners connect the.</a:t>
+              <a:t>• Play 1: Vision &amp; Guardrails - This lesson informs Play 1 by helping learners.</a:t>
             </a:r>
             <a:endParaRPr lang="en-US" sz="1900" dirty="0"/>
           </a:p>
@@ -12321,8 +12321,8 @@
         </p:nvSpPr>
         <p:spPr>
           <a:xfrm>
-            <a:off x="8211312" y="1563624"/>
-            <a:ext cx="2734056" cy="256032"/>
+            <a:off x="8211312" y="1545336"/>
+            <a:ext cx="2734056" cy="228600"/>
           </a:xfrm>
           <a:prstGeom prst="rect">
             <a:avLst/>
@@ -12338,7 +12338,7 @@
               <a:buNone/>
             </a:pPr>
             <a:r>
-              <a:rPr lang="en-US" sz="1300" b="1" dirty="0">
+              <a:rPr lang="en-US" sz="1220" b="1" dirty="0">
                 <a:solidFill>
                   <a:srgbClr val="0068B7"/>
                 </a:solidFill>
@@ -12348,7 +12348,7 @@
               </a:rPr>
               <a:t>Apply the lesson</a:t>
             </a:r>
-            <a:endParaRPr lang="en-US" sz="1300" dirty="0"/>
+            <a:endParaRPr lang="en-US" sz="1220" dirty="0"/>
           </a:p>
         </p:txBody>
       </p:sp>
@@ -12360,8 +12360,8 @@
         </p:nvSpPr>
         <p:spPr>
           <a:xfrm>
-            <a:off x="8211312" y="1892808"/>
-            <a:ext cx="2734056" cy="1536192"/>
+            <a:off x="8211312" y="1856232"/>
+            <a:ext cx="2734056" cy="1591056"/>
           </a:xfrm>
           <a:prstGeom prst="rect">
             <a:avLst/>
@@ -12379,7 +12379,7 @@
               <a:buNone/>
             </a:pPr>
             <a:r>
-              <a:rPr lang="en-US" sz="1320" dirty="0">
+              <a:rPr lang="en-US" sz="1220" dirty="0">
                 <a:solidFill>
                   <a:srgbClr val="17364A"/>
                 </a:solidFill>
@@ -12387,9 +12387,9 @@
                 <a:ea typeface="Aptos" pitchFamily="34" charset="-122"/>
                 <a:cs typeface="Aptos" pitchFamily="34" charset="-120"/>
               </a:rPr>
-              <a:t>Use the related plays to identify decisions, participants, timing, approvals, and documentation needed for responsible implementation.</a:t>
-            </a:r>
-            <a:endParaRPr lang="en-US" sz="1320" dirty="0"/>
+              <a:t>Use the related plays to identify decisions, participants, timing, approvals,.</a:t>
+            </a:r>
+            <a:endParaRPr lang="en-US" sz="1220" dirty="0"/>
           </a:p>
         </p:txBody>
       </p:sp>
@@ -12428,8 +12428,8 @@
         </p:nvSpPr>
         <p:spPr>
           <a:xfrm>
-            <a:off x="8211312" y="3941064"/>
-            <a:ext cx="2734056" cy="256032"/>
+            <a:off x="8211312" y="3922776"/>
+            <a:ext cx="2734056" cy="228600"/>
           </a:xfrm>
           <a:prstGeom prst="rect">
             <a:avLst/>
@@ -12445,7 +12445,7 @@
               <a:buNone/>
             </a:pPr>
             <a:r>
-              <a:rPr lang="en-US" sz="1300" b="1" dirty="0">
+              <a:rPr lang="en-US" sz="1220" b="1" dirty="0">
                 <a:solidFill>
                   <a:srgbClr val="0068B7"/>
                 </a:solidFill>
@@ -12455,7 +12455,7 @@
               </a:rPr>
               <a:t>Use the play links to</a:t>
             </a:r>
-            <a:endParaRPr lang="en-US" sz="1300" dirty="0"/>
+            <a:endParaRPr lang="en-US" sz="1220" dirty="0"/>
           </a:p>
         </p:txBody>
       </p:sp>
@@ -12467,8 +12467,8 @@
         </p:nvSpPr>
         <p:spPr>
           <a:xfrm>
-            <a:off x="8229600" y="4306824"/>
-            <a:ext cx="2679192" cy="941832"/>
+            <a:off x="8229600" y="4251960"/>
+            <a:ext cx="2679192" cy="1033272"/>
           </a:xfrm>
           <a:prstGeom prst="rect">
             <a:avLst/>
@@ -12486,7 +12486,7 @@
               <a:buNone/>
             </a:pPr>
             <a:r>
-              <a:rPr lang="en-US" sz="1220" dirty="0">
+              <a:rPr lang="en-US" sz="1140" dirty="0">
                 <a:solidFill>
                   <a:srgbClr val="17364A"/>
                 </a:solidFill>
@@ -12496,14 +12496,14 @@
               </a:rPr>
               <a:t>Locate the decision point in the playbook sequence.</a:t>
             </a:r>
-            <a:endParaRPr lang="en-US" sz="1220" dirty="0"/>
-          </a:p>
-          <a:p>
-            <a:pPr indent="0" marL="0">
-              <a:buNone/>
-            </a:pPr>
-            <a:r>
-              <a:rPr lang="en-US" sz="1220" dirty="0">
+            <a:endParaRPr lang="en-US" sz="1140" dirty="0"/>
+          </a:p>
+          <a:p>
+            <a:pPr indent="0" marL="0">
+              <a:buNone/>
+            </a:pPr>
+            <a:r>
+              <a:rPr lang="en-US" sz="1140" dirty="0">
                 <a:solidFill>
                   <a:srgbClr val="17364A"/>
                 </a:solidFill>
@@ -12513,14 +12513,14 @@
               </a:rPr>
               <a:t>Identify who should participate in the work.</a:t>
             </a:r>
-            <a:endParaRPr lang="en-US" sz="1220" dirty="0"/>
-          </a:p>
-          <a:p>
-            <a:pPr indent="0" marL="0">
-              <a:buNone/>
-            </a:pPr>
-            <a:r>
-              <a:rPr lang="en-US" sz="1220" dirty="0">
+            <a:endParaRPr lang="en-US" sz="1140" dirty="0"/>
+          </a:p>
+          <a:p>
+            <a:pPr indent="0" marL="0">
+              <a:buNone/>
+            </a:pPr>
+            <a:r>
+              <a:rPr lang="en-US" sz="1140" dirty="0">
                 <a:solidFill>
                   <a:srgbClr val="17364A"/>
                 </a:solidFill>
@@ -12528,9 +12528,9 @@
                 <a:ea typeface="Aptos" pitchFamily="34" charset="-122"/>
                 <a:cs typeface="Aptos" pitchFamily="34" charset="-120"/>
               </a:rPr>
-              <a:t>Document the review, approval, or implementation step.</a:t>
-            </a:r>
-            <a:endParaRPr lang="en-US" sz="1220" dirty="0"/>
+              <a:t>Document the review, approval, or implementation.</a:t>
+            </a:r>
+            <a:endParaRPr lang="en-US" sz="1140" dirty="0"/>
           </a:p>
         </p:txBody>
       </p:sp>
@@ -12848,7 +12848,7 @@
                 <a:ea typeface="Aptos" pitchFamily="34" charset="-122"/>
                 <a:cs typeface="Aptos" pitchFamily="34" charset="-120"/>
               </a:rPr>
-              <a:t>• Tool 4: AI Policy Landscape Scan (Worksheet) - Use AI Policy Landscape Scan to translate this.</a:t>
+              <a:t>• Tool 4: AI Policy Landscape Scan (Worksheet) - Use AI Policy Landscape Scan.</a:t>
             </a:r>
             <a:endParaRPr lang="en-US" sz="1850" dirty="0"/>
           </a:p>
@@ -12865,7 +12865,7 @@
                 <a:ea typeface="Aptos" pitchFamily="34" charset="-122"/>
                 <a:cs typeface="Aptos" pitchFamily="34" charset="-120"/>
               </a:rPr>
-              <a:t>• Tool 5: AI Environmental and Resource Impact Review (Checklist) - Use this tool to complete or.</a:t>
+              <a:t>• Tool 5: AI Environmental and Resource Impact Review (Checklist) - Use this.</a:t>
             </a:r>
             <a:endParaRPr lang="en-US" sz="1850" dirty="0"/>
           </a:p>
@@ -12882,7 +12882,7 @@
                 <a:ea typeface="Aptos" pitchFamily="34" charset="-122"/>
                 <a:cs typeface="Aptos" pitchFamily="34" charset="-120"/>
               </a:rPr>
-              <a:t>• Tool 6: Human-Centered AI Decision Rule Checklist (Checklist) - Use Human-Centered AI Decision.</a:t>
+              <a:t>• Tool 6: Human-Centered AI Decision Rule Checklist (Checklist) - Use.</a:t>
             </a:r>
             <a:endParaRPr lang="en-US" sz="1850" dirty="0"/>
           </a:p>
@@ -12899,7 +12899,7 @@
                 <a:ea typeface="Aptos" pitchFamily="34" charset="-122"/>
                 <a:cs typeface="Aptos" pitchFamily="34" charset="-120"/>
               </a:rPr>
-              <a:t>• Tool 8: AI Project Charter (Planning) - Use AI Project Charter to translate this lesson into a.</a:t>
+              <a:t>• Tool 8: AI Project Charter (Planning) - Use AI Project Charter to translate.</a:t>
             </a:r>
             <a:endParaRPr lang="en-US" sz="1850" dirty="0"/>
           </a:p>
@@ -12940,8 +12940,8 @@
         </p:nvSpPr>
         <p:spPr>
           <a:xfrm>
-            <a:off x="8211312" y="1563624"/>
-            <a:ext cx="2734056" cy="256032"/>
+            <a:off x="8211312" y="1545336"/>
+            <a:ext cx="2734056" cy="228600"/>
           </a:xfrm>
           <a:prstGeom prst="rect">
             <a:avLst/>
@@ -12957,7 +12957,7 @@
               <a:buNone/>
             </a:pPr>
             <a:r>
-              <a:rPr lang="en-US" sz="1300" b="1" dirty="0">
+              <a:rPr lang="en-US" sz="1220" b="1" dirty="0">
                 <a:solidFill>
                   <a:srgbClr val="0068B7"/>
                 </a:solidFill>
@@ -12967,7 +12967,7 @@
               </a:rPr>
               <a:t>Use the tools</a:t>
             </a:r>
-            <a:endParaRPr lang="en-US" sz="1300" dirty="0"/>
+            <a:endParaRPr lang="en-US" sz="1220" dirty="0"/>
           </a:p>
         </p:txBody>
       </p:sp>
@@ -12979,8 +12979,8 @@
         </p:nvSpPr>
         <p:spPr>
           <a:xfrm>
-            <a:off x="8211312" y="1892808"/>
-            <a:ext cx="2734056" cy="1536192"/>
+            <a:off x="8211312" y="1856232"/>
+            <a:ext cx="2734056" cy="1591056"/>
           </a:xfrm>
           <a:prstGeom prst="rect">
             <a:avLst/>
@@ -12998,7 +12998,7 @@
               <a:buNone/>
             </a:pPr>
             <a:r>
-              <a:rPr lang="en-US" sz="1320" dirty="0">
+              <a:rPr lang="en-US" sz="1220" dirty="0">
                 <a:solidFill>
                   <a:srgbClr val="17364A"/>
                 </a:solidFill>
@@ -13006,9 +13006,9 @@
                 <a:ea typeface="Aptos" pitchFamily="34" charset="-122"/>
                 <a:cs typeface="Aptos" pitchFamily="34" charset="-120"/>
               </a:rPr>
-              <a:t>Use linked tools when your department needs a structured worksheet, template, checklist, review process, or documentation artifact.</a:t>
-            </a:r>
-            <a:endParaRPr lang="en-US" sz="1320" dirty="0"/>
+              <a:t>Use linked tools when your department needs a structured worksheet, template,.</a:t>
+            </a:r>
+            <a:endParaRPr lang="en-US" sz="1220" dirty="0"/>
           </a:p>
         </p:txBody>
       </p:sp>
@@ -13047,8 +13047,8 @@
         </p:nvSpPr>
         <p:spPr>
           <a:xfrm>
-            <a:off x="8211312" y="3941064"/>
-            <a:ext cx="2734056" cy="256032"/>
+            <a:off x="8211312" y="3922776"/>
+            <a:ext cx="2734056" cy="228600"/>
           </a:xfrm>
           <a:prstGeom prst="rect">
             <a:avLst/>
@@ -13064,7 +13064,7 @@
               <a:buNone/>
             </a:pPr>
             <a:r>
-              <a:rPr lang="en-US" sz="1300" b="1" dirty="0">
+              <a:rPr lang="en-US" sz="1220" b="1" dirty="0">
                 <a:solidFill>
                   <a:srgbClr val="0068B7"/>
                 </a:solidFill>
@@ -13074,7 +13074,7 @@
               </a:rPr>
               <a:t>Tool selection cues</a:t>
             </a:r>
-            <a:endParaRPr lang="en-US" sz="1300" dirty="0"/>
+            <a:endParaRPr lang="en-US" sz="1220" dirty="0"/>
           </a:p>
         </p:txBody>
       </p:sp>
@@ -13086,8 +13086,8 @@
         </p:nvSpPr>
         <p:spPr>
           <a:xfrm>
-            <a:off x="8229600" y="4306824"/>
-            <a:ext cx="2679192" cy="941832"/>
+            <a:off x="8229600" y="4251960"/>
+            <a:ext cx="2679192" cy="1033272"/>
           </a:xfrm>
           <a:prstGeom prst="rect">
             <a:avLst/>
@@ -13105,7 +13105,7 @@
               <a:buNone/>
             </a:pPr>
             <a:r>
-              <a:rPr lang="en-US" sz="1220" dirty="0">
+              <a:rPr lang="en-US" sz="1140" dirty="0">
                 <a:solidFill>
                   <a:srgbClr val="17364A"/>
                 </a:solidFill>
@@ -13115,14 +13115,14 @@
               </a:rPr>
               <a:t>Use a tool when no comparable local process exists.</a:t>
             </a:r>
-            <a:endParaRPr lang="en-US" sz="1220" dirty="0"/>
-          </a:p>
-          <a:p>
-            <a:pPr indent="0" marL="0">
-              <a:buNone/>
-            </a:pPr>
-            <a:r>
-              <a:rPr lang="en-US" sz="1220" dirty="0">
+            <a:endParaRPr lang="en-US" sz="1140" dirty="0"/>
+          </a:p>
+          <a:p>
+            <a:pPr indent="0" marL="0">
+              <a:buNone/>
+            </a:pPr>
+            <a:r>
+              <a:rPr lang="en-US" sz="1140" dirty="0">
                 <a:solidFill>
                   <a:srgbClr val="17364A"/>
                 </a:solidFill>
@@ -13130,16 +13130,16 @@
                 <a:ea typeface="Aptos" pitchFamily="34" charset="-122"/>
                 <a:cs typeface="Aptos" pitchFamily="34" charset="-120"/>
               </a:rPr>
-              <a:t>Adapt existing department templates when they already fit the.</a:t>
-            </a:r>
-            <a:endParaRPr lang="en-US" sz="1220" dirty="0"/>
-          </a:p>
-          <a:p>
-            <a:pPr indent="0" marL="0">
-              <a:buNone/>
-            </a:pPr>
-            <a:r>
-              <a:rPr lang="en-US" sz="1220" dirty="0">
+              <a:t>Adapt existing department templates when they.</a:t>
+            </a:r>
+            <a:endParaRPr lang="en-US" sz="1140" dirty="0"/>
+          </a:p>
+          <a:p>
+            <a:pPr indent="0" marL="0">
+              <a:buNone/>
+            </a:pPr>
+            <a:r>
+              <a:rPr lang="en-US" sz="1140" dirty="0">
                 <a:solidFill>
                   <a:srgbClr val="17364A"/>
                 </a:solidFill>
@@ -13147,9 +13147,9 @@
                 <a:ea typeface="Aptos" pitchFamily="34" charset="-122"/>
                 <a:cs typeface="Aptos" pitchFamily="34" charset="-120"/>
               </a:rPr>
-              <a:t>Save the completed artifact as evidence of the decision.</a:t>
-            </a:r>
-            <a:endParaRPr lang="en-US" sz="1220" dirty="0"/>
+              <a:t>Save the completed artifact as evidence of the.</a:t>
+            </a:r>
+            <a:endParaRPr lang="en-US" sz="1140" dirty="0"/>
           </a:p>
         </p:txBody>
       </p:sp>
@@ -13440,8 +13440,8 @@
         </p:nvSpPr>
         <p:spPr>
           <a:xfrm>
-            <a:off x="868680" y="1508760"/>
-            <a:ext cx="6309360" cy="4160520"/>
+            <a:off x="822960" y="1463040"/>
+            <a:ext cx="6565392" cy="4343400"/>
           </a:xfrm>
           <a:prstGeom prst="rect">
             <a:avLst/>
@@ -13459,7 +13459,7 @@
               <a:buNone/>
             </a:pPr>
             <a:r>
-              <a:rPr lang="en-US" sz="2100" dirty="0">
+              <a:rPr lang="en-US" sz="1920" dirty="0">
                 <a:solidFill>
                   <a:srgbClr val="003A63"/>
                 </a:solidFill>
@@ -13467,16 +13467,16 @@
                 <a:ea typeface="Aptos" pitchFamily="34" charset="-122"/>
                 <a:cs typeface="Aptos" pitchFamily="34" charset="-120"/>
               </a:rPr>
-              <a:t>• Explain the purpose of data governance for ai-ready public health data in public health AI work.</a:t>
-            </a:r>
-            <a:endParaRPr lang="en-US" sz="2100" dirty="0"/>
-          </a:p>
-          <a:p>
-            <a:pPr indent="0" marL="0">
-              <a:buNone/>
-            </a:pPr>
-            <a:r>
-              <a:rPr lang="en-US" sz="2100" dirty="0">
+              <a:t>• Explain the purpose of data governance for ai-ready public health data in.</a:t>
+            </a:r>
+            <a:endParaRPr lang="en-US" sz="1920" dirty="0"/>
+          </a:p>
+          <a:p>
+            <a:pPr indent="0" marL="0">
+              <a:buNone/>
+            </a:pPr>
+            <a:r>
+              <a:rPr lang="en-US" sz="1920" dirty="0">
                 <a:solidFill>
                   <a:srgbClr val="003A63"/>
                 </a:solidFill>
@@ -13484,16 +13484,16 @@
                 <a:ea typeface="Aptos" pitchFamily="34" charset="-122"/>
                 <a:cs typeface="Aptos" pitchFamily="34" charset="-120"/>
               </a:rPr>
-              <a:t>• Identify the technical, operational, privacy, security, equity, and governance issues.</a:t>
-            </a:r>
-            <a:endParaRPr lang="en-US" sz="2100" dirty="0"/>
-          </a:p>
-          <a:p>
-            <a:pPr indent="0" marL="0">
-              <a:buNone/>
-            </a:pPr>
-            <a:r>
-              <a:rPr lang="en-US" sz="2100" dirty="0">
+              <a:t>• Identify the technical, operational, privacy, security, equity, and.</a:t>
+            </a:r>
+            <a:endParaRPr lang="en-US" sz="1920" dirty="0"/>
+          </a:p>
+          <a:p>
+            <a:pPr indent="0" marL="0">
+              <a:buNone/>
+            </a:pPr>
+            <a:r>
+              <a:rPr lang="en-US" sz="1920" dirty="0">
                 <a:solidFill>
                   <a:srgbClr val="003A63"/>
                 </a:solidFill>
@@ -13501,9 +13501,9 @@
                 <a:ea typeface="Aptos" pitchFamily="34" charset="-122"/>
                 <a:cs typeface="Aptos" pitchFamily="34" charset="-120"/>
               </a:rPr>
-              <a:t>• Apply the topic to a real or realistic public health workflow, system, or implementation.</a:t>
-            </a:r>
-            <a:endParaRPr lang="en-US" sz="2100" dirty="0"/>
+              <a:t>• Apply the topic to a real or realistic public health workflow, system, or.</a:t>
+            </a:r>
+            <a:endParaRPr lang="en-US" sz="1920" dirty="0"/>
           </a:p>
         </p:txBody>
       </p:sp>
@@ -13515,12 +13515,12 @@
         </p:nvSpPr>
         <p:spPr>
           <a:xfrm>
-            <a:off x="7635240" y="1325880"/>
-            <a:ext cx="3474720" cy="1255471"/>
+            <a:off x="7543800" y="1325880"/>
+            <a:ext cx="3611880" cy="1261872"/>
           </a:xfrm>
           <a:prstGeom prst="roundRect">
             <a:avLst>
-              <a:gd name="adj" fmla="val 8740"/>
+              <a:gd name="adj" fmla="val 8696"/>
             </a:avLst>
           </a:prstGeom>
           <a:solidFill>
@@ -13542,8 +13542,8 @@
         </p:nvSpPr>
         <p:spPr>
           <a:xfrm>
-            <a:off x="7799832" y="1472184"/>
-            <a:ext cx="3145536" cy="256032"/>
+            <a:off x="7708392" y="1453896"/>
+            <a:ext cx="3282696" cy="228600"/>
           </a:xfrm>
           <a:prstGeom prst="rect">
             <a:avLst/>
@@ -13559,7 +13559,7 @@
               <a:buNone/>
             </a:pPr>
             <a:r>
-              <a:rPr lang="en-US" sz="1300" b="1" dirty="0">
+              <a:rPr lang="en-US" sz="1220" b="1" dirty="0">
                 <a:solidFill>
                   <a:srgbClr val="0068B7"/>
                 </a:solidFill>
@@ -13569,7 +13569,7 @@
               </a:rPr>
               <a:t>Governance lens</a:t>
             </a:r>
-            <a:endParaRPr lang="en-US" sz="1300" dirty="0"/>
+            <a:endParaRPr lang="en-US" sz="1220" dirty="0"/>
           </a:p>
         </p:txBody>
       </p:sp>
@@ -13581,8 +13581,8 @@
         </p:nvSpPr>
         <p:spPr>
           <a:xfrm>
-            <a:off x="7799832" y="1801368"/>
-            <a:ext cx="3145536" cy="688543"/>
+            <a:off x="7708392" y="1764792"/>
+            <a:ext cx="3282696" cy="749808"/>
           </a:xfrm>
           <a:prstGeom prst="rect">
             <a:avLst/>
@@ -13600,7 +13600,7 @@
               <a:buNone/>
             </a:pPr>
             <a:r>
-              <a:rPr lang="en-US" sz="1320" dirty="0">
+              <a:rPr lang="en-US" sz="1220" dirty="0">
                 <a:solidFill>
                   <a:srgbClr val="17364A"/>
                 </a:solidFill>
@@ -13608,9 +13608,9 @@
                 <a:ea typeface="Aptos" pitchFamily="34" charset="-122"/>
                 <a:cs typeface="Aptos" pitchFamily="34" charset="-120"/>
               </a:rPr>
-              <a:t>Explain the purpose of data governance for ai-ready public health data in public health AI work.</a:t>
-            </a:r>
-            <a:endParaRPr lang="en-US" sz="1320" dirty="0"/>
+              <a:t>Explain the purpose of data governance for ai-ready public health data in public.</a:t>
+            </a:r>
+            <a:endParaRPr lang="en-US" sz="1220" dirty="0"/>
           </a:p>
         </p:txBody>
       </p:sp>
@@ -13622,12 +13622,12 @@
         </p:nvSpPr>
         <p:spPr>
           <a:xfrm>
-            <a:off x="7635240" y="2718511"/>
-            <a:ext cx="3474720" cy="1328623"/>
+            <a:off x="7543800" y="2724912"/>
+            <a:ext cx="3611880" cy="1527048"/>
           </a:xfrm>
           <a:prstGeom prst="roundRect">
             <a:avLst>
-              <a:gd name="adj" fmla="val 8259"/>
+              <a:gd name="adj" fmla="val 7186"/>
             </a:avLst>
           </a:prstGeom>
           <a:solidFill>
@@ -13649,8 +13649,8 @@
         </p:nvSpPr>
         <p:spPr>
           <a:xfrm>
-            <a:off x="7799832" y="2864815"/>
-            <a:ext cx="3145536" cy="256032"/>
+            <a:off x="7708392" y="2852928"/>
+            <a:ext cx="3282696" cy="228600"/>
           </a:xfrm>
           <a:prstGeom prst="rect">
             <a:avLst/>
@@ -13666,7 +13666,7 @@
               <a:buNone/>
             </a:pPr>
             <a:r>
-              <a:rPr lang="en-US" sz="1300" b="1" dirty="0">
+              <a:rPr lang="en-US" sz="1220" b="1" dirty="0">
                 <a:solidFill>
                   <a:srgbClr val="0068B7"/>
                 </a:solidFill>
@@ -13676,7 +13676,7 @@
               </a:rPr>
               <a:t>Concept checkpoints</a:t>
             </a:r>
-            <a:endParaRPr lang="en-US" sz="1300" dirty="0"/>
+            <a:endParaRPr lang="en-US" sz="1220" dirty="0"/>
           </a:p>
         </p:txBody>
       </p:sp>
@@ -13688,8 +13688,8 @@
         </p:nvSpPr>
         <p:spPr>
           <a:xfrm>
-            <a:off x="7818120" y="3230575"/>
-            <a:ext cx="3090672" cy="670255"/>
+            <a:off x="7726680" y="3182112"/>
+            <a:ext cx="3227832" cy="960120"/>
           </a:xfrm>
           <a:prstGeom prst="rect">
             <a:avLst/>
@@ -13707,7 +13707,7 @@
               <a:buNone/>
             </a:pPr>
             <a:r>
-              <a:rPr lang="en-US" sz="1220" dirty="0">
+              <a:rPr lang="en-US" sz="1140" dirty="0">
                 <a:solidFill>
                   <a:srgbClr val="17364A"/>
                 </a:solidFill>
@@ -13715,16 +13715,16 @@
                 <a:ea typeface="Aptos" pitchFamily="34" charset="-122"/>
                 <a:cs typeface="Aptos" pitchFamily="34" charset="-120"/>
               </a:rPr>
-              <a:t>Identify the technical, operational, privacy, security, equity,.</a:t>
-            </a:r>
-            <a:endParaRPr lang="en-US" sz="1220" dirty="0"/>
-          </a:p>
-          <a:p>
-            <a:pPr indent="0" marL="0">
-              <a:buNone/>
-            </a:pPr>
-            <a:r>
-              <a:rPr lang="en-US" sz="1220" dirty="0">
+              <a:t>Identify the technical, operational, privacy,.</a:t>
+            </a:r>
+            <a:endParaRPr lang="en-US" sz="1140" dirty="0"/>
+          </a:p>
+          <a:p>
+            <a:pPr indent="0" marL="0">
+              <a:buNone/>
+            </a:pPr>
+            <a:r>
+              <a:rPr lang="en-US" sz="1140" dirty="0">
                 <a:solidFill>
                   <a:srgbClr val="17364A"/>
                 </a:solidFill>
@@ -13732,16 +13732,16 @@
                 <a:ea typeface="Aptos" pitchFamily="34" charset="-122"/>
                 <a:cs typeface="Aptos" pitchFamily="34" charset="-120"/>
               </a:rPr>
-              <a:t>Recognize common failure modes that can affect safety, accuracy,.</a:t>
-            </a:r>
-            <a:endParaRPr lang="en-US" sz="1220" dirty="0"/>
-          </a:p>
-          <a:p>
-            <a:pPr indent="0" marL="0">
-              <a:buNone/>
-            </a:pPr>
-            <a:r>
-              <a:rPr lang="en-US" sz="1220" dirty="0">
+              <a:t>Recognize common failure modes that can affect.</a:t>
+            </a:r>
+            <a:endParaRPr lang="en-US" sz="1140" dirty="0"/>
+          </a:p>
+          <a:p>
+            <a:pPr indent="0" marL="0">
+              <a:buNone/>
+            </a:pPr>
+            <a:r>
+              <a:rPr lang="en-US" sz="1140" dirty="0">
                 <a:solidFill>
                   <a:srgbClr val="17364A"/>
                 </a:solidFill>
@@ -13749,9 +13749,9 @@
                 <a:ea typeface="Aptos" pitchFamily="34" charset="-122"/>
                 <a:cs typeface="Aptos" pitchFamily="34" charset="-120"/>
               </a:rPr>
-              <a:t>Identify practical guardrails that should be documented before.</a:t>
-            </a:r>
-            <a:endParaRPr lang="en-US" sz="1220" dirty="0"/>
+              <a:t>Identify practical guardrails that should be.</a:t>
+            </a:r>
+            <a:endParaRPr lang="en-US" sz="1140" dirty="0"/>
           </a:p>
         </p:txBody>
       </p:sp>
@@ -13763,12 +13763,12 @@
         </p:nvSpPr>
         <p:spPr>
           <a:xfrm>
-            <a:off x="7635240" y="4184294"/>
-            <a:ext cx="3474720" cy="1466698"/>
+            <a:off x="7543800" y="4389120"/>
+            <a:ext cx="3611880" cy="1261872"/>
           </a:xfrm>
           <a:prstGeom prst="roundRect">
             <a:avLst>
-              <a:gd name="adj" fmla="val 7481"/>
+              <a:gd name="adj" fmla="val 8696"/>
             </a:avLst>
           </a:prstGeom>
           <a:solidFill>
@@ -13790,8 +13790,8 @@
         </p:nvSpPr>
         <p:spPr>
           <a:xfrm>
-            <a:off x="7799832" y="4330598"/>
-            <a:ext cx="3145536" cy="256032"/>
+            <a:off x="7708392" y="4517136"/>
+            <a:ext cx="3282696" cy="228600"/>
           </a:xfrm>
           <a:prstGeom prst="rect">
             <a:avLst/>
@@ -13807,7 +13807,7 @@
               <a:buNone/>
             </a:pPr>
             <a:r>
-              <a:rPr lang="en-US" sz="1300" b="1" dirty="0">
+              <a:rPr lang="en-US" sz="1220" b="1" dirty="0">
                 <a:solidFill>
                   <a:srgbClr val="0068B7"/>
                 </a:solidFill>
@@ -13817,7 +13817,7 @@
               </a:rPr>
               <a:t>What to document</a:t>
             </a:r>
-            <a:endParaRPr lang="en-US" sz="1300" dirty="0"/>
+            <a:endParaRPr lang="en-US" sz="1220" dirty="0"/>
           </a:p>
         </p:txBody>
       </p:sp>
@@ -13829,8 +13829,8 @@
         </p:nvSpPr>
         <p:spPr>
           <a:xfrm>
-            <a:off x="7799832" y="4659782"/>
-            <a:ext cx="3145536" cy="899770"/>
+            <a:off x="7708392" y="4828032"/>
+            <a:ext cx="3282696" cy="749808"/>
           </a:xfrm>
           <a:prstGeom prst="rect">
             <a:avLst/>
@@ -13848,7 +13848,7 @@
               <a:buNone/>
             </a:pPr>
             <a:r>
-              <a:rPr lang="en-US" sz="1320" dirty="0">
+              <a:rPr lang="en-US" sz="1220" dirty="0">
                 <a:solidFill>
                   <a:srgbClr val="17364A"/>
                 </a:solidFill>
@@ -13856,9 +13856,9 @@
                 <a:ea typeface="Aptos" pitchFamily="34" charset="-122"/>
                 <a:cs typeface="Aptos" pitchFamily="34" charset="-120"/>
               </a:rPr>
-              <a:t>Use the assignment to test whether you can explain the concept, apply it to a realistic public health situation, and identify what would need review before the work moves forward.</a:t>
-            </a:r>
-            <a:endParaRPr lang="en-US" sz="1320" dirty="0"/>
+              <a:t>Use the assignment to test whether you can explain the concept, apply it to a.</a:t>
+            </a:r>
+            <a:endParaRPr lang="en-US" sz="1220" dirty="0"/>
           </a:p>
         </p:txBody>
       </p:sp>
@@ -14149,8 +14149,8 @@
         </p:nvSpPr>
         <p:spPr>
           <a:xfrm>
-            <a:off x="868680" y="1508760"/>
-            <a:ext cx="6309360" cy="4160520"/>
+            <a:off x="822960" y="1463040"/>
+            <a:ext cx="6565392" cy="4343400"/>
           </a:xfrm>
           <a:prstGeom prst="rect">
             <a:avLst/>
@@ -14168,7 +14168,7 @@
               <a:buNone/>
             </a:pPr>
             <a:r>
-              <a:rPr lang="en-US" sz="2100" dirty="0">
+              <a:rPr lang="en-US" sz="1920" dirty="0">
                 <a:solidFill>
                   <a:srgbClr val="003A63"/>
                 </a:solidFill>
@@ -14176,9 +14176,9 @@
                 <a:ea typeface="Aptos" pitchFamily="34" charset="-122"/>
                 <a:cs typeface="Aptos" pitchFamily="34" charset="-120"/>
               </a:rPr>
-              <a:t>• Produce a AI-ready data governance checklist that can support readiness assessment, governance.</a:t>
-            </a:r>
-            <a:endParaRPr lang="en-US" sz="2100" dirty="0"/>
+              <a:t>• Produce a AI-ready data governance checklist that can support readiness.</a:t>
+            </a:r>
+            <a:endParaRPr lang="en-US" sz="1920" dirty="0"/>
           </a:p>
         </p:txBody>
       </p:sp>
@@ -14190,12 +14190,12 @@
         </p:nvSpPr>
         <p:spPr>
           <a:xfrm>
-            <a:off x="7635240" y="1325880"/>
-            <a:ext cx="3474720" cy="1255471"/>
+            <a:off x="7543800" y="1325880"/>
+            <a:ext cx="3611880" cy="1261872"/>
           </a:xfrm>
           <a:prstGeom prst="roundRect">
             <a:avLst>
-              <a:gd name="adj" fmla="val 8740"/>
+              <a:gd name="adj" fmla="val 8696"/>
             </a:avLst>
           </a:prstGeom>
           <a:solidFill>
@@ -14217,8 +14217,8 @@
         </p:nvSpPr>
         <p:spPr>
           <a:xfrm>
-            <a:off x="7799832" y="1472184"/>
-            <a:ext cx="3145536" cy="256032"/>
+            <a:off x="7708392" y="1453896"/>
+            <a:ext cx="3282696" cy="228600"/>
           </a:xfrm>
           <a:prstGeom prst="rect">
             <a:avLst/>
@@ -14234,7 +14234,7 @@
               <a:buNone/>
             </a:pPr>
             <a:r>
-              <a:rPr lang="en-US" sz="1300" b="1" dirty="0">
+              <a:rPr lang="en-US" sz="1220" b="1" dirty="0">
                 <a:solidFill>
                   <a:srgbClr val="0068B7"/>
                 </a:solidFill>
@@ -14244,7 +14244,7 @@
               </a:rPr>
               <a:t>Governance lens</a:t>
             </a:r>
-            <a:endParaRPr lang="en-US" sz="1300" dirty="0"/>
+            <a:endParaRPr lang="en-US" sz="1220" dirty="0"/>
           </a:p>
         </p:txBody>
       </p:sp>
@@ -14256,8 +14256,8 @@
         </p:nvSpPr>
         <p:spPr>
           <a:xfrm>
-            <a:off x="7799832" y="1801368"/>
-            <a:ext cx="3145536" cy="688543"/>
+            <a:off x="7708392" y="1764792"/>
+            <a:ext cx="3282696" cy="749808"/>
           </a:xfrm>
           <a:prstGeom prst="rect">
             <a:avLst/>
@@ -14275,7 +14275,7 @@
               <a:buNone/>
             </a:pPr>
             <a:r>
-              <a:rPr lang="en-US" sz="1320" dirty="0">
+              <a:rPr lang="en-US" sz="1220" dirty="0">
                 <a:solidFill>
                   <a:srgbClr val="17364A"/>
                 </a:solidFill>
@@ -14283,9 +14283,9 @@
                 <a:ea typeface="Aptos" pitchFamily="34" charset="-122"/>
                 <a:cs typeface="Aptos" pitchFamily="34" charset="-120"/>
               </a:rPr>
-              <a:t>Produce a AI-ready data governance checklist that can support readiness assessment, governance review,.</a:t>
-            </a:r>
-            <a:endParaRPr lang="en-US" sz="1320" dirty="0"/>
+              <a:t>Produce a AI-ready data governance checklist that can support readiness.</a:t>
+            </a:r>
+            <a:endParaRPr lang="en-US" sz="1220" dirty="0"/>
           </a:p>
         </p:txBody>
       </p:sp>
@@ -14297,12 +14297,12 @@
         </p:nvSpPr>
         <p:spPr>
           <a:xfrm>
-            <a:off x="7635240" y="2718511"/>
-            <a:ext cx="3474720" cy="1328623"/>
+            <a:off x="7543800" y="2724912"/>
+            <a:ext cx="3611880" cy="1527048"/>
           </a:xfrm>
           <a:prstGeom prst="roundRect">
             <a:avLst>
-              <a:gd name="adj" fmla="val 8259"/>
+              <a:gd name="adj" fmla="val 7186"/>
             </a:avLst>
           </a:prstGeom>
           <a:solidFill>
@@ -14324,8 +14324,8 @@
         </p:nvSpPr>
         <p:spPr>
           <a:xfrm>
-            <a:off x="7799832" y="2864815"/>
-            <a:ext cx="3145536" cy="256032"/>
+            <a:off x="7708392" y="2852928"/>
+            <a:ext cx="3282696" cy="228600"/>
           </a:xfrm>
           <a:prstGeom prst="rect">
             <a:avLst/>
@@ -14341,7 +14341,7 @@
               <a:buNone/>
             </a:pPr>
             <a:r>
-              <a:rPr lang="en-US" sz="1300" b="1" dirty="0">
+              <a:rPr lang="en-US" sz="1220" b="1" dirty="0">
                 <a:solidFill>
                   <a:srgbClr val="0068B7"/>
                 </a:solidFill>
@@ -14351,7 +14351,7 @@
               </a:rPr>
               <a:t>Concept checkpoints</a:t>
             </a:r>
-            <a:endParaRPr lang="en-US" sz="1300" dirty="0"/>
+            <a:endParaRPr lang="en-US" sz="1220" dirty="0"/>
           </a:p>
         </p:txBody>
       </p:sp>
@@ -14363,8 +14363,8 @@
         </p:nvSpPr>
         <p:spPr>
           <a:xfrm>
-            <a:off x="7818120" y="3230575"/>
-            <a:ext cx="3090672" cy="670255"/>
+            <a:off x="7726680" y="3182112"/>
+            <a:ext cx="3227832" cy="960120"/>
           </a:xfrm>
           <a:prstGeom prst="rect">
             <a:avLst/>
@@ -14382,7 +14382,7 @@
               <a:buNone/>
             </a:pPr>
             <a:r>
-              <a:rPr lang="en-US" sz="1220" dirty="0">
+              <a:rPr lang="en-US" sz="1140" dirty="0">
                 <a:solidFill>
                   <a:srgbClr val="17364A"/>
                 </a:solidFill>
@@ -14390,9 +14390,9 @@
                 <a:ea typeface="Aptos" pitchFamily="34" charset="-122"/>
                 <a:cs typeface="Aptos" pitchFamily="34" charset="-120"/>
               </a:rPr>
-              <a:t>Produce a AI-ready data governance checklist that can support.</a:t>
-            </a:r>
-            <a:endParaRPr lang="en-US" sz="1220" dirty="0"/>
+              <a:t>Produce a AI-ready data governance checklist that.</a:t>
+            </a:r>
+            <a:endParaRPr lang="en-US" sz="1140" dirty="0"/>
           </a:p>
         </p:txBody>
       </p:sp>
@@ -14404,12 +14404,12 @@
         </p:nvSpPr>
         <p:spPr>
           <a:xfrm>
-            <a:off x="7635240" y="4184294"/>
-            <a:ext cx="3474720" cy="1466698"/>
+            <a:off x="7543800" y="4389120"/>
+            <a:ext cx="3611880" cy="1261872"/>
           </a:xfrm>
           <a:prstGeom prst="roundRect">
             <a:avLst>
-              <a:gd name="adj" fmla="val 7481"/>
+              <a:gd name="adj" fmla="val 8696"/>
             </a:avLst>
           </a:prstGeom>
           <a:solidFill>
@@ -14431,8 +14431,8 @@
         </p:nvSpPr>
         <p:spPr>
           <a:xfrm>
-            <a:off x="7799832" y="4330598"/>
-            <a:ext cx="3145536" cy="256032"/>
+            <a:off x="7708392" y="4517136"/>
+            <a:ext cx="3282696" cy="228600"/>
           </a:xfrm>
           <a:prstGeom prst="rect">
             <a:avLst/>
@@ -14448,7 +14448,7 @@
               <a:buNone/>
             </a:pPr>
             <a:r>
-              <a:rPr lang="en-US" sz="1300" b="1" dirty="0">
+              <a:rPr lang="en-US" sz="1220" b="1" dirty="0">
                 <a:solidFill>
                   <a:srgbClr val="0068B7"/>
                 </a:solidFill>
@@ -14458,7 +14458,7 @@
               </a:rPr>
               <a:t>What to document</a:t>
             </a:r>
-            <a:endParaRPr lang="en-US" sz="1300" dirty="0"/>
+            <a:endParaRPr lang="en-US" sz="1220" dirty="0"/>
           </a:p>
         </p:txBody>
       </p:sp>
@@ -14470,8 +14470,8 @@
         </p:nvSpPr>
         <p:spPr>
           <a:xfrm>
-            <a:off x="7799832" y="4659782"/>
-            <a:ext cx="3145536" cy="899770"/>
+            <a:off x="7708392" y="4828032"/>
+            <a:ext cx="3282696" cy="749808"/>
           </a:xfrm>
           <a:prstGeom prst="rect">
             <a:avLst/>
@@ -14489,7 +14489,7 @@
               <a:buNone/>
             </a:pPr>
             <a:r>
-              <a:rPr lang="en-US" sz="1320" dirty="0">
+              <a:rPr lang="en-US" sz="1220" dirty="0">
                 <a:solidFill>
                   <a:srgbClr val="17364A"/>
                 </a:solidFill>
@@ -14497,9 +14497,9 @@
                 <a:ea typeface="Aptos" pitchFamily="34" charset="-122"/>
                 <a:cs typeface="Aptos" pitchFamily="34" charset="-120"/>
               </a:rPr>
-              <a:t>Use the assignment to test whether you can explain the concept, apply it to a realistic public health situation, and identify what would need review before the work moves forward.</a:t>
-            </a:r>
-            <a:endParaRPr lang="en-US" sz="1320" dirty="0"/>
+              <a:t>Use the assignment to test whether you can explain the concept, apply it to a.</a:t>
+            </a:r>
+            <a:endParaRPr lang="en-US" sz="1220" dirty="0"/>
           </a:p>
         </p:txBody>
       </p:sp>
@@ -14790,8 +14790,8 @@
         </p:nvSpPr>
         <p:spPr>
           <a:xfrm>
-            <a:off x="868680" y="1508760"/>
-            <a:ext cx="6309360" cy="4160520"/>
+            <a:off x="822960" y="1463040"/>
+            <a:ext cx="6565392" cy="4343400"/>
           </a:xfrm>
           <a:prstGeom prst="rect">
             <a:avLst/>
@@ -14809,7 +14809,7 @@
               <a:buNone/>
             </a:pPr>
             <a:r>
-              <a:rPr lang="en-US" sz="2100" dirty="0">
+              <a:rPr lang="en-US" sz="1920" dirty="0">
                 <a:solidFill>
                   <a:srgbClr val="003A63"/>
                 </a:solidFill>
@@ -14819,14 +14819,14 @@
               </a:rPr>
               <a:t>• AI-ready data require governance before they require a model.</a:t>
             </a:r>
-            <a:endParaRPr lang="en-US" sz="2100" dirty="0"/>
-          </a:p>
-          <a:p>
-            <a:pPr indent="0" marL="0">
-              <a:buNone/>
-            </a:pPr>
-            <a:r>
-              <a:rPr lang="en-US" sz="2100" dirty="0">
+            <a:endParaRPr lang="en-US" sz="1920" dirty="0"/>
+          </a:p>
+          <a:p>
+            <a:pPr indent="0" marL="0">
+              <a:buNone/>
+            </a:pPr>
+            <a:r>
+              <a:rPr lang="en-US" sz="1920" dirty="0">
                 <a:solidFill>
                   <a:srgbClr val="003A63"/>
                 </a:solidFill>
@@ -14834,16 +14834,16 @@
                 <a:ea typeface="Aptos" pitchFamily="34" charset="-122"/>
                 <a:cs typeface="Aptos" pitchFamily="34" charset="-120"/>
               </a:rPr>
-              <a:t>• Data governance defines ownership, stewardship, metadata, permissible use, data quality.</a:t>
-            </a:r>
-            <a:endParaRPr lang="en-US" sz="2100" dirty="0"/>
-          </a:p>
-          <a:p>
-            <a:pPr indent="0" marL="0">
-              <a:buNone/>
-            </a:pPr>
-            <a:r>
-              <a:rPr lang="en-US" sz="2100" dirty="0">
+              <a:t>• Data governance defines ownership, stewardship, metadata, permissible use,.</a:t>
+            </a:r>
+            <a:endParaRPr lang="en-US" sz="1920" dirty="0"/>
+          </a:p>
+          <a:p>
+            <a:pPr indent="0" marL="0">
+              <a:buNone/>
+            </a:pPr>
+            <a:r>
+              <a:rPr lang="en-US" sz="1920" dirty="0">
                 <a:solidFill>
                   <a:srgbClr val="003A63"/>
                 </a:solidFill>
@@ -14851,9 +14851,9 @@
                 <a:ea typeface="Aptos" pitchFamily="34" charset="-122"/>
                 <a:cs typeface="Aptos" pitchFamily="34" charset="-120"/>
               </a:rPr>
-              <a:t>• This module helps learners connect governance practices to safe AI use across surveillance,.</a:t>
-            </a:r>
-            <a:endParaRPr lang="en-US" sz="2100" dirty="0"/>
+              <a:t>• This module helps learners connect governance practices to safe AI use.</a:t>
+            </a:r>
+            <a:endParaRPr lang="en-US" sz="1920" dirty="0"/>
           </a:p>
         </p:txBody>
       </p:sp>
@@ -14865,12 +14865,12 @@
         </p:nvSpPr>
         <p:spPr>
           <a:xfrm>
-            <a:off x="7635240" y="1325880"/>
-            <a:ext cx="3474720" cy="1207008"/>
+            <a:off x="7543800" y="1325880"/>
+            <a:ext cx="3611880" cy="1261872"/>
           </a:xfrm>
           <a:prstGeom prst="roundRect">
             <a:avLst>
-              <a:gd name="adj" fmla="val 9091"/>
+              <a:gd name="adj" fmla="val 8696"/>
             </a:avLst>
           </a:prstGeom>
           <a:solidFill>
@@ -14892,8 +14892,8 @@
         </p:nvSpPr>
         <p:spPr>
           <a:xfrm>
-            <a:off x="7799832" y="1472184"/>
-            <a:ext cx="3145536" cy="256032"/>
+            <a:off x="7708392" y="1453896"/>
+            <a:ext cx="3282696" cy="228600"/>
           </a:xfrm>
           <a:prstGeom prst="rect">
             <a:avLst/>
@@ -14909,7 +14909,7 @@
               <a:buNone/>
             </a:pPr>
             <a:r>
-              <a:rPr lang="en-US" sz="1300" b="1" dirty="0">
+              <a:rPr lang="en-US" sz="1220" b="1" dirty="0">
                 <a:solidFill>
                   <a:srgbClr val="0068B7"/>
                 </a:solidFill>
@@ -14919,7 +14919,7 @@
               </a:rPr>
               <a:t>Governance lens</a:t>
             </a:r>
-            <a:endParaRPr lang="en-US" sz="1300" dirty="0"/>
+            <a:endParaRPr lang="en-US" sz="1220" dirty="0"/>
           </a:p>
         </p:txBody>
       </p:sp>
@@ -14931,8 +14931,8 @@
         </p:nvSpPr>
         <p:spPr>
           <a:xfrm>
-            <a:off x="7799832" y="1801368"/>
-            <a:ext cx="3145536" cy="640080"/>
+            <a:off x="7708392" y="1764792"/>
+            <a:ext cx="3282696" cy="749808"/>
           </a:xfrm>
           <a:prstGeom prst="rect">
             <a:avLst/>
@@ -14950,7 +14950,7 @@
               <a:buNone/>
             </a:pPr>
             <a:r>
-              <a:rPr lang="en-US" sz="1320" dirty="0">
+              <a:rPr lang="en-US" sz="1220" dirty="0">
                 <a:solidFill>
                   <a:srgbClr val="17364A"/>
                 </a:solidFill>
@@ -14960,7 +14960,7 @@
               </a:rPr>
               <a:t>AI-ready data require governance before they require a model.</a:t>
             </a:r>
-            <a:endParaRPr lang="en-US" sz="1320" dirty="0"/>
+            <a:endParaRPr lang="en-US" sz="1220" dirty="0"/>
           </a:p>
         </p:txBody>
       </p:sp>
@@ -14972,12 +14972,12 @@
         </p:nvSpPr>
         <p:spPr>
           <a:xfrm>
-            <a:off x="7635240" y="2670048"/>
-            <a:ext cx="3474720" cy="1377086"/>
+            <a:off x="7543800" y="2724912"/>
+            <a:ext cx="3611880" cy="1527048"/>
           </a:xfrm>
           <a:prstGeom prst="roundRect">
             <a:avLst>
-              <a:gd name="adj" fmla="val 7968"/>
+              <a:gd name="adj" fmla="val 7186"/>
             </a:avLst>
           </a:prstGeom>
           <a:solidFill>
@@ -14999,24 +14999,26 @@
         </p:nvSpPr>
         <p:spPr>
           <a:xfrm>
-            <a:off x="7799832" y="2798064"/>
-            <a:ext cx="3145536" cy="237744"/>
-          </a:xfrm>
-          <a:prstGeom prst="rect">
-            <a:avLst/>
-          </a:prstGeom>
-          <a:noFill/>
-          <a:ln/>
-        </p:spPr>
-        <p:txBody>
-          <a:bodyPr wrap="square" lIns="0" tIns="0" rIns="0" bIns="0" rtlCol="0" anchor="ctr"/>
-          <a:lstStyle/>
-          <a:p>
-            <a:pPr indent="0" marL="0">
-              <a:buNone/>
-            </a:pPr>
-            <a:r>
-              <a:rPr lang="en-US" sz="1250" b="1" dirty="0">
+            <a:off x="7708392" y="2852928"/>
+            <a:ext cx="3282696" cy="219456"/>
+          </a:xfrm>
+          <a:prstGeom prst="rect">
+            <a:avLst/>
+          </a:prstGeom>
+          <a:noFill/>
+          <a:ln/>
+        </p:spPr>
+        <p:txBody>
+          <a:bodyPr wrap="square" lIns="0" tIns="0" rIns="0" bIns="0" rtlCol="0" anchor="ctr">
+            <a:normAutofit/>
+          </a:bodyPr>
+          <a:lstStyle/>
+          <a:p>
+            <a:pPr indent="0" marL="0">
+              <a:buNone/>
+            </a:pPr>
+            <a:r>
+              <a:rPr lang="en-US" sz="1160" b="1" dirty="0">
                 <a:solidFill>
                   <a:srgbClr val="0068B7"/>
                 </a:solidFill>
@@ -15026,7 +15028,7 @@
               </a:rPr>
               <a:t>Governance pathway</a:t>
             </a:r>
-            <a:endParaRPr lang="en-US" sz="1250" dirty="0"/>
+            <a:endParaRPr lang="en-US" sz="1160" dirty="0"/>
           </a:p>
         </p:txBody>
       </p:sp>
@@ -15038,7 +15040,7 @@
         </p:nvSpPr>
         <p:spPr>
           <a:xfrm>
-            <a:off x="8763000" y="3351276"/>
+            <a:off x="8717280" y="3406140"/>
             <a:ext cx="164592" cy="0"/>
           </a:xfrm>
           <a:prstGeom prst="line">
@@ -15061,8 +15063,8 @@
         </p:nvSpPr>
         <p:spPr>
           <a:xfrm>
-            <a:off x="7872984" y="3200400"/>
-            <a:ext cx="890016" cy="301752"/>
+            <a:off x="7781544" y="3255264"/>
+            <a:ext cx="935736" cy="301752"/>
           </a:xfrm>
           <a:prstGeom prst="roundRect">
             <a:avLst>
@@ -15088,8 +15090,8 @@
         </p:nvSpPr>
         <p:spPr>
           <a:xfrm>
-            <a:off x="7909560" y="3273552"/>
-            <a:ext cx="816864" cy="146304"/>
+            <a:off x="7818120" y="3328416"/>
+            <a:ext cx="862584" cy="146304"/>
           </a:xfrm>
           <a:prstGeom prst="rect">
             <a:avLst/>
@@ -15129,7 +15131,7 @@
         </p:nvSpPr>
         <p:spPr>
           <a:xfrm>
-            <a:off x="9817608" y="3351276"/>
+            <a:off x="9817608" y="3406140"/>
             <a:ext cx="164592" cy="0"/>
           </a:xfrm>
           <a:prstGeom prst="line">
@@ -15152,8 +15154,8 @@
         </p:nvSpPr>
         <p:spPr>
           <a:xfrm>
-            <a:off x="8927592" y="3200400"/>
-            <a:ext cx="890016" cy="301752"/>
+            <a:off x="8881872" y="3255264"/>
+            <a:ext cx="935736" cy="301752"/>
           </a:xfrm>
           <a:prstGeom prst="roundRect">
             <a:avLst>
@@ -15179,8 +15181,8 @@
         </p:nvSpPr>
         <p:spPr>
           <a:xfrm>
-            <a:off x="8964168" y="3273552"/>
-            <a:ext cx="816864" cy="146304"/>
+            <a:off x="8918448" y="3328416"/>
+            <a:ext cx="862584" cy="146304"/>
           </a:xfrm>
           <a:prstGeom prst="rect">
             <a:avLst/>
@@ -15220,8 +15222,8 @@
         </p:nvSpPr>
         <p:spPr>
           <a:xfrm>
-            <a:off x="9982200" y="3200400"/>
-            <a:ext cx="890016" cy="301752"/>
+            <a:off x="9982200" y="3255264"/>
+            <a:ext cx="935736" cy="301752"/>
           </a:xfrm>
           <a:prstGeom prst="roundRect">
             <a:avLst>
@@ -15247,8 +15249,8 @@
         </p:nvSpPr>
         <p:spPr>
           <a:xfrm>
-            <a:off x="10018776" y="3273552"/>
-            <a:ext cx="816864" cy="146304"/>
+            <a:off x="10018776" y="3328416"/>
+            <a:ext cx="862584" cy="146304"/>
           </a:xfrm>
           <a:prstGeom prst="rect">
             <a:avLst/>
@@ -15288,8 +15290,8 @@
         </p:nvSpPr>
         <p:spPr>
           <a:xfrm>
-            <a:off x="7854696" y="3694176"/>
-            <a:ext cx="3035808" cy="206654"/>
+            <a:off x="7763256" y="3749040"/>
+            <a:ext cx="3172968" cy="356616"/>
           </a:xfrm>
           <a:prstGeom prst="rect">
             <a:avLst/>
@@ -15307,7 +15309,7 @@
               <a:buNone/>
             </a:pPr>
             <a:r>
-              <a:rPr lang="en-US" sz="1120" dirty="0">
+              <a:rPr lang="en-US" sz="1040" dirty="0">
                 <a:solidFill>
                   <a:srgbClr val="17364A"/>
                 </a:solidFill>
@@ -15315,9 +15317,9 @@
                 <a:ea typeface="Aptos" pitchFamily="34" charset="-122"/>
                 <a:cs typeface="Aptos" pitchFamily="34" charset="-120"/>
               </a:rPr>
-              <a:t>A proposed AI use should move through documented review before it becomes an operational workflow.</a:t>
-            </a:r>
-            <a:endParaRPr lang="en-US" sz="1120" dirty="0"/>
+              <a:t>A proposed AI use should move through documented review before it.</a:t>
+            </a:r>
+            <a:endParaRPr lang="en-US" sz="1040" dirty="0"/>
           </a:p>
         </p:txBody>
       </p:sp>
@@ -15329,12 +15331,12 @@
         </p:nvSpPr>
         <p:spPr>
           <a:xfrm>
-            <a:off x="7635240" y="4184294"/>
-            <a:ext cx="3474720" cy="1466698"/>
+            <a:off x="7543800" y="4389120"/>
+            <a:ext cx="3611880" cy="1261872"/>
           </a:xfrm>
           <a:prstGeom prst="roundRect">
             <a:avLst>
-              <a:gd name="adj" fmla="val 7481"/>
+              <a:gd name="adj" fmla="val 8696"/>
             </a:avLst>
           </a:prstGeom>
           <a:solidFill>
@@ -15356,8 +15358,8 @@
         </p:nvSpPr>
         <p:spPr>
           <a:xfrm>
-            <a:off x="7799832" y="4330598"/>
-            <a:ext cx="3145536" cy="256032"/>
+            <a:off x="7708392" y="4517136"/>
+            <a:ext cx="3282696" cy="228600"/>
           </a:xfrm>
           <a:prstGeom prst="rect">
             <a:avLst/>
@@ -15373,7 +15375,7 @@
               <a:buNone/>
             </a:pPr>
             <a:r>
-              <a:rPr lang="en-US" sz="1300" b="1" dirty="0">
+              <a:rPr lang="en-US" sz="1220" b="1" dirty="0">
                 <a:solidFill>
                   <a:srgbClr val="0068B7"/>
                 </a:solidFill>
@@ -15383,7 +15385,7 @@
               </a:rPr>
               <a:t>What to document</a:t>
             </a:r>
-            <a:endParaRPr lang="en-US" sz="1300" dirty="0"/>
+            <a:endParaRPr lang="en-US" sz="1220" dirty="0"/>
           </a:p>
         </p:txBody>
       </p:sp>
@@ -15395,8 +15397,8 @@
         </p:nvSpPr>
         <p:spPr>
           <a:xfrm>
-            <a:off x="7799832" y="4659782"/>
-            <a:ext cx="3145536" cy="899770"/>
+            <a:off x="7708392" y="4828032"/>
+            <a:ext cx="3282696" cy="749808"/>
           </a:xfrm>
           <a:prstGeom prst="rect">
             <a:avLst/>
@@ -15414,7 +15416,7 @@
               <a:buNone/>
             </a:pPr>
             <a:r>
-              <a:rPr lang="en-US" sz="1320" dirty="0">
+              <a:rPr lang="en-US" sz="1220" dirty="0">
                 <a:solidFill>
                   <a:srgbClr val="17364A"/>
                 </a:solidFill>
@@ -15422,9 +15424,9 @@
                 <a:ea typeface="Aptos" pitchFamily="34" charset="-122"/>
                 <a:cs typeface="Aptos" pitchFamily="34" charset="-120"/>
               </a:rPr>
-              <a:t>Translate this concept into clear decision rights, review steps, documentation expectations, and escalation paths before an AI-supported workflow is approved.</a:t>
-            </a:r>
-            <a:endParaRPr lang="en-US" sz="1320" dirty="0"/>
+              <a:t>Translate this concept into clear decision rights, review steps, documentation.</a:t>
+            </a:r>
+            <a:endParaRPr lang="en-US" sz="1220" dirty="0"/>
           </a:p>
         </p:txBody>
       </p:sp>
@@ -15715,8 +15717,8 @@
         </p:nvSpPr>
         <p:spPr>
           <a:xfrm>
-            <a:off x="868680" y="1508760"/>
-            <a:ext cx="6309360" cy="4160520"/>
+            <a:off x="822960" y="1463040"/>
+            <a:ext cx="6565392" cy="4343400"/>
           </a:xfrm>
           <a:prstGeom prst="rect">
             <a:avLst/>
@@ -15734,7 +15736,7 @@
               <a:buNone/>
             </a:pPr>
             <a:r>
-              <a:rPr lang="en-US" sz="2100" dirty="0">
+              <a:rPr lang="en-US" sz="1920" dirty="0">
                 <a:solidFill>
                   <a:srgbClr val="003A63"/>
                 </a:solidFill>
@@ -15742,16 +15744,16 @@
                 <a:ea typeface="Aptos" pitchFamily="34" charset="-122"/>
                 <a:cs typeface="Aptos" pitchFamily="34" charset="-120"/>
               </a:rPr>
-              <a:t>• This module provides national-level training guidance for public health agencies and partners.</a:t>
-            </a:r>
-            <a:endParaRPr lang="en-US" sz="2100" dirty="0"/>
-          </a:p>
-          <a:p>
-            <a:pPr indent="0" marL="0">
-              <a:buNone/>
-            </a:pPr>
-            <a:r>
-              <a:rPr lang="en-US" sz="2100" dirty="0">
+              <a:t>• This module provides national-level training guidance for public health.</a:t>
+            </a:r>
+            <a:endParaRPr lang="en-US" sz="1920" dirty="0"/>
+          </a:p>
+          <a:p>
+            <a:pPr indent="0" marL="0">
+              <a:buNone/>
+            </a:pPr>
+            <a:r>
+              <a:rPr lang="en-US" sz="1920" dirty="0">
                 <a:solidFill>
                   <a:srgbClr val="003A63"/>
                 </a:solidFill>
@@ -15759,16 +15761,16 @@
                 <a:ea typeface="Aptos" pitchFamily="34" charset="-122"/>
                 <a:cs typeface="Aptos" pitchFamily="34" charset="-120"/>
               </a:rPr>
-              <a:t>• It is not legal advice and does not replace review by agency legal counsel, privacy officers,.</a:t>
-            </a:r>
-            <a:endParaRPr lang="en-US" sz="2100" dirty="0"/>
-          </a:p>
-          <a:p>
-            <a:pPr indent="0" marL="0">
-              <a:buNone/>
-            </a:pPr>
-            <a:r>
-              <a:rPr lang="en-US" sz="2100" dirty="0">
+              <a:t>• It is not legal advice and does not replace review by agency legal counsel,.</a:t>
+            </a:r>
+            <a:endParaRPr lang="en-US" sz="1920" dirty="0"/>
+          </a:p>
+          <a:p>
+            <a:pPr indent="0" marL="0">
+              <a:buNone/>
+            </a:pPr>
+            <a:r>
+              <a:rPr lang="en-US" sz="1920" dirty="0">
                 <a:solidFill>
                   <a:srgbClr val="003A63"/>
                 </a:solidFill>
@@ -15776,9 +15778,9 @@
                 <a:ea typeface="Aptos" pitchFamily="34" charset="-122"/>
                 <a:cs typeface="Aptos" pitchFamily="34" charset="-120"/>
               </a:rPr>
-              <a:t>• Requirements may vary by state, locality, territory, Tribe, agency, funding source,.</a:t>
-            </a:r>
-            <a:endParaRPr lang="en-US" sz="2100" dirty="0"/>
+              <a:t>• Requirements may vary by state, locality, territory, Tribe, agency, funding.</a:t>
+            </a:r>
+            <a:endParaRPr lang="en-US" sz="1920" dirty="0"/>
           </a:p>
         </p:txBody>
       </p:sp>
@@ -15790,12 +15792,12 @@
         </p:nvSpPr>
         <p:spPr>
           <a:xfrm>
-            <a:off x="7635240" y="1325880"/>
-            <a:ext cx="3474720" cy="1207008"/>
+            <a:off x="7543800" y="1325880"/>
+            <a:ext cx="3611880" cy="1261872"/>
           </a:xfrm>
           <a:prstGeom prst="roundRect">
             <a:avLst>
-              <a:gd name="adj" fmla="val 9091"/>
+              <a:gd name="adj" fmla="val 8696"/>
             </a:avLst>
           </a:prstGeom>
           <a:solidFill>
@@ -15817,8 +15819,8 @@
         </p:nvSpPr>
         <p:spPr>
           <a:xfrm>
-            <a:off x="7799832" y="1472184"/>
-            <a:ext cx="3145536" cy="256032"/>
+            <a:off x="7708392" y="1453896"/>
+            <a:ext cx="3282696" cy="228600"/>
           </a:xfrm>
           <a:prstGeom prst="rect">
             <a:avLst/>
@@ -15834,7 +15836,7 @@
               <a:buNone/>
             </a:pPr>
             <a:r>
-              <a:rPr lang="en-US" sz="1300" b="1" dirty="0">
+              <a:rPr lang="en-US" sz="1220" b="1" dirty="0">
                 <a:solidFill>
                   <a:srgbClr val="0068B7"/>
                 </a:solidFill>
@@ -15844,7 +15846,7 @@
               </a:rPr>
               <a:t>Governance lens</a:t>
             </a:r>
-            <a:endParaRPr lang="en-US" sz="1300" dirty="0"/>
+            <a:endParaRPr lang="en-US" sz="1220" dirty="0"/>
           </a:p>
         </p:txBody>
       </p:sp>
@@ -15856,8 +15858,8 @@
         </p:nvSpPr>
         <p:spPr>
           <a:xfrm>
-            <a:off x="7799832" y="1801368"/>
-            <a:ext cx="3145536" cy="640080"/>
+            <a:off x="7708392" y="1764792"/>
+            <a:ext cx="3282696" cy="749808"/>
           </a:xfrm>
           <a:prstGeom prst="rect">
             <a:avLst/>
@@ -15875,7 +15877,7 @@
               <a:buNone/>
             </a:pPr>
             <a:r>
-              <a:rPr lang="en-US" sz="1320" dirty="0">
+              <a:rPr lang="en-US" sz="1220" dirty="0">
                 <a:solidFill>
                   <a:srgbClr val="17364A"/>
                 </a:solidFill>
@@ -15883,9 +15885,9 @@
                 <a:ea typeface="Aptos" pitchFamily="34" charset="-122"/>
                 <a:cs typeface="Aptos" pitchFamily="34" charset="-120"/>
               </a:rPr>
-              <a:t>This module provides national-level training guidance for public health agencies and.</a:t>
-            </a:r>
-            <a:endParaRPr lang="en-US" sz="1320" dirty="0"/>
+              <a:t>This module provides national-level training guidance for public health agencies.</a:t>
+            </a:r>
+            <a:endParaRPr lang="en-US" sz="1220" dirty="0"/>
           </a:p>
         </p:txBody>
       </p:sp>
@@ -15897,12 +15899,12 @@
         </p:nvSpPr>
         <p:spPr>
           <a:xfrm>
-            <a:off x="7635240" y="2670048"/>
-            <a:ext cx="3474720" cy="1377086"/>
+            <a:off x="7543800" y="2724912"/>
+            <a:ext cx="3611880" cy="1527048"/>
           </a:xfrm>
           <a:prstGeom prst="roundRect">
             <a:avLst>
-              <a:gd name="adj" fmla="val 7968"/>
+              <a:gd name="adj" fmla="val 7186"/>
             </a:avLst>
           </a:prstGeom>
           <a:solidFill>
@@ -15924,24 +15926,26 @@
         </p:nvSpPr>
         <p:spPr>
           <a:xfrm>
-            <a:off x="7799832" y="2798064"/>
-            <a:ext cx="3145536" cy="237744"/>
-          </a:xfrm>
-          <a:prstGeom prst="rect">
-            <a:avLst/>
-          </a:prstGeom>
-          <a:noFill/>
-          <a:ln/>
-        </p:spPr>
-        <p:txBody>
-          <a:bodyPr wrap="square" lIns="0" tIns="0" rIns="0" bIns="0" rtlCol="0" anchor="ctr"/>
-          <a:lstStyle/>
-          <a:p>
-            <a:pPr indent="0" marL="0">
-              <a:buNone/>
-            </a:pPr>
-            <a:r>
-              <a:rPr lang="en-US" sz="1250" b="1" dirty="0">
+            <a:off x="7708392" y="2852928"/>
+            <a:ext cx="3282696" cy="219456"/>
+          </a:xfrm>
+          <a:prstGeom prst="rect">
+            <a:avLst/>
+          </a:prstGeom>
+          <a:noFill/>
+          <a:ln/>
+        </p:spPr>
+        <p:txBody>
+          <a:bodyPr wrap="square" lIns="0" tIns="0" rIns="0" bIns="0" rtlCol="0" anchor="ctr">
+            <a:normAutofit/>
+          </a:bodyPr>
+          <a:lstStyle/>
+          <a:p>
+            <a:pPr indent="0" marL="0">
+              <a:buNone/>
+            </a:pPr>
+            <a:r>
+              <a:rPr lang="en-US" sz="1160" b="1" dirty="0">
                 <a:solidFill>
                   <a:srgbClr val="0068B7"/>
                 </a:solidFill>
@@ -15951,7 +15955,7 @@
               </a:rPr>
               <a:t>Governance pathway</a:t>
             </a:r>
-            <a:endParaRPr lang="en-US" sz="1250" dirty="0"/>
+            <a:endParaRPr lang="en-US" sz="1160" dirty="0"/>
           </a:p>
         </p:txBody>
       </p:sp>
@@ -15963,7 +15967,7 @@
         </p:nvSpPr>
         <p:spPr>
           <a:xfrm>
-            <a:off x="8763000" y="3351276"/>
+            <a:off x="8717280" y="3406140"/>
             <a:ext cx="164592" cy="0"/>
           </a:xfrm>
           <a:prstGeom prst="line">
@@ -15986,8 +15990,8 @@
         </p:nvSpPr>
         <p:spPr>
           <a:xfrm>
-            <a:off x="7872984" y="3200400"/>
-            <a:ext cx="890016" cy="301752"/>
+            <a:off x="7781544" y="3255264"/>
+            <a:ext cx="935736" cy="301752"/>
           </a:xfrm>
           <a:prstGeom prst="roundRect">
             <a:avLst>
@@ -16013,8 +16017,8 @@
         </p:nvSpPr>
         <p:spPr>
           <a:xfrm>
-            <a:off x="7909560" y="3273552"/>
-            <a:ext cx="816864" cy="146304"/>
+            <a:off x="7818120" y="3328416"/>
+            <a:ext cx="862584" cy="146304"/>
           </a:xfrm>
           <a:prstGeom prst="rect">
             <a:avLst/>
@@ -16054,7 +16058,7 @@
         </p:nvSpPr>
         <p:spPr>
           <a:xfrm>
-            <a:off x="9817608" y="3351276"/>
+            <a:off x="9817608" y="3406140"/>
             <a:ext cx="164592" cy="0"/>
           </a:xfrm>
           <a:prstGeom prst="line">
@@ -16077,8 +16081,8 @@
         </p:nvSpPr>
         <p:spPr>
           <a:xfrm>
-            <a:off x="8927592" y="3200400"/>
-            <a:ext cx="890016" cy="301752"/>
+            <a:off x="8881872" y="3255264"/>
+            <a:ext cx="935736" cy="301752"/>
           </a:xfrm>
           <a:prstGeom prst="roundRect">
             <a:avLst>
@@ -16104,8 +16108,8 @@
         </p:nvSpPr>
         <p:spPr>
           <a:xfrm>
-            <a:off x="8964168" y="3273552"/>
-            <a:ext cx="816864" cy="146304"/>
+            <a:off x="8918448" y="3328416"/>
+            <a:ext cx="862584" cy="146304"/>
           </a:xfrm>
           <a:prstGeom prst="rect">
             <a:avLst/>
@@ -16145,8 +16149,8 @@
         </p:nvSpPr>
         <p:spPr>
           <a:xfrm>
-            <a:off x="9982200" y="3200400"/>
-            <a:ext cx="890016" cy="301752"/>
+            <a:off x="9982200" y="3255264"/>
+            <a:ext cx="935736" cy="301752"/>
           </a:xfrm>
           <a:prstGeom prst="roundRect">
             <a:avLst>
@@ -16172,8 +16176,8 @@
         </p:nvSpPr>
         <p:spPr>
           <a:xfrm>
-            <a:off x="10018776" y="3273552"/>
-            <a:ext cx="816864" cy="146304"/>
+            <a:off x="10018776" y="3328416"/>
+            <a:ext cx="862584" cy="146304"/>
           </a:xfrm>
           <a:prstGeom prst="rect">
             <a:avLst/>
@@ -16213,8 +16217,8 @@
         </p:nvSpPr>
         <p:spPr>
           <a:xfrm>
-            <a:off x="7854696" y="3694176"/>
-            <a:ext cx="3035808" cy="206654"/>
+            <a:off x="7763256" y="3749040"/>
+            <a:ext cx="3172968" cy="356616"/>
           </a:xfrm>
           <a:prstGeom prst="rect">
             <a:avLst/>
@@ -16232,7 +16236,7 @@
               <a:buNone/>
             </a:pPr>
             <a:r>
-              <a:rPr lang="en-US" sz="1120" dirty="0">
+              <a:rPr lang="en-US" sz="1040" dirty="0">
                 <a:solidFill>
                   <a:srgbClr val="17364A"/>
                 </a:solidFill>
@@ -16240,9 +16244,9 @@
                 <a:ea typeface="Aptos" pitchFamily="34" charset="-122"/>
                 <a:cs typeface="Aptos" pitchFamily="34" charset="-120"/>
               </a:rPr>
-              <a:t>A proposed AI use should move through documented review before it becomes an operational workflow.</a:t>
-            </a:r>
-            <a:endParaRPr lang="en-US" sz="1120" dirty="0"/>
+              <a:t>A proposed AI use should move through documented review before it.</a:t>
+            </a:r>
+            <a:endParaRPr lang="en-US" sz="1040" dirty="0"/>
           </a:p>
         </p:txBody>
       </p:sp>
@@ -16254,12 +16258,12 @@
         </p:nvSpPr>
         <p:spPr>
           <a:xfrm>
-            <a:off x="7635240" y="4184294"/>
-            <a:ext cx="3474720" cy="1466698"/>
+            <a:off x="7543800" y="4389120"/>
+            <a:ext cx="3611880" cy="1261872"/>
           </a:xfrm>
           <a:prstGeom prst="roundRect">
             <a:avLst>
-              <a:gd name="adj" fmla="val 7481"/>
+              <a:gd name="adj" fmla="val 8696"/>
             </a:avLst>
           </a:prstGeom>
           <a:solidFill>
@@ -16281,8 +16285,8 @@
         </p:nvSpPr>
         <p:spPr>
           <a:xfrm>
-            <a:off x="7799832" y="4330598"/>
-            <a:ext cx="3145536" cy="256032"/>
+            <a:off x="7708392" y="4517136"/>
+            <a:ext cx="3282696" cy="228600"/>
           </a:xfrm>
           <a:prstGeom prst="rect">
             <a:avLst/>
@@ -16298,7 +16302,7 @@
               <a:buNone/>
             </a:pPr>
             <a:r>
-              <a:rPr lang="en-US" sz="1300" b="1" dirty="0">
+              <a:rPr lang="en-US" sz="1220" b="1" dirty="0">
                 <a:solidFill>
                   <a:srgbClr val="0068B7"/>
                 </a:solidFill>
@@ -16308,7 +16312,7 @@
               </a:rPr>
               <a:t>What to document</a:t>
             </a:r>
-            <a:endParaRPr lang="en-US" sz="1300" dirty="0"/>
+            <a:endParaRPr lang="en-US" sz="1220" dirty="0"/>
           </a:p>
         </p:txBody>
       </p:sp>
@@ -16320,8 +16324,8 @@
         </p:nvSpPr>
         <p:spPr>
           <a:xfrm>
-            <a:off x="7799832" y="4659782"/>
-            <a:ext cx="3145536" cy="899770"/>
+            <a:off x="7708392" y="4828032"/>
+            <a:ext cx="3282696" cy="749808"/>
           </a:xfrm>
           <a:prstGeom prst="rect">
             <a:avLst/>
@@ -16339,7 +16343,7 @@
               <a:buNone/>
             </a:pPr>
             <a:r>
-              <a:rPr lang="en-US" sz="1320" dirty="0">
+              <a:rPr lang="en-US" sz="1220" dirty="0">
                 <a:solidFill>
                   <a:srgbClr val="17364A"/>
                 </a:solidFill>
@@ -16347,9 +16351,9 @@
                 <a:ea typeface="Aptos" pitchFamily="34" charset="-122"/>
                 <a:cs typeface="Aptos" pitchFamily="34" charset="-120"/>
               </a:rPr>
-              <a:t>Translate this concept into clear decision rights, review steps, documentation expectations, and escalation paths before an AI-supported workflow is approved.</a:t>
-            </a:r>
-            <a:endParaRPr lang="en-US" sz="1320" dirty="0"/>
+              <a:t>Translate this concept into clear decision rights, review steps, documentation.</a:t>
+            </a:r>
+            <a:endParaRPr lang="en-US" sz="1220" dirty="0"/>
           </a:p>
         </p:txBody>
       </p:sp>
@@ -16640,8 +16644,8 @@
         </p:nvSpPr>
         <p:spPr>
           <a:xfrm>
-            <a:off x="868680" y="1508760"/>
-            <a:ext cx="6309360" cy="4160520"/>
+            <a:off x="822960" y="1463040"/>
+            <a:ext cx="6565392" cy="4343400"/>
           </a:xfrm>
           <a:prstGeom prst="rect">
             <a:avLst/>
@@ -16659,7 +16663,7 @@
               <a:buNone/>
             </a:pPr>
             <a:r>
-              <a:rPr lang="en-US" sz="2100" dirty="0">
+              <a:rPr lang="en-US" sz="1920" dirty="0">
                 <a:solidFill>
                   <a:srgbClr val="003A63"/>
                 </a:solidFill>
@@ -16667,16 +16671,16 @@
                 <a:ea typeface="Aptos" pitchFamily="34" charset="-122"/>
                 <a:cs typeface="Aptos" pitchFamily="34" charset="-120"/>
               </a:rPr>
-              <a:t>• Data Governance for AI-Ready Public Health Data matters because AI systems are embedded in.</a:t>
-            </a:r>
-            <a:endParaRPr lang="en-US" sz="2100" dirty="0"/>
-          </a:p>
-          <a:p>
-            <a:pPr indent="0" marL="0">
-              <a:buNone/>
-            </a:pPr>
-            <a:r>
-              <a:rPr lang="en-US" sz="2100" dirty="0">
+              <a:t>• Data Governance for AI-Ready Public Health Data matters because AI systems.</a:t>
+            </a:r>
+            <a:endParaRPr lang="en-US" sz="1920" dirty="0"/>
+          </a:p>
+          <a:p>
+            <a:pPr indent="0" marL="0">
+              <a:buNone/>
+            </a:pPr>
+            <a:r>
+              <a:rPr lang="en-US" sz="1920" dirty="0">
                 <a:solidFill>
                   <a:srgbClr val="003A63"/>
                 </a:solidFill>
@@ -16684,16 +16688,16 @@
                 <a:ea typeface="Aptos" pitchFamily="34" charset="-122"/>
                 <a:cs typeface="Aptos" pitchFamily="34" charset="-120"/>
               </a:rPr>
-              <a:t>• The topic affects whether AI outputs are accurate, explainable, safe, equitable, secure, and.</a:t>
-            </a:r>
-            <a:endParaRPr lang="en-US" sz="2100" dirty="0"/>
-          </a:p>
-          <a:p>
-            <a:pPr indent="0" marL="0">
-              <a:buNone/>
-            </a:pPr>
-            <a:r>
-              <a:rPr lang="en-US" sz="2100" dirty="0">
+              <a:t>• The topic affects whether AI outputs are accurate, explainable, safe,.</a:t>
+            </a:r>
+            <a:endParaRPr lang="en-US" sz="1920" dirty="0"/>
+          </a:p>
+          <a:p>
+            <a:pPr indent="0" marL="0">
+              <a:buNone/>
+            </a:pPr>
+            <a:r>
+              <a:rPr lang="en-US" sz="1920" dirty="0">
                 <a:solidFill>
                   <a:srgbClr val="003A63"/>
                 </a:solidFill>
@@ -16701,9 +16705,9 @@
                 <a:ea typeface="Aptos" pitchFamily="34" charset="-122"/>
                 <a:cs typeface="Aptos" pitchFamily="34" charset="-120"/>
               </a:rPr>
-              <a:t>• Agencies that ignore this area may create tools that work in a demonstration but fail in.</a:t>
-            </a:r>
-            <a:endParaRPr lang="en-US" sz="2100" dirty="0"/>
+              <a:t>• Agencies that ignore this area may create tools that work in a demonstration.</a:t>
+            </a:r>
+            <a:endParaRPr lang="en-US" sz="1920" dirty="0"/>
           </a:p>
         </p:txBody>
       </p:sp>
@@ -16715,12 +16719,12 @@
         </p:nvSpPr>
         <p:spPr>
           <a:xfrm>
-            <a:off x="7635240" y="1325880"/>
-            <a:ext cx="3474720" cy="1255471"/>
+            <a:off x="7543800" y="1325880"/>
+            <a:ext cx="3611880" cy="1261872"/>
           </a:xfrm>
           <a:prstGeom prst="roundRect">
             <a:avLst>
-              <a:gd name="adj" fmla="val 8740"/>
+              <a:gd name="adj" fmla="val 8696"/>
             </a:avLst>
           </a:prstGeom>
           <a:solidFill>
@@ -16742,8 +16746,8 @@
         </p:nvSpPr>
         <p:spPr>
           <a:xfrm>
-            <a:off x="7799832" y="1472184"/>
-            <a:ext cx="3145536" cy="256032"/>
+            <a:off x="7708392" y="1453896"/>
+            <a:ext cx="3282696" cy="228600"/>
           </a:xfrm>
           <a:prstGeom prst="rect">
             <a:avLst/>
@@ -16759,7 +16763,7 @@
               <a:buNone/>
             </a:pPr>
             <a:r>
-              <a:rPr lang="en-US" sz="1300" b="1" dirty="0">
+              <a:rPr lang="en-US" sz="1220" b="1" dirty="0">
                 <a:solidFill>
                   <a:srgbClr val="0068B7"/>
                 </a:solidFill>
@@ -16769,7 +16773,7 @@
               </a:rPr>
               <a:t>Governance lens</a:t>
             </a:r>
-            <a:endParaRPr lang="en-US" sz="1300" dirty="0"/>
+            <a:endParaRPr lang="en-US" sz="1220" dirty="0"/>
           </a:p>
         </p:txBody>
       </p:sp>
@@ -16781,8 +16785,8 @@
         </p:nvSpPr>
         <p:spPr>
           <a:xfrm>
-            <a:off x="7799832" y="1801368"/>
-            <a:ext cx="3145536" cy="688543"/>
+            <a:off x="7708392" y="1764792"/>
+            <a:ext cx="3282696" cy="749808"/>
           </a:xfrm>
           <a:prstGeom prst="rect">
             <a:avLst/>
@@ -16800,7 +16804,7 @@
               <a:buNone/>
             </a:pPr>
             <a:r>
-              <a:rPr lang="en-US" sz="1320" dirty="0">
+              <a:rPr lang="en-US" sz="1220" dirty="0">
                 <a:solidFill>
                   <a:srgbClr val="17364A"/>
                 </a:solidFill>
@@ -16808,9 +16812,9 @@
                 <a:ea typeface="Aptos" pitchFamily="34" charset="-122"/>
                 <a:cs typeface="Aptos" pitchFamily="34" charset="-120"/>
               </a:rPr>
-              <a:t>Data Governance for AI-Ready Public Health Data matters because AI systems are embedded in public.</a:t>
-            </a:r>
-            <a:endParaRPr lang="en-US" sz="1320" dirty="0"/>
+              <a:t>Data Governance for AI-Ready Public Health Data matters because AI systems are.</a:t>
+            </a:r>
+            <a:endParaRPr lang="en-US" sz="1220" dirty="0"/>
           </a:p>
         </p:txBody>
       </p:sp>
@@ -16822,12 +16826,12 @@
         </p:nvSpPr>
         <p:spPr>
           <a:xfrm>
-            <a:off x="7635240" y="2718511"/>
-            <a:ext cx="3474720" cy="1328623"/>
+            <a:off x="7543800" y="2724912"/>
+            <a:ext cx="3611880" cy="1527048"/>
           </a:xfrm>
           <a:prstGeom prst="roundRect">
             <a:avLst>
-              <a:gd name="adj" fmla="val 8259"/>
+              <a:gd name="adj" fmla="val 7186"/>
             </a:avLst>
           </a:prstGeom>
           <a:solidFill>
@@ -16849,24 +16853,26 @@
         </p:nvSpPr>
         <p:spPr>
           <a:xfrm>
-            <a:off x="7799832" y="2846527"/>
-            <a:ext cx="3145536" cy="237744"/>
-          </a:xfrm>
-          <a:prstGeom prst="rect">
-            <a:avLst/>
-          </a:prstGeom>
-          <a:noFill/>
-          <a:ln/>
-        </p:spPr>
-        <p:txBody>
-          <a:bodyPr wrap="square" lIns="0" tIns="0" rIns="0" bIns="0" rtlCol="0" anchor="ctr"/>
-          <a:lstStyle/>
-          <a:p>
-            <a:pPr indent="0" marL="0">
-              <a:buNone/>
-            </a:pPr>
-            <a:r>
-              <a:rPr lang="en-US" sz="1250" b="1" dirty="0">
+            <a:off x="7708392" y="2852928"/>
+            <a:ext cx="3282696" cy="219456"/>
+          </a:xfrm>
+          <a:prstGeom prst="rect">
+            <a:avLst/>
+          </a:prstGeom>
+          <a:noFill/>
+          <a:ln/>
+        </p:spPr>
+        <p:txBody>
+          <a:bodyPr wrap="square" lIns="0" tIns="0" rIns="0" bIns="0" rtlCol="0" anchor="ctr">
+            <a:normAutofit/>
+          </a:bodyPr>
+          <a:lstStyle/>
+          <a:p>
+            <a:pPr indent="0" marL="0">
+              <a:buNone/>
+            </a:pPr>
+            <a:r>
+              <a:rPr lang="en-US" sz="1160" b="1" dirty="0">
                 <a:solidFill>
                   <a:srgbClr val="0068B7"/>
                 </a:solidFill>
@@ -16876,7 +16882,7 @@
               </a:rPr>
               <a:t>Governance pathway</a:t>
             </a:r>
-            <a:endParaRPr lang="en-US" sz="1250" dirty="0"/>
+            <a:endParaRPr lang="en-US" sz="1160" dirty="0"/>
           </a:p>
         </p:txBody>
       </p:sp>
@@ -16888,7 +16894,7 @@
         </p:nvSpPr>
         <p:spPr>
           <a:xfrm>
-            <a:off x="8763000" y="3399739"/>
+            <a:off x="8717280" y="3406140"/>
             <a:ext cx="164592" cy="0"/>
           </a:xfrm>
           <a:prstGeom prst="line">
@@ -16911,8 +16917,8 @@
         </p:nvSpPr>
         <p:spPr>
           <a:xfrm>
-            <a:off x="7872984" y="3248863"/>
-            <a:ext cx="890016" cy="301752"/>
+            <a:off x="7781544" y="3255264"/>
+            <a:ext cx="935736" cy="301752"/>
           </a:xfrm>
           <a:prstGeom prst="roundRect">
             <a:avLst>
@@ -16938,8 +16944,8 @@
         </p:nvSpPr>
         <p:spPr>
           <a:xfrm>
-            <a:off x="7909560" y="3322015"/>
-            <a:ext cx="816864" cy="146304"/>
+            <a:off x="7818120" y="3328416"/>
+            <a:ext cx="862584" cy="146304"/>
           </a:xfrm>
           <a:prstGeom prst="rect">
             <a:avLst/>
@@ -16979,7 +16985,7 @@
         </p:nvSpPr>
         <p:spPr>
           <a:xfrm>
-            <a:off x="9817608" y="3399739"/>
+            <a:off x="9817608" y="3406140"/>
             <a:ext cx="164592" cy="0"/>
           </a:xfrm>
           <a:prstGeom prst="line">
@@ -17002,8 +17008,8 @@
         </p:nvSpPr>
         <p:spPr>
           <a:xfrm>
-            <a:off x="8927592" y="3248863"/>
-            <a:ext cx="890016" cy="301752"/>
+            <a:off x="8881872" y="3255264"/>
+            <a:ext cx="935736" cy="301752"/>
           </a:xfrm>
           <a:prstGeom prst="roundRect">
             <a:avLst>
@@ -17029,8 +17035,8 @@
         </p:nvSpPr>
         <p:spPr>
           <a:xfrm>
-            <a:off x="8964168" y="3322015"/>
-            <a:ext cx="816864" cy="146304"/>
+            <a:off x="8918448" y="3328416"/>
+            <a:ext cx="862584" cy="146304"/>
           </a:xfrm>
           <a:prstGeom prst="rect">
             <a:avLst/>
@@ -17070,8 +17076,8 @@
         </p:nvSpPr>
         <p:spPr>
           <a:xfrm>
-            <a:off x="9982200" y="3248863"/>
-            <a:ext cx="890016" cy="301752"/>
+            <a:off x="9982200" y="3255264"/>
+            <a:ext cx="935736" cy="301752"/>
           </a:xfrm>
           <a:prstGeom prst="roundRect">
             <a:avLst>
@@ -17097,8 +17103,8 @@
         </p:nvSpPr>
         <p:spPr>
           <a:xfrm>
-            <a:off x="10018776" y="3322015"/>
-            <a:ext cx="816864" cy="146304"/>
+            <a:off x="10018776" y="3328416"/>
+            <a:ext cx="862584" cy="146304"/>
           </a:xfrm>
           <a:prstGeom prst="rect">
             <a:avLst/>
@@ -17138,8 +17144,8 @@
         </p:nvSpPr>
         <p:spPr>
           <a:xfrm>
-            <a:off x="7854696" y="3742639"/>
-            <a:ext cx="3035808" cy="158191"/>
+            <a:off x="7763256" y="3749040"/>
+            <a:ext cx="3172968" cy="356616"/>
           </a:xfrm>
           <a:prstGeom prst="rect">
             <a:avLst/>
@@ -17157,7 +17163,7 @@
               <a:buNone/>
             </a:pPr>
             <a:r>
-              <a:rPr lang="en-US" sz="1120" dirty="0">
+              <a:rPr lang="en-US" sz="1040" dirty="0">
                 <a:solidFill>
                   <a:srgbClr val="17364A"/>
                 </a:solidFill>
@@ -17165,9 +17171,9 @@
                 <a:ea typeface="Aptos" pitchFamily="34" charset="-122"/>
                 <a:cs typeface="Aptos" pitchFamily="34" charset="-120"/>
               </a:rPr>
-              <a:t>A proposed AI use should move through documented review before it becomes an operational workflow.</a:t>
-            </a:r>
-            <a:endParaRPr lang="en-US" sz="1120" dirty="0"/>
+              <a:t>A proposed AI use should move through documented review before it.</a:t>
+            </a:r>
+            <a:endParaRPr lang="en-US" sz="1040" dirty="0"/>
           </a:p>
         </p:txBody>
       </p:sp>
@@ -17179,12 +17185,12 @@
         </p:nvSpPr>
         <p:spPr>
           <a:xfrm>
-            <a:off x="7635240" y="4184294"/>
-            <a:ext cx="3474720" cy="1466698"/>
+            <a:off x="7543800" y="4389120"/>
+            <a:ext cx="3611880" cy="1261872"/>
           </a:xfrm>
           <a:prstGeom prst="roundRect">
             <a:avLst>
-              <a:gd name="adj" fmla="val 7481"/>
+              <a:gd name="adj" fmla="val 8696"/>
             </a:avLst>
           </a:prstGeom>
           <a:solidFill>
@@ -17206,8 +17212,8 @@
         </p:nvSpPr>
         <p:spPr>
           <a:xfrm>
-            <a:off x="7799832" y="4330598"/>
-            <a:ext cx="3145536" cy="256032"/>
+            <a:off x="7708392" y="4517136"/>
+            <a:ext cx="3282696" cy="228600"/>
           </a:xfrm>
           <a:prstGeom prst="rect">
             <a:avLst/>
@@ -17223,7 +17229,7 @@
               <a:buNone/>
             </a:pPr>
             <a:r>
-              <a:rPr lang="en-US" sz="1300" b="1" dirty="0">
+              <a:rPr lang="en-US" sz="1220" b="1" dirty="0">
                 <a:solidFill>
                   <a:srgbClr val="0068B7"/>
                 </a:solidFill>
@@ -17233,7 +17239,7 @@
               </a:rPr>
               <a:t>What to document</a:t>
             </a:r>
-            <a:endParaRPr lang="en-US" sz="1300" dirty="0"/>
+            <a:endParaRPr lang="en-US" sz="1220" dirty="0"/>
           </a:p>
         </p:txBody>
       </p:sp>
@@ -17245,8 +17251,8 @@
         </p:nvSpPr>
         <p:spPr>
           <a:xfrm>
-            <a:off x="7799832" y="4659782"/>
-            <a:ext cx="3145536" cy="899770"/>
+            <a:off x="7708392" y="4828032"/>
+            <a:ext cx="3282696" cy="749808"/>
           </a:xfrm>
           <a:prstGeom prst="rect">
             <a:avLst/>
@@ -17264,7 +17270,7 @@
               <a:buNone/>
             </a:pPr>
             <a:r>
-              <a:rPr lang="en-US" sz="1320" dirty="0">
+              <a:rPr lang="en-US" sz="1220" dirty="0">
                 <a:solidFill>
                   <a:srgbClr val="17364A"/>
                 </a:solidFill>
@@ -17272,9 +17278,9 @@
                 <a:ea typeface="Aptos" pitchFamily="34" charset="-122"/>
                 <a:cs typeface="Aptos" pitchFamily="34" charset="-120"/>
               </a:rPr>
-              <a:t>Translate this concept into clear decision rights, review steps, documentation expectations, and escalation paths before an AI-supported workflow is approved.</a:t>
-            </a:r>
-            <a:endParaRPr lang="en-US" sz="1320" dirty="0"/>
+              <a:t>Translate this concept into clear decision rights, review steps, documentation.</a:t>
+            </a:r>
+            <a:endParaRPr lang="en-US" sz="1220" dirty="0"/>
           </a:p>
         </p:txBody>
       </p:sp>

--- a/downloads/presentations/modules/gov-330.pptx
+++ b/downloads/presentations/modules/gov-330.pptx
@@ -10828,7 +10828,7 @@
                 <a:ea typeface="Aptos" pitchFamily="34" charset="-122"/>
                 <a:cs typeface="Aptos" pitchFamily="34" charset="-120"/>
               </a:rPr>
-              <a:t>• 1. What is the best reason to address data governance for ai-ready public.</a:t>
+              <a:t>1. What is the best reason to address data governance for ai-ready public.</a:t>
             </a:r>
             <a:endParaRPr lang="en-US" sz="1920" dirty="0"/>
           </a:p>
@@ -10845,7 +10845,7 @@
                 <a:ea typeface="Aptos" pitchFamily="34" charset="-122"/>
                 <a:cs typeface="Aptos" pitchFamily="34" charset="-120"/>
               </a:rPr>
-              <a:t>• 2. Which practice best supports responsible implementation?</a:t>
+              <a:t>2. Which practice best supports responsible implementation?</a:t>
             </a:r>
             <a:endParaRPr lang="en-US" sz="1920" dirty="0"/>
           </a:p>
@@ -10862,7 +10862,7 @@
                 <a:ea typeface="Aptos" pitchFamily="34" charset="-122"/>
                 <a:cs typeface="Aptos" pitchFamily="34" charset="-120"/>
               </a:rPr>
-              <a:t>• 3. Which statement best describes a common failure mode?</a:t>
+              <a:t>3. Which statement best describes a common failure mode?</a:t>
             </a:r>
             <a:endParaRPr lang="en-US" sz="1920" dirty="0"/>
           </a:p>
@@ -10969,7 +10969,7 @@
                 <a:ea typeface="Aptos" pitchFamily="34" charset="-122"/>
                 <a:cs typeface="Aptos" pitchFamily="34" charset="-120"/>
               </a:rPr>
-              <a:t>1. What is the best reason to address data governance for ai-ready public health.</a:t>
+              <a:t>What is the best reason to address data governance for ai-ready public health.</a:t>
             </a:r>
             <a:endParaRPr lang="en-US" sz="1220" dirty="0"/>
           </a:p>
@@ -11076,41 +11076,7 @@
                 <a:ea typeface="Aptos" pitchFamily="34" charset="-122"/>
                 <a:cs typeface="Aptos" pitchFamily="34" charset="-120"/>
               </a:rPr>
-              <a:t>1.</a:t>
-            </a:r>
-            <a:endParaRPr lang="en-US" sz="1140" dirty="0"/>
-          </a:p>
-          <a:p>
-            <a:pPr indent="0" marL="0">
-              <a:buNone/>
-            </a:pPr>
-            <a:r>
-              <a:rPr lang="en-US" sz="1140" dirty="0">
-                <a:solidFill>
-                  <a:srgbClr val="17364A"/>
-                </a:solidFill>
-                <a:latin typeface="Aptos" pitchFamily="34" charset="0"/>
-                <a:ea typeface="Aptos" pitchFamily="34" charset="-122"/>
-                <a:cs typeface="Aptos" pitchFamily="34" charset="-120"/>
-              </a:rPr>
               <a:t>What is the best reason to address data governance.</a:t>
-            </a:r>
-            <a:endParaRPr lang="en-US" sz="1140" dirty="0"/>
-          </a:p>
-          <a:p>
-            <a:pPr indent="0" marL="0">
-              <a:buNone/>
-            </a:pPr>
-            <a:r>
-              <a:rPr lang="en-US" sz="1140" dirty="0">
-                <a:solidFill>
-                  <a:srgbClr val="17364A"/>
-                </a:solidFill>
-                <a:latin typeface="Aptos" pitchFamily="34" charset="0"/>
-                <a:ea typeface="Aptos" pitchFamily="34" charset="-122"/>
-                <a:cs typeface="Aptos" pitchFamily="34" charset="-120"/>
-              </a:rPr>
-              <a:t>2.</a:t>
             </a:r>
             <a:endParaRPr lang="en-US" sz="1140" dirty="0"/>
           </a:p>
